--- a/assets/visual-reference/cps-layout-reference.pptx
+++ b/assets/visual-reference/cps-layout-reference.pptx
@@ -2,18 +2,20 @@
 <file path=ppt/presentation.xml><?xml version="1.0" encoding="utf-8"?>
 <p:presentation xmlns:p="http://schemas.openxmlformats.org/presentationml/2006/main">
   <p:sldMasterIdLst>
-    <p:sldMasterId xmlns:r="http://schemas.openxmlformats.org/officeDocument/2006/relationships" id="2147483648" r:id="Rd269ba1dc796482a"/>
+    <p:sldMasterId xmlns:r="http://schemas.openxmlformats.org/officeDocument/2006/relationships" id="2147483648" r:id="Rc18aa545c2a94a21"/>
   </p:sldMasterIdLst>
   <p:notesMasterIdLst>
-    <p:notesMasterId xmlns:r="http://schemas.openxmlformats.org/officeDocument/2006/relationships" r:id="R2cea4f6d921645b5"/>
+    <p:notesMasterId xmlns:r="http://schemas.openxmlformats.org/officeDocument/2006/relationships" r:id="Rcf7b84bf76f64ca9"/>
   </p:notesMasterIdLst>
   <p:sldIdLst>
-    <p:sldId xmlns:r="http://schemas.openxmlformats.org/officeDocument/2006/relationships" id="256" r:id="R4aeeedb97e054350"/>
-    <p:sldId xmlns:r="http://schemas.openxmlformats.org/officeDocument/2006/relationships" id="257" r:id="R4c83a93265194c71"/>
-    <p:sldId xmlns:r="http://schemas.openxmlformats.org/officeDocument/2006/relationships" id="258" r:id="Re7753f798db04fdc"/>
-    <p:sldId xmlns:r="http://schemas.openxmlformats.org/officeDocument/2006/relationships" id="259" r:id="Rd154a2a420f042ae"/>
-    <p:sldId xmlns:r="http://schemas.openxmlformats.org/officeDocument/2006/relationships" id="260" r:id="Rb07608d8e27e4805"/>
-    <p:sldId xmlns:r="http://schemas.openxmlformats.org/officeDocument/2006/relationships" id="261" r:id="R7b0bdd5b5d434447"/>
+    <p:sldId xmlns:r="http://schemas.openxmlformats.org/officeDocument/2006/relationships" id="256" r:id="R943dcc4399094e7b"/>
+    <p:sldId xmlns:r="http://schemas.openxmlformats.org/officeDocument/2006/relationships" id="257" r:id="R16c23f193ddc4656"/>
+    <p:sldId xmlns:r="http://schemas.openxmlformats.org/officeDocument/2006/relationships" id="258" r:id="R6d10852720b74c6f"/>
+    <p:sldId xmlns:r="http://schemas.openxmlformats.org/officeDocument/2006/relationships" id="259" r:id="R9fdf8a7445cb4a5e"/>
+    <p:sldId xmlns:r="http://schemas.openxmlformats.org/officeDocument/2006/relationships" id="260" r:id="R0c7d9406ee874110"/>
+    <p:sldId xmlns:r="http://schemas.openxmlformats.org/officeDocument/2006/relationships" id="261" r:id="Rb7dd8bccdd9b41b7"/>
+    <p:sldId xmlns:r="http://schemas.openxmlformats.org/officeDocument/2006/relationships" id="262" r:id="R4dd1aab4351840af"/>
+    <p:sldId xmlns:r="http://schemas.openxmlformats.org/officeDocument/2006/relationships" id="263" r:id="R86b22827111544d9"/>
   </p:sldIdLst>
   <p:sldSz cx="9144000" cy="5143500"/>
   <p:notesSz cx="6858000" cy="9144000"/>
@@ -447,7 +449,7 @@
           <a:lstStyle xmlns:a="http://schemas.openxmlformats.org/drawingml/2006/main"/>
           <a:p xmlns:a="http://schemas.openxmlformats.org/drawingml/2006/main">
             <a:r>
-              <a:t>架空研究の教材。全数値は assets/example-source.org の合成データであり、実測値ではない。CPS LABの視覚スタイルと編集可能性を示す6種類のレイアウト見本。研究発表の推奨枚数・章配分ではない。</a:t>
+              <a:t>架空研究の教材。全数値は assets/example-source.org の合成データであり、実測値ではない。CPS LABの視覚スタイルと編集可能性を示す8種類のレイアウト見本。表紙と目次の素材枠は配置見本であり、実証写真や実動画ではない。研究発表の推奨枚数・章配分ではない。</a:t>
             </a:r>
           </a:p>
         </p:txBody>
@@ -517,7 +519,7 @@
           <a:lstStyle xmlns:a="http://schemas.openxmlformats.org/drawingml/2006/main"/>
           <a:p xmlns:a="http://schemas.openxmlformats.org/drawingml/2006/main">
             <a:r>
-              <a:t>架空研究の教材。全数値は assets/example-source.org の合成データであり、実測値ではない。CPS LABの視覚スタイルと編集可能性を示す6種類のレイアウト見本。研究発表の推奨枚数・章配分ではない。</a:t>
+              <a:t>中間発表型表紙の静止レイアウト見本。背景は素材枠で、動画も静止ポスターも未提供・未同梱。利用者の動画を指定された加工・無音・自動再生・ループ・次ページでの停止条件で埋め込む。対象アプリでの再生検証は別工程。本文のデザインはFIT型表紙を選んでも同じ。</a:t>
             </a:r>
           </a:p>
         </p:txBody>
@@ -587,7 +589,7 @@
           <a:lstStyle xmlns:a="http://schemas.openxmlformats.org/drawingml/2006/main"/>
           <a:p xmlns:a="http://schemas.openxmlformats.org/drawingml/2006/main">
             <a:r>
-              <a:t>架空研究の教材。全数値は assets/example-source.org の合成データであり、実測値ではない。CPS LABの視覚スタイルと編集可能性を示す6種類のレイアウト見本。研究発表の推奨枚数・章配分ではない。</a:t>
+              <a:t>架空研究の教材。全数値は assets/example-source.org の合成データであり、実測値ではない。CPS LABの視覚スタイルと編集可能性を示す8種類のレイアウト見本。表紙と目次の素材枠は配置見本であり、実証写真や実動画ではない。研究発表の推奨枚数・章配分ではない。</a:t>
             </a:r>
           </a:p>
         </p:txBody>
@@ -657,7 +659,7 @@
           <a:lstStyle xmlns:a="http://schemas.openxmlformats.org/drawingml/2006/main"/>
           <a:p xmlns:a="http://schemas.openxmlformats.org/drawingml/2006/main">
             <a:r>
-              <a:t>架空研究の教材。全数値は assets/example-source.org の合成データであり、実測値ではない。CPS LABの視覚スタイルと編集可能性を示す6種類のレイアウト見本。研究発表の推奨枚数・章配分ではない。</a:t>
+              <a:t>架空研究の教材。全数値は assets/example-source.org の合成データであり、実測値ではない。CPS LABの視覚スタイルと編集可能性を示す8種類のレイアウト見本。表紙と目次の素材枠は配置見本であり、実証写真や実動画ではない。研究発表の推奨枚数・章配分ではない。</a:t>
             </a:r>
           </a:p>
         </p:txBody>
@@ -727,7 +729,7 @@
           <a:lstStyle xmlns:a="http://schemas.openxmlformats.org/drawingml/2006/main"/>
           <a:p xmlns:a="http://schemas.openxmlformats.org/drawingml/2006/main">
             <a:r>
-              <a:t>架空研究の教材。全数値は assets/example-source.org の合成データであり、実測値ではない。CPS LABの視覚スタイルと編集可能性を示す6種類のレイアウト見本。研究発表の推奨枚数・章配分ではない。</a:t>
+              <a:t>架空研究の教材。全数値は assets/example-source.org の合成データであり、実測値ではない。CPS LABの視覚スタイルと編集可能性を示す8種類のレイアウト見本。表紙と目次の素材枠は配置見本であり、実証写真や実動画ではない。研究発表の推奨枚数・章配分ではない。</a:t>
             </a:r>
           </a:p>
         </p:txBody>
@@ -797,7 +799,147 @@
           <a:lstStyle xmlns:a="http://schemas.openxmlformats.org/drawingml/2006/main"/>
           <a:p xmlns:a="http://schemas.openxmlformats.org/drawingml/2006/main">
             <a:r>
-              <a:t>架空研究の教材。全数値は assets/example-source.org の合成データであり、実測値ではない。CPS LABの視覚スタイルと編集可能性を示す6種類のレイアウト見本。研究発表の推奨枚数・章配分ではない。</a:t>
+              <a:t>架空研究の教材。全数値は assets/example-source.org の合成データであり、実測値ではない。CPS LABの視覚スタイルと編集可能性を示す8種類のレイアウト見本。表紙と目次の素材枠は配置見本であり、実証写真や実動画ではない。研究発表の推奨枚数・章配分ではない。</a:t>
+            </a:r>
+          </a:p>
+        </p:txBody>
+      </p:sp>
+      <p:sp>
+        <p:nvSpPr>
+          <p:cNvPr id="4" name="Slide Number Placeholder 3"/>
+          <p:cNvSpPr>
+            <a:spLocks xmlns:a="http://schemas.openxmlformats.org/drawingml/2006/main" noGrp="1"/>
+          </p:cNvSpPr>
+          <p:nvPr>
+            <p:ph type="sldNum" idx="5"/>
+          </p:nvPr>
+        </p:nvSpPr>
+        <p:spPr/>
+        <p:txBody>
+          <a:bodyPr xmlns:a="http://schemas.openxmlformats.org/drawingml/2006/main"/>
+          <a:lstStyle xmlns:a="http://schemas.openxmlformats.org/drawingml/2006/main"/>
+          <a:p xmlns:a="http://schemas.openxmlformats.org/drawingml/2006/main"/>
+        </p:txBody>
+      </p:sp>
+    </p:spTree>
+  </p:cSld>
+  <p:clrMapOvr>
+    <a:masterClrMapping xmlns:a="http://schemas.openxmlformats.org/drawingml/2006/main"/>
+  </p:clrMapOvr>
+</p:notes>
+</file>
+
+<file path=ppt/notesSlides/notesSlide7.xml><?xml version="1.0" encoding="utf-8"?>
+<p:notes xmlns:p="http://schemas.openxmlformats.org/presentationml/2006/main">
+  <p:cSld>
+    <p:spTree>
+      <p:nvGrpSpPr>
+        <p:cNvPr id="1" name=""/>
+        <p:cNvGrpSpPr/>
+        <p:nvPr/>
+      </p:nvGrpSpPr>
+      <p:grpSpPr>
+        <a:xfrm xmlns:a="http://schemas.openxmlformats.org/drawingml/2006/main"/>
+      </p:grpSpPr>
+      <p:sp>
+        <p:nvSpPr>
+          <p:cNvPr id="2" name="Slide Image Placeholder 1"/>
+          <p:cNvSpPr>
+            <a:spLocks xmlns:a="http://schemas.openxmlformats.org/drawingml/2006/main" noGrp="1"/>
+          </p:cNvSpPr>
+          <p:nvPr>
+            <p:ph type="sldImg" idx="0"/>
+          </p:nvPr>
+        </p:nvSpPr>
+        <p:spPr/>
+      </p:sp>
+      <p:sp>
+        <p:nvSpPr>
+          <p:cNvPr id="3" name="Notes Placeholder 2"/>
+          <p:cNvSpPr>
+            <a:spLocks xmlns:a="http://schemas.openxmlformats.org/drawingml/2006/main" noGrp="1"/>
+          </p:cNvSpPr>
+          <p:nvPr>
+            <p:ph type="body" idx="1"/>
+          </p:nvPr>
+        </p:nvSpPr>
+        <p:spPr/>
+        <p:txBody>
+          <a:bodyPr xmlns:a="http://schemas.openxmlformats.org/drawingml/2006/main"/>
+          <a:lstStyle xmlns:a="http://schemas.openxmlformats.org/drawingml/2006/main"/>
+          <a:p xmlns:a="http://schemas.openxmlformats.org/drawingml/2006/main">
+            <a:r>
+              <a:t>架空研究の教材。全数値は assets/example-source.org の合成データであり、実測値ではない。CPS LABの視覚スタイルと編集可能性を示す8種類のレイアウト見本。表紙と目次の素材枠は配置見本であり、実証写真や実動画ではない。研究発表の推奨枚数・章配分ではない。</a:t>
+            </a:r>
+          </a:p>
+        </p:txBody>
+      </p:sp>
+      <p:sp>
+        <p:nvSpPr>
+          <p:cNvPr id="4" name="Slide Number Placeholder 3"/>
+          <p:cNvSpPr>
+            <a:spLocks xmlns:a="http://schemas.openxmlformats.org/drawingml/2006/main" noGrp="1"/>
+          </p:cNvSpPr>
+          <p:nvPr>
+            <p:ph type="sldNum" idx="5"/>
+          </p:nvPr>
+        </p:nvSpPr>
+        <p:spPr/>
+        <p:txBody>
+          <a:bodyPr xmlns:a="http://schemas.openxmlformats.org/drawingml/2006/main"/>
+          <a:lstStyle xmlns:a="http://schemas.openxmlformats.org/drawingml/2006/main"/>
+          <a:p xmlns:a="http://schemas.openxmlformats.org/drawingml/2006/main"/>
+        </p:txBody>
+      </p:sp>
+    </p:spTree>
+  </p:cSld>
+  <p:clrMapOvr>
+    <a:masterClrMapping xmlns:a="http://schemas.openxmlformats.org/drawingml/2006/main"/>
+  </p:clrMapOvr>
+</p:notes>
+</file>
+
+<file path=ppt/notesSlides/notesSlide8.xml><?xml version="1.0" encoding="utf-8"?>
+<p:notes xmlns:p="http://schemas.openxmlformats.org/presentationml/2006/main">
+  <p:cSld>
+    <p:spTree>
+      <p:nvGrpSpPr>
+        <p:cNvPr id="1" name=""/>
+        <p:cNvGrpSpPr/>
+        <p:nvPr/>
+      </p:nvGrpSpPr>
+      <p:grpSpPr>
+        <a:xfrm xmlns:a="http://schemas.openxmlformats.org/drawingml/2006/main"/>
+      </p:grpSpPr>
+      <p:sp>
+        <p:nvSpPr>
+          <p:cNvPr id="2" name="Slide Image Placeholder 1"/>
+          <p:cNvSpPr>
+            <a:spLocks xmlns:a="http://schemas.openxmlformats.org/drawingml/2006/main" noGrp="1"/>
+          </p:cNvSpPr>
+          <p:nvPr>
+            <p:ph type="sldImg" idx="0"/>
+          </p:nvPr>
+        </p:nvSpPr>
+        <p:spPr/>
+      </p:sp>
+      <p:sp>
+        <p:nvSpPr>
+          <p:cNvPr id="3" name="Notes Placeholder 2"/>
+          <p:cNvSpPr>
+            <a:spLocks xmlns:a="http://schemas.openxmlformats.org/drawingml/2006/main" noGrp="1"/>
+          </p:cNvSpPr>
+          <p:nvPr>
+            <p:ph type="body" idx="1"/>
+          </p:nvPr>
+        </p:nvSpPr>
+        <p:spPr/>
+        <p:txBody>
+          <a:bodyPr xmlns:a="http://schemas.openxmlformats.org/drawingml/2006/main"/>
+          <a:lstStyle xmlns:a="http://schemas.openxmlformats.org/drawingml/2006/main"/>
+          <a:p xmlns:a="http://schemas.openxmlformats.org/drawingml/2006/main">
+            <a:r>
+              <a:t>架空研究の教材。全数値は assets/example-source.org の合成データであり、実測値ではない。CPS LABの視覚スタイルと編集可能性を示す8種類のレイアウト見本。表紙と目次の素材枠は配置見本であり、実証写真や実動画ではない。研究発表の推奨枚数・章配分ではない。</a:t>
             </a:r>
           </a:p>
         </p:txBody>
@@ -865,7 +1007,7 @@
   </p:cSld>
   <p:clrMap bg1="lt1" tx1="dk1" bg2="lt2" tx2="dk2" accent1="accent1" accent2="accent2" accent3="accent3" accent4="accent4" accent5="accent5" accent6="accent6" hlink="hlink" folHlink="folHlink"/>
   <p:sldLayoutIdLst>
-    <p:sldLayoutId xmlns:r="http://schemas.openxmlformats.org/officeDocument/2006/relationships" id="2147483649" r:id="R5d028adc7dbc4549"/>
+    <p:sldLayoutId xmlns:r="http://schemas.openxmlformats.org/officeDocument/2006/relationships" id="2147483649" r:id="R90b1d23d514a4ad9"/>
   </p:sldLayoutIdLst>
   <p:txStyles>
     <p:titleStyle>
@@ -1818,7 +1960,7 @@
           <a:pPr>
             <a:defRPr sz="1400">
               <a:solidFill>
-                <a:srgbClr val="000000"/>
+                <a:srgbClr val="17202A"/>
               </a:solidFill>
               <a:latin typeface="Noto Sans JP"/>
               <a:ea typeface="Noto Sans JP"/>
@@ -1865,10 +2007,10 @@
       </p:grpSpPr>
       <p:sp>
         <p:nvSpPr>
-          <p:cNvPr id="9" name="footer-line">
-            <a:extLst xmlns:a="http://schemas.openxmlformats.org/drawingml/2006/main">
-              <a:ext uri="{FF2B5EF4-FFF2-40B4-BE49-F238E27FC236}">
-                <a16:creationId xmlns:a16="http://schemas.microsoft.com/office/drawing/2014/main" id="{8F357179-878E-452F-8384-2F739A229983}"/>
+          <p:cNvPr id="11" name="footer-line">
+            <a:extLst xmlns:a="http://schemas.openxmlformats.org/drawingml/2006/main">
+              <a:ext uri="{FF2B5EF4-FFF2-40B4-BE49-F238E27FC236}">
+                <a16:creationId xmlns:a16="http://schemas.microsoft.com/office/drawing/2014/main" id="{CB95B73E-2B84-4147-AE56-E21A8922967D}"/>
               </a:ext>
             </a:extLst>
           </p:cNvPr>
@@ -1896,14 +2038,14 @@
       </p:sp>
       <p:pic>
         <p:nvPicPr>
-          <p:cNvPr id="10" name=""/>
+          <p:cNvPr id="12" name=""/>
           <p:cNvPicPr>
             <a:picLocks xmlns:a="http://schemas.openxmlformats.org/drawingml/2006/main" noChangeAspect="1"/>
           </p:cNvPicPr>
           <p:nvPr/>
         </p:nvPicPr>
         <p:blipFill>
-          <a:blip xmlns:r="http://schemas.openxmlformats.org/officeDocument/2006/relationships" xmlns:a="http://schemas.openxmlformats.org/drawingml/2006/main" r:embed="R2e8270a9d7b64cf6"/>
+          <a:blip xmlns:r="http://schemas.openxmlformats.org/officeDocument/2006/relationships" xmlns:a="http://schemas.openxmlformats.org/drawingml/2006/main" r:embed="R2716f58cadda4149"/>
           <a:stretch xmlns:a="http://schemas.openxmlformats.org/drawingml/2006/main"/>
         </p:blipFill>
         <p:spPr>
@@ -1921,7 +2063,7 @@
           <p:cNvPr id="3" name="page">
             <a:extLst xmlns:a="http://schemas.openxmlformats.org/drawingml/2006/main">
               <a:ext uri="{FF2B5EF4-FFF2-40B4-BE49-F238E27FC236}">
-                <a16:creationId xmlns:a16="http://schemas.microsoft.com/office/drawing/2014/main" id="{043417D8-0F3D-4D6B-9D33-DBA342F748F1}"/>
+                <a16:creationId xmlns:a16="http://schemas.microsoft.com/office/drawing/2014/main" id="{3D0DA967-8776-43FA-BA4D-D6C959202435}"/>
               </a:ext>
             </a:extLst>
           </p:cNvPr>
@@ -1953,7 +2095,7 @@
             <a:pPr algn="r">
               <a:defRPr sz="1400" b="0">
                 <a:solidFill>
-                  <a:srgbClr val="000000"/>
+                  <a:srgbClr val="17202A"/>
                 </a:solidFill>
                 <a:latin typeface="Arial"/>
                 <a:ea typeface="Arial"/>
@@ -1963,7 +2105,7 @@
             <a:r>
               <a:rPr sz="1400" b="0">
                 <a:solidFill>
-                  <a:srgbClr val="000000"/>
+                  <a:srgbClr val="17202A"/>
                 </a:solidFill>
                 <a:latin typeface="Arial"/>
                 <a:ea typeface="Arial"/>
@@ -1979,7 +2121,7 @@
           <p:cNvPr id="4" name="fictional-disclosure">
             <a:extLst xmlns:a="http://schemas.openxmlformats.org/drawingml/2006/main">
               <a:ext uri="{FF2B5EF4-FFF2-40B4-BE49-F238E27FC236}">
-                <a16:creationId xmlns:a16="http://schemas.microsoft.com/office/drawing/2014/main" id="{A32A8AD2-34C3-4FC8-BFAC-63C2B92A08BB}"/>
+                <a16:creationId xmlns:a16="http://schemas.microsoft.com/office/drawing/2014/main" id="{577DD361-D153-44CF-80D8-BD6D7D05E288}"/>
               </a:ext>
             </a:extLst>
           </p:cNvPr>
@@ -2011,7 +2153,7 @@
             <a:pPr algn="l">
               <a:defRPr sz="1050" b="0">
                 <a:solidFill>
-                  <a:srgbClr val="666666"/>
+                  <a:srgbClr val="59636E"/>
                 </a:solidFill>
                 <a:latin typeface="Noto Sans JP"/>
                 <a:ea typeface="Noto Sans JP"/>
@@ -2021,7 +2163,7 @@
             <a:r>
               <a:rPr sz="1050" b="0">
                 <a:solidFill>
-                  <a:srgbClr val="666666"/>
+                  <a:srgbClr val="59636E"/>
                 </a:solidFill>
                 <a:latin typeface="Noto Sans JP"/>
                 <a:ea typeface="Noto Sans JP"/>
@@ -2037,7 +2179,7 @@
           <p:cNvPr id="5" name="venue">
             <a:extLst xmlns:a="http://schemas.openxmlformats.org/drawingml/2006/main">
               <a:ext uri="{FF2B5EF4-FFF2-40B4-BE49-F238E27FC236}">
-                <a16:creationId xmlns:a16="http://schemas.microsoft.com/office/drawing/2014/main" id="{B1F91693-4000-40D1-B47C-27D5AA9A7928}"/>
+                <a16:creationId xmlns:a16="http://schemas.microsoft.com/office/drawing/2014/main" id="{6DE985CE-1AA9-447B-BDCD-513DE1D7D2BB}"/>
               </a:ext>
             </a:extLst>
           </p:cNvPr>
@@ -2069,7 +2211,7 @@
             <a:pPr algn="l">
               <a:defRPr sz="1800" b="0">
                 <a:solidFill>
-                  <a:srgbClr val="000000"/>
+                  <a:srgbClr val="17202A"/>
                 </a:solidFill>
                 <a:latin typeface="Noto Sans JP"/>
                 <a:ea typeface="Noto Sans JP"/>
@@ -2079,7 +2221,7 @@
             <a:r>
               <a:rPr sz="1800" b="0">
                 <a:solidFill>
-                  <a:srgbClr val="000000"/>
+                  <a:srgbClr val="17202A"/>
                 </a:solidFill>
                 <a:latin typeface="Noto Sans JP"/>
                 <a:ea typeface="Noto Sans JP"/>
@@ -2095,7 +2237,7 @@
           <p:cNvPr id="6" name="topic">
             <a:extLst xmlns:a="http://schemas.openxmlformats.org/drawingml/2006/main">
               <a:ext uri="{FF2B5EF4-FFF2-40B4-BE49-F238E27FC236}">
-                <a16:creationId xmlns:a16="http://schemas.microsoft.com/office/drawing/2014/main" id="{8B95D187-6723-4548-BAC8-E3CEF5C5878D}"/>
+                <a16:creationId xmlns:a16="http://schemas.microsoft.com/office/drawing/2014/main" id="{227A8B3B-4772-427B-9B28-CB9ED5338450}"/>
               </a:ext>
             </a:extLst>
           </p:cNvPr>
@@ -2129,7 +2271,7 @@
             <a:pPr algn="ctr">
               <a:defRPr sz="2900" b="1">
                 <a:solidFill>
-                  <a:srgbClr val="000000"/>
+                  <a:srgbClr val="17202A"/>
                 </a:solidFill>
                 <a:latin typeface="Noto Sans JP"/>
                 <a:ea typeface="Noto Sans JP"/>
@@ -2139,7 +2281,7 @@
             <a:r>
               <a:rPr sz="2900" b="1">
                 <a:solidFill>
-                  <a:srgbClr val="000000"/>
+                  <a:srgbClr val="17202A"/>
                 </a:solidFill>
                 <a:latin typeface="Noto Sans JP"/>
                 <a:ea typeface="Noto Sans JP"/>
@@ -2152,7 +2294,7 @@
             <a:pPr algn="ctr">
               <a:defRPr sz="2900" b="1">
                 <a:solidFill>
-                  <a:srgbClr val="000000"/>
+                  <a:srgbClr val="17202A"/>
                 </a:solidFill>
                 <a:latin typeface="Noto Sans JP"/>
                 <a:ea typeface="Noto Sans JP"/>
@@ -2162,7 +2304,7 @@
             <a:r>
               <a:rPr sz="2900" b="1">
                 <a:solidFill>
-                  <a:srgbClr val="000000"/>
+                  <a:srgbClr val="17202A"/>
                 </a:solidFill>
                 <a:latin typeface="Noto Sans JP"/>
                 <a:ea typeface="Noto Sans JP"/>
@@ -2178,19 +2320,19 @@
           <p:cNvPr id="7" name="affiliation">
             <a:extLst xmlns:a="http://schemas.openxmlformats.org/drawingml/2006/main">
               <a:ext uri="{FF2B5EF4-FFF2-40B4-BE49-F238E27FC236}">
-                <a16:creationId xmlns:a16="http://schemas.microsoft.com/office/drawing/2014/main" id="{BF863106-D845-41DD-A022-C6E8F067ED7E}"/>
-              </a:ext>
-            </a:extLst>
-          </p:cNvPr>
-          <p:cNvSpPr>
-            <a:spLocks xmlns:a="http://schemas.openxmlformats.org/drawingml/2006/main" noGrp="1"/>
-          </p:cNvSpPr>
-          <p:nvPr/>
-        </p:nvSpPr>
-        <p:spPr>
-          <a:xfrm xmlns:a="http://schemas.openxmlformats.org/drawingml/2006/main">
-            <a:off x="1619250" y="2943225"/>
-            <a:ext cx="5905500" cy="381000"/>
+                <a16:creationId xmlns:a16="http://schemas.microsoft.com/office/drawing/2014/main" id="{1F8C97F8-F52A-4CF1-BDFE-C85C173765FD}"/>
+              </a:ext>
+            </a:extLst>
+          </p:cNvPr>
+          <p:cNvSpPr>
+            <a:spLocks xmlns:a="http://schemas.openxmlformats.org/drawingml/2006/main" noGrp="1"/>
+          </p:cNvSpPr>
+          <p:nvPr/>
+        </p:nvSpPr>
+        <p:spPr>
+          <a:xfrm xmlns:a="http://schemas.openxmlformats.org/drawingml/2006/main">
+            <a:off x="685800" y="2990850"/>
+            <a:ext cx="4857750" cy="457200"/>
           </a:xfrm>
           <a:prstGeom xmlns:a="http://schemas.openxmlformats.org/drawingml/2006/main" prst="rect">
             <a:avLst/>
@@ -2212,7 +2354,7 @@
             <a:pPr algn="ctr">
               <a:defRPr sz="1800" b="0">
                 <a:solidFill>
-                  <a:srgbClr val="000000"/>
+                  <a:srgbClr val="17202A"/>
                 </a:solidFill>
                 <a:latin typeface="Noto Sans JP"/>
                 <a:ea typeface="Noto Sans JP"/>
@@ -2222,7 +2364,7 @@
             <a:r>
               <a:rPr sz="1800" b="0">
                 <a:solidFill>
-                  <a:srgbClr val="000000"/>
+                  <a:srgbClr val="17202A"/>
                 </a:solidFill>
                 <a:latin typeface="Noto Sans JP"/>
                 <a:ea typeface="Noto Sans JP"/>
@@ -2238,19 +2380,19 @@
           <p:cNvPr id="8" name="author">
             <a:extLst xmlns:a="http://schemas.openxmlformats.org/drawingml/2006/main">
               <a:ext uri="{FF2B5EF4-FFF2-40B4-BE49-F238E27FC236}">
-                <a16:creationId xmlns:a16="http://schemas.microsoft.com/office/drawing/2014/main" id="{4C784FBB-0459-4D10-90F9-6EC5C684A5D5}"/>
-              </a:ext>
-            </a:extLst>
-          </p:cNvPr>
-          <p:cNvSpPr>
-            <a:spLocks xmlns:a="http://schemas.openxmlformats.org/drawingml/2006/main" noGrp="1"/>
-          </p:cNvSpPr>
-          <p:nvPr/>
-        </p:nvSpPr>
-        <p:spPr>
-          <a:xfrm xmlns:a="http://schemas.openxmlformats.org/drawingml/2006/main">
-            <a:off x="1619250" y="3448050"/>
-            <a:ext cx="5905500" cy="381000"/>
+                <a16:creationId xmlns:a16="http://schemas.microsoft.com/office/drawing/2014/main" id="{8380248D-7040-4425-AF25-5C59B3747096}"/>
+              </a:ext>
+            </a:extLst>
+          </p:cNvPr>
+          <p:cNvSpPr>
+            <a:spLocks xmlns:a="http://schemas.openxmlformats.org/drawingml/2006/main" noGrp="1"/>
+          </p:cNvSpPr>
+          <p:nvPr/>
+        </p:nvSpPr>
+        <p:spPr>
+          <a:xfrm xmlns:a="http://schemas.openxmlformats.org/drawingml/2006/main">
+            <a:off x="685800" y="3657600"/>
+            <a:ext cx="4857750" cy="457200"/>
           </a:xfrm>
           <a:prstGeom xmlns:a="http://schemas.openxmlformats.org/drawingml/2006/main" prst="rect">
             <a:avLst/>
@@ -2272,7 +2414,7 @@
             <a:pPr algn="ctr">
               <a:defRPr sz="1800" b="0">
                 <a:solidFill>
-                  <a:srgbClr val="000000"/>
+                  <a:srgbClr val="17202A"/>
                 </a:solidFill>
                 <a:latin typeface="Noto Sans JP"/>
                 <a:ea typeface="Noto Sans JP"/>
@@ -2282,13 +2424,127 @@
             <a:r>
               <a:rPr sz="1800" b="0">
                 <a:solidFill>
-                  <a:srgbClr val="000000"/>
+                  <a:srgbClr val="17202A"/>
                 </a:solidFill>
                 <a:latin typeface="Noto Sans JP"/>
                 <a:ea typeface="Noto Sans JP"/>
                 <a:cs typeface="Noto Sans JP"/>
               </a:rPr>
               <a:t>架空の発表者</a:t>
+            </a:r>
+          </a:p>
+        </p:txBody>
+      </p:sp>
+      <p:sp>
+        <p:nvSpPr>
+          <p:cNvPr id="9" name="research-photo-slot">
+            <a:extLst xmlns:a="http://schemas.openxmlformats.org/drawingml/2006/main">
+              <a:ext uri="{FF2B5EF4-FFF2-40B4-BE49-F238E27FC236}">
+                <a16:creationId xmlns:a16="http://schemas.microsoft.com/office/drawing/2014/main" id="{808B4461-CC79-4D8C-8FFB-A4EF2F6D5B04}"/>
+              </a:ext>
+            </a:extLst>
+          </p:cNvPr>
+          <p:cNvSpPr>
+            <a:spLocks xmlns:a="http://schemas.openxmlformats.org/drawingml/2006/main" noGrp="1"/>
+          </p:cNvSpPr>
+          <p:nvPr/>
+        </p:nvSpPr>
+        <p:spPr>
+          <a:xfrm xmlns:a="http://schemas.openxmlformats.org/drawingml/2006/main">
+            <a:off x="6000750" y="2800350"/>
+            <a:ext cx="2457450" cy="1524000"/>
+          </a:xfrm>
+          <a:prstGeom xmlns:a="http://schemas.openxmlformats.org/drawingml/2006/main" prst="rect">
+            <a:avLst/>
+          </a:prstGeom>
+          <a:solidFill xmlns:a="http://schemas.openxmlformats.org/drawingml/2006/main">
+            <a:srgbClr val="F3F5F1"/>
+          </a:solidFill>
+          <a:ln xmlns:a="http://schemas.openxmlformats.org/drawingml/2006/main" w="9525">
+            <a:solidFill>
+              <a:srgbClr val="9AA09A"/>
+            </a:solidFill>
+            <a:prstDash val="solid"/>
+          </a:ln>
+        </p:spPr>
+      </p:sp>
+      <p:sp>
+        <p:nvSpPr>
+          <p:cNvPr id="10" name="photo-slot-label">
+            <a:extLst xmlns:a="http://schemas.openxmlformats.org/drawingml/2006/main">
+              <a:ext uri="{FF2B5EF4-FFF2-40B4-BE49-F238E27FC236}">
+                <a16:creationId xmlns:a16="http://schemas.microsoft.com/office/drawing/2014/main" id="{9564AFCA-CAF9-49D4-BF15-B9F5FCC2CBF5}"/>
+              </a:ext>
+            </a:extLst>
+          </p:cNvPr>
+          <p:cNvSpPr>
+            <a:spLocks xmlns:a="http://schemas.openxmlformats.org/drawingml/2006/main" noGrp="1"/>
+          </p:cNvSpPr>
+          <p:nvPr/>
+        </p:nvSpPr>
+        <p:spPr>
+          <a:xfrm xmlns:a="http://schemas.openxmlformats.org/drawingml/2006/main">
+            <a:off x="6096000" y="3209925"/>
+            <a:ext cx="2266950" cy="704850"/>
+          </a:xfrm>
+          <a:prstGeom xmlns:a="http://schemas.openxmlformats.org/drawingml/2006/main" prst="rect">
+            <a:avLst/>
+          </a:prstGeom>
+          <a:noFill xmlns:a="http://schemas.openxmlformats.org/drawingml/2006/main"/>
+          <a:ln xmlns:a="http://schemas.openxmlformats.org/drawingml/2006/main" w="0">
+            <a:noFill/>
+            <a:prstDash val="solid"/>
+          </a:ln>
+        </p:spPr>
+        <p:txBody>
+          <a:bodyPr xmlns:a="http://schemas.openxmlformats.org/drawingml/2006/main" lIns="0" tIns="0" rIns="0" bIns="0" anchor="ctr">
+            <a:noAutofit/>
+          </a:bodyPr>
+          <a:lstStyle xmlns:a="http://schemas.openxmlformats.org/drawingml/2006/main"/>
+          <a:p xmlns:a="http://schemas.openxmlformats.org/drawingml/2006/main">
+            <a:pPr algn="ctr">
+              <a:defRPr sz="1800" b="0">
+                <a:solidFill>
+                  <a:srgbClr val="59636E"/>
+                </a:solidFill>
+                <a:latin typeface="Noto Sans JP"/>
+                <a:ea typeface="Noto Sans JP"/>
+                <a:cs typeface="Noto Sans JP"/>
+              </a:defRPr>
+            </a:pPr>
+            <a:r>
+              <a:rPr sz="1800" b="0">
+                <a:solidFill>
+                  <a:srgbClr val="59636E"/>
+                </a:solidFill>
+                <a:latin typeface="Noto Sans JP"/>
+                <a:ea typeface="Noto Sans JP"/>
+                <a:cs typeface="Noto Sans JP"/>
+              </a:rPr>
+              <a:t>研究対象の写真枠</a:t>
+            </a:r>
+          </a:p>
+          <a:p xmlns:a="http://schemas.openxmlformats.org/drawingml/2006/main">
+            <a:pPr algn="ctr">
+              <a:defRPr sz="1800" b="0">
+                <a:solidFill>
+                  <a:srgbClr val="59636E"/>
+                </a:solidFill>
+                <a:latin typeface="Noto Sans JP"/>
+                <a:ea typeface="Noto Sans JP"/>
+                <a:cs typeface="Noto Sans JP"/>
+              </a:defRPr>
+            </a:pPr>
+            <a:r>
+              <a:rPr sz="1800" b="0">
+                <a:solidFill>
+                  <a:srgbClr val="59636E"/>
+                </a:solidFill>
+                <a:latin typeface="Noto Sans JP"/>
+                <a:ea typeface="Noto Sans JP"/>
+                <a:cs typeface="Noto Sans JP"/>
+              </a:rPr>
+              <a:t>写真は未同梱</a:t>
             </a:r>
           </a:p>
         </p:txBody>
@@ -2296,7 +2552,7 @@
     </p:spTree>
     <p:extLst>
       <p:ext uri="{BB962C8B-B14F-4D97-AF65-F5344CB8AC3E}">
-        <p14:creationId xmlns:p14="http://schemas.microsoft.com/office/powerpoint/2010/main" val="508727456"/>
+        <p14:creationId xmlns:p14="http://schemas.microsoft.com/office/powerpoint/2010/main" val="2008804926"/>
       </p:ext>
     </p:extLst>
   </p:cSld>
@@ -2309,7 +2565,7 @@
     <p:bg>
       <p:bgPr>
         <a:solidFill xmlns:a="http://schemas.openxmlformats.org/drawingml/2006/main">
-          <a:srgbClr val="FFFFFF"/>
+          <a:srgbClr val="37424A"/>
         </a:solidFill>
       </p:bgPr>
     </p:bg>
@@ -2322,46 +2578,24 @@
       <p:grpSpPr>
         <a:xfrm xmlns:a="http://schemas.openxmlformats.org/drawingml/2006/main"/>
       </p:grpSpPr>
-      <p:pic>
-        <p:nvPicPr>
-          <p:cNvPr id="5" name=""/>
-          <p:cNvPicPr>
-            <a:picLocks xmlns:a="http://schemas.openxmlformats.org/drawingml/2006/main" noChangeAspect="1"/>
-          </p:cNvPicPr>
-          <p:nvPr/>
-        </p:nvPicPr>
-        <p:blipFill>
-          <a:blip xmlns:r="http://schemas.openxmlformats.org/officeDocument/2006/relationships" xmlns:a="http://schemas.openxmlformats.org/drawingml/2006/main" r:embed="R49992f185ab44915"/>
-          <a:stretch xmlns:a="http://schemas.openxmlformats.org/drawingml/2006/main"/>
-        </p:blipFill>
-        <p:spPr>
-          <a:xfrm xmlns:a="http://schemas.openxmlformats.org/drawingml/2006/main">
-            <a:off x="7697419" y="220370"/>
-            <a:ext cx="1107338" cy="310965"/>
-          </a:xfrm>
-          <a:prstGeom xmlns:a="http://schemas.openxmlformats.org/drawingml/2006/main" prst="rect">
-            <a:avLst/>
-          </a:prstGeom>
-        </p:spPr>
-      </p:pic>
-      <p:sp>
-        <p:nvSpPr>
-          <p:cNvPr id="2" name="page">
-            <a:extLst xmlns:a="http://schemas.openxmlformats.org/drawingml/2006/main">
-              <a:ext uri="{FF2B5EF4-FFF2-40B4-BE49-F238E27FC236}">
-                <a16:creationId xmlns:a16="http://schemas.microsoft.com/office/drawing/2014/main" id="{085D24AD-B68D-4F57-8C0B-1E4A99D620F1}"/>
-              </a:ext>
-            </a:extLst>
-          </p:cNvPr>
-          <p:cNvSpPr>
-            <a:spLocks xmlns:a="http://schemas.openxmlformats.org/drawingml/2006/main" noGrp="1"/>
-          </p:cNvSpPr>
-          <p:nvPr/>
-        </p:nvSpPr>
-        <p:spPr>
-          <a:xfrm xmlns:a="http://schemas.openxmlformats.org/drawingml/2006/main">
-            <a:off x="6801307" y="4767682"/>
-            <a:ext cx="2133295" cy="274320"/>
+      <p:sp>
+        <p:nvSpPr>
+          <p:cNvPr id="7" name="venue">
+            <a:extLst xmlns:a="http://schemas.openxmlformats.org/drawingml/2006/main">
+              <a:ext uri="{FF2B5EF4-FFF2-40B4-BE49-F238E27FC236}">
+                <a16:creationId xmlns:a16="http://schemas.microsoft.com/office/drawing/2014/main" id="{57FEA83C-DC93-46E7-A572-1CA406029DC1}"/>
+              </a:ext>
+            </a:extLst>
+          </p:cNvPr>
+          <p:cNvSpPr>
+            <a:spLocks xmlns:a="http://schemas.openxmlformats.org/drawingml/2006/main" noGrp="1"/>
+          </p:cNvSpPr>
+          <p:nvPr/>
+        </p:nvSpPr>
+        <p:spPr>
+          <a:xfrm xmlns:a="http://schemas.openxmlformats.org/drawingml/2006/main">
+            <a:off x="457200" y="276225"/>
+            <a:ext cx="8229600" cy="361950"/>
           </a:xfrm>
           <a:prstGeom xmlns:a="http://schemas.openxmlformats.org/drawingml/2006/main" prst="rect">
             <a:avLst/>
@@ -2378,48 +2612,48 @@
           </a:bodyPr>
           <a:lstStyle xmlns:a="http://schemas.openxmlformats.org/drawingml/2006/main"/>
           <a:p xmlns:a="http://schemas.openxmlformats.org/drawingml/2006/main">
-            <a:pPr algn="r">
-              <a:defRPr sz="1400" b="0">
-                <a:solidFill>
-                  <a:srgbClr val="000000"/>
-                </a:solidFill>
-                <a:latin typeface="Arial"/>
-                <a:ea typeface="Arial"/>
-                <a:cs typeface="Arial"/>
+            <a:pPr algn="ctr">
+              <a:defRPr sz="1800" b="0">
+                <a:solidFill>
+                  <a:srgbClr val="FFFFFF"/>
+                </a:solidFill>
+                <a:latin typeface="Noto Sans JP"/>
+                <a:ea typeface="Noto Sans JP"/>
+                <a:cs typeface="Noto Sans JP"/>
               </a:defRPr>
             </a:pPr>
             <a:r>
-              <a:rPr sz="1400" b="0">
-                <a:solidFill>
-                  <a:srgbClr val="000000"/>
-                </a:solidFill>
-                <a:latin typeface="Arial"/>
-                <a:ea typeface="Arial"/>
-                <a:cs typeface="Arial"/>
+              <a:rPr sz="1800" b="0">
+                <a:solidFill>
+                  <a:srgbClr val="FFFFFF"/>
+                </a:solidFill>
+                <a:latin typeface="Noto Sans JP"/>
+                <a:ea typeface="Noto Sans JP"/>
+                <a:cs typeface="Noto Sans JP"/>
               </a:rPr>
-              <a:t>2</a:t>
-            </a:r>
-          </a:p>
-        </p:txBody>
-      </p:sp>
-      <p:sp>
-        <p:nvSpPr>
-          <p:cNvPr id="3" name="fictional-disclosure">
-            <a:extLst xmlns:a="http://schemas.openxmlformats.org/drawingml/2006/main">
-              <a:ext uri="{FF2B5EF4-FFF2-40B4-BE49-F238E27FC236}">
-                <a16:creationId xmlns:a16="http://schemas.microsoft.com/office/drawing/2014/main" id="{34C025F1-7070-448E-980D-9D80BBAB3AB1}"/>
-              </a:ext>
-            </a:extLst>
-          </p:cNvPr>
-          <p:cNvSpPr>
-            <a:spLocks xmlns:a="http://schemas.openxmlformats.org/drawingml/2006/main" noGrp="1"/>
-          </p:cNvSpPr>
-          <p:nvPr/>
-        </p:nvSpPr>
-        <p:spPr>
-          <a:xfrm xmlns:a="http://schemas.openxmlformats.org/drawingml/2006/main">
-            <a:off x="1428750" y="4772025"/>
-            <a:ext cx="4762500" cy="266700"/>
+              <a:t>研究発表の視覚作例</a:t>
+            </a:r>
+          </a:p>
+        </p:txBody>
+      </p:sp>
+      <p:sp>
+        <p:nvSpPr>
+          <p:cNvPr id="2" name="topic">
+            <a:extLst xmlns:a="http://schemas.openxmlformats.org/drawingml/2006/main">
+              <a:ext uri="{FF2B5EF4-FFF2-40B4-BE49-F238E27FC236}">
+                <a16:creationId xmlns:a16="http://schemas.microsoft.com/office/drawing/2014/main" id="{559551ED-FCFE-4C51-93E7-8A8FC99D459A}"/>
+              </a:ext>
+            </a:extLst>
+          </p:cNvPr>
+          <p:cNvSpPr>
+            <a:spLocks xmlns:a="http://schemas.openxmlformats.org/drawingml/2006/main" noGrp="1"/>
+          </p:cNvSpPr>
+          <p:nvPr/>
+        </p:nvSpPr>
+        <p:spPr>
+          <a:xfrm xmlns:a="http://schemas.openxmlformats.org/drawingml/2006/main">
+            <a:off x="571500" y="1352550"/>
+            <a:ext cx="8001000" cy="1143000"/>
           </a:xfrm>
           <a:prstGeom xmlns:a="http://schemas.openxmlformats.org/drawingml/2006/main" prst="rect">
             <a:avLst/>
@@ -2436,10 +2670,10 @@
           </a:bodyPr>
           <a:lstStyle xmlns:a="http://schemas.openxmlformats.org/drawingml/2006/main"/>
           <a:p xmlns:a="http://schemas.openxmlformats.org/drawingml/2006/main">
-            <a:pPr algn="l">
-              <a:defRPr sz="1050" b="0">
-                <a:solidFill>
-                  <a:srgbClr val="666666"/>
+            <a:pPr algn="ctr">
+              <a:defRPr sz="3000" b="1">
+                <a:solidFill>
+                  <a:srgbClr val="FFFFFF"/>
                 </a:solidFill>
                 <a:latin typeface="Noto Sans JP"/>
                 <a:ea typeface="Noto Sans JP"/>
@@ -2447,44 +2681,65 @@
               </a:defRPr>
             </a:pPr>
             <a:r>
-              <a:rPr sz="1050" b="0">
-                <a:solidFill>
-                  <a:srgbClr val="666666"/>
+              <a:rPr sz="3000" b="1">
+                <a:solidFill>
+                  <a:srgbClr val="FFFFFF"/>
                 </a:solidFill>
                 <a:latin typeface="Noto Sans JP"/>
                 <a:ea typeface="Noto Sans JP"/>
                 <a:cs typeface="Noto Sans JP"/>
               </a:rPr>
-              <a:t>架空作例・合成データ</a:t>
-            </a:r>
-          </a:p>
-        </p:txBody>
-      </p:sp>
-      <p:sp>
-        <p:nvSpPr>
-          <p:cNvPr id="4" name="chapter">
-            <a:extLst xmlns:a="http://schemas.openxmlformats.org/drawingml/2006/main">
-              <a:ext uri="{FF2B5EF4-FFF2-40B4-BE49-F238E27FC236}">
-                <a16:creationId xmlns:a16="http://schemas.microsoft.com/office/drawing/2014/main" id="{71EA15E1-147F-4230-9C51-85E512697275}"/>
-              </a:ext>
-            </a:extLst>
-          </p:cNvPr>
-          <p:cNvSpPr>
-            <a:spLocks xmlns:a="http://schemas.openxmlformats.org/drawingml/2006/main" noGrp="1"/>
-          </p:cNvSpPr>
-          <p:nvPr/>
-        </p:nvSpPr>
-        <p:spPr>
-          <a:xfrm xmlns:a="http://schemas.openxmlformats.org/drawingml/2006/main">
-            <a:off x="722376" y="3305556"/>
-            <a:ext cx="7772400" cy="1021385"/>
-          </a:xfrm>
-          <a:prstGeom xmlns:a="http://schemas.openxmlformats.org/drawingml/2006/main" prst="rect">
-            <a:avLst/>
-          </a:prstGeom>
-          <a:solidFill xmlns:a="http://schemas.openxmlformats.org/drawingml/2006/main">
-            <a:srgbClr val="9BBB59"/>
-          </a:solidFill>
+              <a:t>室内環境ログの記録間隔</a:t>
+            </a:r>
+          </a:p>
+          <a:p xmlns:a="http://schemas.openxmlformats.org/drawingml/2006/main">
+            <a:pPr algn="ctr">
+              <a:defRPr sz="3000" b="1">
+                <a:solidFill>
+                  <a:srgbClr val="FFFFFF"/>
+                </a:solidFill>
+                <a:latin typeface="Noto Sans JP"/>
+                <a:ea typeface="Noto Sans JP"/>
+                <a:cs typeface="Noto Sans JP"/>
+              </a:defRPr>
+            </a:pPr>
+            <a:r>
+              <a:rPr sz="3000" b="1">
+                <a:solidFill>
+                  <a:srgbClr val="FFFFFF"/>
+                </a:solidFill>
+                <a:latin typeface="Noto Sans JP"/>
+                <a:ea typeface="Noto Sans JP"/>
+                <a:cs typeface="Noto Sans JP"/>
+              </a:rPr>
+              <a:t>合成データを用いた予備検討</a:t>
+            </a:r>
+          </a:p>
+        </p:txBody>
+      </p:sp>
+      <p:sp>
+        <p:nvSpPr>
+          <p:cNvPr id="3" name="affiliation">
+            <a:extLst xmlns:a="http://schemas.openxmlformats.org/drawingml/2006/main">
+              <a:ext uri="{FF2B5EF4-FFF2-40B4-BE49-F238E27FC236}">
+                <a16:creationId xmlns:a16="http://schemas.microsoft.com/office/drawing/2014/main" id="{8A6FEB10-725A-4963-ADD6-89CFFC050E2E}"/>
+              </a:ext>
+            </a:extLst>
+          </p:cNvPr>
+          <p:cNvSpPr>
+            <a:spLocks xmlns:a="http://schemas.openxmlformats.org/drawingml/2006/main" noGrp="1"/>
+          </p:cNvSpPr>
+          <p:nvPr/>
+        </p:nvSpPr>
+        <p:spPr>
+          <a:xfrm xmlns:a="http://schemas.openxmlformats.org/drawingml/2006/main">
+            <a:off x="857250" y="2857500"/>
+            <a:ext cx="7429500" cy="419100"/>
+          </a:xfrm>
+          <a:prstGeom xmlns:a="http://schemas.openxmlformats.org/drawingml/2006/main" prst="rect">
+            <a:avLst/>
+          </a:prstGeom>
+          <a:noFill xmlns:a="http://schemas.openxmlformats.org/drawingml/2006/main"/>
           <a:ln xmlns:a="http://schemas.openxmlformats.org/drawingml/2006/main" w="0">
             <a:noFill/>
             <a:prstDash val="solid"/>
@@ -2497,9 +2752,9 @@
           <a:lstStyle xmlns:a="http://schemas.openxmlformats.org/drawingml/2006/main"/>
           <a:p xmlns:a="http://schemas.openxmlformats.org/drawingml/2006/main">
             <a:pPr algn="ctr">
-              <a:defRPr sz="4000" b="1">
-                <a:solidFill>
-                  <a:srgbClr val="000000"/>
+              <a:defRPr sz="1800" b="0">
+                <a:solidFill>
+                  <a:srgbClr val="FFFFFF"/>
                 </a:solidFill>
                 <a:latin typeface="Noto Sans JP"/>
                 <a:ea typeface="Noto Sans JP"/>
@@ -2507,15 +2762,189 @@
               </a:defRPr>
             </a:pPr>
             <a:r>
-              <a:rPr sz="4000" b="1">
-                <a:solidFill>
-                  <a:srgbClr val="000000"/>
+              <a:rPr sz="1800" b="0">
+                <a:solidFill>
+                  <a:srgbClr val="FFFFFF"/>
                 </a:solidFill>
                 <a:latin typeface="Noto Sans JP"/>
                 <a:ea typeface="Noto Sans JP"/>
                 <a:cs typeface="Noto Sans JP"/>
               </a:rPr>
-              <a:t>記録間隔の比較</a:t>
+              <a:t>CPS LAB スタイル見本</a:t>
+            </a:r>
+          </a:p>
+        </p:txBody>
+      </p:sp>
+      <p:sp>
+        <p:nvSpPr>
+          <p:cNvPr id="4" name="author">
+            <a:extLst xmlns:a="http://schemas.openxmlformats.org/drawingml/2006/main">
+              <a:ext uri="{FF2B5EF4-FFF2-40B4-BE49-F238E27FC236}">
+                <a16:creationId xmlns:a16="http://schemas.microsoft.com/office/drawing/2014/main" id="{266AE2F0-331B-4E57-AE98-1291250D0D4A}"/>
+              </a:ext>
+            </a:extLst>
+          </p:cNvPr>
+          <p:cNvSpPr>
+            <a:spLocks xmlns:a="http://schemas.openxmlformats.org/drawingml/2006/main" noGrp="1"/>
+          </p:cNvSpPr>
+          <p:nvPr/>
+        </p:nvSpPr>
+        <p:spPr>
+          <a:xfrm xmlns:a="http://schemas.openxmlformats.org/drawingml/2006/main">
+            <a:off x="857250" y="3438525"/>
+            <a:ext cx="7429500" cy="400050"/>
+          </a:xfrm>
+          <a:prstGeom xmlns:a="http://schemas.openxmlformats.org/drawingml/2006/main" prst="rect">
+            <a:avLst/>
+          </a:prstGeom>
+          <a:noFill xmlns:a="http://schemas.openxmlformats.org/drawingml/2006/main"/>
+          <a:ln xmlns:a="http://schemas.openxmlformats.org/drawingml/2006/main" w="0">
+            <a:noFill/>
+            <a:prstDash val="solid"/>
+          </a:ln>
+        </p:spPr>
+        <p:txBody>
+          <a:bodyPr xmlns:a="http://schemas.openxmlformats.org/drawingml/2006/main" lIns="0" tIns="0" rIns="0" bIns="0" anchor="ctr">
+            <a:noAutofit/>
+          </a:bodyPr>
+          <a:lstStyle xmlns:a="http://schemas.openxmlformats.org/drawingml/2006/main"/>
+          <a:p xmlns:a="http://schemas.openxmlformats.org/drawingml/2006/main">
+            <a:pPr algn="ctr">
+              <a:defRPr sz="1800" b="0">
+                <a:solidFill>
+                  <a:srgbClr val="FFFFFF"/>
+                </a:solidFill>
+                <a:latin typeface="Noto Sans JP"/>
+                <a:ea typeface="Noto Sans JP"/>
+                <a:cs typeface="Noto Sans JP"/>
+              </a:defRPr>
+            </a:pPr>
+            <a:r>
+              <a:rPr sz="1800" b="0">
+                <a:solidFill>
+                  <a:srgbClr val="FFFFFF"/>
+                </a:solidFill>
+                <a:latin typeface="Noto Sans JP"/>
+                <a:ea typeface="Noto Sans JP"/>
+                <a:cs typeface="Noto Sans JP"/>
+              </a:rPr>
+              <a:t>架空の発表者</a:t>
+            </a:r>
+          </a:p>
+        </p:txBody>
+      </p:sp>
+      <p:sp>
+        <p:nvSpPr>
+          <p:cNvPr id="5" name="media-placeholder">
+            <a:extLst xmlns:a="http://schemas.openxmlformats.org/drawingml/2006/main">
+              <a:ext uri="{FF2B5EF4-FFF2-40B4-BE49-F238E27FC236}">
+                <a16:creationId xmlns:a16="http://schemas.microsoft.com/office/drawing/2014/main" id="{0C953390-7DFD-4764-BE8A-4196891164BC}"/>
+              </a:ext>
+            </a:extLst>
+          </p:cNvPr>
+          <p:cNvSpPr>
+            <a:spLocks xmlns:a="http://schemas.openxmlformats.org/drawingml/2006/main" noGrp="1"/>
+          </p:cNvSpPr>
+          <p:nvPr/>
+        </p:nvSpPr>
+        <p:spPr>
+          <a:xfrm xmlns:a="http://schemas.openxmlformats.org/drawingml/2006/main">
+            <a:off x="457200" y="4286250"/>
+            <a:ext cx="8229600" cy="323850"/>
+          </a:xfrm>
+          <a:prstGeom xmlns:a="http://schemas.openxmlformats.org/drawingml/2006/main" prst="rect">
+            <a:avLst/>
+          </a:prstGeom>
+          <a:noFill xmlns:a="http://schemas.openxmlformats.org/drawingml/2006/main"/>
+          <a:ln xmlns:a="http://schemas.openxmlformats.org/drawingml/2006/main" w="0">
+            <a:noFill/>
+            <a:prstDash val="solid"/>
+          </a:ln>
+        </p:spPr>
+        <p:txBody>
+          <a:bodyPr xmlns:a="http://schemas.openxmlformats.org/drawingml/2006/main" lIns="0" tIns="0" rIns="0" bIns="0" anchor="ctr">
+            <a:noAutofit/>
+          </a:bodyPr>
+          <a:lstStyle xmlns:a="http://schemas.openxmlformats.org/drawingml/2006/main"/>
+          <a:p xmlns:a="http://schemas.openxmlformats.org/drawingml/2006/main">
+            <a:pPr algn="ctr">
+              <a:defRPr sz="1800" b="0">
+                <a:solidFill>
+                  <a:srgbClr val="FFFFFF"/>
+                </a:solidFill>
+                <a:latin typeface="Noto Sans JP"/>
+                <a:ea typeface="Noto Sans JP"/>
+                <a:cs typeface="Noto Sans JP"/>
+              </a:defRPr>
+            </a:pPr>
+            <a:r>
+              <a:rPr sz="1800" b="0">
+                <a:solidFill>
+                  <a:srgbClr val="FFFFFF"/>
+                </a:solidFill>
+                <a:latin typeface="Noto Sans JP"/>
+                <a:ea typeface="Noto Sans JP"/>
+                <a:cs typeface="Noto Sans JP"/>
+              </a:rPr>
+              <a:t>全面を動画・静止ポスターに置換する配置見本</a:t>
+            </a:r>
+          </a:p>
+        </p:txBody>
+      </p:sp>
+      <p:sp>
+        <p:nvSpPr>
+          <p:cNvPr id="6" name="fictional-disclosure">
+            <a:extLst xmlns:a="http://schemas.openxmlformats.org/drawingml/2006/main">
+              <a:ext uri="{FF2B5EF4-FFF2-40B4-BE49-F238E27FC236}">
+                <a16:creationId xmlns:a16="http://schemas.microsoft.com/office/drawing/2014/main" id="{482796F1-EB8F-402D-8484-56E87D0BAC95}"/>
+              </a:ext>
+            </a:extLst>
+          </p:cNvPr>
+          <p:cNvSpPr>
+            <a:spLocks xmlns:a="http://schemas.openxmlformats.org/drawingml/2006/main" noGrp="1"/>
+          </p:cNvSpPr>
+          <p:nvPr/>
+        </p:nvSpPr>
+        <p:spPr>
+          <a:xfrm xmlns:a="http://schemas.openxmlformats.org/drawingml/2006/main">
+            <a:off x="457200" y="4714875"/>
+            <a:ext cx="8229600" cy="247650"/>
+          </a:xfrm>
+          <a:prstGeom xmlns:a="http://schemas.openxmlformats.org/drawingml/2006/main" prst="rect">
+            <a:avLst/>
+          </a:prstGeom>
+          <a:noFill xmlns:a="http://schemas.openxmlformats.org/drawingml/2006/main"/>
+          <a:ln xmlns:a="http://schemas.openxmlformats.org/drawingml/2006/main" w="0">
+            <a:noFill/>
+            <a:prstDash val="solid"/>
+          </a:ln>
+        </p:spPr>
+        <p:txBody>
+          <a:bodyPr xmlns:a="http://schemas.openxmlformats.org/drawingml/2006/main" lIns="0" tIns="0" rIns="0" bIns="0" anchor="ctr">
+            <a:noAutofit/>
+          </a:bodyPr>
+          <a:lstStyle xmlns:a="http://schemas.openxmlformats.org/drawingml/2006/main"/>
+          <a:p xmlns:a="http://schemas.openxmlformats.org/drawingml/2006/main">
+            <a:pPr algn="ctr">
+              <a:defRPr sz="1200" b="0">
+                <a:solidFill>
+                  <a:srgbClr val="DDE2E5"/>
+                </a:solidFill>
+                <a:latin typeface="Noto Sans JP"/>
+                <a:ea typeface="Noto Sans JP"/>
+                <a:cs typeface="Noto Sans JP"/>
+              </a:defRPr>
+            </a:pPr>
+            <a:r>
+              <a:rPr sz="1200" b="0">
+                <a:solidFill>
+                  <a:srgbClr val="DDE2E5"/>
+                </a:solidFill>
+                <a:latin typeface="Noto Sans JP"/>
+                <a:ea typeface="Noto Sans JP"/>
+                <a:cs typeface="Noto Sans JP"/>
+              </a:rPr>
+              <a:t>架空作例／静止レイアウト／実動画は未同梱</a:t>
             </a:r>
           </a:p>
         </p:txBody>
@@ -2523,7 +2952,7 @@
     </p:spTree>
     <p:extLst>
       <p:ext uri="{BB962C8B-B14F-4D97-AF65-F5344CB8AC3E}">
-        <p14:creationId xmlns:p14="http://schemas.microsoft.com/office/powerpoint/2010/main" val="2146563486"/>
+        <p14:creationId xmlns:p14="http://schemas.microsoft.com/office/powerpoint/2010/main" val="1834029137"/>
       </p:ext>
     </p:extLst>
   </p:cSld>
@@ -2551,10 +2980,10 @@
       </p:grpSpPr>
       <p:sp>
         <p:nvSpPr>
-          <p:cNvPr id="44" name="footer-line">
-            <a:extLst xmlns:a="http://schemas.openxmlformats.org/drawingml/2006/main">
-              <a:ext uri="{FF2B5EF4-FFF2-40B4-BE49-F238E27FC236}">
-                <a16:creationId xmlns:a16="http://schemas.microsoft.com/office/drawing/2014/main" id="{19CFCB3C-38B6-4C57-A17E-9C189458918F}"/>
+          <p:cNvPr id="22" name="footer-line">
+            <a:extLst xmlns:a="http://schemas.openxmlformats.org/drawingml/2006/main">
+              <a:ext uri="{FF2B5EF4-FFF2-40B4-BE49-F238E27FC236}">
+                <a16:creationId xmlns:a16="http://schemas.microsoft.com/office/drawing/2014/main" id="{A0DBE7AB-4E8B-4F20-88FB-0155156651CF}"/>
               </a:ext>
             </a:extLst>
           </p:cNvPr>
@@ -2582,14 +3011,14 @@
       </p:sp>
       <p:pic>
         <p:nvPicPr>
-          <p:cNvPr id="45" name=""/>
+          <p:cNvPr id="23" name=""/>
           <p:cNvPicPr>
             <a:picLocks xmlns:a="http://schemas.openxmlformats.org/drawingml/2006/main" noChangeAspect="1"/>
           </p:cNvPicPr>
           <p:nvPr/>
         </p:nvPicPr>
         <p:blipFill>
-          <a:blip xmlns:r="http://schemas.openxmlformats.org/officeDocument/2006/relationships" xmlns:a="http://schemas.openxmlformats.org/drawingml/2006/main" r:embed="Raa44ba8fb2134889"/>
+          <a:blip xmlns:r="http://schemas.openxmlformats.org/officeDocument/2006/relationships" xmlns:a="http://schemas.openxmlformats.org/drawingml/2006/main" r:embed="R33580afb30754834"/>
           <a:stretch xmlns:a="http://schemas.openxmlformats.org/drawingml/2006/main"/>
         </p:blipFill>
         <p:spPr>
@@ -2607,7 +3036,7 @@
           <p:cNvPr id="3" name="page">
             <a:extLst xmlns:a="http://schemas.openxmlformats.org/drawingml/2006/main">
               <a:ext uri="{FF2B5EF4-FFF2-40B4-BE49-F238E27FC236}">
-                <a16:creationId xmlns:a16="http://schemas.microsoft.com/office/drawing/2014/main" id="{1187B9F6-6284-4777-BC74-8F0479FC3B29}"/>
+                <a16:creationId xmlns:a16="http://schemas.microsoft.com/office/drawing/2014/main" id="{53B5B50C-30F8-47F6-AC22-DC1A1B11F9B1}"/>
               </a:ext>
             </a:extLst>
           </p:cNvPr>
@@ -2639,7 +3068,7 @@
             <a:pPr algn="r">
               <a:defRPr sz="1400" b="0">
                 <a:solidFill>
-                  <a:srgbClr val="000000"/>
+                  <a:srgbClr val="17202A"/>
                 </a:solidFill>
                 <a:latin typeface="Arial"/>
                 <a:ea typeface="Arial"/>
@@ -2649,7 +3078,7 @@
             <a:r>
               <a:rPr sz="1400" b="0">
                 <a:solidFill>
-                  <a:srgbClr val="000000"/>
+                  <a:srgbClr val="17202A"/>
                 </a:solidFill>
                 <a:latin typeface="Arial"/>
                 <a:ea typeface="Arial"/>
@@ -2665,7 +3094,7 @@
           <p:cNvPr id="4" name="fictional-disclosure">
             <a:extLst xmlns:a="http://schemas.openxmlformats.org/drawingml/2006/main">
               <a:ext uri="{FF2B5EF4-FFF2-40B4-BE49-F238E27FC236}">
-                <a16:creationId xmlns:a16="http://schemas.microsoft.com/office/drawing/2014/main" id="{23DB5CBB-D0E8-4542-88CE-88E62EFF9F99}"/>
+                <a16:creationId xmlns:a16="http://schemas.microsoft.com/office/drawing/2014/main" id="{F82C15AF-0C53-494E-8878-DB2DDB09159A}"/>
               </a:ext>
             </a:extLst>
           </p:cNvPr>
@@ -2697,7 +3126,7 @@
             <a:pPr algn="l">
               <a:defRPr sz="1050" b="0">
                 <a:solidFill>
-                  <a:srgbClr val="666666"/>
+                  <a:srgbClr val="59636E"/>
                 </a:solidFill>
                 <a:latin typeface="Noto Sans JP"/>
                 <a:ea typeface="Noto Sans JP"/>
@@ -2707,7 +3136,7 @@
             <a:r>
               <a:rPr sz="1050" b="0">
                 <a:solidFill>
-                  <a:srgbClr val="666666"/>
+                  <a:srgbClr val="59636E"/>
                 </a:solidFill>
                 <a:latin typeface="Noto Sans JP"/>
                 <a:ea typeface="Noto Sans JP"/>
@@ -2723,19 +3152,19 @@
           <p:cNvPr id="5" name="title">
             <a:extLst xmlns:a="http://schemas.openxmlformats.org/drawingml/2006/main">
               <a:ext uri="{FF2B5EF4-FFF2-40B4-BE49-F238E27FC236}">
-                <a16:creationId xmlns:a16="http://schemas.microsoft.com/office/drawing/2014/main" id="{E0CD2627-3436-4438-8099-EEE79C41ED96}"/>
-              </a:ext>
-            </a:extLst>
-          </p:cNvPr>
-          <p:cNvSpPr>
-            <a:spLocks xmlns:a="http://schemas.openxmlformats.org/drawingml/2006/main" noGrp="1"/>
-          </p:cNvSpPr>
-          <p:nvPr/>
-        </p:nvSpPr>
-        <p:spPr>
-          <a:xfrm xmlns:a="http://schemas.openxmlformats.org/drawingml/2006/main">
-            <a:off x="257175" y="95250"/>
-            <a:ext cx="8572500" cy="514350"/>
+                <a16:creationId xmlns:a16="http://schemas.microsoft.com/office/drawing/2014/main" id="{DF31E601-1B2E-40B8-8FD7-310BCB90F5EF}"/>
+              </a:ext>
+            </a:extLst>
+          </p:cNvPr>
+          <p:cNvSpPr>
+            <a:spLocks xmlns:a="http://schemas.openxmlformats.org/drawingml/2006/main" noGrp="1"/>
+          </p:cNvSpPr>
+          <p:nvPr/>
+        </p:nvSpPr>
+        <p:spPr>
+          <a:xfrm xmlns:a="http://schemas.openxmlformats.org/drawingml/2006/main">
+            <a:off x="457200" y="109728"/>
+            <a:ext cx="8229600" cy="400050"/>
           </a:xfrm>
           <a:prstGeom xmlns:a="http://schemas.openxmlformats.org/drawingml/2006/main" prst="rect">
             <a:avLst/>
@@ -2755,7 +3184,7 @@
             <a:pPr algn="l">
               <a:defRPr sz="2700" b="1">
                 <a:solidFill>
-                  <a:srgbClr val="000000"/>
+                  <a:srgbClr val="17202A"/>
                 </a:solidFill>
                 <a:latin typeface="Noto Sans JP"/>
                 <a:ea typeface="Noto Sans JP"/>
@@ -2765,13 +3194,13 @@
             <a:r>
               <a:rPr sz="2700" b="1">
                 <a:solidFill>
-                  <a:srgbClr val="000000"/>
+                  <a:srgbClr val="17202A"/>
                 </a:solidFill>
                 <a:latin typeface="Noto Sans JP"/>
                 <a:ea typeface="Noto Sans JP"/>
                 <a:cs typeface="Noto Sans JP"/>
               </a:rPr>
-              <a:t>同じ入力の間引き</a:t>
+              <a:t>目次</a:t>
             </a:r>
           </a:p>
         </p:txBody>
@@ -2781,19 +3210,19 @@
           <p:cNvPr id="6" name="message">
             <a:extLst xmlns:a="http://schemas.openxmlformats.org/drawingml/2006/main">
               <a:ext uri="{FF2B5EF4-FFF2-40B4-BE49-F238E27FC236}">
-                <a16:creationId xmlns:a16="http://schemas.microsoft.com/office/drawing/2014/main" id="{5C137A1F-C697-42C4-B1CB-D7925A4B6A3D}"/>
-              </a:ext>
-            </a:extLst>
-          </p:cNvPr>
-          <p:cNvSpPr>
-            <a:spLocks xmlns:a="http://schemas.openxmlformats.org/drawingml/2006/main" noGrp="1"/>
-          </p:cNvSpPr>
-          <p:nvPr/>
-        </p:nvSpPr>
-        <p:spPr>
-          <a:xfrm xmlns:a="http://schemas.openxmlformats.org/drawingml/2006/main">
-            <a:off x="457200" y="819150"/>
-            <a:ext cx="8229600" cy="628650"/>
+                <a16:creationId xmlns:a16="http://schemas.microsoft.com/office/drawing/2014/main" id="{258BFC71-4F7E-45FA-B89F-1D811333B646}"/>
+              </a:ext>
+            </a:extLst>
+          </p:cNvPr>
+          <p:cNvSpPr>
+            <a:spLocks xmlns:a="http://schemas.openxmlformats.org/drawingml/2006/main" noGrp="1"/>
+          </p:cNvSpPr>
+          <p:nvPr/>
+        </p:nvSpPr>
+        <p:spPr>
+          <a:xfrm xmlns:a="http://schemas.openxmlformats.org/drawingml/2006/main">
+            <a:off x="457200" y="621792"/>
+            <a:ext cx="8229600" cy="694944"/>
           </a:xfrm>
           <a:prstGeom xmlns:a="http://schemas.openxmlformats.org/drawingml/2006/main" prst="rect">
             <a:avLst/>
@@ -2811,9 +3240,9 @@
           <a:lstStyle xmlns:a="http://schemas.openxmlformats.org/drawingml/2006/main"/>
           <a:p xmlns:a="http://schemas.openxmlformats.org/drawingml/2006/main">
             <a:pPr algn="l">
-              <a:defRPr sz="1900" b="1">
-                <a:solidFill>
-                  <a:srgbClr val="000000"/>
+              <a:defRPr sz="2300" b="1">
+                <a:solidFill>
+                  <a:srgbClr val="17202A"/>
                 </a:solidFill>
                 <a:latin typeface="Noto Sans JP"/>
                 <a:ea typeface="Noto Sans JP"/>
@@ -2821,37 +3250,37 @@
               </a:defRPr>
             </a:pPr>
             <a:r>
-              <a:rPr sz="1900" b="1">
-                <a:solidFill>
-                  <a:srgbClr val="000000"/>
+              <a:rPr sz="2300" b="1">
+                <a:solidFill>
+                  <a:srgbClr val="17202A"/>
                 </a:solidFill>
                 <a:latin typeface="Noto Sans JP"/>
                 <a:ea typeface="Noto Sans JP"/>
                 <a:cs typeface="Noto Sans JP"/>
               </a:rPr>
-              <a:t>全13点から、0・5・10分の3点だけを保持する</a:t>
-            </a:r>
-          </a:p>
-        </p:txBody>
-      </p:sp>
-      <p:sp>
-        <p:nvSpPr>
-          <p:cNvPr id="7" name="all-label">
-            <a:extLst xmlns:a="http://schemas.openxmlformats.org/drawingml/2006/main">
-              <a:ext uri="{FF2B5EF4-FFF2-40B4-BE49-F238E27FC236}">
-                <a16:creationId xmlns:a16="http://schemas.microsoft.com/office/drawing/2014/main" id="{C24C6F6A-7185-430B-B68A-78295A38A3E1}"/>
-              </a:ext>
-            </a:extLst>
-          </p:cNvPr>
-          <p:cNvSpPr>
-            <a:spLocks xmlns:a="http://schemas.openxmlformats.org/drawingml/2006/main" noGrp="1"/>
-          </p:cNvSpPr>
-          <p:nvPr/>
-        </p:nvSpPr>
-        <p:spPr>
-          <a:xfrm xmlns:a="http://schemas.openxmlformats.org/drawingml/2006/main">
-            <a:off x="457200" y="1714500"/>
-            <a:ext cx="2667000" cy="342900"/>
+              <a:t>研究のねらい、しくみ、ここまでの結果、今後の展望</a:t>
+            </a:r>
+          </a:p>
+        </p:txBody>
+      </p:sp>
+      <p:sp>
+        <p:nvSpPr>
+          <p:cNvPr id="7" name="toc-label-0">
+            <a:extLst xmlns:a="http://schemas.openxmlformats.org/drawingml/2006/main">
+              <a:ext uri="{FF2B5EF4-FFF2-40B4-BE49-F238E27FC236}">
+                <a16:creationId xmlns:a16="http://schemas.microsoft.com/office/drawing/2014/main" id="{82BE073A-A39D-4763-937D-E15F39ECBD72}"/>
+              </a:ext>
+            </a:extLst>
+          </p:cNvPr>
+          <p:cNvSpPr>
+            <a:spLocks xmlns:a="http://schemas.openxmlformats.org/drawingml/2006/main" noGrp="1"/>
+          </p:cNvSpPr>
+          <p:nvPr/>
+        </p:nvSpPr>
+        <p:spPr>
+          <a:xfrm xmlns:a="http://schemas.openxmlformats.org/drawingml/2006/main">
+            <a:off x="457200" y="1495425"/>
+            <a:ext cx="3886200" cy="352425"/>
           </a:xfrm>
           <a:prstGeom xmlns:a="http://schemas.openxmlformats.org/drawingml/2006/main" prst="rect">
             <a:avLst/>
@@ -2869,9 +3298,9 @@
           <a:lstStyle xmlns:a="http://schemas.openxmlformats.org/drawingml/2006/main"/>
           <a:p xmlns:a="http://schemas.openxmlformats.org/drawingml/2006/main">
             <a:pPr algn="l">
-              <a:defRPr sz="1800" b="1">
-                <a:solidFill>
-                  <a:srgbClr val="000000"/>
+              <a:defRPr sz="2100" b="1">
+                <a:solidFill>
+                  <a:srgbClr val="17202A"/>
                 </a:solidFill>
                 <a:latin typeface="Noto Sans JP"/>
                 <a:ea typeface="Noto Sans JP"/>
@@ -2879,37 +3308,70 @@
               </a:defRPr>
             </a:pPr>
             <a:r>
-              <a:rPr sz="1800" b="1">
-                <a:solidFill>
-                  <a:srgbClr val="000000"/>
+              <a:rPr sz="2100" b="1">
+                <a:solidFill>
+                  <a:srgbClr val="17202A"/>
                 </a:solidFill>
                 <a:latin typeface="Noto Sans JP"/>
                 <a:ea typeface="Noto Sans JP"/>
                 <a:cs typeface="Noto Sans JP"/>
               </a:rPr>
-              <a:t>1分間隔の入力</a:t>
-            </a:r>
-          </a:p>
-        </p:txBody>
-      </p:sp>
-      <p:sp>
-        <p:nvSpPr>
-          <p:cNvPr id="8" name="kept-label">
-            <a:extLst xmlns:a="http://schemas.openxmlformats.org/drawingml/2006/main">
-              <a:ext uri="{FF2B5EF4-FFF2-40B4-BE49-F238E27FC236}">
-                <a16:creationId xmlns:a16="http://schemas.microsoft.com/office/drawing/2014/main" id="{DDC64405-ECF1-4EE7-BA48-422DEEB9E32B}"/>
-              </a:ext>
-            </a:extLst>
-          </p:cNvPr>
-          <p:cNvSpPr>
-            <a:spLocks xmlns:a="http://schemas.openxmlformats.org/drawingml/2006/main" noGrp="1"/>
-          </p:cNvSpPr>
-          <p:nvPr/>
-        </p:nvSpPr>
-        <p:spPr>
-          <a:xfrm xmlns:a="http://schemas.openxmlformats.org/drawingml/2006/main">
-            <a:off x="457200" y="3095625"/>
-            <a:ext cx="2667000" cy="342900"/>
+              <a:t>01 研究のねらい</a:t>
+            </a:r>
+          </a:p>
+        </p:txBody>
+      </p:sp>
+      <p:sp>
+        <p:nvSpPr>
+          <p:cNvPr id="8" name="toc-image-slot-0">
+            <a:extLst xmlns:a="http://schemas.openxmlformats.org/drawingml/2006/main">
+              <a:ext uri="{FF2B5EF4-FFF2-40B4-BE49-F238E27FC236}">
+                <a16:creationId xmlns:a16="http://schemas.microsoft.com/office/drawing/2014/main" id="{73072A49-661E-47A3-B7EA-D9AA629767EF}"/>
+              </a:ext>
+            </a:extLst>
+          </p:cNvPr>
+          <p:cNvSpPr>
+            <a:spLocks xmlns:a="http://schemas.openxmlformats.org/drawingml/2006/main" noGrp="1"/>
+          </p:cNvSpPr>
+          <p:nvPr/>
+        </p:nvSpPr>
+        <p:spPr>
+          <a:xfrm xmlns:a="http://schemas.openxmlformats.org/drawingml/2006/main">
+            <a:off x="457200" y="1914525"/>
+            <a:ext cx="3886200" cy="838200"/>
+          </a:xfrm>
+          <a:prstGeom xmlns:a="http://schemas.openxmlformats.org/drawingml/2006/main" prst="rect">
+            <a:avLst/>
+          </a:prstGeom>
+          <a:solidFill xmlns:a="http://schemas.openxmlformats.org/drawingml/2006/main">
+            <a:srgbClr val="F3F5F1"/>
+          </a:solidFill>
+          <a:ln xmlns:a="http://schemas.openxmlformats.org/drawingml/2006/main" w="9525">
+            <a:solidFill>
+              <a:srgbClr val="B5BDB2"/>
+            </a:solidFill>
+            <a:prstDash val="solid"/>
+          </a:ln>
+        </p:spPr>
+      </p:sp>
+      <p:sp>
+        <p:nvSpPr>
+          <p:cNvPr id="9" name="toc-image-label-0">
+            <a:extLst xmlns:a="http://schemas.openxmlformats.org/drawingml/2006/main">
+              <a:ext uri="{FF2B5EF4-FFF2-40B4-BE49-F238E27FC236}">
+                <a16:creationId xmlns:a16="http://schemas.microsoft.com/office/drawing/2014/main" id="{B5655323-CD92-40F9-A580-9B89FBF9A1F0}"/>
+              </a:ext>
+            </a:extLst>
+          </p:cNvPr>
+          <p:cNvSpPr>
+            <a:spLocks xmlns:a="http://schemas.openxmlformats.org/drawingml/2006/main" noGrp="1"/>
+          </p:cNvSpPr>
+          <p:nvPr/>
+        </p:nvSpPr>
+        <p:spPr>
+          <a:xfrm xmlns:a="http://schemas.openxmlformats.org/drawingml/2006/main">
+            <a:off x="552450" y="2047875"/>
+            <a:ext cx="3695700" cy="476250"/>
           </a:xfrm>
           <a:prstGeom xmlns:a="http://schemas.openxmlformats.org/drawingml/2006/main" prst="rect">
             <a:avLst/>
@@ -2926,10 +3388,10 @@
           </a:bodyPr>
           <a:lstStyle xmlns:a="http://schemas.openxmlformats.org/drawingml/2006/main"/>
           <a:p xmlns:a="http://schemas.openxmlformats.org/drawingml/2006/main">
-            <a:pPr algn="l">
-              <a:defRPr sz="1800" b="1">
-                <a:solidFill>
-                  <a:srgbClr val="000000"/>
+            <a:pPr algn="ctr">
+              <a:defRPr sz="1800" b="0">
+                <a:solidFill>
+                  <a:srgbClr val="59636E"/>
                 </a:solidFill>
                 <a:latin typeface="Noto Sans JP"/>
                 <a:ea typeface="Noto Sans JP"/>
@@ -2937,68 +3399,37 @@
               </a:defRPr>
             </a:pPr>
             <a:r>
-              <a:rPr sz="1800" b="1">
-                <a:solidFill>
-                  <a:srgbClr val="000000"/>
+              <a:rPr sz="1800" b="0">
+                <a:solidFill>
+                  <a:srgbClr val="59636E"/>
                 </a:solidFill>
                 <a:latin typeface="Noto Sans JP"/>
                 <a:ea typeface="Noto Sans JP"/>
                 <a:cs typeface="Noto Sans JP"/>
               </a:rPr>
-              <a:t>5分間隔で保持</a:t>
-            </a:r>
-          </a:p>
-        </p:txBody>
-      </p:sp>
-      <p:sp>
-        <p:nvSpPr>
-          <p:cNvPr id="9" name="input-0">
-            <a:extLst xmlns:a="http://schemas.openxmlformats.org/drawingml/2006/main">
-              <a:ext uri="{FF2B5EF4-FFF2-40B4-BE49-F238E27FC236}">
-                <a16:creationId xmlns:a16="http://schemas.microsoft.com/office/drawing/2014/main" id="{43402561-F892-4F99-8B26-1E284F2F0A4E}"/>
-              </a:ext>
-            </a:extLst>
-          </p:cNvPr>
-          <p:cNvSpPr>
-            <a:spLocks xmlns:a="http://schemas.openxmlformats.org/drawingml/2006/main" noGrp="1"/>
-          </p:cNvSpPr>
-          <p:nvPr/>
-        </p:nvSpPr>
-        <p:spPr>
-          <a:xfrm xmlns:a="http://schemas.openxmlformats.org/drawingml/2006/main">
-            <a:off x="3238500" y="1885950"/>
-            <a:ext cx="171450" cy="171450"/>
-          </a:xfrm>
-          <a:prstGeom xmlns:a="http://schemas.openxmlformats.org/drawingml/2006/main" prst="ellipse">
-            <a:avLst/>
-          </a:prstGeom>
-          <a:solidFill xmlns:a="http://schemas.openxmlformats.org/drawingml/2006/main">
-            <a:srgbClr val="666666"/>
-          </a:solidFill>
-          <a:ln xmlns:a="http://schemas.openxmlformats.org/drawingml/2006/main" w="0">
-            <a:noFill/>
-            <a:prstDash val="solid"/>
-          </a:ln>
-        </p:spPr>
-      </p:sp>
-      <p:sp>
-        <p:nvSpPr>
-          <p:cNvPr id="10" name="minute-0">
-            <a:extLst xmlns:a="http://schemas.openxmlformats.org/drawingml/2006/main">
-              <a:ext uri="{FF2B5EF4-FFF2-40B4-BE49-F238E27FC236}">
-                <a16:creationId xmlns:a16="http://schemas.microsoft.com/office/drawing/2014/main" id="{0A43F9F0-32B5-4676-838A-28DD3D96F063}"/>
-              </a:ext>
-            </a:extLst>
-          </p:cNvPr>
-          <p:cNvSpPr>
-            <a:spLocks xmlns:a="http://schemas.openxmlformats.org/drawingml/2006/main" noGrp="1"/>
-          </p:cNvSpPr>
-          <p:nvPr/>
-        </p:nvSpPr>
-        <p:spPr>
-          <a:xfrm xmlns:a="http://schemas.openxmlformats.org/drawingml/2006/main">
-            <a:off x="3143250" y="1571625"/>
-            <a:ext cx="361950" cy="247650"/>
+              <a:t>利用場面の画像枠</a:t>
+            </a:r>
+          </a:p>
+        </p:txBody>
+      </p:sp>
+      <p:sp>
+        <p:nvSpPr>
+          <p:cNvPr id="10" name="toc-label-1">
+            <a:extLst xmlns:a="http://schemas.openxmlformats.org/drawingml/2006/main">
+              <a:ext uri="{FF2B5EF4-FFF2-40B4-BE49-F238E27FC236}">
+                <a16:creationId xmlns:a16="http://schemas.microsoft.com/office/drawing/2014/main" id="{D2F04E81-A7AB-43DC-A69A-CB32A670706B}"/>
+              </a:ext>
+            </a:extLst>
+          </p:cNvPr>
+          <p:cNvSpPr>
+            <a:spLocks xmlns:a="http://schemas.openxmlformats.org/drawingml/2006/main" noGrp="1"/>
+          </p:cNvSpPr>
+          <p:nvPr/>
+        </p:nvSpPr>
+        <p:spPr>
+          <a:xfrm xmlns:a="http://schemas.openxmlformats.org/drawingml/2006/main">
+            <a:off x="4800600" y="1495425"/>
+            <a:ext cx="3886200" cy="352425"/>
           </a:xfrm>
           <a:prstGeom xmlns:a="http://schemas.openxmlformats.org/drawingml/2006/main" prst="rect">
             <a:avLst/>
@@ -3015,10 +3446,10 @@
           </a:bodyPr>
           <a:lstStyle xmlns:a="http://schemas.openxmlformats.org/drawingml/2006/main"/>
           <a:p xmlns:a="http://schemas.openxmlformats.org/drawingml/2006/main">
-            <a:pPr algn="ctr">
-              <a:defRPr sz="1400" b="0">
-                <a:solidFill>
-                  <a:srgbClr val="666666"/>
+            <a:pPr algn="l">
+              <a:defRPr sz="2100" b="1">
+                <a:solidFill>
+                  <a:srgbClr val="17202A"/>
                 </a:solidFill>
                 <a:latin typeface="Noto Sans JP"/>
                 <a:ea typeface="Noto Sans JP"/>
@@ -3026,126 +3457,70 @@
               </a:defRPr>
             </a:pPr>
             <a:r>
-              <a:rPr sz="1400" b="0">
-                <a:solidFill>
-                  <a:srgbClr val="666666"/>
+              <a:rPr sz="2100" b="1">
+                <a:solidFill>
+                  <a:srgbClr val="17202A"/>
                 </a:solidFill>
                 <a:latin typeface="Noto Sans JP"/>
                 <a:ea typeface="Noto Sans JP"/>
                 <a:cs typeface="Noto Sans JP"/>
               </a:rPr>
-              <a:t>0</a:t>
-            </a:r>
-          </a:p>
-        </p:txBody>
-      </p:sp>
-      <p:sp>
-        <p:nvSpPr>
-          <p:cNvPr id="11" name="retained-0">
-            <a:extLst xmlns:a="http://schemas.openxmlformats.org/drawingml/2006/main">
-              <a:ext uri="{FF2B5EF4-FFF2-40B4-BE49-F238E27FC236}">
-                <a16:creationId xmlns:a16="http://schemas.microsoft.com/office/drawing/2014/main" id="{25346D07-B942-4A0C-B04A-2673EBF782FD}"/>
-              </a:ext>
-            </a:extLst>
-          </p:cNvPr>
-          <p:cNvSpPr>
-            <a:spLocks xmlns:a="http://schemas.openxmlformats.org/drawingml/2006/main" noGrp="1"/>
-          </p:cNvSpPr>
-          <p:nvPr/>
-        </p:nvSpPr>
-        <p:spPr>
-          <a:xfrm xmlns:a="http://schemas.openxmlformats.org/drawingml/2006/main">
-            <a:off x="3219450" y="3257550"/>
-            <a:ext cx="209550" cy="209550"/>
+              <a:t>02 しくみと評価方法</a:t>
+            </a:r>
+          </a:p>
+        </p:txBody>
+      </p:sp>
+      <p:sp>
+        <p:nvSpPr>
+          <p:cNvPr id="11" name="toc-image-slot-1">
+            <a:extLst xmlns:a="http://schemas.openxmlformats.org/drawingml/2006/main">
+              <a:ext uri="{FF2B5EF4-FFF2-40B4-BE49-F238E27FC236}">
+                <a16:creationId xmlns:a16="http://schemas.microsoft.com/office/drawing/2014/main" id="{3174FD5B-5186-4F3A-B420-83432668D8AC}"/>
+              </a:ext>
+            </a:extLst>
+          </p:cNvPr>
+          <p:cNvSpPr>
+            <a:spLocks xmlns:a="http://schemas.openxmlformats.org/drawingml/2006/main" noGrp="1"/>
+          </p:cNvSpPr>
+          <p:nvPr/>
+        </p:nvSpPr>
+        <p:spPr>
+          <a:xfrm xmlns:a="http://schemas.openxmlformats.org/drawingml/2006/main">
+            <a:off x="4800600" y="1914525"/>
+            <a:ext cx="3886200" cy="838200"/>
           </a:xfrm>
           <a:prstGeom xmlns:a="http://schemas.openxmlformats.org/drawingml/2006/main" prst="rect">
             <a:avLst/>
           </a:prstGeom>
           <a:solidFill xmlns:a="http://schemas.openxmlformats.org/drawingml/2006/main">
-            <a:srgbClr val="9BBB59"/>
+            <a:srgbClr val="F3F5F1"/>
           </a:solidFill>
-          <a:ln xmlns:a="http://schemas.openxmlformats.org/drawingml/2006/main" w="11430">
+          <a:ln xmlns:a="http://schemas.openxmlformats.org/drawingml/2006/main" w="9525">
             <a:solidFill>
-              <a:srgbClr val="000000"/>
+              <a:srgbClr val="B5BDB2"/>
             </a:solidFill>
             <a:prstDash val="solid"/>
           </a:ln>
         </p:spPr>
       </p:sp>
-      <p:cxnSp>
-        <p:nvCxnSpPr>
-          <p:cNvPr id="55" name=""/>
-          <p:cNvCxnSpPr>
-            <a:stCxn xmlns:a="http://schemas.openxmlformats.org/drawingml/2006/main" id="9" idx="4"/>
-            <a:endCxn xmlns:a="http://schemas.openxmlformats.org/drawingml/2006/main" id="11" idx="0"/>
-          </p:cNvCxnSpPr>
-          <p:nvPr/>
-        </p:nvCxnSpPr>
-        <p:spPr>
-          <a:xfrm xmlns:a="http://schemas.openxmlformats.org/drawingml/2006/main">
-            <a:off x="3324225" y="2057400"/>
-            <a:ext cx="0" cy="1200150"/>
-          </a:xfrm>
-          <a:prstGeom xmlns:a="http://schemas.openxmlformats.org/drawingml/2006/main" prst="straightConnector1">
-            <a:avLst/>
-          </a:prstGeom>
-          <a:ln xmlns:a="http://schemas.openxmlformats.org/drawingml/2006/main" w="11430">
-            <a:solidFill>
-              <a:srgbClr val="666666"/>
-            </a:solidFill>
-            <a:tailEnd type="triangle" w="sm" len="sm"/>
-          </a:ln>
-        </p:spPr>
-      </p:cxnSp>
-      <p:sp>
-        <p:nvSpPr>
-          <p:cNvPr id="13" name="input-1">
-            <a:extLst xmlns:a="http://schemas.openxmlformats.org/drawingml/2006/main">
-              <a:ext uri="{FF2B5EF4-FFF2-40B4-BE49-F238E27FC236}">
-                <a16:creationId xmlns:a16="http://schemas.microsoft.com/office/drawing/2014/main" id="{79C97F8E-5414-4943-BB31-DEC14B6A8283}"/>
-              </a:ext>
-            </a:extLst>
-          </p:cNvPr>
-          <p:cNvSpPr>
-            <a:spLocks xmlns:a="http://schemas.openxmlformats.org/drawingml/2006/main" noGrp="1"/>
-          </p:cNvSpPr>
-          <p:nvPr/>
-        </p:nvSpPr>
-        <p:spPr>
-          <a:xfrm xmlns:a="http://schemas.openxmlformats.org/drawingml/2006/main">
-            <a:off x="3638550" y="1885950"/>
-            <a:ext cx="171450" cy="171450"/>
-          </a:xfrm>
-          <a:prstGeom xmlns:a="http://schemas.openxmlformats.org/drawingml/2006/main" prst="ellipse">
-            <a:avLst/>
-          </a:prstGeom>
-          <a:solidFill xmlns:a="http://schemas.openxmlformats.org/drawingml/2006/main">
-            <a:srgbClr val="666666"/>
-          </a:solidFill>
-          <a:ln xmlns:a="http://schemas.openxmlformats.org/drawingml/2006/main" w="0">
-            <a:noFill/>
-            <a:prstDash val="solid"/>
-          </a:ln>
-        </p:spPr>
-      </p:sp>
-      <p:sp>
-        <p:nvSpPr>
-          <p:cNvPr id="14" name="minute-1">
-            <a:extLst xmlns:a="http://schemas.openxmlformats.org/drawingml/2006/main">
-              <a:ext uri="{FF2B5EF4-FFF2-40B4-BE49-F238E27FC236}">
-                <a16:creationId xmlns:a16="http://schemas.microsoft.com/office/drawing/2014/main" id="{8364F798-88E0-4C19-865F-FB6BC122523C}"/>
-              </a:ext>
-            </a:extLst>
-          </p:cNvPr>
-          <p:cNvSpPr>
-            <a:spLocks xmlns:a="http://schemas.openxmlformats.org/drawingml/2006/main" noGrp="1"/>
-          </p:cNvSpPr>
-          <p:nvPr/>
-        </p:nvSpPr>
-        <p:spPr>
-          <a:xfrm xmlns:a="http://schemas.openxmlformats.org/drawingml/2006/main">
-            <a:off x="3543300" y="1571625"/>
-            <a:ext cx="361950" cy="247650"/>
+      <p:sp>
+        <p:nvSpPr>
+          <p:cNvPr id="12" name="toc-image-label-1">
+            <a:extLst xmlns:a="http://schemas.openxmlformats.org/drawingml/2006/main">
+              <a:ext uri="{FF2B5EF4-FFF2-40B4-BE49-F238E27FC236}">
+                <a16:creationId xmlns:a16="http://schemas.microsoft.com/office/drawing/2014/main" id="{493E8544-C7FD-41BC-95C2-46E8CA2A6CDE}"/>
+              </a:ext>
+            </a:extLst>
+          </p:cNvPr>
+          <p:cNvSpPr>
+            <a:spLocks xmlns:a="http://schemas.openxmlformats.org/drawingml/2006/main" noGrp="1"/>
+          </p:cNvSpPr>
+          <p:nvPr/>
+        </p:nvSpPr>
+        <p:spPr>
+          <a:xfrm xmlns:a="http://schemas.openxmlformats.org/drawingml/2006/main">
+            <a:off x="4895850" y="2047875"/>
+            <a:ext cx="3695700" cy="476250"/>
           </a:xfrm>
           <a:prstGeom xmlns:a="http://schemas.openxmlformats.org/drawingml/2006/main" prst="rect">
             <a:avLst/>
@@ -3163,9 +3538,9 @@
           <a:lstStyle xmlns:a="http://schemas.openxmlformats.org/drawingml/2006/main"/>
           <a:p xmlns:a="http://schemas.openxmlformats.org/drawingml/2006/main">
             <a:pPr algn="ctr">
-              <a:defRPr sz="1400" b="0">
-                <a:solidFill>
-                  <a:srgbClr val="666666"/>
+              <a:defRPr sz="1800" b="0">
+                <a:solidFill>
+                  <a:srgbClr val="59636E"/>
                 </a:solidFill>
                 <a:latin typeface="Noto Sans JP"/>
                 <a:ea typeface="Noto Sans JP"/>
@@ -3173,68 +3548,37 @@
               </a:defRPr>
             </a:pPr>
             <a:r>
-              <a:rPr sz="1400" b="0">
-                <a:solidFill>
-                  <a:srgbClr val="666666"/>
+              <a:rPr sz="1800" b="0">
+                <a:solidFill>
+                  <a:srgbClr val="59636E"/>
                 </a:solidFill>
                 <a:latin typeface="Noto Sans JP"/>
                 <a:ea typeface="Noto Sans JP"/>
                 <a:cs typeface="Noto Sans JP"/>
               </a:rPr>
-              <a:t>1</a:t>
-            </a:r>
-          </a:p>
-        </p:txBody>
-      </p:sp>
-      <p:sp>
-        <p:nvSpPr>
-          <p:cNvPr id="15" name="input-2">
-            <a:extLst xmlns:a="http://schemas.openxmlformats.org/drawingml/2006/main">
-              <a:ext uri="{FF2B5EF4-FFF2-40B4-BE49-F238E27FC236}">
-                <a16:creationId xmlns:a16="http://schemas.microsoft.com/office/drawing/2014/main" id="{2D1DCB6E-1DC9-4CEF-820D-CAD0827522C4}"/>
-              </a:ext>
-            </a:extLst>
-          </p:cNvPr>
-          <p:cNvSpPr>
-            <a:spLocks xmlns:a="http://schemas.openxmlformats.org/drawingml/2006/main" noGrp="1"/>
-          </p:cNvSpPr>
-          <p:nvPr/>
-        </p:nvSpPr>
-        <p:spPr>
-          <a:xfrm xmlns:a="http://schemas.openxmlformats.org/drawingml/2006/main">
-            <a:off x="4038600" y="1885950"/>
-            <a:ext cx="171450" cy="171450"/>
-          </a:xfrm>
-          <a:prstGeom xmlns:a="http://schemas.openxmlformats.org/drawingml/2006/main" prst="ellipse">
-            <a:avLst/>
-          </a:prstGeom>
-          <a:solidFill xmlns:a="http://schemas.openxmlformats.org/drawingml/2006/main">
-            <a:srgbClr val="666666"/>
-          </a:solidFill>
-          <a:ln xmlns:a="http://schemas.openxmlformats.org/drawingml/2006/main" w="0">
-            <a:noFill/>
-            <a:prstDash val="solid"/>
-          </a:ln>
-        </p:spPr>
-      </p:sp>
-      <p:sp>
-        <p:nvSpPr>
-          <p:cNvPr id="16" name="minute-2">
-            <a:extLst xmlns:a="http://schemas.openxmlformats.org/drawingml/2006/main">
-              <a:ext uri="{FF2B5EF4-FFF2-40B4-BE49-F238E27FC236}">
-                <a16:creationId xmlns:a16="http://schemas.microsoft.com/office/drawing/2014/main" id="{C43A4954-2F56-4229-8ABB-2978FD95EE75}"/>
-              </a:ext>
-            </a:extLst>
-          </p:cNvPr>
-          <p:cNvSpPr>
-            <a:spLocks xmlns:a="http://schemas.openxmlformats.org/drawingml/2006/main" noGrp="1"/>
-          </p:cNvSpPr>
-          <p:nvPr/>
-        </p:nvSpPr>
-        <p:spPr>
-          <a:xfrm xmlns:a="http://schemas.openxmlformats.org/drawingml/2006/main">
-            <a:off x="3943350" y="1571625"/>
-            <a:ext cx="361950" cy="247650"/>
+              <a:t>手法・実機の画像枠</a:t>
+            </a:r>
+          </a:p>
+        </p:txBody>
+      </p:sp>
+      <p:sp>
+        <p:nvSpPr>
+          <p:cNvPr id="13" name="toc-label-2">
+            <a:extLst xmlns:a="http://schemas.openxmlformats.org/drawingml/2006/main">
+              <a:ext uri="{FF2B5EF4-FFF2-40B4-BE49-F238E27FC236}">
+                <a16:creationId xmlns:a16="http://schemas.microsoft.com/office/drawing/2014/main" id="{02428EF0-4ED0-407B-9DFB-3CBAEDAC05ED}"/>
+              </a:ext>
+            </a:extLst>
+          </p:cNvPr>
+          <p:cNvSpPr>
+            <a:spLocks xmlns:a="http://schemas.openxmlformats.org/drawingml/2006/main" noGrp="1"/>
+          </p:cNvSpPr>
+          <p:nvPr/>
+        </p:nvSpPr>
+        <p:spPr>
+          <a:xfrm xmlns:a="http://schemas.openxmlformats.org/drawingml/2006/main">
+            <a:off x="457200" y="2876550"/>
+            <a:ext cx="3886200" cy="352425"/>
           </a:xfrm>
           <a:prstGeom xmlns:a="http://schemas.openxmlformats.org/drawingml/2006/main" prst="rect">
             <a:avLst/>
@@ -3251,10 +3595,10 @@
           </a:bodyPr>
           <a:lstStyle xmlns:a="http://schemas.openxmlformats.org/drawingml/2006/main"/>
           <a:p xmlns:a="http://schemas.openxmlformats.org/drawingml/2006/main">
-            <a:pPr algn="ctr">
-              <a:defRPr sz="1400" b="0">
-                <a:solidFill>
-                  <a:srgbClr val="666666"/>
+            <a:pPr algn="l">
+              <a:defRPr sz="2100" b="1">
+                <a:solidFill>
+                  <a:srgbClr val="17202A"/>
                 </a:solidFill>
                 <a:latin typeface="Noto Sans JP"/>
                 <a:ea typeface="Noto Sans JP"/>
@@ -3262,68 +3606,70 @@
               </a:defRPr>
             </a:pPr>
             <a:r>
-              <a:rPr sz="1400" b="0">
-                <a:solidFill>
-                  <a:srgbClr val="666666"/>
+              <a:rPr sz="2100" b="1">
+                <a:solidFill>
+                  <a:srgbClr val="17202A"/>
                 </a:solidFill>
                 <a:latin typeface="Noto Sans JP"/>
                 <a:ea typeface="Noto Sans JP"/>
                 <a:cs typeface="Noto Sans JP"/>
               </a:rPr>
-              <a:t>2</a:t>
-            </a:r>
-          </a:p>
-        </p:txBody>
-      </p:sp>
-      <p:sp>
-        <p:nvSpPr>
-          <p:cNvPr id="17" name="input-3">
-            <a:extLst xmlns:a="http://schemas.openxmlformats.org/drawingml/2006/main">
-              <a:ext uri="{FF2B5EF4-FFF2-40B4-BE49-F238E27FC236}">
-                <a16:creationId xmlns:a16="http://schemas.microsoft.com/office/drawing/2014/main" id="{F21BF0F8-6F2E-4129-9097-861594155161}"/>
-              </a:ext>
-            </a:extLst>
-          </p:cNvPr>
-          <p:cNvSpPr>
-            <a:spLocks xmlns:a="http://schemas.openxmlformats.org/drawingml/2006/main" noGrp="1"/>
-          </p:cNvSpPr>
-          <p:nvPr/>
-        </p:nvSpPr>
-        <p:spPr>
-          <a:xfrm xmlns:a="http://schemas.openxmlformats.org/drawingml/2006/main">
-            <a:off x="4438650" y="1885950"/>
-            <a:ext cx="171450" cy="171450"/>
-          </a:xfrm>
-          <a:prstGeom xmlns:a="http://schemas.openxmlformats.org/drawingml/2006/main" prst="ellipse">
+              <a:t>03 ここまでの結果</a:t>
+            </a:r>
+          </a:p>
+        </p:txBody>
+      </p:sp>
+      <p:sp>
+        <p:nvSpPr>
+          <p:cNvPr id="14" name="toc-image-slot-2">
+            <a:extLst xmlns:a="http://schemas.openxmlformats.org/drawingml/2006/main">
+              <a:ext uri="{FF2B5EF4-FFF2-40B4-BE49-F238E27FC236}">
+                <a16:creationId xmlns:a16="http://schemas.microsoft.com/office/drawing/2014/main" id="{C5B3FD61-7194-4614-9234-C8B622C0FDB5}"/>
+              </a:ext>
+            </a:extLst>
+          </p:cNvPr>
+          <p:cNvSpPr>
+            <a:spLocks xmlns:a="http://schemas.openxmlformats.org/drawingml/2006/main" noGrp="1"/>
+          </p:cNvSpPr>
+          <p:nvPr/>
+        </p:nvSpPr>
+        <p:spPr>
+          <a:xfrm xmlns:a="http://schemas.openxmlformats.org/drawingml/2006/main">
+            <a:off x="457200" y="3295650"/>
+            <a:ext cx="3886200" cy="838200"/>
+          </a:xfrm>
+          <a:prstGeom xmlns:a="http://schemas.openxmlformats.org/drawingml/2006/main" prst="rect">
             <a:avLst/>
           </a:prstGeom>
           <a:solidFill xmlns:a="http://schemas.openxmlformats.org/drawingml/2006/main">
-            <a:srgbClr val="666666"/>
+            <a:srgbClr val="F3F5F1"/>
           </a:solidFill>
-          <a:ln xmlns:a="http://schemas.openxmlformats.org/drawingml/2006/main" w="0">
-            <a:noFill/>
-            <a:prstDash val="solid"/>
-          </a:ln>
-        </p:spPr>
-      </p:sp>
-      <p:sp>
-        <p:nvSpPr>
-          <p:cNvPr id="18" name="minute-3">
-            <a:extLst xmlns:a="http://schemas.openxmlformats.org/drawingml/2006/main">
-              <a:ext uri="{FF2B5EF4-FFF2-40B4-BE49-F238E27FC236}">
-                <a16:creationId xmlns:a16="http://schemas.microsoft.com/office/drawing/2014/main" id="{EF8696F1-1B9E-48A4-9021-3C88822BCE76}"/>
-              </a:ext>
-            </a:extLst>
-          </p:cNvPr>
-          <p:cNvSpPr>
-            <a:spLocks xmlns:a="http://schemas.openxmlformats.org/drawingml/2006/main" noGrp="1"/>
-          </p:cNvSpPr>
-          <p:nvPr/>
-        </p:nvSpPr>
-        <p:spPr>
-          <a:xfrm xmlns:a="http://schemas.openxmlformats.org/drawingml/2006/main">
-            <a:off x="4343400" y="1571625"/>
-            <a:ext cx="361950" cy="247650"/>
+          <a:ln xmlns:a="http://schemas.openxmlformats.org/drawingml/2006/main" w="9525">
+            <a:solidFill>
+              <a:srgbClr val="B5BDB2"/>
+            </a:solidFill>
+            <a:prstDash val="solid"/>
+          </a:ln>
+        </p:spPr>
+      </p:sp>
+      <p:sp>
+        <p:nvSpPr>
+          <p:cNvPr id="15" name="toc-image-label-2">
+            <a:extLst xmlns:a="http://schemas.openxmlformats.org/drawingml/2006/main">
+              <a:ext uri="{FF2B5EF4-FFF2-40B4-BE49-F238E27FC236}">
+                <a16:creationId xmlns:a16="http://schemas.microsoft.com/office/drawing/2014/main" id="{33D4E54E-DB73-405A-A42F-6B3D28D82991}"/>
+              </a:ext>
+            </a:extLst>
+          </p:cNvPr>
+          <p:cNvSpPr>
+            <a:spLocks xmlns:a="http://schemas.openxmlformats.org/drawingml/2006/main" noGrp="1"/>
+          </p:cNvSpPr>
+          <p:nvPr/>
+        </p:nvSpPr>
+        <p:spPr>
+          <a:xfrm xmlns:a="http://schemas.openxmlformats.org/drawingml/2006/main">
+            <a:off x="552450" y="3429000"/>
+            <a:ext cx="3695700" cy="476250"/>
           </a:xfrm>
           <a:prstGeom xmlns:a="http://schemas.openxmlformats.org/drawingml/2006/main" prst="rect">
             <a:avLst/>
@@ -3341,9 +3687,9 @@
           <a:lstStyle xmlns:a="http://schemas.openxmlformats.org/drawingml/2006/main"/>
           <a:p xmlns:a="http://schemas.openxmlformats.org/drawingml/2006/main">
             <a:pPr algn="ctr">
-              <a:defRPr sz="1400" b="0">
-                <a:solidFill>
-                  <a:srgbClr val="666666"/>
+              <a:defRPr sz="1800" b="0">
+                <a:solidFill>
+                  <a:srgbClr val="59636E"/>
                 </a:solidFill>
                 <a:latin typeface="Noto Sans JP"/>
                 <a:ea typeface="Noto Sans JP"/>
@@ -3351,68 +3697,37 @@
               </a:defRPr>
             </a:pPr>
             <a:r>
-              <a:rPr sz="1400" b="0">
-                <a:solidFill>
-                  <a:srgbClr val="666666"/>
+              <a:rPr sz="1800" b="0">
+                <a:solidFill>
+                  <a:srgbClr val="59636E"/>
                 </a:solidFill>
                 <a:latin typeface="Noto Sans JP"/>
                 <a:ea typeface="Noto Sans JP"/>
                 <a:cs typeface="Noto Sans JP"/>
               </a:rPr>
-              <a:t>3</a:t>
-            </a:r>
-          </a:p>
-        </p:txBody>
-      </p:sp>
-      <p:sp>
-        <p:nvSpPr>
-          <p:cNvPr id="19" name="input-4">
-            <a:extLst xmlns:a="http://schemas.openxmlformats.org/drawingml/2006/main">
-              <a:ext uri="{FF2B5EF4-FFF2-40B4-BE49-F238E27FC236}">
-                <a16:creationId xmlns:a16="http://schemas.microsoft.com/office/drawing/2014/main" id="{9DC4DCA3-9AFB-4ADB-AC59-9155F2B88112}"/>
-              </a:ext>
-            </a:extLst>
-          </p:cNvPr>
-          <p:cNvSpPr>
-            <a:spLocks xmlns:a="http://schemas.openxmlformats.org/drawingml/2006/main" noGrp="1"/>
-          </p:cNvSpPr>
-          <p:nvPr/>
-        </p:nvSpPr>
-        <p:spPr>
-          <a:xfrm xmlns:a="http://schemas.openxmlformats.org/drawingml/2006/main">
-            <a:off x="4838700" y="1885950"/>
-            <a:ext cx="171450" cy="171450"/>
-          </a:xfrm>
-          <a:prstGeom xmlns:a="http://schemas.openxmlformats.org/drawingml/2006/main" prst="ellipse">
-            <a:avLst/>
-          </a:prstGeom>
-          <a:solidFill xmlns:a="http://schemas.openxmlformats.org/drawingml/2006/main">
-            <a:srgbClr val="666666"/>
-          </a:solidFill>
-          <a:ln xmlns:a="http://schemas.openxmlformats.org/drawingml/2006/main" w="0">
-            <a:noFill/>
-            <a:prstDash val="solid"/>
-          </a:ln>
-        </p:spPr>
-      </p:sp>
-      <p:sp>
-        <p:nvSpPr>
-          <p:cNvPr id="20" name="minute-4">
-            <a:extLst xmlns:a="http://schemas.openxmlformats.org/drawingml/2006/main">
-              <a:ext uri="{FF2B5EF4-FFF2-40B4-BE49-F238E27FC236}">
-                <a16:creationId xmlns:a16="http://schemas.microsoft.com/office/drawing/2014/main" id="{7C02E23A-BF68-4BA3-B996-B16E93151B6C}"/>
-              </a:ext>
-            </a:extLst>
-          </p:cNvPr>
-          <p:cNvSpPr>
-            <a:spLocks xmlns:a="http://schemas.openxmlformats.org/drawingml/2006/main" noGrp="1"/>
-          </p:cNvSpPr>
-          <p:nvPr/>
-        </p:nvSpPr>
-        <p:spPr>
-          <a:xfrm xmlns:a="http://schemas.openxmlformats.org/drawingml/2006/main">
-            <a:off x="4743450" y="1571625"/>
-            <a:ext cx="361950" cy="247650"/>
+              <a:t>評価・結果図の画像枠</a:t>
+            </a:r>
+          </a:p>
+        </p:txBody>
+      </p:sp>
+      <p:sp>
+        <p:nvSpPr>
+          <p:cNvPr id="16" name="toc-label-3">
+            <a:extLst xmlns:a="http://schemas.openxmlformats.org/drawingml/2006/main">
+              <a:ext uri="{FF2B5EF4-FFF2-40B4-BE49-F238E27FC236}">
+                <a16:creationId xmlns:a16="http://schemas.microsoft.com/office/drawing/2014/main" id="{08F1A119-B755-402A-903B-944BA92A7D2B}"/>
+              </a:ext>
+            </a:extLst>
+          </p:cNvPr>
+          <p:cNvSpPr>
+            <a:spLocks xmlns:a="http://schemas.openxmlformats.org/drawingml/2006/main" noGrp="1"/>
+          </p:cNvSpPr>
+          <p:nvPr/>
+        </p:nvSpPr>
+        <p:spPr>
+          <a:xfrm xmlns:a="http://schemas.openxmlformats.org/drawingml/2006/main">
+            <a:off x="4800600" y="2876550"/>
+            <a:ext cx="3886200" cy="352425"/>
           </a:xfrm>
           <a:prstGeom xmlns:a="http://schemas.openxmlformats.org/drawingml/2006/main" prst="rect">
             <a:avLst/>
@@ -3429,10 +3744,10 @@
           </a:bodyPr>
           <a:lstStyle xmlns:a="http://schemas.openxmlformats.org/drawingml/2006/main"/>
           <a:p xmlns:a="http://schemas.openxmlformats.org/drawingml/2006/main">
-            <a:pPr algn="ctr">
-              <a:defRPr sz="1400" b="0">
-                <a:solidFill>
-                  <a:srgbClr val="666666"/>
+            <a:pPr algn="l">
+              <a:defRPr sz="2100" b="1">
+                <a:solidFill>
+                  <a:srgbClr val="17202A"/>
                 </a:solidFill>
                 <a:latin typeface="Noto Sans JP"/>
                 <a:ea typeface="Noto Sans JP"/>
@@ -3440,68 +3755,70 @@
               </a:defRPr>
             </a:pPr>
             <a:r>
-              <a:rPr sz="1400" b="0">
-                <a:solidFill>
-                  <a:srgbClr val="666666"/>
+              <a:rPr sz="2100" b="1">
+                <a:solidFill>
+                  <a:srgbClr val="17202A"/>
                 </a:solidFill>
                 <a:latin typeface="Noto Sans JP"/>
                 <a:ea typeface="Noto Sans JP"/>
                 <a:cs typeface="Noto Sans JP"/>
               </a:rPr>
-              <a:t>4</a:t>
-            </a:r>
-          </a:p>
-        </p:txBody>
-      </p:sp>
-      <p:sp>
-        <p:nvSpPr>
-          <p:cNvPr id="21" name="input-5">
-            <a:extLst xmlns:a="http://schemas.openxmlformats.org/drawingml/2006/main">
-              <a:ext uri="{FF2B5EF4-FFF2-40B4-BE49-F238E27FC236}">
-                <a16:creationId xmlns:a16="http://schemas.microsoft.com/office/drawing/2014/main" id="{E6BF73B7-5D4B-445F-9428-8D2577AE3F31}"/>
-              </a:ext>
-            </a:extLst>
-          </p:cNvPr>
-          <p:cNvSpPr>
-            <a:spLocks xmlns:a="http://schemas.openxmlformats.org/drawingml/2006/main" noGrp="1"/>
-          </p:cNvSpPr>
-          <p:nvPr/>
-        </p:nvSpPr>
-        <p:spPr>
-          <a:xfrm xmlns:a="http://schemas.openxmlformats.org/drawingml/2006/main">
-            <a:off x="5238750" y="1885950"/>
-            <a:ext cx="171450" cy="171450"/>
-          </a:xfrm>
-          <a:prstGeom xmlns:a="http://schemas.openxmlformats.org/drawingml/2006/main" prst="ellipse">
+              <a:t>04 今後の展望</a:t>
+            </a:r>
+          </a:p>
+        </p:txBody>
+      </p:sp>
+      <p:sp>
+        <p:nvSpPr>
+          <p:cNvPr id="17" name="toc-image-slot-3">
+            <a:extLst xmlns:a="http://schemas.openxmlformats.org/drawingml/2006/main">
+              <a:ext uri="{FF2B5EF4-FFF2-40B4-BE49-F238E27FC236}">
+                <a16:creationId xmlns:a16="http://schemas.microsoft.com/office/drawing/2014/main" id="{18D8E79E-09B7-4AA1-BBCE-E5B4F69D5CFD}"/>
+              </a:ext>
+            </a:extLst>
+          </p:cNvPr>
+          <p:cNvSpPr>
+            <a:spLocks xmlns:a="http://schemas.openxmlformats.org/drawingml/2006/main" noGrp="1"/>
+          </p:cNvSpPr>
+          <p:nvPr/>
+        </p:nvSpPr>
+        <p:spPr>
+          <a:xfrm xmlns:a="http://schemas.openxmlformats.org/drawingml/2006/main">
+            <a:off x="4800600" y="3295650"/>
+            <a:ext cx="3886200" cy="838200"/>
+          </a:xfrm>
+          <a:prstGeom xmlns:a="http://schemas.openxmlformats.org/drawingml/2006/main" prst="rect">
             <a:avLst/>
           </a:prstGeom>
           <a:solidFill xmlns:a="http://schemas.openxmlformats.org/drawingml/2006/main">
-            <a:srgbClr val="666666"/>
+            <a:srgbClr val="F3F5F1"/>
           </a:solidFill>
-          <a:ln xmlns:a="http://schemas.openxmlformats.org/drawingml/2006/main" w="0">
-            <a:noFill/>
-            <a:prstDash val="solid"/>
-          </a:ln>
-        </p:spPr>
-      </p:sp>
-      <p:sp>
-        <p:nvSpPr>
-          <p:cNvPr id="22" name="minute-5">
-            <a:extLst xmlns:a="http://schemas.openxmlformats.org/drawingml/2006/main">
-              <a:ext uri="{FF2B5EF4-FFF2-40B4-BE49-F238E27FC236}">
-                <a16:creationId xmlns:a16="http://schemas.microsoft.com/office/drawing/2014/main" id="{46A75543-7BB6-47AD-9DA2-37E447C6DCD9}"/>
-              </a:ext>
-            </a:extLst>
-          </p:cNvPr>
-          <p:cNvSpPr>
-            <a:spLocks xmlns:a="http://schemas.openxmlformats.org/drawingml/2006/main" noGrp="1"/>
-          </p:cNvSpPr>
-          <p:nvPr/>
-        </p:nvSpPr>
-        <p:spPr>
-          <a:xfrm xmlns:a="http://schemas.openxmlformats.org/drawingml/2006/main">
-            <a:off x="5143500" y="1571625"/>
-            <a:ext cx="361950" cy="247650"/>
+          <a:ln xmlns:a="http://schemas.openxmlformats.org/drawingml/2006/main" w="9525">
+            <a:solidFill>
+              <a:srgbClr val="B5BDB2"/>
+            </a:solidFill>
+            <a:prstDash val="solid"/>
+          </a:ln>
+        </p:spPr>
+      </p:sp>
+      <p:sp>
+        <p:nvSpPr>
+          <p:cNvPr id="18" name="toc-image-label-3">
+            <a:extLst xmlns:a="http://schemas.openxmlformats.org/drawingml/2006/main">
+              <a:ext uri="{FF2B5EF4-FFF2-40B4-BE49-F238E27FC236}">
+                <a16:creationId xmlns:a16="http://schemas.microsoft.com/office/drawing/2014/main" id="{B33566B9-ED38-456B-A355-DD65BF9D8D6E}"/>
+              </a:ext>
+            </a:extLst>
+          </p:cNvPr>
+          <p:cNvSpPr>
+            <a:spLocks xmlns:a="http://schemas.openxmlformats.org/drawingml/2006/main" noGrp="1"/>
+          </p:cNvSpPr>
+          <p:nvPr/>
+        </p:nvSpPr>
+        <p:spPr>
+          <a:xfrm xmlns:a="http://schemas.openxmlformats.org/drawingml/2006/main">
+            <a:off x="4895850" y="3429000"/>
+            <a:ext cx="3695700" cy="476250"/>
           </a:xfrm>
           <a:prstGeom xmlns:a="http://schemas.openxmlformats.org/drawingml/2006/main" prst="rect">
             <a:avLst/>
@@ -3519,9 +3836,9 @@
           <a:lstStyle xmlns:a="http://schemas.openxmlformats.org/drawingml/2006/main"/>
           <a:p xmlns:a="http://schemas.openxmlformats.org/drawingml/2006/main">
             <a:pPr algn="ctr">
-              <a:defRPr sz="1400" b="0">
-                <a:solidFill>
-                  <a:srgbClr val="666666"/>
+              <a:defRPr sz="1800" b="0">
+                <a:solidFill>
+                  <a:srgbClr val="59636E"/>
                 </a:solidFill>
                 <a:latin typeface="Noto Sans JP"/>
                 <a:ea typeface="Noto Sans JP"/>
@@ -3529,101 +3846,74 @@
               </a:defRPr>
             </a:pPr>
             <a:r>
-              <a:rPr sz="1400" b="0">
-                <a:solidFill>
-                  <a:srgbClr val="666666"/>
+              <a:rPr sz="1800" b="0">
+                <a:solidFill>
+                  <a:srgbClr val="59636E"/>
                 </a:solidFill>
                 <a:latin typeface="Noto Sans JP"/>
                 <a:ea typeface="Noto Sans JP"/>
                 <a:cs typeface="Noto Sans JP"/>
               </a:rPr>
-              <a:t>5</a:t>
-            </a:r>
-          </a:p>
-        </p:txBody>
-      </p:sp>
-      <p:sp>
-        <p:nvSpPr>
-          <p:cNvPr id="23" name="retained-5">
-            <a:extLst xmlns:a="http://schemas.openxmlformats.org/drawingml/2006/main">
-              <a:ext uri="{FF2B5EF4-FFF2-40B4-BE49-F238E27FC236}">
-                <a16:creationId xmlns:a16="http://schemas.microsoft.com/office/drawing/2014/main" id="{5A7485E9-7901-40DB-B152-C3AF54E5F68E}"/>
-              </a:ext>
-            </a:extLst>
-          </p:cNvPr>
-          <p:cNvSpPr>
-            <a:spLocks xmlns:a="http://schemas.openxmlformats.org/drawingml/2006/main" noGrp="1"/>
-          </p:cNvSpPr>
-          <p:nvPr/>
-        </p:nvSpPr>
-        <p:spPr>
-          <a:xfrm xmlns:a="http://schemas.openxmlformats.org/drawingml/2006/main">
-            <a:off x="5219700" y="3257550"/>
-            <a:ext cx="209550" cy="209550"/>
+              <a:t>構想図の画像枠（計画）</a:t>
+            </a:r>
+          </a:p>
+        </p:txBody>
+      </p:sp>
+      <p:sp>
+        <p:nvSpPr>
+          <p:cNvPr id="19" name="toc-rule-vertical">
+            <a:extLst xmlns:a="http://schemas.openxmlformats.org/drawingml/2006/main">
+              <a:ext uri="{FF2B5EF4-FFF2-40B4-BE49-F238E27FC236}">
+                <a16:creationId xmlns:a16="http://schemas.microsoft.com/office/drawing/2014/main" id="{57450AA4-5678-4911-9662-8B51A23A8DD6}"/>
+              </a:ext>
+            </a:extLst>
+          </p:cNvPr>
+          <p:cNvSpPr>
+            <a:spLocks xmlns:a="http://schemas.openxmlformats.org/drawingml/2006/main" noGrp="1"/>
+          </p:cNvSpPr>
+          <p:nvPr/>
+        </p:nvSpPr>
+        <p:spPr>
+          <a:xfrm xmlns:a="http://schemas.openxmlformats.org/drawingml/2006/main">
+            <a:off x="4572000" y="1562100"/>
+            <a:ext cx="9525" cy="2524125"/>
           </a:xfrm>
           <a:prstGeom xmlns:a="http://schemas.openxmlformats.org/drawingml/2006/main" prst="rect">
             <a:avLst/>
           </a:prstGeom>
           <a:solidFill xmlns:a="http://schemas.openxmlformats.org/drawingml/2006/main">
-            <a:srgbClr val="9BBB59"/>
+            <a:srgbClr val="D7DCD5"/>
           </a:solidFill>
-          <a:ln xmlns:a="http://schemas.openxmlformats.org/drawingml/2006/main" w="11430">
-            <a:solidFill>
-              <a:srgbClr val="000000"/>
-            </a:solidFill>
-            <a:prstDash val="solid"/>
-          </a:ln>
-        </p:spPr>
-      </p:sp>
-      <p:cxnSp>
-        <p:nvCxnSpPr>
-          <p:cNvPr id="67" name=""/>
-          <p:cNvCxnSpPr>
-            <a:stCxn xmlns:a="http://schemas.openxmlformats.org/drawingml/2006/main" id="21" idx="4"/>
-            <a:endCxn xmlns:a="http://schemas.openxmlformats.org/drawingml/2006/main" id="23" idx="0"/>
-          </p:cNvCxnSpPr>
-          <p:nvPr/>
-        </p:nvCxnSpPr>
-        <p:spPr>
-          <a:xfrm xmlns:a="http://schemas.openxmlformats.org/drawingml/2006/main">
-            <a:off x="5324475" y="2057400"/>
-            <a:ext cx="0" cy="1200150"/>
-          </a:xfrm>
-          <a:prstGeom xmlns:a="http://schemas.openxmlformats.org/drawingml/2006/main" prst="straightConnector1">
-            <a:avLst/>
-          </a:prstGeom>
-          <a:ln xmlns:a="http://schemas.openxmlformats.org/drawingml/2006/main" w="11430">
-            <a:solidFill>
-              <a:srgbClr val="666666"/>
-            </a:solidFill>
-            <a:tailEnd type="triangle" w="sm" len="sm"/>
-          </a:ln>
-        </p:spPr>
-      </p:cxnSp>
-      <p:sp>
-        <p:nvSpPr>
-          <p:cNvPr id="25" name="input-6">
-            <a:extLst xmlns:a="http://schemas.openxmlformats.org/drawingml/2006/main">
-              <a:ext uri="{FF2B5EF4-FFF2-40B4-BE49-F238E27FC236}">
-                <a16:creationId xmlns:a16="http://schemas.microsoft.com/office/drawing/2014/main" id="{405890CE-BBDD-4667-94D0-717263E07FC3}"/>
-              </a:ext>
-            </a:extLst>
-          </p:cNvPr>
-          <p:cNvSpPr>
-            <a:spLocks xmlns:a="http://schemas.openxmlformats.org/drawingml/2006/main" noGrp="1"/>
-          </p:cNvSpPr>
-          <p:nvPr/>
-        </p:nvSpPr>
-        <p:spPr>
-          <a:xfrm xmlns:a="http://schemas.openxmlformats.org/drawingml/2006/main">
-            <a:off x="5638800" y="1885950"/>
-            <a:ext cx="171450" cy="171450"/>
-          </a:xfrm>
-          <a:prstGeom xmlns:a="http://schemas.openxmlformats.org/drawingml/2006/main" prst="ellipse">
+          <a:ln xmlns:a="http://schemas.openxmlformats.org/drawingml/2006/main" w="0">
+            <a:noFill/>
+            <a:prstDash val="solid"/>
+          </a:ln>
+        </p:spPr>
+      </p:sp>
+      <p:sp>
+        <p:nvSpPr>
+          <p:cNvPr id="20" name="toc-rule-horizontal">
+            <a:extLst xmlns:a="http://schemas.openxmlformats.org/drawingml/2006/main">
+              <a:ext uri="{FF2B5EF4-FFF2-40B4-BE49-F238E27FC236}">
+                <a16:creationId xmlns:a16="http://schemas.microsoft.com/office/drawing/2014/main" id="{1CACD675-29A6-4AA8-A5F1-C6FCAEEF0606}"/>
+              </a:ext>
+            </a:extLst>
+          </p:cNvPr>
+          <p:cNvSpPr>
+            <a:spLocks xmlns:a="http://schemas.openxmlformats.org/drawingml/2006/main" noGrp="1"/>
+          </p:cNvSpPr>
+          <p:nvPr/>
+        </p:nvSpPr>
+        <p:spPr>
+          <a:xfrm xmlns:a="http://schemas.openxmlformats.org/drawingml/2006/main">
+            <a:off x="457200" y="2809875"/>
+            <a:ext cx="8229600" cy="9525"/>
+          </a:xfrm>
+          <a:prstGeom xmlns:a="http://schemas.openxmlformats.org/drawingml/2006/main" prst="rect">
             <a:avLst/>
           </a:prstGeom>
           <a:solidFill xmlns:a="http://schemas.openxmlformats.org/drawingml/2006/main">
-            <a:srgbClr val="666666"/>
+            <a:srgbClr val="D7DCD5"/>
           </a:solidFill>
           <a:ln xmlns:a="http://schemas.openxmlformats.org/drawingml/2006/main" w="0">
             <a:noFill/>
@@ -3633,22 +3923,22 @@
       </p:sp>
       <p:sp>
         <p:nvSpPr>
-          <p:cNvPr id="26" name="minute-6">
-            <a:extLst xmlns:a="http://schemas.openxmlformats.org/drawingml/2006/main">
-              <a:ext uri="{FF2B5EF4-FFF2-40B4-BE49-F238E27FC236}">
-                <a16:creationId xmlns:a16="http://schemas.microsoft.com/office/drawing/2014/main" id="{0A2C1743-EA5A-43D0-8194-EFDC97535576}"/>
-              </a:ext>
-            </a:extLst>
-          </p:cNvPr>
-          <p:cNvSpPr>
-            <a:spLocks xmlns:a="http://schemas.openxmlformats.org/drawingml/2006/main" noGrp="1"/>
-          </p:cNvSpPr>
-          <p:nvPr/>
-        </p:nvSpPr>
-        <p:spPr>
-          <a:xfrm xmlns:a="http://schemas.openxmlformats.org/drawingml/2006/main">
-            <a:off x="5543550" y="1571625"/>
-            <a:ext cx="361950" cy="247650"/>
+          <p:cNvPr id="21" name="slot-disclosure">
+            <a:extLst xmlns:a="http://schemas.openxmlformats.org/drawingml/2006/main">
+              <a:ext uri="{FF2B5EF4-FFF2-40B4-BE49-F238E27FC236}">
+                <a16:creationId xmlns:a16="http://schemas.microsoft.com/office/drawing/2014/main" id="{0A527EAD-8C31-43AB-A2C3-59459115A613}"/>
+              </a:ext>
+            </a:extLst>
+          </p:cNvPr>
+          <p:cNvSpPr>
+            <a:spLocks xmlns:a="http://schemas.openxmlformats.org/drawingml/2006/main" noGrp="1"/>
+          </p:cNvSpPr>
+          <p:nvPr/>
+        </p:nvSpPr>
+        <p:spPr>
+          <a:xfrm xmlns:a="http://schemas.openxmlformats.org/drawingml/2006/main">
+            <a:off x="457200" y="4229100"/>
+            <a:ext cx="8229600" cy="266700"/>
           </a:xfrm>
           <a:prstGeom xmlns:a="http://schemas.openxmlformats.org/drawingml/2006/main" prst="rect">
             <a:avLst/>
@@ -3665,10 +3955,10 @@
           </a:bodyPr>
           <a:lstStyle xmlns:a="http://schemas.openxmlformats.org/drawingml/2006/main"/>
           <a:p xmlns:a="http://schemas.openxmlformats.org/drawingml/2006/main">
-            <a:pPr algn="ctr">
-              <a:defRPr sz="1400" b="0">
-                <a:solidFill>
-                  <a:srgbClr val="666666"/>
+            <a:pPr algn="l">
+              <a:defRPr sz="1800" b="0">
+                <a:solidFill>
+                  <a:srgbClr val="59636E"/>
                 </a:solidFill>
                 <a:latin typeface="Noto Sans JP"/>
                 <a:ea typeface="Noto Sans JP"/>
@@ -3676,781 +3966,15 @@
               </a:defRPr>
             </a:pPr>
             <a:r>
-              <a:rPr sz="1400" b="0">
-                <a:solidFill>
-                  <a:srgbClr val="666666"/>
+              <a:rPr sz="1800" b="0">
+                <a:solidFill>
+                  <a:srgbClr val="59636E"/>
                 </a:solidFill>
                 <a:latin typeface="Noto Sans JP"/>
                 <a:ea typeface="Noto Sans JP"/>
                 <a:cs typeface="Noto Sans JP"/>
               </a:rPr>
-              <a:t>6</a:t>
-            </a:r>
-          </a:p>
-        </p:txBody>
-      </p:sp>
-      <p:sp>
-        <p:nvSpPr>
-          <p:cNvPr id="27" name="input-7">
-            <a:extLst xmlns:a="http://schemas.openxmlformats.org/drawingml/2006/main">
-              <a:ext uri="{FF2B5EF4-FFF2-40B4-BE49-F238E27FC236}">
-                <a16:creationId xmlns:a16="http://schemas.microsoft.com/office/drawing/2014/main" id="{8528D765-5522-445B-A4E2-E68E720636CB}"/>
-              </a:ext>
-            </a:extLst>
-          </p:cNvPr>
-          <p:cNvSpPr>
-            <a:spLocks xmlns:a="http://schemas.openxmlformats.org/drawingml/2006/main" noGrp="1"/>
-          </p:cNvSpPr>
-          <p:nvPr/>
-        </p:nvSpPr>
-        <p:spPr>
-          <a:xfrm xmlns:a="http://schemas.openxmlformats.org/drawingml/2006/main">
-            <a:off x="6038850" y="1885950"/>
-            <a:ext cx="171450" cy="171450"/>
-          </a:xfrm>
-          <a:prstGeom xmlns:a="http://schemas.openxmlformats.org/drawingml/2006/main" prst="ellipse">
-            <a:avLst/>
-          </a:prstGeom>
-          <a:solidFill xmlns:a="http://schemas.openxmlformats.org/drawingml/2006/main">
-            <a:srgbClr val="666666"/>
-          </a:solidFill>
-          <a:ln xmlns:a="http://schemas.openxmlformats.org/drawingml/2006/main" w="0">
-            <a:noFill/>
-            <a:prstDash val="solid"/>
-          </a:ln>
-        </p:spPr>
-      </p:sp>
-      <p:sp>
-        <p:nvSpPr>
-          <p:cNvPr id="28" name="minute-7">
-            <a:extLst xmlns:a="http://schemas.openxmlformats.org/drawingml/2006/main">
-              <a:ext uri="{FF2B5EF4-FFF2-40B4-BE49-F238E27FC236}">
-                <a16:creationId xmlns:a16="http://schemas.microsoft.com/office/drawing/2014/main" id="{891C894B-8960-4FC7-A68C-092CDC1FBC8C}"/>
-              </a:ext>
-            </a:extLst>
-          </p:cNvPr>
-          <p:cNvSpPr>
-            <a:spLocks xmlns:a="http://schemas.openxmlformats.org/drawingml/2006/main" noGrp="1"/>
-          </p:cNvSpPr>
-          <p:nvPr/>
-        </p:nvSpPr>
-        <p:spPr>
-          <a:xfrm xmlns:a="http://schemas.openxmlformats.org/drawingml/2006/main">
-            <a:off x="5943600" y="1571625"/>
-            <a:ext cx="361950" cy="247650"/>
-          </a:xfrm>
-          <a:prstGeom xmlns:a="http://schemas.openxmlformats.org/drawingml/2006/main" prst="rect">
-            <a:avLst/>
-          </a:prstGeom>
-          <a:noFill xmlns:a="http://schemas.openxmlformats.org/drawingml/2006/main"/>
-          <a:ln xmlns:a="http://schemas.openxmlformats.org/drawingml/2006/main" w="0">
-            <a:noFill/>
-            <a:prstDash val="solid"/>
-          </a:ln>
-        </p:spPr>
-        <p:txBody>
-          <a:bodyPr xmlns:a="http://schemas.openxmlformats.org/drawingml/2006/main" lIns="0" tIns="0" rIns="0" bIns="0" anchor="ctr">
-            <a:noAutofit/>
-          </a:bodyPr>
-          <a:lstStyle xmlns:a="http://schemas.openxmlformats.org/drawingml/2006/main"/>
-          <a:p xmlns:a="http://schemas.openxmlformats.org/drawingml/2006/main">
-            <a:pPr algn="ctr">
-              <a:defRPr sz="1400" b="0">
-                <a:solidFill>
-                  <a:srgbClr val="666666"/>
-                </a:solidFill>
-                <a:latin typeface="Noto Sans JP"/>
-                <a:ea typeface="Noto Sans JP"/>
-                <a:cs typeface="Noto Sans JP"/>
-              </a:defRPr>
-            </a:pPr>
-            <a:r>
-              <a:rPr sz="1400" b="0">
-                <a:solidFill>
-                  <a:srgbClr val="666666"/>
-                </a:solidFill>
-                <a:latin typeface="Noto Sans JP"/>
-                <a:ea typeface="Noto Sans JP"/>
-                <a:cs typeface="Noto Sans JP"/>
-              </a:rPr>
-              <a:t>7</a:t>
-            </a:r>
-          </a:p>
-        </p:txBody>
-      </p:sp>
-      <p:sp>
-        <p:nvSpPr>
-          <p:cNvPr id="29" name="input-8">
-            <a:extLst xmlns:a="http://schemas.openxmlformats.org/drawingml/2006/main">
-              <a:ext uri="{FF2B5EF4-FFF2-40B4-BE49-F238E27FC236}">
-                <a16:creationId xmlns:a16="http://schemas.microsoft.com/office/drawing/2014/main" id="{E40E2ABE-FD06-4D71-A4B9-456E20348778}"/>
-              </a:ext>
-            </a:extLst>
-          </p:cNvPr>
-          <p:cNvSpPr>
-            <a:spLocks xmlns:a="http://schemas.openxmlformats.org/drawingml/2006/main" noGrp="1"/>
-          </p:cNvSpPr>
-          <p:nvPr/>
-        </p:nvSpPr>
-        <p:spPr>
-          <a:xfrm xmlns:a="http://schemas.openxmlformats.org/drawingml/2006/main">
-            <a:off x="6438900" y="1885950"/>
-            <a:ext cx="171450" cy="171450"/>
-          </a:xfrm>
-          <a:prstGeom xmlns:a="http://schemas.openxmlformats.org/drawingml/2006/main" prst="ellipse">
-            <a:avLst/>
-          </a:prstGeom>
-          <a:solidFill xmlns:a="http://schemas.openxmlformats.org/drawingml/2006/main">
-            <a:srgbClr val="666666"/>
-          </a:solidFill>
-          <a:ln xmlns:a="http://schemas.openxmlformats.org/drawingml/2006/main" w="0">
-            <a:noFill/>
-            <a:prstDash val="solid"/>
-          </a:ln>
-        </p:spPr>
-      </p:sp>
-      <p:sp>
-        <p:nvSpPr>
-          <p:cNvPr id="30" name="minute-8">
-            <a:extLst xmlns:a="http://schemas.openxmlformats.org/drawingml/2006/main">
-              <a:ext uri="{FF2B5EF4-FFF2-40B4-BE49-F238E27FC236}">
-                <a16:creationId xmlns:a16="http://schemas.microsoft.com/office/drawing/2014/main" id="{F49D9BF3-8666-4FC1-959D-B637F10066A0}"/>
-              </a:ext>
-            </a:extLst>
-          </p:cNvPr>
-          <p:cNvSpPr>
-            <a:spLocks xmlns:a="http://schemas.openxmlformats.org/drawingml/2006/main" noGrp="1"/>
-          </p:cNvSpPr>
-          <p:nvPr/>
-        </p:nvSpPr>
-        <p:spPr>
-          <a:xfrm xmlns:a="http://schemas.openxmlformats.org/drawingml/2006/main">
-            <a:off x="6343650" y="1571625"/>
-            <a:ext cx="361950" cy="247650"/>
-          </a:xfrm>
-          <a:prstGeom xmlns:a="http://schemas.openxmlformats.org/drawingml/2006/main" prst="rect">
-            <a:avLst/>
-          </a:prstGeom>
-          <a:noFill xmlns:a="http://schemas.openxmlformats.org/drawingml/2006/main"/>
-          <a:ln xmlns:a="http://schemas.openxmlformats.org/drawingml/2006/main" w="0">
-            <a:noFill/>
-            <a:prstDash val="solid"/>
-          </a:ln>
-        </p:spPr>
-        <p:txBody>
-          <a:bodyPr xmlns:a="http://schemas.openxmlformats.org/drawingml/2006/main" lIns="0" tIns="0" rIns="0" bIns="0" anchor="ctr">
-            <a:noAutofit/>
-          </a:bodyPr>
-          <a:lstStyle xmlns:a="http://schemas.openxmlformats.org/drawingml/2006/main"/>
-          <a:p xmlns:a="http://schemas.openxmlformats.org/drawingml/2006/main">
-            <a:pPr algn="ctr">
-              <a:defRPr sz="1400" b="0">
-                <a:solidFill>
-                  <a:srgbClr val="666666"/>
-                </a:solidFill>
-                <a:latin typeface="Noto Sans JP"/>
-                <a:ea typeface="Noto Sans JP"/>
-                <a:cs typeface="Noto Sans JP"/>
-              </a:defRPr>
-            </a:pPr>
-            <a:r>
-              <a:rPr sz="1400" b="0">
-                <a:solidFill>
-                  <a:srgbClr val="666666"/>
-                </a:solidFill>
-                <a:latin typeface="Noto Sans JP"/>
-                <a:ea typeface="Noto Sans JP"/>
-                <a:cs typeface="Noto Sans JP"/>
-              </a:rPr>
-              <a:t>8</a:t>
-            </a:r>
-          </a:p>
-        </p:txBody>
-      </p:sp>
-      <p:sp>
-        <p:nvSpPr>
-          <p:cNvPr id="31" name="input-9">
-            <a:extLst xmlns:a="http://schemas.openxmlformats.org/drawingml/2006/main">
-              <a:ext uri="{FF2B5EF4-FFF2-40B4-BE49-F238E27FC236}">
-                <a16:creationId xmlns:a16="http://schemas.microsoft.com/office/drawing/2014/main" id="{9AD14D41-9367-4101-95A7-BAD190EC903D}"/>
-              </a:ext>
-            </a:extLst>
-          </p:cNvPr>
-          <p:cNvSpPr>
-            <a:spLocks xmlns:a="http://schemas.openxmlformats.org/drawingml/2006/main" noGrp="1"/>
-          </p:cNvSpPr>
-          <p:nvPr/>
-        </p:nvSpPr>
-        <p:spPr>
-          <a:xfrm xmlns:a="http://schemas.openxmlformats.org/drawingml/2006/main">
-            <a:off x="6838950" y="1885950"/>
-            <a:ext cx="171450" cy="171450"/>
-          </a:xfrm>
-          <a:prstGeom xmlns:a="http://schemas.openxmlformats.org/drawingml/2006/main" prst="ellipse">
-            <a:avLst/>
-          </a:prstGeom>
-          <a:solidFill xmlns:a="http://schemas.openxmlformats.org/drawingml/2006/main">
-            <a:srgbClr val="666666"/>
-          </a:solidFill>
-          <a:ln xmlns:a="http://schemas.openxmlformats.org/drawingml/2006/main" w="0">
-            <a:noFill/>
-            <a:prstDash val="solid"/>
-          </a:ln>
-        </p:spPr>
-      </p:sp>
-      <p:sp>
-        <p:nvSpPr>
-          <p:cNvPr id="32" name="minute-9">
-            <a:extLst xmlns:a="http://schemas.openxmlformats.org/drawingml/2006/main">
-              <a:ext uri="{FF2B5EF4-FFF2-40B4-BE49-F238E27FC236}">
-                <a16:creationId xmlns:a16="http://schemas.microsoft.com/office/drawing/2014/main" id="{C984C232-01D5-424E-825B-5F5CD5E57EBA}"/>
-              </a:ext>
-            </a:extLst>
-          </p:cNvPr>
-          <p:cNvSpPr>
-            <a:spLocks xmlns:a="http://schemas.openxmlformats.org/drawingml/2006/main" noGrp="1"/>
-          </p:cNvSpPr>
-          <p:nvPr/>
-        </p:nvSpPr>
-        <p:spPr>
-          <a:xfrm xmlns:a="http://schemas.openxmlformats.org/drawingml/2006/main">
-            <a:off x="6743700" y="1571625"/>
-            <a:ext cx="361950" cy="247650"/>
-          </a:xfrm>
-          <a:prstGeom xmlns:a="http://schemas.openxmlformats.org/drawingml/2006/main" prst="rect">
-            <a:avLst/>
-          </a:prstGeom>
-          <a:noFill xmlns:a="http://schemas.openxmlformats.org/drawingml/2006/main"/>
-          <a:ln xmlns:a="http://schemas.openxmlformats.org/drawingml/2006/main" w="0">
-            <a:noFill/>
-            <a:prstDash val="solid"/>
-          </a:ln>
-        </p:spPr>
-        <p:txBody>
-          <a:bodyPr xmlns:a="http://schemas.openxmlformats.org/drawingml/2006/main" lIns="0" tIns="0" rIns="0" bIns="0" anchor="ctr">
-            <a:noAutofit/>
-          </a:bodyPr>
-          <a:lstStyle xmlns:a="http://schemas.openxmlformats.org/drawingml/2006/main"/>
-          <a:p xmlns:a="http://schemas.openxmlformats.org/drawingml/2006/main">
-            <a:pPr algn="ctr">
-              <a:defRPr sz="1400" b="0">
-                <a:solidFill>
-                  <a:srgbClr val="666666"/>
-                </a:solidFill>
-                <a:latin typeface="Noto Sans JP"/>
-                <a:ea typeface="Noto Sans JP"/>
-                <a:cs typeface="Noto Sans JP"/>
-              </a:defRPr>
-            </a:pPr>
-            <a:r>
-              <a:rPr sz="1400" b="0">
-                <a:solidFill>
-                  <a:srgbClr val="666666"/>
-                </a:solidFill>
-                <a:latin typeface="Noto Sans JP"/>
-                <a:ea typeface="Noto Sans JP"/>
-                <a:cs typeface="Noto Sans JP"/>
-              </a:rPr>
-              <a:t>9</a:t>
-            </a:r>
-          </a:p>
-        </p:txBody>
-      </p:sp>
-      <p:sp>
-        <p:nvSpPr>
-          <p:cNvPr id="33" name="input-10">
-            <a:extLst xmlns:a="http://schemas.openxmlformats.org/drawingml/2006/main">
-              <a:ext uri="{FF2B5EF4-FFF2-40B4-BE49-F238E27FC236}">
-                <a16:creationId xmlns:a16="http://schemas.microsoft.com/office/drawing/2014/main" id="{821F7AC6-2388-4388-B02F-B886827F4640}"/>
-              </a:ext>
-            </a:extLst>
-          </p:cNvPr>
-          <p:cNvSpPr>
-            <a:spLocks xmlns:a="http://schemas.openxmlformats.org/drawingml/2006/main" noGrp="1"/>
-          </p:cNvSpPr>
-          <p:nvPr/>
-        </p:nvSpPr>
-        <p:spPr>
-          <a:xfrm xmlns:a="http://schemas.openxmlformats.org/drawingml/2006/main">
-            <a:off x="7239000" y="1885950"/>
-            <a:ext cx="171450" cy="171450"/>
-          </a:xfrm>
-          <a:prstGeom xmlns:a="http://schemas.openxmlformats.org/drawingml/2006/main" prst="ellipse">
-            <a:avLst/>
-          </a:prstGeom>
-          <a:solidFill xmlns:a="http://schemas.openxmlformats.org/drawingml/2006/main">
-            <a:srgbClr val="666666"/>
-          </a:solidFill>
-          <a:ln xmlns:a="http://schemas.openxmlformats.org/drawingml/2006/main" w="0">
-            <a:noFill/>
-            <a:prstDash val="solid"/>
-          </a:ln>
-        </p:spPr>
-      </p:sp>
-      <p:sp>
-        <p:nvSpPr>
-          <p:cNvPr id="34" name="minute-10">
-            <a:extLst xmlns:a="http://schemas.openxmlformats.org/drawingml/2006/main">
-              <a:ext uri="{FF2B5EF4-FFF2-40B4-BE49-F238E27FC236}">
-                <a16:creationId xmlns:a16="http://schemas.microsoft.com/office/drawing/2014/main" id="{7DC8EFB3-A173-4E22-8935-D0708A5EE9D9}"/>
-              </a:ext>
-            </a:extLst>
-          </p:cNvPr>
-          <p:cNvSpPr>
-            <a:spLocks xmlns:a="http://schemas.openxmlformats.org/drawingml/2006/main" noGrp="1"/>
-          </p:cNvSpPr>
-          <p:nvPr/>
-        </p:nvSpPr>
-        <p:spPr>
-          <a:xfrm xmlns:a="http://schemas.openxmlformats.org/drawingml/2006/main">
-            <a:off x="7143750" y="1571625"/>
-            <a:ext cx="361950" cy="247650"/>
-          </a:xfrm>
-          <a:prstGeom xmlns:a="http://schemas.openxmlformats.org/drawingml/2006/main" prst="rect">
-            <a:avLst/>
-          </a:prstGeom>
-          <a:noFill xmlns:a="http://schemas.openxmlformats.org/drawingml/2006/main"/>
-          <a:ln xmlns:a="http://schemas.openxmlformats.org/drawingml/2006/main" w="0">
-            <a:noFill/>
-            <a:prstDash val="solid"/>
-          </a:ln>
-        </p:spPr>
-        <p:txBody>
-          <a:bodyPr xmlns:a="http://schemas.openxmlformats.org/drawingml/2006/main" lIns="0" tIns="0" rIns="0" bIns="0" anchor="ctr">
-            <a:noAutofit/>
-          </a:bodyPr>
-          <a:lstStyle xmlns:a="http://schemas.openxmlformats.org/drawingml/2006/main"/>
-          <a:p xmlns:a="http://schemas.openxmlformats.org/drawingml/2006/main">
-            <a:pPr algn="ctr">
-              <a:defRPr sz="1400" b="0">
-                <a:solidFill>
-                  <a:srgbClr val="666666"/>
-                </a:solidFill>
-                <a:latin typeface="Noto Sans JP"/>
-                <a:ea typeface="Noto Sans JP"/>
-                <a:cs typeface="Noto Sans JP"/>
-              </a:defRPr>
-            </a:pPr>
-            <a:r>
-              <a:rPr sz="1400" b="0">
-                <a:solidFill>
-                  <a:srgbClr val="666666"/>
-                </a:solidFill>
-                <a:latin typeface="Noto Sans JP"/>
-                <a:ea typeface="Noto Sans JP"/>
-                <a:cs typeface="Noto Sans JP"/>
-              </a:rPr>
-              <a:t>10</a:t>
-            </a:r>
-          </a:p>
-        </p:txBody>
-      </p:sp>
-      <p:sp>
-        <p:nvSpPr>
-          <p:cNvPr id="35" name="retained-10">
-            <a:extLst xmlns:a="http://schemas.openxmlformats.org/drawingml/2006/main">
-              <a:ext uri="{FF2B5EF4-FFF2-40B4-BE49-F238E27FC236}">
-                <a16:creationId xmlns:a16="http://schemas.microsoft.com/office/drawing/2014/main" id="{0EEDA5E0-556A-42C9-9C13-7757C4340524}"/>
-              </a:ext>
-            </a:extLst>
-          </p:cNvPr>
-          <p:cNvSpPr>
-            <a:spLocks xmlns:a="http://schemas.openxmlformats.org/drawingml/2006/main" noGrp="1"/>
-          </p:cNvSpPr>
-          <p:nvPr/>
-        </p:nvSpPr>
-        <p:spPr>
-          <a:xfrm xmlns:a="http://schemas.openxmlformats.org/drawingml/2006/main">
-            <a:off x="7219950" y="3257550"/>
-            <a:ext cx="209550" cy="209550"/>
-          </a:xfrm>
-          <a:prstGeom xmlns:a="http://schemas.openxmlformats.org/drawingml/2006/main" prst="rect">
-            <a:avLst/>
-          </a:prstGeom>
-          <a:solidFill xmlns:a="http://schemas.openxmlformats.org/drawingml/2006/main">
-            <a:srgbClr val="9BBB59"/>
-          </a:solidFill>
-          <a:ln xmlns:a="http://schemas.openxmlformats.org/drawingml/2006/main" w="11430">
-            <a:solidFill>
-              <a:srgbClr val="000000"/>
-            </a:solidFill>
-            <a:prstDash val="solid"/>
-          </a:ln>
-        </p:spPr>
-      </p:sp>
-      <p:cxnSp>
-        <p:nvCxnSpPr>
-          <p:cNvPr id="79" name=""/>
-          <p:cNvCxnSpPr>
-            <a:stCxn xmlns:a="http://schemas.openxmlformats.org/drawingml/2006/main" id="33" idx="4"/>
-            <a:endCxn xmlns:a="http://schemas.openxmlformats.org/drawingml/2006/main" id="35" idx="0"/>
-          </p:cNvCxnSpPr>
-          <p:nvPr/>
-        </p:nvCxnSpPr>
-        <p:spPr>
-          <a:xfrm xmlns:a="http://schemas.openxmlformats.org/drawingml/2006/main">
-            <a:off x="7324725" y="2057400"/>
-            <a:ext cx="0" cy="1200150"/>
-          </a:xfrm>
-          <a:prstGeom xmlns:a="http://schemas.openxmlformats.org/drawingml/2006/main" prst="straightConnector1">
-            <a:avLst/>
-          </a:prstGeom>
-          <a:ln xmlns:a="http://schemas.openxmlformats.org/drawingml/2006/main" w="11430">
-            <a:solidFill>
-              <a:srgbClr val="666666"/>
-            </a:solidFill>
-            <a:tailEnd type="triangle" w="sm" len="sm"/>
-          </a:ln>
-        </p:spPr>
-      </p:cxnSp>
-      <p:sp>
-        <p:nvSpPr>
-          <p:cNvPr id="37" name="input-11">
-            <a:extLst xmlns:a="http://schemas.openxmlformats.org/drawingml/2006/main">
-              <a:ext uri="{FF2B5EF4-FFF2-40B4-BE49-F238E27FC236}">
-                <a16:creationId xmlns:a16="http://schemas.microsoft.com/office/drawing/2014/main" id="{A985D515-5AB8-4956-9F54-275025AD9460}"/>
-              </a:ext>
-            </a:extLst>
-          </p:cNvPr>
-          <p:cNvSpPr>
-            <a:spLocks xmlns:a="http://schemas.openxmlformats.org/drawingml/2006/main" noGrp="1"/>
-          </p:cNvSpPr>
-          <p:nvPr/>
-        </p:nvSpPr>
-        <p:spPr>
-          <a:xfrm xmlns:a="http://schemas.openxmlformats.org/drawingml/2006/main">
-            <a:off x="7639050" y="1885950"/>
-            <a:ext cx="171450" cy="171450"/>
-          </a:xfrm>
-          <a:prstGeom xmlns:a="http://schemas.openxmlformats.org/drawingml/2006/main" prst="ellipse">
-            <a:avLst/>
-          </a:prstGeom>
-          <a:solidFill xmlns:a="http://schemas.openxmlformats.org/drawingml/2006/main">
-            <a:srgbClr val="666666"/>
-          </a:solidFill>
-          <a:ln xmlns:a="http://schemas.openxmlformats.org/drawingml/2006/main" w="0">
-            <a:noFill/>
-            <a:prstDash val="solid"/>
-          </a:ln>
-        </p:spPr>
-      </p:sp>
-      <p:sp>
-        <p:nvSpPr>
-          <p:cNvPr id="38" name="minute-11">
-            <a:extLst xmlns:a="http://schemas.openxmlformats.org/drawingml/2006/main">
-              <a:ext uri="{FF2B5EF4-FFF2-40B4-BE49-F238E27FC236}">
-                <a16:creationId xmlns:a16="http://schemas.microsoft.com/office/drawing/2014/main" id="{D4BC4E50-73D9-40CD-9AEB-D7978D5DB334}"/>
-              </a:ext>
-            </a:extLst>
-          </p:cNvPr>
-          <p:cNvSpPr>
-            <a:spLocks xmlns:a="http://schemas.openxmlformats.org/drawingml/2006/main" noGrp="1"/>
-          </p:cNvSpPr>
-          <p:nvPr/>
-        </p:nvSpPr>
-        <p:spPr>
-          <a:xfrm xmlns:a="http://schemas.openxmlformats.org/drawingml/2006/main">
-            <a:off x="7543800" y="1571625"/>
-            <a:ext cx="361950" cy="247650"/>
-          </a:xfrm>
-          <a:prstGeom xmlns:a="http://schemas.openxmlformats.org/drawingml/2006/main" prst="rect">
-            <a:avLst/>
-          </a:prstGeom>
-          <a:noFill xmlns:a="http://schemas.openxmlformats.org/drawingml/2006/main"/>
-          <a:ln xmlns:a="http://schemas.openxmlformats.org/drawingml/2006/main" w="0">
-            <a:noFill/>
-            <a:prstDash val="solid"/>
-          </a:ln>
-        </p:spPr>
-        <p:txBody>
-          <a:bodyPr xmlns:a="http://schemas.openxmlformats.org/drawingml/2006/main" lIns="0" tIns="0" rIns="0" bIns="0" anchor="ctr">
-            <a:noAutofit/>
-          </a:bodyPr>
-          <a:lstStyle xmlns:a="http://schemas.openxmlformats.org/drawingml/2006/main"/>
-          <a:p xmlns:a="http://schemas.openxmlformats.org/drawingml/2006/main">
-            <a:pPr algn="ctr">
-              <a:defRPr sz="1400" b="0">
-                <a:solidFill>
-                  <a:srgbClr val="666666"/>
-                </a:solidFill>
-                <a:latin typeface="Noto Sans JP"/>
-                <a:ea typeface="Noto Sans JP"/>
-                <a:cs typeface="Noto Sans JP"/>
-              </a:defRPr>
-            </a:pPr>
-            <a:r>
-              <a:rPr sz="1400" b="0">
-                <a:solidFill>
-                  <a:srgbClr val="666666"/>
-                </a:solidFill>
-                <a:latin typeface="Noto Sans JP"/>
-                <a:ea typeface="Noto Sans JP"/>
-                <a:cs typeface="Noto Sans JP"/>
-              </a:rPr>
-              <a:t>11</a:t>
-            </a:r>
-          </a:p>
-        </p:txBody>
-      </p:sp>
-      <p:sp>
-        <p:nvSpPr>
-          <p:cNvPr id="39" name="input-12">
-            <a:extLst xmlns:a="http://schemas.openxmlformats.org/drawingml/2006/main">
-              <a:ext uri="{FF2B5EF4-FFF2-40B4-BE49-F238E27FC236}">
-                <a16:creationId xmlns:a16="http://schemas.microsoft.com/office/drawing/2014/main" id="{324E72C1-8572-4CCC-A547-F8D03113DC6C}"/>
-              </a:ext>
-            </a:extLst>
-          </p:cNvPr>
-          <p:cNvSpPr>
-            <a:spLocks xmlns:a="http://schemas.openxmlformats.org/drawingml/2006/main" noGrp="1"/>
-          </p:cNvSpPr>
-          <p:nvPr/>
-        </p:nvSpPr>
-        <p:spPr>
-          <a:xfrm xmlns:a="http://schemas.openxmlformats.org/drawingml/2006/main">
-            <a:off x="8039100" y="1885950"/>
-            <a:ext cx="171450" cy="171450"/>
-          </a:xfrm>
-          <a:prstGeom xmlns:a="http://schemas.openxmlformats.org/drawingml/2006/main" prst="ellipse">
-            <a:avLst/>
-          </a:prstGeom>
-          <a:solidFill xmlns:a="http://schemas.openxmlformats.org/drawingml/2006/main">
-            <a:srgbClr val="666666"/>
-          </a:solidFill>
-          <a:ln xmlns:a="http://schemas.openxmlformats.org/drawingml/2006/main" w="0">
-            <a:noFill/>
-            <a:prstDash val="solid"/>
-          </a:ln>
-        </p:spPr>
-      </p:sp>
-      <p:sp>
-        <p:nvSpPr>
-          <p:cNvPr id="40" name="minute-12">
-            <a:extLst xmlns:a="http://schemas.openxmlformats.org/drawingml/2006/main">
-              <a:ext uri="{FF2B5EF4-FFF2-40B4-BE49-F238E27FC236}">
-                <a16:creationId xmlns:a16="http://schemas.microsoft.com/office/drawing/2014/main" id="{E11A4A67-C452-4B30-948B-E0DDFC587D26}"/>
-              </a:ext>
-            </a:extLst>
-          </p:cNvPr>
-          <p:cNvSpPr>
-            <a:spLocks xmlns:a="http://schemas.openxmlformats.org/drawingml/2006/main" noGrp="1"/>
-          </p:cNvSpPr>
-          <p:nvPr/>
-        </p:nvSpPr>
-        <p:spPr>
-          <a:xfrm xmlns:a="http://schemas.openxmlformats.org/drawingml/2006/main">
-            <a:off x="7943850" y="1571625"/>
-            <a:ext cx="361950" cy="247650"/>
-          </a:xfrm>
-          <a:prstGeom xmlns:a="http://schemas.openxmlformats.org/drawingml/2006/main" prst="rect">
-            <a:avLst/>
-          </a:prstGeom>
-          <a:noFill xmlns:a="http://schemas.openxmlformats.org/drawingml/2006/main"/>
-          <a:ln xmlns:a="http://schemas.openxmlformats.org/drawingml/2006/main" w="0">
-            <a:noFill/>
-            <a:prstDash val="solid"/>
-          </a:ln>
-        </p:spPr>
-        <p:txBody>
-          <a:bodyPr xmlns:a="http://schemas.openxmlformats.org/drawingml/2006/main" lIns="0" tIns="0" rIns="0" bIns="0" anchor="ctr">
-            <a:noAutofit/>
-          </a:bodyPr>
-          <a:lstStyle xmlns:a="http://schemas.openxmlformats.org/drawingml/2006/main"/>
-          <a:p xmlns:a="http://schemas.openxmlformats.org/drawingml/2006/main">
-            <a:pPr algn="ctr">
-              <a:defRPr sz="1400" b="0">
-                <a:solidFill>
-                  <a:srgbClr val="666666"/>
-                </a:solidFill>
-                <a:latin typeface="Noto Sans JP"/>
-                <a:ea typeface="Noto Sans JP"/>
-                <a:cs typeface="Noto Sans JP"/>
-              </a:defRPr>
-            </a:pPr>
-            <a:r>
-              <a:rPr sz="1400" b="0">
-                <a:solidFill>
-                  <a:srgbClr val="666666"/>
-                </a:solidFill>
-                <a:latin typeface="Noto Sans JP"/>
-                <a:ea typeface="Noto Sans JP"/>
-                <a:cs typeface="Noto Sans JP"/>
-              </a:rPr>
-              <a:t>12</a:t>
-            </a:r>
-          </a:p>
-        </p:txBody>
-      </p:sp>
-      <p:sp>
-        <p:nvSpPr>
-          <p:cNvPr id="41" name="axis-unit">
-            <a:extLst xmlns:a="http://schemas.openxmlformats.org/drawingml/2006/main">
-              <a:ext uri="{FF2B5EF4-FFF2-40B4-BE49-F238E27FC236}">
-                <a16:creationId xmlns:a16="http://schemas.microsoft.com/office/drawing/2014/main" id="{502EB53B-9DD1-41D4-906D-08EAE86597B8}"/>
-              </a:ext>
-            </a:extLst>
-          </p:cNvPr>
-          <p:cNvSpPr>
-            <a:spLocks xmlns:a="http://schemas.openxmlformats.org/drawingml/2006/main" noGrp="1"/>
-          </p:cNvSpPr>
-          <p:nvPr/>
-        </p:nvSpPr>
-        <p:spPr>
-          <a:xfrm xmlns:a="http://schemas.openxmlformats.org/drawingml/2006/main">
-            <a:off x="7562850" y="2533650"/>
-            <a:ext cx="904875" cy="266700"/>
-          </a:xfrm>
-          <a:prstGeom xmlns:a="http://schemas.openxmlformats.org/drawingml/2006/main" prst="rect">
-            <a:avLst/>
-          </a:prstGeom>
-          <a:noFill xmlns:a="http://schemas.openxmlformats.org/drawingml/2006/main"/>
-          <a:ln xmlns:a="http://schemas.openxmlformats.org/drawingml/2006/main" w="0">
-            <a:noFill/>
-            <a:prstDash val="solid"/>
-          </a:ln>
-        </p:spPr>
-        <p:txBody>
-          <a:bodyPr xmlns:a="http://schemas.openxmlformats.org/drawingml/2006/main" lIns="0" tIns="0" rIns="0" bIns="0" anchor="ctr">
-            <a:noAutofit/>
-          </a:bodyPr>
-          <a:lstStyle xmlns:a="http://schemas.openxmlformats.org/drawingml/2006/main"/>
-          <a:p xmlns:a="http://schemas.openxmlformats.org/drawingml/2006/main">
-            <a:pPr algn="r">
-              <a:defRPr sz="1400" b="0">
-                <a:solidFill>
-                  <a:srgbClr val="666666"/>
-                </a:solidFill>
-                <a:latin typeface="Noto Sans JP"/>
-                <a:ea typeface="Noto Sans JP"/>
-                <a:cs typeface="Noto Sans JP"/>
-              </a:defRPr>
-            </a:pPr>
-            <a:r>
-              <a:rPr sz="1400" b="0">
-                <a:solidFill>
-                  <a:srgbClr val="666666"/>
-                </a:solidFill>
-                <a:latin typeface="Noto Sans JP"/>
-                <a:ea typeface="Noto Sans JP"/>
-                <a:cs typeface="Noto Sans JP"/>
-              </a:rPr>
-              <a:t>時刻 [分]</a:t>
-            </a:r>
-          </a:p>
-        </p:txBody>
-      </p:sp>
-      <p:sp>
-        <p:nvSpPr>
-          <p:cNvPr id="42" name="arrow-meaning">
-            <a:extLst xmlns:a="http://schemas.openxmlformats.org/drawingml/2006/main">
-              <a:ext uri="{FF2B5EF4-FFF2-40B4-BE49-F238E27FC236}">
-                <a16:creationId xmlns:a16="http://schemas.microsoft.com/office/drawing/2014/main" id="{0072D521-6800-40C9-B064-900890E78F62}"/>
-              </a:ext>
-            </a:extLst>
-          </p:cNvPr>
-          <p:cNvSpPr>
-            <a:spLocks xmlns:a="http://schemas.openxmlformats.org/drawingml/2006/main" noGrp="1"/>
-          </p:cNvSpPr>
-          <p:nvPr/>
-        </p:nvSpPr>
-        <p:spPr>
-          <a:xfrm xmlns:a="http://schemas.openxmlformats.org/drawingml/2006/main">
-            <a:off x="3238500" y="3838575"/>
-            <a:ext cx="4857750" cy="285750"/>
-          </a:xfrm>
-          <a:prstGeom xmlns:a="http://schemas.openxmlformats.org/drawingml/2006/main" prst="rect">
-            <a:avLst/>
-          </a:prstGeom>
-          <a:noFill xmlns:a="http://schemas.openxmlformats.org/drawingml/2006/main"/>
-          <a:ln xmlns:a="http://schemas.openxmlformats.org/drawingml/2006/main" w="0">
-            <a:noFill/>
-            <a:prstDash val="solid"/>
-          </a:ln>
-        </p:spPr>
-        <p:txBody>
-          <a:bodyPr xmlns:a="http://schemas.openxmlformats.org/drawingml/2006/main" lIns="0" tIns="0" rIns="0" bIns="0" anchor="ctr">
-            <a:noAutofit/>
-          </a:bodyPr>
-          <a:lstStyle xmlns:a="http://schemas.openxmlformats.org/drawingml/2006/main"/>
-          <a:p xmlns:a="http://schemas.openxmlformats.org/drawingml/2006/main">
-            <a:pPr algn="l">
-              <a:defRPr sz="1600" b="0">
-                <a:solidFill>
-                  <a:srgbClr val="666666"/>
-                </a:solidFill>
-                <a:latin typeface="Noto Sans JP"/>
-                <a:ea typeface="Noto Sans JP"/>
-                <a:cs typeface="Noto Sans JP"/>
-              </a:defRPr>
-            </a:pPr>
-            <a:r>
-              <a:rPr sz="1600" b="0">
-                <a:solidFill>
-                  <a:srgbClr val="666666"/>
-                </a:solidFill>
-                <a:latin typeface="Noto Sans JP"/>
-                <a:ea typeface="Noto Sans JP"/>
-                <a:cs typeface="Noto Sans JP"/>
-              </a:rPr>
-              <a:t>矢印は「保持する点」の対応</a:t>
-            </a:r>
-          </a:p>
-        </p:txBody>
-      </p:sp>
-      <p:sp>
-        <p:nvSpPr>
-          <p:cNvPr id="43" name="source-note">
-            <a:extLst xmlns:a="http://schemas.openxmlformats.org/drawingml/2006/main">
-              <a:ext uri="{FF2B5EF4-FFF2-40B4-BE49-F238E27FC236}">
-                <a16:creationId xmlns:a16="http://schemas.microsoft.com/office/drawing/2014/main" id="{93C44056-5186-429A-B756-290491DB7F2D}"/>
-              </a:ext>
-            </a:extLst>
-          </p:cNvPr>
-          <p:cNvSpPr>
-            <a:spLocks xmlns:a="http://schemas.openxmlformats.org/drawingml/2006/main" noGrp="1"/>
-          </p:cNvSpPr>
-          <p:nvPr/>
-        </p:nvSpPr>
-        <p:spPr>
-          <a:xfrm xmlns:a="http://schemas.openxmlformats.org/drawingml/2006/main">
-            <a:off x="457200" y="4219575"/>
-            <a:ext cx="8229600" cy="238125"/>
-          </a:xfrm>
-          <a:prstGeom xmlns:a="http://schemas.openxmlformats.org/drawingml/2006/main" prst="rect">
-            <a:avLst/>
-          </a:prstGeom>
-          <a:noFill xmlns:a="http://schemas.openxmlformats.org/drawingml/2006/main"/>
-          <a:ln xmlns:a="http://schemas.openxmlformats.org/drawingml/2006/main" w="0">
-            <a:noFill/>
-            <a:prstDash val="solid"/>
-          </a:ln>
-        </p:spPr>
-        <p:txBody>
-          <a:bodyPr xmlns:a="http://schemas.openxmlformats.org/drawingml/2006/main" lIns="0" tIns="0" rIns="0" bIns="0" anchor="ctr">
-            <a:noAutofit/>
-          </a:bodyPr>
-          <a:lstStyle xmlns:a="http://schemas.openxmlformats.org/drawingml/2006/main"/>
-          <a:p xmlns:a="http://schemas.openxmlformats.org/drawingml/2006/main">
-            <a:pPr algn="l">
-              <a:defRPr sz="1400" b="0">
-                <a:solidFill>
-                  <a:srgbClr val="666666"/>
-                </a:solidFill>
-                <a:latin typeface="Noto Sans JP"/>
-                <a:ea typeface="Noto Sans JP"/>
-                <a:cs typeface="Noto Sans JP"/>
-              </a:defRPr>
-            </a:pPr>
-            <a:r>
-              <a:rPr sz="1400" b="0">
-                <a:solidFill>
-                  <a:srgbClr val="666666"/>
-                </a:solidFill>
-                <a:latin typeface="Noto Sans JP"/>
-                <a:ea typeface="Noto Sans JP"/>
-                <a:cs typeface="Noto Sans JP"/>
-              </a:rPr>
-              <a:t>合成系列1例／開始時刻0分／間引き処理だけを確認</a:t>
+              <a:t>画像は各章の資料から選ぶ。ここでは配置枠のみを示す</a:t>
             </a:r>
           </a:p>
         </p:txBody>
@@ -4458,7 +3982,7 @@
     </p:spTree>
     <p:extLst>
       <p:ext uri="{BB962C8B-B14F-4D97-AF65-F5344CB8AC3E}">
-        <p14:creationId xmlns:p14="http://schemas.microsoft.com/office/powerpoint/2010/main" val="1619408129"/>
+        <p14:creationId xmlns:p14="http://schemas.microsoft.com/office/powerpoint/2010/main" val="221740847"/>
       </p:ext>
     </p:extLst>
   </p:cSld>
@@ -4484,53 +4008,22 @@
       <p:grpSpPr>
         <a:xfrm xmlns:a="http://schemas.openxmlformats.org/drawingml/2006/main"/>
       </p:grpSpPr>
-      <p:sp>
-        <p:nvSpPr>
-          <p:cNvPr id="12" name="footer-line">
-            <a:extLst xmlns:a="http://schemas.openxmlformats.org/drawingml/2006/main">
-              <a:ext uri="{FF2B5EF4-FFF2-40B4-BE49-F238E27FC236}">
-                <a16:creationId xmlns:a16="http://schemas.microsoft.com/office/drawing/2014/main" id="{9072F46D-C73C-48F5-B0E7-D0A5A37782F3}"/>
-              </a:ext>
-            </a:extLst>
-          </p:cNvPr>
-          <p:cNvSpPr>
-            <a:spLocks xmlns:a="http://schemas.openxmlformats.org/drawingml/2006/main" noGrp="1"/>
-          </p:cNvSpPr>
-          <p:nvPr/>
-        </p:nvSpPr>
-        <p:spPr>
-          <a:xfrm xmlns:a="http://schemas.openxmlformats.org/drawingml/2006/main">
-            <a:off x="0" y="4613148"/>
-            <a:ext cx="9144000" cy="53950"/>
-          </a:xfrm>
-          <a:prstGeom xmlns:a="http://schemas.openxmlformats.org/drawingml/2006/main" prst="rect">
-            <a:avLst/>
-          </a:prstGeom>
-          <a:solidFill xmlns:a="http://schemas.openxmlformats.org/drawingml/2006/main">
-            <a:srgbClr val="9BBB59"/>
-          </a:solidFill>
-          <a:ln xmlns:a="http://schemas.openxmlformats.org/drawingml/2006/main" w="0">
-            <a:noFill/>
-            <a:prstDash val="solid"/>
-          </a:ln>
-        </p:spPr>
-      </p:sp>
       <p:pic>
         <p:nvPicPr>
-          <p:cNvPr id="13" name=""/>
+          <p:cNvPr id="7" name=""/>
           <p:cNvPicPr>
             <a:picLocks xmlns:a="http://schemas.openxmlformats.org/drawingml/2006/main" noChangeAspect="1"/>
           </p:cNvPicPr>
           <p:nvPr/>
         </p:nvPicPr>
         <p:blipFill>
-          <a:blip xmlns:r="http://schemas.openxmlformats.org/officeDocument/2006/relationships" xmlns:a="http://schemas.openxmlformats.org/drawingml/2006/main" r:embed="R2a3f99800df94954"/>
+          <a:blip xmlns:r="http://schemas.openxmlformats.org/officeDocument/2006/relationships" xmlns:a="http://schemas.openxmlformats.org/drawingml/2006/main" r:embed="R38cc4446be0540ec"/>
           <a:stretch xmlns:a="http://schemas.openxmlformats.org/drawingml/2006/main"/>
         </p:blipFill>
         <p:spPr>
           <a:xfrm xmlns:a="http://schemas.openxmlformats.org/drawingml/2006/main">
-            <a:off x="293522" y="4803343"/>
-            <a:ext cx="818388" cy="229821"/>
+            <a:off x="7697419" y="220370"/>
+            <a:ext cx="1107338" cy="310965"/>
           </a:xfrm>
           <a:prstGeom xmlns:a="http://schemas.openxmlformats.org/drawingml/2006/main" prst="rect">
             <a:avLst/>
@@ -4539,10 +4032,10 @@
       </p:pic>
       <p:sp>
         <p:nvSpPr>
-          <p:cNvPr id="3" name="page">
-            <a:extLst xmlns:a="http://schemas.openxmlformats.org/drawingml/2006/main">
-              <a:ext uri="{FF2B5EF4-FFF2-40B4-BE49-F238E27FC236}">
-                <a16:creationId xmlns:a16="http://schemas.microsoft.com/office/drawing/2014/main" id="{1231E002-247E-4724-A99A-D38581F1375F}"/>
+          <p:cNvPr id="2" name="page">
+            <a:extLst xmlns:a="http://schemas.openxmlformats.org/drawingml/2006/main">
+              <a:ext uri="{FF2B5EF4-FFF2-40B4-BE49-F238E27FC236}">
+                <a16:creationId xmlns:a16="http://schemas.microsoft.com/office/drawing/2014/main" id="{B721AF9C-3A91-4CD3-819E-C25C650FFDC4}"/>
               </a:ext>
             </a:extLst>
           </p:cNvPr>
@@ -4574,7 +4067,7 @@
             <a:pPr algn="r">
               <a:defRPr sz="1400" b="0">
                 <a:solidFill>
-                  <a:srgbClr val="000000"/>
+                  <a:srgbClr val="17202A"/>
                 </a:solidFill>
                 <a:latin typeface="Arial"/>
                 <a:ea typeface="Arial"/>
@@ -4584,7 +4077,7 @@
             <a:r>
               <a:rPr sz="1400" b="0">
                 <a:solidFill>
-                  <a:srgbClr val="000000"/>
+                  <a:srgbClr val="17202A"/>
                 </a:solidFill>
                 <a:latin typeface="Arial"/>
                 <a:ea typeface="Arial"/>
@@ -4597,10 +4090,10 @@
       </p:sp>
       <p:sp>
         <p:nvSpPr>
-          <p:cNvPr id="4" name="fictional-disclosure">
-            <a:extLst xmlns:a="http://schemas.openxmlformats.org/drawingml/2006/main">
-              <a:ext uri="{FF2B5EF4-FFF2-40B4-BE49-F238E27FC236}">
-                <a16:creationId xmlns:a16="http://schemas.microsoft.com/office/drawing/2014/main" id="{A20263D1-03A3-4A63-9EA5-DF657B70660C}"/>
+          <p:cNvPr id="3" name="fictional-disclosure">
+            <a:extLst xmlns:a="http://schemas.openxmlformats.org/drawingml/2006/main">
+              <a:ext uri="{FF2B5EF4-FFF2-40B4-BE49-F238E27FC236}">
+                <a16:creationId xmlns:a16="http://schemas.microsoft.com/office/drawing/2014/main" id="{B77EF202-38CA-436D-8C70-8280C9A04606}"/>
               </a:ext>
             </a:extLst>
           </p:cNvPr>
@@ -4632,7 +4125,7 @@
             <a:pPr algn="l">
               <a:defRPr sz="1050" b="0">
                 <a:solidFill>
-                  <a:srgbClr val="666666"/>
+                  <a:srgbClr val="59636E"/>
                 </a:solidFill>
                 <a:latin typeface="Noto Sans JP"/>
                 <a:ea typeface="Noto Sans JP"/>
@@ -4642,7 +4135,7 @@
             <a:r>
               <a:rPr sz="1050" b="0">
                 <a:solidFill>
-                  <a:srgbClr val="666666"/>
+                  <a:srgbClr val="59636E"/>
                 </a:solidFill>
                 <a:latin typeface="Noto Sans JP"/>
                 <a:ea typeface="Noto Sans JP"/>
@@ -4655,22 +4148,53 @@
       </p:sp>
       <p:sp>
         <p:nvSpPr>
-          <p:cNvPr id="5" name="title">
-            <a:extLst xmlns:a="http://schemas.openxmlformats.org/drawingml/2006/main">
-              <a:ext uri="{FF2B5EF4-FFF2-40B4-BE49-F238E27FC236}">
-                <a16:creationId xmlns:a16="http://schemas.microsoft.com/office/drawing/2014/main" id="{525C9A79-D588-4839-A10B-48ABB9068151}"/>
-              </a:ext>
-            </a:extLst>
-          </p:cNvPr>
-          <p:cNvSpPr>
-            <a:spLocks xmlns:a="http://schemas.openxmlformats.org/drawingml/2006/main" noGrp="1"/>
-          </p:cNvSpPr>
-          <p:nvPr/>
-        </p:nvSpPr>
-        <p:spPr>
-          <a:xfrm xmlns:a="http://schemas.openxmlformats.org/drawingml/2006/main">
-            <a:off x="257175" y="95250"/>
-            <a:ext cx="8572500" cy="514350"/>
+          <p:cNvPr id="4" name="upper-chapter-band">
+            <a:extLst xmlns:a="http://schemas.openxmlformats.org/drawingml/2006/main">
+              <a:ext uri="{FF2B5EF4-FFF2-40B4-BE49-F238E27FC236}">
+                <a16:creationId xmlns:a16="http://schemas.microsoft.com/office/drawing/2014/main" id="{9F4D6106-829B-4BA2-9D96-5D9CA2FD9402}"/>
+              </a:ext>
+            </a:extLst>
+          </p:cNvPr>
+          <p:cNvSpPr>
+            <a:spLocks xmlns:a="http://schemas.openxmlformats.org/drawingml/2006/main" noGrp="1"/>
+          </p:cNvSpPr>
+          <p:nvPr/>
+        </p:nvSpPr>
+        <p:spPr>
+          <a:xfrm xmlns:a="http://schemas.openxmlformats.org/drawingml/2006/main">
+            <a:off x="457200" y="971550"/>
+            <a:ext cx="7772400" cy="821531"/>
+          </a:xfrm>
+          <a:prstGeom xmlns:a="http://schemas.openxmlformats.org/drawingml/2006/main" prst="rect">
+            <a:avLst/>
+          </a:prstGeom>
+          <a:solidFill xmlns:a="http://schemas.openxmlformats.org/drawingml/2006/main">
+            <a:srgbClr val="9BBB59"/>
+          </a:solidFill>
+          <a:ln xmlns:a="http://schemas.openxmlformats.org/drawingml/2006/main" w="0">
+            <a:noFill/>
+            <a:prstDash val="solid"/>
+          </a:ln>
+        </p:spPr>
+      </p:sp>
+      <p:sp>
+        <p:nvSpPr>
+          <p:cNvPr id="5" name="chapter">
+            <a:extLst xmlns:a="http://schemas.openxmlformats.org/drawingml/2006/main">
+              <a:ext uri="{FF2B5EF4-FFF2-40B4-BE49-F238E27FC236}">
+                <a16:creationId xmlns:a16="http://schemas.microsoft.com/office/drawing/2014/main" id="{E97FE48B-24E0-4B6C-83D0-1A42A1010803}"/>
+              </a:ext>
+            </a:extLst>
+          </p:cNvPr>
+          <p:cNvSpPr>
+            <a:spLocks xmlns:a="http://schemas.openxmlformats.org/drawingml/2006/main" noGrp="1"/>
+          </p:cNvSpPr>
+          <p:nvPr/>
+        </p:nvSpPr>
+        <p:spPr>
+          <a:xfrm xmlns:a="http://schemas.openxmlformats.org/drawingml/2006/main">
+            <a:off x="671513" y="1035844"/>
+            <a:ext cx="7358063" cy="650081"/>
           </a:xfrm>
           <a:prstGeom xmlns:a="http://schemas.openxmlformats.org/drawingml/2006/main" prst="rect">
             <a:avLst/>
@@ -4688,9 +4212,9 @@
           <a:lstStyle xmlns:a="http://schemas.openxmlformats.org/drawingml/2006/main"/>
           <a:p xmlns:a="http://schemas.openxmlformats.org/drawingml/2006/main">
             <a:pPr algn="l">
-              <a:defRPr sz="2700" b="1">
-                <a:solidFill>
-                  <a:srgbClr val="000000"/>
+              <a:defRPr sz="3769" b="1">
+                <a:solidFill>
+                  <a:srgbClr val="17202A"/>
                 </a:solidFill>
                 <a:latin typeface="Noto Sans JP"/>
                 <a:ea typeface="Noto Sans JP"/>
@@ -4698,37 +4222,37 @@
               </a:defRPr>
             </a:pPr>
             <a:r>
-              <a:rPr sz="2700" b="1">
-                <a:solidFill>
-                  <a:srgbClr val="000000"/>
+              <a:rPr sz="3769" b="1">
+                <a:solidFill>
+                  <a:srgbClr val="17202A"/>
                 </a:solidFill>
                 <a:latin typeface="Noto Sans JP"/>
                 <a:ea typeface="Noto Sans JP"/>
                 <a:cs typeface="Noto Sans JP"/>
               </a:rPr>
-              <a:t>この例では高い値が記録に残らない</a:t>
-            </a:r>
-          </a:p>
-        </p:txBody>
-      </p:sp>
-      <p:sp>
-        <p:nvSpPr>
-          <p:cNvPr id="6" name="message">
-            <a:extLst xmlns:a="http://schemas.openxmlformats.org/drawingml/2006/main">
-              <a:ext uri="{FF2B5EF4-FFF2-40B4-BE49-F238E27FC236}">
-                <a16:creationId xmlns:a16="http://schemas.microsoft.com/office/drawing/2014/main" id="{E8A191A5-D662-4754-A6C9-E2E9CD4675A5}"/>
-              </a:ext>
-            </a:extLst>
-          </p:cNvPr>
-          <p:cNvSpPr>
-            <a:spLocks xmlns:a="http://schemas.openxmlformats.org/drawingml/2006/main" noGrp="1"/>
-          </p:cNvSpPr>
-          <p:nvPr/>
-        </p:nvSpPr>
-        <p:spPr>
-          <a:xfrm xmlns:a="http://schemas.openxmlformats.org/drawingml/2006/main">
-            <a:off x="457200" y="819150"/>
-            <a:ext cx="8229600" cy="628650"/>
+              <a:t>03  ここまでの結果</a:t>
+            </a:r>
+          </a:p>
+        </p:txBody>
+      </p:sp>
+      <p:sp>
+        <p:nvSpPr>
+          <p:cNvPr id="6" name="chapter-guide">
+            <a:extLst xmlns:a="http://schemas.openxmlformats.org/drawingml/2006/main">
+              <a:ext uri="{FF2B5EF4-FFF2-40B4-BE49-F238E27FC236}">
+                <a16:creationId xmlns:a16="http://schemas.microsoft.com/office/drawing/2014/main" id="{D50848F8-6700-459B-BA92-CBB7AD4390F1}"/>
+              </a:ext>
+            </a:extLst>
+          </p:cNvPr>
+          <p:cNvSpPr>
+            <a:spLocks xmlns:a="http://schemas.openxmlformats.org/drawingml/2006/main" noGrp="1"/>
+          </p:cNvSpPr>
+          <p:nvPr/>
+        </p:nvSpPr>
+        <p:spPr>
+          <a:xfrm xmlns:a="http://schemas.openxmlformats.org/drawingml/2006/main">
+            <a:off x="685800" y="2114550"/>
+            <a:ext cx="7715250" cy="785813"/>
           </a:xfrm>
           <a:prstGeom xmlns:a="http://schemas.openxmlformats.org/drawingml/2006/main" prst="rect">
             <a:avLst/>
@@ -4746,9 +4270,9 @@
           <a:lstStyle xmlns:a="http://schemas.openxmlformats.org/drawingml/2006/main"/>
           <a:p xmlns:a="http://schemas.openxmlformats.org/drawingml/2006/main">
             <a:pPr algn="l">
-              <a:defRPr sz="1900" b="1">
-                <a:solidFill>
-                  <a:srgbClr val="000000"/>
+              <a:defRPr sz="2200" b="0">
+                <a:solidFill>
+                  <a:srgbClr val="17202A"/>
                 </a:solidFill>
                 <a:latin typeface="Noto Sans JP"/>
                 <a:ea typeface="Noto Sans JP"/>
@@ -4756,309 +4280,15 @@
               </a:defRPr>
             </a:pPr>
             <a:r>
-              <a:rPr sz="1900" b="1">
-                <a:solidFill>
-                  <a:srgbClr val="000000"/>
+              <a:rPr sz="2200" b="0">
+                <a:solidFill>
+                  <a:srgbClr val="17202A"/>
                 </a:solidFill>
                 <a:latin typeface="Noto Sans JP"/>
                 <a:ea typeface="Noto Sans JP"/>
                 <a:cs typeface="Noto Sans JP"/>
               </a:rPr>
-              <a:t>5分間隔の保持点には、1000 ppmを超える値がない</a:t>
-            </a:r>
-          </a:p>
-        </p:txBody>
-      </p:sp>
-      <p:graphicFrame>
-        <p:nvGraphicFramePr>
-          <p:cNvPr id="18" name="Chart"/>
-          <p:cNvGraphicFramePr/>
-          <p:nvPr/>
-        </p:nvGraphicFramePr>
-        <p:xfrm>
-          <a:off xmlns:a="http://schemas.openxmlformats.org/drawingml/2006/main" x="438150" y="1619250"/>
-          <a:ext xmlns:a="http://schemas.openxmlformats.org/drawingml/2006/main" cx="6210300" cy="2781300"/>
-        </p:xfrm>
-        <a:graphic xmlns:a="http://schemas.openxmlformats.org/drawingml/2006/main">
-          <a:graphicData uri="http://schemas.openxmlformats.org/drawingml/2006/chart">
-            <c:chart xmlns:r="http://schemas.openxmlformats.org/officeDocument/2006/relationships" xmlns:c="http://schemas.openxmlformats.org/drawingml/2006/chart" r:id="R75c032e85e95400f"/>
-          </a:graphicData>
-        </a:graphic>
-      </p:graphicFrame>
-      <p:sp>
-        <p:nvSpPr>
-          <p:cNvPr id="8" name="maximum-label">
-            <a:extLst xmlns:a="http://schemas.openxmlformats.org/drawingml/2006/main">
-              <a:ext uri="{FF2B5EF4-FFF2-40B4-BE49-F238E27FC236}">
-                <a16:creationId xmlns:a16="http://schemas.microsoft.com/office/drawing/2014/main" id="{9DE72CB7-8F7B-4EA1-95FF-E4F18CDD8805}"/>
-              </a:ext>
-            </a:extLst>
-          </p:cNvPr>
-          <p:cNvSpPr>
-            <a:spLocks xmlns:a="http://schemas.openxmlformats.org/drawingml/2006/main" noGrp="1"/>
-          </p:cNvSpPr>
-          <p:nvPr/>
-        </p:nvSpPr>
-        <p:spPr>
-          <a:xfrm xmlns:a="http://schemas.openxmlformats.org/drawingml/2006/main">
-            <a:off x="6896100" y="1781175"/>
-            <a:ext cx="1809750" cy="285750"/>
-          </a:xfrm>
-          <a:prstGeom xmlns:a="http://schemas.openxmlformats.org/drawingml/2006/main" prst="rect">
-            <a:avLst/>
-          </a:prstGeom>
-          <a:noFill xmlns:a="http://schemas.openxmlformats.org/drawingml/2006/main"/>
-          <a:ln xmlns:a="http://schemas.openxmlformats.org/drawingml/2006/main" w="0">
-            <a:noFill/>
-            <a:prstDash val="solid"/>
-          </a:ln>
-        </p:spPr>
-        <p:txBody>
-          <a:bodyPr xmlns:a="http://schemas.openxmlformats.org/drawingml/2006/main" lIns="0" tIns="0" rIns="0" bIns="0" anchor="ctr">
-            <a:noAutofit/>
-          </a:bodyPr>
-          <a:lstStyle xmlns:a="http://schemas.openxmlformats.org/drawingml/2006/main"/>
-          <a:p xmlns:a="http://schemas.openxmlformats.org/drawingml/2006/main">
-            <a:pPr algn="l">
-              <a:defRPr sz="1800" b="1">
-                <a:solidFill>
-                  <a:srgbClr val="000000"/>
-                </a:solidFill>
-                <a:latin typeface="Noto Sans JP"/>
-                <a:ea typeface="Noto Sans JP"/>
-                <a:cs typeface="Noto Sans JP"/>
-              </a:defRPr>
-            </a:pPr>
-            <a:r>
-              <a:rPr sz="1800" b="1">
-                <a:solidFill>
-                  <a:srgbClr val="000000"/>
-                </a:solidFill>
-                <a:latin typeface="Noto Sans JP"/>
-                <a:ea typeface="Noto Sans JP"/>
-                <a:cs typeface="Noto Sans JP"/>
-              </a:rPr>
-              <a:t>保持最大値</a:t>
-            </a:r>
-          </a:p>
-        </p:txBody>
-      </p:sp>
-      <p:sp>
-        <p:nvSpPr>
-          <p:cNvPr id="9" name="all-max">
-            <a:extLst xmlns:a="http://schemas.openxmlformats.org/drawingml/2006/main">
-              <a:ext uri="{FF2B5EF4-FFF2-40B4-BE49-F238E27FC236}">
-                <a16:creationId xmlns:a16="http://schemas.microsoft.com/office/drawing/2014/main" id="{9C2274B3-9371-4CF7-B3ED-A11B2BAFAE4B}"/>
-              </a:ext>
-            </a:extLst>
-          </p:cNvPr>
-          <p:cNvSpPr>
-            <a:spLocks xmlns:a="http://schemas.openxmlformats.org/drawingml/2006/main" noGrp="1"/>
-          </p:cNvSpPr>
-          <p:nvPr/>
-        </p:nvSpPr>
-        <p:spPr>
-          <a:xfrm xmlns:a="http://schemas.openxmlformats.org/drawingml/2006/main">
-            <a:off x="6896100" y="2228850"/>
-            <a:ext cx="1809750" cy="704850"/>
-          </a:xfrm>
-          <a:prstGeom xmlns:a="http://schemas.openxmlformats.org/drawingml/2006/main" prst="rect">
-            <a:avLst/>
-          </a:prstGeom>
-          <a:noFill xmlns:a="http://schemas.openxmlformats.org/drawingml/2006/main"/>
-          <a:ln xmlns:a="http://schemas.openxmlformats.org/drawingml/2006/main" w="0">
-            <a:noFill/>
-            <a:prstDash val="solid"/>
-          </a:ln>
-        </p:spPr>
-        <p:txBody>
-          <a:bodyPr xmlns:a="http://schemas.openxmlformats.org/drawingml/2006/main" lIns="0" tIns="0" rIns="0" bIns="0" anchor="ctr">
-            <a:noAutofit/>
-          </a:bodyPr>
-          <a:lstStyle xmlns:a="http://schemas.openxmlformats.org/drawingml/2006/main"/>
-          <a:p xmlns:a="http://schemas.openxmlformats.org/drawingml/2006/main">
-            <a:pPr algn="l">
-              <a:defRPr sz="1900" b="0">
-                <a:solidFill>
-                  <a:srgbClr val="000000"/>
-                </a:solidFill>
-                <a:latin typeface="Noto Sans JP"/>
-                <a:ea typeface="Noto Sans JP"/>
-                <a:cs typeface="Noto Sans JP"/>
-              </a:defRPr>
-            </a:pPr>
-            <a:r>
-              <a:rPr sz="1900" b="0">
-                <a:solidFill>
-                  <a:srgbClr val="000000"/>
-                </a:solidFill>
-                <a:latin typeface="Noto Sans JP"/>
-                <a:ea typeface="Noto Sans JP"/>
-                <a:cs typeface="Noto Sans JP"/>
-              </a:rPr>
-              <a:t>全13点</a:t>
-            </a:r>
-          </a:p>
-          <a:p xmlns:a="http://schemas.openxmlformats.org/drawingml/2006/main">
-            <a:pPr algn="l">
-              <a:defRPr sz="1900" b="0">
-                <a:solidFill>
-                  <a:srgbClr val="000000"/>
-                </a:solidFill>
-                <a:latin typeface="Noto Sans JP"/>
-                <a:ea typeface="Noto Sans JP"/>
-                <a:cs typeface="Noto Sans JP"/>
-              </a:defRPr>
-            </a:pPr>
-            <a:r>
-              <a:rPr sz="1900" b="0">
-                <a:solidFill>
-                  <a:srgbClr val="000000"/>
-                </a:solidFill>
-                <a:latin typeface="Noto Sans JP"/>
-                <a:ea typeface="Noto Sans JP"/>
-                <a:cs typeface="Noto Sans JP"/>
-              </a:rPr>
-              <a:t>1120 ppm</a:t>
-            </a:r>
-          </a:p>
-        </p:txBody>
-      </p:sp>
-      <p:sp>
-        <p:nvSpPr>
-          <p:cNvPr id="10" name="kept-max">
-            <a:extLst xmlns:a="http://schemas.openxmlformats.org/drawingml/2006/main">
-              <a:ext uri="{FF2B5EF4-FFF2-40B4-BE49-F238E27FC236}">
-                <a16:creationId xmlns:a16="http://schemas.microsoft.com/office/drawing/2014/main" id="{41280B54-2867-4C4D-849D-04D90437E9EE}"/>
-              </a:ext>
-            </a:extLst>
-          </p:cNvPr>
-          <p:cNvSpPr>
-            <a:spLocks xmlns:a="http://schemas.openxmlformats.org/drawingml/2006/main" noGrp="1"/>
-          </p:cNvSpPr>
-          <p:nvPr/>
-        </p:nvSpPr>
-        <p:spPr>
-          <a:xfrm xmlns:a="http://schemas.openxmlformats.org/drawingml/2006/main">
-            <a:off x="6896100" y="3190875"/>
-            <a:ext cx="1809750" cy="704850"/>
-          </a:xfrm>
-          <a:prstGeom xmlns:a="http://schemas.openxmlformats.org/drawingml/2006/main" prst="rect">
-            <a:avLst/>
-          </a:prstGeom>
-          <a:noFill xmlns:a="http://schemas.openxmlformats.org/drawingml/2006/main"/>
-          <a:ln xmlns:a="http://schemas.openxmlformats.org/drawingml/2006/main" w="0">
-            <a:noFill/>
-            <a:prstDash val="solid"/>
-          </a:ln>
-        </p:spPr>
-        <p:txBody>
-          <a:bodyPr xmlns:a="http://schemas.openxmlformats.org/drawingml/2006/main" lIns="0" tIns="0" rIns="0" bIns="0" anchor="ctr">
-            <a:noAutofit/>
-          </a:bodyPr>
-          <a:lstStyle xmlns:a="http://schemas.openxmlformats.org/drawingml/2006/main"/>
-          <a:p xmlns:a="http://schemas.openxmlformats.org/drawingml/2006/main">
-            <a:pPr algn="l">
-              <a:defRPr sz="1900" b="1">
-                <a:solidFill>
-                  <a:srgbClr val="000000"/>
-                </a:solidFill>
-                <a:latin typeface="Noto Sans JP"/>
-                <a:ea typeface="Noto Sans JP"/>
-                <a:cs typeface="Noto Sans JP"/>
-              </a:defRPr>
-            </a:pPr>
-            <a:r>
-              <a:rPr sz="1900" b="1">
-                <a:solidFill>
-                  <a:srgbClr val="000000"/>
-                </a:solidFill>
-                <a:latin typeface="Noto Sans JP"/>
-                <a:ea typeface="Noto Sans JP"/>
-                <a:cs typeface="Noto Sans JP"/>
-              </a:rPr>
-              <a:t>保持3点</a:t>
-            </a:r>
-          </a:p>
-          <a:p xmlns:a="http://schemas.openxmlformats.org/drawingml/2006/main">
-            <a:pPr algn="l">
-              <a:defRPr sz="1900" b="1">
-                <a:solidFill>
-                  <a:srgbClr val="000000"/>
-                </a:solidFill>
-                <a:latin typeface="Noto Sans JP"/>
-                <a:ea typeface="Noto Sans JP"/>
-                <a:cs typeface="Noto Sans JP"/>
-              </a:defRPr>
-            </a:pPr>
-            <a:r>
-              <a:rPr sz="1900" b="1">
-                <a:solidFill>
-                  <a:srgbClr val="000000"/>
-                </a:solidFill>
-                <a:latin typeface="Noto Sans JP"/>
-                <a:ea typeface="Noto Sans JP"/>
-                <a:cs typeface="Noto Sans JP"/>
-              </a:rPr>
-              <a:t>970 ppm</a:t>
-            </a:r>
-          </a:p>
-        </p:txBody>
-      </p:sp>
-      <p:sp>
-        <p:nvSpPr>
-          <p:cNvPr id="11" name="condition">
-            <a:extLst xmlns:a="http://schemas.openxmlformats.org/drawingml/2006/main">
-              <a:ext uri="{FF2B5EF4-FFF2-40B4-BE49-F238E27FC236}">
-                <a16:creationId xmlns:a16="http://schemas.microsoft.com/office/drawing/2014/main" id="{7D8D482A-FA5B-4DD1-B60B-FEDB4397CEB2}"/>
-              </a:ext>
-            </a:extLst>
-          </p:cNvPr>
-          <p:cNvSpPr>
-            <a:spLocks xmlns:a="http://schemas.openxmlformats.org/drawingml/2006/main" noGrp="1"/>
-          </p:cNvSpPr>
-          <p:nvPr/>
-        </p:nvSpPr>
-        <p:spPr>
-          <a:xfrm xmlns:a="http://schemas.openxmlformats.org/drawingml/2006/main">
-            <a:off x="457200" y="4333875"/>
-            <a:ext cx="8191500" cy="228600"/>
-          </a:xfrm>
-          <a:prstGeom xmlns:a="http://schemas.openxmlformats.org/drawingml/2006/main" prst="rect">
-            <a:avLst/>
-          </a:prstGeom>
-          <a:noFill xmlns:a="http://schemas.openxmlformats.org/drawingml/2006/main"/>
-          <a:ln xmlns:a="http://schemas.openxmlformats.org/drawingml/2006/main" w="0">
-            <a:noFill/>
-            <a:prstDash val="solid"/>
-          </a:ln>
-        </p:spPr>
-        <p:txBody>
-          <a:bodyPr xmlns:a="http://schemas.openxmlformats.org/drawingml/2006/main" lIns="0" tIns="0" rIns="0" bIns="0" anchor="ctr">
-            <a:noAutofit/>
-          </a:bodyPr>
-          <a:lstStyle xmlns:a="http://schemas.openxmlformats.org/drawingml/2006/main"/>
-          <a:p xmlns:a="http://schemas.openxmlformats.org/drawingml/2006/main">
-            <a:pPr algn="l">
-              <a:defRPr sz="1200" b="0">
-                <a:solidFill>
-                  <a:srgbClr val="666666"/>
-                </a:solidFill>
-                <a:latin typeface="Noto Sans JP"/>
-                <a:ea typeface="Noto Sans JP"/>
-                <a:cs typeface="Noto Sans JP"/>
-              </a:defRPr>
-            </a:pPr>
-            <a:r>
-              <a:rPr sz="1200" b="0">
-                <a:solidFill>
-                  <a:srgbClr val="666666"/>
-                </a:solidFill>
-                <a:latin typeface="Noto Sans JP"/>
-                <a:ea typeface="Noto Sans JP"/>
-                <a:cs typeface="Noto Sans JP"/>
-              </a:rPr>
-              <a:t>合成系列1例／開始時刻0分／閾値は安全基準を表さない</a:t>
+              <a:t>合成データで確認したことと、残る課題</a:t>
             </a:r>
           </a:p>
         </p:txBody>
@@ -5066,7 +4296,7 @@
     </p:spTree>
     <p:extLst>
       <p:ext uri="{BB962C8B-B14F-4D97-AF65-F5344CB8AC3E}">
-        <p14:creationId xmlns:p14="http://schemas.microsoft.com/office/powerpoint/2010/main" val="2036915403"/>
+        <p14:creationId xmlns:p14="http://schemas.microsoft.com/office/powerpoint/2010/main" val="1929780773"/>
       </p:ext>
     </p:extLst>
   </p:cSld>
@@ -5094,10 +4324,2553 @@
       </p:grpSpPr>
       <p:sp>
         <p:nvSpPr>
+          <p:cNvPr id="44" name="footer-line">
+            <a:extLst xmlns:a="http://schemas.openxmlformats.org/drawingml/2006/main">
+              <a:ext uri="{FF2B5EF4-FFF2-40B4-BE49-F238E27FC236}">
+                <a16:creationId xmlns:a16="http://schemas.microsoft.com/office/drawing/2014/main" id="{1CD94F7C-4BC6-4ABC-9497-96D4E996B6F1}"/>
+              </a:ext>
+            </a:extLst>
+          </p:cNvPr>
+          <p:cNvSpPr>
+            <a:spLocks xmlns:a="http://schemas.openxmlformats.org/drawingml/2006/main" noGrp="1"/>
+          </p:cNvSpPr>
+          <p:nvPr/>
+        </p:nvSpPr>
+        <p:spPr>
+          <a:xfrm xmlns:a="http://schemas.openxmlformats.org/drawingml/2006/main">
+            <a:off x="0" y="4613148"/>
+            <a:ext cx="9144000" cy="53950"/>
+          </a:xfrm>
+          <a:prstGeom xmlns:a="http://schemas.openxmlformats.org/drawingml/2006/main" prst="rect">
+            <a:avLst/>
+          </a:prstGeom>
+          <a:solidFill xmlns:a="http://schemas.openxmlformats.org/drawingml/2006/main">
+            <a:srgbClr val="9BBB59"/>
+          </a:solidFill>
+          <a:ln xmlns:a="http://schemas.openxmlformats.org/drawingml/2006/main" w="0">
+            <a:noFill/>
+            <a:prstDash val="solid"/>
+          </a:ln>
+        </p:spPr>
+      </p:sp>
+      <p:pic>
+        <p:nvPicPr>
+          <p:cNvPr id="45" name=""/>
+          <p:cNvPicPr>
+            <a:picLocks xmlns:a="http://schemas.openxmlformats.org/drawingml/2006/main" noChangeAspect="1"/>
+          </p:cNvPicPr>
+          <p:nvPr/>
+        </p:nvPicPr>
+        <p:blipFill>
+          <a:blip xmlns:r="http://schemas.openxmlformats.org/officeDocument/2006/relationships" xmlns:a="http://schemas.openxmlformats.org/drawingml/2006/main" r:embed="R98d21fd90ca64dbb"/>
+          <a:stretch xmlns:a="http://schemas.openxmlformats.org/drawingml/2006/main"/>
+        </p:blipFill>
+        <p:spPr>
+          <a:xfrm xmlns:a="http://schemas.openxmlformats.org/drawingml/2006/main">
+            <a:off x="293522" y="4803343"/>
+            <a:ext cx="818388" cy="229821"/>
+          </a:xfrm>
+          <a:prstGeom xmlns:a="http://schemas.openxmlformats.org/drawingml/2006/main" prst="rect">
+            <a:avLst/>
+          </a:prstGeom>
+        </p:spPr>
+      </p:pic>
+      <p:sp>
+        <p:nvSpPr>
+          <p:cNvPr id="3" name="page">
+            <a:extLst xmlns:a="http://schemas.openxmlformats.org/drawingml/2006/main">
+              <a:ext uri="{FF2B5EF4-FFF2-40B4-BE49-F238E27FC236}">
+                <a16:creationId xmlns:a16="http://schemas.microsoft.com/office/drawing/2014/main" id="{83EEACBC-82CC-4E02-B365-45DAF576C07C}"/>
+              </a:ext>
+            </a:extLst>
+          </p:cNvPr>
+          <p:cNvSpPr>
+            <a:spLocks xmlns:a="http://schemas.openxmlformats.org/drawingml/2006/main" noGrp="1"/>
+          </p:cNvSpPr>
+          <p:nvPr/>
+        </p:nvSpPr>
+        <p:spPr>
+          <a:xfrm xmlns:a="http://schemas.openxmlformats.org/drawingml/2006/main">
+            <a:off x="6801307" y="4767682"/>
+            <a:ext cx="2133295" cy="274320"/>
+          </a:xfrm>
+          <a:prstGeom xmlns:a="http://schemas.openxmlformats.org/drawingml/2006/main" prst="rect">
+            <a:avLst/>
+          </a:prstGeom>
+          <a:noFill xmlns:a="http://schemas.openxmlformats.org/drawingml/2006/main"/>
+          <a:ln xmlns:a="http://schemas.openxmlformats.org/drawingml/2006/main" w="0">
+            <a:noFill/>
+            <a:prstDash val="solid"/>
+          </a:ln>
+        </p:spPr>
+        <p:txBody>
+          <a:bodyPr xmlns:a="http://schemas.openxmlformats.org/drawingml/2006/main" lIns="0" tIns="0" rIns="0" bIns="0" anchor="ctr">
+            <a:noAutofit/>
+          </a:bodyPr>
+          <a:lstStyle xmlns:a="http://schemas.openxmlformats.org/drawingml/2006/main"/>
+          <a:p xmlns:a="http://schemas.openxmlformats.org/drawingml/2006/main">
+            <a:pPr algn="r">
+              <a:defRPr sz="1400" b="0">
+                <a:solidFill>
+                  <a:srgbClr val="17202A"/>
+                </a:solidFill>
+                <a:latin typeface="Arial"/>
+                <a:ea typeface="Arial"/>
+                <a:cs typeface="Arial"/>
+              </a:defRPr>
+            </a:pPr>
+            <a:r>
+              <a:rPr sz="1400" b="0">
+                <a:solidFill>
+                  <a:srgbClr val="17202A"/>
+                </a:solidFill>
+                <a:latin typeface="Arial"/>
+                <a:ea typeface="Arial"/>
+                <a:cs typeface="Arial"/>
+              </a:rPr>
+              <a:t>5</a:t>
+            </a:r>
+          </a:p>
+        </p:txBody>
+      </p:sp>
+      <p:sp>
+        <p:nvSpPr>
+          <p:cNvPr id="4" name="fictional-disclosure">
+            <a:extLst xmlns:a="http://schemas.openxmlformats.org/drawingml/2006/main">
+              <a:ext uri="{FF2B5EF4-FFF2-40B4-BE49-F238E27FC236}">
+                <a16:creationId xmlns:a16="http://schemas.microsoft.com/office/drawing/2014/main" id="{5D8B11C2-B944-474B-81D1-9B53260580EE}"/>
+              </a:ext>
+            </a:extLst>
+          </p:cNvPr>
+          <p:cNvSpPr>
+            <a:spLocks xmlns:a="http://schemas.openxmlformats.org/drawingml/2006/main" noGrp="1"/>
+          </p:cNvSpPr>
+          <p:nvPr/>
+        </p:nvSpPr>
+        <p:spPr>
+          <a:xfrm xmlns:a="http://schemas.openxmlformats.org/drawingml/2006/main">
+            <a:off x="1428750" y="4772025"/>
+            <a:ext cx="4762500" cy="266700"/>
+          </a:xfrm>
+          <a:prstGeom xmlns:a="http://schemas.openxmlformats.org/drawingml/2006/main" prst="rect">
+            <a:avLst/>
+          </a:prstGeom>
+          <a:noFill xmlns:a="http://schemas.openxmlformats.org/drawingml/2006/main"/>
+          <a:ln xmlns:a="http://schemas.openxmlformats.org/drawingml/2006/main" w="0">
+            <a:noFill/>
+            <a:prstDash val="solid"/>
+          </a:ln>
+        </p:spPr>
+        <p:txBody>
+          <a:bodyPr xmlns:a="http://schemas.openxmlformats.org/drawingml/2006/main" lIns="0" tIns="0" rIns="0" bIns="0" anchor="ctr">
+            <a:noAutofit/>
+          </a:bodyPr>
+          <a:lstStyle xmlns:a="http://schemas.openxmlformats.org/drawingml/2006/main"/>
+          <a:p xmlns:a="http://schemas.openxmlformats.org/drawingml/2006/main">
+            <a:pPr algn="l">
+              <a:defRPr sz="1050" b="0">
+                <a:solidFill>
+                  <a:srgbClr val="59636E"/>
+                </a:solidFill>
+                <a:latin typeface="Noto Sans JP"/>
+                <a:ea typeface="Noto Sans JP"/>
+                <a:cs typeface="Noto Sans JP"/>
+              </a:defRPr>
+            </a:pPr>
+            <a:r>
+              <a:rPr sz="1050" b="0">
+                <a:solidFill>
+                  <a:srgbClr val="59636E"/>
+                </a:solidFill>
+                <a:latin typeface="Noto Sans JP"/>
+                <a:ea typeface="Noto Sans JP"/>
+                <a:cs typeface="Noto Sans JP"/>
+              </a:rPr>
+              <a:t>架空作例・合成データ</a:t>
+            </a:r>
+          </a:p>
+        </p:txBody>
+      </p:sp>
+      <p:sp>
+        <p:nvSpPr>
+          <p:cNvPr id="5" name="title">
+            <a:extLst xmlns:a="http://schemas.openxmlformats.org/drawingml/2006/main">
+              <a:ext uri="{FF2B5EF4-FFF2-40B4-BE49-F238E27FC236}">
+                <a16:creationId xmlns:a16="http://schemas.microsoft.com/office/drawing/2014/main" id="{5472CAC0-3CF3-4CB2-A838-98C71A8FE800}"/>
+              </a:ext>
+            </a:extLst>
+          </p:cNvPr>
+          <p:cNvSpPr>
+            <a:spLocks xmlns:a="http://schemas.openxmlformats.org/drawingml/2006/main" noGrp="1"/>
+          </p:cNvSpPr>
+          <p:nvPr/>
+        </p:nvSpPr>
+        <p:spPr>
+          <a:xfrm xmlns:a="http://schemas.openxmlformats.org/drawingml/2006/main">
+            <a:off x="457200" y="109728"/>
+            <a:ext cx="8229600" cy="400050"/>
+          </a:xfrm>
+          <a:prstGeom xmlns:a="http://schemas.openxmlformats.org/drawingml/2006/main" prst="rect">
+            <a:avLst/>
+          </a:prstGeom>
+          <a:noFill xmlns:a="http://schemas.openxmlformats.org/drawingml/2006/main"/>
+          <a:ln xmlns:a="http://schemas.openxmlformats.org/drawingml/2006/main" w="0">
+            <a:noFill/>
+            <a:prstDash val="solid"/>
+          </a:ln>
+        </p:spPr>
+        <p:txBody>
+          <a:bodyPr xmlns:a="http://schemas.openxmlformats.org/drawingml/2006/main" lIns="0" tIns="0" rIns="0" bIns="0" anchor="ctr">
+            <a:noAutofit/>
+          </a:bodyPr>
+          <a:lstStyle xmlns:a="http://schemas.openxmlformats.org/drawingml/2006/main"/>
+          <a:p xmlns:a="http://schemas.openxmlformats.org/drawingml/2006/main">
+            <a:pPr algn="l">
+              <a:defRPr sz="2700" b="1">
+                <a:solidFill>
+                  <a:srgbClr val="17202A"/>
+                </a:solidFill>
+                <a:latin typeface="Noto Sans JP"/>
+                <a:ea typeface="Noto Sans JP"/>
+                <a:cs typeface="Noto Sans JP"/>
+              </a:defRPr>
+            </a:pPr>
+            <a:r>
+              <a:rPr sz="2700" b="1">
+                <a:solidFill>
+                  <a:srgbClr val="17202A"/>
+                </a:solidFill>
+                <a:latin typeface="Noto Sans JP"/>
+                <a:ea typeface="Noto Sans JP"/>
+                <a:cs typeface="Noto Sans JP"/>
+              </a:rPr>
+              <a:t>同じ入力の間引き</a:t>
+            </a:r>
+          </a:p>
+        </p:txBody>
+      </p:sp>
+      <p:sp>
+        <p:nvSpPr>
+          <p:cNvPr id="6" name="message">
+            <a:extLst xmlns:a="http://schemas.openxmlformats.org/drawingml/2006/main">
+              <a:ext uri="{FF2B5EF4-FFF2-40B4-BE49-F238E27FC236}">
+                <a16:creationId xmlns:a16="http://schemas.microsoft.com/office/drawing/2014/main" id="{5CA68222-6B8C-44DE-8324-30895B744488}"/>
+              </a:ext>
+            </a:extLst>
+          </p:cNvPr>
+          <p:cNvSpPr>
+            <a:spLocks xmlns:a="http://schemas.openxmlformats.org/drawingml/2006/main" noGrp="1"/>
+          </p:cNvSpPr>
+          <p:nvPr/>
+        </p:nvSpPr>
+        <p:spPr>
+          <a:xfrm xmlns:a="http://schemas.openxmlformats.org/drawingml/2006/main">
+            <a:off x="457200" y="621792"/>
+            <a:ext cx="8229600" cy="694944"/>
+          </a:xfrm>
+          <a:prstGeom xmlns:a="http://schemas.openxmlformats.org/drawingml/2006/main" prst="rect">
+            <a:avLst/>
+          </a:prstGeom>
+          <a:noFill xmlns:a="http://schemas.openxmlformats.org/drawingml/2006/main"/>
+          <a:ln xmlns:a="http://schemas.openxmlformats.org/drawingml/2006/main" w="0">
+            <a:noFill/>
+            <a:prstDash val="solid"/>
+          </a:ln>
+        </p:spPr>
+        <p:txBody>
+          <a:bodyPr xmlns:a="http://schemas.openxmlformats.org/drawingml/2006/main" lIns="0" tIns="0" rIns="0" bIns="0" anchor="ctr">
+            <a:noAutofit/>
+          </a:bodyPr>
+          <a:lstStyle xmlns:a="http://schemas.openxmlformats.org/drawingml/2006/main"/>
+          <a:p xmlns:a="http://schemas.openxmlformats.org/drawingml/2006/main">
+            <a:pPr algn="l">
+              <a:defRPr sz="2300" b="1">
+                <a:solidFill>
+                  <a:srgbClr val="17202A"/>
+                </a:solidFill>
+                <a:latin typeface="Noto Sans JP"/>
+                <a:ea typeface="Noto Sans JP"/>
+                <a:cs typeface="Noto Sans JP"/>
+              </a:defRPr>
+            </a:pPr>
+            <a:r>
+              <a:rPr sz="2300" b="1">
+                <a:solidFill>
+                  <a:srgbClr val="17202A"/>
+                </a:solidFill>
+                <a:latin typeface="Noto Sans JP"/>
+                <a:ea typeface="Noto Sans JP"/>
+                <a:cs typeface="Noto Sans JP"/>
+              </a:rPr>
+              <a:t>全13点から、0・5・10分の3点だけを保持する</a:t>
+            </a:r>
+          </a:p>
+        </p:txBody>
+      </p:sp>
+      <p:sp>
+        <p:nvSpPr>
+          <p:cNvPr id="7" name="all-label">
+            <a:extLst xmlns:a="http://schemas.openxmlformats.org/drawingml/2006/main">
+              <a:ext uri="{FF2B5EF4-FFF2-40B4-BE49-F238E27FC236}">
+                <a16:creationId xmlns:a16="http://schemas.microsoft.com/office/drawing/2014/main" id="{7FAB476F-F621-46F8-8576-6A4ACE16D005}"/>
+              </a:ext>
+            </a:extLst>
+          </p:cNvPr>
+          <p:cNvSpPr>
+            <a:spLocks xmlns:a="http://schemas.openxmlformats.org/drawingml/2006/main" noGrp="1"/>
+          </p:cNvSpPr>
+          <p:nvPr/>
+        </p:nvSpPr>
+        <p:spPr>
+          <a:xfrm xmlns:a="http://schemas.openxmlformats.org/drawingml/2006/main">
+            <a:off x="457200" y="1714500"/>
+            <a:ext cx="2667000" cy="342900"/>
+          </a:xfrm>
+          <a:prstGeom xmlns:a="http://schemas.openxmlformats.org/drawingml/2006/main" prst="rect">
+            <a:avLst/>
+          </a:prstGeom>
+          <a:noFill xmlns:a="http://schemas.openxmlformats.org/drawingml/2006/main"/>
+          <a:ln xmlns:a="http://schemas.openxmlformats.org/drawingml/2006/main" w="0">
+            <a:noFill/>
+            <a:prstDash val="solid"/>
+          </a:ln>
+        </p:spPr>
+        <p:txBody>
+          <a:bodyPr xmlns:a="http://schemas.openxmlformats.org/drawingml/2006/main" lIns="0" tIns="0" rIns="0" bIns="0" anchor="ctr">
+            <a:noAutofit/>
+          </a:bodyPr>
+          <a:lstStyle xmlns:a="http://schemas.openxmlformats.org/drawingml/2006/main"/>
+          <a:p xmlns:a="http://schemas.openxmlformats.org/drawingml/2006/main">
+            <a:pPr algn="l">
+              <a:defRPr sz="1800" b="1">
+                <a:solidFill>
+                  <a:srgbClr val="17202A"/>
+                </a:solidFill>
+                <a:latin typeface="Noto Sans JP"/>
+                <a:ea typeface="Noto Sans JP"/>
+                <a:cs typeface="Noto Sans JP"/>
+              </a:defRPr>
+            </a:pPr>
+            <a:r>
+              <a:rPr sz="1800" b="1">
+                <a:solidFill>
+                  <a:srgbClr val="17202A"/>
+                </a:solidFill>
+                <a:latin typeface="Noto Sans JP"/>
+                <a:ea typeface="Noto Sans JP"/>
+                <a:cs typeface="Noto Sans JP"/>
+              </a:rPr>
+              <a:t>1分間隔の入力</a:t>
+            </a:r>
+          </a:p>
+        </p:txBody>
+      </p:sp>
+      <p:sp>
+        <p:nvSpPr>
+          <p:cNvPr id="8" name="kept-label">
+            <a:extLst xmlns:a="http://schemas.openxmlformats.org/drawingml/2006/main">
+              <a:ext uri="{FF2B5EF4-FFF2-40B4-BE49-F238E27FC236}">
+                <a16:creationId xmlns:a16="http://schemas.microsoft.com/office/drawing/2014/main" id="{5A9E96F1-D1C9-41F6-AE3C-B9F5768E39C3}"/>
+              </a:ext>
+            </a:extLst>
+          </p:cNvPr>
+          <p:cNvSpPr>
+            <a:spLocks xmlns:a="http://schemas.openxmlformats.org/drawingml/2006/main" noGrp="1"/>
+          </p:cNvSpPr>
+          <p:nvPr/>
+        </p:nvSpPr>
+        <p:spPr>
+          <a:xfrm xmlns:a="http://schemas.openxmlformats.org/drawingml/2006/main">
+            <a:off x="457200" y="3095625"/>
+            <a:ext cx="2667000" cy="342900"/>
+          </a:xfrm>
+          <a:prstGeom xmlns:a="http://schemas.openxmlformats.org/drawingml/2006/main" prst="rect">
+            <a:avLst/>
+          </a:prstGeom>
+          <a:noFill xmlns:a="http://schemas.openxmlformats.org/drawingml/2006/main"/>
+          <a:ln xmlns:a="http://schemas.openxmlformats.org/drawingml/2006/main" w="0">
+            <a:noFill/>
+            <a:prstDash val="solid"/>
+          </a:ln>
+        </p:spPr>
+        <p:txBody>
+          <a:bodyPr xmlns:a="http://schemas.openxmlformats.org/drawingml/2006/main" lIns="0" tIns="0" rIns="0" bIns="0" anchor="ctr">
+            <a:noAutofit/>
+          </a:bodyPr>
+          <a:lstStyle xmlns:a="http://schemas.openxmlformats.org/drawingml/2006/main"/>
+          <a:p xmlns:a="http://schemas.openxmlformats.org/drawingml/2006/main">
+            <a:pPr algn="l">
+              <a:defRPr sz="1800" b="1">
+                <a:solidFill>
+                  <a:srgbClr val="17202A"/>
+                </a:solidFill>
+                <a:latin typeface="Noto Sans JP"/>
+                <a:ea typeface="Noto Sans JP"/>
+                <a:cs typeface="Noto Sans JP"/>
+              </a:defRPr>
+            </a:pPr>
+            <a:r>
+              <a:rPr sz="1800" b="1">
+                <a:solidFill>
+                  <a:srgbClr val="17202A"/>
+                </a:solidFill>
+                <a:latin typeface="Noto Sans JP"/>
+                <a:ea typeface="Noto Sans JP"/>
+                <a:cs typeface="Noto Sans JP"/>
+              </a:rPr>
+              <a:t>5分間隔で保持</a:t>
+            </a:r>
+          </a:p>
+        </p:txBody>
+      </p:sp>
+      <p:sp>
+        <p:nvSpPr>
+          <p:cNvPr id="9" name="input-0">
+            <a:extLst xmlns:a="http://schemas.openxmlformats.org/drawingml/2006/main">
+              <a:ext uri="{FF2B5EF4-FFF2-40B4-BE49-F238E27FC236}">
+                <a16:creationId xmlns:a16="http://schemas.microsoft.com/office/drawing/2014/main" id="{80B08A9D-7D28-470C-980B-8BDAC4BE8125}"/>
+              </a:ext>
+            </a:extLst>
+          </p:cNvPr>
+          <p:cNvSpPr>
+            <a:spLocks xmlns:a="http://schemas.openxmlformats.org/drawingml/2006/main" noGrp="1"/>
+          </p:cNvSpPr>
+          <p:nvPr/>
+        </p:nvSpPr>
+        <p:spPr>
+          <a:xfrm xmlns:a="http://schemas.openxmlformats.org/drawingml/2006/main">
+            <a:off x="3238500" y="1885950"/>
+            <a:ext cx="171450" cy="171450"/>
+          </a:xfrm>
+          <a:prstGeom xmlns:a="http://schemas.openxmlformats.org/drawingml/2006/main" prst="ellipse">
+            <a:avLst/>
+          </a:prstGeom>
+          <a:solidFill xmlns:a="http://schemas.openxmlformats.org/drawingml/2006/main">
+            <a:srgbClr val="666666"/>
+          </a:solidFill>
+          <a:ln xmlns:a="http://schemas.openxmlformats.org/drawingml/2006/main" w="0">
+            <a:noFill/>
+            <a:prstDash val="solid"/>
+          </a:ln>
+        </p:spPr>
+      </p:sp>
+      <p:sp>
+        <p:nvSpPr>
+          <p:cNvPr id="10" name="minute-0">
+            <a:extLst xmlns:a="http://schemas.openxmlformats.org/drawingml/2006/main">
+              <a:ext uri="{FF2B5EF4-FFF2-40B4-BE49-F238E27FC236}">
+                <a16:creationId xmlns:a16="http://schemas.microsoft.com/office/drawing/2014/main" id="{FDF69DB9-ACCA-4769-929C-33E6CB7C67D7}"/>
+              </a:ext>
+            </a:extLst>
+          </p:cNvPr>
+          <p:cNvSpPr>
+            <a:spLocks xmlns:a="http://schemas.openxmlformats.org/drawingml/2006/main" noGrp="1"/>
+          </p:cNvSpPr>
+          <p:nvPr/>
+        </p:nvSpPr>
+        <p:spPr>
+          <a:xfrm xmlns:a="http://schemas.openxmlformats.org/drawingml/2006/main">
+            <a:off x="3143250" y="1571625"/>
+            <a:ext cx="361950" cy="247650"/>
+          </a:xfrm>
+          <a:prstGeom xmlns:a="http://schemas.openxmlformats.org/drawingml/2006/main" prst="rect">
+            <a:avLst/>
+          </a:prstGeom>
+          <a:noFill xmlns:a="http://schemas.openxmlformats.org/drawingml/2006/main"/>
+          <a:ln xmlns:a="http://schemas.openxmlformats.org/drawingml/2006/main" w="0">
+            <a:noFill/>
+            <a:prstDash val="solid"/>
+          </a:ln>
+        </p:spPr>
+        <p:txBody>
+          <a:bodyPr xmlns:a="http://schemas.openxmlformats.org/drawingml/2006/main" lIns="0" tIns="0" rIns="0" bIns="0" anchor="ctr">
+            <a:noAutofit/>
+          </a:bodyPr>
+          <a:lstStyle xmlns:a="http://schemas.openxmlformats.org/drawingml/2006/main"/>
+          <a:p xmlns:a="http://schemas.openxmlformats.org/drawingml/2006/main">
+            <a:pPr algn="ctr">
+              <a:defRPr sz="1400" b="0">
+                <a:solidFill>
+                  <a:srgbClr val="59636E"/>
+                </a:solidFill>
+                <a:latin typeface="Noto Sans JP"/>
+                <a:ea typeface="Noto Sans JP"/>
+                <a:cs typeface="Noto Sans JP"/>
+              </a:defRPr>
+            </a:pPr>
+            <a:r>
+              <a:rPr sz="1400" b="0">
+                <a:solidFill>
+                  <a:srgbClr val="59636E"/>
+                </a:solidFill>
+                <a:latin typeface="Noto Sans JP"/>
+                <a:ea typeface="Noto Sans JP"/>
+                <a:cs typeface="Noto Sans JP"/>
+              </a:rPr>
+              <a:t>0</a:t>
+            </a:r>
+          </a:p>
+        </p:txBody>
+      </p:sp>
+      <p:sp>
+        <p:nvSpPr>
+          <p:cNvPr id="11" name="retained-0">
+            <a:extLst xmlns:a="http://schemas.openxmlformats.org/drawingml/2006/main">
+              <a:ext uri="{FF2B5EF4-FFF2-40B4-BE49-F238E27FC236}">
+                <a16:creationId xmlns:a16="http://schemas.microsoft.com/office/drawing/2014/main" id="{BF41E88D-9CA2-4842-82F0-06A3E310265D}"/>
+              </a:ext>
+            </a:extLst>
+          </p:cNvPr>
+          <p:cNvSpPr>
+            <a:spLocks xmlns:a="http://schemas.openxmlformats.org/drawingml/2006/main" noGrp="1"/>
+          </p:cNvSpPr>
+          <p:nvPr/>
+        </p:nvSpPr>
+        <p:spPr>
+          <a:xfrm xmlns:a="http://schemas.openxmlformats.org/drawingml/2006/main">
+            <a:off x="3219450" y="3257550"/>
+            <a:ext cx="209550" cy="209550"/>
+          </a:xfrm>
+          <a:prstGeom xmlns:a="http://schemas.openxmlformats.org/drawingml/2006/main" prst="rect">
+            <a:avLst/>
+          </a:prstGeom>
+          <a:solidFill xmlns:a="http://schemas.openxmlformats.org/drawingml/2006/main">
+            <a:srgbClr val="9BBB59"/>
+          </a:solidFill>
+          <a:ln xmlns:a="http://schemas.openxmlformats.org/drawingml/2006/main" w="11430">
+            <a:solidFill>
+              <a:srgbClr val="17202A"/>
+            </a:solidFill>
+            <a:prstDash val="solid"/>
+          </a:ln>
+        </p:spPr>
+      </p:sp>
+      <p:cxnSp>
+        <p:nvCxnSpPr>
+          <p:cNvPr id="55" name=""/>
+          <p:cNvCxnSpPr>
+            <a:stCxn xmlns:a="http://schemas.openxmlformats.org/drawingml/2006/main" id="9" idx="4"/>
+            <a:endCxn xmlns:a="http://schemas.openxmlformats.org/drawingml/2006/main" id="11" idx="0"/>
+          </p:cNvCxnSpPr>
+          <p:nvPr/>
+        </p:nvCxnSpPr>
+        <p:spPr>
+          <a:xfrm xmlns:a="http://schemas.openxmlformats.org/drawingml/2006/main">
+            <a:off x="3324225" y="2057400"/>
+            <a:ext cx="0" cy="1200150"/>
+          </a:xfrm>
+          <a:prstGeom xmlns:a="http://schemas.openxmlformats.org/drawingml/2006/main" prst="straightConnector1">
+            <a:avLst/>
+          </a:prstGeom>
+          <a:ln xmlns:a="http://schemas.openxmlformats.org/drawingml/2006/main" w="11430">
+            <a:solidFill>
+              <a:srgbClr val="59636E"/>
+            </a:solidFill>
+            <a:tailEnd type="triangle" w="sm" len="sm"/>
+          </a:ln>
+        </p:spPr>
+      </p:cxnSp>
+      <p:sp>
+        <p:nvSpPr>
+          <p:cNvPr id="13" name="input-1">
+            <a:extLst xmlns:a="http://schemas.openxmlformats.org/drawingml/2006/main">
+              <a:ext uri="{FF2B5EF4-FFF2-40B4-BE49-F238E27FC236}">
+                <a16:creationId xmlns:a16="http://schemas.microsoft.com/office/drawing/2014/main" id="{32B2CB22-29CA-42AE-9565-11727B36D6B5}"/>
+              </a:ext>
+            </a:extLst>
+          </p:cNvPr>
+          <p:cNvSpPr>
+            <a:spLocks xmlns:a="http://schemas.openxmlformats.org/drawingml/2006/main" noGrp="1"/>
+          </p:cNvSpPr>
+          <p:nvPr/>
+        </p:nvSpPr>
+        <p:spPr>
+          <a:xfrm xmlns:a="http://schemas.openxmlformats.org/drawingml/2006/main">
+            <a:off x="3638550" y="1885950"/>
+            <a:ext cx="171450" cy="171450"/>
+          </a:xfrm>
+          <a:prstGeom xmlns:a="http://schemas.openxmlformats.org/drawingml/2006/main" prst="ellipse">
+            <a:avLst/>
+          </a:prstGeom>
+          <a:solidFill xmlns:a="http://schemas.openxmlformats.org/drawingml/2006/main">
+            <a:srgbClr val="666666"/>
+          </a:solidFill>
+          <a:ln xmlns:a="http://schemas.openxmlformats.org/drawingml/2006/main" w="0">
+            <a:noFill/>
+            <a:prstDash val="solid"/>
+          </a:ln>
+        </p:spPr>
+      </p:sp>
+      <p:sp>
+        <p:nvSpPr>
+          <p:cNvPr id="14" name="minute-1">
+            <a:extLst xmlns:a="http://schemas.openxmlformats.org/drawingml/2006/main">
+              <a:ext uri="{FF2B5EF4-FFF2-40B4-BE49-F238E27FC236}">
+                <a16:creationId xmlns:a16="http://schemas.microsoft.com/office/drawing/2014/main" id="{80C5C4F9-FA4C-4BDA-A661-67D60C5A4198}"/>
+              </a:ext>
+            </a:extLst>
+          </p:cNvPr>
+          <p:cNvSpPr>
+            <a:spLocks xmlns:a="http://schemas.openxmlformats.org/drawingml/2006/main" noGrp="1"/>
+          </p:cNvSpPr>
+          <p:nvPr/>
+        </p:nvSpPr>
+        <p:spPr>
+          <a:xfrm xmlns:a="http://schemas.openxmlformats.org/drawingml/2006/main">
+            <a:off x="3543300" y="1571625"/>
+            <a:ext cx="361950" cy="247650"/>
+          </a:xfrm>
+          <a:prstGeom xmlns:a="http://schemas.openxmlformats.org/drawingml/2006/main" prst="rect">
+            <a:avLst/>
+          </a:prstGeom>
+          <a:noFill xmlns:a="http://schemas.openxmlformats.org/drawingml/2006/main"/>
+          <a:ln xmlns:a="http://schemas.openxmlformats.org/drawingml/2006/main" w="0">
+            <a:noFill/>
+            <a:prstDash val="solid"/>
+          </a:ln>
+        </p:spPr>
+        <p:txBody>
+          <a:bodyPr xmlns:a="http://schemas.openxmlformats.org/drawingml/2006/main" lIns="0" tIns="0" rIns="0" bIns="0" anchor="ctr">
+            <a:noAutofit/>
+          </a:bodyPr>
+          <a:lstStyle xmlns:a="http://schemas.openxmlformats.org/drawingml/2006/main"/>
+          <a:p xmlns:a="http://schemas.openxmlformats.org/drawingml/2006/main">
+            <a:pPr algn="ctr">
+              <a:defRPr sz="1400" b="0">
+                <a:solidFill>
+                  <a:srgbClr val="59636E"/>
+                </a:solidFill>
+                <a:latin typeface="Noto Sans JP"/>
+                <a:ea typeface="Noto Sans JP"/>
+                <a:cs typeface="Noto Sans JP"/>
+              </a:defRPr>
+            </a:pPr>
+            <a:r>
+              <a:rPr sz="1400" b="0">
+                <a:solidFill>
+                  <a:srgbClr val="59636E"/>
+                </a:solidFill>
+                <a:latin typeface="Noto Sans JP"/>
+                <a:ea typeface="Noto Sans JP"/>
+                <a:cs typeface="Noto Sans JP"/>
+              </a:rPr>
+              <a:t>1</a:t>
+            </a:r>
+          </a:p>
+        </p:txBody>
+      </p:sp>
+      <p:sp>
+        <p:nvSpPr>
+          <p:cNvPr id="15" name="input-2">
+            <a:extLst xmlns:a="http://schemas.openxmlformats.org/drawingml/2006/main">
+              <a:ext uri="{FF2B5EF4-FFF2-40B4-BE49-F238E27FC236}">
+                <a16:creationId xmlns:a16="http://schemas.microsoft.com/office/drawing/2014/main" id="{C8D35B2F-B220-44F1-8D8C-86CD383A6C52}"/>
+              </a:ext>
+            </a:extLst>
+          </p:cNvPr>
+          <p:cNvSpPr>
+            <a:spLocks xmlns:a="http://schemas.openxmlformats.org/drawingml/2006/main" noGrp="1"/>
+          </p:cNvSpPr>
+          <p:nvPr/>
+        </p:nvSpPr>
+        <p:spPr>
+          <a:xfrm xmlns:a="http://schemas.openxmlformats.org/drawingml/2006/main">
+            <a:off x="4038600" y="1885950"/>
+            <a:ext cx="171450" cy="171450"/>
+          </a:xfrm>
+          <a:prstGeom xmlns:a="http://schemas.openxmlformats.org/drawingml/2006/main" prst="ellipse">
+            <a:avLst/>
+          </a:prstGeom>
+          <a:solidFill xmlns:a="http://schemas.openxmlformats.org/drawingml/2006/main">
+            <a:srgbClr val="666666"/>
+          </a:solidFill>
+          <a:ln xmlns:a="http://schemas.openxmlformats.org/drawingml/2006/main" w="0">
+            <a:noFill/>
+            <a:prstDash val="solid"/>
+          </a:ln>
+        </p:spPr>
+      </p:sp>
+      <p:sp>
+        <p:nvSpPr>
+          <p:cNvPr id="16" name="minute-2">
+            <a:extLst xmlns:a="http://schemas.openxmlformats.org/drawingml/2006/main">
+              <a:ext uri="{FF2B5EF4-FFF2-40B4-BE49-F238E27FC236}">
+                <a16:creationId xmlns:a16="http://schemas.microsoft.com/office/drawing/2014/main" id="{7179E3E8-6FB8-4484-A485-38ED5D74CAEC}"/>
+              </a:ext>
+            </a:extLst>
+          </p:cNvPr>
+          <p:cNvSpPr>
+            <a:spLocks xmlns:a="http://schemas.openxmlformats.org/drawingml/2006/main" noGrp="1"/>
+          </p:cNvSpPr>
+          <p:nvPr/>
+        </p:nvSpPr>
+        <p:spPr>
+          <a:xfrm xmlns:a="http://schemas.openxmlformats.org/drawingml/2006/main">
+            <a:off x="3943350" y="1571625"/>
+            <a:ext cx="361950" cy="247650"/>
+          </a:xfrm>
+          <a:prstGeom xmlns:a="http://schemas.openxmlformats.org/drawingml/2006/main" prst="rect">
+            <a:avLst/>
+          </a:prstGeom>
+          <a:noFill xmlns:a="http://schemas.openxmlformats.org/drawingml/2006/main"/>
+          <a:ln xmlns:a="http://schemas.openxmlformats.org/drawingml/2006/main" w="0">
+            <a:noFill/>
+            <a:prstDash val="solid"/>
+          </a:ln>
+        </p:spPr>
+        <p:txBody>
+          <a:bodyPr xmlns:a="http://schemas.openxmlformats.org/drawingml/2006/main" lIns="0" tIns="0" rIns="0" bIns="0" anchor="ctr">
+            <a:noAutofit/>
+          </a:bodyPr>
+          <a:lstStyle xmlns:a="http://schemas.openxmlformats.org/drawingml/2006/main"/>
+          <a:p xmlns:a="http://schemas.openxmlformats.org/drawingml/2006/main">
+            <a:pPr algn="ctr">
+              <a:defRPr sz="1400" b="0">
+                <a:solidFill>
+                  <a:srgbClr val="59636E"/>
+                </a:solidFill>
+                <a:latin typeface="Noto Sans JP"/>
+                <a:ea typeface="Noto Sans JP"/>
+                <a:cs typeface="Noto Sans JP"/>
+              </a:defRPr>
+            </a:pPr>
+            <a:r>
+              <a:rPr sz="1400" b="0">
+                <a:solidFill>
+                  <a:srgbClr val="59636E"/>
+                </a:solidFill>
+                <a:latin typeface="Noto Sans JP"/>
+                <a:ea typeface="Noto Sans JP"/>
+                <a:cs typeface="Noto Sans JP"/>
+              </a:rPr>
+              <a:t>2</a:t>
+            </a:r>
+          </a:p>
+        </p:txBody>
+      </p:sp>
+      <p:sp>
+        <p:nvSpPr>
+          <p:cNvPr id="17" name="input-3">
+            <a:extLst xmlns:a="http://schemas.openxmlformats.org/drawingml/2006/main">
+              <a:ext uri="{FF2B5EF4-FFF2-40B4-BE49-F238E27FC236}">
+                <a16:creationId xmlns:a16="http://schemas.microsoft.com/office/drawing/2014/main" id="{A5A03426-AEC4-44F6-8E04-38FE6C83D772}"/>
+              </a:ext>
+            </a:extLst>
+          </p:cNvPr>
+          <p:cNvSpPr>
+            <a:spLocks xmlns:a="http://schemas.openxmlformats.org/drawingml/2006/main" noGrp="1"/>
+          </p:cNvSpPr>
+          <p:nvPr/>
+        </p:nvSpPr>
+        <p:spPr>
+          <a:xfrm xmlns:a="http://schemas.openxmlformats.org/drawingml/2006/main">
+            <a:off x="4438650" y="1885950"/>
+            <a:ext cx="171450" cy="171450"/>
+          </a:xfrm>
+          <a:prstGeom xmlns:a="http://schemas.openxmlformats.org/drawingml/2006/main" prst="ellipse">
+            <a:avLst/>
+          </a:prstGeom>
+          <a:solidFill xmlns:a="http://schemas.openxmlformats.org/drawingml/2006/main">
+            <a:srgbClr val="666666"/>
+          </a:solidFill>
+          <a:ln xmlns:a="http://schemas.openxmlformats.org/drawingml/2006/main" w="0">
+            <a:noFill/>
+            <a:prstDash val="solid"/>
+          </a:ln>
+        </p:spPr>
+      </p:sp>
+      <p:sp>
+        <p:nvSpPr>
+          <p:cNvPr id="18" name="minute-3">
+            <a:extLst xmlns:a="http://schemas.openxmlformats.org/drawingml/2006/main">
+              <a:ext uri="{FF2B5EF4-FFF2-40B4-BE49-F238E27FC236}">
+                <a16:creationId xmlns:a16="http://schemas.microsoft.com/office/drawing/2014/main" id="{DBE10442-BB9E-4D9E-B93E-1F731655F07A}"/>
+              </a:ext>
+            </a:extLst>
+          </p:cNvPr>
+          <p:cNvSpPr>
+            <a:spLocks xmlns:a="http://schemas.openxmlformats.org/drawingml/2006/main" noGrp="1"/>
+          </p:cNvSpPr>
+          <p:nvPr/>
+        </p:nvSpPr>
+        <p:spPr>
+          <a:xfrm xmlns:a="http://schemas.openxmlformats.org/drawingml/2006/main">
+            <a:off x="4343400" y="1571625"/>
+            <a:ext cx="361950" cy="247650"/>
+          </a:xfrm>
+          <a:prstGeom xmlns:a="http://schemas.openxmlformats.org/drawingml/2006/main" prst="rect">
+            <a:avLst/>
+          </a:prstGeom>
+          <a:noFill xmlns:a="http://schemas.openxmlformats.org/drawingml/2006/main"/>
+          <a:ln xmlns:a="http://schemas.openxmlformats.org/drawingml/2006/main" w="0">
+            <a:noFill/>
+            <a:prstDash val="solid"/>
+          </a:ln>
+        </p:spPr>
+        <p:txBody>
+          <a:bodyPr xmlns:a="http://schemas.openxmlformats.org/drawingml/2006/main" lIns="0" tIns="0" rIns="0" bIns="0" anchor="ctr">
+            <a:noAutofit/>
+          </a:bodyPr>
+          <a:lstStyle xmlns:a="http://schemas.openxmlformats.org/drawingml/2006/main"/>
+          <a:p xmlns:a="http://schemas.openxmlformats.org/drawingml/2006/main">
+            <a:pPr algn="ctr">
+              <a:defRPr sz="1400" b="0">
+                <a:solidFill>
+                  <a:srgbClr val="59636E"/>
+                </a:solidFill>
+                <a:latin typeface="Noto Sans JP"/>
+                <a:ea typeface="Noto Sans JP"/>
+                <a:cs typeface="Noto Sans JP"/>
+              </a:defRPr>
+            </a:pPr>
+            <a:r>
+              <a:rPr sz="1400" b="0">
+                <a:solidFill>
+                  <a:srgbClr val="59636E"/>
+                </a:solidFill>
+                <a:latin typeface="Noto Sans JP"/>
+                <a:ea typeface="Noto Sans JP"/>
+                <a:cs typeface="Noto Sans JP"/>
+              </a:rPr>
+              <a:t>3</a:t>
+            </a:r>
+          </a:p>
+        </p:txBody>
+      </p:sp>
+      <p:sp>
+        <p:nvSpPr>
+          <p:cNvPr id="19" name="input-4">
+            <a:extLst xmlns:a="http://schemas.openxmlformats.org/drawingml/2006/main">
+              <a:ext uri="{FF2B5EF4-FFF2-40B4-BE49-F238E27FC236}">
+                <a16:creationId xmlns:a16="http://schemas.microsoft.com/office/drawing/2014/main" id="{0B75ED82-640B-4DB8-AF9D-130C9DE8656A}"/>
+              </a:ext>
+            </a:extLst>
+          </p:cNvPr>
+          <p:cNvSpPr>
+            <a:spLocks xmlns:a="http://schemas.openxmlformats.org/drawingml/2006/main" noGrp="1"/>
+          </p:cNvSpPr>
+          <p:nvPr/>
+        </p:nvSpPr>
+        <p:spPr>
+          <a:xfrm xmlns:a="http://schemas.openxmlformats.org/drawingml/2006/main">
+            <a:off x="4838700" y="1885950"/>
+            <a:ext cx="171450" cy="171450"/>
+          </a:xfrm>
+          <a:prstGeom xmlns:a="http://schemas.openxmlformats.org/drawingml/2006/main" prst="ellipse">
+            <a:avLst/>
+          </a:prstGeom>
+          <a:solidFill xmlns:a="http://schemas.openxmlformats.org/drawingml/2006/main">
+            <a:srgbClr val="666666"/>
+          </a:solidFill>
+          <a:ln xmlns:a="http://schemas.openxmlformats.org/drawingml/2006/main" w="0">
+            <a:noFill/>
+            <a:prstDash val="solid"/>
+          </a:ln>
+        </p:spPr>
+      </p:sp>
+      <p:sp>
+        <p:nvSpPr>
+          <p:cNvPr id="20" name="minute-4">
+            <a:extLst xmlns:a="http://schemas.openxmlformats.org/drawingml/2006/main">
+              <a:ext uri="{FF2B5EF4-FFF2-40B4-BE49-F238E27FC236}">
+                <a16:creationId xmlns:a16="http://schemas.microsoft.com/office/drawing/2014/main" id="{F457993C-D896-467A-BBD7-8DC5505B3A91}"/>
+              </a:ext>
+            </a:extLst>
+          </p:cNvPr>
+          <p:cNvSpPr>
+            <a:spLocks xmlns:a="http://schemas.openxmlformats.org/drawingml/2006/main" noGrp="1"/>
+          </p:cNvSpPr>
+          <p:nvPr/>
+        </p:nvSpPr>
+        <p:spPr>
+          <a:xfrm xmlns:a="http://schemas.openxmlformats.org/drawingml/2006/main">
+            <a:off x="4743450" y="1571625"/>
+            <a:ext cx="361950" cy="247650"/>
+          </a:xfrm>
+          <a:prstGeom xmlns:a="http://schemas.openxmlformats.org/drawingml/2006/main" prst="rect">
+            <a:avLst/>
+          </a:prstGeom>
+          <a:noFill xmlns:a="http://schemas.openxmlformats.org/drawingml/2006/main"/>
+          <a:ln xmlns:a="http://schemas.openxmlformats.org/drawingml/2006/main" w="0">
+            <a:noFill/>
+            <a:prstDash val="solid"/>
+          </a:ln>
+        </p:spPr>
+        <p:txBody>
+          <a:bodyPr xmlns:a="http://schemas.openxmlformats.org/drawingml/2006/main" lIns="0" tIns="0" rIns="0" bIns="0" anchor="ctr">
+            <a:noAutofit/>
+          </a:bodyPr>
+          <a:lstStyle xmlns:a="http://schemas.openxmlformats.org/drawingml/2006/main"/>
+          <a:p xmlns:a="http://schemas.openxmlformats.org/drawingml/2006/main">
+            <a:pPr algn="ctr">
+              <a:defRPr sz="1400" b="0">
+                <a:solidFill>
+                  <a:srgbClr val="59636E"/>
+                </a:solidFill>
+                <a:latin typeface="Noto Sans JP"/>
+                <a:ea typeface="Noto Sans JP"/>
+                <a:cs typeface="Noto Sans JP"/>
+              </a:defRPr>
+            </a:pPr>
+            <a:r>
+              <a:rPr sz="1400" b="0">
+                <a:solidFill>
+                  <a:srgbClr val="59636E"/>
+                </a:solidFill>
+                <a:latin typeface="Noto Sans JP"/>
+                <a:ea typeface="Noto Sans JP"/>
+                <a:cs typeface="Noto Sans JP"/>
+              </a:rPr>
+              <a:t>4</a:t>
+            </a:r>
+          </a:p>
+        </p:txBody>
+      </p:sp>
+      <p:sp>
+        <p:nvSpPr>
+          <p:cNvPr id="21" name="input-5">
+            <a:extLst xmlns:a="http://schemas.openxmlformats.org/drawingml/2006/main">
+              <a:ext uri="{FF2B5EF4-FFF2-40B4-BE49-F238E27FC236}">
+                <a16:creationId xmlns:a16="http://schemas.microsoft.com/office/drawing/2014/main" id="{371C99DE-96BA-4F5D-B4D5-529C72841828}"/>
+              </a:ext>
+            </a:extLst>
+          </p:cNvPr>
+          <p:cNvSpPr>
+            <a:spLocks xmlns:a="http://schemas.openxmlformats.org/drawingml/2006/main" noGrp="1"/>
+          </p:cNvSpPr>
+          <p:nvPr/>
+        </p:nvSpPr>
+        <p:spPr>
+          <a:xfrm xmlns:a="http://schemas.openxmlformats.org/drawingml/2006/main">
+            <a:off x="5238750" y="1885950"/>
+            <a:ext cx="171450" cy="171450"/>
+          </a:xfrm>
+          <a:prstGeom xmlns:a="http://schemas.openxmlformats.org/drawingml/2006/main" prst="ellipse">
+            <a:avLst/>
+          </a:prstGeom>
+          <a:solidFill xmlns:a="http://schemas.openxmlformats.org/drawingml/2006/main">
+            <a:srgbClr val="666666"/>
+          </a:solidFill>
+          <a:ln xmlns:a="http://schemas.openxmlformats.org/drawingml/2006/main" w="0">
+            <a:noFill/>
+            <a:prstDash val="solid"/>
+          </a:ln>
+        </p:spPr>
+      </p:sp>
+      <p:sp>
+        <p:nvSpPr>
+          <p:cNvPr id="22" name="minute-5">
+            <a:extLst xmlns:a="http://schemas.openxmlformats.org/drawingml/2006/main">
+              <a:ext uri="{FF2B5EF4-FFF2-40B4-BE49-F238E27FC236}">
+                <a16:creationId xmlns:a16="http://schemas.microsoft.com/office/drawing/2014/main" id="{0AE745BC-6CBC-493B-8305-C60541D730A6}"/>
+              </a:ext>
+            </a:extLst>
+          </p:cNvPr>
+          <p:cNvSpPr>
+            <a:spLocks xmlns:a="http://schemas.openxmlformats.org/drawingml/2006/main" noGrp="1"/>
+          </p:cNvSpPr>
+          <p:nvPr/>
+        </p:nvSpPr>
+        <p:spPr>
+          <a:xfrm xmlns:a="http://schemas.openxmlformats.org/drawingml/2006/main">
+            <a:off x="5143500" y="1571625"/>
+            <a:ext cx="361950" cy="247650"/>
+          </a:xfrm>
+          <a:prstGeom xmlns:a="http://schemas.openxmlformats.org/drawingml/2006/main" prst="rect">
+            <a:avLst/>
+          </a:prstGeom>
+          <a:noFill xmlns:a="http://schemas.openxmlformats.org/drawingml/2006/main"/>
+          <a:ln xmlns:a="http://schemas.openxmlformats.org/drawingml/2006/main" w="0">
+            <a:noFill/>
+            <a:prstDash val="solid"/>
+          </a:ln>
+        </p:spPr>
+        <p:txBody>
+          <a:bodyPr xmlns:a="http://schemas.openxmlformats.org/drawingml/2006/main" lIns="0" tIns="0" rIns="0" bIns="0" anchor="ctr">
+            <a:noAutofit/>
+          </a:bodyPr>
+          <a:lstStyle xmlns:a="http://schemas.openxmlformats.org/drawingml/2006/main"/>
+          <a:p xmlns:a="http://schemas.openxmlformats.org/drawingml/2006/main">
+            <a:pPr algn="ctr">
+              <a:defRPr sz="1400" b="0">
+                <a:solidFill>
+                  <a:srgbClr val="59636E"/>
+                </a:solidFill>
+                <a:latin typeface="Noto Sans JP"/>
+                <a:ea typeface="Noto Sans JP"/>
+                <a:cs typeface="Noto Sans JP"/>
+              </a:defRPr>
+            </a:pPr>
+            <a:r>
+              <a:rPr sz="1400" b="0">
+                <a:solidFill>
+                  <a:srgbClr val="59636E"/>
+                </a:solidFill>
+                <a:latin typeface="Noto Sans JP"/>
+                <a:ea typeface="Noto Sans JP"/>
+                <a:cs typeface="Noto Sans JP"/>
+              </a:rPr>
+              <a:t>5</a:t>
+            </a:r>
+          </a:p>
+        </p:txBody>
+      </p:sp>
+      <p:sp>
+        <p:nvSpPr>
+          <p:cNvPr id="23" name="retained-5">
+            <a:extLst xmlns:a="http://schemas.openxmlformats.org/drawingml/2006/main">
+              <a:ext uri="{FF2B5EF4-FFF2-40B4-BE49-F238E27FC236}">
+                <a16:creationId xmlns:a16="http://schemas.microsoft.com/office/drawing/2014/main" id="{F463E90C-ACE2-4800-9EF5-4D15BE04CC38}"/>
+              </a:ext>
+            </a:extLst>
+          </p:cNvPr>
+          <p:cNvSpPr>
+            <a:spLocks xmlns:a="http://schemas.openxmlformats.org/drawingml/2006/main" noGrp="1"/>
+          </p:cNvSpPr>
+          <p:nvPr/>
+        </p:nvSpPr>
+        <p:spPr>
+          <a:xfrm xmlns:a="http://schemas.openxmlformats.org/drawingml/2006/main">
+            <a:off x="5219700" y="3257550"/>
+            <a:ext cx="209550" cy="209550"/>
+          </a:xfrm>
+          <a:prstGeom xmlns:a="http://schemas.openxmlformats.org/drawingml/2006/main" prst="rect">
+            <a:avLst/>
+          </a:prstGeom>
+          <a:solidFill xmlns:a="http://schemas.openxmlformats.org/drawingml/2006/main">
+            <a:srgbClr val="9BBB59"/>
+          </a:solidFill>
+          <a:ln xmlns:a="http://schemas.openxmlformats.org/drawingml/2006/main" w="11430">
+            <a:solidFill>
+              <a:srgbClr val="17202A"/>
+            </a:solidFill>
+            <a:prstDash val="solid"/>
+          </a:ln>
+        </p:spPr>
+      </p:sp>
+      <p:cxnSp>
+        <p:nvCxnSpPr>
+          <p:cNvPr id="67" name=""/>
+          <p:cNvCxnSpPr>
+            <a:stCxn xmlns:a="http://schemas.openxmlformats.org/drawingml/2006/main" id="21" idx="4"/>
+            <a:endCxn xmlns:a="http://schemas.openxmlformats.org/drawingml/2006/main" id="23" idx="0"/>
+          </p:cNvCxnSpPr>
+          <p:nvPr/>
+        </p:nvCxnSpPr>
+        <p:spPr>
+          <a:xfrm xmlns:a="http://schemas.openxmlformats.org/drawingml/2006/main">
+            <a:off x="5324475" y="2057400"/>
+            <a:ext cx="0" cy="1200150"/>
+          </a:xfrm>
+          <a:prstGeom xmlns:a="http://schemas.openxmlformats.org/drawingml/2006/main" prst="straightConnector1">
+            <a:avLst/>
+          </a:prstGeom>
+          <a:ln xmlns:a="http://schemas.openxmlformats.org/drawingml/2006/main" w="11430">
+            <a:solidFill>
+              <a:srgbClr val="59636E"/>
+            </a:solidFill>
+            <a:tailEnd type="triangle" w="sm" len="sm"/>
+          </a:ln>
+        </p:spPr>
+      </p:cxnSp>
+      <p:sp>
+        <p:nvSpPr>
+          <p:cNvPr id="25" name="input-6">
+            <a:extLst xmlns:a="http://schemas.openxmlformats.org/drawingml/2006/main">
+              <a:ext uri="{FF2B5EF4-FFF2-40B4-BE49-F238E27FC236}">
+                <a16:creationId xmlns:a16="http://schemas.microsoft.com/office/drawing/2014/main" id="{F0B8B5AA-6010-45BE-8171-BC832D6B4F17}"/>
+              </a:ext>
+            </a:extLst>
+          </p:cNvPr>
+          <p:cNvSpPr>
+            <a:spLocks xmlns:a="http://schemas.openxmlformats.org/drawingml/2006/main" noGrp="1"/>
+          </p:cNvSpPr>
+          <p:nvPr/>
+        </p:nvSpPr>
+        <p:spPr>
+          <a:xfrm xmlns:a="http://schemas.openxmlformats.org/drawingml/2006/main">
+            <a:off x="5638800" y="1885950"/>
+            <a:ext cx="171450" cy="171450"/>
+          </a:xfrm>
+          <a:prstGeom xmlns:a="http://schemas.openxmlformats.org/drawingml/2006/main" prst="ellipse">
+            <a:avLst/>
+          </a:prstGeom>
+          <a:solidFill xmlns:a="http://schemas.openxmlformats.org/drawingml/2006/main">
+            <a:srgbClr val="666666"/>
+          </a:solidFill>
+          <a:ln xmlns:a="http://schemas.openxmlformats.org/drawingml/2006/main" w="0">
+            <a:noFill/>
+            <a:prstDash val="solid"/>
+          </a:ln>
+        </p:spPr>
+      </p:sp>
+      <p:sp>
+        <p:nvSpPr>
+          <p:cNvPr id="26" name="minute-6">
+            <a:extLst xmlns:a="http://schemas.openxmlformats.org/drawingml/2006/main">
+              <a:ext uri="{FF2B5EF4-FFF2-40B4-BE49-F238E27FC236}">
+                <a16:creationId xmlns:a16="http://schemas.microsoft.com/office/drawing/2014/main" id="{0857017B-E663-4E07-ABB2-D94AA6449805}"/>
+              </a:ext>
+            </a:extLst>
+          </p:cNvPr>
+          <p:cNvSpPr>
+            <a:spLocks xmlns:a="http://schemas.openxmlformats.org/drawingml/2006/main" noGrp="1"/>
+          </p:cNvSpPr>
+          <p:nvPr/>
+        </p:nvSpPr>
+        <p:spPr>
+          <a:xfrm xmlns:a="http://schemas.openxmlformats.org/drawingml/2006/main">
+            <a:off x="5543550" y="1571625"/>
+            <a:ext cx="361950" cy="247650"/>
+          </a:xfrm>
+          <a:prstGeom xmlns:a="http://schemas.openxmlformats.org/drawingml/2006/main" prst="rect">
+            <a:avLst/>
+          </a:prstGeom>
+          <a:noFill xmlns:a="http://schemas.openxmlformats.org/drawingml/2006/main"/>
+          <a:ln xmlns:a="http://schemas.openxmlformats.org/drawingml/2006/main" w="0">
+            <a:noFill/>
+            <a:prstDash val="solid"/>
+          </a:ln>
+        </p:spPr>
+        <p:txBody>
+          <a:bodyPr xmlns:a="http://schemas.openxmlformats.org/drawingml/2006/main" lIns="0" tIns="0" rIns="0" bIns="0" anchor="ctr">
+            <a:noAutofit/>
+          </a:bodyPr>
+          <a:lstStyle xmlns:a="http://schemas.openxmlformats.org/drawingml/2006/main"/>
+          <a:p xmlns:a="http://schemas.openxmlformats.org/drawingml/2006/main">
+            <a:pPr algn="ctr">
+              <a:defRPr sz="1400" b="0">
+                <a:solidFill>
+                  <a:srgbClr val="59636E"/>
+                </a:solidFill>
+                <a:latin typeface="Noto Sans JP"/>
+                <a:ea typeface="Noto Sans JP"/>
+                <a:cs typeface="Noto Sans JP"/>
+              </a:defRPr>
+            </a:pPr>
+            <a:r>
+              <a:rPr sz="1400" b="0">
+                <a:solidFill>
+                  <a:srgbClr val="59636E"/>
+                </a:solidFill>
+                <a:latin typeface="Noto Sans JP"/>
+                <a:ea typeface="Noto Sans JP"/>
+                <a:cs typeface="Noto Sans JP"/>
+              </a:rPr>
+              <a:t>6</a:t>
+            </a:r>
+          </a:p>
+        </p:txBody>
+      </p:sp>
+      <p:sp>
+        <p:nvSpPr>
+          <p:cNvPr id="27" name="input-7">
+            <a:extLst xmlns:a="http://schemas.openxmlformats.org/drawingml/2006/main">
+              <a:ext uri="{FF2B5EF4-FFF2-40B4-BE49-F238E27FC236}">
+                <a16:creationId xmlns:a16="http://schemas.microsoft.com/office/drawing/2014/main" id="{14DEF5AA-2DC5-4760-824B-CC5CF1BA713C}"/>
+              </a:ext>
+            </a:extLst>
+          </p:cNvPr>
+          <p:cNvSpPr>
+            <a:spLocks xmlns:a="http://schemas.openxmlformats.org/drawingml/2006/main" noGrp="1"/>
+          </p:cNvSpPr>
+          <p:nvPr/>
+        </p:nvSpPr>
+        <p:spPr>
+          <a:xfrm xmlns:a="http://schemas.openxmlformats.org/drawingml/2006/main">
+            <a:off x="6038850" y="1885950"/>
+            <a:ext cx="171450" cy="171450"/>
+          </a:xfrm>
+          <a:prstGeom xmlns:a="http://schemas.openxmlformats.org/drawingml/2006/main" prst="ellipse">
+            <a:avLst/>
+          </a:prstGeom>
+          <a:solidFill xmlns:a="http://schemas.openxmlformats.org/drawingml/2006/main">
+            <a:srgbClr val="666666"/>
+          </a:solidFill>
+          <a:ln xmlns:a="http://schemas.openxmlformats.org/drawingml/2006/main" w="0">
+            <a:noFill/>
+            <a:prstDash val="solid"/>
+          </a:ln>
+        </p:spPr>
+      </p:sp>
+      <p:sp>
+        <p:nvSpPr>
+          <p:cNvPr id="28" name="minute-7">
+            <a:extLst xmlns:a="http://schemas.openxmlformats.org/drawingml/2006/main">
+              <a:ext uri="{FF2B5EF4-FFF2-40B4-BE49-F238E27FC236}">
+                <a16:creationId xmlns:a16="http://schemas.microsoft.com/office/drawing/2014/main" id="{66B3F0F0-20AB-4E6F-8F09-7B7E72183963}"/>
+              </a:ext>
+            </a:extLst>
+          </p:cNvPr>
+          <p:cNvSpPr>
+            <a:spLocks xmlns:a="http://schemas.openxmlformats.org/drawingml/2006/main" noGrp="1"/>
+          </p:cNvSpPr>
+          <p:nvPr/>
+        </p:nvSpPr>
+        <p:spPr>
+          <a:xfrm xmlns:a="http://schemas.openxmlformats.org/drawingml/2006/main">
+            <a:off x="5943600" y="1571625"/>
+            <a:ext cx="361950" cy="247650"/>
+          </a:xfrm>
+          <a:prstGeom xmlns:a="http://schemas.openxmlformats.org/drawingml/2006/main" prst="rect">
+            <a:avLst/>
+          </a:prstGeom>
+          <a:noFill xmlns:a="http://schemas.openxmlformats.org/drawingml/2006/main"/>
+          <a:ln xmlns:a="http://schemas.openxmlformats.org/drawingml/2006/main" w="0">
+            <a:noFill/>
+            <a:prstDash val="solid"/>
+          </a:ln>
+        </p:spPr>
+        <p:txBody>
+          <a:bodyPr xmlns:a="http://schemas.openxmlformats.org/drawingml/2006/main" lIns="0" tIns="0" rIns="0" bIns="0" anchor="ctr">
+            <a:noAutofit/>
+          </a:bodyPr>
+          <a:lstStyle xmlns:a="http://schemas.openxmlformats.org/drawingml/2006/main"/>
+          <a:p xmlns:a="http://schemas.openxmlformats.org/drawingml/2006/main">
+            <a:pPr algn="ctr">
+              <a:defRPr sz="1400" b="0">
+                <a:solidFill>
+                  <a:srgbClr val="59636E"/>
+                </a:solidFill>
+                <a:latin typeface="Noto Sans JP"/>
+                <a:ea typeface="Noto Sans JP"/>
+                <a:cs typeface="Noto Sans JP"/>
+              </a:defRPr>
+            </a:pPr>
+            <a:r>
+              <a:rPr sz="1400" b="0">
+                <a:solidFill>
+                  <a:srgbClr val="59636E"/>
+                </a:solidFill>
+                <a:latin typeface="Noto Sans JP"/>
+                <a:ea typeface="Noto Sans JP"/>
+                <a:cs typeface="Noto Sans JP"/>
+              </a:rPr>
+              <a:t>7</a:t>
+            </a:r>
+          </a:p>
+        </p:txBody>
+      </p:sp>
+      <p:sp>
+        <p:nvSpPr>
+          <p:cNvPr id="29" name="input-8">
+            <a:extLst xmlns:a="http://schemas.openxmlformats.org/drawingml/2006/main">
+              <a:ext uri="{FF2B5EF4-FFF2-40B4-BE49-F238E27FC236}">
+                <a16:creationId xmlns:a16="http://schemas.microsoft.com/office/drawing/2014/main" id="{D900A5B7-6189-4DAB-B9F9-B1A9861EC088}"/>
+              </a:ext>
+            </a:extLst>
+          </p:cNvPr>
+          <p:cNvSpPr>
+            <a:spLocks xmlns:a="http://schemas.openxmlformats.org/drawingml/2006/main" noGrp="1"/>
+          </p:cNvSpPr>
+          <p:nvPr/>
+        </p:nvSpPr>
+        <p:spPr>
+          <a:xfrm xmlns:a="http://schemas.openxmlformats.org/drawingml/2006/main">
+            <a:off x="6438900" y="1885950"/>
+            <a:ext cx="171450" cy="171450"/>
+          </a:xfrm>
+          <a:prstGeom xmlns:a="http://schemas.openxmlformats.org/drawingml/2006/main" prst="ellipse">
+            <a:avLst/>
+          </a:prstGeom>
+          <a:solidFill xmlns:a="http://schemas.openxmlformats.org/drawingml/2006/main">
+            <a:srgbClr val="666666"/>
+          </a:solidFill>
+          <a:ln xmlns:a="http://schemas.openxmlformats.org/drawingml/2006/main" w="0">
+            <a:noFill/>
+            <a:prstDash val="solid"/>
+          </a:ln>
+        </p:spPr>
+      </p:sp>
+      <p:sp>
+        <p:nvSpPr>
+          <p:cNvPr id="30" name="minute-8">
+            <a:extLst xmlns:a="http://schemas.openxmlformats.org/drawingml/2006/main">
+              <a:ext uri="{FF2B5EF4-FFF2-40B4-BE49-F238E27FC236}">
+                <a16:creationId xmlns:a16="http://schemas.microsoft.com/office/drawing/2014/main" id="{B20EA91A-EA71-4AEE-9BD3-343AACC9A51C}"/>
+              </a:ext>
+            </a:extLst>
+          </p:cNvPr>
+          <p:cNvSpPr>
+            <a:spLocks xmlns:a="http://schemas.openxmlformats.org/drawingml/2006/main" noGrp="1"/>
+          </p:cNvSpPr>
+          <p:nvPr/>
+        </p:nvSpPr>
+        <p:spPr>
+          <a:xfrm xmlns:a="http://schemas.openxmlformats.org/drawingml/2006/main">
+            <a:off x="6343650" y="1571625"/>
+            <a:ext cx="361950" cy="247650"/>
+          </a:xfrm>
+          <a:prstGeom xmlns:a="http://schemas.openxmlformats.org/drawingml/2006/main" prst="rect">
+            <a:avLst/>
+          </a:prstGeom>
+          <a:noFill xmlns:a="http://schemas.openxmlformats.org/drawingml/2006/main"/>
+          <a:ln xmlns:a="http://schemas.openxmlformats.org/drawingml/2006/main" w="0">
+            <a:noFill/>
+            <a:prstDash val="solid"/>
+          </a:ln>
+        </p:spPr>
+        <p:txBody>
+          <a:bodyPr xmlns:a="http://schemas.openxmlformats.org/drawingml/2006/main" lIns="0" tIns="0" rIns="0" bIns="0" anchor="ctr">
+            <a:noAutofit/>
+          </a:bodyPr>
+          <a:lstStyle xmlns:a="http://schemas.openxmlformats.org/drawingml/2006/main"/>
+          <a:p xmlns:a="http://schemas.openxmlformats.org/drawingml/2006/main">
+            <a:pPr algn="ctr">
+              <a:defRPr sz="1400" b="0">
+                <a:solidFill>
+                  <a:srgbClr val="59636E"/>
+                </a:solidFill>
+                <a:latin typeface="Noto Sans JP"/>
+                <a:ea typeface="Noto Sans JP"/>
+                <a:cs typeface="Noto Sans JP"/>
+              </a:defRPr>
+            </a:pPr>
+            <a:r>
+              <a:rPr sz="1400" b="0">
+                <a:solidFill>
+                  <a:srgbClr val="59636E"/>
+                </a:solidFill>
+                <a:latin typeface="Noto Sans JP"/>
+                <a:ea typeface="Noto Sans JP"/>
+                <a:cs typeface="Noto Sans JP"/>
+              </a:rPr>
+              <a:t>8</a:t>
+            </a:r>
+          </a:p>
+        </p:txBody>
+      </p:sp>
+      <p:sp>
+        <p:nvSpPr>
+          <p:cNvPr id="31" name="input-9">
+            <a:extLst xmlns:a="http://schemas.openxmlformats.org/drawingml/2006/main">
+              <a:ext uri="{FF2B5EF4-FFF2-40B4-BE49-F238E27FC236}">
+                <a16:creationId xmlns:a16="http://schemas.microsoft.com/office/drawing/2014/main" id="{9D7ACD2A-1D74-4A5F-8DC9-064C8DC2CDDC}"/>
+              </a:ext>
+            </a:extLst>
+          </p:cNvPr>
+          <p:cNvSpPr>
+            <a:spLocks xmlns:a="http://schemas.openxmlformats.org/drawingml/2006/main" noGrp="1"/>
+          </p:cNvSpPr>
+          <p:nvPr/>
+        </p:nvSpPr>
+        <p:spPr>
+          <a:xfrm xmlns:a="http://schemas.openxmlformats.org/drawingml/2006/main">
+            <a:off x="6838950" y="1885950"/>
+            <a:ext cx="171450" cy="171450"/>
+          </a:xfrm>
+          <a:prstGeom xmlns:a="http://schemas.openxmlformats.org/drawingml/2006/main" prst="ellipse">
+            <a:avLst/>
+          </a:prstGeom>
+          <a:solidFill xmlns:a="http://schemas.openxmlformats.org/drawingml/2006/main">
+            <a:srgbClr val="666666"/>
+          </a:solidFill>
+          <a:ln xmlns:a="http://schemas.openxmlformats.org/drawingml/2006/main" w="0">
+            <a:noFill/>
+            <a:prstDash val="solid"/>
+          </a:ln>
+        </p:spPr>
+      </p:sp>
+      <p:sp>
+        <p:nvSpPr>
+          <p:cNvPr id="32" name="minute-9">
+            <a:extLst xmlns:a="http://schemas.openxmlformats.org/drawingml/2006/main">
+              <a:ext uri="{FF2B5EF4-FFF2-40B4-BE49-F238E27FC236}">
+                <a16:creationId xmlns:a16="http://schemas.microsoft.com/office/drawing/2014/main" id="{6A1E4CA6-68D1-4591-8EC9-CB6D42817E62}"/>
+              </a:ext>
+            </a:extLst>
+          </p:cNvPr>
+          <p:cNvSpPr>
+            <a:spLocks xmlns:a="http://schemas.openxmlformats.org/drawingml/2006/main" noGrp="1"/>
+          </p:cNvSpPr>
+          <p:nvPr/>
+        </p:nvSpPr>
+        <p:spPr>
+          <a:xfrm xmlns:a="http://schemas.openxmlformats.org/drawingml/2006/main">
+            <a:off x="6743700" y="1571625"/>
+            <a:ext cx="361950" cy="247650"/>
+          </a:xfrm>
+          <a:prstGeom xmlns:a="http://schemas.openxmlformats.org/drawingml/2006/main" prst="rect">
+            <a:avLst/>
+          </a:prstGeom>
+          <a:noFill xmlns:a="http://schemas.openxmlformats.org/drawingml/2006/main"/>
+          <a:ln xmlns:a="http://schemas.openxmlformats.org/drawingml/2006/main" w="0">
+            <a:noFill/>
+            <a:prstDash val="solid"/>
+          </a:ln>
+        </p:spPr>
+        <p:txBody>
+          <a:bodyPr xmlns:a="http://schemas.openxmlformats.org/drawingml/2006/main" lIns="0" tIns="0" rIns="0" bIns="0" anchor="ctr">
+            <a:noAutofit/>
+          </a:bodyPr>
+          <a:lstStyle xmlns:a="http://schemas.openxmlformats.org/drawingml/2006/main"/>
+          <a:p xmlns:a="http://schemas.openxmlformats.org/drawingml/2006/main">
+            <a:pPr algn="ctr">
+              <a:defRPr sz="1400" b="0">
+                <a:solidFill>
+                  <a:srgbClr val="59636E"/>
+                </a:solidFill>
+                <a:latin typeface="Noto Sans JP"/>
+                <a:ea typeface="Noto Sans JP"/>
+                <a:cs typeface="Noto Sans JP"/>
+              </a:defRPr>
+            </a:pPr>
+            <a:r>
+              <a:rPr sz="1400" b="0">
+                <a:solidFill>
+                  <a:srgbClr val="59636E"/>
+                </a:solidFill>
+                <a:latin typeface="Noto Sans JP"/>
+                <a:ea typeface="Noto Sans JP"/>
+                <a:cs typeface="Noto Sans JP"/>
+              </a:rPr>
+              <a:t>9</a:t>
+            </a:r>
+          </a:p>
+        </p:txBody>
+      </p:sp>
+      <p:sp>
+        <p:nvSpPr>
+          <p:cNvPr id="33" name="input-10">
+            <a:extLst xmlns:a="http://schemas.openxmlformats.org/drawingml/2006/main">
+              <a:ext uri="{FF2B5EF4-FFF2-40B4-BE49-F238E27FC236}">
+                <a16:creationId xmlns:a16="http://schemas.microsoft.com/office/drawing/2014/main" id="{A763D10E-9C35-4809-A76B-D4D812E3D50A}"/>
+              </a:ext>
+            </a:extLst>
+          </p:cNvPr>
+          <p:cNvSpPr>
+            <a:spLocks xmlns:a="http://schemas.openxmlformats.org/drawingml/2006/main" noGrp="1"/>
+          </p:cNvSpPr>
+          <p:nvPr/>
+        </p:nvSpPr>
+        <p:spPr>
+          <a:xfrm xmlns:a="http://schemas.openxmlformats.org/drawingml/2006/main">
+            <a:off x="7239000" y="1885950"/>
+            <a:ext cx="171450" cy="171450"/>
+          </a:xfrm>
+          <a:prstGeom xmlns:a="http://schemas.openxmlformats.org/drawingml/2006/main" prst="ellipse">
+            <a:avLst/>
+          </a:prstGeom>
+          <a:solidFill xmlns:a="http://schemas.openxmlformats.org/drawingml/2006/main">
+            <a:srgbClr val="666666"/>
+          </a:solidFill>
+          <a:ln xmlns:a="http://schemas.openxmlformats.org/drawingml/2006/main" w="0">
+            <a:noFill/>
+            <a:prstDash val="solid"/>
+          </a:ln>
+        </p:spPr>
+      </p:sp>
+      <p:sp>
+        <p:nvSpPr>
+          <p:cNvPr id="34" name="minute-10">
+            <a:extLst xmlns:a="http://schemas.openxmlformats.org/drawingml/2006/main">
+              <a:ext uri="{FF2B5EF4-FFF2-40B4-BE49-F238E27FC236}">
+                <a16:creationId xmlns:a16="http://schemas.microsoft.com/office/drawing/2014/main" id="{BC063F09-335C-4503-BFF2-D97D1F334059}"/>
+              </a:ext>
+            </a:extLst>
+          </p:cNvPr>
+          <p:cNvSpPr>
+            <a:spLocks xmlns:a="http://schemas.openxmlformats.org/drawingml/2006/main" noGrp="1"/>
+          </p:cNvSpPr>
+          <p:nvPr/>
+        </p:nvSpPr>
+        <p:spPr>
+          <a:xfrm xmlns:a="http://schemas.openxmlformats.org/drawingml/2006/main">
+            <a:off x="7143750" y="1571625"/>
+            <a:ext cx="361950" cy="247650"/>
+          </a:xfrm>
+          <a:prstGeom xmlns:a="http://schemas.openxmlformats.org/drawingml/2006/main" prst="rect">
+            <a:avLst/>
+          </a:prstGeom>
+          <a:noFill xmlns:a="http://schemas.openxmlformats.org/drawingml/2006/main"/>
+          <a:ln xmlns:a="http://schemas.openxmlformats.org/drawingml/2006/main" w="0">
+            <a:noFill/>
+            <a:prstDash val="solid"/>
+          </a:ln>
+        </p:spPr>
+        <p:txBody>
+          <a:bodyPr xmlns:a="http://schemas.openxmlformats.org/drawingml/2006/main" lIns="0" tIns="0" rIns="0" bIns="0" anchor="ctr">
+            <a:noAutofit/>
+          </a:bodyPr>
+          <a:lstStyle xmlns:a="http://schemas.openxmlformats.org/drawingml/2006/main"/>
+          <a:p xmlns:a="http://schemas.openxmlformats.org/drawingml/2006/main">
+            <a:pPr algn="ctr">
+              <a:defRPr sz="1400" b="0">
+                <a:solidFill>
+                  <a:srgbClr val="59636E"/>
+                </a:solidFill>
+                <a:latin typeface="Noto Sans JP"/>
+                <a:ea typeface="Noto Sans JP"/>
+                <a:cs typeface="Noto Sans JP"/>
+              </a:defRPr>
+            </a:pPr>
+            <a:r>
+              <a:rPr sz="1400" b="0">
+                <a:solidFill>
+                  <a:srgbClr val="59636E"/>
+                </a:solidFill>
+                <a:latin typeface="Noto Sans JP"/>
+                <a:ea typeface="Noto Sans JP"/>
+                <a:cs typeface="Noto Sans JP"/>
+              </a:rPr>
+              <a:t>10</a:t>
+            </a:r>
+          </a:p>
+        </p:txBody>
+      </p:sp>
+      <p:sp>
+        <p:nvSpPr>
+          <p:cNvPr id="35" name="retained-10">
+            <a:extLst xmlns:a="http://schemas.openxmlformats.org/drawingml/2006/main">
+              <a:ext uri="{FF2B5EF4-FFF2-40B4-BE49-F238E27FC236}">
+                <a16:creationId xmlns:a16="http://schemas.microsoft.com/office/drawing/2014/main" id="{39B8E966-604F-4A1B-B099-6431196BB199}"/>
+              </a:ext>
+            </a:extLst>
+          </p:cNvPr>
+          <p:cNvSpPr>
+            <a:spLocks xmlns:a="http://schemas.openxmlformats.org/drawingml/2006/main" noGrp="1"/>
+          </p:cNvSpPr>
+          <p:nvPr/>
+        </p:nvSpPr>
+        <p:spPr>
+          <a:xfrm xmlns:a="http://schemas.openxmlformats.org/drawingml/2006/main">
+            <a:off x="7219950" y="3257550"/>
+            <a:ext cx="209550" cy="209550"/>
+          </a:xfrm>
+          <a:prstGeom xmlns:a="http://schemas.openxmlformats.org/drawingml/2006/main" prst="rect">
+            <a:avLst/>
+          </a:prstGeom>
+          <a:solidFill xmlns:a="http://schemas.openxmlformats.org/drawingml/2006/main">
+            <a:srgbClr val="9BBB59"/>
+          </a:solidFill>
+          <a:ln xmlns:a="http://schemas.openxmlformats.org/drawingml/2006/main" w="11430">
+            <a:solidFill>
+              <a:srgbClr val="17202A"/>
+            </a:solidFill>
+            <a:prstDash val="solid"/>
+          </a:ln>
+        </p:spPr>
+      </p:sp>
+      <p:cxnSp>
+        <p:nvCxnSpPr>
+          <p:cNvPr id="79" name=""/>
+          <p:cNvCxnSpPr>
+            <a:stCxn xmlns:a="http://schemas.openxmlformats.org/drawingml/2006/main" id="33" idx="4"/>
+            <a:endCxn xmlns:a="http://schemas.openxmlformats.org/drawingml/2006/main" id="35" idx="0"/>
+          </p:cNvCxnSpPr>
+          <p:nvPr/>
+        </p:nvCxnSpPr>
+        <p:spPr>
+          <a:xfrm xmlns:a="http://schemas.openxmlformats.org/drawingml/2006/main">
+            <a:off x="7324725" y="2057400"/>
+            <a:ext cx="0" cy="1200150"/>
+          </a:xfrm>
+          <a:prstGeom xmlns:a="http://schemas.openxmlformats.org/drawingml/2006/main" prst="straightConnector1">
+            <a:avLst/>
+          </a:prstGeom>
+          <a:ln xmlns:a="http://schemas.openxmlformats.org/drawingml/2006/main" w="11430">
+            <a:solidFill>
+              <a:srgbClr val="59636E"/>
+            </a:solidFill>
+            <a:tailEnd type="triangle" w="sm" len="sm"/>
+          </a:ln>
+        </p:spPr>
+      </p:cxnSp>
+      <p:sp>
+        <p:nvSpPr>
+          <p:cNvPr id="37" name="input-11">
+            <a:extLst xmlns:a="http://schemas.openxmlformats.org/drawingml/2006/main">
+              <a:ext uri="{FF2B5EF4-FFF2-40B4-BE49-F238E27FC236}">
+                <a16:creationId xmlns:a16="http://schemas.microsoft.com/office/drawing/2014/main" id="{E20777E4-DA54-4B4F-951B-845A381EF79E}"/>
+              </a:ext>
+            </a:extLst>
+          </p:cNvPr>
+          <p:cNvSpPr>
+            <a:spLocks xmlns:a="http://schemas.openxmlformats.org/drawingml/2006/main" noGrp="1"/>
+          </p:cNvSpPr>
+          <p:nvPr/>
+        </p:nvSpPr>
+        <p:spPr>
+          <a:xfrm xmlns:a="http://schemas.openxmlformats.org/drawingml/2006/main">
+            <a:off x="7639050" y="1885950"/>
+            <a:ext cx="171450" cy="171450"/>
+          </a:xfrm>
+          <a:prstGeom xmlns:a="http://schemas.openxmlformats.org/drawingml/2006/main" prst="ellipse">
+            <a:avLst/>
+          </a:prstGeom>
+          <a:solidFill xmlns:a="http://schemas.openxmlformats.org/drawingml/2006/main">
+            <a:srgbClr val="666666"/>
+          </a:solidFill>
+          <a:ln xmlns:a="http://schemas.openxmlformats.org/drawingml/2006/main" w="0">
+            <a:noFill/>
+            <a:prstDash val="solid"/>
+          </a:ln>
+        </p:spPr>
+      </p:sp>
+      <p:sp>
+        <p:nvSpPr>
+          <p:cNvPr id="38" name="minute-11">
+            <a:extLst xmlns:a="http://schemas.openxmlformats.org/drawingml/2006/main">
+              <a:ext uri="{FF2B5EF4-FFF2-40B4-BE49-F238E27FC236}">
+                <a16:creationId xmlns:a16="http://schemas.microsoft.com/office/drawing/2014/main" id="{AED54922-6E04-40F8-8007-9DCA1E814576}"/>
+              </a:ext>
+            </a:extLst>
+          </p:cNvPr>
+          <p:cNvSpPr>
+            <a:spLocks xmlns:a="http://schemas.openxmlformats.org/drawingml/2006/main" noGrp="1"/>
+          </p:cNvSpPr>
+          <p:nvPr/>
+        </p:nvSpPr>
+        <p:spPr>
+          <a:xfrm xmlns:a="http://schemas.openxmlformats.org/drawingml/2006/main">
+            <a:off x="7543800" y="1571625"/>
+            <a:ext cx="361950" cy="247650"/>
+          </a:xfrm>
+          <a:prstGeom xmlns:a="http://schemas.openxmlformats.org/drawingml/2006/main" prst="rect">
+            <a:avLst/>
+          </a:prstGeom>
+          <a:noFill xmlns:a="http://schemas.openxmlformats.org/drawingml/2006/main"/>
+          <a:ln xmlns:a="http://schemas.openxmlformats.org/drawingml/2006/main" w="0">
+            <a:noFill/>
+            <a:prstDash val="solid"/>
+          </a:ln>
+        </p:spPr>
+        <p:txBody>
+          <a:bodyPr xmlns:a="http://schemas.openxmlformats.org/drawingml/2006/main" lIns="0" tIns="0" rIns="0" bIns="0" anchor="ctr">
+            <a:noAutofit/>
+          </a:bodyPr>
+          <a:lstStyle xmlns:a="http://schemas.openxmlformats.org/drawingml/2006/main"/>
+          <a:p xmlns:a="http://schemas.openxmlformats.org/drawingml/2006/main">
+            <a:pPr algn="ctr">
+              <a:defRPr sz="1400" b="0">
+                <a:solidFill>
+                  <a:srgbClr val="59636E"/>
+                </a:solidFill>
+                <a:latin typeface="Noto Sans JP"/>
+                <a:ea typeface="Noto Sans JP"/>
+                <a:cs typeface="Noto Sans JP"/>
+              </a:defRPr>
+            </a:pPr>
+            <a:r>
+              <a:rPr sz="1400" b="0">
+                <a:solidFill>
+                  <a:srgbClr val="59636E"/>
+                </a:solidFill>
+                <a:latin typeface="Noto Sans JP"/>
+                <a:ea typeface="Noto Sans JP"/>
+                <a:cs typeface="Noto Sans JP"/>
+              </a:rPr>
+              <a:t>11</a:t>
+            </a:r>
+          </a:p>
+        </p:txBody>
+      </p:sp>
+      <p:sp>
+        <p:nvSpPr>
+          <p:cNvPr id="39" name="input-12">
+            <a:extLst xmlns:a="http://schemas.openxmlformats.org/drawingml/2006/main">
+              <a:ext uri="{FF2B5EF4-FFF2-40B4-BE49-F238E27FC236}">
+                <a16:creationId xmlns:a16="http://schemas.microsoft.com/office/drawing/2014/main" id="{2E4F03CC-77E1-4C58-9079-602F065C2339}"/>
+              </a:ext>
+            </a:extLst>
+          </p:cNvPr>
+          <p:cNvSpPr>
+            <a:spLocks xmlns:a="http://schemas.openxmlformats.org/drawingml/2006/main" noGrp="1"/>
+          </p:cNvSpPr>
+          <p:nvPr/>
+        </p:nvSpPr>
+        <p:spPr>
+          <a:xfrm xmlns:a="http://schemas.openxmlformats.org/drawingml/2006/main">
+            <a:off x="8039100" y="1885950"/>
+            <a:ext cx="171450" cy="171450"/>
+          </a:xfrm>
+          <a:prstGeom xmlns:a="http://schemas.openxmlformats.org/drawingml/2006/main" prst="ellipse">
+            <a:avLst/>
+          </a:prstGeom>
+          <a:solidFill xmlns:a="http://schemas.openxmlformats.org/drawingml/2006/main">
+            <a:srgbClr val="666666"/>
+          </a:solidFill>
+          <a:ln xmlns:a="http://schemas.openxmlformats.org/drawingml/2006/main" w="0">
+            <a:noFill/>
+            <a:prstDash val="solid"/>
+          </a:ln>
+        </p:spPr>
+      </p:sp>
+      <p:sp>
+        <p:nvSpPr>
+          <p:cNvPr id="40" name="minute-12">
+            <a:extLst xmlns:a="http://schemas.openxmlformats.org/drawingml/2006/main">
+              <a:ext uri="{FF2B5EF4-FFF2-40B4-BE49-F238E27FC236}">
+                <a16:creationId xmlns:a16="http://schemas.microsoft.com/office/drawing/2014/main" id="{86D9BE42-47ED-4852-8EEB-B7FABF44D777}"/>
+              </a:ext>
+            </a:extLst>
+          </p:cNvPr>
+          <p:cNvSpPr>
+            <a:spLocks xmlns:a="http://schemas.openxmlformats.org/drawingml/2006/main" noGrp="1"/>
+          </p:cNvSpPr>
+          <p:nvPr/>
+        </p:nvSpPr>
+        <p:spPr>
+          <a:xfrm xmlns:a="http://schemas.openxmlformats.org/drawingml/2006/main">
+            <a:off x="7943850" y="1571625"/>
+            <a:ext cx="361950" cy="247650"/>
+          </a:xfrm>
+          <a:prstGeom xmlns:a="http://schemas.openxmlformats.org/drawingml/2006/main" prst="rect">
+            <a:avLst/>
+          </a:prstGeom>
+          <a:noFill xmlns:a="http://schemas.openxmlformats.org/drawingml/2006/main"/>
+          <a:ln xmlns:a="http://schemas.openxmlformats.org/drawingml/2006/main" w="0">
+            <a:noFill/>
+            <a:prstDash val="solid"/>
+          </a:ln>
+        </p:spPr>
+        <p:txBody>
+          <a:bodyPr xmlns:a="http://schemas.openxmlformats.org/drawingml/2006/main" lIns="0" tIns="0" rIns="0" bIns="0" anchor="ctr">
+            <a:noAutofit/>
+          </a:bodyPr>
+          <a:lstStyle xmlns:a="http://schemas.openxmlformats.org/drawingml/2006/main"/>
+          <a:p xmlns:a="http://schemas.openxmlformats.org/drawingml/2006/main">
+            <a:pPr algn="ctr">
+              <a:defRPr sz="1400" b="0">
+                <a:solidFill>
+                  <a:srgbClr val="59636E"/>
+                </a:solidFill>
+                <a:latin typeface="Noto Sans JP"/>
+                <a:ea typeface="Noto Sans JP"/>
+                <a:cs typeface="Noto Sans JP"/>
+              </a:defRPr>
+            </a:pPr>
+            <a:r>
+              <a:rPr sz="1400" b="0">
+                <a:solidFill>
+                  <a:srgbClr val="59636E"/>
+                </a:solidFill>
+                <a:latin typeface="Noto Sans JP"/>
+                <a:ea typeface="Noto Sans JP"/>
+                <a:cs typeface="Noto Sans JP"/>
+              </a:rPr>
+              <a:t>12</a:t>
+            </a:r>
+          </a:p>
+        </p:txBody>
+      </p:sp>
+      <p:sp>
+        <p:nvSpPr>
+          <p:cNvPr id="41" name="axis-unit">
+            <a:extLst xmlns:a="http://schemas.openxmlformats.org/drawingml/2006/main">
+              <a:ext uri="{FF2B5EF4-FFF2-40B4-BE49-F238E27FC236}">
+                <a16:creationId xmlns:a16="http://schemas.microsoft.com/office/drawing/2014/main" id="{B4374FA6-2FDE-4431-9E94-2993D35A5BC8}"/>
+              </a:ext>
+            </a:extLst>
+          </p:cNvPr>
+          <p:cNvSpPr>
+            <a:spLocks xmlns:a="http://schemas.openxmlformats.org/drawingml/2006/main" noGrp="1"/>
+          </p:cNvSpPr>
+          <p:nvPr/>
+        </p:nvSpPr>
+        <p:spPr>
+          <a:xfrm xmlns:a="http://schemas.openxmlformats.org/drawingml/2006/main">
+            <a:off x="7562850" y="2533650"/>
+            <a:ext cx="904875" cy="266700"/>
+          </a:xfrm>
+          <a:prstGeom xmlns:a="http://schemas.openxmlformats.org/drawingml/2006/main" prst="rect">
+            <a:avLst/>
+          </a:prstGeom>
+          <a:noFill xmlns:a="http://schemas.openxmlformats.org/drawingml/2006/main"/>
+          <a:ln xmlns:a="http://schemas.openxmlformats.org/drawingml/2006/main" w="0">
+            <a:noFill/>
+            <a:prstDash val="solid"/>
+          </a:ln>
+        </p:spPr>
+        <p:txBody>
+          <a:bodyPr xmlns:a="http://schemas.openxmlformats.org/drawingml/2006/main" lIns="0" tIns="0" rIns="0" bIns="0" anchor="ctr">
+            <a:noAutofit/>
+          </a:bodyPr>
+          <a:lstStyle xmlns:a="http://schemas.openxmlformats.org/drawingml/2006/main"/>
+          <a:p xmlns:a="http://schemas.openxmlformats.org/drawingml/2006/main">
+            <a:pPr algn="r">
+              <a:defRPr sz="1400" b="0">
+                <a:solidFill>
+                  <a:srgbClr val="59636E"/>
+                </a:solidFill>
+                <a:latin typeface="Noto Sans JP"/>
+                <a:ea typeface="Noto Sans JP"/>
+                <a:cs typeface="Noto Sans JP"/>
+              </a:defRPr>
+            </a:pPr>
+            <a:r>
+              <a:rPr sz="1400" b="0">
+                <a:solidFill>
+                  <a:srgbClr val="59636E"/>
+                </a:solidFill>
+                <a:latin typeface="Noto Sans JP"/>
+                <a:ea typeface="Noto Sans JP"/>
+                <a:cs typeface="Noto Sans JP"/>
+              </a:rPr>
+              <a:t>時刻 [分]</a:t>
+            </a:r>
+          </a:p>
+        </p:txBody>
+      </p:sp>
+      <p:sp>
+        <p:nvSpPr>
+          <p:cNvPr id="42" name="arrow-meaning">
+            <a:extLst xmlns:a="http://schemas.openxmlformats.org/drawingml/2006/main">
+              <a:ext uri="{FF2B5EF4-FFF2-40B4-BE49-F238E27FC236}">
+                <a16:creationId xmlns:a16="http://schemas.microsoft.com/office/drawing/2014/main" id="{0F1B02CC-8A04-4E7E-BEF5-3830E64F5A5E}"/>
+              </a:ext>
+            </a:extLst>
+          </p:cNvPr>
+          <p:cNvSpPr>
+            <a:spLocks xmlns:a="http://schemas.openxmlformats.org/drawingml/2006/main" noGrp="1"/>
+          </p:cNvSpPr>
+          <p:nvPr/>
+        </p:nvSpPr>
+        <p:spPr>
+          <a:xfrm xmlns:a="http://schemas.openxmlformats.org/drawingml/2006/main">
+            <a:off x="3238500" y="3838575"/>
+            <a:ext cx="4857750" cy="285750"/>
+          </a:xfrm>
+          <a:prstGeom xmlns:a="http://schemas.openxmlformats.org/drawingml/2006/main" prst="rect">
+            <a:avLst/>
+          </a:prstGeom>
+          <a:noFill xmlns:a="http://schemas.openxmlformats.org/drawingml/2006/main"/>
+          <a:ln xmlns:a="http://schemas.openxmlformats.org/drawingml/2006/main" w="0">
+            <a:noFill/>
+            <a:prstDash val="solid"/>
+          </a:ln>
+        </p:spPr>
+        <p:txBody>
+          <a:bodyPr xmlns:a="http://schemas.openxmlformats.org/drawingml/2006/main" lIns="0" tIns="0" rIns="0" bIns="0" anchor="ctr">
+            <a:noAutofit/>
+          </a:bodyPr>
+          <a:lstStyle xmlns:a="http://schemas.openxmlformats.org/drawingml/2006/main"/>
+          <a:p xmlns:a="http://schemas.openxmlformats.org/drawingml/2006/main">
+            <a:pPr algn="l">
+              <a:defRPr sz="1600" b="0">
+                <a:solidFill>
+                  <a:srgbClr val="59636E"/>
+                </a:solidFill>
+                <a:latin typeface="Noto Sans JP"/>
+                <a:ea typeface="Noto Sans JP"/>
+                <a:cs typeface="Noto Sans JP"/>
+              </a:defRPr>
+            </a:pPr>
+            <a:r>
+              <a:rPr sz="1600" b="0">
+                <a:solidFill>
+                  <a:srgbClr val="59636E"/>
+                </a:solidFill>
+                <a:latin typeface="Noto Sans JP"/>
+                <a:ea typeface="Noto Sans JP"/>
+                <a:cs typeface="Noto Sans JP"/>
+              </a:rPr>
+              <a:t>矢印は「保持する点」の対応</a:t>
+            </a:r>
+          </a:p>
+        </p:txBody>
+      </p:sp>
+      <p:sp>
+        <p:nvSpPr>
+          <p:cNvPr id="43" name="source-note">
+            <a:extLst xmlns:a="http://schemas.openxmlformats.org/drawingml/2006/main">
+              <a:ext uri="{FF2B5EF4-FFF2-40B4-BE49-F238E27FC236}">
+                <a16:creationId xmlns:a16="http://schemas.microsoft.com/office/drawing/2014/main" id="{620CFA26-F28F-4F8D-94EA-2CD0C5335758}"/>
+              </a:ext>
+            </a:extLst>
+          </p:cNvPr>
+          <p:cNvSpPr>
+            <a:spLocks xmlns:a="http://schemas.openxmlformats.org/drawingml/2006/main" noGrp="1"/>
+          </p:cNvSpPr>
+          <p:nvPr/>
+        </p:nvSpPr>
+        <p:spPr>
+          <a:xfrm xmlns:a="http://schemas.openxmlformats.org/drawingml/2006/main">
+            <a:off x="457200" y="4191000"/>
+            <a:ext cx="8229600" cy="304800"/>
+          </a:xfrm>
+          <a:prstGeom xmlns:a="http://schemas.openxmlformats.org/drawingml/2006/main" prst="rect">
+            <a:avLst/>
+          </a:prstGeom>
+          <a:noFill xmlns:a="http://schemas.openxmlformats.org/drawingml/2006/main"/>
+          <a:ln xmlns:a="http://schemas.openxmlformats.org/drawingml/2006/main" w="0">
+            <a:noFill/>
+            <a:prstDash val="solid"/>
+          </a:ln>
+        </p:spPr>
+        <p:txBody>
+          <a:bodyPr xmlns:a="http://schemas.openxmlformats.org/drawingml/2006/main" lIns="0" tIns="0" rIns="0" bIns="0" anchor="ctr">
+            <a:noAutofit/>
+          </a:bodyPr>
+          <a:lstStyle xmlns:a="http://schemas.openxmlformats.org/drawingml/2006/main"/>
+          <a:p xmlns:a="http://schemas.openxmlformats.org/drawingml/2006/main">
+            <a:pPr algn="l">
+              <a:defRPr sz="1800" b="0">
+                <a:solidFill>
+                  <a:srgbClr val="59636E"/>
+                </a:solidFill>
+                <a:latin typeface="Noto Sans JP"/>
+                <a:ea typeface="Noto Sans JP"/>
+                <a:cs typeface="Noto Sans JP"/>
+              </a:defRPr>
+            </a:pPr>
+            <a:r>
+              <a:rPr sz="1800" b="0">
+                <a:solidFill>
+                  <a:srgbClr val="59636E"/>
+                </a:solidFill>
+                <a:latin typeface="Noto Sans JP"/>
+                <a:ea typeface="Noto Sans JP"/>
+                <a:cs typeface="Noto Sans JP"/>
+              </a:rPr>
+              <a:t>合成系列1例／開始時刻0分／間引き処理だけを確認</a:t>
+            </a:r>
+          </a:p>
+        </p:txBody>
+      </p:sp>
+    </p:spTree>
+    <p:extLst>
+      <p:ext uri="{BB962C8B-B14F-4D97-AF65-F5344CB8AC3E}">
+        <p14:creationId xmlns:p14="http://schemas.microsoft.com/office/powerpoint/2010/main" val="463147979"/>
+      </p:ext>
+    </p:extLst>
+  </p:cSld>
+</p:sld>
+</file>
+
+<file path=ppt/slides/slide6.xml><?xml version="1.0" encoding="utf-8"?>
+<p:sld xmlns:p="http://schemas.openxmlformats.org/presentationml/2006/main">
+  <p:cSld>
+    <p:bg>
+      <p:bgPr>
+        <a:solidFill xmlns:a="http://schemas.openxmlformats.org/drawingml/2006/main">
+          <a:srgbClr val="FFFFFF"/>
+        </a:solidFill>
+      </p:bgPr>
+    </p:bg>
+    <p:spTree>
+      <p:nvGrpSpPr>
+        <p:cNvPr id="1" name=""/>
+        <p:cNvGrpSpPr/>
+        <p:nvPr/>
+      </p:nvGrpSpPr>
+      <p:grpSpPr>
+        <a:xfrm xmlns:a="http://schemas.openxmlformats.org/drawingml/2006/main"/>
+      </p:grpSpPr>
+      <p:sp>
+        <p:nvSpPr>
+          <p:cNvPr id="12" name="footer-line">
+            <a:extLst xmlns:a="http://schemas.openxmlformats.org/drawingml/2006/main">
+              <a:ext uri="{FF2B5EF4-FFF2-40B4-BE49-F238E27FC236}">
+                <a16:creationId xmlns:a16="http://schemas.microsoft.com/office/drawing/2014/main" id="{0EA5B151-8B8F-4458-8FAE-3B3616C70D61}"/>
+              </a:ext>
+            </a:extLst>
+          </p:cNvPr>
+          <p:cNvSpPr>
+            <a:spLocks xmlns:a="http://schemas.openxmlformats.org/drawingml/2006/main" noGrp="1"/>
+          </p:cNvSpPr>
+          <p:nvPr/>
+        </p:nvSpPr>
+        <p:spPr>
+          <a:xfrm xmlns:a="http://schemas.openxmlformats.org/drawingml/2006/main">
+            <a:off x="0" y="4613148"/>
+            <a:ext cx="9144000" cy="53950"/>
+          </a:xfrm>
+          <a:prstGeom xmlns:a="http://schemas.openxmlformats.org/drawingml/2006/main" prst="rect">
+            <a:avLst/>
+          </a:prstGeom>
+          <a:solidFill xmlns:a="http://schemas.openxmlformats.org/drawingml/2006/main">
+            <a:srgbClr val="9BBB59"/>
+          </a:solidFill>
+          <a:ln xmlns:a="http://schemas.openxmlformats.org/drawingml/2006/main" w="0">
+            <a:noFill/>
+            <a:prstDash val="solid"/>
+          </a:ln>
+        </p:spPr>
+      </p:sp>
+      <p:pic>
+        <p:nvPicPr>
+          <p:cNvPr id="13" name=""/>
+          <p:cNvPicPr>
+            <a:picLocks xmlns:a="http://schemas.openxmlformats.org/drawingml/2006/main" noChangeAspect="1"/>
+          </p:cNvPicPr>
+          <p:nvPr/>
+        </p:nvPicPr>
+        <p:blipFill>
+          <a:blip xmlns:r="http://schemas.openxmlformats.org/officeDocument/2006/relationships" xmlns:a="http://schemas.openxmlformats.org/drawingml/2006/main" r:embed="Re3243b56b6d14ddd"/>
+          <a:stretch xmlns:a="http://schemas.openxmlformats.org/drawingml/2006/main"/>
+        </p:blipFill>
+        <p:spPr>
+          <a:xfrm xmlns:a="http://schemas.openxmlformats.org/drawingml/2006/main">
+            <a:off x="293522" y="4803343"/>
+            <a:ext cx="818388" cy="229821"/>
+          </a:xfrm>
+          <a:prstGeom xmlns:a="http://schemas.openxmlformats.org/drawingml/2006/main" prst="rect">
+            <a:avLst/>
+          </a:prstGeom>
+        </p:spPr>
+      </p:pic>
+      <p:sp>
+        <p:nvSpPr>
+          <p:cNvPr id="3" name="page">
+            <a:extLst xmlns:a="http://schemas.openxmlformats.org/drawingml/2006/main">
+              <a:ext uri="{FF2B5EF4-FFF2-40B4-BE49-F238E27FC236}">
+                <a16:creationId xmlns:a16="http://schemas.microsoft.com/office/drawing/2014/main" id="{8950C73C-7565-4EE1-A594-2790945BE970}"/>
+              </a:ext>
+            </a:extLst>
+          </p:cNvPr>
+          <p:cNvSpPr>
+            <a:spLocks xmlns:a="http://schemas.openxmlformats.org/drawingml/2006/main" noGrp="1"/>
+          </p:cNvSpPr>
+          <p:nvPr/>
+        </p:nvSpPr>
+        <p:spPr>
+          <a:xfrm xmlns:a="http://schemas.openxmlformats.org/drawingml/2006/main">
+            <a:off x="6801307" y="4767682"/>
+            <a:ext cx="2133295" cy="274320"/>
+          </a:xfrm>
+          <a:prstGeom xmlns:a="http://schemas.openxmlformats.org/drawingml/2006/main" prst="rect">
+            <a:avLst/>
+          </a:prstGeom>
+          <a:noFill xmlns:a="http://schemas.openxmlformats.org/drawingml/2006/main"/>
+          <a:ln xmlns:a="http://schemas.openxmlformats.org/drawingml/2006/main" w="0">
+            <a:noFill/>
+            <a:prstDash val="solid"/>
+          </a:ln>
+        </p:spPr>
+        <p:txBody>
+          <a:bodyPr xmlns:a="http://schemas.openxmlformats.org/drawingml/2006/main" lIns="0" tIns="0" rIns="0" bIns="0" anchor="ctr">
+            <a:noAutofit/>
+          </a:bodyPr>
+          <a:lstStyle xmlns:a="http://schemas.openxmlformats.org/drawingml/2006/main"/>
+          <a:p xmlns:a="http://schemas.openxmlformats.org/drawingml/2006/main">
+            <a:pPr algn="r">
+              <a:defRPr sz="1400" b="0">
+                <a:solidFill>
+                  <a:srgbClr val="17202A"/>
+                </a:solidFill>
+                <a:latin typeface="Arial"/>
+                <a:ea typeface="Arial"/>
+                <a:cs typeface="Arial"/>
+              </a:defRPr>
+            </a:pPr>
+            <a:r>
+              <a:rPr sz="1400" b="0">
+                <a:solidFill>
+                  <a:srgbClr val="17202A"/>
+                </a:solidFill>
+                <a:latin typeface="Arial"/>
+                <a:ea typeface="Arial"/>
+                <a:cs typeface="Arial"/>
+              </a:rPr>
+              <a:t>6</a:t>
+            </a:r>
+          </a:p>
+        </p:txBody>
+      </p:sp>
+      <p:sp>
+        <p:nvSpPr>
+          <p:cNvPr id="4" name="fictional-disclosure">
+            <a:extLst xmlns:a="http://schemas.openxmlformats.org/drawingml/2006/main">
+              <a:ext uri="{FF2B5EF4-FFF2-40B4-BE49-F238E27FC236}">
+                <a16:creationId xmlns:a16="http://schemas.microsoft.com/office/drawing/2014/main" id="{7FEAA653-E5D3-45B9-9A43-03DE14027374}"/>
+              </a:ext>
+            </a:extLst>
+          </p:cNvPr>
+          <p:cNvSpPr>
+            <a:spLocks xmlns:a="http://schemas.openxmlformats.org/drawingml/2006/main" noGrp="1"/>
+          </p:cNvSpPr>
+          <p:nvPr/>
+        </p:nvSpPr>
+        <p:spPr>
+          <a:xfrm xmlns:a="http://schemas.openxmlformats.org/drawingml/2006/main">
+            <a:off x="1428750" y="4772025"/>
+            <a:ext cx="4762500" cy="266700"/>
+          </a:xfrm>
+          <a:prstGeom xmlns:a="http://schemas.openxmlformats.org/drawingml/2006/main" prst="rect">
+            <a:avLst/>
+          </a:prstGeom>
+          <a:noFill xmlns:a="http://schemas.openxmlformats.org/drawingml/2006/main"/>
+          <a:ln xmlns:a="http://schemas.openxmlformats.org/drawingml/2006/main" w="0">
+            <a:noFill/>
+            <a:prstDash val="solid"/>
+          </a:ln>
+        </p:spPr>
+        <p:txBody>
+          <a:bodyPr xmlns:a="http://schemas.openxmlformats.org/drawingml/2006/main" lIns="0" tIns="0" rIns="0" bIns="0" anchor="ctr">
+            <a:noAutofit/>
+          </a:bodyPr>
+          <a:lstStyle xmlns:a="http://schemas.openxmlformats.org/drawingml/2006/main"/>
+          <a:p xmlns:a="http://schemas.openxmlformats.org/drawingml/2006/main">
+            <a:pPr algn="l">
+              <a:defRPr sz="1050" b="0">
+                <a:solidFill>
+                  <a:srgbClr val="59636E"/>
+                </a:solidFill>
+                <a:latin typeface="Noto Sans JP"/>
+                <a:ea typeface="Noto Sans JP"/>
+                <a:cs typeface="Noto Sans JP"/>
+              </a:defRPr>
+            </a:pPr>
+            <a:r>
+              <a:rPr sz="1050" b="0">
+                <a:solidFill>
+                  <a:srgbClr val="59636E"/>
+                </a:solidFill>
+                <a:latin typeface="Noto Sans JP"/>
+                <a:ea typeface="Noto Sans JP"/>
+                <a:cs typeface="Noto Sans JP"/>
+              </a:rPr>
+              <a:t>架空作例・合成データ</a:t>
+            </a:r>
+          </a:p>
+        </p:txBody>
+      </p:sp>
+      <p:sp>
+        <p:nvSpPr>
+          <p:cNvPr id="5" name="title">
+            <a:extLst xmlns:a="http://schemas.openxmlformats.org/drawingml/2006/main">
+              <a:ext uri="{FF2B5EF4-FFF2-40B4-BE49-F238E27FC236}">
+                <a16:creationId xmlns:a16="http://schemas.microsoft.com/office/drawing/2014/main" id="{9CD1E9A2-040B-48E2-BF2E-2776366D10BD}"/>
+              </a:ext>
+            </a:extLst>
+          </p:cNvPr>
+          <p:cNvSpPr>
+            <a:spLocks xmlns:a="http://schemas.openxmlformats.org/drawingml/2006/main" noGrp="1"/>
+          </p:cNvSpPr>
+          <p:nvPr/>
+        </p:nvSpPr>
+        <p:spPr>
+          <a:xfrm xmlns:a="http://schemas.openxmlformats.org/drawingml/2006/main">
+            <a:off x="457200" y="109728"/>
+            <a:ext cx="8229600" cy="400050"/>
+          </a:xfrm>
+          <a:prstGeom xmlns:a="http://schemas.openxmlformats.org/drawingml/2006/main" prst="rect">
+            <a:avLst/>
+          </a:prstGeom>
+          <a:noFill xmlns:a="http://schemas.openxmlformats.org/drawingml/2006/main"/>
+          <a:ln xmlns:a="http://schemas.openxmlformats.org/drawingml/2006/main" w="0">
+            <a:noFill/>
+            <a:prstDash val="solid"/>
+          </a:ln>
+        </p:spPr>
+        <p:txBody>
+          <a:bodyPr xmlns:a="http://schemas.openxmlformats.org/drawingml/2006/main" lIns="0" tIns="0" rIns="0" bIns="0" anchor="ctr">
+            <a:noAutofit/>
+          </a:bodyPr>
+          <a:lstStyle xmlns:a="http://schemas.openxmlformats.org/drawingml/2006/main"/>
+          <a:p xmlns:a="http://schemas.openxmlformats.org/drawingml/2006/main">
+            <a:pPr algn="l">
+              <a:defRPr sz="2700" b="1">
+                <a:solidFill>
+                  <a:srgbClr val="17202A"/>
+                </a:solidFill>
+                <a:latin typeface="Noto Sans JP"/>
+                <a:ea typeface="Noto Sans JP"/>
+                <a:cs typeface="Noto Sans JP"/>
+              </a:defRPr>
+            </a:pPr>
+            <a:r>
+              <a:rPr sz="2700" b="1">
+                <a:solidFill>
+                  <a:srgbClr val="17202A"/>
+                </a:solidFill>
+                <a:latin typeface="Noto Sans JP"/>
+                <a:ea typeface="Noto Sans JP"/>
+                <a:cs typeface="Noto Sans JP"/>
+              </a:rPr>
+              <a:t>この例では高い値が記録に残らない</a:t>
+            </a:r>
+          </a:p>
+        </p:txBody>
+      </p:sp>
+      <p:sp>
+        <p:nvSpPr>
+          <p:cNvPr id="6" name="message">
+            <a:extLst xmlns:a="http://schemas.openxmlformats.org/drawingml/2006/main">
+              <a:ext uri="{FF2B5EF4-FFF2-40B4-BE49-F238E27FC236}">
+                <a16:creationId xmlns:a16="http://schemas.microsoft.com/office/drawing/2014/main" id="{9466E9E2-1E6F-4003-85E7-DD11C9A50C16}"/>
+              </a:ext>
+            </a:extLst>
+          </p:cNvPr>
+          <p:cNvSpPr>
+            <a:spLocks xmlns:a="http://schemas.openxmlformats.org/drawingml/2006/main" noGrp="1"/>
+          </p:cNvSpPr>
+          <p:nvPr/>
+        </p:nvSpPr>
+        <p:spPr>
+          <a:xfrm xmlns:a="http://schemas.openxmlformats.org/drawingml/2006/main">
+            <a:off x="457200" y="621792"/>
+            <a:ext cx="8229600" cy="694944"/>
+          </a:xfrm>
+          <a:prstGeom xmlns:a="http://schemas.openxmlformats.org/drawingml/2006/main" prst="rect">
+            <a:avLst/>
+          </a:prstGeom>
+          <a:noFill xmlns:a="http://schemas.openxmlformats.org/drawingml/2006/main"/>
+          <a:ln xmlns:a="http://schemas.openxmlformats.org/drawingml/2006/main" w="0">
+            <a:noFill/>
+            <a:prstDash val="solid"/>
+          </a:ln>
+        </p:spPr>
+        <p:txBody>
+          <a:bodyPr xmlns:a="http://schemas.openxmlformats.org/drawingml/2006/main" lIns="0" tIns="0" rIns="0" bIns="0" anchor="ctr">
+            <a:noAutofit/>
+          </a:bodyPr>
+          <a:lstStyle xmlns:a="http://schemas.openxmlformats.org/drawingml/2006/main"/>
+          <a:p xmlns:a="http://schemas.openxmlformats.org/drawingml/2006/main">
+            <a:pPr algn="l">
+              <a:defRPr sz="2300" b="1">
+                <a:solidFill>
+                  <a:srgbClr val="17202A"/>
+                </a:solidFill>
+                <a:latin typeface="Noto Sans JP"/>
+                <a:ea typeface="Noto Sans JP"/>
+                <a:cs typeface="Noto Sans JP"/>
+              </a:defRPr>
+            </a:pPr>
+            <a:r>
+              <a:rPr sz="2300" b="1">
+                <a:solidFill>
+                  <a:srgbClr val="17202A"/>
+                </a:solidFill>
+                <a:latin typeface="Noto Sans JP"/>
+                <a:ea typeface="Noto Sans JP"/>
+                <a:cs typeface="Noto Sans JP"/>
+              </a:rPr>
+              <a:t>5分間隔の保持点には、1000 ppmを超える値がない</a:t>
+            </a:r>
+          </a:p>
+        </p:txBody>
+      </p:sp>
+      <p:graphicFrame>
+        <p:nvGraphicFramePr>
+          <p:cNvPr id="18" name="Chart"/>
+          <p:cNvGraphicFramePr/>
+          <p:nvPr/>
+        </p:nvGraphicFramePr>
+        <p:xfrm>
+          <a:off xmlns:a="http://schemas.openxmlformats.org/drawingml/2006/main" x="438150" y="1476375"/>
+          <a:ext xmlns:a="http://schemas.openxmlformats.org/drawingml/2006/main" cx="6210300" cy="2638425"/>
+        </p:xfrm>
+        <a:graphic xmlns:a="http://schemas.openxmlformats.org/drawingml/2006/main">
+          <a:graphicData uri="http://schemas.openxmlformats.org/drawingml/2006/chart">
+            <c:chart xmlns:r="http://schemas.openxmlformats.org/officeDocument/2006/relationships" xmlns:c="http://schemas.openxmlformats.org/drawingml/2006/chart" r:id="R3e93ffe895c04f3b"/>
+          </a:graphicData>
+        </a:graphic>
+      </p:graphicFrame>
+      <p:sp>
+        <p:nvSpPr>
+          <p:cNvPr id="8" name="maximum-label">
+            <a:extLst xmlns:a="http://schemas.openxmlformats.org/drawingml/2006/main">
+              <a:ext uri="{FF2B5EF4-FFF2-40B4-BE49-F238E27FC236}">
+                <a16:creationId xmlns:a16="http://schemas.microsoft.com/office/drawing/2014/main" id="{B106D723-FAD9-4355-887C-0258C438FD75}"/>
+              </a:ext>
+            </a:extLst>
+          </p:cNvPr>
+          <p:cNvSpPr>
+            <a:spLocks xmlns:a="http://schemas.openxmlformats.org/drawingml/2006/main" noGrp="1"/>
+          </p:cNvSpPr>
+          <p:nvPr/>
+        </p:nvSpPr>
+        <p:spPr>
+          <a:xfrm xmlns:a="http://schemas.openxmlformats.org/drawingml/2006/main">
+            <a:off x="6896100" y="1781175"/>
+            <a:ext cx="1809750" cy="285750"/>
+          </a:xfrm>
+          <a:prstGeom xmlns:a="http://schemas.openxmlformats.org/drawingml/2006/main" prst="rect">
+            <a:avLst/>
+          </a:prstGeom>
+          <a:noFill xmlns:a="http://schemas.openxmlformats.org/drawingml/2006/main"/>
+          <a:ln xmlns:a="http://schemas.openxmlformats.org/drawingml/2006/main" w="0">
+            <a:noFill/>
+            <a:prstDash val="solid"/>
+          </a:ln>
+        </p:spPr>
+        <p:txBody>
+          <a:bodyPr xmlns:a="http://schemas.openxmlformats.org/drawingml/2006/main" lIns="0" tIns="0" rIns="0" bIns="0" anchor="ctr">
+            <a:noAutofit/>
+          </a:bodyPr>
+          <a:lstStyle xmlns:a="http://schemas.openxmlformats.org/drawingml/2006/main"/>
+          <a:p xmlns:a="http://schemas.openxmlformats.org/drawingml/2006/main">
+            <a:pPr algn="l">
+              <a:defRPr sz="1800" b="1">
+                <a:solidFill>
+                  <a:srgbClr val="17202A"/>
+                </a:solidFill>
+                <a:latin typeface="Noto Sans JP"/>
+                <a:ea typeface="Noto Sans JP"/>
+                <a:cs typeface="Noto Sans JP"/>
+              </a:defRPr>
+            </a:pPr>
+            <a:r>
+              <a:rPr sz="1800" b="1">
+                <a:solidFill>
+                  <a:srgbClr val="17202A"/>
+                </a:solidFill>
+                <a:latin typeface="Noto Sans JP"/>
+                <a:ea typeface="Noto Sans JP"/>
+                <a:cs typeface="Noto Sans JP"/>
+              </a:rPr>
+              <a:t>保持最大値</a:t>
+            </a:r>
+          </a:p>
+        </p:txBody>
+      </p:sp>
+      <p:sp>
+        <p:nvSpPr>
+          <p:cNvPr id="9" name="all-max">
+            <a:extLst xmlns:a="http://schemas.openxmlformats.org/drawingml/2006/main">
+              <a:ext uri="{FF2B5EF4-FFF2-40B4-BE49-F238E27FC236}">
+                <a16:creationId xmlns:a16="http://schemas.microsoft.com/office/drawing/2014/main" id="{B4A60359-99C6-4E53-8664-F9139BAFFA7B}"/>
+              </a:ext>
+            </a:extLst>
+          </p:cNvPr>
+          <p:cNvSpPr>
+            <a:spLocks xmlns:a="http://schemas.openxmlformats.org/drawingml/2006/main" noGrp="1"/>
+          </p:cNvSpPr>
+          <p:nvPr/>
+        </p:nvSpPr>
+        <p:spPr>
+          <a:xfrm xmlns:a="http://schemas.openxmlformats.org/drawingml/2006/main">
+            <a:off x="6896100" y="2228850"/>
+            <a:ext cx="1809750" cy="704850"/>
+          </a:xfrm>
+          <a:prstGeom xmlns:a="http://schemas.openxmlformats.org/drawingml/2006/main" prst="rect">
+            <a:avLst/>
+          </a:prstGeom>
+          <a:noFill xmlns:a="http://schemas.openxmlformats.org/drawingml/2006/main"/>
+          <a:ln xmlns:a="http://schemas.openxmlformats.org/drawingml/2006/main" w="0">
+            <a:noFill/>
+            <a:prstDash val="solid"/>
+          </a:ln>
+        </p:spPr>
+        <p:txBody>
+          <a:bodyPr xmlns:a="http://schemas.openxmlformats.org/drawingml/2006/main" lIns="0" tIns="0" rIns="0" bIns="0" anchor="ctr">
+            <a:noAutofit/>
+          </a:bodyPr>
+          <a:lstStyle xmlns:a="http://schemas.openxmlformats.org/drawingml/2006/main"/>
+          <a:p xmlns:a="http://schemas.openxmlformats.org/drawingml/2006/main">
+            <a:pPr algn="l">
+              <a:defRPr sz="1900" b="0">
+                <a:solidFill>
+                  <a:srgbClr val="17202A"/>
+                </a:solidFill>
+                <a:latin typeface="Noto Sans JP"/>
+                <a:ea typeface="Noto Sans JP"/>
+                <a:cs typeface="Noto Sans JP"/>
+              </a:defRPr>
+            </a:pPr>
+            <a:r>
+              <a:rPr sz="1900" b="0">
+                <a:solidFill>
+                  <a:srgbClr val="17202A"/>
+                </a:solidFill>
+                <a:latin typeface="Noto Sans JP"/>
+                <a:ea typeface="Noto Sans JP"/>
+                <a:cs typeface="Noto Sans JP"/>
+              </a:rPr>
+              <a:t>全13点</a:t>
+            </a:r>
+          </a:p>
+          <a:p xmlns:a="http://schemas.openxmlformats.org/drawingml/2006/main">
+            <a:pPr algn="l">
+              <a:defRPr sz="1900" b="0">
+                <a:solidFill>
+                  <a:srgbClr val="17202A"/>
+                </a:solidFill>
+                <a:latin typeface="Noto Sans JP"/>
+                <a:ea typeface="Noto Sans JP"/>
+                <a:cs typeface="Noto Sans JP"/>
+              </a:defRPr>
+            </a:pPr>
+            <a:r>
+              <a:rPr sz="1900" b="0">
+                <a:solidFill>
+                  <a:srgbClr val="17202A"/>
+                </a:solidFill>
+                <a:latin typeface="Noto Sans JP"/>
+                <a:ea typeface="Noto Sans JP"/>
+                <a:cs typeface="Noto Sans JP"/>
+              </a:rPr>
+              <a:t>1120 ppm</a:t>
+            </a:r>
+          </a:p>
+        </p:txBody>
+      </p:sp>
+      <p:sp>
+        <p:nvSpPr>
+          <p:cNvPr id="10" name="kept-max">
+            <a:extLst xmlns:a="http://schemas.openxmlformats.org/drawingml/2006/main">
+              <a:ext uri="{FF2B5EF4-FFF2-40B4-BE49-F238E27FC236}">
+                <a16:creationId xmlns:a16="http://schemas.microsoft.com/office/drawing/2014/main" id="{7C378401-CD8A-4D0B-B42C-1037264958FB}"/>
+              </a:ext>
+            </a:extLst>
+          </p:cNvPr>
+          <p:cNvSpPr>
+            <a:spLocks xmlns:a="http://schemas.openxmlformats.org/drawingml/2006/main" noGrp="1"/>
+          </p:cNvSpPr>
+          <p:nvPr/>
+        </p:nvSpPr>
+        <p:spPr>
+          <a:xfrm xmlns:a="http://schemas.openxmlformats.org/drawingml/2006/main">
+            <a:off x="6896100" y="3190875"/>
+            <a:ext cx="1809750" cy="704850"/>
+          </a:xfrm>
+          <a:prstGeom xmlns:a="http://schemas.openxmlformats.org/drawingml/2006/main" prst="rect">
+            <a:avLst/>
+          </a:prstGeom>
+          <a:noFill xmlns:a="http://schemas.openxmlformats.org/drawingml/2006/main"/>
+          <a:ln xmlns:a="http://schemas.openxmlformats.org/drawingml/2006/main" w="0">
+            <a:noFill/>
+            <a:prstDash val="solid"/>
+          </a:ln>
+        </p:spPr>
+        <p:txBody>
+          <a:bodyPr xmlns:a="http://schemas.openxmlformats.org/drawingml/2006/main" lIns="0" tIns="0" rIns="0" bIns="0" anchor="ctr">
+            <a:noAutofit/>
+          </a:bodyPr>
+          <a:lstStyle xmlns:a="http://schemas.openxmlformats.org/drawingml/2006/main"/>
+          <a:p xmlns:a="http://schemas.openxmlformats.org/drawingml/2006/main">
+            <a:pPr algn="l">
+              <a:defRPr sz="1900" b="1">
+                <a:solidFill>
+                  <a:srgbClr val="17202A"/>
+                </a:solidFill>
+                <a:latin typeface="Noto Sans JP"/>
+                <a:ea typeface="Noto Sans JP"/>
+                <a:cs typeface="Noto Sans JP"/>
+              </a:defRPr>
+            </a:pPr>
+            <a:r>
+              <a:rPr sz="1900" b="1">
+                <a:solidFill>
+                  <a:srgbClr val="17202A"/>
+                </a:solidFill>
+                <a:latin typeface="Noto Sans JP"/>
+                <a:ea typeface="Noto Sans JP"/>
+                <a:cs typeface="Noto Sans JP"/>
+              </a:rPr>
+              <a:t>保持3点</a:t>
+            </a:r>
+          </a:p>
+          <a:p xmlns:a="http://schemas.openxmlformats.org/drawingml/2006/main">
+            <a:pPr algn="l">
+              <a:defRPr sz="1900" b="1">
+                <a:solidFill>
+                  <a:srgbClr val="17202A"/>
+                </a:solidFill>
+                <a:latin typeface="Noto Sans JP"/>
+                <a:ea typeface="Noto Sans JP"/>
+                <a:cs typeface="Noto Sans JP"/>
+              </a:defRPr>
+            </a:pPr>
+            <a:r>
+              <a:rPr sz="1900" b="1">
+                <a:solidFill>
+                  <a:srgbClr val="17202A"/>
+                </a:solidFill>
+                <a:latin typeface="Noto Sans JP"/>
+                <a:ea typeface="Noto Sans JP"/>
+                <a:cs typeface="Noto Sans JP"/>
+              </a:rPr>
+              <a:t>970 ppm</a:t>
+            </a:r>
+          </a:p>
+        </p:txBody>
+      </p:sp>
+      <p:sp>
+        <p:nvSpPr>
+          <p:cNvPr id="11" name="condition">
+            <a:extLst xmlns:a="http://schemas.openxmlformats.org/drawingml/2006/main">
+              <a:ext uri="{FF2B5EF4-FFF2-40B4-BE49-F238E27FC236}">
+                <a16:creationId xmlns:a16="http://schemas.microsoft.com/office/drawing/2014/main" id="{6DF75B6A-84BF-42A9-9A36-15EB051E434B}"/>
+              </a:ext>
+            </a:extLst>
+          </p:cNvPr>
+          <p:cNvSpPr>
+            <a:spLocks xmlns:a="http://schemas.openxmlformats.org/drawingml/2006/main" noGrp="1"/>
+          </p:cNvSpPr>
+          <p:nvPr/>
+        </p:nvSpPr>
+        <p:spPr>
+          <a:xfrm xmlns:a="http://schemas.openxmlformats.org/drawingml/2006/main">
+            <a:off x="457200" y="4187952"/>
+            <a:ext cx="8229600" cy="310896"/>
+          </a:xfrm>
+          <a:prstGeom xmlns:a="http://schemas.openxmlformats.org/drawingml/2006/main" prst="rect">
+            <a:avLst/>
+          </a:prstGeom>
+          <a:noFill xmlns:a="http://schemas.openxmlformats.org/drawingml/2006/main"/>
+          <a:ln xmlns:a="http://schemas.openxmlformats.org/drawingml/2006/main" w="0">
+            <a:noFill/>
+            <a:prstDash val="solid"/>
+          </a:ln>
+        </p:spPr>
+        <p:txBody>
+          <a:bodyPr xmlns:a="http://schemas.openxmlformats.org/drawingml/2006/main" lIns="0" tIns="0" rIns="0" bIns="0" anchor="ctr">
+            <a:noAutofit/>
+          </a:bodyPr>
+          <a:lstStyle xmlns:a="http://schemas.openxmlformats.org/drawingml/2006/main"/>
+          <a:p xmlns:a="http://schemas.openxmlformats.org/drawingml/2006/main">
+            <a:pPr algn="l">
+              <a:defRPr sz="1800" b="0">
+                <a:solidFill>
+                  <a:srgbClr val="59636E"/>
+                </a:solidFill>
+                <a:latin typeface="Noto Sans JP"/>
+                <a:ea typeface="Noto Sans JP"/>
+                <a:cs typeface="Noto Sans JP"/>
+              </a:defRPr>
+            </a:pPr>
+            <a:r>
+              <a:rPr sz="1800" b="0">
+                <a:solidFill>
+                  <a:srgbClr val="59636E"/>
+                </a:solidFill>
+                <a:latin typeface="Noto Sans JP"/>
+                <a:ea typeface="Noto Sans JP"/>
+                <a:cs typeface="Noto Sans JP"/>
+              </a:rPr>
+              <a:t>合成系列1例／開始時刻0分／閾値は安全基準を表さない</a:t>
+            </a:r>
+          </a:p>
+        </p:txBody>
+      </p:sp>
+    </p:spTree>
+    <p:extLst>
+      <p:ext uri="{BB962C8B-B14F-4D97-AF65-F5344CB8AC3E}">
+        <p14:creationId xmlns:p14="http://schemas.microsoft.com/office/powerpoint/2010/main" val="1817992712"/>
+      </p:ext>
+    </p:extLst>
+  </p:cSld>
+</p:sld>
+</file>
+
+<file path=ppt/slides/slide7.xml><?xml version="1.0" encoding="utf-8"?>
+<p:sld xmlns:p="http://schemas.openxmlformats.org/presentationml/2006/main">
+  <p:cSld>
+    <p:bg>
+      <p:bgPr>
+        <a:solidFill xmlns:a="http://schemas.openxmlformats.org/drawingml/2006/main">
+          <a:srgbClr val="FFFFFF"/>
+        </a:solidFill>
+      </p:bgPr>
+    </p:bg>
+    <p:spTree>
+      <p:nvGrpSpPr>
+        <p:cNvPr id="1" name=""/>
+        <p:cNvGrpSpPr/>
+        <p:nvPr/>
+      </p:nvGrpSpPr>
+      <p:grpSpPr>
+        <a:xfrm xmlns:a="http://schemas.openxmlformats.org/drawingml/2006/main"/>
+      </p:grpSpPr>
+      <p:sp>
+        <p:nvSpPr>
           <p:cNvPr id="9" name="footer-line">
             <a:extLst xmlns:a="http://schemas.openxmlformats.org/drawingml/2006/main">
               <a:ext uri="{FF2B5EF4-FFF2-40B4-BE49-F238E27FC236}">
-                <a16:creationId xmlns:a16="http://schemas.microsoft.com/office/drawing/2014/main" id="{FAB59C50-95E7-433D-85A4-16FF129816E4}"/>
+                <a16:creationId xmlns:a16="http://schemas.microsoft.com/office/drawing/2014/main" id="{38FD7832-36CF-4894-AB8F-26CFC01EC9E2}"/>
               </a:ext>
             </a:extLst>
           </p:cNvPr>
@@ -5132,7 +6905,7 @@
           <p:nvPr/>
         </p:nvPicPr>
         <p:blipFill>
-          <a:blip xmlns:r="http://schemas.openxmlformats.org/officeDocument/2006/relationships" xmlns:a="http://schemas.openxmlformats.org/drawingml/2006/main" r:embed="R9288ac591f034df0"/>
+          <a:blip xmlns:r="http://schemas.openxmlformats.org/officeDocument/2006/relationships" xmlns:a="http://schemas.openxmlformats.org/drawingml/2006/main" r:embed="Rc1086a3ca7b74541"/>
           <a:stretch xmlns:a="http://schemas.openxmlformats.org/drawingml/2006/main"/>
         </p:blipFill>
         <p:spPr>
@@ -5150,7 +6923,7 @@
           <p:cNvPr id="3" name="page">
             <a:extLst xmlns:a="http://schemas.openxmlformats.org/drawingml/2006/main">
               <a:ext uri="{FF2B5EF4-FFF2-40B4-BE49-F238E27FC236}">
-                <a16:creationId xmlns:a16="http://schemas.microsoft.com/office/drawing/2014/main" id="{F4F78887-A138-484C-8A11-7ACE506B1993}"/>
+                <a16:creationId xmlns:a16="http://schemas.microsoft.com/office/drawing/2014/main" id="{3DB9F2A8-3113-43FD-8952-C0E5800C5926}"/>
               </a:ext>
             </a:extLst>
           </p:cNvPr>
@@ -5182,7 +6955,7 @@
             <a:pPr algn="r">
               <a:defRPr sz="1400" b="0">
                 <a:solidFill>
-                  <a:srgbClr val="000000"/>
+                  <a:srgbClr val="17202A"/>
                 </a:solidFill>
                 <a:latin typeface="Arial"/>
                 <a:ea typeface="Arial"/>
@@ -5192,13 +6965,13 @@
             <a:r>
               <a:rPr sz="1400" b="0">
                 <a:solidFill>
-                  <a:srgbClr val="000000"/>
+                  <a:srgbClr val="17202A"/>
                 </a:solidFill>
                 <a:latin typeface="Arial"/>
                 <a:ea typeface="Arial"/>
                 <a:cs typeface="Arial"/>
               </a:rPr>
-              <a:t>5</a:t>
+              <a:t>7</a:t>
             </a:r>
           </a:p>
         </p:txBody>
@@ -5208,7 +6981,7 @@
           <p:cNvPr id="4" name="fictional-disclosure">
             <a:extLst xmlns:a="http://schemas.openxmlformats.org/drawingml/2006/main">
               <a:ext uri="{FF2B5EF4-FFF2-40B4-BE49-F238E27FC236}">
-                <a16:creationId xmlns:a16="http://schemas.microsoft.com/office/drawing/2014/main" id="{D39E84BF-D12F-4B1C-BCC4-D9C4C5AF8F32}"/>
+                <a16:creationId xmlns:a16="http://schemas.microsoft.com/office/drawing/2014/main" id="{F05E2D78-D011-4A66-AA04-D6787AEF3A4A}"/>
               </a:ext>
             </a:extLst>
           </p:cNvPr>
@@ -5240,7 +7013,7 @@
             <a:pPr algn="l">
               <a:defRPr sz="1050" b="0">
                 <a:solidFill>
-                  <a:srgbClr val="666666"/>
+                  <a:srgbClr val="59636E"/>
                 </a:solidFill>
                 <a:latin typeface="Noto Sans JP"/>
                 <a:ea typeface="Noto Sans JP"/>
@@ -5250,7 +7023,7 @@
             <a:r>
               <a:rPr sz="1050" b="0">
                 <a:solidFill>
-                  <a:srgbClr val="666666"/>
+                  <a:srgbClr val="59636E"/>
                 </a:solidFill>
                 <a:latin typeface="Noto Sans JP"/>
                 <a:ea typeface="Noto Sans JP"/>
@@ -5266,19 +7039,19 @@
           <p:cNvPr id="5" name="title">
             <a:extLst xmlns:a="http://schemas.openxmlformats.org/drawingml/2006/main">
               <a:ext uri="{FF2B5EF4-FFF2-40B4-BE49-F238E27FC236}">
-                <a16:creationId xmlns:a16="http://schemas.microsoft.com/office/drawing/2014/main" id="{840FF847-4E2F-4AD0-8F8C-CE181F6E94B2}"/>
-              </a:ext>
-            </a:extLst>
-          </p:cNvPr>
-          <p:cNvSpPr>
-            <a:spLocks xmlns:a="http://schemas.openxmlformats.org/drawingml/2006/main" noGrp="1"/>
-          </p:cNvSpPr>
-          <p:nvPr/>
-        </p:nvSpPr>
-        <p:spPr>
-          <a:xfrm xmlns:a="http://schemas.openxmlformats.org/drawingml/2006/main">
-            <a:off x="257175" y="95250"/>
-            <a:ext cx="8572500" cy="514350"/>
+                <a16:creationId xmlns:a16="http://schemas.microsoft.com/office/drawing/2014/main" id="{64C0C8E4-6525-4243-946D-08D940A1A5AB}"/>
+              </a:ext>
+            </a:extLst>
+          </p:cNvPr>
+          <p:cNvSpPr>
+            <a:spLocks xmlns:a="http://schemas.openxmlformats.org/drawingml/2006/main" noGrp="1"/>
+          </p:cNvSpPr>
+          <p:nvPr/>
+        </p:nvSpPr>
+        <p:spPr>
+          <a:xfrm xmlns:a="http://schemas.openxmlformats.org/drawingml/2006/main">
+            <a:off x="457200" y="109728"/>
+            <a:ext cx="8229600" cy="400050"/>
           </a:xfrm>
           <a:prstGeom xmlns:a="http://schemas.openxmlformats.org/drawingml/2006/main" prst="rect">
             <a:avLst/>
@@ -5298,7 +7071,7 @@
             <a:pPr algn="l">
               <a:defRPr sz="2700" b="1">
                 <a:solidFill>
-                  <a:srgbClr val="000000"/>
+                  <a:srgbClr val="17202A"/>
                 </a:solidFill>
                 <a:latin typeface="Noto Sans JP"/>
                 <a:ea typeface="Noto Sans JP"/>
@@ -5308,13 +7081,13 @@
             <a:r>
               <a:rPr sz="2700" b="1">
                 <a:solidFill>
-                  <a:srgbClr val="000000"/>
+                  <a:srgbClr val="17202A"/>
                 </a:solidFill>
                 <a:latin typeface="Noto Sans JP"/>
                 <a:ea typeface="Noto Sans JP"/>
                 <a:cs typeface="Noto Sans JP"/>
               </a:rPr>
-              <a:t>保持点数と最大値が変わった</a:t>
+              <a:t>記録量と保持された値</a:t>
             </a:r>
           </a:p>
         </p:txBody>
@@ -5324,19 +7097,19 @@
           <p:cNvPr id="6" name="message">
             <a:extLst xmlns:a="http://schemas.openxmlformats.org/drawingml/2006/main">
               <a:ext uri="{FF2B5EF4-FFF2-40B4-BE49-F238E27FC236}">
-                <a16:creationId xmlns:a16="http://schemas.microsoft.com/office/drawing/2014/main" id="{3FFE67EB-7346-4DCD-95AB-E246518DAB80}"/>
-              </a:ext>
-            </a:extLst>
-          </p:cNvPr>
-          <p:cNvSpPr>
-            <a:spLocks xmlns:a="http://schemas.openxmlformats.org/drawingml/2006/main" noGrp="1"/>
-          </p:cNvSpPr>
-          <p:nvPr/>
-        </p:nvSpPr>
-        <p:spPr>
-          <a:xfrm xmlns:a="http://schemas.openxmlformats.org/drawingml/2006/main">
-            <a:off x="457200" y="819150"/>
-            <a:ext cx="8229600" cy="628650"/>
+                <a16:creationId xmlns:a16="http://schemas.microsoft.com/office/drawing/2014/main" id="{12C37566-913A-47B9-A69A-5F7B2942C6C7}"/>
+              </a:ext>
+            </a:extLst>
+          </p:cNvPr>
+          <p:cNvSpPr>
+            <a:spLocks xmlns:a="http://schemas.openxmlformats.org/drawingml/2006/main" noGrp="1"/>
+          </p:cNvSpPr>
+          <p:nvPr/>
+        </p:nvSpPr>
+        <p:spPr>
+          <a:xfrm xmlns:a="http://schemas.openxmlformats.org/drawingml/2006/main">
+            <a:off x="457200" y="621792"/>
+            <a:ext cx="8229600" cy="694944"/>
           </a:xfrm>
           <a:prstGeom xmlns:a="http://schemas.openxmlformats.org/drawingml/2006/main" prst="rect">
             <a:avLst/>
@@ -5354,9 +7127,9 @@
           <a:lstStyle xmlns:a="http://schemas.openxmlformats.org/drawingml/2006/main"/>
           <a:p xmlns:a="http://schemas.openxmlformats.org/drawingml/2006/main">
             <a:pPr algn="l">
-              <a:defRPr sz="1900" b="1">
-                <a:solidFill>
-                  <a:srgbClr val="000000"/>
+              <a:defRPr sz="2300" b="1">
+                <a:solidFill>
+                  <a:srgbClr val="17202A"/>
                 </a:solidFill>
                 <a:latin typeface="Noto Sans JP"/>
                 <a:ea typeface="Noto Sans JP"/>
@@ -5364,9 +7137,9 @@
               </a:defRPr>
             </a:pPr>
             <a:r>
-              <a:rPr sz="1900" b="1">
-                <a:solidFill>
-                  <a:srgbClr val="000000"/>
+              <a:rPr sz="2300" b="1">
+                <a:solidFill>
+                  <a:srgbClr val="17202A"/>
                 </a:solidFill>
                 <a:latin typeface="Noto Sans JP"/>
                 <a:ea typeface="Noto Sans JP"/>
@@ -5406,7 +7179,7 @@
                       <a:r>
                         <a:rPr sz="1800" b="1">
                           <a:solidFill>
-                            <a:srgbClr val="000000"/>
+                            <a:srgbClr val="17202A"/>
                           </a:solidFill>
                           <a:latin typeface="Noto Sans JP"/>
                           <a:ea typeface="Noto Sans JP"/>
@@ -5418,7 +7191,7 @@
                   </a:txBody>
                   <a:tcPr marL="152400" marR="152400" marT="76200" marB="76200" anchor="ctr">
                     <a:solidFill>
-                      <a:srgbClr val="F0F5E7"/>
+                      <a:srgbClr val="EFF5E4"/>
                     </a:solidFill>
                   </a:tcPr>
                 </a:tc>
@@ -5431,7 +7204,7 @@
                       <a:r>
                         <a:rPr sz="1800" b="1">
                           <a:solidFill>
-                            <a:srgbClr val="000000"/>
+                            <a:srgbClr val="17202A"/>
                           </a:solidFill>
                           <a:latin typeface="Noto Sans JP"/>
                           <a:ea typeface="Noto Sans JP"/>
@@ -5443,7 +7216,7 @@
                   </a:txBody>
                   <a:tcPr marL="152400" marR="152400" marT="76200" marB="76200" anchor="ctr">
                     <a:solidFill>
-                      <a:srgbClr val="F0F5E7"/>
+                      <a:srgbClr val="EFF5E4"/>
                     </a:solidFill>
                   </a:tcPr>
                 </a:tc>
@@ -5456,7 +7229,7 @@
                       <a:r>
                         <a:rPr sz="1800" b="1">
                           <a:solidFill>
-                            <a:srgbClr val="000000"/>
+                            <a:srgbClr val="17202A"/>
                           </a:solidFill>
                           <a:latin typeface="Noto Sans JP"/>
                           <a:ea typeface="Noto Sans JP"/>
@@ -5468,7 +7241,7 @@
                   </a:txBody>
                   <a:tcPr marL="152400" marR="152400" marT="76200" marB="76200" anchor="ctr">
                     <a:solidFill>
-                      <a:srgbClr val="F0F5E7"/>
+                      <a:srgbClr val="EFF5E4"/>
                     </a:solidFill>
                   </a:tcPr>
                 </a:tc>
@@ -5483,7 +7256,7 @@
                       <a:r>
                         <a:rPr sz="1800" b="0">
                           <a:solidFill>
-                            <a:srgbClr val="000000"/>
+                            <a:srgbClr val="17202A"/>
                           </a:solidFill>
                           <a:latin typeface="Noto Sans JP"/>
                           <a:ea typeface="Noto Sans JP"/>
@@ -5508,7 +7281,7 @@
                       <a:r>
                         <a:rPr sz="1800" b="0">
                           <a:solidFill>
-                            <a:srgbClr val="000000"/>
+                            <a:srgbClr val="17202A"/>
                           </a:solidFill>
                           <a:latin typeface="Noto Sans JP"/>
                           <a:ea typeface="Noto Sans JP"/>
@@ -5533,7 +7306,7 @@
                       <a:r>
                         <a:rPr sz="1800" b="1">
                           <a:solidFill>
-                            <a:srgbClr val="000000"/>
+                            <a:srgbClr val="17202A"/>
                           </a:solidFill>
                           <a:latin typeface="Noto Sans JP"/>
                           <a:ea typeface="Noto Sans JP"/>
@@ -5560,7 +7333,7 @@
                       <a:r>
                         <a:rPr sz="1800" b="0">
                           <a:solidFill>
-                            <a:srgbClr val="000000"/>
+                            <a:srgbClr val="17202A"/>
                           </a:solidFill>
                           <a:latin typeface="Noto Sans JP"/>
                           <a:ea typeface="Noto Sans JP"/>
@@ -5585,7 +7358,7 @@
                       <a:r>
                         <a:rPr sz="1800" b="0">
                           <a:solidFill>
-                            <a:srgbClr val="000000"/>
+                            <a:srgbClr val="17202A"/>
                           </a:solidFill>
                           <a:latin typeface="Noto Sans JP"/>
                           <a:ea typeface="Noto Sans JP"/>
@@ -5610,7 +7383,7 @@
                       <a:r>
                         <a:rPr sz="1800" b="1">
                           <a:solidFill>
-                            <a:srgbClr val="000000"/>
+                            <a:srgbClr val="17202A"/>
                           </a:solidFill>
                           <a:latin typeface="Noto Sans JP"/>
                           <a:ea typeface="Noto Sans JP"/>
@@ -5637,7 +7410,7 @@
                       <a:r>
                         <a:rPr sz="1800" b="0">
                           <a:solidFill>
-                            <a:srgbClr val="000000"/>
+                            <a:srgbClr val="17202A"/>
                           </a:solidFill>
                           <a:latin typeface="Noto Sans JP"/>
                           <a:ea typeface="Noto Sans JP"/>
@@ -5662,7 +7435,7 @@
                       <a:r>
                         <a:rPr sz="1800" b="0">
                           <a:solidFill>
-                            <a:srgbClr val="000000"/>
+                            <a:srgbClr val="17202A"/>
                           </a:solidFill>
                           <a:latin typeface="Noto Sans JP"/>
                           <a:ea typeface="Noto Sans JP"/>
@@ -5687,7 +7460,7 @@
                       <a:r>
                         <a:rPr sz="1800" b="1">
                           <a:solidFill>
-                            <a:srgbClr val="000000"/>
+                            <a:srgbClr val="17202A"/>
                           </a:solidFill>
                           <a:latin typeface="Noto Sans JP"/>
                           <a:ea typeface="Noto Sans JP"/>
@@ -5713,19 +7486,19 @@
           <p:cNvPr id="8" name="scope">
             <a:extLst xmlns:a="http://schemas.openxmlformats.org/drawingml/2006/main">
               <a:ext uri="{FF2B5EF4-FFF2-40B4-BE49-F238E27FC236}">
-                <a16:creationId xmlns:a16="http://schemas.microsoft.com/office/drawing/2014/main" id="{55D1AF0D-B12C-477E-8581-D84FF7E6EAB4}"/>
-              </a:ext>
-            </a:extLst>
-          </p:cNvPr>
-          <p:cNvSpPr>
-            <a:spLocks xmlns:a="http://schemas.openxmlformats.org/drawingml/2006/main" noGrp="1"/>
-          </p:cNvSpPr>
-          <p:nvPr/>
-        </p:nvSpPr>
-        <p:spPr>
-          <a:xfrm xmlns:a="http://schemas.openxmlformats.org/drawingml/2006/main">
-            <a:off x="457200" y="4171950"/>
-            <a:ext cx="8229600" cy="295275"/>
+                <a16:creationId xmlns:a16="http://schemas.microsoft.com/office/drawing/2014/main" id="{C20BB55D-E7AD-4B55-A48A-532669A8B43D}"/>
+              </a:ext>
+            </a:extLst>
+          </p:cNvPr>
+          <p:cNvSpPr>
+            <a:spLocks xmlns:a="http://schemas.openxmlformats.org/drawingml/2006/main" noGrp="1"/>
+          </p:cNvSpPr>
+          <p:nvPr/>
+        </p:nvSpPr>
+        <p:spPr>
+          <a:xfrm xmlns:a="http://schemas.openxmlformats.org/drawingml/2006/main">
+            <a:off x="457200" y="4187952"/>
+            <a:ext cx="8229600" cy="310896"/>
           </a:xfrm>
           <a:prstGeom xmlns:a="http://schemas.openxmlformats.org/drawingml/2006/main" prst="rect">
             <a:avLst/>
@@ -5743,9 +7516,9 @@
           <a:lstStyle xmlns:a="http://schemas.openxmlformats.org/drawingml/2006/main"/>
           <a:p xmlns:a="http://schemas.openxmlformats.org/drawingml/2006/main">
             <a:pPr algn="l">
-              <a:defRPr sz="1400" b="0">
-                <a:solidFill>
-                  <a:srgbClr val="666666"/>
+              <a:defRPr sz="1800" b="0">
+                <a:solidFill>
+                  <a:srgbClr val="59636E"/>
                 </a:solidFill>
                 <a:latin typeface="Noto Sans JP"/>
                 <a:ea typeface="Noto Sans JP"/>
@@ -5753,15 +7526,15 @@
               </a:defRPr>
             </a:pPr>
             <a:r>
-              <a:rPr sz="1400" b="0">
-                <a:solidFill>
-                  <a:srgbClr val="666666"/>
+              <a:rPr sz="1800" b="0">
+                <a:solidFill>
+                  <a:srgbClr val="59636E"/>
                 </a:solidFill>
                 <a:latin typeface="Noto Sans JP"/>
                 <a:ea typeface="Noto Sans JP"/>
                 <a:cs typeface="Noto Sans JP"/>
               </a:rPr>
-              <a:t>合成データからの計算。消費電力・継続時間・健康リスクは未評価</a:t>
+              <a:t>合成データからの計算。電力・健康リスクは未評価</a:t>
             </a:r>
           </a:p>
         </p:txBody>
@@ -5769,14 +7542,14 @@
     </p:spTree>
     <p:extLst>
       <p:ext uri="{BB962C8B-B14F-4D97-AF65-F5344CB8AC3E}">
-        <p14:creationId xmlns:p14="http://schemas.microsoft.com/office/powerpoint/2010/main" val="764281960"/>
+        <p14:creationId xmlns:p14="http://schemas.microsoft.com/office/powerpoint/2010/main" val="1883183375"/>
       </p:ext>
     </p:extLst>
   </p:cSld>
 </p:sld>
 </file>
 
-<file path=ppt/slides/slide6.xml><?xml version="1.0" encoding="utf-8"?>
+<file path=ppt/slides/slide8.xml><?xml version="1.0" encoding="utf-8"?>
 <p:sld xmlns:p="http://schemas.openxmlformats.org/presentationml/2006/main">
   <p:cSld>
     <p:bg>
@@ -5797,10 +7570,10 @@
       </p:grpSpPr>
       <p:sp>
         <p:nvSpPr>
-          <p:cNvPr id="11" name="footer-line">
-            <a:extLst xmlns:a="http://schemas.openxmlformats.org/drawingml/2006/main">
-              <a:ext uri="{FF2B5EF4-FFF2-40B4-BE49-F238E27FC236}">
-                <a16:creationId xmlns:a16="http://schemas.microsoft.com/office/drawing/2014/main" id="{41E8CA20-D707-4DF0-8DB7-9CA302C7BCB1}"/>
+          <p:cNvPr id="18" name="footer-line">
+            <a:extLst xmlns:a="http://schemas.openxmlformats.org/drawingml/2006/main">
+              <a:ext uri="{FF2B5EF4-FFF2-40B4-BE49-F238E27FC236}">
+                <a16:creationId xmlns:a16="http://schemas.microsoft.com/office/drawing/2014/main" id="{ED864177-2027-4A17-8668-25682F5E856F}"/>
               </a:ext>
             </a:extLst>
           </p:cNvPr>
@@ -5828,14 +7601,14 @@
       </p:sp>
       <p:pic>
         <p:nvPicPr>
-          <p:cNvPr id="12" name=""/>
+          <p:cNvPr id="19" name=""/>
           <p:cNvPicPr>
             <a:picLocks xmlns:a="http://schemas.openxmlformats.org/drawingml/2006/main" noChangeAspect="1"/>
           </p:cNvPicPr>
           <p:nvPr/>
         </p:nvPicPr>
         <p:blipFill>
-          <a:blip xmlns:r="http://schemas.openxmlformats.org/officeDocument/2006/relationships" xmlns:a="http://schemas.openxmlformats.org/drawingml/2006/main" r:embed="Rb4765f0c54e94331"/>
+          <a:blip xmlns:r="http://schemas.openxmlformats.org/officeDocument/2006/relationships" xmlns:a="http://schemas.openxmlformats.org/drawingml/2006/main" r:embed="Reb23b034545c482b"/>
           <a:stretch xmlns:a="http://schemas.openxmlformats.org/drawingml/2006/main"/>
         </p:blipFill>
         <p:spPr>
@@ -5853,7 +7626,7 @@
           <p:cNvPr id="3" name="page">
             <a:extLst xmlns:a="http://schemas.openxmlformats.org/drawingml/2006/main">
               <a:ext uri="{FF2B5EF4-FFF2-40B4-BE49-F238E27FC236}">
-                <a16:creationId xmlns:a16="http://schemas.microsoft.com/office/drawing/2014/main" id="{B9E70072-69D9-46EC-8453-D702DB809BA6}"/>
+                <a16:creationId xmlns:a16="http://schemas.microsoft.com/office/drawing/2014/main" id="{DFA57532-6F2C-480C-84BD-F8684AD8EF2D}"/>
               </a:ext>
             </a:extLst>
           </p:cNvPr>
@@ -5885,7 +7658,7 @@
             <a:pPr algn="r">
               <a:defRPr sz="1400" b="0">
                 <a:solidFill>
-                  <a:srgbClr val="000000"/>
+                  <a:srgbClr val="17202A"/>
                 </a:solidFill>
                 <a:latin typeface="Arial"/>
                 <a:ea typeface="Arial"/>
@@ -5895,13 +7668,13 @@
             <a:r>
               <a:rPr sz="1400" b="0">
                 <a:solidFill>
-                  <a:srgbClr val="000000"/>
+                  <a:srgbClr val="17202A"/>
                 </a:solidFill>
                 <a:latin typeface="Arial"/>
                 <a:ea typeface="Arial"/>
                 <a:cs typeface="Arial"/>
               </a:rPr>
-              <a:t>6</a:t>
+              <a:t>8</a:t>
             </a:r>
           </a:p>
         </p:txBody>
@@ -5911,7 +7684,7 @@
           <p:cNvPr id="4" name="fictional-disclosure">
             <a:extLst xmlns:a="http://schemas.openxmlformats.org/drawingml/2006/main">
               <a:ext uri="{FF2B5EF4-FFF2-40B4-BE49-F238E27FC236}">
-                <a16:creationId xmlns:a16="http://schemas.microsoft.com/office/drawing/2014/main" id="{60CA5A95-3192-4541-9431-24AE80D87DE3}"/>
+                <a16:creationId xmlns:a16="http://schemas.microsoft.com/office/drawing/2014/main" id="{6A1C05C8-189A-4883-B6F6-1B2D7B6A32EF}"/>
               </a:ext>
             </a:extLst>
           </p:cNvPr>
@@ -5943,7 +7716,7 @@
             <a:pPr algn="l">
               <a:defRPr sz="1050" b="0">
                 <a:solidFill>
-                  <a:srgbClr val="666666"/>
+                  <a:srgbClr val="59636E"/>
                 </a:solidFill>
                 <a:latin typeface="Noto Sans JP"/>
                 <a:ea typeface="Noto Sans JP"/>
@@ -5953,7 +7726,7 @@
             <a:r>
               <a:rPr sz="1050" b="0">
                 <a:solidFill>
-                  <a:srgbClr val="666666"/>
+                  <a:srgbClr val="59636E"/>
                 </a:solidFill>
                 <a:latin typeface="Noto Sans JP"/>
                 <a:ea typeface="Noto Sans JP"/>
@@ -5966,29 +7739,27 @@
       </p:sp>
       <p:sp>
         <p:nvSpPr>
-          <p:cNvPr id="5" name="summary-title">
-            <a:extLst xmlns:a="http://schemas.openxmlformats.org/drawingml/2006/main">
-              <a:ext uri="{FF2B5EF4-FFF2-40B4-BE49-F238E27FC236}">
-                <a16:creationId xmlns:a16="http://schemas.microsoft.com/office/drawing/2014/main" id="{B2C75C5B-8E9E-4E91-8E9F-9F24A511C15D}"/>
-              </a:ext>
-            </a:extLst>
-          </p:cNvPr>
-          <p:cNvSpPr>
-            <a:spLocks xmlns:a="http://schemas.openxmlformats.org/drawingml/2006/main" noGrp="1"/>
-          </p:cNvSpPr>
-          <p:nvPr/>
-        </p:nvSpPr>
-        <p:spPr>
-          <a:xfrm xmlns:a="http://schemas.openxmlformats.org/drawingml/2006/main">
-            <a:off x="457200" y="333375"/>
-            <a:ext cx="8229600" cy="542925"/>
-          </a:xfrm>
-          <a:prstGeom xmlns:a="http://schemas.openxmlformats.org/drawingml/2006/main" prst="rect">
-            <a:avLst/>
-          </a:prstGeom>
-          <a:solidFill xmlns:a="http://schemas.openxmlformats.org/drawingml/2006/main">
-            <a:srgbClr val="9BBB59"/>
-          </a:solidFill>
+          <p:cNvPr id="5" name="title">
+            <a:extLst xmlns:a="http://schemas.openxmlformats.org/drawingml/2006/main">
+              <a:ext uri="{FF2B5EF4-FFF2-40B4-BE49-F238E27FC236}">
+                <a16:creationId xmlns:a16="http://schemas.microsoft.com/office/drawing/2014/main" id="{B5BF6DF7-8B14-4F83-8C27-4F29D67B3866}"/>
+              </a:ext>
+            </a:extLst>
+          </p:cNvPr>
+          <p:cNvSpPr>
+            <a:spLocks xmlns:a="http://schemas.openxmlformats.org/drawingml/2006/main" noGrp="1"/>
+          </p:cNvSpPr>
+          <p:nvPr/>
+        </p:nvSpPr>
+        <p:spPr>
+          <a:xfrm xmlns:a="http://schemas.openxmlformats.org/drawingml/2006/main">
+            <a:off x="457200" y="109728"/>
+            <a:ext cx="8229600" cy="400050"/>
+          </a:xfrm>
+          <a:prstGeom xmlns:a="http://schemas.openxmlformats.org/drawingml/2006/main" prst="rect">
+            <a:avLst/>
+          </a:prstGeom>
+          <a:noFill xmlns:a="http://schemas.openxmlformats.org/drawingml/2006/main"/>
           <a:ln xmlns:a="http://schemas.openxmlformats.org/drawingml/2006/main" w="0">
             <a:noFill/>
             <a:prstDash val="solid"/>
@@ -6000,10 +7771,10 @@
           </a:bodyPr>
           <a:lstStyle xmlns:a="http://schemas.openxmlformats.org/drawingml/2006/main"/>
           <a:p xmlns:a="http://schemas.openxmlformats.org/drawingml/2006/main">
-            <a:pPr algn="ctr">
-              <a:defRPr sz="2400" b="1">
-                <a:solidFill>
-                  <a:srgbClr val="000000"/>
+            <a:pPr algn="l">
+              <a:defRPr sz="2700" b="1">
+                <a:solidFill>
+                  <a:srgbClr val="17202A"/>
                 </a:solidFill>
                 <a:latin typeface="Noto Sans JP"/>
                 <a:ea typeface="Noto Sans JP"/>
@@ -6011,37 +7782,37 @@
               </a:defRPr>
             </a:pPr>
             <a:r>
-              <a:rPr sz="2400" b="1">
-                <a:solidFill>
-                  <a:srgbClr val="000000"/>
+              <a:rPr sz="2700" b="1">
+                <a:solidFill>
+                  <a:srgbClr val="17202A"/>
                 </a:solidFill>
                 <a:latin typeface="Noto Sans JP"/>
                 <a:ea typeface="Noto Sans JP"/>
                 <a:cs typeface="Noto Sans JP"/>
               </a:rPr>
-              <a:t>記録間隔の検討方法</a:t>
-            </a:r>
-          </a:p>
-        </p:txBody>
-      </p:sp>
-      <p:sp>
-        <p:nvSpPr>
-          <p:cNvPr id="6" name="finding-label">
-            <a:extLst xmlns:a="http://schemas.openxmlformats.org/drawingml/2006/main">
-              <a:ext uri="{FF2B5EF4-FFF2-40B4-BE49-F238E27FC236}">
-                <a16:creationId xmlns:a16="http://schemas.microsoft.com/office/drawing/2014/main" id="{F649212C-A8EA-4E4E-8E14-EF5C6BC01B1D}"/>
-              </a:ext>
-            </a:extLst>
-          </p:cNvPr>
-          <p:cNvSpPr>
-            <a:spLocks xmlns:a="http://schemas.openxmlformats.org/drawingml/2006/main" noGrp="1"/>
-          </p:cNvSpPr>
-          <p:nvPr/>
-        </p:nvSpPr>
-        <p:spPr>
-          <a:xfrm xmlns:a="http://schemas.openxmlformats.org/drawingml/2006/main">
-            <a:off x="457200" y="1257300"/>
-            <a:ext cx="3048000" cy="352425"/>
+              <a:t>まとめ</a:t>
+            </a:r>
+          </a:p>
+        </p:txBody>
+      </p:sp>
+      <p:sp>
+        <p:nvSpPr>
+          <p:cNvPr id="6" name="message">
+            <a:extLst xmlns:a="http://schemas.openxmlformats.org/drawingml/2006/main">
+              <a:ext uri="{FF2B5EF4-FFF2-40B4-BE49-F238E27FC236}">
+                <a16:creationId xmlns:a16="http://schemas.microsoft.com/office/drawing/2014/main" id="{05A4023C-49A6-433C-8877-0C3B0E5148E5}"/>
+              </a:ext>
+            </a:extLst>
+          </p:cNvPr>
+          <p:cNvSpPr>
+            <a:spLocks xmlns:a="http://schemas.openxmlformats.org/drawingml/2006/main" noGrp="1"/>
+          </p:cNvSpPr>
+          <p:nvPr/>
+        </p:nvSpPr>
+        <p:spPr>
+          <a:xfrm xmlns:a="http://schemas.openxmlformats.org/drawingml/2006/main">
+            <a:off x="457200" y="621792"/>
+            <a:ext cx="8229600" cy="694944"/>
           </a:xfrm>
           <a:prstGeom xmlns:a="http://schemas.openxmlformats.org/drawingml/2006/main" prst="rect">
             <a:avLst/>
@@ -6059,9 +7830,9 @@
           <a:lstStyle xmlns:a="http://schemas.openxmlformats.org/drawingml/2006/main"/>
           <a:p xmlns:a="http://schemas.openxmlformats.org/drawingml/2006/main">
             <a:pPr algn="l">
-              <a:defRPr sz="2000" b="1">
-                <a:solidFill>
-                  <a:srgbClr val="000000"/>
+              <a:defRPr sz="2300" b="1">
+                <a:solidFill>
+                  <a:srgbClr val="17202A"/>
                 </a:solidFill>
                 <a:latin typeface="Noto Sans JP"/>
                 <a:ea typeface="Noto Sans JP"/>
@@ -6069,37 +7840,37 @@
               </a:defRPr>
             </a:pPr>
             <a:r>
-              <a:rPr sz="2000" b="1">
-                <a:solidFill>
-                  <a:srgbClr val="000000"/>
+              <a:rPr sz="2300" b="1">
+                <a:solidFill>
+                  <a:srgbClr val="17202A"/>
                 </a:solidFill>
                 <a:latin typeface="Noto Sans JP"/>
                 <a:ea typeface="Noto Sans JP"/>
                 <a:cs typeface="Noto Sans JP"/>
               </a:rPr>
-              <a:t>今回分かったこと</a:t>
-            </a:r>
-          </a:p>
-        </p:txBody>
-      </p:sp>
-      <p:sp>
-        <p:nvSpPr>
-          <p:cNvPr id="7" name="finding">
-            <a:extLst xmlns:a="http://schemas.openxmlformats.org/drawingml/2006/main">
-              <a:ext uri="{FF2B5EF4-FFF2-40B4-BE49-F238E27FC236}">
-                <a16:creationId xmlns:a16="http://schemas.microsoft.com/office/drawing/2014/main" id="{AFC6D5BE-D6F6-4742-89C7-3C089AD2F991}"/>
-              </a:ext>
-            </a:extLst>
-          </p:cNvPr>
-          <p:cNvSpPr>
-            <a:spLocks xmlns:a="http://schemas.openxmlformats.org/drawingml/2006/main" noGrp="1"/>
-          </p:cNvSpPr>
-          <p:nvPr/>
-        </p:nvSpPr>
-        <p:spPr>
-          <a:xfrm xmlns:a="http://schemas.openxmlformats.org/drawingml/2006/main">
-            <a:off x="457200" y="1724025"/>
-            <a:ext cx="8229600" cy="800100"/>
+              <a:t>記録点数と、残る変化を併せて確かめる</a:t>
+            </a:r>
+          </a:p>
+        </p:txBody>
+      </p:sp>
+      <p:sp>
+        <p:nvSpPr>
+          <p:cNvPr id="7" name="summary-label-0">
+            <a:extLst xmlns:a="http://schemas.openxmlformats.org/drawingml/2006/main">
+              <a:ext uri="{FF2B5EF4-FFF2-40B4-BE49-F238E27FC236}">
+                <a16:creationId xmlns:a16="http://schemas.microsoft.com/office/drawing/2014/main" id="{B6A8641E-4BA2-42F7-8E02-AC0DA98B14B0}"/>
+              </a:ext>
+            </a:extLst>
+          </p:cNvPr>
+          <p:cNvSpPr>
+            <a:spLocks xmlns:a="http://schemas.openxmlformats.org/drawingml/2006/main" noGrp="1"/>
+          </p:cNvSpPr>
+          <p:nvPr/>
+        </p:nvSpPr>
+        <p:spPr>
+          <a:xfrm xmlns:a="http://schemas.openxmlformats.org/drawingml/2006/main">
+            <a:off x="457200" y="1485900"/>
+            <a:ext cx="2664619" cy="590550"/>
           </a:xfrm>
           <a:prstGeom xmlns:a="http://schemas.openxmlformats.org/drawingml/2006/main" prst="rect">
             <a:avLst/>
@@ -6117,9 +7888,9 @@
           <a:lstStyle xmlns:a="http://schemas.openxmlformats.org/drawingml/2006/main"/>
           <a:p xmlns:a="http://schemas.openxmlformats.org/drawingml/2006/main">
             <a:pPr algn="l">
-              <a:defRPr sz="2000" b="0">
-                <a:solidFill>
-                  <a:srgbClr val="000000"/>
+              <a:defRPr sz="1800" b="1">
+                <a:solidFill>
+                  <a:srgbClr val="17202A"/>
                 </a:solidFill>
                 <a:latin typeface="Noto Sans JP"/>
                 <a:ea typeface="Noto Sans JP"/>
@@ -6127,60 +7898,37 @@
               </a:defRPr>
             </a:pPr>
             <a:r>
-              <a:rPr sz="2000" b="0">
-                <a:solidFill>
-                  <a:srgbClr val="000000"/>
+              <a:rPr sz="1800" b="1">
+                <a:solidFill>
+                  <a:srgbClr val="17202A"/>
                 </a:solidFill>
                 <a:latin typeface="Noto Sans JP"/>
                 <a:ea typeface="Noto Sans JP"/>
                 <a:cs typeface="Noto Sans JP"/>
               </a:rPr>
-              <a:t>一つの合成系列では、5分間隔の保持点に</a:t>
-            </a:r>
-          </a:p>
-          <a:p xmlns:a="http://schemas.openxmlformats.org/drawingml/2006/main">
-            <a:pPr algn="l">
-              <a:defRPr sz="2000" b="0">
-                <a:solidFill>
-                  <a:srgbClr val="000000"/>
-                </a:solidFill>
-                <a:latin typeface="Noto Sans JP"/>
-                <a:ea typeface="Noto Sans JP"/>
-                <a:cs typeface="Noto Sans JP"/>
-              </a:defRPr>
-            </a:pPr>
-            <a:r>
-              <a:rPr sz="2000" b="0">
-                <a:solidFill>
-                  <a:srgbClr val="000000"/>
-                </a:solidFill>
-                <a:latin typeface="Noto Sans JP"/>
-                <a:ea typeface="Noto Sans JP"/>
-                <a:cs typeface="Noto Sans JP"/>
-              </a:rPr>
-              <a:t>短時間の高い値が残らなかった。</a:t>
-            </a:r>
-          </a:p>
-        </p:txBody>
-      </p:sp>
-      <p:sp>
-        <p:nvSpPr>
-          <p:cNvPr id="8" name="next-label">
-            <a:extLst xmlns:a="http://schemas.openxmlformats.org/drawingml/2006/main">
-              <a:ext uri="{FF2B5EF4-FFF2-40B4-BE49-F238E27FC236}">
-                <a16:creationId xmlns:a16="http://schemas.microsoft.com/office/drawing/2014/main" id="{E351DE65-0B52-4FC0-9331-00417CB0D48A}"/>
-              </a:ext>
-            </a:extLst>
-          </p:cNvPr>
-          <p:cNvSpPr>
-            <a:spLocks xmlns:a="http://schemas.openxmlformats.org/drawingml/2006/main" noGrp="1"/>
-          </p:cNvSpPr>
-          <p:nvPr/>
-        </p:nvSpPr>
-        <p:spPr>
-          <a:xfrm xmlns:a="http://schemas.openxmlformats.org/drawingml/2006/main">
-            <a:off x="457200" y="2800350"/>
-            <a:ext cx="3048000" cy="352425"/>
+              <a:t>01 研究のねらい</a:t>
+            </a:r>
+          </a:p>
+        </p:txBody>
+      </p:sp>
+      <p:sp>
+        <p:nvSpPr>
+          <p:cNvPr id="8" name="summary-body-0">
+            <a:extLst xmlns:a="http://schemas.openxmlformats.org/drawingml/2006/main">
+              <a:ext uri="{FF2B5EF4-FFF2-40B4-BE49-F238E27FC236}">
+                <a16:creationId xmlns:a16="http://schemas.microsoft.com/office/drawing/2014/main" id="{5FF3ED6F-73DE-4861-8231-07FCFF294E75}"/>
+              </a:ext>
+            </a:extLst>
+          </p:cNvPr>
+          <p:cNvSpPr>
+            <a:spLocks xmlns:a="http://schemas.openxmlformats.org/drawingml/2006/main" noGrp="1"/>
+          </p:cNvSpPr>
+          <p:nvPr/>
+        </p:nvSpPr>
+        <p:spPr>
+          <a:xfrm xmlns:a="http://schemas.openxmlformats.org/drawingml/2006/main">
+            <a:off x="3293269" y="1485900"/>
+            <a:ext cx="5393531" cy="590550"/>
           </a:xfrm>
           <a:prstGeom xmlns:a="http://schemas.openxmlformats.org/drawingml/2006/main" prst="rect">
             <a:avLst/>
@@ -6198,9 +7946,9 @@
           <a:lstStyle xmlns:a="http://schemas.openxmlformats.org/drawingml/2006/main"/>
           <a:p xmlns:a="http://schemas.openxmlformats.org/drawingml/2006/main">
             <a:pPr algn="l">
-              <a:defRPr sz="2000" b="1">
-                <a:solidFill>
-                  <a:srgbClr val="000000"/>
+              <a:defRPr sz="1800" b="0">
+                <a:solidFill>
+                  <a:srgbClr val="17202A"/>
                 </a:solidFill>
                 <a:latin typeface="Noto Sans JP"/>
                 <a:ea typeface="Noto Sans JP"/>
@@ -6208,37 +7956,68 @@
               </a:defRPr>
             </a:pPr>
             <a:r>
-              <a:rPr sz="2000" b="1">
-                <a:solidFill>
-                  <a:srgbClr val="000000"/>
+              <a:rPr sz="1800" b="0">
+                <a:solidFill>
+                  <a:srgbClr val="17202A"/>
                 </a:solidFill>
                 <a:latin typeface="Noto Sans JP"/>
                 <a:ea typeface="Noto Sans JP"/>
                 <a:cs typeface="Noto Sans JP"/>
               </a:rPr>
-              <a:t>次に確かめること</a:t>
-            </a:r>
-          </a:p>
-        </p:txBody>
-      </p:sp>
-      <p:sp>
-        <p:nvSpPr>
-          <p:cNvPr id="9" name="next">
-            <a:extLst xmlns:a="http://schemas.openxmlformats.org/drawingml/2006/main">
-              <a:ext uri="{FF2B5EF4-FFF2-40B4-BE49-F238E27FC236}">
-                <a16:creationId xmlns:a16="http://schemas.microsoft.com/office/drawing/2014/main" id="{125C78BD-E502-4A74-B451-C1781ABEF056}"/>
-              </a:ext>
-            </a:extLst>
-          </p:cNvPr>
-          <p:cNvSpPr>
-            <a:spLocks xmlns:a="http://schemas.openxmlformats.org/drawingml/2006/main" noGrp="1"/>
-          </p:cNvSpPr>
-          <p:nvPr/>
-        </p:nvSpPr>
-        <p:spPr>
-          <a:xfrm xmlns:a="http://schemas.openxmlformats.org/drawingml/2006/main">
-            <a:off x="457200" y="3257550"/>
-            <a:ext cx="8229600" cy="381000"/>
+              <a:t>記録点を減らすとき、短い変化が残るかを問う</a:t>
+            </a:r>
+          </a:p>
+        </p:txBody>
+      </p:sp>
+      <p:sp>
+        <p:nvSpPr>
+          <p:cNvPr id="9" name="summary-rule-0">
+            <a:extLst xmlns:a="http://schemas.openxmlformats.org/drawingml/2006/main">
+              <a:ext uri="{FF2B5EF4-FFF2-40B4-BE49-F238E27FC236}">
+                <a16:creationId xmlns:a16="http://schemas.microsoft.com/office/drawing/2014/main" id="{868D2CD3-37F5-4F91-85D4-AF7AE3847CA3}"/>
+              </a:ext>
+            </a:extLst>
+          </p:cNvPr>
+          <p:cNvSpPr>
+            <a:spLocks xmlns:a="http://schemas.openxmlformats.org/drawingml/2006/main" noGrp="1"/>
+          </p:cNvSpPr>
+          <p:nvPr/>
+        </p:nvSpPr>
+        <p:spPr>
+          <a:xfrm xmlns:a="http://schemas.openxmlformats.org/drawingml/2006/main">
+            <a:off x="457200" y="2100263"/>
+            <a:ext cx="8229600" cy="9525"/>
+          </a:xfrm>
+          <a:prstGeom xmlns:a="http://schemas.openxmlformats.org/drawingml/2006/main" prst="rect">
+            <a:avLst/>
+          </a:prstGeom>
+          <a:solidFill xmlns:a="http://schemas.openxmlformats.org/drawingml/2006/main">
+            <a:srgbClr val="D7DCD5"/>
+          </a:solidFill>
+          <a:ln xmlns:a="http://schemas.openxmlformats.org/drawingml/2006/main" w="0">
+            <a:noFill/>
+            <a:prstDash val="solid"/>
+          </a:ln>
+        </p:spPr>
+      </p:sp>
+      <p:sp>
+        <p:nvSpPr>
+          <p:cNvPr id="10" name="summary-label-1">
+            <a:extLst xmlns:a="http://schemas.openxmlformats.org/drawingml/2006/main">
+              <a:ext uri="{FF2B5EF4-FFF2-40B4-BE49-F238E27FC236}">
+                <a16:creationId xmlns:a16="http://schemas.microsoft.com/office/drawing/2014/main" id="{E6C14105-BBFE-4C93-A556-A5A1C75C06B1}"/>
+              </a:ext>
+            </a:extLst>
+          </p:cNvPr>
+          <p:cNvSpPr>
+            <a:spLocks xmlns:a="http://schemas.openxmlformats.org/drawingml/2006/main" noGrp="1"/>
+          </p:cNvSpPr>
+          <p:nvPr/>
+        </p:nvSpPr>
+        <p:spPr>
+          <a:xfrm xmlns:a="http://schemas.openxmlformats.org/drawingml/2006/main">
+            <a:off x="457200" y="2143125"/>
+            <a:ext cx="2664619" cy="590550"/>
           </a:xfrm>
           <a:prstGeom xmlns:a="http://schemas.openxmlformats.org/drawingml/2006/main" prst="rect">
             <a:avLst/>
@@ -6256,9 +8035,9 @@
           <a:lstStyle xmlns:a="http://schemas.openxmlformats.org/drawingml/2006/main"/>
           <a:p xmlns:a="http://schemas.openxmlformats.org/drawingml/2006/main">
             <a:pPr algn="l">
-              <a:defRPr sz="1900" b="0">
-                <a:solidFill>
-                  <a:srgbClr val="000000"/>
+              <a:defRPr sz="1800" b="1">
+                <a:solidFill>
+                  <a:srgbClr val="17202A"/>
                 </a:solidFill>
                 <a:latin typeface="Noto Sans JP"/>
                 <a:ea typeface="Noto Sans JP"/>
@@ -6266,46 +8045,42 @@
               </a:defRPr>
             </a:pPr>
             <a:r>
-              <a:rPr sz="1900" b="0">
-                <a:solidFill>
-                  <a:srgbClr val="000000"/>
+              <a:rPr sz="1800" b="1">
+                <a:solidFill>
+                  <a:srgbClr val="17202A"/>
                 </a:solidFill>
                 <a:latin typeface="Noto Sans JP"/>
                 <a:ea typeface="Noto Sans JP"/>
                 <a:cs typeface="Noto Sans JP"/>
               </a:rPr>
-              <a:t>波形・開始時刻を変え、実機条件で確認する。</a:t>
-            </a:r>
-          </a:p>
-        </p:txBody>
-      </p:sp>
-      <p:sp>
-        <p:nvSpPr>
-          <p:cNvPr id="10" name="conclusion">
-            <a:extLst xmlns:a="http://schemas.openxmlformats.org/drawingml/2006/main">
-              <a:ext uri="{FF2B5EF4-FFF2-40B4-BE49-F238E27FC236}">
-                <a16:creationId xmlns:a16="http://schemas.microsoft.com/office/drawing/2014/main" id="{021D6A45-11F9-4AAE-8BE6-2B61D012B41B}"/>
-              </a:ext>
-            </a:extLst>
-          </p:cNvPr>
-          <p:cNvSpPr>
-            <a:spLocks xmlns:a="http://schemas.openxmlformats.org/drawingml/2006/main" noGrp="1"/>
-          </p:cNvSpPr>
-          <p:nvPr/>
-        </p:nvSpPr>
-        <p:spPr>
-          <a:xfrm xmlns:a="http://schemas.openxmlformats.org/drawingml/2006/main">
-            <a:off x="457200" y="3914775"/>
-            <a:ext cx="8229600" cy="552450"/>
-          </a:xfrm>
-          <a:prstGeom xmlns:a="http://schemas.openxmlformats.org/drawingml/2006/main" prst="roundRect">
-            <a:avLst>
-              <a:gd name="adj" fmla="val 13793"/>
-            </a:avLst>
-          </a:prstGeom>
-          <a:solidFill xmlns:a="http://schemas.openxmlformats.org/drawingml/2006/main">
-            <a:srgbClr val="9BBB59"/>
-          </a:solidFill>
+              <a:t>02 しくみと評価方法</a:t>
+            </a:r>
+          </a:p>
+        </p:txBody>
+      </p:sp>
+      <p:sp>
+        <p:nvSpPr>
+          <p:cNvPr id="11" name="summary-body-1">
+            <a:extLst xmlns:a="http://schemas.openxmlformats.org/drawingml/2006/main">
+              <a:ext uri="{FF2B5EF4-FFF2-40B4-BE49-F238E27FC236}">
+                <a16:creationId xmlns:a16="http://schemas.microsoft.com/office/drawing/2014/main" id="{994EE426-55FB-4C64-B995-91AAFB3608BC}"/>
+              </a:ext>
+            </a:extLst>
+          </p:cNvPr>
+          <p:cNvSpPr>
+            <a:spLocks xmlns:a="http://schemas.openxmlformats.org/drawingml/2006/main" noGrp="1"/>
+          </p:cNvSpPr>
+          <p:nvPr/>
+        </p:nvSpPr>
+        <p:spPr>
+          <a:xfrm xmlns:a="http://schemas.openxmlformats.org/drawingml/2006/main">
+            <a:off x="3293269" y="2143125"/>
+            <a:ext cx="5393531" cy="590550"/>
+          </a:xfrm>
+          <a:prstGeom xmlns:a="http://schemas.openxmlformats.org/drawingml/2006/main" prst="rect">
+            <a:avLst/>
+          </a:prstGeom>
+          <a:noFill xmlns:a="http://schemas.openxmlformats.org/drawingml/2006/main"/>
           <a:ln xmlns:a="http://schemas.openxmlformats.org/drawingml/2006/main" w="0">
             <a:noFill/>
             <a:prstDash val="solid"/>
@@ -6317,10 +8092,10 @@
           </a:bodyPr>
           <a:lstStyle xmlns:a="http://schemas.openxmlformats.org/drawingml/2006/main"/>
           <a:p xmlns:a="http://schemas.openxmlformats.org/drawingml/2006/main">
-            <a:pPr algn="ctr">
-              <a:defRPr sz="2000" b="1">
-                <a:solidFill>
-                  <a:srgbClr val="000000"/>
+            <a:pPr algn="l">
+              <a:defRPr sz="1800" b="0">
+                <a:solidFill>
+                  <a:srgbClr val="17202A"/>
                 </a:solidFill>
                 <a:latin typeface="Noto Sans JP"/>
                 <a:ea typeface="Noto Sans JP"/>
@@ -6328,15 +8103,332 @@
               </a:defRPr>
             </a:pPr>
             <a:r>
-              <a:rPr sz="2000" b="1">
-                <a:solidFill>
-                  <a:srgbClr val="000000"/>
+              <a:rPr sz="1800" b="0">
+                <a:solidFill>
+                  <a:srgbClr val="17202A"/>
                 </a:solidFill>
                 <a:latin typeface="Noto Sans JP"/>
                 <a:ea typeface="Noto Sans JP"/>
                 <a:cs typeface="Noto Sans JP"/>
               </a:rPr>
-              <a:t>記録点数と、残る変化を併せて確かめる</a:t>
+              <a:t>同じ合成系列を、全13点と保持3点で比較した</a:t>
+            </a:r>
+          </a:p>
+        </p:txBody>
+      </p:sp>
+      <p:sp>
+        <p:nvSpPr>
+          <p:cNvPr id="12" name="summary-rule-1">
+            <a:extLst xmlns:a="http://schemas.openxmlformats.org/drawingml/2006/main">
+              <a:ext uri="{FF2B5EF4-FFF2-40B4-BE49-F238E27FC236}">
+                <a16:creationId xmlns:a16="http://schemas.microsoft.com/office/drawing/2014/main" id="{153E52D8-DC41-4F4B-B920-66AB47B273FF}"/>
+              </a:ext>
+            </a:extLst>
+          </p:cNvPr>
+          <p:cNvSpPr>
+            <a:spLocks xmlns:a="http://schemas.openxmlformats.org/drawingml/2006/main" noGrp="1"/>
+          </p:cNvSpPr>
+          <p:nvPr/>
+        </p:nvSpPr>
+        <p:spPr>
+          <a:xfrm xmlns:a="http://schemas.openxmlformats.org/drawingml/2006/main">
+            <a:off x="457200" y="2757488"/>
+            <a:ext cx="8229600" cy="9525"/>
+          </a:xfrm>
+          <a:prstGeom xmlns:a="http://schemas.openxmlformats.org/drawingml/2006/main" prst="rect">
+            <a:avLst/>
+          </a:prstGeom>
+          <a:solidFill xmlns:a="http://schemas.openxmlformats.org/drawingml/2006/main">
+            <a:srgbClr val="D7DCD5"/>
+          </a:solidFill>
+          <a:ln xmlns:a="http://schemas.openxmlformats.org/drawingml/2006/main" w="0">
+            <a:noFill/>
+            <a:prstDash val="solid"/>
+          </a:ln>
+        </p:spPr>
+      </p:sp>
+      <p:sp>
+        <p:nvSpPr>
+          <p:cNvPr id="13" name="summary-label-2">
+            <a:extLst xmlns:a="http://schemas.openxmlformats.org/drawingml/2006/main">
+              <a:ext uri="{FF2B5EF4-FFF2-40B4-BE49-F238E27FC236}">
+                <a16:creationId xmlns:a16="http://schemas.microsoft.com/office/drawing/2014/main" id="{608EDB75-3AB2-4FF8-952C-BCC504BE465C}"/>
+              </a:ext>
+            </a:extLst>
+          </p:cNvPr>
+          <p:cNvSpPr>
+            <a:spLocks xmlns:a="http://schemas.openxmlformats.org/drawingml/2006/main" noGrp="1"/>
+          </p:cNvSpPr>
+          <p:nvPr/>
+        </p:nvSpPr>
+        <p:spPr>
+          <a:xfrm xmlns:a="http://schemas.openxmlformats.org/drawingml/2006/main">
+            <a:off x="457200" y="2800350"/>
+            <a:ext cx="2664619" cy="590550"/>
+          </a:xfrm>
+          <a:prstGeom xmlns:a="http://schemas.openxmlformats.org/drawingml/2006/main" prst="rect">
+            <a:avLst/>
+          </a:prstGeom>
+          <a:noFill xmlns:a="http://schemas.openxmlformats.org/drawingml/2006/main"/>
+          <a:ln xmlns:a="http://schemas.openxmlformats.org/drawingml/2006/main" w="0">
+            <a:noFill/>
+            <a:prstDash val="solid"/>
+          </a:ln>
+        </p:spPr>
+        <p:txBody>
+          <a:bodyPr xmlns:a="http://schemas.openxmlformats.org/drawingml/2006/main" lIns="0" tIns="0" rIns="0" bIns="0" anchor="ctr">
+            <a:noAutofit/>
+          </a:bodyPr>
+          <a:lstStyle xmlns:a="http://schemas.openxmlformats.org/drawingml/2006/main"/>
+          <a:p xmlns:a="http://schemas.openxmlformats.org/drawingml/2006/main">
+            <a:pPr algn="l">
+              <a:defRPr sz="1800" b="1">
+                <a:solidFill>
+                  <a:srgbClr val="17202A"/>
+                </a:solidFill>
+                <a:latin typeface="Noto Sans JP"/>
+                <a:ea typeface="Noto Sans JP"/>
+                <a:cs typeface="Noto Sans JP"/>
+              </a:defRPr>
+            </a:pPr>
+            <a:r>
+              <a:rPr sz="1800" b="1">
+                <a:solidFill>
+                  <a:srgbClr val="17202A"/>
+                </a:solidFill>
+                <a:latin typeface="Noto Sans JP"/>
+                <a:ea typeface="Noto Sans JP"/>
+                <a:cs typeface="Noto Sans JP"/>
+              </a:rPr>
+              <a:t>03 ここまでの結果</a:t>
+            </a:r>
+          </a:p>
+        </p:txBody>
+      </p:sp>
+      <p:sp>
+        <p:nvSpPr>
+          <p:cNvPr id="14" name="summary-body-2">
+            <a:extLst xmlns:a="http://schemas.openxmlformats.org/drawingml/2006/main">
+              <a:ext uri="{FF2B5EF4-FFF2-40B4-BE49-F238E27FC236}">
+                <a16:creationId xmlns:a16="http://schemas.microsoft.com/office/drawing/2014/main" id="{C12B4C38-5EA8-4867-B3A1-28D31D54BC02}"/>
+              </a:ext>
+            </a:extLst>
+          </p:cNvPr>
+          <p:cNvSpPr>
+            <a:spLocks xmlns:a="http://schemas.openxmlformats.org/drawingml/2006/main" noGrp="1"/>
+          </p:cNvSpPr>
+          <p:nvPr/>
+        </p:nvSpPr>
+        <p:spPr>
+          <a:xfrm xmlns:a="http://schemas.openxmlformats.org/drawingml/2006/main">
+            <a:off x="3293269" y="2800350"/>
+            <a:ext cx="5393531" cy="590550"/>
+          </a:xfrm>
+          <a:prstGeom xmlns:a="http://schemas.openxmlformats.org/drawingml/2006/main" prst="rect">
+            <a:avLst/>
+          </a:prstGeom>
+          <a:noFill xmlns:a="http://schemas.openxmlformats.org/drawingml/2006/main"/>
+          <a:ln xmlns:a="http://schemas.openxmlformats.org/drawingml/2006/main" w="0">
+            <a:noFill/>
+            <a:prstDash val="solid"/>
+          </a:ln>
+        </p:spPr>
+        <p:txBody>
+          <a:bodyPr xmlns:a="http://schemas.openxmlformats.org/drawingml/2006/main" lIns="0" tIns="0" rIns="0" bIns="0" anchor="ctr">
+            <a:noAutofit/>
+          </a:bodyPr>
+          <a:lstStyle xmlns:a="http://schemas.openxmlformats.org/drawingml/2006/main"/>
+          <a:p xmlns:a="http://schemas.openxmlformats.org/drawingml/2006/main">
+            <a:pPr algn="l">
+              <a:defRPr sz="1800" b="0">
+                <a:solidFill>
+                  <a:srgbClr val="17202A"/>
+                </a:solidFill>
+                <a:latin typeface="Noto Sans JP"/>
+                <a:ea typeface="Noto Sans JP"/>
+                <a:cs typeface="Noto Sans JP"/>
+              </a:defRPr>
+            </a:pPr>
+            <a:r>
+              <a:rPr sz="1800" b="0">
+                <a:solidFill>
+                  <a:srgbClr val="17202A"/>
+                </a:solidFill>
+                <a:latin typeface="Noto Sans JP"/>
+                <a:ea typeface="Noto Sans JP"/>
+                <a:cs typeface="Noto Sans JP"/>
+              </a:rPr>
+              <a:t>この例では、5分間隔の保持点に</a:t>
+            </a:r>
+          </a:p>
+          <a:p xmlns:a="http://schemas.openxmlformats.org/drawingml/2006/main">
+            <a:pPr algn="l">
+              <a:defRPr sz="1800" b="0">
+                <a:solidFill>
+                  <a:srgbClr val="17202A"/>
+                </a:solidFill>
+                <a:latin typeface="Noto Sans JP"/>
+                <a:ea typeface="Noto Sans JP"/>
+                <a:cs typeface="Noto Sans JP"/>
+              </a:defRPr>
+            </a:pPr>
+            <a:r>
+              <a:rPr sz="1800" b="0">
+                <a:solidFill>
+                  <a:srgbClr val="17202A"/>
+                </a:solidFill>
+                <a:latin typeface="Noto Sans JP"/>
+                <a:ea typeface="Noto Sans JP"/>
+                <a:cs typeface="Noto Sans JP"/>
+              </a:rPr>
+              <a:t>1000 ppmを超える値が残らなかった</a:t>
+            </a:r>
+          </a:p>
+        </p:txBody>
+      </p:sp>
+      <p:sp>
+        <p:nvSpPr>
+          <p:cNvPr id="15" name="summary-rule-2">
+            <a:extLst xmlns:a="http://schemas.openxmlformats.org/drawingml/2006/main">
+              <a:ext uri="{FF2B5EF4-FFF2-40B4-BE49-F238E27FC236}">
+                <a16:creationId xmlns:a16="http://schemas.microsoft.com/office/drawing/2014/main" id="{14E3070E-0163-4405-BD44-B4A337106A68}"/>
+              </a:ext>
+            </a:extLst>
+          </p:cNvPr>
+          <p:cNvSpPr>
+            <a:spLocks xmlns:a="http://schemas.openxmlformats.org/drawingml/2006/main" noGrp="1"/>
+          </p:cNvSpPr>
+          <p:nvPr/>
+        </p:nvSpPr>
+        <p:spPr>
+          <a:xfrm xmlns:a="http://schemas.openxmlformats.org/drawingml/2006/main">
+            <a:off x="457200" y="3414713"/>
+            <a:ext cx="8229600" cy="9525"/>
+          </a:xfrm>
+          <a:prstGeom xmlns:a="http://schemas.openxmlformats.org/drawingml/2006/main" prst="rect">
+            <a:avLst/>
+          </a:prstGeom>
+          <a:solidFill xmlns:a="http://schemas.openxmlformats.org/drawingml/2006/main">
+            <a:srgbClr val="D7DCD5"/>
+          </a:solidFill>
+          <a:ln xmlns:a="http://schemas.openxmlformats.org/drawingml/2006/main" w="0">
+            <a:noFill/>
+            <a:prstDash val="solid"/>
+          </a:ln>
+        </p:spPr>
+      </p:sp>
+      <p:sp>
+        <p:nvSpPr>
+          <p:cNvPr id="16" name="summary-label-3">
+            <a:extLst xmlns:a="http://schemas.openxmlformats.org/drawingml/2006/main">
+              <a:ext uri="{FF2B5EF4-FFF2-40B4-BE49-F238E27FC236}">
+                <a16:creationId xmlns:a16="http://schemas.microsoft.com/office/drawing/2014/main" id="{D9481D51-30C5-42CD-BD74-00A16FC9E7A9}"/>
+              </a:ext>
+            </a:extLst>
+          </p:cNvPr>
+          <p:cNvSpPr>
+            <a:spLocks xmlns:a="http://schemas.openxmlformats.org/drawingml/2006/main" noGrp="1"/>
+          </p:cNvSpPr>
+          <p:nvPr/>
+        </p:nvSpPr>
+        <p:spPr>
+          <a:xfrm xmlns:a="http://schemas.openxmlformats.org/drawingml/2006/main">
+            <a:off x="457200" y="3457575"/>
+            <a:ext cx="2664619" cy="590550"/>
+          </a:xfrm>
+          <a:prstGeom xmlns:a="http://schemas.openxmlformats.org/drawingml/2006/main" prst="rect">
+            <a:avLst/>
+          </a:prstGeom>
+          <a:noFill xmlns:a="http://schemas.openxmlformats.org/drawingml/2006/main"/>
+          <a:ln xmlns:a="http://schemas.openxmlformats.org/drawingml/2006/main" w="0">
+            <a:noFill/>
+            <a:prstDash val="solid"/>
+          </a:ln>
+        </p:spPr>
+        <p:txBody>
+          <a:bodyPr xmlns:a="http://schemas.openxmlformats.org/drawingml/2006/main" lIns="0" tIns="0" rIns="0" bIns="0" anchor="ctr">
+            <a:noAutofit/>
+          </a:bodyPr>
+          <a:lstStyle xmlns:a="http://schemas.openxmlformats.org/drawingml/2006/main"/>
+          <a:p xmlns:a="http://schemas.openxmlformats.org/drawingml/2006/main">
+            <a:pPr algn="l">
+              <a:defRPr sz="1800" b="1">
+                <a:solidFill>
+                  <a:srgbClr val="17202A"/>
+                </a:solidFill>
+                <a:latin typeface="Noto Sans JP"/>
+                <a:ea typeface="Noto Sans JP"/>
+                <a:cs typeface="Noto Sans JP"/>
+              </a:defRPr>
+            </a:pPr>
+            <a:r>
+              <a:rPr sz="1800" b="1">
+                <a:solidFill>
+                  <a:srgbClr val="17202A"/>
+                </a:solidFill>
+                <a:latin typeface="Noto Sans JP"/>
+                <a:ea typeface="Noto Sans JP"/>
+                <a:cs typeface="Noto Sans JP"/>
+              </a:rPr>
+              <a:t>04 今後の展望</a:t>
+            </a:r>
+          </a:p>
+        </p:txBody>
+      </p:sp>
+      <p:sp>
+        <p:nvSpPr>
+          <p:cNvPr id="17" name="summary-body-3">
+            <a:extLst xmlns:a="http://schemas.openxmlformats.org/drawingml/2006/main">
+              <a:ext uri="{FF2B5EF4-FFF2-40B4-BE49-F238E27FC236}">
+                <a16:creationId xmlns:a16="http://schemas.microsoft.com/office/drawing/2014/main" id="{13584FB1-2B82-47CF-AE9D-8C8E2FA200C4}"/>
+              </a:ext>
+            </a:extLst>
+          </p:cNvPr>
+          <p:cNvSpPr>
+            <a:spLocks xmlns:a="http://schemas.openxmlformats.org/drawingml/2006/main" noGrp="1"/>
+          </p:cNvSpPr>
+          <p:nvPr/>
+        </p:nvSpPr>
+        <p:spPr>
+          <a:xfrm xmlns:a="http://schemas.openxmlformats.org/drawingml/2006/main">
+            <a:off x="3293269" y="3457575"/>
+            <a:ext cx="5393531" cy="590550"/>
+          </a:xfrm>
+          <a:prstGeom xmlns:a="http://schemas.openxmlformats.org/drawingml/2006/main" prst="rect">
+            <a:avLst/>
+          </a:prstGeom>
+          <a:noFill xmlns:a="http://schemas.openxmlformats.org/drawingml/2006/main"/>
+          <a:ln xmlns:a="http://schemas.openxmlformats.org/drawingml/2006/main" w="0">
+            <a:noFill/>
+            <a:prstDash val="solid"/>
+          </a:ln>
+        </p:spPr>
+        <p:txBody>
+          <a:bodyPr xmlns:a="http://schemas.openxmlformats.org/drawingml/2006/main" lIns="0" tIns="0" rIns="0" bIns="0" anchor="ctr">
+            <a:noAutofit/>
+          </a:bodyPr>
+          <a:lstStyle xmlns:a="http://schemas.openxmlformats.org/drawingml/2006/main"/>
+          <a:p xmlns:a="http://schemas.openxmlformats.org/drawingml/2006/main">
+            <a:pPr algn="l">
+              <a:defRPr sz="1800" b="0">
+                <a:solidFill>
+                  <a:srgbClr val="17202A"/>
+                </a:solidFill>
+                <a:latin typeface="Noto Sans JP"/>
+                <a:ea typeface="Noto Sans JP"/>
+                <a:cs typeface="Noto Sans JP"/>
+              </a:defRPr>
+            </a:pPr>
+            <a:r>
+              <a:rPr sz="1800" b="0">
+                <a:solidFill>
+                  <a:srgbClr val="17202A"/>
+                </a:solidFill>
+                <a:latin typeface="Noto Sans JP"/>
+                <a:ea typeface="Noto Sans JP"/>
+                <a:cs typeface="Noto Sans JP"/>
+              </a:rPr>
+              <a:t>波形・開始時刻を変え、実機条件で確かめる計画</a:t>
             </a:r>
           </a:p>
         </p:txBody>
@@ -6344,7 +8436,7 @@
     </p:spTree>
     <p:extLst>
       <p:ext uri="{BB962C8B-B14F-4D97-AF65-F5344CB8AC3E}">
-        <p14:creationId xmlns:p14="http://schemas.microsoft.com/office/powerpoint/2010/main" val="1048426452"/>
+        <p14:creationId xmlns:p14="http://schemas.microsoft.com/office/powerpoint/2010/main" val="782993509"/>
       </p:ext>
     </p:extLst>
   </p:cSld>

--- a/assets/visual-reference/cps-layout-reference.pptx
+++ b/assets/visual-reference/cps-layout-reference.pptx
@@ -2,20 +2,21 @@
 <file path=ppt/presentation.xml><?xml version="1.0" encoding="utf-8"?>
 <p:presentation xmlns:p="http://schemas.openxmlformats.org/presentationml/2006/main">
   <p:sldMasterIdLst>
-    <p:sldMasterId xmlns:r="http://schemas.openxmlformats.org/officeDocument/2006/relationships" id="2147483648" r:id="Rc18aa545c2a94a21"/>
+    <p:sldMasterId xmlns:r="http://schemas.openxmlformats.org/officeDocument/2006/relationships" id="2147483648" r:id="R6afb9b5c3b58425d"/>
   </p:sldMasterIdLst>
   <p:notesMasterIdLst>
-    <p:notesMasterId xmlns:r="http://schemas.openxmlformats.org/officeDocument/2006/relationships" r:id="Rcf7b84bf76f64ca9"/>
+    <p:notesMasterId xmlns:r="http://schemas.openxmlformats.org/officeDocument/2006/relationships" r:id="Rfc4ec5d54dd94939"/>
   </p:notesMasterIdLst>
   <p:sldIdLst>
-    <p:sldId xmlns:r="http://schemas.openxmlformats.org/officeDocument/2006/relationships" id="256" r:id="R943dcc4399094e7b"/>
-    <p:sldId xmlns:r="http://schemas.openxmlformats.org/officeDocument/2006/relationships" id="257" r:id="R16c23f193ddc4656"/>
-    <p:sldId xmlns:r="http://schemas.openxmlformats.org/officeDocument/2006/relationships" id="258" r:id="R6d10852720b74c6f"/>
-    <p:sldId xmlns:r="http://schemas.openxmlformats.org/officeDocument/2006/relationships" id="259" r:id="R9fdf8a7445cb4a5e"/>
-    <p:sldId xmlns:r="http://schemas.openxmlformats.org/officeDocument/2006/relationships" id="260" r:id="R0c7d9406ee874110"/>
-    <p:sldId xmlns:r="http://schemas.openxmlformats.org/officeDocument/2006/relationships" id="261" r:id="Rb7dd8bccdd9b41b7"/>
-    <p:sldId xmlns:r="http://schemas.openxmlformats.org/officeDocument/2006/relationships" id="262" r:id="R4dd1aab4351840af"/>
-    <p:sldId xmlns:r="http://schemas.openxmlformats.org/officeDocument/2006/relationships" id="263" r:id="R86b22827111544d9"/>
+    <p:sldId xmlns:r="http://schemas.openxmlformats.org/officeDocument/2006/relationships" id="256" r:id="R04917e5f2fcf4e1b"/>
+    <p:sldId xmlns:r="http://schemas.openxmlformats.org/officeDocument/2006/relationships" id="257" r:id="Rf4282a9494fd4468"/>
+    <p:sldId xmlns:r="http://schemas.openxmlformats.org/officeDocument/2006/relationships" id="258" r:id="R130310c841bc4d1a"/>
+    <p:sldId xmlns:r="http://schemas.openxmlformats.org/officeDocument/2006/relationships" id="259" r:id="R643b5968f54f4242"/>
+    <p:sldId xmlns:r="http://schemas.openxmlformats.org/officeDocument/2006/relationships" id="260" r:id="R45b75f5ec5b04994"/>
+    <p:sldId xmlns:r="http://schemas.openxmlformats.org/officeDocument/2006/relationships" id="261" r:id="Rdbd1a9ca7a084513"/>
+    <p:sldId xmlns:r="http://schemas.openxmlformats.org/officeDocument/2006/relationships" id="262" r:id="Rb530451ed46c4dd8"/>
+    <p:sldId xmlns:r="http://schemas.openxmlformats.org/officeDocument/2006/relationships" id="263" r:id="R92e6d0580f4d4b71"/>
+    <p:sldId xmlns:r="http://schemas.openxmlformats.org/officeDocument/2006/relationships" id="264" r:id="R74cedbfa1c294bc1"/>
   </p:sldIdLst>
   <p:sldSz cx="9144000" cy="5143500"/>
   <p:notesSz cx="6858000" cy="9144000"/>
@@ -449,7 +450,7 @@
           <a:lstStyle xmlns:a="http://schemas.openxmlformats.org/drawingml/2006/main"/>
           <a:p xmlns:a="http://schemas.openxmlformats.org/drawingml/2006/main">
             <a:r>
-              <a:t>架空研究の教材。全数値は assets/example-source.org の合成データであり、実測値ではない。CPS LABの視覚スタイルと編集可能性を示す8種類のレイアウト見本。表紙と目次の素材枠は配置見本であり、実証写真や実動画ではない。研究発表の推奨枚数・章配分ではない。</a:t>
+              <a:t>架空研究の教材。全数値は assets/example-source.org の合成データであり、実測値ではない。CPS LABの視覚スタイルと編集可能性を示す9種類のレイアウト見本。表紙と目次の素材枠は配置見本であり、実証写真や実動画ではない。研究発表の推奨枚数・章配分ではない。</a:t>
             </a:r>
           </a:p>
         </p:txBody>
@@ -589,7 +590,7 @@
           <a:lstStyle xmlns:a="http://schemas.openxmlformats.org/drawingml/2006/main"/>
           <a:p xmlns:a="http://schemas.openxmlformats.org/drawingml/2006/main">
             <a:r>
-              <a:t>架空研究の教材。全数値は assets/example-source.org の合成データであり、実測値ではない。CPS LABの視覚スタイルと編集可能性を示す8種類のレイアウト見本。表紙と目次の素材枠は配置見本であり、実証写真や実動画ではない。研究発表の推奨枚数・章配分ではない。</a:t>
+              <a:t>架空研究の教材。全数値は assets/example-source.org の合成データであり、実測値ではない。CPS LABの視覚スタイルと編集可能性を示す9種類のレイアウト見本。表紙と目次の素材枠は配置見本であり、実証写真や実動画ではない。研究発表の推奨枚数・章配分ではない。</a:t>
             </a:r>
           </a:p>
         </p:txBody>
@@ -659,7 +660,7 @@
           <a:lstStyle xmlns:a="http://schemas.openxmlformats.org/drawingml/2006/main"/>
           <a:p xmlns:a="http://schemas.openxmlformats.org/drawingml/2006/main">
             <a:r>
-              <a:t>架空研究の教材。全数値は assets/example-source.org の合成データであり、実測値ではない。CPS LABの視覚スタイルと編集可能性を示す8種類のレイアウト見本。表紙と目次の素材枠は配置見本であり、実証写真や実動画ではない。研究発表の推奨枚数・章配分ではない。</a:t>
+              <a:t>架空研究の教材。全数値は assets/example-source.org の合成データであり、実測値ではない。CPS LABの視覚スタイルと編集可能性を示す9種類のレイアウト見本。表紙と目次の素材枠は配置見本であり、実証写真や実動画ではない。研究発表の推奨枚数・章配分ではない。</a:t>
             </a:r>
           </a:p>
         </p:txBody>
@@ -729,7 +730,12 @@
           <a:lstStyle xmlns:a="http://schemas.openxmlformats.org/drawingml/2006/main"/>
           <a:p xmlns:a="http://schemas.openxmlformats.org/drawingml/2006/main">
             <a:r>
-              <a:t>架空研究の教材。全数値は assets/example-source.org の合成データであり、実測値ではない。CPS LABの視覚スタイルと編集可能性を示す8種類のレイアウト見本。表紙と目次の素材枠は配置見本であり、実証写真や実動画ではない。研究発表の推奨枚数・章配分ではない。</a:t>
+              <a:t>架空研究・合成データの教材。実測ではない。表紙・目次の素材枠は配置見本。</a:t>
+            </a:r>
+          </a:p>
+          <a:p xmlns:a="http://schemas.openxmlformats.org/drawingml/2006/main">
+            <a:r>
+              <a:t>[1] assets/example-source.org。番号は全ページ共通。この教材入力は実在論文ではない。</a:t>
             </a:r>
           </a:p>
         </p:txBody>
@@ -799,7 +805,12 @@
           <a:lstStyle xmlns:a="http://schemas.openxmlformats.org/drawingml/2006/main"/>
           <a:p xmlns:a="http://schemas.openxmlformats.org/drawingml/2006/main">
             <a:r>
-              <a:t>架空研究の教材。全数値は assets/example-source.org の合成データであり、実測値ではない。CPS LABの視覚スタイルと編集可能性を示す8種類のレイアウト見本。表紙と目次の素材枠は配置見本であり、実証写真や実動画ではない。研究発表の推奨枚数・章配分ではない。</a:t>
+              <a:t>架空研究・合成データの教材。実測ではない。表紙・目次の素材枠は配置見本。</a:t>
+            </a:r>
+          </a:p>
+          <a:p xmlns:a="http://schemas.openxmlformats.org/drawingml/2006/main">
+            <a:r>
+              <a:t>[1] assets/example-source.org。番号は全ページ共通。この教材入力は実在論文ではない。</a:t>
             </a:r>
           </a:p>
         </p:txBody>
@@ -869,7 +880,12 @@
           <a:lstStyle xmlns:a="http://schemas.openxmlformats.org/drawingml/2006/main"/>
           <a:p xmlns:a="http://schemas.openxmlformats.org/drawingml/2006/main">
             <a:r>
-              <a:t>架空研究の教材。全数値は assets/example-source.org の合成データであり、実測値ではない。CPS LABの視覚スタイルと編集可能性を示す8種類のレイアウト見本。表紙と目次の素材枠は配置見本であり、実証写真や実動画ではない。研究発表の推奨枚数・章配分ではない。</a:t>
+              <a:t>架空研究・合成データの教材。実測ではない。表紙・目次の素材枠は配置見本。</a:t>
+            </a:r>
+          </a:p>
+          <a:p xmlns:a="http://schemas.openxmlformats.org/drawingml/2006/main">
+            <a:r>
+              <a:t>[1] assets/example-source.org。番号は全ページ共通。この教材入力は実在論文ではない。</a:t>
             </a:r>
           </a:p>
         </p:txBody>
@@ -939,7 +955,87 @@
           <a:lstStyle xmlns:a="http://schemas.openxmlformats.org/drawingml/2006/main"/>
           <a:p xmlns:a="http://schemas.openxmlformats.org/drawingml/2006/main">
             <a:r>
-              <a:t>架空研究の教材。全数値は assets/example-source.org の合成データであり、実測値ではない。CPS LABの視覚スタイルと編集可能性を示す8種類のレイアウト見本。表紙と目次の素材枠は配置見本であり、実証写真や実動画ではない。研究発表の推奨枚数・章配分ではない。</a:t>
+              <a:t>架空研究・合成データの教材。実測ではない。表紙・目次の素材枠は配置見本。</a:t>
+            </a:r>
+          </a:p>
+          <a:p xmlns:a="http://schemas.openxmlformats.org/drawingml/2006/main">
+            <a:r>
+              <a:t>[1] assets/example-source.org。番号は全ページ共通。この教材入力は実在論文ではない。</a:t>
+            </a:r>
+          </a:p>
+        </p:txBody>
+      </p:sp>
+      <p:sp>
+        <p:nvSpPr>
+          <p:cNvPr id="4" name="Slide Number Placeholder 3"/>
+          <p:cNvSpPr>
+            <a:spLocks xmlns:a="http://schemas.openxmlformats.org/drawingml/2006/main" noGrp="1"/>
+          </p:cNvSpPr>
+          <p:nvPr>
+            <p:ph type="sldNum" idx="5"/>
+          </p:nvPr>
+        </p:nvSpPr>
+        <p:spPr/>
+        <p:txBody>
+          <a:bodyPr xmlns:a="http://schemas.openxmlformats.org/drawingml/2006/main"/>
+          <a:lstStyle xmlns:a="http://schemas.openxmlformats.org/drawingml/2006/main"/>
+          <a:p xmlns:a="http://schemas.openxmlformats.org/drawingml/2006/main"/>
+        </p:txBody>
+      </p:sp>
+    </p:spTree>
+  </p:cSld>
+  <p:clrMapOvr>
+    <a:masterClrMapping xmlns:a="http://schemas.openxmlformats.org/drawingml/2006/main"/>
+  </p:clrMapOvr>
+</p:notes>
+</file>
+
+<file path=ppt/notesSlides/notesSlide9.xml><?xml version="1.0" encoding="utf-8"?>
+<p:notes xmlns:p="http://schemas.openxmlformats.org/presentationml/2006/main">
+  <p:cSld>
+    <p:spTree>
+      <p:nvGrpSpPr>
+        <p:cNvPr id="1" name=""/>
+        <p:cNvGrpSpPr/>
+        <p:nvPr/>
+      </p:nvGrpSpPr>
+      <p:grpSpPr>
+        <a:xfrm xmlns:a="http://schemas.openxmlformats.org/drawingml/2006/main"/>
+      </p:grpSpPr>
+      <p:sp>
+        <p:nvSpPr>
+          <p:cNvPr id="2" name="Slide Image Placeholder 1"/>
+          <p:cNvSpPr>
+            <a:spLocks xmlns:a="http://schemas.openxmlformats.org/drawingml/2006/main" noGrp="1"/>
+          </p:cNvSpPr>
+          <p:nvPr>
+            <p:ph type="sldImg" idx="0"/>
+          </p:nvPr>
+        </p:nvSpPr>
+        <p:spPr/>
+      </p:sp>
+      <p:sp>
+        <p:nvSpPr>
+          <p:cNvPr id="3" name="Notes Placeholder 2"/>
+          <p:cNvSpPr>
+            <a:spLocks xmlns:a="http://schemas.openxmlformats.org/drawingml/2006/main" noGrp="1"/>
+          </p:cNvSpPr>
+          <p:nvPr>
+            <p:ph type="body" idx="1"/>
+          </p:nvPr>
+        </p:nvSpPr>
+        <p:spPr/>
+        <p:txBody>
+          <a:bodyPr xmlns:a="http://schemas.openxmlformats.org/drawingml/2006/main"/>
+          <a:lstStyle xmlns:a="http://schemas.openxmlformats.org/drawingml/2006/main"/>
+          <a:p xmlns:a="http://schemas.openxmlformats.org/drawingml/2006/main">
+            <a:r>
+              <a:t>架空研究・合成データの教材。実測ではない。表紙・目次の素材枠は配置見本。</a:t>
+            </a:r>
+          </a:p>
+          <a:p xmlns:a="http://schemas.openxmlformats.org/drawingml/2006/main">
+            <a:r>
+              <a:t>[1] assets/example-source.org。番号は全ページ共通。この教材入力は実在論文ではない。</a:t>
             </a:r>
           </a:p>
         </p:txBody>
@@ -1007,7 +1103,7 @@
   </p:cSld>
   <p:clrMap bg1="lt1" tx1="dk1" bg2="lt2" tx2="dk2" accent1="accent1" accent2="accent2" accent3="accent3" accent4="accent4" accent5="accent5" accent6="accent6" hlink="hlink" folHlink="folHlink"/>
   <p:sldLayoutIdLst>
-    <p:sldLayoutId xmlns:r="http://schemas.openxmlformats.org/officeDocument/2006/relationships" id="2147483649" r:id="R90b1d23d514a4ad9"/>
+    <p:sldLayoutId xmlns:r="http://schemas.openxmlformats.org/officeDocument/2006/relationships" id="2147483649" r:id="R0a5eeb090a844a8f"/>
   </p:sldLayoutIdLst>
   <p:txStyles>
     <p:titleStyle>
@@ -1667,7 +1763,7 @@
           </c:tx>
           <c:spPr>
             <a:solidFill xmlns:a="http://schemas.openxmlformats.org/drawingml/2006/main">
-              <a:srgbClr val="9BBB59"/>
+              <a:srgbClr val="38761D"/>
             </a:solidFill>
             <a:ln xmlns:a="http://schemas.openxmlformats.org/drawingml/2006/main" w="0">
               <a:noFill/>
@@ -2010,7 +2106,7 @@
           <p:cNvPr id="11" name="footer-line">
             <a:extLst xmlns:a="http://schemas.openxmlformats.org/drawingml/2006/main">
               <a:ext uri="{FF2B5EF4-FFF2-40B4-BE49-F238E27FC236}">
-                <a16:creationId xmlns:a16="http://schemas.microsoft.com/office/drawing/2014/main" id="{CB95B73E-2B84-4147-AE56-E21A8922967D}"/>
+                <a16:creationId xmlns:a16="http://schemas.microsoft.com/office/drawing/2014/main" id="{447434D0-0A16-4AE6-A306-9318B1D8D5A9}"/>
               </a:ext>
             </a:extLst>
           </p:cNvPr>
@@ -2045,7 +2141,7 @@
           <p:nvPr/>
         </p:nvPicPr>
         <p:blipFill>
-          <a:blip xmlns:r="http://schemas.openxmlformats.org/officeDocument/2006/relationships" xmlns:a="http://schemas.openxmlformats.org/drawingml/2006/main" r:embed="R2716f58cadda4149"/>
+          <a:blip xmlns:r="http://schemas.openxmlformats.org/officeDocument/2006/relationships" xmlns:a="http://schemas.openxmlformats.org/drawingml/2006/main" r:embed="R3934e8ef289f42c0"/>
           <a:stretch xmlns:a="http://schemas.openxmlformats.org/drawingml/2006/main"/>
         </p:blipFill>
         <p:spPr>
@@ -2063,7 +2159,7 @@
           <p:cNvPr id="3" name="page">
             <a:extLst xmlns:a="http://schemas.openxmlformats.org/drawingml/2006/main">
               <a:ext uri="{FF2B5EF4-FFF2-40B4-BE49-F238E27FC236}">
-                <a16:creationId xmlns:a16="http://schemas.microsoft.com/office/drawing/2014/main" id="{3D0DA967-8776-43FA-BA4D-D6C959202435}"/>
+                <a16:creationId xmlns:a16="http://schemas.microsoft.com/office/drawing/2014/main" id="{2E8E3E4B-7AE4-4134-9F95-8CEA951F83CA}"/>
               </a:ext>
             </a:extLst>
           </p:cNvPr>
@@ -2121,7 +2217,7 @@
           <p:cNvPr id="4" name="fictional-disclosure">
             <a:extLst xmlns:a="http://schemas.openxmlformats.org/drawingml/2006/main">
               <a:ext uri="{FF2B5EF4-FFF2-40B4-BE49-F238E27FC236}">
-                <a16:creationId xmlns:a16="http://schemas.microsoft.com/office/drawing/2014/main" id="{577DD361-D153-44CF-80D8-BD6D7D05E288}"/>
+                <a16:creationId xmlns:a16="http://schemas.microsoft.com/office/drawing/2014/main" id="{5ACED371-0E27-4FB4-8B98-295AAFD8FBC1}"/>
               </a:ext>
             </a:extLst>
           </p:cNvPr>
@@ -2179,7 +2275,7 @@
           <p:cNvPr id="5" name="venue">
             <a:extLst xmlns:a="http://schemas.openxmlformats.org/drawingml/2006/main">
               <a:ext uri="{FF2B5EF4-FFF2-40B4-BE49-F238E27FC236}">
-                <a16:creationId xmlns:a16="http://schemas.microsoft.com/office/drawing/2014/main" id="{6DE985CE-1AA9-447B-BDCD-513DE1D7D2BB}"/>
+                <a16:creationId xmlns:a16="http://schemas.microsoft.com/office/drawing/2014/main" id="{5503702E-2B66-4979-A8C2-331BBB2A4247}"/>
               </a:ext>
             </a:extLst>
           </p:cNvPr>
@@ -2237,7 +2333,7 @@
           <p:cNvPr id="6" name="topic">
             <a:extLst xmlns:a="http://schemas.openxmlformats.org/drawingml/2006/main">
               <a:ext uri="{FF2B5EF4-FFF2-40B4-BE49-F238E27FC236}">
-                <a16:creationId xmlns:a16="http://schemas.microsoft.com/office/drawing/2014/main" id="{227A8B3B-4772-427B-9B28-CB9ED5338450}"/>
+                <a16:creationId xmlns:a16="http://schemas.microsoft.com/office/drawing/2014/main" id="{C773E99D-9C03-4553-BA3D-4CA7A42226F4}"/>
               </a:ext>
             </a:extLst>
           </p:cNvPr>
@@ -2320,7 +2416,7 @@
           <p:cNvPr id="7" name="affiliation">
             <a:extLst xmlns:a="http://schemas.openxmlformats.org/drawingml/2006/main">
               <a:ext uri="{FF2B5EF4-FFF2-40B4-BE49-F238E27FC236}">
-                <a16:creationId xmlns:a16="http://schemas.microsoft.com/office/drawing/2014/main" id="{1F8C97F8-F52A-4CF1-BDFE-C85C173765FD}"/>
+                <a16:creationId xmlns:a16="http://schemas.microsoft.com/office/drawing/2014/main" id="{23FA7F74-CCA0-4150-96B8-EE20A375FD5C}"/>
               </a:ext>
             </a:extLst>
           </p:cNvPr>
@@ -2380,7 +2476,7 @@
           <p:cNvPr id="8" name="author">
             <a:extLst xmlns:a="http://schemas.openxmlformats.org/drawingml/2006/main">
               <a:ext uri="{FF2B5EF4-FFF2-40B4-BE49-F238E27FC236}">
-                <a16:creationId xmlns:a16="http://schemas.microsoft.com/office/drawing/2014/main" id="{8380248D-7040-4425-AF25-5C59B3747096}"/>
+                <a16:creationId xmlns:a16="http://schemas.microsoft.com/office/drawing/2014/main" id="{6EA0A61A-A57F-421E-A342-C45BE5955F68}"/>
               </a:ext>
             </a:extLst>
           </p:cNvPr>
@@ -2440,7 +2536,7 @@
           <p:cNvPr id="9" name="research-photo-slot">
             <a:extLst xmlns:a="http://schemas.openxmlformats.org/drawingml/2006/main">
               <a:ext uri="{FF2B5EF4-FFF2-40B4-BE49-F238E27FC236}">
-                <a16:creationId xmlns:a16="http://schemas.microsoft.com/office/drawing/2014/main" id="{808B4461-CC79-4D8C-8FFB-A4EF2F6D5B04}"/>
+                <a16:creationId xmlns:a16="http://schemas.microsoft.com/office/drawing/2014/main" id="{666C34DE-26AC-4522-B99E-6072FB806CB0}"/>
               </a:ext>
             </a:extLst>
           </p:cNvPr>
@@ -2473,7 +2569,7 @@
           <p:cNvPr id="10" name="photo-slot-label">
             <a:extLst xmlns:a="http://schemas.openxmlformats.org/drawingml/2006/main">
               <a:ext uri="{FF2B5EF4-FFF2-40B4-BE49-F238E27FC236}">
-                <a16:creationId xmlns:a16="http://schemas.microsoft.com/office/drawing/2014/main" id="{9564AFCA-CAF9-49D4-BF15-B9F5FCC2CBF5}"/>
+                <a16:creationId xmlns:a16="http://schemas.microsoft.com/office/drawing/2014/main" id="{888B936E-6798-420F-97D5-0BC422F5E839}"/>
               </a:ext>
             </a:extLst>
           </p:cNvPr>
@@ -2552,7 +2648,7 @@
     </p:spTree>
     <p:extLst>
       <p:ext uri="{BB962C8B-B14F-4D97-AF65-F5344CB8AC3E}">
-        <p14:creationId xmlns:p14="http://schemas.microsoft.com/office/powerpoint/2010/main" val="2008804926"/>
+        <p14:creationId xmlns:p14="http://schemas.microsoft.com/office/powerpoint/2010/main" val="1550800608"/>
       </p:ext>
     </p:extLst>
   </p:cSld>
@@ -2580,10 +2676,10 @@
       </p:grpSpPr>
       <p:sp>
         <p:nvSpPr>
-          <p:cNvPr id="7" name="venue">
-            <a:extLst xmlns:a="http://schemas.openxmlformats.org/drawingml/2006/main">
-              <a:ext uri="{FF2B5EF4-FFF2-40B4-BE49-F238E27FC236}">
-                <a16:creationId xmlns:a16="http://schemas.microsoft.com/office/drawing/2014/main" id="{57FEA83C-DC93-46E7-A572-1CA406029DC1}"/>
+          <p:cNvPr id="8" name="venue">
+            <a:extLst xmlns:a="http://schemas.openxmlformats.org/drawingml/2006/main">
+              <a:ext uri="{FF2B5EF4-FFF2-40B4-BE49-F238E27FC236}">
+                <a16:creationId xmlns:a16="http://schemas.microsoft.com/office/drawing/2014/main" id="{4C6719A6-1271-4569-B6C6-EE9DC3B7AB54}"/>
               </a:ext>
             </a:extLst>
           </p:cNvPr>
@@ -2641,7 +2737,7 @@
           <p:cNvPr id="2" name="topic">
             <a:extLst xmlns:a="http://schemas.openxmlformats.org/drawingml/2006/main">
               <a:ext uri="{FF2B5EF4-FFF2-40B4-BE49-F238E27FC236}">
-                <a16:creationId xmlns:a16="http://schemas.microsoft.com/office/drawing/2014/main" id="{559551ED-FCFE-4C51-93E7-8A8FC99D459A}"/>
+                <a16:creationId xmlns:a16="http://schemas.microsoft.com/office/drawing/2014/main" id="{DFC5A7EC-187B-4BDC-97FD-BC06B4E22777}"/>
               </a:ext>
             </a:extLst>
           </p:cNvPr>
@@ -2722,7 +2818,7 @@
           <p:cNvPr id="3" name="affiliation">
             <a:extLst xmlns:a="http://schemas.openxmlformats.org/drawingml/2006/main">
               <a:ext uri="{FF2B5EF4-FFF2-40B4-BE49-F238E27FC236}">
-                <a16:creationId xmlns:a16="http://schemas.microsoft.com/office/drawing/2014/main" id="{8A6FEB10-725A-4963-ADD6-89CFFC050E2E}"/>
+                <a16:creationId xmlns:a16="http://schemas.microsoft.com/office/drawing/2014/main" id="{E384D41C-E821-43E4-88B0-264E6F9FD803}"/>
               </a:ext>
             </a:extLst>
           </p:cNvPr>
@@ -2780,7 +2876,7 @@
           <p:cNvPr id="4" name="author">
             <a:extLst xmlns:a="http://schemas.openxmlformats.org/drawingml/2006/main">
               <a:ext uri="{FF2B5EF4-FFF2-40B4-BE49-F238E27FC236}">
-                <a16:creationId xmlns:a16="http://schemas.microsoft.com/office/drawing/2014/main" id="{266AE2F0-331B-4E57-AE98-1291250D0D4A}"/>
+                <a16:creationId xmlns:a16="http://schemas.microsoft.com/office/drawing/2014/main" id="{A2F63464-6598-48DD-8352-6925B0D8121E}"/>
               </a:ext>
             </a:extLst>
           </p:cNvPr>
@@ -2838,7 +2934,7 @@
           <p:cNvPr id="5" name="media-placeholder">
             <a:extLst xmlns:a="http://schemas.openxmlformats.org/drawingml/2006/main">
               <a:ext uri="{FF2B5EF4-FFF2-40B4-BE49-F238E27FC236}">
-                <a16:creationId xmlns:a16="http://schemas.microsoft.com/office/drawing/2014/main" id="{0C953390-7DFD-4764-BE8A-4196891164BC}"/>
+                <a16:creationId xmlns:a16="http://schemas.microsoft.com/office/drawing/2014/main" id="{EDE6825C-DA90-4467-8D3C-0FCB0CE10A92}"/>
               </a:ext>
             </a:extLst>
           </p:cNvPr>
@@ -2896,19 +2992,19 @@
           <p:cNvPr id="6" name="fictional-disclosure">
             <a:extLst xmlns:a="http://schemas.openxmlformats.org/drawingml/2006/main">
               <a:ext uri="{FF2B5EF4-FFF2-40B4-BE49-F238E27FC236}">
-                <a16:creationId xmlns:a16="http://schemas.microsoft.com/office/drawing/2014/main" id="{482796F1-EB8F-402D-8484-56E87D0BAC95}"/>
-              </a:ext>
-            </a:extLst>
-          </p:cNvPr>
-          <p:cNvSpPr>
-            <a:spLocks xmlns:a="http://schemas.openxmlformats.org/drawingml/2006/main" noGrp="1"/>
-          </p:cNvSpPr>
-          <p:nvPr/>
-        </p:nvSpPr>
-        <p:spPr>
-          <a:xfrm xmlns:a="http://schemas.openxmlformats.org/drawingml/2006/main">
-            <a:off x="457200" y="4714875"/>
-            <a:ext cx="8229600" cy="247650"/>
+                <a16:creationId xmlns:a16="http://schemas.microsoft.com/office/drawing/2014/main" id="{16DAFF6A-A321-4223-A673-1D158C9D84FF}"/>
+              </a:ext>
+            </a:extLst>
+          </p:cNvPr>
+          <p:cNvSpPr>
+            <a:spLocks xmlns:a="http://schemas.openxmlformats.org/drawingml/2006/main" noGrp="1"/>
+          </p:cNvSpPr>
+          <p:nvPr/>
+        </p:nvSpPr>
+        <p:spPr>
+          <a:xfrm xmlns:a="http://schemas.openxmlformats.org/drawingml/2006/main">
+            <a:off x="1428750" y="4714875"/>
+            <a:ext cx="4762500" cy="247650"/>
           </a:xfrm>
           <a:prstGeom xmlns:a="http://schemas.openxmlformats.org/drawingml/2006/main" prst="rect">
             <a:avLst/>
@@ -2949,10 +3045,68 @@
           </a:p>
         </p:txBody>
       </p:sp>
+      <p:sp>
+        <p:nvSpPr>
+          <p:cNvPr id="7" name="page">
+            <a:extLst xmlns:a="http://schemas.openxmlformats.org/drawingml/2006/main">
+              <a:ext uri="{FF2B5EF4-FFF2-40B4-BE49-F238E27FC236}">
+                <a16:creationId xmlns:a16="http://schemas.microsoft.com/office/drawing/2014/main" id="{1FF7DC57-CEF9-430C-BA46-72BEF788F16C}"/>
+              </a:ext>
+            </a:extLst>
+          </p:cNvPr>
+          <p:cNvSpPr>
+            <a:spLocks xmlns:a="http://schemas.openxmlformats.org/drawingml/2006/main" noGrp="1"/>
+          </p:cNvSpPr>
+          <p:nvPr/>
+        </p:nvSpPr>
+        <p:spPr>
+          <a:xfrm xmlns:a="http://schemas.openxmlformats.org/drawingml/2006/main">
+            <a:off x="6801307" y="4767682"/>
+            <a:ext cx="2133295" cy="274320"/>
+          </a:xfrm>
+          <a:prstGeom xmlns:a="http://schemas.openxmlformats.org/drawingml/2006/main" prst="rect">
+            <a:avLst/>
+          </a:prstGeom>
+          <a:noFill xmlns:a="http://schemas.openxmlformats.org/drawingml/2006/main"/>
+          <a:ln xmlns:a="http://schemas.openxmlformats.org/drawingml/2006/main" w="0">
+            <a:noFill/>
+            <a:prstDash val="solid"/>
+          </a:ln>
+        </p:spPr>
+        <p:txBody>
+          <a:bodyPr xmlns:a="http://schemas.openxmlformats.org/drawingml/2006/main" lIns="0" tIns="0" rIns="0" bIns="0" anchor="ctr">
+            <a:noAutofit/>
+          </a:bodyPr>
+          <a:lstStyle xmlns:a="http://schemas.openxmlformats.org/drawingml/2006/main"/>
+          <a:p xmlns:a="http://schemas.openxmlformats.org/drawingml/2006/main">
+            <a:pPr algn="r">
+              <a:defRPr sz="1400" b="0">
+                <a:solidFill>
+                  <a:srgbClr val="FFFFFF"/>
+                </a:solidFill>
+                <a:latin typeface="Arial"/>
+                <a:ea typeface="Arial"/>
+                <a:cs typeface="Arial"/>
+              </a:defRPr>
+            </a:pPr>
+            <a:r>
+              <a:rPr sz="1400" b="0">
+                <a:solidFill>
+                  <a:srgbClr val="FFFFFF"/>
+                </a:solidFill>
+                <a:latin typeface="Arial"/>
+                <a:ea typeface="Arial"/>
+                <a:cs typeface="Arial"/>
+              </a:rPr>
+              <a:t>2</a:t>
+            </a:r>
+          </a:p>
+        </p:txBody>
+      </p:sp>
     </p:spTree>
     <p:extLst>
       <p:ext uri="{BB962C8B-B14F-4D97-AF65-F5344CB8AC3E}">
-        <p14:creationId xmlns:p14="http://schemas.microsoft.com/office/powerpoint/2010/main" val="1834029137"/>
+        <p14:creationId xmlns:p14="http://schemas.microsoft.com/office/powerpoint/2010/main" val="1453211732"/>
       </p:ext>
     </p:extLst>
   </p:cSld>
@@ -2980,10 +3134,10 @@
       </p:grpSpPr>
       <p:sp>
         <p:nvSpPr>
-          <p:cNvPr id="22" name="footer-line">
-            <a:extLst xmlns:a="http://schemas.openxmlformats.org/drawingml/2006/main">
-              <a:ext uri="{FF2B5EF4-FFF2-40B4-BE49-F238E27FC236}">
-                <a16:creationId xmlns:a16="http://schemas.microsoft.com/office/drawing/2014/main" id="{A0DBE7AB-4E8B-4F20-88FB-0155156651CF}"/>
+          <p:cNvPr id="24" name="footer-line">
+            <a:extLst xmlns:a="http://schemas.openxmlformats.org/drawingml/2006/main">
+              <a:ext uri="{FF2B5EF4-FFF2-40B4-BE49-F238E27FC236}">
+                <a16:creationId xmlns:a16="http://schemas.microsoft.com/office/drawing/2014/main" id="{CD8DCBF0-DCB5-442F-92BB-E721B18E57D5}"/>
               </a:ext>
             </a:extLst>
           </p:cNvPr>
@@ -3011,14 +3165,14 @@
       </p:sp>
       <p:pic>
         <p:nvPicPr>
-          <p:cNvPr id="23" name=""/>
+          <p:cNvPr id="25" name=""/>
           <p:cNvPicPr>
             <a:picLocks xmlns:a="http://schemas.openxmlformats.org/drawingml/2006/main" noChangeAspect="1"/>
           </p:cNvPicPr>
           <p:nvPr/>
         </p:nvPicPr>
         <p:blipFill>
-          <a:blip xmlns:r="http://schemas.openxmlformats.org/officeDocument/2006/relationships" xmlns:a="http://schemas.openxmlformats.org/drawingml/2006/main" r:embed="R33580afb30754834"/>
+          <a:blip xmlns:r="http://schemas.openxmlformats.org/officeDocument/2006/relationships" xmlns:a="http://schemas.openxmlformats.org/drawingml/2006/main" r:embed="Rfc32e06682b64dba"/>
           <a:stretch xmlns:a="http://schemas.openxmlformats.org/drawingml/2006/main"/>
         </p:blipFill>
         <p:spPr>
@@ -3036,7 +3190,7 @@
           <p:cNvPr id="3" name="page">
             <a:extLst xmlns:a="http://schemas.openxmlformats.org/drawingml/2006/main">
               <a:ext uri="{FF2B5EF4-FFF2-40B4-BE49-F238E27FC236}">
-                <a16:creationId xmlns:a16="http://schemas.microsoft.com/office/drawing/2014/main" id="{53B5B50C-30F8-47F6-AC22-DC1A1B11F9B1}"/>
+                <a16:creationId xmlns:a16="http://schemas.microsoft.com/office/drawing/2014/main" id="{925ECE44-CA86-4CB9-813A-A4814E8443F3}"/>
               </a:ext>
             </a:extLst>
           </p:cNvPr>
@@ -3094,7 +3248,7 @@
           <p:cNvPr id="4" name="fictional-disclosure">
             <a:extLst xmlns:a="http://schemas.openxmlformats.org/drawingml/2006/main">
               <a:ext uri="{FF2B5EF4-FFF2-40B4-BE49-F238E27FC236}">
-                <a16:creationId xmlns:a16="http://schemas.microsoft.com/office/drawing/2014/main" id="{F82C15AF-0C53-494E-8878-DB2DDB09159A}"/>
+                <a16:creationId xmlns:a16="http://schemas.microsoft.com/office/drawing/2014/main" id="{5A169156-55AC-404A-B66C-8ECCA487A897}"/>
               </a:ext>
             </a:extLst>
           </p:cNvPr>
@@ -3149,10 +3303,10 @@
       </p:sp>
       <p:sp>
         <p:nvSpPr>
-          <p:cNvPr id="5" name="title">
-            <a:extLst xmlns:a="http://schemas.openxmlformats.org/drawingml/2006/main">
-              <a:ext uri="{FF2B5EF4-FFF2-40B4-BE49-F238E27FC236}">
-                <a16:creationId xmlns:a16="http://schemas.microsoft.com/office/drawing/2014/main" id="{DF31E601-1B2E-40B8-8FD7-310BCB90F5EF}"/>
+          <p:cNvPr id="5" name="running-chapter-3">
+            <a:extLst xmlns:a="http://schemas.openxmlformats.org/drawingml/2006/main">
+              <a:ext uri="{FF2B5EF4-FFF2-40B4-BE49-F238E27FC236}">
+                <a16:creationId xmlns:a16="http://schemas.microsoft.com/office/drawing/2014/main" id="{B6797448-1DEE-4EB3-B191-90C49EDA03D0}"/>
               </a:ext>
             </a:extLst>
           </p:cNvPr>
@@ -3164,7 +3318,7 @@
         <p:spPr>
           <a:xfrm xmlns:a="http://schemas.openxmlformats.org/drawingml/2006/main">
             <a:off x="457200" y="109728"/>
-            <a:ext cx="8229600" cy="400050"/>
+            <a:ext cx="2560320" cy="304800"/>
           </a:xfrm>
           <a:prstGeom xmlns:a="http://schemas.openxmlformats.org/drawingml/2006/main" prst="rect">
             <a:avLst/>
@@ -3182,19 +3336,19 @@
           <a:lstStyle xmlns:a="http://schemas.openxmlformats.org/drawingml/2006/main"/>
           <a:p xmlns:a="http://schemas.openxmlformats.org/drawingml/2006/main">
             <a:pPr algn="l">
-              <a:defRPr sz="2700" b="1">
-                <a:solidFill>
-                  <a:srgbClr val="17202A"/>
-                </a:solidFill>
-                <a:latin typeface="Noto Sans JP"/>
-                <a:ea typeface="Noto Sans JP"/>
-                <a:cs typeface="Noto Sans JP"/>
-              </a:defRPr>
-            </a:pPr>
-            <a:r>
-              <a:rPr sz="2700" b="1">
-                <a:solidFill>
-                  <a:srgbClr val="17202A"/>
+              <a:defRPr sz="1200" b="0">
+                <a:solidFill>
+                  <a:srgbClr val="38761D"/>
+                </a:solidFill>
+                <a:latin typeface="Noto Sans JP"/>
+                <a:ea typeface="Noto Sans JP"/>
+                <a:cs typeface="Noto Sans JP"/>
+              </a:defRPr>
+            </a:pPr>
+            <a:r>
+              <a:rPr sz="1200" b="0">
+                <a:solidFill>
+                  <a:srgbClr val="38761D"/>
                 </a:solidFill>
                 <a:latin typeface="Noto Sans JP"/>
                 <a:ea typeface="Noto Sans JP"/>
@@ -3207,22 +3361,22 @@
       </p:sp>
       <p:sp>
         <p:nvSpPr>
-          <p:cNvPr id="6" name="message">
-            <a:extLst xmlns:a="http://schemas.openxmlformats.org/drawingml/2006/main">
-              <a:ext uri="{FF2B5EF4-FFF2-40B4-BE49-F238E27FC236}">
-                <a16:creationId xmlns:a16="http://schemas.microsoft.com/office/drawing/2014/main" id="{258BFC71-4F7E-45FA-B89F-1D811333B646}"/>
-              </a:ext>
-            </a:extLst>
-          </p:cNvPr>
-          <p:cNvSpPr>
-            <a:spLocks xmlns:a="http://schemas.openxmlformats.org/drawingml/2006/main" noGrp="1"/>
-          </p:cNvSpPr>
-          <p:nvPr/>
-        </p:nvSpPr>
-        <p:spPr>
-          <a:xfrm xmlns:a="http://schemas.openxmlformats.org/drawingml/2006/main">
-            <a:off x="457200" y="621792"/>
-            <a:ext cx="8229600" cy="694944"/>
+          <p:cNvPr id="6" name="running-title-3">
+            <a:extLst xmlns:a="http://schemas.openxmlformats.org/drawingml/2006/main">
+              <a:ext uri="{FF2B5EF4-FFF2-40B4-BE49-F238E27FC236}">
+                <a16:creationId xmlns:a16="http://schemas.microsoft.com/office/drawing/2014/main" id="{28BC48D8-73E4-4DAA-8580-D8BC5635A18A}"/>
+              </a:ext>
+            </a:extLst>
+          </p:cNvPr>
+          <p:cNvSpPr>
+            <a:spLocks xmlns:a="http://schemas.openxmlformats.org/drawingml/2006/main" noGrp="1"/>
+          </p:cNvSpPr>
+          <p:nvPr/>
+        </p:nvSpPr>
+        <p:spPr>
+          <a:xfrm xmlns:a="http://schemas.openxmlformats.org/drawingml/2006/main">
+            <a:off x="3200400" y="109728"/>
+            <a:ext cx="5486400" cy="304800"/>
           </a:xfrm>
           <a:prstGeom xmlns:a="http://schemas.openxmlformats.org/drawingml/2006/main" prst="rect">
             <a:avLst/>
@@ -3239,48 +3393,48 @@
           </a:bodyPr>
           <a:lstStyle xmlns:a="http://schemas.openxmlformats.org/drawingml/2006/main"/>
           <a:p xmlns:a="http://schemas.openxmlformats.org/drawingml/2006/main">
-            <a:pPr algn="l">
-              <a:defRPr sz="2300" b="1">
-                <a:solidFill>
-                  <a:srgbClr val="17202A"/>
-                </a:solidFill>
-                <a:latin typeface="Noto Sans JP"/>
-                <a:ea typeface="Noto Sans JP"/>
-                <a:cs typeface="Noto Sans JP"/>
-              </a:defRPr>
-            </a:pPr>
-            <a:r>
-              <a:rPr sz="2300" b="1">
-                <a:solidFill>
-                  <a:srgbClr val="17202A"/>
-                </a:solidFill>
-                <a:latin typeface="Noto Sans JP"/>
-                <a:ea typeface="Noto Sans JP"/>
-                <a:cs typeface="Noto Sans JP"/>
-              </a:rPr>
-              <a:t>研究のねらい、しくみ、ここまでの結果、今後の展望</a:t>
-            </a:r>
-          </a:p>
-        </p:txBody>
-      </p:sp>
-      <p:sp>
-        <p:nvSpPr>
-          <p:cNvPr id="7" name="toc-label-0">
-            <a:extLst xmlns:a="http://schemas.openxmlformats.org/drawingml/2006/main">
-              <a:ext uri="{FF2B5EF4-FFF2-40B4-BE49-F238E27FC236}">
-                <a16:creationId xmlns:a16="http://schemas.microsoft.com/office/drawing/2014/main" id="{82BE073A-A39D-4763-937D-E15F39ECBD72}"/>
-              </a:ext>
-            </a:extLst>
-          </p:cNvPr>
-          <p:cNvSpPr>
-            <a:spLocks xmlns:a="http://schemas.openxmlformats.org/drawingml/2006/main" noGrp="1"/>
-          </p:cNvSpPr>
-          <p:nvPr/>
-        </p:nvSpPr>
-        <p:spPr>
-          <a:xfrm xmlns:a="http://schemas.openxmlformats.org/drawingml/2006/main">
-            <a:off x="457200" y="1495425"/>
-            <a:ext cx="3886200" cy="352425"/>
+            <a:pPr algn="r">
+              <a:defRPr sz="1200" b="0">
+                <a:solidFill>
+                  <a:srgbClr val="38761D"/>
+                </a:solidFill>
+                <a:latin typeface="Noto Sans JP"/>
+                <a:ea typeface="Noto Sans JP"/>
+                <a:cs typeface="Noto Sans JP"/>
+              </a:defRPr>
+            </a:pPr>
+            <a:r>
+              <a:rPr sz="1200" b="0">
+                <a:solidFill>
+                  <a:srgbClr val="38761D"/>
+                </a:solidFill>
+                <a:latin typeface="Noto Sans JP"/>
+                <a:ea typeface="Noto Sans JP"/>
+                <a:cs typeface="Noto Sans JP"/>
+              </a:rPr>
+              <a:t>室内環境ログの記録間隔</a:t>
+            </a:r>
+          </a:p>
+        </p:txBody>
+      </p:sp>
+      <p:sp>
+        <p:nvSpPr>
+          <p:cNvPr id="7" name="title">
+            <a:extLst xmlns:a="http://schemas.openxmlformats.org/drawingml/2006/main">
+              <a:ext uri="{FF2B5EF4-FFF2-40B4-BE49-F238E27FC236}">
+                <a16:creationId xmlns:a16="http://schemas.microsoft.com/office/drawing/2014/main" id="{322D3E7A-2D8D-499C-B592-E76DA4BC98B4}"/>
+              </a:ext>
+            </a:extLst>
+          </p:cNvPr>
+          <p:cNvSpPr>
+            <a:spLocks xmlns:a="http://schemas.openxmlformats.org/drawingml/2006/main" noGrp="1"/>
+          </p:cNvSpPr>
+          <p:nvPr/>
+        </p:nvSpPr>
+        <p:spPr>
+          <a:xfrm xmlns:a="http://schemas.openxmlformats.org/drawingml/2006/main">
+            <a:off x="457200" y="475488"/>
+            <a:ext cx="8229600" cy="400050"/>
           </a:xfrm>
           <a:prstGeom xmlns:a="http://schemas.openxmlformats.org/drawingml/2006/main" prst="rect">
             <a:avLst/>
@@ -3298,7 +3452,7 @@
           <a:lstStyle xmlns:a="http://schemas.openxmlformats.org/drawingml/2006/main"/>
           <a:p xmlns:a="http://schemas.openxmlformats.org/drawingml/2006/main">
             <a:pPr algn="l">
-              <a:defRPr sz="2100" b="1">
+              <a:defRPr sz="2700" b="1">
                 <a:solidFill>
                   <a:srgbClr val="17202A"/>
                 </a:solidFill>
@@ -3308,7 +3462,7 @@
               </a:defRPr>
             </a:pPr>
             <a:r>
-              <a:rPr sz="2100" b="1">
+              <a:rPr sz="2700" b="1">
                 <a:solidFill>
                   <a:srgbClr val="17202A"/>
                 </a:solidFill>
@@ -3316,6 +3470,122 @@
                 <a:ea typeface="Noto Sans JP"/>
                 <a:cs typeface="Noto Sans JP"/>
               </a:rPr>
+              <a:t>目次</a:t>
+            </a:r>
+          </a:p>
+        </p:txBody>
+      </p:sp>
+      <p:sp>
+        <p:nvSpPr>
+          <p:cNvPr id="8" name="message">
+            <a:extLst xmlns:a="http://schemas.openxmlformats.org/drawingml/2006/main">
+              <a:ext uri="{FF2B5EF4-FFF2-40B4-BE49-F238E27FC236}">
+                <a16:creationId xmlns:a16="http://schemas.microsoft.com/office/drawing/2014/main" id="{179B518C-D659-42FD-BC5B-F132218A76E0}"/>
+              </a:ext>
+            </a:extLst>
+          </p:cNvPr>
+          <p:cNvSpPr>
+            <a:spLocks xmlns:a="http://schemas.openxmlformats.org/drawingml/2006/main" noGrp="1"/>
+          </p:cNvSpPr>
+          <p:nvPr/>
+        </p:nvSpPr>
+        <p:spPr>
+          <a:xfrm xmlns:a="http://schemas.openxmlformats.org/drawingml/2006/main">
+            <a:off x="457200" y="914400"/>
+            <a:ext cx="8229600" cy="548640"/>
+          </a:xfrm>
+          <a:prstGeom xmlns:a="http://schemas.openxmlformats.org/drawingml/2006/main" prst="rect">
+            <a:avLst/>
+          </a:prstGeom>
+          <a:noFill xmlns:a="http://schemas.openxmlformats.org/drawingml/2006/main"/>
+          <a:ln xmlns:a="http://schemas.openxmlformats.org/drawingml/2006/main" w="0">
+            <a:noFill/>
+            <a:prstDash val="solid"/>
+          </a:ln>
+        </p:spPr>
+        <p:txBody>
+          <a:bodyPr xmlns:a="http://schemas.openxmlformats.org/drawingml/2006/main" lIns="0" tIns="0" rIns="0" bIns="0" anchor="ctr">
+            <a:noAutofit/>
+          </a:bodyPr>
+          <a:lstStyle xmlns:a="http://schemas.openxmlformats.org/drawingml/2006/main"/>
+          <a:p xmlns:a="http://schemas.openxmlformats.org/drawingml/2006/main">
+            <a:pPr algn="l">
+              <a:defRPr sz="2300" b="1">
+                <a:solidFill>
+                  <a:srgbClr val="17202A"/>
+                </a:solidFill>
+                <a:latin typeface="Noto Sans JP"/>
+                <a:ea typeface="Noto Sans JP"/>
+                <a:cs typeface="Noto Sans JP"/>
+              </a:defRPr>
+            </a:pPr>
+            <a:r>
+              <a:rPr sz="2300" b="1">
+                <a:solidFill>
+                  <a:srgbClr val="17202A"/>
+                </a:solidFill>
+                <a:latin typeface="Noto Sans JP"/>
+                <a:ea typeface="Noto Sans JP"/>
+                <a:cs typeface="Noto Sans JP"/>
+              </a:rPr>
+              <a:t>研究のねらい、しくみ、ここまでの結果、今後の展望</a:t>
+            </a:r>
+          </a:p>
+        </p:txBody>
+      </p:sp>
+      <p:sp>
+        <p:nvSpPr>
+          <p:cNvPr id="9" name="toc-label-0">
+            <a:extLst xmlns:a="http://schemas.openxmlformats.org/drawingml/2006/main">
+              <a:ext uri="{FF2B5EF4-FFF2-40B4-BE49-F238E27FC236}">
+                <a16:creationId xmlns:a16="http://schemas.microsoft.com/office/drawing/2014/main" id="{5EF5D9AA-C55C-420D-BB27-F9AF15E060C7}"/>
+              </a:ext>
+            </a:extLst>
+          </p:cNvPr>
+          <p:cNvSpPr>
+            <a:spLocks xmlns:a="http://schemas.openxmlformats.org/drawingml/2006/main" noGrp="1"/>
+          </p:cNvSpPr>
+          <p:nvPr/>
+        </p:nvSpPr>
+        <p:spPr>
+          <a:xfrm xmlns:a="http://schemas.openxmlformats.org/drawingml/2006/main">
+            <a:off x="457200" y="1609725"/>
+            <a:ext cx="3886200" cy="304800"/>
+          </a:xfrm>
+          <a:prstGeom xmlns:a="http://schemas.openxmlformats.org/drawingml/2006/main" prst="rect">
+            <a:avLst/>
+          </a:prstGeom>
+          <a:noFill xmlns:a="http://schemas.openxmlformats.org/drawingml/2006/main"/>
+          <a:ln xmlns:a="http://schemas.openxmlformats.org/drawingml/2006/main" w="0">
+            <a:noFill/>
+            <a:prstDash val="solid"/>
+          </a:ln>
+        </p:spPr>
+        <p:txBody>
+          <a:bodyPr xmlns:a="http://schemas.openxmlformats.org/drawingml/2006/main" lIns="0" tIns="0" rIns="0" bIns="0" anchor="ctr">
+            <a:noAutofit/>
+          </a:bodyPr>
+          <a:lstStyle xmlns:a="http://schemas.openxmlformats.org/drawingml/2006/main"/>
+          <a:p xmlns:a="http://schemas.openxmlformats.org/drawingml/2006/main">
+            <a:pPr algn="l">
+              <a:defRPr sz="1800" b="1">
+                <a:solidFill>
+                  <a:srgbClr val="17202A"/>
+                </a:solidFill>
+                <a:latin typeface="Noto Sans JP"/>
+                <a:ea typeface="Noto Sans JP"/>
+                <a:cs typeface="Noto Sans JP"/>
+              </a:defRPr>
+            </a:pPr>
+            <a:r>
+              <a:rPr sz="1800" b="1">
+                <a:solidFill>
+                  <a:srgbClr val="17202A"/>
+                </a:solidFill>
+                <a:latin typeface="Noto Sans JP"/>
+                <a:ea typeface="Noto Sans JP"/>
+                <a:cs typeface="Noto Sans JP"/>
+              </a:rPr>
               <a:t>01 研究のねらい</a:t>
             </a:r>
           </a:p>
@@ -3323,22 +3593,22 @@
       </p:sp>
       <p:sp>
         <p:nvSpPr>
-          <p:cNvPr id="8" name="toc-image-slot-0">
-            <a:extLst xmlns:a="http://schemas.openxmlformats.org/drawingml/2006/main">
-              <a:ext uri="{FF2B5EF4-FFF2-40B4-BE49-F238E27FC236}">
-                <a16:creationId xmlns:a16="http://schemas.microsoft.com/office/drawing/2014/main" id="{73072A49-661E-47A3-B7EA-D9AA629767EF}"/>
-              </a:ext>
-            </a:extLst>
-          </p:cNvPr>
-          <p:cNvSpPr>
-            <a:spLocks xmlns:a="http://schemas.openxmlformats.org/drawingml/2006/main" noGrp="1"/>
-          </p:cNvSpPr>
-          <p:nvPr/>
-        </p:nvSpPr>
-        <p:spPr>
-          <a:xfrm xmlns:a="http://schemas.openxmlformats.org/drawingml/2006/main">
-            <a:off x="457200" y="1914525"/>
-            <a:ext cx="3886200" cy="838200"/>
+          <p:cNvPr id="10" name="toc-image-slot-0">
+            <a:extLst xmlns:a="http://schemas.openxmlformats.org/drawingml/2006/main">
+              <a:ext uri="{FF2B5EF4-FFF2-40B4-BE49-F238E27FC236}">
+                <a16:creationId xmlns:a16="http://schemas.microsoft.com/office/drawing/2014/main" id="{87200B74-5F71-4235-B376-3D0561B75393}"/>
+              </a:ext>
+            </a:extLst>
+          </p:cNvPr>
+          <p:cNvSpPr>
+            <a:spLocks xmlns:a="http://schemas.openxmlformats.org/drawingml/2006/main" noGrp="1"/>
+          </p:cNvSpPr>
+          <p:nvPr/>
+        </p:nvSpPr>
+        <p:spPr>
+          <a:xfrm xmlns:a="http://schemas.openxmlformats.org/drawingml/2006/main">
+            <a:off x="457200" y="1971675"/>
+            <a:ext cx="3886200" cy="704850"/>
           </a:xfrm>
           <a:prstGeom xmlns:a="http://schemas.openxmlformats.org/drawingml/2006/main" prst="rect">
             <a:avLst/>
@@ -3356,22 +3626,22 @@
       </p:sp>
       <p:sp>
         <p:nvSpPr>
-          <p:cNvPr id="9" name="toc-image-label-0">
-            <a:extLst xmlns:a="http://schemas.openxmlformats.org/drawingml/2006/main">
-              <a:ext uri="{FF2B5EF4-FFF2-40B4-BE49-F238E27FC236}">
-                <a16:creationId xmlns:a16="http://schemas.microsoft.com/office/drawing/2014/main" id="{B5655323-CD92-40F9-A580-9B89FBF9A1F0}"/>
-              </a:ext>
-            </a:extLst>
-          </p:cNvPr>
-          <p:cNvSpPr>
-            <a:spLocks xmlns:a="http://schemas.openxmlformats.org/drawingml/2006/main" noGrp="1"/>
-          </p:cNvSpPr>
-          <p:nvPr/>
-        </p:nvSpPr>
-        <p:spPr>
-          <a:xfrm xmlns:a="http://schemas.openxmlformats.org/drawingml/2006/main">
-            <a:off x="552450" y="2047875"/>
-            <a:ext cx="3695700" cy="476250"/>
+          <p:cNvPr id="11" name="toc-image-label-0">
+            <a:extLst xmlns:a="http://schemas.openxmlformats.org/drawingml/2006/main">
+              <a:ext uri="{FF2B5EF4-FFF2-40B4-BE49-F238E27FC236}">
+                <a16:creationId xmlns:a16="http://schemas.microsoft.com/office/drawing/2014/main" id="{7D8FFD9C-32A8-4E50-B7E6-9CC7D46E4406}"/>
+              </a:ext>
+            </a:extLst>
+          </p:cNvPr>
+          <p:cNvSpPr>
+            <a:spLocks xmlns:a="http://schemas.openxmlformats.org/drawingml/2006/main" noGrp="1"/>
+          </p:cNvSpPr>
+          <p:nvPr/>
+        </p:nvSpPr>
+        <p:spPr>
+          <a:xfrm xmlns:a="http://schemas.openxmlformats.org/drawingml/2006/main">
+            <a:off x="552450" y="2019300"/>
+            <a:ext cx="3695700" cy="609600"/>
           </a:xfrm>
           <a:prstGeom xmlns:a="http://schemas.openxmlformats.org/drawingml/2006/main" prst="rect">
             <a:avLst/>
@@ -3414,22 +3684,22 @@
       </p:sp>
       <p:sp>
         <p:nvSpPr>
-          <p:cNvPr id="10" name="toc-label-1">
-            <a:extLst xmlns:a="http://schemas.openxmlformats.org/drawingml/2006/main">
-              <a:ext uri="{FF2B5EF4-FFF2-40B4-BE49-F238E27FC236}">
-                <a16:creationId xmlns:a16="http://schemas.microsoft.com/office/drawing/2014/main" id="{D2F04E81-A7AB-43DC-A69A-CB32A670706B}"/>
-              </a:ext>
-            </a:extLst>
-          </p:cNvPr>
-          <p:cNvSpPr>
-            <a:spLocks xmlns:a="http://schemas.openxmlformats.org/drawingml/2006/main" noGrp="1"/>
-          </p:cNvSpPr>
-          <p:nvPr/>
-        </p:nvSpPr>
-        <p:spPr>
-          <a:xfrm xmlns:a="http://schemas.openxmlformats.org/drawingml/2006/main">
-            <a:off x="4800600" y="1495425"/>
-            <a:ext cx="3886200" cy="352425"/>
+          <p:cNvPr id="12" name="toc-label-1">
+            <a:extLst xmlns:a="http://schemas.openxmlformats.org/drawingml/2006/main">
+              <a:ext uri="{FF2B5EF4-FFF2-40B4-BE49-F238E27FC236}">
+                <a16:creationId xmlns:a16="http://schemas.microsoft.com/office/drawing/2014/main" id="{E424823D-E41D-4A0C-9FE4-54C306FE16B7}"/>
+              </a:ext>
+            </a:extLst>
+          </p:cNvPr>
+          <p:cNvSpPr>
+            <a:spLocks xmlns:a="http://schemas.openxmlformats.org/drawingml/2006/main" noGrp="1"/>
+          </p:cNvSpPr>
+          <p:nvPr/>
+        </p:nvSpPr>
+        <p:spPr>
+          <a:xfrm xmlns:a="http://schemas.openxmlformats.org/drawingml/2006/main">
+            <a:off x="4800600" y="1609725"/>
+            <a:ext cx="3886200" cy="304800"/>
           </a:xfrm>
           <a:prstGeom xmlns:a="http://schemas.openxmlformats.org/drawingml/2006/main" prst="rect">
             <a:avLst/>
@@ -3447,7 +3717,7 @@
           <a:lstStyle xmlns:a="http://schemas.openxmlformats.org/drawingml/2006/main"/>
           <a:p xmlns:a="http://schemas.openxmlformats.org/drawingml/2006/main">
             <a:pPr algn="l">
-              <a:defRPr sz="2100" b="1">
+              <a:defRPr sz="1800" b="1">
                 <a:solidFill>
                   <a:srgbClr val="17202A"/>
                 </a:solidFill>
@@ -3457,7 +3727,7 @@
               </a:defRPr>
             </a:pPr>
             <a:r>
-              <a:rPr sz="2100" b="1">
+              <a:rPr sz="1800" b="1">
                 <a:solidFill>
                   <a:srgbClr val="17202A"/>
                 </a:solidFill>
@@ -3472,22 +3742,22 @@
       </p:sp>
       <p:sp>
         <p:nvSpPr>
-          <p:cNvPr id="11" name="toc-image-slot-1">
-            <a:extLst xmlns:a="http://schemas.openxmlformats.org/drawingml/2006/main">
-              <a:ext uri="{FF2B5EF4-FFF2-40B4-BE49-F238E27FC236}">
-                <a16:creationId xmlns:a16="http://schemas.microsoft.com/office/drawing/2014/main" id="{3174FD5B-5186-4F3A-B420-83432668D8AC}"/>
-              </a:ext>
-            </a:extLst>
-          </p:cNvPr>
-          <p:cNvSpPr>
-            <a:spLocks xmlns:a="http://schemas.openxmlformats.org/drawingml/2006/main" noGrp="1"/>
-          </p:cNvSpPr>
-          <p:nvPr/>
-        </p:nvSpPr>
-        <p:spPr>
-          <a:xfrm xmlns:a="http://schemas.openxmlformats.org/drawingml/2006/main">
-            <a:off x="4800600" y="1914525"/>
-            <a:ext cx="3886200" cy="838200"/>
+          <p:cNvPr id="13" name="toc-image-slot-1">
+            <a:extLst xmlns:a="http://schemas.openxmlformats.org/drawingml/2006/main">
+              <a:ext uri="{FF2B5EF4-FFF2-40B4-BE49-F238E27FC236}">
+                <a16:creationId xmlns:a16="http://schemas.microsoft.com/office/drawing/2014/main" id="{98A2516F-21A8-4C40-9753-C89041410F75}"/>
+              </a:ext>
+            </a:extLst>
+          </p:cNvPr>
+          <p:cNvSpPr>
+            <a:spLocks xmlns:a="http://schemas.openxmlformats.org/drawingml/2006/main" noGrp="1"/>
+          </p:cNvSpPr>
+          <p:nvPr/>
+        </p:nvSpPr>
+        <p:spPr>
+          <a:xfrm xmlns:a="http://schemas.openxmlformats.org/drawingml/2006/main">
+            <a:off x="4800600" y="1971675"/>
+            <a:ext cx="3886200" cy="704850"/>
           </a:xfrm>
           <a:prstGeom xmlns:a="http://schemas.openxmlformats.org/drawingml/2006/main" prst="rect">
             <a:avLst/>
@@ -3505,22 +3775,22 @@
       </p:sp>
       <p:sp>
         <p:nvSpPr>
-          <p:cNvPr id="12" name="toc-image-label-1">
-            <a:extLst xmlns:a="http://schemas.openxmlformats.org/drawingml/2006/main">
-              <a:ext uri="{FF2B5EF4-FFF2-40B4-BE49-F238E27FC236}">
-                <a16:creationId xmlns:a16="http://schemas.microsoft.com/office/drawing/2014/main" id="{493E8544-C7FD-41BC-95C2-46E8CA2A6CDE}"/>
-              </a:ext>
-            </a:extLst>
-          </p:cNvPr>
-          <p:cNvSpPr>
-            <a:spLocks xmlns:a="http://schemas.openxmlformats.org/drawingml/2006/main" noGrp="1"/>
-          </p:cNvSpPr>
-          <p:nvPr/>
-        </p:nvSpPr>
-        <p:spPr>
-          <a:xfrm xmlns:a="http://schemas.openxmlformats.org/drawingml/2006/main">
-            <a:off x="4895850" y="2047875"/>
-            <a:ext cx="3695700" cy="476250"/>
+          <p:cNvPr id="14" name="toc-image-label-1">
+            <a:extLst xmlns:a="http://schemas.openxmlformats.org/drawingml/2006/main">
+              <a:ext uri="{FF2B5EF4-FFF2-40B4-BE49-F238E27FC236}">
+                <a16:creationId xmlns:a16="http://schemas.microsoft.com/office/drawing/2014/main" id="{B2466703-1AD5-4EE8-A9A1-690CCBD01FDB}"/>
+              </a:ext>
+            </a:extLst>
+          </p:cNvPr>
+          <p:cNvSpPr>
+            <a:spLocks xmlns:a="http://schemas.openxmlformats.org/drawingml/2006/main" noGrp="1"/>
+          </p:cNvSpPr>
+          <p:nvPr/>
+        </p:nvSpPr>
+        <p:spPr>
+          <a:xfrm xmlns:a="http://schemas.openxmlformats.org/drawingml/2006/main">
+            <a:off x="4895850" y="2019300"/>
+            <a:ext cx="3695700" cy="609600"/>
           </a:xfrm>
           <a:prstGeom xmlns:a="http://schemas.openxmlformats.org/drawingml/2006/main" prst="rect">
             <a:avLst/>
@@ -3563,22 +3833,22 @@
       </p:sp>
       <p:sp>
         <p:nvSpPr>
-          <p:cNvPr id="13" name="toc-label-2">
-            <a:extLst xmlns:a="http://schemas.openxmlformats.org/drawingml/2006/main">
-              <a:ext uri="{FF2B5EF4-FFF2-40B4-BE49-F238E27FC236}">
-                <a16:creationId xmlns:a16="http://schemas.microsoft.com/office/drawing/2014/main" id="{02428EF0-4ED0-407B-9DFB-3CBAEDAC05ED}"/>
-              </a:ext>
-            </a:extLst>
-          </p:cNvPr>
-          <p:cNvSpPr>
-            <a:spLocks xmlns:a="http://schemas.openxmlformats.org/drawingml/2006/main" noGrp="1"/>
-          </p:cNvSpPr>
-          <p:nvPr/>
-        </p:nvSpPr>
-        <p:spPr>
-          <a:xfrm xmlns:a="http://schemas.openxmlformats.org/drawingml/2006/main">
-            <a:off x="457200" y="2876550"/>
-            <a:ext cx="3886200" cy="352425"/>
+          <p:cNvPr id="15" name="toc-label-2">
+            <a:extLst xmlns:a="http://schemas.openxmlformats.org/drawingml/2006/main">
+              <a:ext uri="{FF2B5EF4-FFF2-40B4-BE49-F238E27FC236}">
+                <a16:creationId xmlns:a16="http://schemas.microsoft.com/office/drawing/2014/main" id="{80F3C4C3-B764-4F4B-8BCC-80CD9C0E8DDF}"/>
+              </a:ext>
+            </a:extLst>
+          </p:cNvPr>
+          <p:cNvSpPr>
+            <a:spLocks xmlns:a="http://schemas.openxmlformats.org/drawingml/2006/main" noGrp="1"/>
+          </p:cNvSpPr>
+          <p:nvPr/>
+        </p:nvSpPr>
+        <p:spPr>
+          <a:xfrm xmlns:a="http://schemas.openxmlformats.org/drawingml/2006/main">
+            <a:off x="457200" y="2867025"/>
+            <a:ext cx="3886200" cy="304800"/>
           </a:xfrm>
           <a:prstGeom xmlns:a="http://schemas.openxmlformats.org/drawingml/2006/main" prst="rect">
             <a:avLst/>
@@ -3596,7 +3866,7 @@
           <a:lstStyle xmlns:a="http://schemas.openxmlformats.org/drawingml/2006/main"/>
           <a:p xmlns:a="http://schemas.openxmlformats.org/drawingml/2006/main">
             <a:pPr algn="l">
-              <a:defRPr sz="2100" b="1">
+              <a:defRPr sz="1800" b="1">
                 <a:solidFill>
                   <a:srgbClr val="17202A"/>
                 </a:solidFill>
@@ -3606,7 +3876,7 @@
               </a:defRPr>
             </a:pPr>
             <a:r>
-              <a:rPr sz="2100" b="1">
+              <a:rPr sz="1800" b="1">
                 <a:solidFill>
                   <a:srgbClr val="17202A"/>
                 </a:solidFill>
@@ -3621,22 +3891,22 @@
       </p:sp>
       <p:sp>
         <p:nvSpPr>
-          <p:cNvPr id="14" name="toc-image-slot-2">
-            <a:extLst xmlns:a="http://schemas.openxmlformats.org/drawingml/2006/main">
-              <a:ext uri="{FF2B5EF4-FFF2-40B4-BE49-F238E27FC236}">
-                <a16:creationId xmlns:a16="http://schemas.microsoft.com/office/drawing/2014/main" id="{C5B3FD61-7194-4614-9234-C8B622C0FDB5}"/>
-              </a:ext>
-            </a:extLst>
-          </p:cNvPr>
-          <p:cNvSpPr>
-            <a:spLocks xmlns:a="http://schemas.openxmlformats.org/drawingml/2006/main" noGrp="1"/>
-          </p:cNvSpPr>
-          <p:nvPr/>
-        </p:nvSpPr>
-        <p:spPr>
-          <a:xfrm xmlns:a="http://schemas.openxmlformats.org/drawingml/2006/main">
-            <a:off x="457200" y="3295650"/>
-            <a:ext cx="3886200" cy="838200"/>
+          <p:cNvPr id="16" name="toc-image-slot-2">
+            <a:extLst xmlns:a="http://schemas.openxmlformats.org/drawingml/2006/main">
+              <a:ext uri="{FF2B5EF4-FFF2-40B4-BE49-F238E27FC236}">
+                <a16:creationId xmlns:a16="http://schemas.microsoft.com/office/drawing/2014/main" id="{96F88C99-BC84-44D7-B690-CD45FDCA766E}"/>
+              </a:ext>
+            </a:extLst>
+          </p:cNvPr>
+          <p:cNvSpPr>
+            <a:spLocks xmlns:a="http://schemas.openxmlformats.org/drawingml/2006/main" noGrp="1"/>
+          </p:cNvSpPr>
+          <p:nvPr/>
+        </p:nvSpPr>
+        <p:spPr>
+          <a:xfrm xmlns:a="http://schemas.openxmlformats.org/drawingml/2006/main">
+            <a:off x="457200" y="3228975"/>
+            <a:ext cx="3886200" cy="704850"/>
           </a:xfrm>
           <a:prstGeom xmlns:a="http://schemas.openxmlformats.org/drawingml/2006/main" prst="rect">
             <a:avLst/>
@@ -3654,22 +3924,22 @@
       </p:sp>
       <p:sp>
         <p:nvSpPr>
-          <p:cNvPr id="15" name="toc-image-label-2">
-            <a:extLst xmlns:a="http://schemas.openxmlformats.org/drawingml/2006/main">
-              <a:ext uri="{FF2B5EF4-FFF2-40B4-BE49-F238E27FC236}">
-                <a16:creationId xmlns:a16="http://schemas.microsoft.com/office/drawing/2014/main" id="{33D4E54E-DB73-405A-A42F-6B3D28D82991}"/>
-              </a:ext>
-            </a:extLst>
-          </p:cNvPr>
-          <p:cNvSpPr>
-            <a:spLocks xmlns:a="http://schemas.openxmlformats.org/drawingml/2006/main" noGrp="1"/>
-          </p:cNvSpPr>
-          <p:nvPr/>
-        </p:nvSpPr>
-        <p:spPr>
-          <a:xfrm xmlns:a="http://schemas.openxmlformats.org/drawingml/2006/main">
-            <a:off x="552450" y="3429000"/>
-            <a:ext cx="3695700" cy="476250"/>
+          <p:cNvPr id="17" name="toc-image-label-2">
+            <a:extLst xmlns:a="http://schemas.openxmlformats.org/drawingml/2006/main">
+              <a:ext uri="{FF2B5EF4-FFF2-40B4-BE49-F238E27FC236}">
+                <a16:creationId xmlns:a16="http://schemas.microsoft.com/office/drawing/2014/main" id="{2EF0AC1C-3CF4-4DE7-99F9-98724891552B}"/>
+              </a:ext>
+            </a:extLst>
+          </p:cNvPr>
+          <p:cNvSpPr>
+            <a:spLocks xmlns:a="http://schemas.openxmlformats.org/drawingml/2006/main" noGrp="1"/>
+          </p:cNvSpPr>
+          <p:nvPr/>
+        </p:nvSpPr>
+        <p:spPr>
+          <a:xfrm xmlns:a="http://schemas.openxmlformats.org/drawingml/2006/main">
+            <a:off x="552450" y="3276600"/>
+            <a:ext cx="3695700" cy="609600"/>
           </a:xfrm>
           <a:prstGeom xmlns:a="http://schemas.openxmlformats.org/drawingml/2006/main" prst="rect">
             <a:avLst/>
@@ -3712,22 +3982,22 @@
       </p:sp>
       <p:sp>
         <p:nvSpPr>
-          <p:cNvPr id="16" name="toc-label-3">
-            <a:extLst xmlns:a="http://schemas.openxmlformats.org/drawingml/2006/main">
-              <a:ext uri="{FF2B5EF4-FFF2-40B4-BE49-F238E27FC236}">
-                <a16:creationId xmlns:a16="http://schemas.microsoft.com/office/drawing/2014/main" id="{08F1A119-B755-402A-903B-944BA92A7D2B}"/>
-              </a:ext>
-            </a:extLst>
-          </p:cNvPr>
-          <p:cNvSpPr>
-            <a:spLocks xmlns:a="http://schemas.openxmlformats.org/drawingml/2006/main" noGrp="1"/>
-          </p:cNvSpPr>
-          <p:nvPr/>
-        </p:nvSpPr>
-        <p:spPr>
-          <a:xfrm xmlns:a="http://schemas.openxmlformats.org/drawingml/2006/main">
-            <a:off x="4800600" y="2876550"/>
-            <a:ext cx="3886200" cy="352425"/>
+          <p:cNvPr id="18" name="toc-label-3">
+            <a:extLst xmlns:a="http://schemas.openxmlformats.org/drawingml/2006/main">
+              <a:ext uri="{FF2B5EF4-FFF2-40B4-BE49-F238E27FC236}">
+                <a16:creationId xmlns:a16="http://schemas.microsoft.com/office/drawing/2014/main" id="{17ED5554-B8A1-4B3D-BBC1-44D595AB06D6}"/>
+              </a:ext>
+            </a:extLst>
+          </p:cNvPr>
+          <p:cNvSpPr>
+            <a:spLocks xmlns:a="http://schemas.openxmlformats.org/drawingml/2006/main" noGrp="1"/>
+          </p:cNvSpPr>
+          <p:nvPr/>
+        </p:nvSpPr>
+        <p:spPr>
+          <a:xfrm xmlns:a="http://schemas.openxmlformats.org/drawingml/2006/main">
+            <a:off x="4800600" y="2867025"/>
+            <a:ext cx="3886200" cy="304800"/>
           </a:xfrm>
           <a:prstGeom xmlns:a="http://schemas.openxmlformats.org/drawingml/2006/main" prst="rect">
             <a:avLst/>
@@ -3745,7 +4015,7 @@
           <a:lstStyle xmlns:a="http://schemas.openxmlformats.org/drawingml/2006/main"/>
           <a:p xmlns:a="http://schemas.openxmlformats.org/drawingml/2006/main">
             <a:pPr algn="l">
-              <a:defRPr sz="2100" b="1">
+              <a:defRPr sz="1800" b="1">
                 <a:solidFill>
                   <a:srgbClr val="17202A"/>
                 </a:solidFill>
@@ -3755,7 +4025,7 @@
               </a:defRPr>
             </a:pPr>
             <a:r>
-              <a:rPr sz="2100" b="1">
+              <a:rPr sz="1800" b="1">
                 <a:solidFill>
                   <a:srgbClr val="17202A"/>
                 </a:solidFill>
@@ -3770,22 +4040,22 @@
       </p:sp>
       <p:sp>
         <p:nvSpPr>
-          <p:cNvPr id="17" name="toc-image-slot-3">
-            <a:extLst xmlns:a="http://schemas.openxmlformats.org/drawingml/2006/main">
-              <a:ext uri="{FF2B5EF4-FFF2-40B4-BE49-F238E27FC236}">
-                <a16:creationId xmlns:a16="http://schemas.microsoft.com/office/drawing/2014/main" id="{18D8E79E-09B7-4AA1-BBCE-E5B4F69D5CFD}"/>
-              </a:ext>
-            </a:extLst>
-          </p:cNvPr>
-          <p:cNvSpPr>
-            <a:spLocks xmlns:a="http://schemas.openxmlformats.org/drawingml/2006/main" noGrp="1"/>
-          </p:cNvSpPr>
-          <p:nvPr/>
-        </p:nvSpPr>
-        <p:spPr>
-          <a:xfrm xmlns:a="http://schemas.openxmlformats.org/drawingml/2006/main">
-            <a:off x="4800600" y="3295650"/>
-            <a:ext cx="3886200" cy="838200"/>
+          <p:cNvPr id="19" name="toc-image-slot-3">
+            <a:extLst xmlns:a="http://schemas.openxmlformats.org/drawingml/2006/main">
+              <a:ext uri="{FF2B5EF4-FFF2-40B4-BE49-F238E27FC236}">
+                <a16:creationId xmlns:a16="http://schemas.microsoft.com/office/drawing/2014/main" id="{24590022-86B2-4396-BCD4-26C06C718AE4}"/>
+              </a:ext>
+            </a:extLst>
+          </p:cNvPr>
+          <p:cNvSpPr>
+            <a:spLocks xmlns:a="http://schemas.openxmlformats.org/drawingml/2006/main" noGrp="1"/>
+          </p:cNvSpPr>
+          <p:nvPr/>
+        </p:nvSpPr>
+        <p:spPr>
+          <a:xfrm xmlns:a="http://schemas.openxmlformats.org/drawingml/2006/main">
+            <a:off x="4800600" y="3228975"/>
+            <a:ext cx="3886200" cy="704850"/>
           </a:xfrm>
           <a:prstGeom xmlns:a="http://schemas.openxmlformats.org/drawingml/2006/main" prst="rect">
             <a:avLst/>
@@ -3803,22 +4073,22 @@
       </p:sp>
       <p:sp>
         <p:nvSpPr>
-          <p:cNvPr id="18" name="toc-image-label-3">
-            <a:extLst xmlns:a="http://schemas.openxmlformats.org/drawingml/2006/main">
-              <a:ext uri="{FF2B5EF4-FFF2-40B4-BE49-F238E27FC236}">
-                <a16:creationId xmlns:a16="http://schemas.microsoft.com/office/drawing/2014/main" id="{B33566B9-ED38-456B-A355-DD65BF9D8D6E}"/>
-              </a:ext>
-            </a:extLst>
-          </p:cNvPr>
-          <p:cNvSpPr>
-            <a:spLocks xmlns:a="http://schemas.openxmlformats.org/drawingml/2006/main" noGrp="1"/>
-          </p:cNvSpPr>
-          <p:nvPr/>
-        </p:nvSpPr>
-        <p:spPr>
-          <a:xfrm xmlns:a="http://schemas.openxmlformats.org/drawingml/2006/main">
-            <a:off x="4895850" y="3429000"/>
-            <a:ext cx="3695700" cy="476250"/>
+          <p:cNvPr id="20" name="toc-image-label-3">
+            <a:extLst xmlns:a="http://schemas.openxmlformats.org/drawingml/2006/main">
+              <a:ext uri="{FF2B5EF4-FFF2-40B4-BE49-F238E27FC236}">
+                <a16:creationId xmlns:a16="http://schemas.microsoft.com/office/drawing/2014/main" id="{23CF8BFE-41AC-4A92-9195-37A0E72F1092}"/>
+              </a:ext>
+            </a:extLst>
+          </p:cNvPr>
+          <p:cNvSpPr>
+            <a:spLocks xmlns:a="http://schemas.openxmlformats.org/drawingml/2006/main" noGrp="1"/>
+          </p:cNvSpPr>
+          <p:nvPr/>
+        </p:nvSpPr>
+        <p:spPr>
+          <a:xfrm xmlns:a="http://schemas.openxmlformats.org/drawingml/2006/main">
+            <a:off x="4895850" y="3276600"/>
+            <a:ext cx="3695700" cy="609600"/>
           </a:xfrm>
           <a:prstGeom xmlns:a="http://schemas.openxmlformats.org/drawingml/2006/main" prst="rect">
             <a:avLst/>
@@ -3861,10 +4131,10 @@
       </p:sp>
       <p:sp>
         <p:nvSpPr>
-          <p:cNvPr id="19" name="toc-rule-vertical">
-            <a:extLst xmlns:a="http://schemas.openxmlformats.org/drawingml/2006/main">
-              <a:ext uri="{FF2B5EF4-FFF2-40B4-BE49-F238E27FC236}">
-                <a16:creationId xmlns:a16="http://schemas.microsoft.com/office/drawing/2014/main" id="{57450AA4-5678-4911-9662-8B51A23A8DD6}"/>
+          <p:cNvPr id="21" name="toc-rule-vertical">
+            <a:extLst xmlns:a="http://schemas.openxmlformats.org/drawingml/2006/main">
+              <a:ext uri="{FF2B5EF4-FFF2-40B4-BE49-F238E27FC236}">
+                <a16:creationId xmlns:a16="http://schemas.microsoft.com/office/drawing/2014/main" id="{02B31645-70A8-49FD-80CF-CF76822B2C0F}"/>
               </a:ext>
             </a:extLst>
           </p:cNvPr>
@@ -3892,10 +4162,10 @@
       </p:sp>
       <p:sp>
         <p:nvSpPr>
-          <p:cNvPr id="20" name="toc-rule-horizontal">
-            <a:extLst xmlns:a="http://schemas.openxmlformats.org/drawingml/2006/main">
-              <a:ext uri="{FF2B5EF4-FFF2-40B4-BE49-F238E27FC236}">
-                <a16:creationId xmlns:a16="http://schemas.microsoft.com/office/drawing/2014/main" id="{1CACD675-29A6-4AA8-A5F1-C6FCAEEF0606}"/>
+          <p:cNvPr id="22" name="toc-rule-horizontal">
+            <a:extLst xmlns:a="http://schemas.openxmlformats.org/drawingml/2006/main">
+              <a:ext uri="{FF2B5EF4-FFF2-40B4-BE49-F238E27FC236}">
+                <a16:creationId xmlns:a16="http://schemas.microsoft.com/office/drawing/2014/main" id="{0791F0E3-5EDE-4A04-A874-2BF7E1CE24DE}"/>
               </a:ext>
             </a:extLst>
           </p:cNvPr>
@@ -3923,21 +4193,21 @@
       </p:sp>
       <p:sp>
         <p:nvSpPr>
-          <p:cNvPr id="21" name="slot-disclosure">
-            <a:extLst xmlns:a="http://schemas.openxmlformats.org/drawingml/2006/main">
-              <a:ext uri="{FF2B5EF4-FFF2-40B4-BE49-F238E27FC236}">
-                <a16:creationId xmlns:a16="http://schemas.microsoft.com/office/drawing/2014/main" id="{0A527EAD-8C31-43AB-A2C3-59459115A613}"/>
-              </a:ext>
-            </a:extLst>
-          </p:cNvPr>
-          <p:cNvSpPr>
-            <a:spLocks xmlns:a="http://schemas.openxmlformats.org/drawingml/2006/main" noGrp="1"/>
-          </p:cNvSpPr>
-          <p:nvPr/>
-        </p:nvSpPr>
-        <p:spPr>
-          <a:xfrm xmlns:a="http://schemas.openxmlformats.org/drawingml/2006/main">
-            <a:off x="457200" y="4229100"/>
+          <p:cNvPr id="23" name="slot-disclosure">
+            <a:extLst xmlns:a="http://schemas.openxmlformats.org/drawingml/2006/main">
+              <a:ext uri="{FF2B5EF4-FFF2-40B4-BE49-F238E27FC236}">
+                <a16:creationId xmlns:a16="http://schemas.microsoft.com/office/drawing/2014/main" id="{4CAA2F64-3CE9-420F-9A52-9119C52D7BD4}"/>
+              </a:ext>
+            </a:extLst>
+          </p:cNvPr>
+          <p:cNvSpPr>
+            <a:spLocks xmlns:a="http://schemas.openxmlformats.org/drawingml/2006/main" noGrp="1"/>
+          </p:cNvSpPr>
+          <p:nvPr/>
+        </p:nvSpPr>
+        <p:spPr>
+          <a:xfrm xmlns:a="http://schemas.openxmlformats.org/drawingml/2006/main">
+            <a:off x="457200" y="4210050"/>
             <a:ext cx="8229600" cy="266700"/>
           </a:xfrm>
           <a:prstGeom xmlns:a="http://schemas.openxmlformats.org/drawingml/2006/main" prst="rect">
@@ -3956,7 +4226,7 @@
           <a:lstStyle xmlns:a="http://schemas.openxmlformats.org/drawingml/2006/main"/>
           <a:p xmlns:a="http://schemas.openxmlformats.org/drawingml/2006/main">
             <a:pPr algn="l">
-              <a:defRPr sz="1800" b="0">
+              <a:defRPr sz="1500" b="0">
                 <a:solidFill>
                   <a:srgbClr val="59636E"/>
                 </a:solidFill>
@@ -3966,7 +4236,7 @@
               </a:defRPr>
             </a:pPr>
             <a:r>
-              <a:rPr sz="1800" b="0">
+              <a:rPr sz="1500" b="0">
                 <a:solidFill>
                   <a:srgbClr val="59636E"/>
                 </a:solidFill>
@@ -3982,7 +4252,7 @@
     </p:spTree>
     <p:extLst>
       <p:ext uri="{BB962C8B-B14F-4D97-AF65-F5344CB8AC3E}">
-        <p14:creationId xmlns:p14="http://schemas.microsoft.com/office/powerpoint/2010/main" val="221740847"/>
+        <p14:creationId xmlns:p14="http://schemas.microsoft.com/office/powerpoint/2010/main" val="1538059938"/>
       </p:ext>
     </p:extLst>
   </p:cSld>
@@ -4010,19 +4280,19 @@
       </p:grpSpPr>
       <p:pic>
         <p:nvPicPr>
-          <p:cNvPr id="7" name=""/>
+          <p:cNvPr id="9" name=""/>
           <p:cNvPicPr>
             <a:picLocks xmlns:a="http://schemas.openxmlformats.org/drawingml/2006/main" noChangeAspect="1"/>
           </p:cNvPicPr>
           <p:nvPr/>
         </p:nvPicPr>
         <p:blipFill>
-          <a:blip xmlns:r="http://schemas.openxmlformats.org/officeDocument/2006/relationships" xmlns:a="http://schemas.openxmlformats.org/drawingml/2006/main" r:embed="R38cc4446be0540ec"/>
+          <a:blip xmlns:r="http://schemas.openxmlformats.org/officeDocument/2006/relationships" xmlns:a="http://schemas.openxmlformats.org/drawingml/2006/main" r:embed="R7ae9e244246a427a"/>
           <a:stretch xmlns:a="http://schemas.openxmlformats.org/drawingml/2006/main"/>
         </p:blipFill>
         <p:spPr>
           <a:xfrm xmlns:a="http://schemas.openxmlformats.org/drawingml/2006/main">
-            <a:off x="7697419" y="220370"/>
+            <a:off x="7697419" y="502920"/>
             <a:ext cx="1107338" cy="310965"/>
           </a:xfrm>
           <a:prstGeom xmlns:a="http://schemas.openxmlformats.org/drawingml/2006/main" prst="rect">
@@ -4035,7 +4305,7 @@
           <p:cNvPr id="2" name="page">
             <a:extLst xmlns:a="http://schemas.openxmlformats.org/drawingml/2006/main">
               <a:ext uri="{FF2B5EF4-FFF2-40B4-BE49-F238E27FC236}">
-                <a16:creationId xmlns:a16="http://schemas.microsoft.com/office/drawing/2014/main" id="{B721AF9C-3A91-4CD3-819E-C25C650FFDC4}"/>
+                <a16:creationId xmlns:a16="http://schemas.microsoft.com/office/drawing/2014/main" id="{CE9FED70-B401-4D6B-9AB7-37E3D8636649}"/>
               </a:ext>
             </a:extLst>
           </p:cNvPr>
@@ -4093,7 +4363,7 @@
           <p:cNvPr id="3" name="fictional-disclosure">
             <a:extLst xmlns:a="http://schemas.openxmlformats.org/drawingml/2006/main">
               <a:ext uri="{FF2B5EF4-FFF2-40B4-BE49-F238E27FC236}">
-                <a16:creationId xmlns:a16="http://schemas.microsoft.com/office/drawing/2014/main" id="{B77EF202-38CA-436D-8C70-8280C9A04606}"/>
+                <a16:creationId xmlns:a16="http://schemas.microsoft.com/office/drawing/2014/main" id="{518AA6D0-C7D9-478A-81EC-982C71A0B346}"/>
               </a:ext>
             </a:extLst>
           </p:cNvPr>
@@ -4148,10 +4418,126 @@
       </p:sp>
       <p:sp>
         <p:nvSpPr>
-          <p:cNvPr id="4" name="upper-chapter-band">
-            <a:extLst xmlns:a="http://schemas.openxmlformats.org/drawingml/2006/main">
-              <a:ext uri="{FF2B5EF4-FFF2-40B4-BE49-F238E27FC236}">
-                <a16:creationId xmlns:a16="http://schemas.microsoft.com/office/drawing/2014/main" id="{9F4D6106-829B-4BA2-9D96-5D9CA2FD9402}"/>
+          <p:cNvPr id="4" name="running-chapter-4">
+            <a:extLst xmlns:a="http://schemas.openxmlformats.org/drawingml/2006/main">
+              <a:ext uri="{FF2B5EF4-FFF2-40B4-BE49-F238E27FC236}">
+                <a16:creationId xmlns:a16="http://schemas.microsoft.com/office/drawing/2014/main" id="{F084B203-9F1E-4DBC-88F9-781FE5238555}"/>
+              </a:ext>
+            </a:extLst>
+          </p:cNvPr>
+          <p:cNvSpPr>
+            <a:spLocks xmlns:a="http://schemas.openxmlformats.org/drawingml/2006/main" noGrp="1"/>
+          </p:cNvSpPr>
+          <p:nvPr/>
+        </p:nvSpPr>
+        <p:spPr>
+          <a:xfrm xmlns:a="http://schemas.openxmlformats.org/drawingml/2006/main">
+            <a:off x="457200" y="109728"/>
+            <a:ext cx="2560320" cy="304800"/>
+          </a:xfrm>
+          <a:prstGeom xmlns:a="http://schemas.openxmlformats.org/drawingml/2006/main" prst="rect">
+            <a:avLst/>
+          </a:prstGeom>
+          <a:noFill xmlns:a="http://schemas.openxmlformats.org/drawingml/2006/main"/>
+          <a:ln xmlns:a="http://schemas.openxmlformats.org/drawingml/2006/main" w="0">
+            <a:noFill/>
+            <a:prstDash val="solid"/>
+          </a:ln>
+        </p:spPr>
+        <p:txBody>
+          <a:bodyPr xmlns:a="http://schemas.openxmlformats.org/drawingml/2006/main" lIns="0" tIns="0" rIns="0" bIns="0" anchor="ctr">
+            <a:noAutofit/>
+          </a:bodyPr>
+          <a:lstStyle xmlns:a="http://schemas.openxmlformats.org/drawingml/2006/main"/>
+          <a:p xmlns:a="http://schemas.openxmlformats.org/drawingml/2006/main">
+            <a:pPr algn="l">
+              <a:defRPr sz="1200" b="0">
+                <a:solidFill>
+                  <a:srgbClr val="38761D"/>
+                </a:solidFill>
+                <a:latin typeface="Noto Sans JP"/>
+                <a:ea typeface="Noto Sans JP"/>
+                <a:cs typeface="Noto Sans JP"/>
+              </a:defRPr>
+            </a:pPr>
+            <a:r>
+              <a:rPr sz="1200" b="0">
+                <a:solidFill>
+                  <a:srgbClr val="38761D"/>
+                </a:solidFill>
+                <a:latin typeface="Noto Sans JP"/>
+                <a:ea typeface="Noto Sans JP"/>
+                <a:cs typeface="Noto Sans JP"/>
+              </a:rPr>
+              <a:t>03 ここまでの結果</a:t>
+            </a:r>
+          </a:p>
+        </p:txBody>
+      </p:sp>
+      <p:sp>
+        <p:nvSpPr>
+          <p:cNvPr id="5" name="running-title-4">
+            <a:extLst xmlns:a="http://schemas.openxmlformats.org/drawingml/2006/main">
+              <a:ext uri="{FF2B5EF4-FFF2-40B4-BE49-F238E27FC236}">
+                <a16:creationId xmlns:a16="http://schemas.microsoft.com/office/drawing/2014/main" id="{8819AECB-9B4F-4EC4-B090-5F71B8A48724}"/>
+              </a:ext>
+            </a:extLst>
+          </p:cNvPr>
+          <p:cNvSpPr>
+            <a:spLocks xmlns:a="http://schemas.openxmlformats.org/drawingml/2006/main" noGrp="1"/>
+          </p:cNvSpPr>
+          <p:nvPr/>
+        </p:nvSpPr>
+        <p:spPr>
+          <a:xfrm xmlns:a="http://schemas.openxmlformats.org/drawingml/2006/main">
+            <a:off x="3200400" y="109728"/>
+            <a:ext cx="5486400" cy="304800"/>
+          </a:xfrm>
+          <a:prstGeom xmlns:a="http://schemas.openxmlformats.org/drawingml/2006/main" prst="rect">
+            <a:avLst/>
+          </a:prstGeom>
+          <a:noFill xmlns:a="http://schemas.openxmlformats.org/drawingml/2006/main"/>
+          <a:ln xmlns:a="http://schemas.openxmlformats.org/drawingml/2006/main" w="0">
+            <a:noFill/>
+            <a:prstDash val="solid"/>
+          </a:ln>
+        </p:spPr>
+        <p:txBody>
+          <a:bodyPr xmlns:a="http://schemas.openxmlformats.org/drawingml/2006/main" lIns="0" tIns="0" rIns="0" bIns="0" anchor="ctr">
+            <a:noAutofit/>
+          </a:bodyPr>
+          <a:lstStyle xmlns:a="http://schemas.openxmlformats.org/drawingml/2006/main"/>
+          <a:p xmlns:a="http://schemas.openxmlformats.org/drawingml/2006/main">
+            <a:pPr algn="r">
+              <a:defRPr sz="1200" b="0">
+                <a:solidFill>
+                  <a:srgbClr val="38761D"/>
+                </a:solidFill>
+                <a:latin typeface="Noto Sans JP"/>
+                <a:ea typeface="Noto Sans JP"/>
+                <a:cs typeface="Noto Sans JP"/>
+              </a:defRPr>
+            </a:pPr>
+            <a:r>
+              <a:rPr sz="1200" b="0">
+                <a:solidFill>
+                  <a:srgbClr val="38761D"/>
+                </a:solidFill>
+                <a:latin typeface="Noto Sans JP"/>
+                <a:ea typeface="Noto Sans JP"/>
+                <a:cs typeface="Noto Sans JP"/>
+              </a:rPr>
+              <a:t>室内環境ログの記録間隔</a:t>
+            </a:r>
+          </a:p>
+        </p:txBody>
+      </p:sp>
+      <p:sp>
+        <p:nvSpPr>
+          <p:cNvPr id="6" name="upper-chapter-band">
+            <a:extLst xmlns:a="http://schemas.openxmlformats.org/drawingml/2006/main">
+              <a:ext uri="{FF2B5EF4-FFF2-40B4-BE49-F238E27FC236}">
+                <a16:creationId xmlns:a16="http://schemas.microsoft.com/office/drawing/2014/main" id="{5FA7E7E2-D809-423D-BC3C-764CEEAE7E0A}"/>
               </a:ext>
             </a:extLst>
           </p:cNvPr>
@@ -4179,10 +4565,10 @@
       </p:sp>
       <p:sp>
         <p:nvSpPr>
-          <p:cNvPr id="5" name="chapter">
-            <a:extLst xmlns:a="http://schemas.openxmlformats.org/drawingml/2006/main">
-              <a:ext uri="{FF2B5EF4-FFF2-40B4-BE49-F238E27FC236}">
-                <a16:creationId xmlns:a16="http://schemas.microsoft.com/office/drawing/2014/main" id="{E97FE48B-24E0-4B6C-83D0-1A42A1010803}"/>
+          <p:cNvPr id="7" name="chapter">
+            <a:extLst xmlns:a="http://schemas.openxmlformats.org/drawingml/2006/main">
+              <a:ext uri="{FF2B5EF4-FFF2-40B4-BE49-F238E27FC236}">
+                <a16:creationId xmlns:a16="http://schemas.microsoft.com/office/drawing/2014/main" id="{B85FD012-92C3-45E8-B96C-6526D0281647}"/>
               </a:ext>
             </a:extLst>
           </p:cNvPr>
@@ -4237,10 +4623,10 @@
       </p:sp>
       <p:sp>
         <p:nvSpPr>
-          <p:cNvPr id="6" name="chapter-guide">
-            <a:extLst xmlns:a="http://schemas.openxmlformats.org/drawingml/2006/main">
-              <a:ext uri="{FF2B5EF4-FFF2-40B4-BE49-F238E27FC236}">
-                <a16:creationId xmlns:a16="http://schemas.microsoft.com/office/drawing/2014/main" id="{D50848F8-6700-459B-BA92-CBB7AD4390F1}"/>
+          <p:cNvPr id="8" name="chapter-guide">
+            <a:extLst xmlns:a="http://schemas.openxmlformats.org/drawingml/2006/main">
+              <a:ext uri="{FF2B5EF4-FFF2-40B4-BE49-F238E27FC236}">
+                <a16:creationId xmlns:a16="http://schemas.microsoft.com/office/drawing/2014/main" id="{84DA4705-7167-44C0-A820-1FF8C86ECCB2}"/>
               </a:ext>
             </a:extLst>
           </p:cNvPr>
@@ -4296,7 +4682,7 @@
     </p:spTree>
     <p:extLst>
       <p:ext uri="{BB962C8B-B14F-4D97-AF65-F5344CB8AC3E}">
-        <p14:creationId xmlns:p14="http://schemas.microsoft.com/office/powerpoint/2010/main" val="1929780773"/>
+        <p14:creationId xmlns:p14="http://schemas.microsoft.com/office/powerpoint/2010/main" val="1206065301"/>
       </p:ext>
     </p:extLst>
   </p:cSld>
@@ -4324,10 +4710,10 @@
       </p:grpSpPr>
       <p:sp>
         <p:nvSpPr>
-          <p:cNvPr id="44" name="footer-line">
-            <a:extLst xmlns:a="http://schemas.openxmlformats.org/drawingml/2006/main">
-              <a:ext uri="{FF2B5EF4-FFF2-40B4-BE49-F238E27FC236}">
-                <a16:creationId xmlns:a16="http://schemas.microsoft.com/office/drawing/2014/main" id="{1CD94F7C-4BC6-4ABC-9497-96D4E996B6F1}"/>
+          <p:cNvPr id="47" name="footer-line">
+            <a:extLst xmlns:a="http://schemas.openxmlformats.org/drawingml/2006/main">
+              <a:ext uri="{FF2B5EF4-FFF2-40B4-BE49-F238E27FC236}">
+                <a16:creationId xmlns:a16="http://schemas.microsoft.com/office/drawing/2014/main" id="{6CEF54DC-135E-438F-AB25-3E073DB2ED6F}"/>
               </a:ext>
             </a:extLst>
           </p:cNvPr>
@@ -4355,14 +4741,14 @@
       </p:sp>
       <p:pic>
         <p:nvPicPr>
-          <p:cNvPr id="45" name=""/>
+          <p:cNvPr id="48" name=""/>
           <p:cNvPicPr>
             <a:picLocks xmlns:a="http://schemas.openxmlformats.org/drawingml/2006/main" noChangeAspect="1"/>
           </p:cNvPicPr>
           <p:nvPr/>
         </p:nvPicPr>
         <p:blipFill>
-          <a:blip xmlns:r="http://schemas.openxmlformats.org/officeDocument/2006/relationships" xmlns:a="http://schemas.openxmlformats.org/drawingml/2006/main" r:embed="R98d21fd90ca64dbb"/>
+          <a:blip xmlns:r="http://schemas.openxmlformats.org/officeDocument/2006/relationships" xmlns:a="http://schemas.openxmlformats.org/drawingml/2006/main" r:embed="R5ecfe005e6c14474"/>
           <a:stretch xmlns:a="http://schemas.openxmlformats.org/drawingml/2006/main"/>
         </p:blipFill>
         <p:spPr>
@@ -4380,7 +4766,7 @@
           <p:cNvPr id="3" name="page">
             <a:extLst xmlns:a="http://schemas.openxmlformats.org/drawingml/2006/main">
               <a:ext uri="{FF2B5EF4-FFF2-40B4-BE49-F238E27FC236}">
-                <a16:creationId xmlns:a16="http://schemas.microsoft.com/office/drawing/2014/main" id="{83EEACBC-82CC-4E02-B365-45DAF576C07C}"/>
+                <a16:creationId xmlns:a16="http://schemas.microsoft.com/office/drawing/2014/main" id="{3AE0E050-A8B5-4625-B3C0-EF1C1252C437}"/>
               </a:ext>
             </a:extLst>
           </p:cNvPr>
@@ -4438,7 +4824,7 @@
           <p:cNvPr id="4" name="fictional-disclosure">
             <a:extLst xmlns:a="http://schemas.openxmlformats.org/drawingml/2006/main">
               <a:ext uri="{FF2B5EF4-FFF2-40B4-BE49-F238E27FC236}">
-                <a16:creationId xmlns:a16="http://schemas.microsoft.com/office/drawing/2014/main" id="{5D8B11C2-B944-474B-81D1-9B53260580EE}"/>
+                <a16:creationId xmlns:a16="http://schemas.microsoft.com/office/drawing/2014/main" id="{6CFDA008-220E-4298-B430-2C60C4780525}"/>
               </a:ext>
             </a:extLst>
           </p:cNvPr>
@@ -4493,10 +4879,10 @@
       </p:sp>
       <p:sp>
         <p:nvSpPr>
-          <p:cNvPr id="5" name="title">
-            <a:extLst xmlns:a="http://schemas.openxmlformats.org/drawingml/2006/main">
-              <a:ext uri="{FF2B5EF4-FFF2-40B4-BE49-F238E27FC236}">
-                <a16:creationId xmlns:a16="http://schemas.microsoft.com/office/drawing/2014/main" id="{5472CAC0-3CF3-4CB2-A838-98C71A8FE800}"/>
+          <p:cNvPr id="5" name="running-chapter-5">
+            <a:extLst xmlns:a="http://schemas.openxmlformats.org/drawingml/2006/main">
+              <a:ext uri="{FF2B5EF4-FFF2-40B4-BE49-F238E27FC236}">
+                <a16:creationId xmlns:a16="http://schemas.microsoft.com/office/drawing/2014/main" id="{FF8D5020-E6CE-4A6B-9BD5-E54B927086D4}"/>
               </a:ext>
             </a:extLst>
           </p:cNvPr>
@@ -4508,7 +4894,7 @@
         <p:spPr>
           <a:xfrm xmlns:a="http://schemas.openxmlformats.org/drawingml/2006/main">
             <a:off x="457200" y="109728"/>
-            <a:ext cx="8229600" cy="400050"/>
+            <a:ext cx="2560320" cy="304800"/>
           </a:xfrm>
           <a:prstGeom xmlns:a="http://schemas.openxmlformats.org/drawingml/2006/main" prst="rect">
             <a:avLst/>
@@ -4526,47 +4912,47 @@
           <a:lstStyle xmlns:a="http://schemas.openxmlformats.org/drawingml/2006/main"/>
           <a:p xmlns:a="http://schemas.openxmlformats.org/drawingml/2006/main">
             <a:pPr algn="l">
-              <a:defRPr sz="2700" b="1">
-                <a:solidFill>
-                  <a:srgbClr val="17202A"/>
-                </a:solidFill>
-                <a:latin typeface="Noto Sans JP"/>
-                <a:ea typeface="Noto Sans JP"/>
-                <a:cs typeface="Noto Sans JP"/>
-              </a:defRPr>
-            </a:pPr>
-            <a:r>
-              <a:rPr sz="2700" b="1">
-                <a:solidFill>
-                  <a:srgbClr val="17202A"/>
-                </a:solidFill>
-                <a:latin typeface="Noto Sans JP"/>
-                <a:ea typeface="Noto Sans JP"/>
-                <a:cs typeface="Noto Sans JP"/>
-              </a:rPr>
-              <a:t>同じ入力の間引き</a:t>
-            </a:r>
-          </a:p>
-        </p:txBody>
-      </p:sp>
-      <p:sp>
-        <p:nvSpPr>
-          <p:cNvPr id="6" name="message">
-            <a:extLst xmlns:a="http://schemas.openxmlformats.org/drawingml/2006/main">
-              <a:ext uri="{FF2B5EF4-FFF2-40B4-BE49-F238E27FC236}">
-                <a16:creationId xmlns:a16="http://schemas.microsoft.com/office/drawing/2014/main" id="{5CA68222-6B8C-44DE-8324-30895B744488}"/>
-              </a:ext>
-            </a:extLst>
-          </p:cNvPr>
-          <p:cNvSpPr>
-            <a:spLocks xmlns:a="http://schemas.openxmlformats.org/drawingml/2006/main" noGrp="1"/>
-          </p:cNvSpPr>
-          <p:nvPr/>
-        </p:nvSpPr>
-        <p:spPr>
-          <a:xfrm xmlns:a="http://schemas.openxmlformats.org/drawingml/2006/main">
-            <a:off x="457200" y="621792"/>
-            <a:ext cx="8229600" cy="694944"/>
+              <a:defRPr sz="1200" b="0">
+                <a:solidFill>
+                  <a:srgbClr val="38761D"/>
+                </a:solidFill>
+                <a:latin typeface="Noto Sans JP"/>
+                <a:ea typeface="Noto Sans JP"/>
+                <a:cs typeface="Noto Sans JP"/>
+              </a:defRPr>
+            </a:pPr>
+            <a:r>
+              <a:rPr sz="1200" b="0">
+                <a:solidFill>
+                  <a:srgbClr val="38761D"/>
+                </a:solidFill>
+                <a:latin typeface="Noto Sans JP"/>
+                <a:ea typeface="Noto Sans JP"/>
+                <a:cs typeface="Noto Sans JP"/>
+              </a:rPr>
+              <a:t>02 しくみと評価方法</a:t>
+            </a:r>
+          </a:p>
+        </p:txBody>
+      </p:sp>
+      <p:sp>
+        <p:nvSpPr>
+          <p:cNvPr id="6" name="running-title-5">
+            <a:extLst xmlns:a="http://schemas.openxmlformats.org/drawingml/2006/main">
+              <a:ext uri="{FF2B5EF4-FFF2-40B4-BE49-F238E27FC236}">
+                <a16:creationId xmlns:a16="http://schemas.microsoft.com/office/drawing/2014/main" id="{2DFEF992-208B-462D-BB89-8875C51ED107}"/>
+              </a:ext>
+            </a:extLst>
+          </p:cNvPr>
+          <p:cNvSpPr>
+            <a:spLocks xmlns:a="http://schemas.openxmlformats.org/drawingml/2006/main" noGrp="1"/>
+          </p:cNvSpPr>
+          <p:nvPr/>
+        </p:nvSpPr>
+        <p:spPr>
+          <a:xfrm xmlns:a="http://schemas.openxmlformats.org/drawingml/2006/main">
+            <a:off x="3200400" y="109728"/>
+            <a:ext cx="5486400" cy="304800"/>
           </a:xfrm>
           <a:prstGeom xmlns:a="http://schemas.openxmlformats.org/drawingml/2006/main" prst="rect">
             <a:avLst/>
@@ -4583,48 +4969,48 @@
           </a:bodyPr>
           <a:lstStyle xmlns:a="http://schemas.openxmlformats.org/drawingml/2006/main"/>
           <a:p xmlns:a="http://schemas.openxmlformats.org/drawingml/2006/main">
-            <a:pPr algn="l">
-              <a:defRPr sz="2300" b="1">
-                <a:solidFill>
-                  <a:srgbClr val="17202A"/>
-                </a:solidFill>
-                <a:latin typeface="Noto Sans JP"/>
-                <a:ea typeface="Noto Sans JP"/>
-                <a:cs typeface="Noto Sans JP"/>
-              </a:defRPr>
-            </a:pPr>
-            <a:r>
-              <a:rPr sz="2300" b="1">
-                <a:solidFill>
-                  <a:srgbClr val="17202A"/>
-                </a:solidFill>
-                <a:latin typeface="Noto Sans JP"/>
-                <a:ea typeface="Noto Sans JP"/>
-                <a:cs typeface="Noto Sans JP"/>
-              </a:rPr>
-              <a:t>全13点から、0・5・10分の3点だけを保持する</a:t>
-            </a:r>
-          </a:p>
-        </p:txBody>
-      </p:sp>
-      <p:sp>
-        <p:nvSpPr>
-          <p:cNvPr id="7" name="all-label">
-            <a:extLst xmlns:a="http://schemas.openxmlformats.org/drawingml/2006/main">
-              <a:ext uri="{FF2B5EF4-FFF2-40B4-BE49-F238E27FC236}">
-                <a16:creationId xmlns:a16="http://schemas.microsoft.com/office/drawing/2014/main" id="{7FAB476F-F621-46F8-8576-6A4ACE16D005}"/>
-              </a:ext>
-            </a:extLst>
-          </p:cNvPr>
-          <p:cNvSpPr>
-            <a:spLocks xmlns:a="http://schemas.openxmlformats.org/drawingml/2006/main" noGrp="1"/>
-          </p:cNvSpPr>
-          <p:nvPr/>
-        </p:nvSpPr>
-        <p:spPr>
-          <a:xfrm xmlns:a="http://schemas.openxmlformats.org/drawingml/2006/main">
-            <a:off x="457200" y="1714500"/>
-            <a:ext cx="2667000" cy="342900"/>
+            <a:pPr algn="r">
+              <a:defRPr sz="1200" b="0">
+                <a:solidFill>
+                  <a:srgbClr val="38761D"/>
+                </a:solidFill>
+                <a:latin typeface="Noto Sans JP"/>
+                <a:ea typeface="Noto Sans JP"/>
+                <a:cs typeface="Noto Sans JP"/>
+              </a:defRPr>
+            </a:pPr>
+            <a:r>
+              <a:rPr sz="1200" b="0">
+                <a:solidFill>
+                  <a:srgbClr val="38761D"/>
+                </a:solidFill>
+                <a:latin typeface="Noto Sans JP"/>
+                <a:ea typeface="Noto Sans JP"/>
+                <a:cs typeface="Noto Sans JP"/>
+              </a:rPr>
+              <a:t>室内環境ログの記録間隔</a:t>
+            </a:r>
+          </a:p>
+        </p:txBody>
+      </p:sp>
+      <p:sp>
+        <p:nvSpPr>
+          <p:cNvPr id="7" name="title">
+            <a:extLst xmlns:a="http://schemas.openxmlformats.org/drawingml/2006/main">
+              <a:ext uri="{FF2B5EF4-FFF2-40B4-BE49-F238E27FC236}">
+                <a16:creationId xmlns:a16="http://schemas.microsoft.com/office/drawing/2014/main" id="{339D3992-F4C8-4F54-BBF4-F60019BBEBBF}"/>
+              </a:ext>
+            </a:extLst>
+          </p:cNvPr>
+          <p:cNvSpPr>
+            <a:spLocks xmlns:a="http://schemas.openxmlformats.org/drawingml/2006/main" noGrp="1"/>
+          </p:cNvSpPr>
+          <p:nvPr/>
+        </p:nvSpPr>
+        <p:spPr>
+          <a:xfrm xmlns:a="http://schemas.openxmlformats.org/drawingml/2006/main">
+            <a:off x="457200" y="475488"/>
+            <a:ext cx="8229600" cy="400050"/>
           </a:xfrm>
           <a:prstGeom xmlns:a="http://schemas.openxmlformats.org/drawingml/2006/main" prst="rect">
             <a:avLst/>
@@ -4642,7 +5028,7 @@
           <a:lstStyle xmlns:a="http://schemas.openxmlformats.org/drawingml/2006/main"/>
           <a:p xmlns:a="http://schemas.openxmlformats.org/drawingml/2006/main">
             <a:pPr algn="l">
-              <a:defRPr sz="1800" b="1">
+              <a:defRPr sz="2700" b="1">
                 <a:solidFill>
                   <a:srgbClr val="17202A"/>
                 </a:solidFill>
@@ -4652,7 +5038,7 @@
               </a:defRPr>
             </a:pPr>
             <a:r>
-              <a:rPr sz="1800" b="1">
+              <a:rPr sz="2700" b="1">
                 <a:solidFill>
                   <a:srgbClr val="17202A"/>
                 </a:solidFill>
@@ -4660,29 +5046,29 @@
                 <a:ea typeface="Noto Sans JP"/>
                 <a:cs typeface="Noto Sans JP"/>
               </a:rPr>
-              <a:t>1分間隔の入力</a:t>
-            </a:r>
-          </a:p>
-        </p:txBody>
-      </p:sp>
-      <p:sp>
-        <p:nvSpPr>
-          <p:cNvPr id="8" name="kept-label">
-            <a:extLst xmlns:a="http://schemas.openxmlformats.org/drawingml/2006/main">
-              <a:ext uri="{FF2B5EF4-FFF2-40B4-BE49-F238E27FC236}">
-                <a16:creationId xmlns:a16="http://schemas.microsoft.com/office/drawing/2014/main" id="{5A9E96F1-D1C9-41F6-AE3C-B9F5768E39C3}"/>
-              </a:ext>
-            </a:extLst>
-          </p:cNvPr>
-          <p:cNvSpPr>
-            <a:spLocks xmlns:a="http://schemas.openxmlformats.org/drawingml/2006/main" noGrp="1"/>
-          </p:cNvSpPr>
-          <p:nvPr/>
-        </p:nvSpPr>
-        <p:spPr>
-          <a:xfrm xmlns:a="http://schemas.openxmlformats.org/drawingml/2006/main">
-            <a:off x="457200" y="3095625"/>
-            <a:ext cx="2667000" cy="342900"/>
+              <a:t>同じ入力の間引き</a:t>
+            </a:r>
+          </a:p>
+        </p:txBody>
+      </p:sp>
+      <p:sp>
+        <p:nvSpPr>
+          <p:cNvPr id="8" name="message">
+            <a:extLst xmlns:a="http://schemas.openxmlformats.org/drawingml/2006/main">
+              <a:ext uri="{FF2B5EF4-FFF2-40B4-BE49-F238E27FC236}">
+                <a16:creationId xmlns:a16="http://schemas.microsoft.com/office/drawing/2014/main" id="{9EE4A592-CE09-4C6C-9DF2-4C2043B0689C}"/>
+              </a:ext>
+            </a:extLst>
+          </p:cNvPr>
+          <p:cNvSpPr>
+            <a:spLocks xmlns:a="http://schemas.openxmlformats.org/drawingml/2006/main" noGrp="1"/>
+          </p:cNvSpPr>
+          <p:nvPr/>
+        </p:nvSpPr>
+        <p:spPr>
+          <a:xfrm xmlns:a="http://schemas.openxmlformats.org/drawingml/2006/main">
+            <a:off x="457200" y="914400"/>
+            <a:ext cx="8229600" cy="548640"/>
           </a:xfrm>
           <a:prstGeom xmlns:a="http://schemas.openxmlformats.org/drawingml/2006/main" prst="rect">
             <a:avLst/>
@@ -4700,6 +5086,64 @@
           <a:lstStyle xmlns:a="http://schemas.openxmlformats.org/drawingml/2006/main"/>
           <a:p xmlns:a="http://schemas.openxmlformats.org/drawingml/2006/main">
             <a:pPr algn="l">
+              <a:defRPr sz="2300" b="1">
+                <a:solidFill>
+                  <a:srgbClr val="17202A"/>
+                </a:solidFill>
+                <a:latin typeface="Noto Sans JP"/>
+                <a:ea typeface="Noto Sans JP"/>
+                <a:cs typeface="Noto Sans JP"/>
+              </a:defRPr>
+            </a:pPr>
+            <a:r>
+              <a:rPr sz="2300" b="1">
+                <a:solidFill>
+                  <a:srgbClr val="17202A"/>
+                </a:solidFill>
+                <a:latin typeface="Noto Sans JP"/>
+                <a:ea typeface="Noto Sans JP"/>
+                <a:cs typeface="Noto Sans JP"/>
+              </a:rPr>
+              <a:t>全13点から、0・5・10分の3点だけを保持する [1]</a:t>
+            </a:r>
+          </a:p>
+        </p:txBody>
+      </p:sp>
+      <p:sp>
+        <p:nvSpPr>
+          <p:cNvPr id="9" name="all-label">
+            <a:extLst xmlns:a="http://schemas.openxmlformats.org/drawingml/2006/main">
+              <a:ext uri="{FF2B5EF4-FFF2-40B4-BE49-F238E27FC236}">
+                <a16:creationId xmlns:a16="http://schemas.microsoft.com/office/drawing/2014/main" id="{38E0CFF2-33A0-45F4-89BD-6B7CEC6CE245}"/>
+              </a:ext>
+            </a:extLst>
+          </p:cNvPr>
+          <p:cNvSpPr>
+            <a:spLocks xmlns:a="http://schemas.openxmlformats.org/drawingml/2006/main" noGrp="1"/>
+          </p:cNvSpPr>
+          <p:nvPr/>
+        </p:nvSpPr>
+        <p:spPr>
+          <a:xfrm xmlns:a="http://schemas.openxmlformats.org/drawingml/2006/main">
+            <a:off x="457200" y="1714500"/>
+            <a:ext cx="2667000" cy="342900"/>
+          </a:xfrm>
+          <a:prstGeom xmlns:a="http://schemas.openxmlformats.org/drawingml/2006/main" prst="rect">
+            <a:avLst/>
+          </a:prstGeom>
+          <a:noFill xmlns:a="http://schemas.openxmlformats.org/drawingml/2006/main"/>
+          <a:ln xmlns:a="http://schemas.openxmlformats.org/drawingml/2006/main" w="0">
+            <a:noFill/>
+            <a:prstDash val="solid"/>
+          </a:ln>
+        </p:spPr>
+        <p:txBody>
+          <a:bodyPr xmlns:a="http://schemas.openxmlformats.org/drawingml/2006/main" lIns="0" tIns="0" rIns="0" bIns="0" anchor="ctr">
+            <a:noAutofit/>
+          </a:bodyPr>
+          <a:lstStyle xmlns:a="http://schemas.openxmlformats.org/drawingml/2006/main"/>
+          <a:p xmlns:a="http://schemas.openxmlformats.org/drawingml/2006/main">
+            <a:pPr algn="l">
               <a:defRPr sz="1800" b="1">
                 <a:solidFill>
                   <a:srgbClr val="17202A"/>
@@ -4718,6 +5162,64 @@
                 <a:ea typeface="Noto Sans JP"/>
                 <a:cs typeface="Noto Sans JP"/>
               </a:rPr>
+              <a:t>1分間隔の入力</a:t>
+            </a:r>
+          </a:p>
+        </p:txBody>
+      </p:sp>
+      <p:sp>
+        <p:nvSpPr>
+          <p:cNvPr id="10" name="kept-label">
+            <a:extLst xmlns:a="http://schemas.openxmlformats.org/drawingml/2006/main">
+              <a:ext uri="{FF2B5EF4-FFF2-40B4-BE49-F238E27FC236}">
+                <a16:creationId xmlns:a16="http://schemas.microsoft.com/office/drawing/2014/main" id="{CDDF9E05-EDCF-4A65-BD97-33342E78BCC0}"/>
+              </a:ext>
+            </a:extLst>
+          </p:cNvPr>
+          <p:cNvSpPr>
+            <a:spLocks xmlns:a="http://schemas.openxmlformats.org/drawingml/2006/main" noGrp="1"/>
+          </p:cNvSpPr>
+          <p:nvPr/>
+        </p:nvSpPr>
+        <p:spPr>
+          <a:xfrm xmlns:a="http://schemas.openxmlformats.org/drawingml/2006/main">
+            <a:off x="457200" y="3095625"/>
+            <a:ext cx="2667000" cy="342900"/>
+          </a:xfrm>
+          <a:prstGeom xmlns:a="http://schemas.openxmlformats.org/drawingml/2006/main" prst="rect">
+            <a:avLst/>
+          </a:prstGeom>
+          <a:noFill xmlns:a="http://schemas.openxmlformats.org/drawingml/2006/main"/>
+          <a:ln xmlns:a="http://schemas.openxmlformats.org/drawingml/2006/main" w="0">
+            <a:noFill/>
+            <a:prstDash val="solid"/>
+          </a:ln>
+        </p:spPr>
+        <p:txBody>
+          <a:bodyPr xmlns:a="http://schemas.openxmlformats.org/drawingml/2006/main" lIns="0" tIns="0" rIns="0" bIns="0" anchor="ctr">
+            <a:noAutofit/>
+          </a:bodyPr>
+          <a:lstStyle xmlns:a="http://schemas.openxmlformats.org/drawingml/2006/main"/>
+          <a:p xmlns:a="http://schemas.openxmlformats.org/drawingml/2006/main">
+            <a:pPr algn="l">
+              <a:defRPr sz="1800" b="1">
+                <a:solidFill>
+                  <a:srgbClr val="17202A"/>
+                </a:solidFill>
+                <a:latin typeface="Noto Sans JP"/>
+                <a:ea typeface="Noto Sans JP"/>
+                <a:cs typeface="Noto Sans JP"/>
+              </a:defRPr>
+            </a:pPr>
+            <a:r>
+              <a:rPr sz="1800" b="1">
+                <a:solidFill>
+                  <a:srgbClr val="17202A"/>
+                </a:solidFill>
+                <a:latin typeface="Noto Sans JP"/>
+                <a:ea typeface="Noto Sans JP"/>
+                <a:cs typeface="Noto Sans JP"/>
+              </a:rPr>
               <a:t>5分間隔で保持</a:t>
             </a:r>
           </a:p>
@@ -4725,10 +5227,10 @@
       </p:sp>
       <p:sp>
         <p:nvSpPr>
-          <p:cNvPr id="9" name="input-0">
-            <a:extLst xmlns:a="http://schemas.openxmlformats.org/drawingml/2006/main">
-              <a:ext uri="{FF2B5EF4-FFF2-40B4-BE49-F238E27FC236}">
-                <a16:creationId xmlns:a16="http://schemas.microsoft.com/office/drawing/2014/main" id="{80B08A9D-7D28-470C-980B-8BDAC4BE8125}"/>
+          <p:cNvPr id="11" name="input-0">
+            <a:extLst xmlns:a="http://schemas.openxmlformats.org/drawingml/2006/main">
+              <a:ext uri="{FF2B5EF4-FFF2-40B4-BE49-F238E27FC236}">
+                <a16:creationId xmlns:a16="http://schemas.microsoft.com/office/drawing/2014/main" id="{A79EC208-DF17-4D98-BA12-151E8982A28C}"/>
               </a:ext>
             </a:extLst>
           </p:cNvPr>
@@ -4756,10 +5258,10 @@
       </p:sp>
       <p:sp>
         <p:nvSpPr>
-          <p:cNvPr id="10" name="minute-0">
-            <a:extLst xmlns:a="http://schemas.openxmlformats.org/drawingml/2006/main">
-              <a:ext uri="{FF2B5EF4-FFF2-40B4-BE49-F238E27FC236}">
-                <a16:creationId xmlns:a16="http://schemas.microsoft.com/office/drawing/2014/main" id="{FDF69DB9-ACCA-4769-929C-33E6CB7C67D7}"/>
+          <p:cNvPr id="12" name="minute-0">
+            <a:extLst xmlns:a="http://schemas.openxmlformats.org/drawingml/2006/main">
+              <a:ext uri="{FF2B5EF4-FFF2-40B4-BE49-F238E27FC236}">
+                <a16:creationId xmlns:a16="http://schemas.microsoft.com/office/drawing/2014/main" id="{E9C5622D-0F67-4FD2-A14B-2F108C575DFE}"/>
               </a:ext>
             </a:extLst>
           </p:cNvPr>
@@ -4814,10 +5316,10 @@
       </p:sp>
       <p:sp>
         <p:nvSpPr>
-          <p:cNvPr id="11" name="retained-0">
-            <a:extLst xmlns:a="http://schemas.openxmlformats.org/drawingml/2006/main">
-              <a:ext uri="{FF2B5EF4-FFF2-40B4-BE49-F238E27FC236}">
-                <a16:creationId xmlns:a16="http://schemas.microsoft.com/office/drawing/2014/main" id="{BF41E88D-9CA2-4842-82F0-06A3E310265D}"/>
+          <p:cNvPr id="13" name="retained-0">
+            <a:extLst xmlns:a="http://schemas.openxmlformats.org/drawingml/2006/main">
+              <a:ext uri="{FF2B5EF4-FFF2-40B4-BE49-F238E27FC236}">
+                <a16:creationId xmlns:a16="http://schemas.microsoft.com/office/drawing/2014/main" id="{B02AD77E-955B-4D6D-929B-91EE45B4EFF8}"/>
               </a:ext>
             </a:extLst>
           </p:cNvPr>
@@ -4835,7 +5337,7 @@
             <a:avLst/>
           </a:prstGeom>
           <a:solidFill xmlns:a="http://schemas.openxmlformats.org/drawingml/2006/main">
-            <a:srgbClr val="9BBB59"/>
+            <a:srgbClr val="38761D"/>
           </a:solidFill>
           <a:ln xmlns:a="http://schemas.openxmlformats.org/drawingml/2006/main" w="11430">
             <a:solidFill>
@@ -4847,10 +5349,10 @@
       </p:sp>
       <p:cxnSp>
         <p:nvCxnSpPr>
-          <p:cNvPr id="55" name=""/>
+          <p:cNvPr id="60" name=""/>
           <p:cNvCxnSpPr>
-            <a:stCxn xmlns:a="http://schemas.openxmlformats.org/drawingml/2006/main" id="9" idx="4"/>
-            <a:endCxn xmlns:a="http://schemas.openxmlformats.org/drawingml/2006/main" id="11" idx="0"/>
+            <a:stCxn xmlns:a="http://schemas.openxmlformats.org/drawingml/2006/main" id="11" idx="4"/>
+            <a:endCxn xmlns:a="http://schemas.openxmlformats.org/drawingml/2006/main" id="13" idx="0"/>
           </p:cNvCxnSpPr>
           <p:nvPr/>
         </p:nvCxnSpPr>
@@ -4872,10 +5374,10 @@
       </p:cxnSp>
       <p:sp>
         <p:nvSpPr>
-          <p:cNvPr id="13" name="input-1">
-            <a:extLst xmlns:a="http://schemas.openxmlformats.org/drawingml/2006/main">
-              <a:ext uri="{FF2B5EF4-FFF2-40B4-BE49-F238E27FC236}">
-                <a16:creationId xmlns:a16="http://schemas.microsoft.com/office/drawing/2014/main" id="{32B2CB22-29CA-42AE-9565-11727B36D6B5}"/>
+          <p:cNvPr id="15" name="input-1">
+            <a:extLst xmlns:a="http://schemas.openxmlformats.org/drawingml/2006/main">
+              <a:ext uri="{FF2B5EF4-FFF2-40B4-BE49-F238E27FC236}">
+                <a16:creationId xmlns:a16="http://schemas.microsoft.com/office/drawing/2014/main" id="{09C27231-DEE0-459F-A0DE-AF78F1535E57}"/>
               </a:ext>
             </a:extLst>
           </p:cNvPr>
@@ -4903,10 +5405,10 @@
       </p:sp>
       <p:sp>
         <p:nvSpPr>
-          <p:cNvPr id="14" name="minute-1">
-            <a:extLst xmlns:a="http://schemas.openxmlformats.org/drawingml/2006/main">
-              <a:ext uri="{FF2B5EF4-FFF2-40B4-BE49-F238E27FC236}">
-                <a16:creationId xmlns:a16="http://schemas.microsoft.com/office/drawing/2014/main" id="{80C5C4F9-FA4C-4BDA-A661-67D60C5A4198}"/>
+          <p:cNvPr id="16" name="minute-1">
+            <a:extLst xmlns:a="http://schemas.openxmlformats.org/drawingml/2006/main">
+              <a:ext uri="{FF2B5EF4-FFF2-40B4-BE49-F238E27FC236}">
+                <a16:creationId xmlns:a16="http://schemas.microsoft.com/office/drawing/2014/main" id="{29544B49-B300-42D4-A07D-308A05BF64C3}"/>
               </a:ext>
             </a:extLst>
           </p:cNvPr>
@@ -4961,10 +5463,10 @@
       </p:sp>
       <p:sp>
         <p:nvSpPr>
-          <p:cNvPr id="15" name="input-2">
-            <a:extLst xmlns:a="http://schemas.openxmlformats.org/drawingml/2006/main">
-              <a:ext uri="{FF2B5EF4-FFF2-40B4-BE49-F238E27FC236}">
-                <a16:creationId xmlns:a16="http://schemas.microsoft.com/office/drawing/2014/main" id="{C8D35B2F-B220-44F1-8D8C-86CD383A6C52}"/>
+          <p:cNvPr id="17" name="input-2">
+            <a:extLst xmlns:a="http://schemas.openxmlformats.org/drawingml/2006/main">
+              <a:ext uri="{FF2B5EF4-FFF2-40B4-BE49-F238E27FC236}">
+                <a16:creationId xmlns:a16="http://schemas.microsoft.com/office/drawing/2014/main" id="{DF855C2B-8853-4420-A3D8-7124CA49D70A}"/>
               </a:ext>
             </a:extLst>
           </p:cNvPr>
@@ -4992,10 +5494,10 @@
       </p:sp>
       <p:sp>
         <p:nvSpPr>
-          <p:cNvPr id="16" name="minute-2">
-            <a:extLst xmlns:a="http://schemas.openxmlformats.org/drawingml/2006/main">
-              <a:ext uri="{FF2B5EF4-FFF2-40B4-BE49-F238E27FC236}">
-                <a16:creationId xmlns:a16="http://schemas.microsoft.com/office/drawing/2014/main" id="{7179E3E8-6FB8-4484-A485-38ED5D74CAEC}"/>
+          <p:cNvPr id="18" name="minute-2">
+            <a:extLst xmlns:a="http://schemas.openxmlformats.org/drawingml/2006/main">
+              <a:ext uri="{FF2B5EF4-FFF2-40B4-BE49-F238E27FC236}">
+                <a16:creationId xmlns:a16="http://schemas.microsoft.com/office/drawing/2014/main" id="{F9A50981-4F80-4752-836D-4C9C22FE1094}"/>
               </a:ext>
             </a:extLst>
           </p:cNvPr>
@@ -5050,10 +5552,10 @@
       </p:sp>
       <p:sp>
         <p:nvSpPr>
-          <p:cNvPr id="17" name="input-3">
-            <a:extLst xmlns:a="http://schemas.openxmlformats.org/drawingml/2006/main">
-              <a:ext uri="{FF2B5EF4-FFF2-40B4-BE49-F238E27FC236}">
-                <a16:creationId xmlns:a16="http://schemas.microsoft.com/office/drawing/2014/main" id="{A5A03426-AEC4-44F6-8E04-38FE6C83D772}"/>
+          <p:cNvPr id="19" name="input-3">
+            <a:extLst xmlns:a="http://schemas.openxmlformats.org/drawingml/2006/main">
+              <a:ext uri="{FF2B5EF4-FFF2-40B4-BE49-F238E27FC236}">
+                <a16:creationId xmlns:a16="http://schemas.microsoft.com/office/drawing/2014/main" id="{65C106FB-7811-4808-9A3B-A8581A93A4B0}"/>
               </a:ext>
             </a:extLst>
           </p:cNvPr>
@@ -5081,10 +5583,10 @@
       </p:sp>
       <p:sp>
         <p:nvSpPr>
-          <p:cNvPr id="18" name="minute-3">
-            <a:extLst xmlns:a="http://schemas.openxmlformats.org/drawingml/2006/main">
-              <a:ext uri="{FF2B5EF4-FFF2-40B4-BE49-F238E27FC236}">
-                <a16:creationId xmlns:a16="http://schemas.microsoft.com/office/drawing/2014/main" id="{DBE10442-BB9E-4D9E-B93E-1F731655F07A}"/>
+          <p:cNvPr id="20" name="minute-3">
+            <a:extLst xmlns:a="http://schemas.openxmlformats.org/drawingml/2006/main">
+              <a:ext uri="{FF2B5EF4-FFF2-40B4-BE49-F238E27FC236}">
+                <a16:creationId xmlns:a16="http://schemas.microsoft.com/office/drawing/2014/main" id="{953DFDF5-A3CF-4C0A-8330-287218079E7B}"/>
               </a:ext>
             </a:extLst>
           </p:cNvPr>
@@ -5139,10 +5641,10 @@
       </p:sp>
       <p:sp>
         <p:nvSpPr>
-          <p:cNvPr id="19" name="input-4">
-            <a:extLst xmlns:a="http://schemas.openxmlformats.org/drawingml/2006/main">
-              <a:ext uri="{FF2B5EF4-FFF2-40B4-BE49-F238E27FC236}">
-                <a16:creationId xmlns:a16="http://schemas.microsoft.com/office/drawing/2014/main" id="{0B75ED82-640B-4DB8-AF9D-130C9DE8656A}"/>
+          <p:cNvPr id="21" name="input-4">
+            <a:extLst xmlns:a="http://schemas.openxmlformats.org/drawingml/2006/main">
+              <a:ext uri="{FF2B5EF4-FFF2-40B4-BE49-F238E27FC236}">
+                <a16:creationId xmlns:a16="http://schemas.microsoft.com/office/drawing/2014/main" id="{583BF31E-F914-4B2A-B526-F4E0CCF03224}"/>
               </a:ext>
             </a:extLst>
           </p:cNvPr>
@@ -5170,10 +5672,10 @@
       </p:sp>
       <p:sp>
         <p:nvSpPr>
-          <p:cNvPr id="20" name="minute-4">
-            <a:extLst xmlns:a="http://schemas.openxmlformats.org/drawingml/2006/main">
-              <a:ext uri="{FF2B5EF4-FFF2-40B4-BE49-F238E27FC236}">
-                <a16:creationId xmlns:a16="http://schemas.microsoft.com/office/drawing/2014/main" id="{F457993C-D896-467A-BBD7-8DC5505B3A91}"/>
+          <p:cNvPr id="22" name="minute-4">
+            <a:extLst xmlns:a="http://schemas.openxmlformats.org/drawingml/2006/main">
+              <a:ext uri="{FF2B5EF4-FFF2-40B4-BE49-F238E27FC236}">
+                <a16:creationId xmlns:a16="http://schemas.microsoft.com/office/drawing/2014/main" id="{EF9E85FB-03A1-4AB3-94C7-D9F6A4407964}"/>
               </a:ext>
             </a:extLst>
           </p:cNvPr>
@@ -5228,10 +5730,10 @@
       </p:sp>
       <p:sp>
         <p:nvSpPr>
-          <p:cNvPr id="21" name="input-5">
-            <a:extLst xmlns:a="http://schemas.openxmlformats.org/drawingml/2006/main">
-              <a:ext uri="{FF2B5EF4-FFF2-40B4-BE49-F238E27FC236}">
-                <a16:creationId xmlns:a16="http://schemas.microsoft.com/office/drawing/2014/main" id="{371C99DE-96BA-4F5D-B4D5-529C72841828}"/>
+          <p:cNvPr id="23" name="input-5">
+            <a:extLst xmlns:a="http://schemas.openxmlformats.org/drawingml/2006/main">
+              <a:ext uri="{FF2B5EF4-FFF2-40B4-BE49-F238E27FC236}">
+                <a16:creationId xmlns:a16="http://schemas.microsoft.com/office/drawing/2014/main" id="{16B3B8F5-C612-4398-BBCF-CB8603BE80FA}"/>
               </a:ext>
             </a:extLst>
           </p:cNvPr>
@@ -5259,10 +5761,10 @@
       </p:sp>
       <p:sp>
         <p:nvSpPr>
-          <p:cNvPr id="22" name="minute-5">
-            <a:extLst xmlns:a="http://schemas.openxmlformats.org/drawingml/2006/main">
-              <a:ext uri="{FF2B5EF4-FFF2-40B4-BE49-F238E27FC236}">
-                <a16:creationId xmlns:a16="http://schemas.microsoft.com/office/drawing/2014/main" id="{0AE745BC-6CBC-493B-8305-C60541D730A6}"/>
+          <p:cNvPr id="24" name="minute-5">
+            <a:extLst xmlns:a="http://schemas.openxmlformats.org/drawingml/2006/main">
+              <a:ext uri="{FF2B5EF4-FFF2-40B4-BE49-F238E27FC236}">
+                <a16:creationId xmlns:a16="http://schemas.microsoft.com/office/drawing/2014/main" id="{89F14E31-BEA9-43DC-BADB-09177DE9180E}"/>
               </a:ext>
             </a:extLst>
           </p:cNvPr>
@@ -5317,10 +5819,10 @@
       </p:sp>
       <p:sp>
         <p:nvSpPr>
-          <p:cNvPr id="23" name="retained-5">
-            <a:extLst xmlns:a="http://schemas.openxmlformats.org/drawingml/2006/main">
-              <a:ext uri="{FF2B5EF4-FFF2-40B4-BE49-F238E27FC236}">
-                <a16:creationId xmlns:a16="http://schemas.microsoft.com/office/drawing/2014/main" id="{F463E90C-ACE2-4800-9EF5-4D15BE04CC38}"/>
+          <p:cNvPr id="25" name="retained-5">
+            <a:extLst xmlns:a="http://schemas.openxmlformats.org/drawingml/2006/main">
+              <a:ext uri="{FF2B5EF4-FFF2-40B4-BE49-F238E27FC236}">
+                <a16:creationId xmlns:a16="http://schemas.microsoft.com/office/drawing/2014/main" id="{CA9A171D-CF29-44C6-9592-D976CDDB8571}"/>
               </a:ext>
             </a:extLst>
           </p:cNvPr>
@@ -5338,7 +5840,7 @@
             <a:avLst/>
           </a:prstGeom>
           <a:solidFill xmlns:a="http://schemas.openxmlformats.org/drawingml/2006/main">
-            <a:srgbClr val="9BBB59"/>
+            <a:srgbClr val="38761D"/>
           </a:solidFill>
           <a:ln xmlns:a="http://schemas.openxmlformats.org/drawingml/2006/main" w="11430">
             <a:solidFill>
@@ -5350,10 +5852,10 @@
       </p:sp>
       <p:cxnSp>
         <p:nvCxnSpPr>
-          <p:cNvPr id="67" name=""/>
+          <p:cNvPr id="72" name=""/>
           <p:cNvCxnSpPr>
-            <a:stCxn xmlns:a="http://schemas.openxmlformats.org/drawingml/2006/main" id="21" idx="4"/>
-            <a:endCxn xmlns:a="http://schemas.openxmlformats.org/drawingml/2006/main" id="23" idx="0"/>
+            <a:stCxn xmlns:a="http://schemas.openxmlformats.org/drawingml/2006/main" id="23" idx="4"/>
+            <a:endCxn xmlns:a="http://schemas.openxmlformats.org/drawingml/2006/main" id="25" idx="0"/>
           </p:cNvCxnSpPr>
           <p:nvPr/>
         </p:nvCxnSpPr>
@@ -5375,10 +5877,10 @@
       </p:cxnSp>
       <p:sp>
         <p:nvSpPr>
-          <p:cNvPr id="25" name="input-6">
-            <a:extLst xmlns:a="http://schemas.openxmlformats.org/drawingml/2006/main">
-              <a:ext uri="{FF2B5EF4-FFF2-40B4-BE49-F238E27FC236}">
-                <a16:creationId xmlns:a16="http://schemas.microsoft.com/office/drawing/2014/main" id="{F0B8B5AA-6010-45BE-8171-BC832D6B4F17}"/>
+          <p:cNvPr id="27" name="input-6">
+            <a:extLst xmlns:a="http://schemas.openxmlformats.org/drawingml/2006/main">
+              <a:ext uri="{FF2B5EF4-FFF2-40B4-BE49-F238E27FC236}">
+                <a16:creationId xmlns:a16="http://schemas.microsoft.com/office/drawing/2014/main" id="{7980C339-F2BE-4E41-B247-60F8D84706F5}"/>
               </a:ext>
             </a:extLst>
           </p:cNvPr>
@@ -5406,10 +5908,10 @@
       </p:sp>
       <p:sp>
         <p:nvSpPr>
-          <p:cNvPr id="26" name="minute-6">
-            <a:extLst xmlns:a="http://schemas.openxmlformats.org/drawingml/2006/main">
-              <a:ext uri="{FF2B5EF4-FFF2-40B4-BE49-F238E27FC236}">
-                <a16:creationId xmlns:a16="http://schemas.microsoft.com/office/drawing/2014/main" id="{0857017B-E663-4E07-ABB2-D94AA6449805}"/>
+          <p:cNvPr id="28" name="minute-6">
+            <a:extLst xmlns:a="http://schemas.openxmlformats.org/drawingml/2006/main">
+              <a:ext uri="{FF2B5EF4-FFF2-40B4-BE49-F238E27FC236}">
+                <a16:creationId xmlns:a16="http://schemas.microsoft.com/office/drawing/2014/main" id="{0DDB937B-825C-481D-9E16-3EF2ABDA8380}"/>
               </a:ext>
             </a:extLst>
           </p:cNvPr>
@@ -5464,10 +5966,10 @@
       </p:sp>
       <p:sp>
         <p:nvSpPr>
-          <p:cNvPr id="27" name="input-7">
-            <a:extLst xmlns:a="http://schemas.openxmlformats.org/drawingml/2006/main">
-              <a:ext uri="{FF2B5EF4-FFF2-40B4-BE49-F238E27FC236}">
-                <a16:creationId xmlns:a16="http://schemas.microsoft.com/office/drawing/2014/main" id="{14DEF5AA-2DC5-4760-824B-CC5CF1BA713C}"/>
+          <p:cNvPr id="29" name="input-7">
+            <a:extLst xmlns:a="http://schemas.openxmlformats.org/drawingml/2006/main">
+              <a:ext uri="{FF2B5EF4-FFF2-40B4-BE49-F238E27FC236}">
+                <a16:creationId xmlns:a16="http://schemas.microsoft.com/office/drawing/2014/main" id="{B382E472-DC79-4FCA-9FA5-584833BE2475}"/>
               </a:ext>
             </a:extLst>
           </p:cNvPr>
@@ -5495,10 +5997,10 @@
       </p:sp>
       <p:sp>
         <p:nvSpPr>
-          <p:cNvPr id="28" name="minute-7">
-            <a:extLst xmlns:a="http://schemas.openxmlformats.org/drawingml/2006/main">
-              <a:ext uri="{FF2B5EF4-FFF2-40B4-BE49-F238E27FC236}">
-                <a16:creationId xmlns:a16="http://schemas.microsoft.com/office/drawing/2014/main" id="{66B3F0F0-20AB-4E6F-8F09-7B7E72183963}"/>
+          <p:cNvPr id="30" name="minute-7">
+            <a:extLst xmlns:a="http://schemas.openxmlformats.org/drawingml/2006/main">
+              <a:ext uri="{FF2B5EF4-FFF2-40B4-BE49-F238E27FC236}">
+                <a16:creationId xmlns:a16="http://schemas.microsoft.com/office/drawing/2014/main" id="{2D5C0F4B-5707-4BBD-ABB0-FB6D8451171E}"/>
               </a:ext>
             </a:extLst>
           </p:cNvPr>
@@ -5553,10 +6055,10 @@
       </p:sp>
       <p:sp>
         <p:nvSpPr>
-          <p:cNvPr id="29" name="input-8">
-            <a:extLst xmlns:a="http://schemas.openxmlformats.org/drawingml/2006/main">
-              <a:ext uri="{FF2B5EF4-FFF2-40B4-BE49-F238E27FC236}">
-                <a16:creationId xmlns:a16="http://schemas.microsoft.com/office/drawing/2014/main" id="{D900A5B7-6189-4DAB-B9F9-B1A9861EC088}"/>
+          <p:cNvPr id="31" name="input-8">
+            <a:extLst xmlns:a="http://schemas.openxmlformats.org/drawingml/2006/main">
+              <a:ext uri="{FF2B5EF4-FFF2-40B4-BE49-F238E27FC236}">
+                <a16:creationId xmlns:a16="http://schemas.microsoft.com/office/drawing/2014/main" id="{E61B9A16-1209-4744-B395-89A61F43435A}"/>
               </a:ext>
             </a:extLst>
           </p:cNvPr>
@@ -5584,10 +6086,10 @@
       </p:sp>
       <p:sp>
         <p:nvSpPr>
-          <p:cNvPr id="30" name="minute-8">
-            <a:extLst xmlns:a="http://schemas.openxmlformats.org/drawingml/2006/main">
-              <a:ext uri="{FF2B5EF4-FFF2-40B4-BE49-F238E27FC236}">
-                <a16:creationId xmlns:a16="http://schemas.microsoft.com/office/drawing/2014/main" id="{B20EA91A-EA71-4AEE-9BD3-343AACC9A51C}"/>
+          <p:cNvPr id="32" name="minute-8">
+            <a:extLst xmlns:a="http://schemas.openxmlformats.org/drawingml/2006/main">
+              <a:ext uri="{FF2B5EF4-FFF2-40B4-BE49-F238E27FC236}">
+                <a16:creationId xmlns:a16="http://schemas.microsoft.com/office/drawing/2014/main" id="{208ECD8C-28FB-4DB9-A689-2232AB5A1CDA}"/>
               </a:ext>
             </a:extLst>
           </p:cNvPr>
@@ -5642,10 +6144,10 @@
       </p:sp>
       <p:sp>
         <p:nvSpPr>
-          <p:cNvPr id="31" name="input-9">
-            <a:extLst xmlns:a="http://schemas.openxmlformats.org/drawingml/2006/main">
-              <a:ext uri="{FF2B5EF4-FFF2-40B4-BE49-F238E27FC236}">
-                <a16:creationId xmlns:a16="http://schemas.microsoft.com/office/drawing/2014/main" id="{9D7ACD2A-1D74-4A5F-8DC9-064C8DC2CDDC}"/>
+          <p:cNvPr id="33" name="input-9">
+            <a:extLst xmlns:a="http://schemas.openxmlformats.org/drawingml/2006/main">
+              <a:ext uri="{FF2B5EF4-FFF2-40B4-BE49-F238E27FC236}">
+                <a16:creationId xmlns:a16="http://schemas.microsoft.com/office/drawing/2014/main" id="{EE7A1647-BDA5-4FE3-80E4-8D0BA21F8708}"/>
               </a:ext>
             </a:extLst>
           </p:cNvPr>
@@ -5673,10 +6175,10 @@
       </p:sp>
       <p:sp>
         <p:nvSpPr>
-          <p:cNvPr id="32" name="minute-9">
-            <a:extLst xmlns:a="http://schemas.openxmlformats.org/drawingml/2006/main">
-              <a:ext uri="{FF2B5EF4-FFF2-40B4-BE49-F238E27FC236}">
-                <a16:creationId xmlns:a16="http://schemas.microsoft.com/office/drawing/2014/main" id="{6A1E4CA6-68D1-4591-8EC9-CB6D42817E62}"/>
+          <p:cNvPr id="34" name="minute-9">
+            <a:extLst xmlns:a="http://schemas.openxmlformats.org/drawingml/2006/main">
+              <a:ext uri="{FF2B5EF4-FFF2-40B4-BE49-F238E27FC236}">
+                <a16:creationId xmlns:a16="http://schemas.microsoft.com/office/drawing/2014/main" id="{3F3A3364-FEDD-4E40-8729-6BDCD6E84E98}"/>
               </a:ext>
             </a:extLst>
           </p:cNvPr>
@@ -5731,10 +6233,10 @@
       </p:sp>
       <p:sp>
         <p:nvSpPr>
-          <p:cNvPr id="33" name="input-10">
-            <a:extLst xmlns:a="http://schemas.openxmlformats.org/drawingml/2006/main">
-              <a:ext uri="{FF2B5EF4-FFF2-40B4-BE49-F238E27FC236}">
-                <a16:creationId xmlns:a16="http://schemas.microsoft.com/office/drawing/2014/main" id="{A763D10E-9C35-4809-A76B-D4D812E3D50A}"/>
+          <p:cNvPr id="35" name="input-10">
+            <a:extLst xmlns:a="http://schemas.openxmlformats.org/drawingml/2006/main">
+              <a:ext uri="{FF2B5EF4-FFF2-40B4-BE49-F238E27FC236}">
+                <a16:creationId xmlns:a16="http://schemas.microsoft.com/office/drawing/2014/main" id="{878493E5-DC2E-4767-BDAB-0A8715D14DCC}"/>
               </a:ext>
             </a:extLst>
           </p:cNvPr>
@@ -5762,10 +6264,10 @@
       </p:sp>
       <p:sp>
         <p:nvSpPr>
-          <p:cNvPr id="34" name="minute-10">
-            <a:extLst xmlns:a="http://schemas.openxmlformats.org/drawingml/2006/main">
-              <a:ext uri="{FF2B5EF4-FFF2-40B4-BE49-F238E27FC236}">
-                <a16:creationId xmlns:a16="http://schemas.microsoft.com/office/drawing/2014/main" id="{BC063F09-335C-4503-BFF2-D97D1F334059}"/>
+          <p:cNvPr id="36" name="minute-10">
+            <a:extLst xmlns:a="http://schemas.openxmlformats.org/drawingml/2006/main">
+              <a:ext uri="{FF2B5EF4-FFF2-40B4-BE49-F238E27FC236}">
+                <a16:creationId xmlns:a16="http://schemas.microsoft.com/office/drawing/2014/main" id="{16AA224B-6F33-4F81-8D86-9D25E19F963C}"/>
               </a:ext>
             </a:extLst>
           </p:cNvPr>
@@ -5820,10 +6322,10 @@
       </p:sp>
       <p:sp>
         <p:nvSpPr>
-          <p:cNvPr id="35" name="retained-10">
-            <a:extLst xmlns:a="http://schemas.openxmlformats.org/drawingml/2006/main">
-              <a:ext uri="{FF2B5EF4-FFF2-40B4-BE49-F238E27FC236}">
-                <a16:creationId xmlns:a16="http://schemas.microsoft.com/office/drawing/2014/main" id="{39B8E966-604F-4A1B-B099-6431196BB199}"/>
+          <p:cNvPr id="37" name="retained-10">
+            <a:extLst xmlns:a="http://schemas.openxmlformats.org/drawingml/2006/main">
+              <a:ext uri="{FF2B5EF4-FFF2-40B4-BE49-F238E27FC236}">
+                <a16:creationId xmlns:a16="http://schemas.microsoft.com/office/drawing/2014/main" id="{DCAD5104-2C6C-4EDC-B88B-D19305FB5385}"/>
               </a:ext>
             </a:extLst>
           </p:cNvPr>
@@ -5841,7 +6343,7 @@
             <a:avLst/>
           </a:prstGeom>
           <a:solidFill xmlns:a="http://schemas.openxmlformats.org/drawingml/2006/main">
-            <a:srgbClr val="9BBB59"/>
+            <a:srgbClr val="38761D"/>
           </a:solidFill>
           <a:ln xmlns:a="http://schemas.openxmlformats.org/drawingml/2006/main" w="11430">
             <a:solidFill>
@@ -5853,10 +6355,10 @@
       </p:sp>
       <p:cxnSp>
         <p:nvCxnSpPr>
-          <p:cNvPr id="79" name=""/>
+          <p:cNvPr id="84" name=""/>
           <p:cNvCxnSpPr>
-            <a:stCxn xmlns:a="http://schemas.openxmlformats.org/drawingml/2006/main" id="33" idx="4"/>
-            <a:endCxn xmlns:a="http://schemas.openxmlformats.org/drawingml/2006/main" id="35" idx="0"/>
+            <a:stCxn xmlns:a="http://schemas.openxmlformats.org/drawingml/2006/main" id="35" idx="4"/>
+            <a:endCxn xmlns:a="http://schemas.openxmlformats.org/drawingml/2006/main" id="37" idx="0"/>
           </p:cNvCxnSpPr>
           <p:nvPr/>
         </p:nvCxnSpPr>
@@ -5878,10 +6380,10 @@
       </p:cxnSp>
       <p:sp>
         <p:nvSpPr>
-          <p:cNvPr id="37" name="input-11">
-            <a:extLst xmlns:a="http://schemas.openxmlformats.org/drawingml/2006/main">
-              <a:ext uri="{FF2B5EF4-FFF2-40B4-BE49-F238E27FC236}">
-                <a16:creationId xmlns:a16="http://schemas.microsoft.com/office/drawing/2014/main" id="{E20777E4-DA54-4B4F-951B-845A381EF79E}"/>
+          <p:cNvPr id="39" name="input-11">
+            <a:extLst xmlns:a="http://schemas.openxmlformats.org/drawingml/2006/main">
+              <a:ext uri="{FF2B5EF4-FFF2-40B4-BE49-F238E27FC236}">
+                <a16:creationId xmlns:a16="http://schemas.microsoft.com/office/drawing/2014/main" id="{0844FA5A-C7A1-4916-9E9E-60EFFE449182}"/>
               </a:ext>
             </a:extLst>
           </p:cNvPr>
@@ -5909,10 +6411,10 @@
       </p:sp>
       <p:sp>
         <p:nvSpPr>
-          <p:cNvPr id="38" name="minute-11">
-            <a:extLst xmlns:a="http://schemas.openxmlformats.org/drawingml/2006/main">
-              <a:ext uri="{FF2B5EF4-FFF2-40B4-BE49-F238E27FC236}">
-                <a16:creationId xmlns:a16="http://schemas.microsoft.com/office/drawing/2014/main" id="{AED54922-6E04-40F8-8007-9DCA1E814576}"/>
+          <p:cNvPr id="40" name="minute-11">
+            <a:extLst xmlns:a="http://schemas.openxmlformats.org/drawingml/2006/main">
+              <a:ext uri="{FF2B5EF4-FFF2-40B4-BE49-F238E27FC236}">
+                <a16:creationId xmlns:a16="http://schemas.microsoft.com/office/drawing/2014/main" id="{CC76DB99-C936-43BF-82CB-FF1B1466F9B9}"/>
               </a:ext>
             </a:extLst>
           </p:cNvPr>
@@ -5967,10 +6469,10 @@
       </p:sp>
       <p:sp>
         <p:nvSpPr>
-          <p:cNvPr id="39" name="input-12">
-            <a:extLst xmlns:a="http://schemas.openxmlformats.org/drawingml/2006/main">
-              <a:ext uri="{FF2B5EF4-FFF2-40B4-BE49-F238E27FC236}">
-                <a16:creationId xmlns:a16="http://schemas.microsoft.com/office/drawing/2014/main" id="{2E4F03CC-77E1-4C58-9079-602F065C2339}"/>
+          <p:cNvPr id="41" name="input-12">
+            <a:extLst xmlns:a="http://schemas.openxmlformats.org/drawingml/2006/main">
+              <a:ext uri="{FF2B5EF4-FFF2-40B4-BE49-F238E27FC236}">
+                <a16:creationId xmlns:a16="http://schemas.microsoft.com/office/drawing/2014/main" id="{81704F39-36C7-4F5D-BD81-7D23EDE02DC3}"/>
               </a:ext>
             </a:extLst>
           </p:cNvPr>
@@ -5998,10 +6500,10 @@
       </p:sp>
       <p:sp>
         <p:nvSpPr>
-          <p:cNvPr id="40" name="minute-12">
-            <a:extLst xmlns:a="http://schemas.openxmlformats.org/drawingml/2006/main">
-              <a:ext uri="{FF2B5EF4-FFF2-40B4-BE49-F238E27FC236}">
-                <a16:creationId xmlns:a16="http://schemas.microsoft.com/office/drawing/2014/main" id="{86D9BE42-47ED-4852-8EEB-B7FABF44D777}"/>
+          <p:cNvPr id="42" name="minute-12">
+            <a:extLst xmlns:a="http://schemas.openxmlformats.org/drawingml/2006/main">
+              <a:ext uri="{FF2B5EF4-FFF2-40B4-BE49-F238E27FC236}">
+                <a16:creationId xmlns:a16="http://schemas.microsoft.com/office/drawing/2014/main" id="{6C7F1E4F-085F-4EB6-8817-96D6CE6BE161}"/>
               </a:ext>
             </a:extLst>
           </p:cNvPr>
@@ -6056,10 +6558,10 @@
       </p:sp>
       <p:sp>
         <p:nvSpPr>
-          <p:cNvPr id="41" name="axis-unit">
-            <a:extLst xmlns:a="http://schemas.openxmlformats.org/drawingml/2006/main">
-              <a:ext uri="{FF2B5EF4-FFF2-40B4-BE49-F238E27FC236}">
-                <a16:creationId xmlns:a16="http://schemas.microsoft.com/office/drawing/2014/main" id="{B4374FA6-2FDE-4431-9E94-2993D35A5BC8}"/>
+          <p:cNvPr id="43" name="axis-unit">
+            <a:extLst xmlns:a="http://schemas.openxmlformats.org/drawingml/2006/main">
+              <a:ext uri="{FF2B5EF4-FFF2-40B4-BE49-F238E27FC236}">
+                <a16:creationId xmlns:a16="http://schemas.microsoft.com/office/drawing/2014/main" id="{6E1919AF-2436-418E-A3A1-9968D174272B}"/>
               </a:ext>
             </a:extLst>
           </p:cNvPr>
@@ -6114,22 +6616,22 @@
       </p:sp>
       <p:sp>
         <p:nvSpPr>
-          <p:cNvPr id="42" name="arrow-meaning">
-            <a:extLst xmlns:a="http://schemas.openxmlformats.org/drawingml/2006/main">
-              <a:ext uri="{FF2B5EF4-FFF2-40B4-BE49-F238E27FC236}">
-                <a16:creationId xmlns:a16="http://schemas.microsoft.com/office/drawing/2014/main" id="{0F1B02CC-8A04-4E7E-BEF5-3830E64F5A5E}"/>
-              </a:ext>
-            </a:extLst>
-          </p:cNvPr>
-          <p:cNvSpPr>
-            <a:spLocks xmlns:a="http://schemas.openxmlformats.org/drawingml/2006/main" noGrp="1"/>
-          </p:cNvSpPr>
-          <p:nvPr/>
-        </p:nvSpPr>
-        <p:spPr>
-          <a:xfrm xmlns:a="http://schemas.openxmlformats.org/drawingml/2006/main">
-            <a:off x="3238500" y="3838575"/>
-            <a:ext cx="4857750" cy="285750"/>
+          <p:cNvPr id="44" name="arrow-meaning">
+            <a:extLst xmlns:a="http://schemas.openxmlformats.org/drawingml/2006/main">
+              <a:ext uri="{FF2B5EF4-FFF2-40B4-BE49-F238E27FC236}">
+                <a16:creationId xmlns:a16="http://schemas.microsoft.com/office/drawing/2014/main" id="{543CFC32-CC90-4D76-99F0-B1538B8C7397}"/>
+              </a:ext>
+            </a:extLst>
+          </p:cNvPr>
+          <p:cNvSpPr>
+            <a:spLocks xmlns:a="http://schemas.openxmlformats.org/drawingml/2006/main" noGrp="1"/>
+          </p:cNvSpPr>
+          <p:nvPr/>
+        </p:nvSpPr>
+        <p:spPr>
+          <a:xfrm xmlns:a="http://schemas.openxmlformats.org/drawingml/2006/main">
+            <a:off x="3238500" y="3590925"/>
+            <a:ext cx="4857750" cy="247650"/>
           </a:xfrm>
           <a:prstGeom xmlns:a="http://schemas.openxmlformats.org/drawingml/2006/main" prst="rect">
             <a:avLst/>
@@ -6147,7 +6649,7 @@
           <a:lstStyle xmlns:a="http://schemas.openxmlformats.org/drawingml/2006/main"/>
           <a:p xmlns:a="http://schemas.openxmlformats.org/drawingml/2006/main">
             <a:pPr algn="l">
-              <a:defRPr sz="1600" b="0">
+              <a:defRPr sz="1400" b="0">
                 <a:solidFill>
                   <a:srgbClr val="59636E"/>
                 </a:solidFill>
@@ -6157,7 +6659,7 @@
               </a:defRPr>
             </a:pPr>
             <a:r>
-              <a:rPr sz="1600" b="0">
+              <a:rPr sz="1400" b="0">
                 <a:solidFill>
                   <a:srgbClr val="59636E"/>
                 </a:solidFill>
@@ -6172,22 +6674,22 @@
       </p:sp>
       <p:sp>
         <p:nvSpPr>
-          <p:cNvPr id="43" name="source-note">
-            <a:extLst xmlns:a="http://schemas.openxmlformats.org/drawingml/2006/main">
-              <a:ext uri="{FF2B5EF4-FFF2-40B4-BE49-F238E27FC236}">
-                <a16:creationId xmlns:a16="http://schemas.microsoft.com/office/drawing/2014/main" id="{620CFA26-F28F-4F8D-94EA-2CD0C5335758}"/>
-              </a:ext>
-            </a:extLst>
-          </p:cNvPr>
-          <p:cNvSpPr>
-            <a:spLocks xmlns:a="http://schemas.openxmlformats.org/drawingml/2006/main" noGrp="1"/>
-          </p:cNvSpPr>
-          <p:nvPr/>
-        </p:nvSpPr>
-        <p:spPr>
-          <a:xfrm xmlns:a="http://schemas.openxmlformats.org/drawingml/2006/main">
-            <a:off x="457200" y="4191000"/>
-            <a:ext cx="8229600" cy="304800"/>
+          <p:cNvPr id="45" name="source-note">
+            <a:extLst xmlns:a="http://schemas.openxmlformats.org/drawingml/2006/main">
+              <a:ext uri="{FF2B5EF4-FFF2-40B4-BE49-F238E27FC236}">
+                <a16:creationId xmlns:a16="http://schemas.microsoft.com/office/drawing/2014/main" id="{AB706DFE-0FB0-48CC-A83F-96880211C335}"/>
+              </a:ext>
+            </a:extLst>
+          </p:cNvPr>
+          <p:cNvSpPr>
+            <a:spLocks xmlns:a="http://schemas.openxmlformats.org/drawingml/2006/main" noGrp="1"/>
+          </p:cNvSpPr>
+          <p:nvPr/>
+        </p:nvSpPr>
+        <p:spPr>
+          <a:xfrm xmlns:a="http://schemas.openxmlformats.org/drawingml/2006/main">
+            <a:off x="457200" y="3905250"/>
+            <a:ext cx="8229600" cy="266700"/>
           </a:xfrm>
           <a:prstGeom xmlns:a="http://schemas.openxmlformats.org/drawingml/2006/main" prst="rect">
             <a:avLst/>
@@ -6205,7 +6707,7 @@
           <a:lstStyle xmlns:a="http://schemas.openxmlformats.org/drawingml/2006/main"/>
           <a:p xmlns:a="http://schemas.openxmlformats.org/drawingml/2006/main">
             <a:pPr algn="l">
-              <a:defRPr sz="1800" b="0">
+              <a:defRPr sz="1500" b="0">
                 <a:solidFill>
                   <a:srgbClr val="59636E"/>
                 </a:solidFill>
@@ -6215,7 +6717,7 @@
               </a:defRPr>
             </a:pPr>
             <a:r>
-              <a:rPr sz="1800" b="0">
+              <a:rPr sz="1500" b="0">
                 <a:solidFill>
                   <a:srgbClr val="59636E"/>
                 </a:solidFill>
@@ -6224,6 +6726,64 @@
                 <a:cs typeface="Noto Sans JP"/>
               </a:rPr>
               <a:t>合成系列1例／開始時刻0分／間引き処理だけを確認</a:t>
+            </a:r>
+          </a:p>
+        </p:txBody>
+      </p:sp>
+      <p:sp>
+        <p:nvSpPr>
+          <p:cNvPr id="46" name="page-reference">
+            <a:extLst xmlns:a="http://schemas.openxmlformats.org/drawingml/2006/main">
+              <a:ext uri="{FF2B5EF4-FFF2-40B4-BE49-F238E27FC236}">
+                <a16:creationId xmlns:a16="http://schemas.microsoft.com/office/drawing/2014/main" id="{8520B2F2-E973-4CE1-8D74-170000086AB4}"/>
+              </a:ext>
+            </a:extLst>
+          </p:cNvPr>
+          <p:cNvSpPr>
+            <a:spLocks xmlns:a="http://schemas.openxmlformats.org/drawingml/2006/main" noGrp="1"/>
+          </p:cNvSpPr>
+          <p:nvPr/>
+        </p:nvSpPr>
+        <p:spPr>
+          <a:xfrm xmlns:a="http://schemas.openxmlformats.org/drawingml/2006/main">
+            <a:off x="457200" y="4224528"/>
+            <a:ext cx="8229600" cy="329184"/>
+          </a:xfrm>
+          <a:prstGeom xmlns:a="http://schemas.openxmlformats.org/drawingml/2006/main" prst="rect">
+            <a:avLst/>
+          </a:prstGeom>
+          <a:noFill xmlns:a="http://schemas.openxmlformats.org/drawingml/2006/main"/>
+          <a:ln xmlns:a="http://schemas.openxmlformats.org/drawingml/2006/main" w="0">
+            <a:noFill/>
+            <a:prstDash val="solid"/>
+          </a:ln>
+        </p:spPr>
+        <p:txBody>
+          <a:bodyPr xmlns:a="http://schemas.openxmlformats.org/drawingml/2006/main" lIns="0" tIns="0" rIns="0" bIns="0" anchor="ctr">
+            <a:noAutofit/>
+          </a:bodyPr>
+          <a:lstStyle xmlns:a="http://schemas.openxmlformats.org/drawingml/2006/main"/>
+          <a:p xmlns:a="http://schemas.openxmlformats.org/drawingml/2006/main">
+            <a:pPr algn="l">
+              <a:defRPr sz="900" b="0">
+                <a:solidFill>
+                  <a:srgbClr val="59636E"/>
+                </a:solidFill>
+                <a:latin typeface="Noto Sans JP"/>
+                <a:ea typeface="Noto Sans JP"/>
+                <a:cs typeface="Noto Sans JP"/>
+              </a:defRPr>
+            </a:pPr>
+            <a:r>
+              <a:rPr sz="900" b="0">
+                <a:solidFill>
+                  <a:srgbClr val="59636E"/>
+                </a:solidFill>
+                <a:latin typeface="Noto Sans JP"/>
+                <a:ea typeface="Noto Sans JP"/>
+                <a:cs typeface="Noto Sans JP"/>
+              </a:rPr>
+              <a:t>[1] 室内環境ログ研究の入力資料（同梱教材・合成データ）, 2026.</a:t>
             </a:r>
           </a:p>
         </p:txBody>
@@ -6231,7 +6791,7 @@
     </p:spTree>
     <p:extLst>
       <p:ext uri="{BB962C8B-B14F-4D97-AF65-F5344CB8AC3E}">
-        <p14:creationId xmlns:p14="http://schemas.microsoft.com/office/powerpoint/2010/main" val="463147979"/>
+        <p14:creationId xmlns:p14="http://schemas.microsoft.com/office/powerpoint/2010/main" val="2100156097"/>
       </p:ext>
     </p:extLst>
   </p:cSld>
@@ -6259,10 +6819,10 @@
       </p:grpSpPr>
       <p:sp>
         <p:nvSpPr>
-          <p:cNvPr id="12" name="footer-line">
-            <a:extLst xmlns:a="http://schemas.openxmlformats.org/drawingml/2006/main">
-              <a:ext uri="{FF2B5EF4-FFF2-40B4-BE49-F238E27FC236}">
-                <a16:creationId xmlns:a16="http://schemas.microsoft.com/office/drawing/2014/main" id="{0EA5B151-8B8F-4458-8FAE-3B3616C70D61}"/>
+          <p:cNvPr id="15" name="footer-line">
+            <a:extLst xmlns:a="http://schemas.openxmlformats.org/drawingml/2006/main">
+              <a:ext uri="{FF2B5EF4-FFF2-40B4-BE49-F238E27FC236}">
+                <a16:creationId xmlns:a16="http://schemas.microsoft.com/office/drawing/2014/main" id="{E1C12BEF-8A63-4221-9669-2D2986D8B6BC}"/>
               </a:ext>
             </a:extLst>
           </p:cNvPr>
@@ -6290,14 +6850,14 @@
       </p:sp>
       <p:pic>
         <p:nvPicPr>
-          <p:cNvPr id="13" name=""/>
+          <p:cNvPr id="16" name=""/>
           <p:cNvPicPr>
             <a:picLocks xmlns:a="http://schemas.openxmlformats.org/drawingml/2006/main" noChangeAspect="1"/>
           </p:cNvPicPr>
           <p:nvPr/>
         </p:nvPicPr>
         <p:blipFill>
-          <a:blip xmlns:r="http://schemas.openxmlformats.org/officeDocument/2006/relationships" xmlns:a="http://schemas.openxmlformats.org/drawingml/2006/main" r:embed="Re3243b56b6d14ddd"/>
+          <a:blip xmlns:r="http://schemas.openxmlformats.org/officeDocument/2006/relationships" xmlns:a="http://schemas.openxmlformats.org/drawingml/2006/main" r:embed="Rff5a6015d2034b2e"/>
           <a:stretch xmlns:a="http://schemas.openxmlformats.org/drawingml/2006/main"/>
         </p:blipFill>
         <p:spPr>
@@ -6315,7 +6875,7 @@
           <p:cNvPr id="3" name="page">
             <a:extLst xmlns:a="http://schemas.openxmlformats.org/drawingml/2006/main">
               <a:ext uri="{FF2B5EF4-FFF2-40B4-BE49-F238E27FC236}">
-                <a16:creationId xmlns:a16="http://schemas.microsoft.com/office/drawing/2014/main" id="{8950C73C-7565-4EE1-A594-2790945BE970}"/>
+                <a16:creationId xmlns:a16="http://schemas.microsoft.com/office/drawing/2014/main" id="{CD8BDB91-D142-40FC-84F8-726FA449E2E1}"/>
               </a:ext>
             </a:extLst>
           </p:cNvPr>
@@ -6373,7 +6933,7 @@
           <p:cNvPr id="4" name="fictional-disclosure">
             <a:extLst xmlns:a="http://schemas.openxmlformats.org/drawingml/2006/main">
               <a:ext uri="{FF2B5EF4-FFF2-40B4-BE49-F238E27FC236}">
-                <a16:creationId xmlns:a16="http://schemas.microsoft.com/office/drawing/2014/main" id="{7FEAA653-E5D3-45B9-9A43-03DE14027374}"/>
+                <a16:creationId xmlns:a16="http://schemas.microsoft.com/office/drawing/2014/main" id="{EEF31DD0-9C4F-4A16-865F-39130CD2C2A1}"/>
               </a:ext>
             </a:extLst>
           </p:cNvPr>
@@ -6428,10 +6988,10 @@
       </p:sp>
       <p:sp>
         <p:nvSpPr>
-          <p:cNvPr id="5" name="title">
-            <a:extLst xmlns:a="http://schemas.openxmlformats.org/drawingml/2006/main">
-              <a:ext uri="{FF2B5EF4-FFF2-40B4-BE49-F238E27FC236}">
-                <a16:creationId xmlns:a16="http://schemas.microsoft.com/office/drawing/2014/main" id="{9CD1E9A2-040B-48E2-BF2E-2776366D10BD}"/>
+          <p:cNvPr id="5" name="running-chapter-6">
+            <a:extLst xmlns:a="http://schemas.openxmlformats.org/drawingml/2006/main">
+              <a:ext uri="{FF2B5EF4-FFF2-40B4-BE49-F238E27FC236}">
+                <a16:creationId xmlns:a16="http://schemas.microsoft.com/office/drawing/2014/main" id="{FEC1C188-F101-4023-A0CF-937F1280629B}"/>
               </a:ext>
             </a:extLst>
           </p:cNvPr>
@@ -6443,7 +7003,7 @@
         <p:spPr>
           <a:xfrm xmlns:a="http://schemas.openxmlformats.org/drawingml/2006/main">
             <a:off x="457200" y="109728"/>
-            <a:ext cx="8229600" cy="400050"/>
+            <a:ext cx="2560320" cy="304800"/>
           </a:xfrm>
           <a:prstGeom xmlns:a="http://schemas.openxmlformats.org/drawingml/2006/main" prst="rect">
             <a:avLst/>
@@ -6461,47 +7021,47 @@
           <a:lstStyle xmlns:a="http://schemas.openxmlformats.org/drawingml/2006/main"/>
           <a:p xmlns:a="http://schemas.openxmlformats.org/drawingml/2006/main">
             <a:pPr algn="l">
-              <a:defRPr sz="2700" b="1">
-                <a:solidFill>
-                  <a:srgbClr val="17202A"/>
-                </a:solidFill>
-                <a:latin typeface="Noto Sans JP"/>
-                <a:ea typeface="Noto Sans JP"/>
-                <a:cs typeface="Noto Sans JP"/>
-              </a:defRPr>
-            </a:pPr>
-            <a:r>
-              <a:rPr sz="2700" b="1">
-                <a:solidFill>
-                  <a:srgbClr val="17202A"/>
-                </a:solidFill>
-                <a:latin typeface="Noto Sans JP"/>
-                <a:ea typeface="Noto Sans JP"/>
-                <a:cs typeface="Noto Sans JP"/>
-              </a:rPr>
-              <a:t>この例では高い値が記録に残らない</a:t>
-            </a:r>
-          </a:p>
-        </p:txBody>
-      </p:sp>
-      <p:sp>
-        <p:nvSpPr>
-          <p:cNvPr id="6" name="message">
-            <a:extLst xmlns:a="http://schemas.openxmlformats.org/drawingml/2006/main">
-              <a:ext uri="{FF2B5EF4-FFF2-40B4-BE49-F238E27FC236}">
-                <a16:creationId xmlns:a16="http://schemas.microsoft.com/office/drawing/2014/main" id="{9466E9E2-1E6F-4003-85E7-DD11C9A50C16}"/>
-              </a:ext>
-            </a:extLst>
-          </p:cNvPr>
-          <p:cNvSpPr>
-            <a:spLocks xmlns:a="http://schemas.openxmlformats.org/drawingml/2006/main" noGrp="1"/>
-          </p:cNvSpPr>
-          <p:nvPr/>
-        </p:nvSpPr>
-        <p:spPr>
-          <a:xfrm xmlns:a="http://schemas.openxmlformats.org/drawingml/2006/main">
-            <a:off x="457200" y="621792"/>
-            <a:ext cx="8229600" cy="694944"/>
+              <a:defRPr sz="1200" b="0">
+                <a:solidFill>
+                  <a:srgbClr val="38761D"/>
+                </a:solidFill>
+                <a:latin typeface="Noto Sans JP"/>
+                <a:ea typeface="Noto Sans JP"/>
+                <a:cs typeface="Noto Sans JP"/>
+              </a:defRPr>
+            </a:pPr>
+            <a:r>
+              <a:rPr sz="1200" b="0">
+                <a:solidFill>
+                  <a:srgbClr val="38761D"/>
+                </a:solidFill>
+                <a:latin typeface="Noto Sans JP"/>
+                <a:ea typeface="Noto Sans JP"/>
+                <a:cs typeface="Noto Sans JP"/>
+              </a:rPr>
+              <a:t>03 ここまでの結果</a:t>
+            </a:r>
+          </a:p>
+        </p:txBody>
+      </p:sp>
+      <p:sp>
+        <p:nvSpPr>
+          <p:cNvPr id="6" name="running-title-6">
+            <a:extLst xmlns:a="http://schemas.openxmlformats.org/drawingml/2006/main">
+              <a:ext uri="{FF2B5EF4-FFF2-40B4-BE49-F238E27FC236}">
+                <a16:creationId xmlns:a16="http://schemas.microsoft.com/office/drawing/2014/main" id="{57527F54-78DD-4349-8B38-D54CDA4E689C}"/>
+              </a:ext>
+            </a:extLst>
+          </p:cNvPr>
+          <p:cNvSpPr>
+            <a:spLocks xmlns:a="http://schemas.openxmlformats.org/drawingml/2006/main" noGrp="1"/>
+          </p:cNvSpPr>
+          <p:nvPr/>
+        </p:nvSpPr>
+        <p:spPr>
+          <a:xfrm xmlns:a="http://schemas.openxmlformats.org/drawingml/2006/main">
+            <a:off x="3200400" y="109728"/>
+            <a:ext cx="5486400" cy="304800"/>
           </a:xfrm>
           <a:prstGeom xmlns:a="http://schemas.openxmlformats.org/drawingml/2006/main" prst="rect">
             <a:avLst/>
@@ -6518,6 +7078,122 @@
           </a:bodyPr>
           <a:lstStyle xmlns:a="http://schemas.openxmlformats.org/drawingml/2006/main"/>
           <a:p xmlns:a="http://schemas.openxmlformats.org/drawingml/2006/main">
+            <a:pPr algn="r">
+              <a:defRPr sz="1200" b="0">
+                <a:solidFill>
+                  <a:srgbClr val="38761D"/>
+                </a:solidFill>
+                <a:latin typeface="Noto Sans JP"/>
+                <a:ea typeface="Noto Sans JP"/>
+                <a:cs typeface="Noto Sans JP"/>
+              </a:defRPr>
+            </a:pPr>
+            <a:r>
+              <a:rPr sz="1200" b="0">
+                <a:solidFill>
+                  <a:srgbClr val="38761D"/>
+                </a:solidFill>
+                <a:latin typeface="Noto Sans JP"/>
+                <a:ea typeface="Noto Sans JP"/>
+                <a:cs typeface="Noto Sans JP"/>
+              </a:rPr>
+              <a:t>室内環境ログの記録間隔</a:t>
+            </a:r>
+          </a:p>
+        </p:txBody>
+      </p:sp>
+      <p:sp>
+        <p:nvSpPr>
+          <p:cNvPr id="7" name="title">
+            <a:extLst xmlns:a="http://schemas.openxmlformats.org/drawingml/2006/main">
+              <a:ext uri="{FF2B5EF4-FFF2-40B4-BE49-F238E27FC236}">
+                <a16:creationId xmlns:a16="http://schemas.microsoft.com/office/drawing/2014/main" id="{30FD4D1D-E703-4B8C-A10F-7C51628EAD70}"/>
+              </a:ext>
+            </a:extLst>
+          </p:cNvPr>
+          <p:cNvSpPr>
+            <a:spLocks xmlns:a="http://schemas.openxmlformats.org/drawingml/2006/main" noGrp="1"/>
+          </p:cNvSpPr>
+          <p:nvPr/>
+        </p:nvSpPr>
+        <p:spPr>
+          <a:xfrm xmlns:a="http://schemas.openxmlformats.org/drawingml/2006/main">
+            <a:off x="457200" y="475488"/>
+            <a:ext cx="8229600" cy="400050"/>
+          </a:xfrm>
+          <a:prstGeom xmlns:a="http://schemas.openxmlformats.org/drawingml/2006/main" prst="rect">
+            <a:avLst/>
+          </a:prstGeom>
+          <a:noFill xmlns:a="http://schemas.openxmlformats.org/drawingml/2006/main"/>
+          <a:ln xmlns:a="http://schemas.openxmlformats.org/drawingml/2006/main" w="0">
+            <a:noFill/>
+            <a:prstDash val="solid"/>
+          </a:ln>
+        </p:spPr>
+        <p:txBody>
+          <a:bodyPr xmlns:a="http://schemas.openxmlformats.org/drawingml/2006/main" lIns="0" tIns="0" rIns="0" bIns="0" anchor="ctr">
+            <a:noAutofit/>
+          </a:bodyPr>
+          <a:lstStyle xmlns:a="http://schemas.openxmlformats.org/drawingml/2006/main"/>
+          <a:p xmlns:a="http://schemas.openxmlformats.org/drawingml/2006/main">
+            <a:pPr algn="l">
+              <a:defRPr sz="2700" b="1">
+                <a:solidFill>
+                  <a:srgbClr val="17202A"/>
+                </a:solidFill>
+                <a:latin typeface="Noto Sans JP"/>
+                <a:ea typeface="Noto Sans JP"/>
+                <a:cs typeface="Noto Sans JP"/>
+              </a:defRPr>
+            </a:pPr>
+            <a:r>
+              <a:rPr sz="2700" b="1">
+                <a:solidFill>
+                  <a:srgbClr val="17202A"/>
+                </a:solidFill>
+                <a:latin typeface="Noto Sans JP"/>
+                <a:ea typeface="Noto Sans JP"/>
+                <a:cs typeface="Noto Sans JP"/>
+              </a:rPr>
+              <a:t>この例では高い値が記録に残らない</a:t>
+            </a:r>
+          </a:p>
+        </p:txBody>
+      </p:sp>
+      <p:sp>
+        <p:nvSpPr>
+          <p:cNvPr id="8" name="message">
+            <a:extLst xmlns:a="http://schemas.openxmlformats.org/drawingml/2006/main">
+              <a:ext uri="{FF2B5EF4-FFF2-40B4-BE49-F238E27FC236}">
+                <a16:creationId xmlns:a16="http://schemas.microsoft.com/office/drawing/2014/main" id="{430A116E-0C0C-4EF3-9F9C-F2B52C0E06E4}"/>
+              </a:ext>
+            </a:extLst>
+          </p:cNvPr>
+          <p:cNvSpPr>
+            <a:spLocks xmlns:a="http://schemas.openxmlformats.org/drawingml/2006/main" noGrp="1"/>
+          </p:cNvSpPr>
+          <p:nvPr/>
+        </p:nvSpPr>
+        <p:spPr>
+          <a:xfrm xmlns:a="http://schemas.openxmlformats.org/drawingml/2006/main">
+            <a:off x="457200" y="914400"/>
+            <a:ext cx="8229600" cy="548640"/>
+          </a:xfrm>
+          <a:prstGeom xmlns:a="http://schemas.openxmlformats.org/drawingml/2006/main" prst="rect">
+            <a:avLst/>
+          </a:prstGeom>
+          <a:noFill xmlns:a="http://schemas.openxmlformats.org/drawingml/2006/main"/>
+          <a:ln xmlns:a="http://schemas.openxmlformats.org/drawingml/2006/main" w="0">
+            <a:noFill/>
+            <a:prstDash val="solid"/>
+          </a:ln>
+        </p:spPr>
+        <p:txBody>
+          <a:bodyPr xmlns:a="http://schemas.openxmlformats.org/drawingml/2006/main" lIns="0" tIns="0" rIns="0" bIns="0" anchor="ctr">
+            <a:noAutofit/>
+          </a:bodyPr>
+          <a:lstStyle xmlns:a="http://schemas.openxmlformats.org/drawingml/2006/main"/>
+          <a:p xmlns:a="http://schemas.openxmlformats.org/drawingml/2006/main">
             <a:pPr algn="l">
               <a:defRPr sz="2300" b="1">
                 <a:solidFill>
@@ -6537,33 +7213,33 @@
                 <a:ea typeface="Noto Sans JP"/>
                 <a:cs typeface="Noto Sans JP"/>
               </a:rPr>
-              <a:t>5分間隔の保持点には、1000 ppmを超える値がない</a:t>
+              <a:t>5分間隔の保持点には、1000 ppmを超える値がない [1]</a:t>
             </a:r>
           </a:p>
         </p:txBody>
       </p:sp>
       <p:graphicFrame>
         <p:nvGraphicFramePr>
-          <p:cNvPr id="18" name="Chart"/>
+          <p:cNvPr id="23" name="Chart"/>
           <p:cNvGraphicFramePr/>
           <p:nvPr/>
         </p:nvGraphicFramePr>
         <p:xfrm>
-          <a:off xmlns:a="http://schemas.openxmlformats.org/drawingml/2006/main" x="438150" y="1476375"/>
-          <a:ext xmlns:a="http://schemas.openxmlformats.org/drawingml/2006/main" cx="6210300" cy="2638425"/>
+          <a:off xmlns:a="http://schemas.openxmlformats.org/drawingml/2006/main" x="438150" y="1571625"/>
+          <a:ext xmlns:a="http://schemas.openxmlformats.org/drawingml/2006/main" cx="6210300" cy="2305050"/>
         </p:xfrm>
         <a:graphic xmlns:a="http://schemas.openxmlformats.org/drawingml/2006/main">
           <a:graphicData uri="http://schemas.openxmlformats.org/drawingml/2006/chart">
-            <c:chart xmlns:r="http://schemas.openxmlformats.org/officeDocument/2006/relationships" xmlns:c="http://schemas.openxmlformats.org/drawingml/2006/chart" r:id="R3e93ffe895c04f3b"/>
+            <c:chart xmlns:r="http://schemas.openxmlformats.org/officeDocument/2006/relationships" xmlns:c="http://schemas.openxmlformats.org/drawingml/2006/chart" r:id="Rf543687b78ea4063"/>
           </a:graphicData>
         </a:graphic>
       </p:graphicFrame>
       <p:sp>
         <p:nvSpPr>
-          <p:cNvPr id="8" name="maximum-label">
-            <a:extLst xmlns:a="http://schemas.openxmlformats.org/drawingml/2006/main">
-              <a:ext uri="{FF2B5EF4-FFF2-40B4-BE49-F238E27FC236}">
-                <a16:creationId xmlns:a16="http://schemas.microsoft.com/office/drawing/2014/main" id="{B106D723-FAD9-4355-887C-0258C438FD75}"/>
+          <p:cNvPr id="10" name="maximum-label">
+            <a:extLst xmlns:a="http://schemas.openxmlformats.org/drawingml/2006/main">
+              <a:ext uri="{FF2B5EF4-FFF2-40B4-BE49-F238E27FC236}">
+                <a16:creationId xmlns:a16="http://schemas.microsoft.com/office/drawing/2014/main" id="{E3D40DB3-98CE-4CBF-A9B8-F0C9EFCB0C1F}"/>
               </a:ext>
             </a:extLst>
           </p:cNvPr>
@@ -6618,10 +7294,10 @@
       </p:sp>
       <p:sp>
         <p:nvSpPr>
-          <p:cNvPr id="9" name="all-max">
-            <a:extLst xmlns:a="http://schemas.openxmlformats.org/drawingml/2006/main">
-              <a:ext uri="{FF2B5EF4-FFF2-40B4-BE49-F238E27FC236}">
-                <a16:creationId xmlns:a16="http://schemas.microsoft.com/office/drawing/2014/main" id="{B4A60359-99C6-4E53-8664-F9139BAFFA7B}"/>
+          <p:cNvPr id="11" name="all-max">
+            <a:extLst xmlns:a="http://schemas.openxmlformats.org/drawingml/2006/main">
+              <a:ext uri="{FF2B5EF4-FFF2-40B4-BE49-F238E27FC236}">
+                <a16:creationId xmlns:a16="http://schemas.microsoft.com/office/drawing/2014/main" id="{AF0B4DD4-DFA6-485E-A736-2158875006EA}"/>
               </a:ext>
             </a:extLst>
           </p:cNvPr>
@@ -6699,10 +7375,10 @@
       </p:sp>
       <p:sp>
         <p:nvSpPr>
-          <p:cNvPr id="10" name="kept-max">
-            <a:extLst xmlns:a="http://schemas.openxmlformats.org/drawingml/2006/main">
-              <a:ext uri="{FF2B5EF4-FFF2-40B4-BE49-F238E27FC236}">
-                <a16:creationId xmlns:a16="http://schemas.microsoft.com/office/drawing/2014/main" id="{7C378401-CD8A-4D0B-B42C-1037264958FB}"/>
+          <p:cNvPr id="12" name="kept-max">
+            <a:extLst xmlns:a="http://schemas.openxmlformats.org/drawingml/2006/main">
+              <a:ext uri="{FF2B5EF4-FFF2-40B4-BE49-F238E27FC236}">
+                <a16:creationId xmlns:a16="http://schemas.microsoft.com/office/drawing/2014/main" id="{E49E125F-A346-46A6-B343-83A74B0E204E}"/>
               </a:ext>
             </a:extLst>
           </p:cNvPr>
@@ -6734,7 +7410,7 @@
             <a:pPr algn="l">
               <a:defRPr sz="1900" b="1">
                 <a:solidFill>
-                  <a:srgbClr val="17202A"/>
+                  <a:srgbClr val="38761D"/>
                 </a:solidFill>
                 <a:latin typeface="Noto Sans JP"/>
                 <a:ea typeface="Noto Sans JP"/>
@@ -6744,7 +7420,7 @@
             <a:r>
               <a:rPr sz="1900" b="1">
                 <a:solidFill>
-                  <a:srgbClr val="17202A"/>
+                  <a:srgbClr val="38761D"/>
                 </a:solidFill>
                 <a:latin typeface="Noto Sans JP"/>
                 <a:ea typeface="Noto Sans JP"/>
@@ -6757,7 +7433,7 @@
             <a:pPr algn="l">
               <a:defRPr sz="1900" b="1">
                 <a:solidFill>
-                  <a:srgbClr val="17202A"/>
+                  <a:srgbClr val="38761D"/>
                 </a:solidFill>
                 <a:latin typeface="Noto Sans JP"/>
                 <a:ea typeface="Noto Sans JP"/>
@@ -6767,7 +7443,7 @@
             <a:r>
               <a:rPr sz="1900" b="1">
                 <a:solidFill>
-                  <a:srgbClr val="17202A"/>
+                  <a:srgbClr val="38761D"/>
                 </a:solidFill>
                 <a:latin typeface="Noto Sans JP"/>
                 <a:ea typeface="Noto Sans JP"/>
@@ -6780,22 +7456,22 @@
       </p:sp>
       <p:sp>
         <p:nvSpPr>
-          <p:cNvPr id="11" name="condition">
-            <a:extLst xmlns:a="http://schemas.openxmlformats.org/drawingml/2006/main">
-              <a:ext uri="{FF2B5EF4-FFF2-40B4-BE49-F238E27FC236}">
-                <a16:creationId xmlns:a16="http://schemas.microsoft.com/office/drawing/2014/main" id="{6DF75B6A-84BF-42A9-9A36-15EB051E434B}"/>
-              </a:ext>
-            </a:extLst>
-          </p:cNvPr>
-          <p:cNvSpPr>
-            <a:spLocks xmlns:a="http://schemas.openxmlformats.org/drawingml/2006/main" noGrp="1"/>
-          </p:cNvSpPr>
-          <p:nvPr/>
-        </p:nvSpPr>
-        <p:spPr>
-          <a:xfrm xmlns:a="http://schemas.openxmlformats.org/drawingml/2006/main">
-            <a:off x="457200" y="4187952"/>
-            <a:ext cx="8229600" cy="310896"/>
+          <p:cNvPr id="13" name="condition">
+            <a:extLst xmlns:a="http://schemas.openxmlformats.org/drawingml/2006/main">
+              <a:ext uri="{FF2B5EF4-FFF2-40B4-BE49-F238E27FC236}">
+                <a16:creationId xmlns:a16="http://schemas.microsoft.com/office/drawing/2014/main" id="{BF0B51A0-39A5-4C63-9ACE-ACB966323C12}"/>
+              </a:ext>
+            </a:extLst>
+          </p:cNvPr>
+          <p:cNvSpPr>
+            <a:spLocks xmlns:a="http://schemas.openxmlformats.org/drawingml/2006/main" noGrp="1"/>
+          </p:cNvSpPr>
+          <p:nvPr/>
+        </p:nvSpPr>
+        <p:spPr>
+          <a:xfrm xmlns:a="http://schemas.openxmlformats.org/drawingml/2006/main">
+            <a:off x="457200" y="3905250"/>
+            <a:ext cx="8229600" cy="266700"/>
           </a:xfrm>
           <a:prstGeom xmlns:a="http://schemas.openxmlformats.org/drawingml/2006/main" prst="rect">
             <a:avLst/>
@@ -6813,7 +7489,7 @@
           <a:lstStyle xmlns:a="http://schemas.openxmlformats.org/drawingml/2006/main"/>
           <a:p xmlns:a="http://schemas.openxmlformats.org/drawingml/2006/main">
             <a:pPr algn="l">
-              <a:defRPr sz="1800" b="0">
+              <a:defRPr sz="1500" b="0">
                 <a:solidFill>
                   <a:srgbClr val="59636E"/>
                 </a:solidFill>
@@ -6823,7 +7499,7 @@
               </a:defRPr>
             </a:pPr>
             <a:r>
-              <a:rPr sz="1800" b="0">
+              <a:rPr sz="1500" b="0">
                 <a:solidFill>
                   <a:srgbClr val="59636E"/>
                 </a:solidFill>
@@ -6832,6 +7508,64 @@
                 <a:cs typeface="Noto Sans JP"/>
               </a:rPr>
               <a:t>合成系列1例／開始時刻0分／閾値は安全基準を表さない</a:t>
+            </a:r>
+          </a:p>
+        </p:txBody>
+      </p:sp>
+      <p:sp>
+        <p:nvSpPr>
+          <p:cNvPr id="14" name="page-reference">
+            <a:extLst xmlns:a="http://schemas.openxmlformats.org/drawingml/2006/main">
+              <a:ext uri="{FF2B5EF4-FFF2-40B4-BE49-F238E27FC236}">
+                <a16:creationId xmlns:a16="http://schemas.microsoft.com/office/drawing/2014/main" id="{B2325127-C7E8-44C9-8B6E-E2903C3792DE}"/>
+              </a:ext>
+            </a:extLst>
+          </p:cNvPr>
+          <p:cNvSpPr>
+            <a:spLocks xmlns:a="http://schemas.openxmlformats.org/drawingml/2006/main" noGrp="1"/>
+          </p:cNvSpPr>
+          <p:nvPr/>
+        </p:nvSpPr>
+        <p:spPr>
+          <a:xfrm xmlns:a="http://schemas.openxmlformats.org/drawingml/2006/main">
+            <a:off x="457200" y="4224528"/>
+            <a:ext cx="8229600" cy="329184"/>
+          </a:xfrm>
+          <a:prstGeom xmlns:a="http://schemas.openxmlformats.org/drawingml/2006/main" prst="rect">
+            <a:avLst/>
+          </a:prstGeom>
+          <a:noFill xmlns:a="http://schemas.openxmlformats.org/drawingml/2006/main"/>
+          <a:ln xmlns:a="http://schemas.openxmlformats.org/drawingml/2006/main" w="0">
+            <a:noFill/>
+            <a:prstDash val="solid"/>
+          </a:ln>
+        </p:spPr>
+        <p:txBody>
+          <a:bodyPr xmlns:a="http://schemas.openxmlformats.org/drawingml/2006/main" lIns="0" tIns="0" rIns="0" bIns="0" anchor="ctr">
+            <a:noAutofit/>
+          </a:bodyPr>
+          <a:lstStyle xmlns:a="http://schemas.openxmlformats.org/drawingml/2006/main"/>
+          <a:p xmlns:a="http://schemas.openxmlformats.org/drawingml/2006/main">
+            <a:pPr algn="l">
+              <a:defRPr sz="900" b="0">
+                <a:solidFill>
+                  <a:srgbClr val="59636E"/>
+                </a:solidFill>
+                <a:latin typeface="Noto Sans JP"/>
+                <a:ea typeface="Noto Sans JP"/>
+                <a:cs typeface="Noto Sans JP"/>
+              </a:defRPr>
+            </a:pPr>
+            <a:r>
+              <a:rPr sz="900" b="0">
+                <a:solidFill>
+                  <a:srgbClr val="59636E"/>
+                </a:solidFill>
+                <a:latin typeface="Noto Sans JP"/>
+                <a:ea typeface="Noto Sans JP"/>
+                <a:cs typeface="Noto Sans JP"/>
+              </a:rPr>
+              <a:t>[1] 室内環境ログ研究の入力資料（同梱教材・合成データ）, 2026.</a:t>
             </a:r>
           </a:p>
         </p:txBody>
@@ -6839,7 +7573,7 @@
     </p:spTree>
     <p:extLst>
       <p:ext uri="{BB962C8B-B14F-4D97-AF65-F5344CB8AC3E}">
-        <p14:creationId xmlns:p14="http://schemas.microsoft.com/office/powerpoint/2010/main" val="1817992712"/>
+        <p14:creationId xmlns:p14="http://schemas.microsoft.com/office/powerpoint/2010/main" val="1042603017"/>
       </p:ext>
     </p:extLst>
   </p:cSld>
@@ -6867,10 +7601,10 @@
       </p:grpSpPr>
       <p:sp>
         <p:nvSpPr>
-          <p:cNvPr id="9" name="footer-line">
-            <a:extLst xmlns:a="http://schemas.openxmlformats.org/drawingml/2006/main">
-              <a:ext uri="{FF2B5EF4-FFF2-40B4-BE49-F238E27FC236}">
-                <a16:creationId xmlns:a16="http://schemas.microsoft.com/office/drawing/2014/main" id="{38FD7832-36CF-4894-AB8F-26CFC01EC9E2}"/>
+          <p:cNvPr id="12" name="footer-line">
+            <a:extLst xmlns:a="http://schemas.openxmlformats.org/drawingml/2006/main">
+              <a:ext uri="{FF2B5EF4-FFF2-40B4-BE49-F238E27FC236}">
+                <a16:creationId xmlns:a16="http://schemas.microsoft.com/office/drawing/2014/main" id="{E73201DD-DFCB-4ABD-A04E-94DAF4C477FE}"/>
               </a:ext>
             </a:extLst>
           </p:cNvPr>
@@ -6898,14 +7632,14 @@
       </p:sp>
       <p:pic>
         <p:nvPicPr>
-          <p:cNvPr id="10" name=""/>
+          <p:cNvPr id="13" name=""/>
           <p:cNvPicPr>
             <a:picLocks xmlns:a="http://schemas.openxmlformats.org/drawingml/2006/main" noChangeAspect="1"/>
           </p:cNvPicPr>
           <p:nvPr/>
         </p:nvPicPr>
         <p:blipFill>
-          <a:blip xmlns:r="http://schemas.openxmlformats.org/officeDocument/2006/relationships" xmlns:a="http://schemas.openxmlformats.org/drawingml/2006/main" r:embed="Rc1086a3ca7b74541"/>
+          <a:blip xmlns:r="http://schemas.openxmlformats.org/officeDocument/2006/relationships" xmlns:a="http://schemas.openxmlformats.org/drawingml/2006/main" r:embed="R9f41ed48425141e7"/>
           <a:stretch xmlns:a="http://schemas.openxmlformats.org/drawingml/2006/main"/>
         </p:blipFill>
         <p:spPr>
@@ -6923,7 +7657,7 @@
           <p:cNvPr id="3" name="page">
             <a:extLst xmlns:a="http://schemas.openxmlformats.org/drawingml/2006/main">
               <a:ext uri="{FF2B5EF4-FFF2-40B4-BE49-F238E27FC236}">
-                <a16:creationId xmlns:a16="http://schemas.microsoft.com/office/drawing/2014/main" id="{3DB9F2A8-3113-43FD-8952-C0E5800C5926}"/>
+                <a16:creationId xmlns:a16="http://schemas.microsoft.com/office/drawing/2014/main" id="{6BE37E84-827C-4643-A611-F02FF40BBDF6}"/>
               </a:ext>
             </a:extLst>
           </p:cNvPr>
@@ -6981,7 +7715,7 @@
           <p:cNvPr id="4" name="fictional-disclosure">
             <a:extLst xmlns:a="http://schemas.openxmlformats.org/drawingml/2006/main">
               <a:ext uri="{FF2B5EF4-FFF2-40B4-BE49-F238E27FC236}">
-                <a16:creationId xmlns:a16="http://schemas.microsoft.com/office/drawing/2014/main" id="{F05E2D78-D011-4A66-AA04-D6787AEF3A4A}"/>
+                <a16:creationId xmlns:a16="http://schemas.microsoft.com/office/drawing/2014/main" id="{BD0AB5BD-9D7B-4A18-A1DB-229A0905B456}"/>
               </a:ext>
             </a:extLst>
           </p:cNvPr>
@@ -7036,10 +7770,10 @@
       </p:sp>
       <p:sp>
         <p:nvSpPr>
-          <p:cNvPr id="5" name="title">
-            <a:extLst xmlns:a="http://schemas.openxmlformats.org/drawingml/2006/main">
-              <a:ext uri="{FF2B5EF4-FFF2-40B4-BE49-F238E27FC236}">
-                <a16:creationId xmlns:a16="http://schemas.microsoft.com/office/drawing/2014/main" id="{64C0C8E4-6525-4243-946D-08D940A1A5AB}"/>
+          <p:cNvPr id="5" name="running-chapter-7">
+            <a:extLst xmlns:a="http://schemas.openxmlformats.org/drawingml/2006/main">
+              <a:ext uri="{FF2B5EF4-FFF2-40B4-BE49-F238E27FC236}">
+                <a16:creationId xmlns:a16="http://schemas.microsoft.com/office/drawing/2014/main" id="{BE1C479F-2725-4B37-B065-D6791332D8CA}"/>
               </a:ext>
             </a:extLst>
           </p:cNvPr>
@@ -7051,7 +7785,7 @@
         <p:spPr>
           <a:xfrm xmlns:a="http://schemas.openxmlformats.org/drawingml/2006/main">
             <a:off x="457200" y="109728"/>
-            <a:ext cx="8229600" cy="400050"/>
+            <a:ext cx="2560320" cy="304800"/>
           </a:xfrm>
           <a:prstGeom xmlns:a="http://schemas.openxmlformats.org/drawingml/2006/main" prst="rect">
             <a:avLst/>
@@ -7069,47 +7803,47 @@
           <a:lstStyle xmlns:a="http://schemas.openxmlformats.org/drawingml/2006/main"/>
           <a:p xmlns:a="http://schemas.openxmlformats.org/drawingml/2006/main">
             <a:pPr algn="l">
-              <a:defRPr sz="2700" b="1">
-                <a:solidFill>
-                  <a:srgbClr val="17202A"/>
-                </a:solidFill>
-                <a:latin typeface="Noto Sans JP"/>
-                <a:ea typeface="Noto Sans JP"/>
-                <a:cs typeface="Noto Sans JP"/>
-              </a:defRPr>
-            </a:pPr>
-            <a:r>
-              <a:rPr sz="2700" b="1">
-                <a:solidFill>
-                  <a:srgbClr val="17202A"/>
-                </a:solidFill>
-                <a:latin typeface="Noto Sans JP"/>
-                <a:ea typeface="Noto Sans JP"/>
-                <a:cs typeface="Noto Sans JP"/>
-              </a:rPr>
-              <a:t>記録量と保持された値</a:t>
-            </a:r>
-          </a:p>
-        </p:txBody>
-      </p:sp>
-      <p:sp>
-        <p:nvSpPr>
-          <p:cNvPr id="6" name="message">
-            <a:extLst xmlns:a="http://schemas.openxmlformats.org/drawingml/2006/main">
-              <a:ext uri="{FF2B5EF4-FFF2-40B4-BE49-F238E27FC236}">
-                <a16:creationId xmlns:a16="http://schemas.microsoft.com/office/drawing/2014/main" id="{12C37566-913A-47B9-A69A-5F7B2942C6C7}"/>
-              </a:ext>
-            </a:extLst>
-          </p:cNvPr>
-          <p:cNvSpPr>
-            <a:spLocks xmlns:a="http://schemas.openxmlformats.org/drawingml/2006/main" noGrp="1"/>
-          </p:cNvSpPr>
-          <p:nvPr/>
-        </p:nvSpPr>
-        <p:spPr>
-          <a:xfrm xmlns:a="http://schemas.openxmlformats.org/drawingml/2006/main">
-            <a:off x="457200" y="621792"/>
-            <a:ext cx="8229600" cy="694944"/>
+              <a:defRPr sz="1200" b="0">
+                <a:solidFill>
+                  <a:srgbClr val="38761D"/>
+                </a:solidFill>
+                <a:latin typeface="Noto Sans JP"/>
+                <a:ea typeface="Noto Sans JP"/>
+                <a:cs typeface="Noto Sans JP"/>
+              </a:defRPr>
+            </a:pPr>
+            <a:r>
+              <a:rPr sz="1200" b="0">
+                <a:solidFill>
+                  <a:srgbClr val="38761D"/>
+                </a:solidFill>
+                <a:latin typeface="Noto Sans JP"/>
+                <a:ea typeface="Noto Sans JP"/>
+                <a:cs typeface="Noto Sans JP"/>
+              </a:rPr>
+              <a:t>03 ここまでの結果</a:t>
+            </a:r>
+          </a:p>
+        </p:txBody>
+      </p:sp>
+      <p:sp>
+        <p:nvSpPr>
+          <p:cNvPr id="6" name="running-title-7">
+            <a:extLst xmlns:a="http://schemas.openxmlformats.org/drawingml/2006/main">
+              <a:ext uri="{FF2B5EF4-FFF2-40B4-BE49-F238E27FC236}">
+                <a16:creationId xmlns:a16="http://schemas.microsoft.com/office/drawing/2014/main" id="{8BB7C9A6-83DA-4BF9-AE4E-61AE3418E256}"/>
+              </a:ext>
+            </a:extLst>
+          </p:cNvPr>
+          <p:cNvSpPr>
+            <a:spLocks xmlns:a="http://schemas.openxmlformats.org/drawingml/2006/main" noGrp="1"/>
+          </p:cNvSpPr>
+          <p:nvPr/>
+        </p:nvSpPr>
+        <p:spPr>
+          <a:xfrm xmlns:a="http://schemas.openxmlformats.org/drawingml/2006/main">
+            <a:off x="3200400" y="109728"/>
+            <a:ext cx="5486400" cy="304800"/>
           </a:xfrm>
           <a:prstGeom xmlns:a="http://schemas.openxmlformats.org/drawingml/2006/main" prst="rect">
             <a:avLst/>
@@ -7126,6 +7860,122 @@
           </a:bodyPr>
           <a:lstStyle xmlns:a="http://schemas.openxmlformats.org/drawingml/2006/main"/>
           <a:p xmlns:a="http://schemas.openxmlformats.org/drawingml/2006/main">
+            <a:pPr algn="r">
+              <a:defRPr sz="1200" b="0">
+                <a:solidFill>
+                  <a:srgbClr val="38761D"/>
+                </a:solidFill>
+                <a:latin typeface="Noto Sans JP"/>
+                <a:ea typeface="Noto Sans JP"/>
+                <a:cs typeface="Noto Sans JP"/>
+              </a:defRPr>
+            </a:pPr>
+            <a:r>
+              <a:rPr sz="1200" b="0">
+                <a:solidFill>
+                  <a:srgbClr val="38761D"/>
+                </a:solidFill>
+                <a:latin typeface="Noto Sans JP"/>
+                <a:ea typeface="Noto Sans JP"/>
+                <a:cs typeface="Noto Sans JP"/>
+              </a:rPr>
+              <a:t>室内環境ログの記録間隔</a:t>
+            </a:r>
+          </a:p>
+        </p:txBody>
+      </p:sp>
+      <p:sp>
+        <p:nvSpPr>
+          <p:cNvPr id="7" name="title">
+            <a:extLst xmlns:a="http://schemas.openxmlformats.org/drawingml/2006/main">
+              <a:ext uri="{FF2B5EF4-FFF2-40B4-BE49-F238E27FC236}">
+                <a16:creationId xmlns:a16="http://schemas.microsoft.com/office/drawing/2014/main" id="{AD927420-FE13-4C0E-9801-1959F952876C}"/>
+              </a:ext>
+            </a:extLst>
+          </p:cNvPr>
+          <p:cNvSpPr>
+            <a:spLocks xmlns:a="http://schemas.openxmlformats.org/drawingml/2006/main" noGrp="1"/>
+          </p:cNvSpPr>
+          <p:nvPr/>
+        </p:nvSpPr>
+        <p:spPr>
+          <a:xfrm xmlns:a="http://schemas.openxmlformats.org/drawingml/2006/main">
+            <a:off x="457200" y="475488"/>
+            <a:ext cx="8229600" cy="400050"/>
+          </a:xfrm>
+          <a:prstGeom xmlns:a="http://schemas.openxmlformats.org/drawingml/2006/main" prst="rect">
+            <a:avLst/>
+          </a:prstGeom>
+          <a:noFill xmlns:a="http://schemas.openxmlformats.org/drawingml/2006/main"/>
+          <a:ln xmlns:a="http://schemas.openxmlformats.org/drawingml/2006/main" w="0">
+            <a:noFill/>
+            <a:prstDash val="solid"/>
+          </a:ln>
+        </p:spPr>
+        <p:txBody>
+          <a:bodyPr xmlns:a="http://schemas.openxmlformats.org/drawingml/2006/main" lIns="0" tIns="0" rIns="0" bIns="0" anchor="ctr">
+            <a:noAutofit/>
+          </a:bodyPr>
+          <a:lstStyle xmlns:a="http://schemas.openxmlformats.org/drawingml/2006/main"/>
+          <a:p xmlns:a="http://schemas.openxmlformats.org/drawingml/2006/main">
+            <a:pPr algn="l">
+              <a:defRPr sz="2700" b="1">
+                <a:solidFill>
+                  <a:srgbClr val="17202A"/>
+                </a:solidFill>
+                <a:latin typeface="Noto Sans JP"/>
+                <a:ea typeface="Noto Sans JP"/>
+                <a:cs typeface="Noto Sans JP"/>
+              </a:defRPr>
+            </a:pPr>
+            <a:r>
+              <a:rPr sz="2700" b="1">
+                <a:solidFill>
+                  <a:srgbClr val="17202A"/>
+                </a:solidFill>
+                <a:latin typeface="Noto Sans JP"/>
+                <a:ea typeface="Noto Sans JP"/>
+                <a:cs typeface="Noto Sans JP"/>
+              </a:rPr>
+              <a:t>記録量と保持された値</a:t>
+            </a:r>
+          </a:p>
+        </p:txBody>
+      </p:sp>
+      <p:sp>
+        <p:nvSpPr>
+          <p:cNvPr id="8" name="message">
+            <a:extLst xmlns:a="http://schemas.openxmlformats.org/drawingml/2006/main">
+              <a:ext uri="{FF2B5EF4-FFF2-40B4-BE49-F238E27FC236}">
+                <a16:creationId xmlns:a16="http://schemas.microsoft.com/office/drawing/2014/main" id="{349EA91B-E58A-420E-9B70-CD6D8B66F221}"/>
+              </a:ext>
+            </a:extLst>
+          </p:cNvPr>
+          <p:cNvSpPr>
+            <a:spLocks xmlns:a="http://schemas.openxmlformats.org/drawingml/2006/main" noGrp="1"/>
+          </p:cNvSpPr>
+          <p:nvPr/>
+        </p:nvSpPr>
+        <p:spPr>
+          <a:xfrm xmlns:a="http://schemas.openxmlformats.org/drawingml/2006/main">
+            <a:off x="457200" y="914400"/>
+            <a:ext cx="8229600" cy="548640"/>
+          </a:xfrm>
+          <a:prstGeom xmlns:a="http://schemas.openxmlformats.org/drawingml/2006/main" prst="rect">
+            <a:avLst/>
+          </a:prstGeom>
+          <a:noFill xmlns:a="http://schemas.openxmlformats.org/drawingml/2006/main"/>
+          <a:ln xmlns:a="http://schemas.openxmlformats.org/drawingml/2006/main" w="0">
+            <a:noFill/>
+            <a:prstDash val="solid"/>
+          </a:ln>
+        </p:spPr>
+        <p:txBody>
+          <a:bodyPr xmlns:a="http://schemas.openxmlformats.org/drawingml/2006/main" lIns="0" tIns="0" rIns="0" bIns="0" anchor="ctr">
+            <a:noAutofit/>
+          </a:bodyPr>
+          <a:lstStyle xmlns:a="http://schemas.openxmlformats.org/drawingml/2006/main"/>
+          <a:p xmlns:a="http://schemas.openxmlformats.org/drawingml/2006/main">
             <a:pPr algn="l">
               <a:defRPr sz="2300" b="1">
                 <a:solidFill>
@@ -7145,20 +7995,20 @@
                 <a:ea typeface="Noto Sans JP"/>
                 <a:cs typeface="Noto Sans JP"/>
               </a:rPr>
-              <a:t>点数の減少と、残った値を分けて見る</a:t>
+              <a:t>点数の減少と、残った値を分けて見る [1]</a:t>
             </a:r>
           </a:p>
         </p:txBody>
       </p:sp>
       <p:graphicFrame>
         <p:nvGraphicFramePr>
-          <p:cNvPr id="15" name=""/>
+          <p:cNvPr id="20" name=""/>
           <p:cNvGraphicFramePr/>
           <p:nvPr/>
         </p:nvGraphicFramePr>
         <p:xfrm>
-          <a:off xmlns:a="http://schemas.openxmlformats.org/drawingml/2006/main" x="457200" y="1752600"/>
-          <a:ext xmlns:a="http://schemas.openxmlformats.org/drawingml/2006/main" cx="8229600" cy="2266950"/>
+          <a:off xmlns:a="http://schemas.openxmlformats.org/drawingml/2006/main" x="457200" y="1657350"/>
+          <a:ext xmlns:a="http://schemas.openxmlformats.org/drawingml/2006/main" cx="8229600" cy="2171700"/>
         </p:xfrm>
         <a:graphic xmlns:a="http://schemas.openxmlformats.org/drawingml/2006/main">
           <a:graphicData uri="http://schemas.openxmlformats.org/drawingml/2006/table">
@@ -7169,7 +8019,7 @@
                 <a:gridCol w="2152650"/>
                 <a:gridCol w="2152650"/>
               </a:tblGrid>
-              <a:tr h="566738">
+              <a:tr h="542925">
                 <a:tc>
                   <a:txBody>
                     <a:bodyPr/>
@@ -7229,7 +8079,7 @@
                       <a:r>
                         <a:rPr sz="1800" b="1">
                           <a:solidFill>
-                            <a:srgbClr val="17202A"/>
+                            <a:srgbClr val="38761D"/>
                           </a:solidFill>
                           <a:latin typeface="Noto Sans JP"/>
                           <a:ea typeface="Noto Sans JP"/>
@@ -7246,7 +8096,7 @@
                   </a:tcPr>
                 </a:tc>
               </a:tr>
-              <a:tr h="566738">
+              <a:tr h="542925">
                 <a:tc>
                   <a:txBody>
                     <a:bodyPr/>
@@ -7306,7 +8156,7 @@
                       <a:r>
                         <a:rPr sz="1800" b="1">
                           <a:solidFill>
-                            <a:srgbClr val="17202A"/>
+                            <a:srgbClr val="38761D"/>
                           </a:solidFill>
                           <a:latin typeface="Noto Sans JP"/>
                           <a:ea typeface="Noto Sans JP"/>
@@ -7323,7 +8173,7 @@
                   </a:tcPr>
                 </a:tc>
               </a:tr>
-              <a:tr h="566738">
+              <a:tr h="542925">
                 <a:tc>
                   <a:txBody>
                     <a:bodyPr/>
@@ -7383,7 +8233,7 @@
                       <a:r>
                         <a:rPr sz="1800" b="1">
                           <a:solidFill>
-                            <a:srgbClr val="17202A"/>
+                            <a:srgbClr val="38761D"/>
                           </a:solidFill>
                           <a:latin typeface="Noto Sans JP"/>
                           <a:ea typeface="Noto Sans JP"/>
@@ -7400,7 +8250,7 @@
                   </a:tcPr>
                 </a:tc>
               </a:tr>
-              <a:tr h="566738">
+              <a:tr h="542925">
                 <a:tc>
                   <a:txBody>
                     <a:bodyPr/>
@@ -7460,7 +8310,7 @@
                       <a:r>
                         <a:rPr sz="1800" b="1">
                           <a:solidFill>
-                            <a:srgbClr val="17202A"/>
+                            <a:srgbClr val="38761D"/>
                           </a:solidFill>
                           <a:latin typeface="Noto Sans JP"/>
                           <a:ea typeface="Noto Sans JP"/>
@@ -7483,22 +8333,22 @@
       </p:graphicFrame>
       <p:sp>
         <p:nvSpPr>
-          <p:cNvPr id="8" name="scope">
-            <a:extLst xmlns:a="http://schemas.openxmlformats.org/drawingml/2006/main">
-              <a:ext uri="{FF2B5EF4-FFF2-40B4-BE49-F238E27FC236}">
-                <a16:creationId xmlns:a16="http://schemas.microsoft.com/office/drawing/2014/main" id="{C20BB55D-E7AD-4B55-A48A-532669A8B43D}"/>
-              </a:ext>
-            </a:extLst>
-          </p:cNvPr>
-          <p:cNvSpPr>
-            <a:spLocks xmlns:a="http://schemas.openxmlformats.org/drawingml/2006/main" noGrp="1"/>
-          </p:cNvSpPr>
-          <p:nvPr/>
-        </p:nvSpPr>
-        <p:spPr>
-          <a:xfrm xmlns:a="http://schemas.openxmlformats.org/drawingml/2006/main">
-            <a:off x="457200" y="4187952"/>
-            <a:ext cx="8229600" cy="310896"/>
+          <p:cNvPr id="10" name="scope">
+            <a:extLst xmlns:a="http://schemas.openxmlformats.org/drawingml/2006/main">
+              <a:ext uri="{FF2B5EF4-FFF2-40B4-BE49-F238E27FC236}">
+                <a16:creationId xmlns:a16="http://schemas.microsoft.com/office/drawing/2014/main" id="{C981BC55-1633-479C-A25D-36F708011BBC}"/>
+              </a:ext>
+            </a:extLst>
+          </p:cNvPr>
+          <p:cNvSpPr>
+            <a:spLocks xmlns:a="http://schemas.openxmlformats.org/drawingml/2006/main" noGrp="1"/>
+          </p:cNvSpPr>
+          <p:nvPr/>
+        </p:nvSpPr>
+        <p:spPr>
+          <a:xfrm xmlns:a="http://schemas.openxmlformats.org/drawingml/2006/main">
+            <a:off x="457200" y="3905250"/>
+            <a:ext cx="8229600" cy="266700"/>
           </a:xfrm>
           <a:prstGeom xmlns:a="http://schemas.openxmlformats.org/drawingml/2006/main" prst="rect">
             <a:avLst/>
@@ -7516,7 +8366,7 @@
           <a:lstStyle xmlns:a="http://schemas.openxmlformats.org/drawingml/2006/main"/>
           <a:p xmlns:a="http://schemas.openxmlformats.org/drawingml/2006/main">
             <a:pPr algn="l">
-              <a:defRPr sz="1800" b="0">
+              <a:defRPr sz="1500" b="0">
                 <a:solidFill>
                   <a:srgbClr val="59636E"/>
                 </a:solidFill>
@@ -7526,7 +8376,7 @@
               </a:defRPr>
             </a:pPr>
             <a:r>
-              <a:rPr sz="1800" b="0">
+              <a:rPr sz="1500" b="0">
                 <a:solidFill>
                   <a:srgbClr val="59636E"/>
                 </a:solidFill>
@@ -7535,6 +8385,64 @@
                 <a:cs typeface="Noto Sans JP"/>
               </a:rPr>
               <a:t>合成データからの計算。電力・健康リスクは未評価</a:t>
+            </a:r>
+          </a:p>
+        </p:txBody>
+      </p:sp>
+      <p:sp>
+        <p:nvSpPr>
+          <p:cNvPr id="11" name="page-reference">
+            <a:extLst xmlns:a="http://schemas.openxmlformats.org/drawingml/2006/main">
+              <a:ext uri="{FF2B5EF4-FFF2-40B4-BE49-F238E27FC236}">
+                <a16:creationId xmlns:a16="http://schemas.microsoft.com/office/drawing/2014/main" id="{5042B5B5-0225-4655-8BB9-8D3718749478}"/>
+              </a:ext>
+            </a:extLst>
+          </p:cNvPr>
+          <p:cNvSpPr>
+            <a:spLocks xmlns:a="http://schemas.openxmlformats.org/drawingml/2006/main" noGrp="1"/>
+          </p:cNvSpPr>
+          <p:nvPr/>
+        </p:nvSpPr>
+        <p:spPr>
+          <a:xfrm xmlns:a="http://schemas.openxmlformats.org/drawingml/2006/main">
+            <a:off x="457200" y="4224528"/>
+            <a:ext cx="8229600" cy="329184"/>
+          </a:xfrm>
+          <a:prstGeom xmlns:a="http://schemas.openxmlformats.org/drawingml/2006/main" prst="rect">
+            <a:avLst/>
+          </a:prstGeom>
+          <a:noFill xmlns:a="http://schemas.openxmlformats.org/drawingml/2006/main"/>
+          <a:ln xmlns:a="http://schemas.openxmlformats.org/drawingml/2006/main" w="0">
+            <a:noFill/>
+            <a:prstDash val="solid"/>
+          </a:ln>
+        </p:spPr>
+        <p:txBody>
+          <a:bodyPr xmlns:a="http://schemas.openxmlformats.org/drawingml/2006/main" lIns="0" tIns="0" rIns="0" bIns="0" anchor="ctr">
+            <a:noAutofit/>
+          </a:bodyPr>
+          <a:lstStyle xmlns:a="http://schemas.openxmlformats.org/drawingml/2006/main"/>
+          <a:p xmlns:a="http://schemas.openxmlformats.org/drawingml/2006/main">
+            <a:pPr algn="l">
+              <a:defRPr sz="900" b="0">
+                <a:solidFill>
+                  <a:srgbClr val="59636E"/>
+                </a:solidFill>
+                <a:latin typeface="Noto Sans JP"/>
+                <a:ea typeface="Noto Sans JP"/>
+                <a:cs typeface="Noto Sans JP"/>
+              </a:defRPr>
+            </a:pPr>
+            <a:r>
+              <a:rPr sz="900" b="0">
+                <a:solidFill>
+                  <a:srgbClr val="59636E"/>
+                </a:solidFill>
+                <a:latin typeface="Noto Sans JP"/>
+                <a:ea typeface="Noto Sans JP"/>
+                <a:cs typeface="Noto Sans JP"/>
+              </a:rPr>
+              <a:t>[1] 室内環境ログ研究の入力資料（同梱教材・合成データ）, 2026.</a:t>
             </a:r>
           </a:p>
         </p:txBody>
@@ -7542,7 +8450,7 @@
     </p:spTree>
     <p:extLst>
       <p:ext uri="{BB962C8B-B14F-4D97-AF65-F5344CB8AC3E}">
-        <p14:creationId xmlns:p14="http://schemas.microsoft.com/office/powerpoint/2010/main" val="1883183375"/>
+        <p14:creationId xmlns:p14="http://schemas.microsoft.com/office/powerpoint/2010/main" val="1353474342"/>
       </p:ext>
     </p:extLst>
   </p:cSld>
@@ -7570,10 +8478,10 @@
       </p:grpSpPr>
       <p:sp>
         <p:nvSpPr>
-          <p:cNvPr id="18" name="footer-line">
-            <a:extLst xmlns:a="http://schemas.openxmlformats.org/drawingml/2006/main">
-              <a:ext uri="{FF2B5EF4-FFF2-40B4-BE49-F238E27FC236}">
-                <a16:creationId xmlns:a16="http://schemas.microsoft.com/office/drawing/2014/main" id="{ED864177-2027-4A17-8668-25682F5E856F}"/>
+          <p:cNvPr id="21" name="footer-line">
+            <a:extLst xmlns:a="http://schemas.openxmlformats.org/drawingml/2006/main">
+              <a:ext uri="{FF2B5EF4-FFF2-40B4-BE49-F238E27FC236}">
+                <a16:creationId xmlns:a16="http://schemas.microsoft.com/office/drawing/2014/main" id="{3030BB74-F665-4286-8D83-C3365959132A}"/>
               </a:ext>
             </a:extLst>
           </p:cNvPr>
@@ -7601,14 +8509,14 @@
       </p:sp>
       <p:pic>
         <p:nvPicPr>
-          <p:cNvPr id="19" name=""/>
+          <p:cNvPr id="22" name=""/>
           <p:cNvPicPr>
             <a:picLocks xmlns:a="http://schemas.openxmlformats.org/drawingml/2006/main" noChangeAspect="1"/>
           </p:cNvPicPr>
           <p:nvPr/>
         </p:nvPicPr>
         <p:blipFill>
-          <a:blip xmlns:r="http://schemas.openxmlformats.org/officeDocument/2006/relationships" xmlns:a="http://schemas.openxmlformats.org/drawingml/2006/main" r:embed="Reb23b034545c482b"/>
+          <a:blip xmlns:r="http://schemas.openxmlformats.org/officeDocument/2006/relationships" xmlns:a="http://schemas.openxmlformats.org/drawingml/2006/main" r:embed="Re5dc75871b2e454c"/>
           <a:stretch xmlns:a="http://schemas.openxmlformats.org/drawingml/2006/main"/>
         </p:blipFill>
         <p:spPr>
@@ -7626,7 +8534,7 @@
           <p:cNvPr id="3" name="page">
             <a:extLst xmlns:a="http://schemas.openxmlformats.org/drawingml/2006/main">
               <a:ext uri="{FF2B5EF4-FFF2-40B4-BE49-F238E27FC236}">
-                <a16:creationId xmlns:a16="http://schemas.microsoft.com/office/drawing/2014/main" id="{DFA57532-6F2C-480C-84BD-F8684AD8EF2D}"/>
+                <a16:creationId xmlns:a16="http://schemas.microsoft.com/office/drawing/2014/main" id="{9F6DDA29-E2AC-4A1B-AF01-DE0D49A45899}"/>
               </a:ext>
             </a:extLst>
           </p:cNvPr>
@@ -7684,7 +8592,7 @@
           <p:cNvPr id="4" name="fictional-disclosure">
             <a:extLst xmlns:a="http://schemas.openxmlformats.org/drawingml/2006/main">
               <a:ext uri="{FF2B5EF4-FFF2-40B4-BE49-F238E27FC236}">
-                <a16:creationId xmlns:a16="http://schemas.microsoft.com/office/drawing/2014/main" id="{6A1C05C8-189A-4883-B6F6-1B2D7B6A32EF}"/>
+                <a16:creationId xmlns:a16="http://schemas.microsoft.com/office/drawing/2014/main" id="{2D9EE0FE-8B1B-4146-8CCE-F9135C505137}"/>
               </a:ext>
             </a:extLst>
           </p:cNvPr>
@@ -7739,10 +8647,10 @@
       </p:sp>
       <p:sp>
         <p:nvSpPr>
-          <p:cNvPr id="5" name="title">
-            <a:extLst xmlns:a="http://schemas.openxmlformats.org/drawingml/2006/main">
-              <a:ext uri="{FF2B5EF4-FFF2-40B4-BE49-F238E27FC236}">
-                <a16:creationId xmlns:a16="http://schemas.microsoft.com/office/drawing/2014/main" id="{B5BF6DF7-8B14-4F83-8C27-4F29D67B3866}"/>
+          <p:cNvPr id="5" name="running-chapter-8">
+            <a:extLst xmlns:a="http://schemas.openxmlformats.org/drawingml/2006/main">
+              <a:ext uri="{FF2B5EF4-FFF2-40B4-BE49-F238E27FC236}">
+                <a16:creationId xmlns:a16="http://schemas.microsoft.com/office/drawing/2014/main" id="{AACAB00F-28CB-4784-816E-50AD94916A8E}"/>
               </a:ext>
             </a:extLst>
           </p:cNvPr>
@@ -7754,7 +8662,7 @@
         <p:spPr>
           <a:xfrm xmlns:a="http://schemas.openxmlformats.org/drawingml/2006/main">
             <a:off x="457200" y="109728"/>
-            <a:ext cx="8229600" cy="400050"/>
+            <a:ext cx="2560320" cy="304800"/>
           </a:xfrm>
           <a:prstGeom xmlns:a="http://schemas.openxmlformats.org/drawingml/2006/main" prst="rect">
             <a:avLst/>
@@ -7772,19 +8680,19 @@
           <a:lstStyle xmlns:a="http://schemas.openxmlformats.org/drawingml/2006/main"/>
           <a:p xmlns:a="http://schemas.openxmlformats.org/drawingml/2006/main">
             <a:pPr algn="l">
-              <a:defRPr sz="2700" b="1">
-                <a:solidFill>
-                  <a:srgbClr val="17202A"/>
-                </a:solidFill>
-                <a:latin typeface="Noto Sans JP"/>
-                <a:ea typeface="Noto Sans JP"/>
-                <a:cs typeface="Noto Sans JP"/>
-              </a:defRPr>
-            </a:pPr>
-            <a:r>
-              <a:rPr sz="2700" b="1">
-                <a:solidFill>
-                  <a:srgbClr val="17202A"/>
+              <a:defRPr sz="1200" b="0">
+                <a:solidFill>
+                  <a:srgbClr val="38761D"/>
+                </a:solidFill>
+                <a:latin typeface="Noto Sans JP"/>
+                <a:ea typeface="Noto Sans JP"/>
+                <a:cs typeface="Noto Sans JP"/>
+              </a:defRPr>
+            </a:pPr>
+            <a:r>
+              <a:rPr sz="1200" b="0">
+                <a:solidFill>
+                  <a:srgbClr val="38761D"/>
                 </a:solidFill>
                 <a:latin typeface="Noto Sans JP"/>
                 <a:ea typeface="Noto Sans JP"/>
@@ -7797,22 +8705,22 @@
       </p:sp>
       <p:sp>
         <p:nvSpPr>
-          <p:cNvPr id="6" name="message">
-            <a:extLst xmlns:a="http://schemas.openxmlformats.org/drawingml/2006/main">
-              <a:ext uri="{FF2B5EF4-FFF2-40B4-BE49-F238E27FC236}">
-                <a16:creationId xmlns:a16="http://schemas.microsoft.com/office/drawing/2014/main" id="{05A4023C-49A6-433C-8877-0C3B0E5148E5}"/>
-              </a:ext>
-            </a:extLst>
-          </p:cNvPr>
-          <p:cNvSpPr>
-            <a:spLocks xmlns:a="http://schemas.openxmlformats.org/drawingml/2006/main" noGrp="1"/>
-          </p:cNvSpPr>
-          <p:nvPr/>
-        </p:nvSpPr>
-        <p:spPr>
-          <a:xfrm xmlns:a="http://schemas.openxmlformats.org/drawingml/2006/main">
-            <a:off x="457200" y="621792"/>
-            <a:ext cx="8229600" cy="694944"/>
+          <p:cNvPr id="6" name="running-title-8">
+            <a:extLst xmlns:a="http://schemas.openxmlformats.org/drawingml/2006/main">
+              <a:ext uri="{FF2B5EF4-FFF2-40B4-BE49-F238E27FC236}">
+                <a16:creationId xmlns:a16="http://schemas.microsoft.com/office/drawing/2014/main" id="{F6F9BDF7-020B-4CE0-AD9F-9CD5347C818D}"/>
+              </a:ext>
+            </a:extLst>
+          </p:cNvPr>
+          <p:cNvSpPr>
+            <a:spLocks xmlns:a="http://schemas.openxmlformats.org/drawingml/2006/main" noGrp="1"/>
+          </p:cNvSpPr>
+          <p:nvPr/>
+        </p:nvSpPr>
+        <p:spPr>
+          <a:xfrm xmlns:a="http://schemas.openxmlformats.org/drawingml/2006/main">
+            <a:off x="3200400" y="109728"/>
+            <a:ext cx="5486400" cy="304800"/>
           </a:xfrm>
           <a:prstGeom xmlns:a="http://schemas.openxmlformats.org/drawingml/2006/main" prst="rect">
             <a:avLst/>
@@ -7829,48 +8737,48 @@
           </a:bodyPr>
           <a:lstStyle xmlns:a="http://schemas.openxmlformats.org/drawingml/2006/main"/>
           <a:p xmlns:a="http://schemas.openxmlformats.org/drawingml/2006/main">
-            <a:pPr algn="l">
-              <a:defRPr sz="2300" b="1">
-                <a:solidFill>
-                  <a:srgbClr val="17202A"/>
-                </a:solidFill>
-                <a:latin typeface="Noto Sans JP"/>
-                <a:ea typeface="Noto Sans JP"/>
-                <a:cs typeface="Noto Sans JP"/>
-              </a:defRPr>
-            </a:pPr>
-            <a:r>
-              <a:rPr sz="2300" b="1">
-                <a:solidFill>
-                  <a:srgbClr val="17202A"/>
-                </a:solidFill>
-                <a:latin typeface="Noto Sans JP"/>
-                <a:ea typeface="Noto Sans JP"/>
-                <a:cs typeface="Noto Sans JP"/>
-              </a:rPr>
-              <a:t>記録点数と、残る変化を併せて確かめる</a:t>
-            </a:r>
-          </a:p>
-        </p:txBody>
-      </p:sp>
-      <p:sp>
-        <p:nvSpPr>
-          <p:cNvPr id="7" name="summary-label-0">
-            <a:extLst xmlns:a="http://schemas.openxmlformats.org/drawingml/2006/main">
-              <a:ext uri="{FF2B5EF4-FFF2-40B4-BE49-F238E27FC236}">
-                <a16:creationId xmlns:a16="http://schemas.microsoft.com/office/drawing/2014/main" id="{B6A8641E-4BA2-42F7-8E02-AC0DA98B14B0}"/>
-              </a:ext>
-            </a:extLst>
-          </p:cNvPr>
-          <p:cNvSpPr>
-            <a:spLocks xmlns:a="http://schemas.openxmlformats.org/drawingml/2006/main" noGrp="1"/>
-          </p:cNvSpPr>
-          <p:nvPr/>
-        </p:nvSpPr>
-        <p:spPr>
-          <a:xfrm xmlns:a="http://schemas.openxmlformats.org/drawingml/2006/main">
-            <a:off x="457200" y="1485900"/>
-            <a:ext cx="2664619" cy="590550"/>
+            <a:pPr algn="r">
+              <a:defRPr sz="1200" b="0">
+                <a:solidFill>
+                  <a:srgbClr val="38761D"/>
+                </a:solidFill>
+                <a:latin typeface="Noto Sans JP"/>
+                <a:ea typeface="Noto Sans JP"/>
+                <a:cs typeface="Noto Sans JP"/>
+              </a:defRPr>
+            </a:pPr>
+            <a:r>
+              <a:rPr sz="1200" b="0">
+                <a:solidFill>
+                  <a:srgbClr val="38761D"/>
+                </a:solidFill>
+                <a:latin typeface="Noto Sans JP"/>
+                <a:ea typeface="Noto Sans JP"/>
+                <a:cs typeface="Noto Sans JP"/>
+              </a:rPr>
+              <a:t>室内環境ログの記録間隔</a:t>
+            </a:r>
+          </a:p>
+        </p:txBody>
+      </p:sp>
+      <p:sp>
+        <p:nvSpPr>
+          <p:cNvPr id="7" name="title">
+            <a:extLst xmlns:a="http://schemas.openxmlformats.org/drawingml/2006/main">
+              <a:ext uri="{FF2B5EF4-FFF2-40B4-BE49-F238E27FC236}">
+                <a16:creationId xmlns:a16="http://schemas.microsoft.com/office/drawing/2014/main" id="{D8DEC442-7408-4E60-A2F4-B8E79F3FADE1}"/>
+              </a:ext>
+            </a:extLst>
+          </p:cNvPr>
+          <p:cNvSpPr>
+            <a:spLocks xmlns:a="http://schemas.openxmlformats.org/drawingml/2006/main" noGrp="1"/>
+          </p:cNvSpPr>
+          <p:nvPr/>
+        </p:nvSpPr>
+        <p:spPr>
+          <a:xfrm xmlns:a="http://schemas.openxmlformats.org/drawingml/2006/main">
+            <a:off x="457200" y="475488"/>
+            <a:ext cx="8229600" cy="400050"/>
           </a:xfrm>
           <a:prstGeom xmlns:a="http://schemas.openxmlformats.org/drawingml/2006/main" prst="rect">
             <a:avLst/>
@@ -7888,7 +8796,7 @@
           <a:lstStyle xmlns:a="http://schemas.openxmlformats.org/drawingml/2006/main"/>
           <a:p xmlns:a="http://schemas.openxmlformats.org/drawingml/2006/main">
             <a:pPr algn="l">
-              <a:defRPr sz="1800" b="1">
+              <a:defRPr sz="2700" b="1">
                 <a:solidFill>
                   <a:srgbClr val="17202A"/>
                 </a:solidFill>
@@ -7898,7 +8806,7 @@
               </a:defRPr>
             </a:pPr>
             <a:r>
-              <a:rPr sz="1800" b="1">
+              <a:rPr sz="2700" b="1">
                 <a:solidFill>
                   <a:srgbClr val="17202A"/>
                 </a:solidFill>
@@ -7906,29 +8814,29 @@
                 <a:ea typeface="Noto Sans JP"/>
                 <a:cs typeface="Noto Sans JP"/>
               </a:rPr>
-              <a:t>01 研究のねらい</a:t>
-            </a:r>
-          </a:p>
-        </p:txBody>
-      </p:sp>
-      <p:sp>
-        <p:nvSpPr>
-          <p:cNvPr id="8" name="summary-body-0">
-            <a:extLst xmlns:a="http://schemas.openxmlformats.org/drawingml/2006/main">
-              <a:ext uri="{FF2B5EF4-FFF2-40B4-BE49-F238E27FC236}">
-                <a16:creationId xmlns:a16="http://schemas.microsoft.com/office/drawing/2014/main" id="{5FF3ED6F-73DE-4861-8231-07FCFF294E75}"/>
-              </a:ext>
-            </a:extLst>
-          </p:cNvPr>
-          <p:cNvSpPr>
-            <a:spLocks xmlns:a="http://schemas.openxmlformats.org/drawingml/2006/main" noGrp="1"/>
-          </p:cNvSpPr>
-          <p:nvPr/>
-        </p:nvSpPr>
-        <p:spPr>
-          <a:xfrm xmlns:a="http://schemas.openxmlformats.org/drawingml/2006/main">
-            <a:off x="3293269" y="1485900"/>
-            <a:ext cx="5393531" cy="590550"/>
+              <a:t>まとめ</a:t>
+            </a:r>
+          </a:p>
+        </p:txBody>
+      </p:sp>
+      <p:sp>
+        <p:nvSpPr>
+          <p:cNvPr id="8" name="message">
+            <a:extLst xmlns:a="http://schemas.openxmlformats.org/drawingml/2006/main">
+              <a:ext uri="{FF2B5EF4-FFF2-40B4-BE49-F238E27FC236}">
+                <a16:creationId xmlns:a16="http://schemas.microsoft.com/office/drawing/2014/main" id="{A9BED28E-10D4-4276-946E-D373CA40683A}"/>
+              </a:ext>
+            </a:extLst>
+          </p:cNvPr>
+          <p:cNvSpPr>
+            <a:spLocks xmlns:a="http://schemas.openxmlformats.org/drawingml/2006/main" noGrp="1"/>
+          </p:cNvSpPr>
+          <p:nvPr/>
+        </p:nvSpPr>
+        <p:spPr>
+          <a:xfrm xmlns:a="http://schemas.openxmlformats.org/drawingml/2006/main">
+            <a:off x="457200" y="914400"/>
+            <a:ext cx="8229600" cy="548640"/>
           </a:xfrm>
           <a:prstGeom xmlns:a="http://schemas.openxmlformats.org/drawingml/2006/main" prst="rect">
             <a:avLst/>
@@ -7946,6 +8854,122 @@
           <a:lstStyle xmlns:a="http://schemas.openxmlformats.org/drawingml/2006/main"/>
           <a:p xmlns:a="http://schemas.openxmlformats.org/drawingml/2006/main">
             <a:pPr algn="l">
+              <a:defRPr sz="2300" b="1">
+                <a:solidFill>
+                  <a:srgbClr val="17202A"/>
+                </a:solidFill>
+                <a:latin typeface="Noto Sans JP"/>
+                <a:ea typeface="Noto Sans JP"/>
+                <a:cs typeface="Noto Sans JP"/>
+              </a:defRPr>
+            </a:pPr>
+            <a:r>
+              <a:rPr sz="2300" b="1">
+                <a:solidFill>
+                  <a:srgbClr val="17202A"/>
+                </a:solidFill>
+                <a:latin typeface="Noto Sans JP"/>
+                <a:ea typeface="Noto Sans JP"/>
+                <a:cs typeface="Noto Sans JP"/>
+              </a:rPr>
+              <a:t>記録点数と、残る変化を併せて確かめる [1]</a:t>
+            </a:r>
+          </a:p>
+        </p:txBody>
+      </p:sp>
+      <p:sp>
+        <p:nvSpPr>
+          <p:cNvPr id="9" name="summary-label-0">
+            <a:extLst xmlns:a="http://schemas.openxmlformats.org/drawingml/2006/main">
+              <a:ext uri="{FF2B5EF4-FFF2-40B4-BE49-F238E27FC236}">
+                <a16:creationId xmlns:a16="http://schemas.microsoft.com/office/drawing/2014/main" id="{7E98C2AB-1815-4608-B389-442566C2C096}"/>
+              </a:ext>
+            </a:extLst>
+          </p:cNvPr>
+          <p:cNvSpPr>
+            <a:spLocks xmlns:a="http://schemas.openxmlformats.org/drawingml/2006/main" noGrp="1"/>
+          </p:cNvSpPr>
+          <p:nvPr/>
+        </p:nvSpPr>
+        <p:spPr>
+          <a:xfrm xmlns:a="http://schemas.openxmlformats.org/drawingml/2006/main">
+            <a:off x="457200" y="1619250"/>
+            <a:ext cx="2664619" cy="552450"/>
+          </a:xfrm>
+          <a:prstGeom xmlns:a="http://schemas.openxmlformats.org/drawingml/2006/main" prst="rect">
+            <a:avLst/>
+          </a:prstGeom>
+          <a:noFill xmlns:a="http://schemas.openxmlformats.org/drawingml/2006/main"/>
+          <a:ln xmlns:a="http://schemas.openxmlformats.org/drawingml/2006/main" w="0">
+            <a:noFill/>
+            <a:prstDash val="solid"/>
+          </a:ln>
+        </p:spPr>
+        <p:txBody>
+          <a:bodyPr xmlns:a="http://schemas.openxmlformats.org/drawingml/2006/main" lIns="0" tIns="0" rIns="0" bIns="0" anchor="ctr">
+            <a:noAutofit/>
+          </a:bodyPr>
+          <a:lstStyle xmlns:a="http://schemas.openxmlformats.org/drawingml/2006/main"/>
+          <a:p xmlns:a="http://schemas.openxmlformats.org/drawingml/2006/main">
+            <a:pPr algn="l">
+              <a:defRPr sz="1800" b="1">
+                <a:solidFill>
+                  <a:srgbClr val="38761D"/>
+                </a:solidFill>
+                <a:latin typeface="Noto Sans JP"/>
+                <a:ea typeface="Noto Sans JP"/>
+                <a:cs typeface="Noto Sans JP"/>
+              </a:defRPr>
+            </a:pPr>
+            <a:r>
+              <a:rPr sz="1800" b="1">
+                <a:solidFill>
+                  <a:srgbClr val="38761D"/>
+                </a:solidFill>
+                <a:latin typeface="Noto Sans JP"/>
+                <a:ea typeface="Noto Sans JP"/>
+                <a:cs typeface="Noto Sans JP"/>
+              </a:rPr>
+              <a:t>01 研究のねらい</a:t>
+            </a:r>
+          </a:p>
+        </p:txBody>
+      </p:sp>
+      <p:sp>
+        <p:nvSpPr>
+          <p:cNvPr id="10" name="summary-body-0">
+            <a:extLst xmlns:a="http://schemas.openxmlformats.org/drawingml/2006/main">
+              <a:ext uri="{FF2B5EF4-FFF2-40B4-BE49-F238E27FC236}">
+                <a16:creationId xmlns:a16="http://schemas.microsoft.com/office/drawing/2014/main" id="{4295BE24-24EF-4CC0-B6A5-188D78470C69}"/>
+              </a:ext>
+            </a:extLst>
+          </p:cNvPr>
+          <p:cNvSpPr>
+            <a:spLocks xmlns:a="http://schemas.openxmlformats.org/drawingml/2006/main" noGrp="1"/>
+          </p:cNvSpPr>
+          <p:nvPr/>
+        </p:nvSpPr>
+        <p:spPr>
+          <a:xfrm xmlns:a="http://schemas.openxmlformats.org/drawingml/2006/main">
+            <a:off x="3293269" y="1619250"/>
+            <a:ext cx="5393531" cy="552450"/>
+          </a:xfrm>
+          <a:prstGeom xmlns:a="http://schemas.openxmlformats.org/drawingml/2006/main" prst="rect">
+            <a:avLst/>
+          </a:prstGeom>
+          <a:noFill xmlns:a="http://schemas.openxmlformats.org/drawingml/2006/main"/>
+          <a:ln xmlns:a="http://schemas.openxmlformats.org/drawingml/2006/main" w="0">
+            <a:noFill/>
+            <a:prstDash val="solid"/>
+          </a:ln>
+        </p:spPr>
+        <p:txBody>
+          <a:bodyPr xmlns:a="http://schemas.openxmlformats.org/drawingml/2006/main" lIns="0" tIns="0" rIns="0" bIns="0" anchor="ctr">
+            <a:noAutofit/>
+          </a:bodyPr>
+          <a:lstStyle xmlns:a="http://schemas.openxmlformats.org/drawingml/2006/main"/>
+          <a:p xmlns:a="http://schemas.openxmlformats.org/drawingml/2006/main">
+            <a:pPr algn="l">
               <a:defRPr sz="1800" b="0">
                 <a:solidFill>
                   <a:srgbClr val="17202A"/>
@@ -7971,21 +8995,21 @@
       </p:sp>
       <p:sp>
         <p:nvSpPr>
-          <p:cNvPr id="9" name="summary-rule-0">
-            <a:extLst xmlns:a="http://schemas.openxmlformats.org/drawingml/2006/main">
-              <a:ext uri="{FF2B5EF4-FFF2-40B4-BE49-F238E27FC236}">
-                <a16:creationId xmlns:a16="http://schemas.microsoft.com/office/drawing/2014/main" id="{868D2CD3-37F5-4F91-85D4-AF7AE3847CA3}"/>
-              </a:ext>
-            </a:extLst>
-          </p:cNvPr>
-          <p:cNvSpPr>
-            <a:spLocks xmlns:a="http://schemas.openxmlformats.org/drawingml/2006/main" noGrp="1"/>
-          </p:cNvSpPr>
-          <p:nvPr/>
-        </p:nvSpPr>
-        <p:spPr>
-          <a:xfrm xmlns:a="http://schemas.openxmlformats.org/drawingml/2006/main">
-            <a:off x="457200" y="2100263"/>
+          <p:cNvPr id="11" name="summary-rule-0">
+            <a:extLst xmlns:a="http://schemas.openxmlformats.org/drawingml/2006/main">
+              <a:ext uri="{FF2B5EF4-FFF2-40B4-BE49-F238E27FC236}">
+                <a16:creationId xmlns:a16="http://schemas.microsoft.com/office/drawing/2014/main" id="{1E058072-7A7B-4112-8D6E-492C5C857EB1}"/>
+              </a:ext>
+            </a:extLst>
+          </p:cNvPr>
+          <p:cNvSpPr>
+            <a:spLocks xmlns:a="http://schemas.openxmlformats.org/drawingml/2006/main" noGrp="1"/>
+          </p:cNvSpPr>
+          <p:nvPr/>
+        </p:nvSpPr>
+        <p:spPr>
+          <a:xfrm xmlns:a="http://schemas.openxmlformats.org/drawingml/2006/main">
+            <a:off x="457200" y="2195513"/>
             <a:ext cx="8229600" cy="9525"/>
           </a:xfrm>
           <a:prstGeom xmlns:a="http://schemas.openxmlformats.org/drawingml/2006/main" prst="rect">
@@ -8002,22 +9026,22 @@
       </p:sp>
       <p:sp>
         <p:nvSpPr>
-          <p:cNvPr id="10" name="summary-label-1">
-            <a:extLst xmlns:a="http://schemas.openxmlformats.org/drawingml/2006/main">
-              <a:ext uri="{FF2B5EF4-FFF2-40B4-BE49-F238E27FC236}">
-                <a16:creationId xmlns:a16="http://schemas.microsoft.com/office/drawing/2014/main" id="{E6C14105-BBFE-4C93-A556-A5A1C75C06B1}"/>
-              </a:ext>
-            </a:extLst>
-          </p:cNvPr>
-          <p:cNvSpPr>
-            <a:spLocks xmlns:a="http://schemas.openxmlformats.org/drawingml/2006/main" noGrp="1"/>
-          </p:cNvSpPr>
-          <p:nvPr/>
-        </p:nvSpPr>
-        <p:spPr>
-          <a:xfrm xmlns:a="http://schemas.openxmlformats.org/drawingml/2006/main">
-            <a:off x="457200" y="2143125"/>
-            <a:ext cx="2664619" cy="590550"/>
+          <p:cNvPr id="12" name="summary-label-1">
+            <a:extLst xmlns:a="http://schemas.openxmlformats.org/drawingml/2006/main">
+              <a:ext uri="{FF2B5EF4-FFF2-40B4-BE49-F238E27FC236}">
+                <a16:creationId xmlns:a16="http://schemas.microsoft.com/office/drawing/2014/main" id="{58EC75D8-F37E-4BAB-8D4B-8343A2593FDB}"/>
+              </a:ext>
+            </a:extLst>
+          </p:cNvPr>
+          <p:cNvSpPr>
+            <a:spLocks xmlns:a="http://schemas.openxmlformats.org/drawingml/2006/main" noGrp="1"/>
+          </p:cNvSpPr>
+          <p:nvPr/>
+        </p:nvSpPr>
+        <p:spPr>
+          <a:xfrm xmlns:a="http://schemas.openxmlformats.org/drawingml/2006/main">
+            <a:off x="457200" y="2228850"/>
+            <a:ext cx="2664619" cy="552450"/>
           </a:xfrm>
           <a:prstGeom xmlns:a="http://schemas.openxmlformats.org/drawingml/2006/main" prst="rect">
             <a:avLst/>
@@ -8037,7 +9061,7 @@
             <a:pPr algn="l">
               <a:defRPr sz="1800" b="1">
                 <a:solidFill>
-                  <a:srgbClr val="17202A"/>
+                  <a:srgbClr val="38761D"/>
                 </a:solidFill>
                 <a:latin typeface="Noto Sans JP"/>
                 <a:ea typeface="Noto Sans JP"/>
@@ -8047,7 +9071,7 @@
             <a:r>
               <a:rPr sz="1800" b="1">
                 <a:solidFill>
-                  <a:srgbClr val="17202A"/>
+                  <a:srgbClr val="38761D"/>
                 </a:solidFill>
                 <a:latin typeface="Noto Sans JP"/>
                 <a:ea typeface="Noto Sans JP"/>
@@ -8060,22 +9084,22 @@
       </p:sp>
       <p:sp>
         <p:nvSpPr>
-          <p:cNvPr id="11" name="summary-body-1">
-            <a:extLst xmlns:a="http://schemas.openxmlformats.org/drawingml/2006/main">
-              <a:ext uri="{FF2B5EF4-FFF2-40B4-BE49-F238E27FC236}">
-                <a16:creationId xmlns:a16="http://schemas.microsoft.com/office/drawing/2014/main" id="{994EE426-55FB-4C64-B995-91AAFB3608BC}"/>
-              </a:ext>
-            </a:extLst>
-          </p:cNvPr>
-          <p:cNvSpPr>
-            <a:spLocks xmlns:a="http://schemas.openxmlformats.org/drawingml/2006/main" noGrp="1"/>
-          </p:cNvSpPr>
-          <p:nvPr/>
-        </p:nvSpPr>
-        <p:spPr>
-          <a:xfrm xmlns:a="http://schemas.openxmlformats.org/drawingml/2006/main">
-            <a:off x="3293269" y="2143125"/>
-            <a:ext cx="5393531" cy="590550"/>
+          <p:cNvPr id="13" name="summary-body-1">
+            <a:extLst xmlns:a="http://schemas.openxmlformats.org/drawingml/2006/main">
+              <a:ext uri="{FF2B5EF4-FFF2-40B4-BE49-F238E27FC236}">
+                <a16:creationId xmlns:a16="http://schemas.microsoft.com/office/drawing/2014/main" id="{A89FD6C2-CE10-4D5C-ADD7-44BF43E90B12}"/>
+              </a:ext>
+            </a:extLst>
+          </p:cNvPr>
+          <p:cNvSpPr>
+            <a:spLocks xmlns:a="http://schemas.openxmlformats.org/drawingml/2006/main" noGrp="1"/>
+          </p:cNvSpPr>
+          <p:nvPr/>
+        </p:nvSpPr>
+        <p:spPr>
+          <a:xfrm xmlns:a="http://schemas.openxmlformats.org/drawingml/2006/main">
+            <a:off x="3293269" y="2228850"/>
+            <a:ext cx="5393531" cy="552450"/>
           </a:xfrm>
           <a:prstGeom xmlns:a="http://schemas.openxmlformats.org/drawingml/2006/main" prst="rect">
             <a:avLst/>
@@ -8118,21 +9142,21 @@
       </p:sp>
       <p:sp>
         <p:nvSpPr>
-          <p:cNvPr id="12" name="summary-rule-1">
-            <a:extLst xmlns:a="http://schemas.openxmlformats.org/drawingml/2006/main">
-              <a:ext uri="{FF2B5EF4-FFF2-40B4-BE49-F238E27FC236}">
-                <a16:creationId xmlns:a16="http://schemas.microsoft.com/office/drawing/2014/main" id="{153E52D8-DC41-4F4B-B920-66AB47B273FF}"/>
-              </a:ext>
-            </a:extLst>
-          </p:cNvPr>
-          <p:cNvSpPr>
-            <a:spLocks xmlns:a="http://schemas.openxmlformats.org/drawingml/2006/main" noGrp="1"/>
-          </p:cNvSpPr>
-          <p:nvPr/>
-        </p:nvSpPr>
-        <p:spPr>
-          <a:xfrm xmlns:a="http://schemas.openxmlformats.org/drawingml/2006/main">
-            <a:off x="457200" y="2757488"/>
+          <p:cNvPr id="14" name="summary-rule-1">
+            <a:extLst xmlns:a="http://schemas.openxmlformats.org/drawingml/2006/main">
+              <a:ext uri="{FF2B5EF4-FFF2-40B4-BE49-F238E27FC236}">
+                <a16:creationId xmlns:a16="http://schemas.microsoft.com/office/drawing/2014/main" id="{2588E751-1078-4859-8D66-74719659E291}"/>
+              </a:ext>
+            </a:extLst>
+          </p:cNvPr>
+          <p:cNvSpPr>
+            <a:spLocks xmlns:a="http://schemas.openxmlformats.org/drawingml/2006/main" noGrp="1"/>
+          </p:cNvSpPr>
+          <p:nvPr/>
+        </p:nvSpPr>
+        <p:spPr>
+          <a:xfrm xmlns:a="http://schemas.openxmlformats.org/drawingml/2006/main">
+            <a:off x="457200" y="2805113"/>
             <a:ext cx="8229600" cy="9525"/>
           </a:xfrm>
           <a:prstGeom xmlns:a="http://schemas.openxmlformats.org/drawingml/2006/main" prst="rect">
@@ -8149,22 +9173,22 @@
       </p:sp>
       <p:sp>
         <p:nvSpPr>
-          <p:cNvPr id="13" name="summary-label-2">
-            <a:extLst xmlns:a="http://schemas.openxmlformats.org/drawingml/2006/main">
-              <a:ext uri="{FF2B5EF4-FFF2-40B4-BE49-F238E27FC236}">
-                <a16:creationId xmlns:a16="http://schemas.microsoft.com/office/drawing/2014/main" id="{608EDB75-3AB2-4FF8-952C-BCC504BE465C}"/>
-              </a:ext>
-            </a:extLst>
-          </p:cNvPr>
-          <p:cNvSpPr>
-            <a:spLocks xmlns:a="http://schemas.openxmlformats.org/drawingml/2006/main" noGrp="1"/>
-          </p:cNvSpPr>
-          <p:nvPr/>
-        </p:nvSpPr>
-        <p:spPr>
-          <a:xfrm xmlns:a="http://schemas.openxmlformats.org/drawingml/2006/main">
-            <a:off x="457200" y="2800350"/>
-            <a:ext cx="2664619" cy="590550"/>
+          <p:cNvPr id="15" name="summary-label-2">
+            <a:extLst xmlns:a="http://schemas.openxmlformats.org/drawingml/2006/main">
+              <a:ext uri="{FF2B5EF4-FFF2-40B4-BE49-F238E27FC236}">
+                <a16:creationId xmlns:a16="http://schemas.microsoft.com/office/drawing/2014/main" id="{CE5716D7-3970-4E38-B8F0-4622AD0F5E0E}"/>
+              </a:ext>
+            </a:extLst>
+          </p:cNvPr>
+          <p:cNvSpPr>
+            <a:spLocks xmlns:a="http://schemas.openxmlformats.org/drawingml/2006/main" noGrp="1"/>
+          </p:cNvSpPr>
+          <p:nvPr/>
+        </p:nvSpPr>
+        <p:spPr>
+          <a:xfrm xmlns:a="http://schemas.openxmlformats.org/drawingml/2006/main">
+            <a:off x="457200" y="2838450"/>
+            <a:ext cx="2664619" cy="552450"/>
           </a:xfrm>
           <a:prstGeom xmlns:a="http://schemas.openxmlformats.org/drawingml/2006/main" prst="rect">
             <a:avLst/>
@@ -8184,7 +9208,7 @@
             <a:pPr algn="l">
               <a:defRPr sz="1800" b="1">
                 <a:solidFill>
-                  <a:srgbClr val="17202A"/>
+                  <a:srgbClr val="38761D"/>
                 </a:solidFill>
                 <a:latin typeface="Noto Sans JP"/>
                 <a:ea typeface="Noto Sans JP"/>
@@ -8194,7 +9218,7 @@
             <a:r>
               <a:rPr sz="1800" b="1">
                 <a:solidFill>
-                  <a:srgbClr val="17202A"/>
+                  <a:srgbClr val="38761D"/>
                 </a:solidFill>
                 <a:latin typeface="Noto Sans JP"/>
                 <a:ea typeface="Noto Sans JP"/>
@@ -8207,22 +9231,22 @@
       </p:sp>
       <p:sp>
         <p:nvSpPr>
-          <p:cNvPr id="14" name="summary-body-2">
-            <a:extLst xmlns:a="http://schemas.openxmlformats.org/drawingml/2006/main">
-              <a:ext uri="{FF2B5EF4-FFF2-40B4-BE49-F238E27FC236}">
-                <a16:creationId xmlns:a16="http://schemas.microsoft.com/office/drawing/2014/main" id="{C12B4C38-5EA8-4867-B3A1-28D31D54BC02}"/>
-              </a:ext>
-            </a:extLst>
-          </p:cNvPr>
-          <p:cNvSpPr>
-            <a:spLocks xmlns:a="http://schemas.openxmlformats.org/drawingml/2006/main" noGrp="1"/>
-          </p:cNvSpPr>
-          <p:nvPr/>
-        </p:nvSpPr>
-        <p:spPr>
-          <a:xfrm xmlns:a="http://schemas.openxmlformats.org/drawingml/2006/main">
-            <a:off x="3293269" y="2800350"/>
-            <a:ext cx="5393531" cy="590550"/>
+          <p:cNvPr id="16" name="summary-body-2">
+            <a:extLst xmlns:a="http://schemas.openxmlformats.org/drawingml/2006/main">
+              <a:ext uri="{FF2B5EF4-FFF2-40B4-BE49-F238E27FC236}">
+                <a16:creationId xmlns:a16="http://schemas.microsoft.com/office/drawing/2014/main" id="{9A115E20-B80F-4766-8D44-88835B840FFD}"/>
+              </a:ext>
+            </a:extLst>
+          </p:cNvPr>
+          <p:cNvSpPr>
+            <a:spLocks xmlns:a="http://schemas.openxmlformats.org/drawingml/2006/main" noGrp="1"/>
+          </p:cNvSpPr>
+          <p:nvPr/>
+        </p:nvSpPr>
+        <p:spPr>
+          <a:xfrm xmlns:a="http://schemas.openxmlformats.org/drawingml/2006/main">
+            <a:off x="3293269" y="2838450"/>
+            <a:ext cx="5393531" cy="552450"/>
           </a:xfrm>
           <a:prstGeom xmlns:a="http://schemas.openxmlformats.org/drawingml/2006/main" prst="rect">
             <a:avLst/>
@@ -8288,10 +9312,10 @@
       </p:sp>
       <p:sp>
         <p:nvSpPr>
-          <p:cNvPr id="15" name="summary-rule-2">
-            <a:extLst xmlns:a="http://schemas.openxmlformats.org/drawingml/2006/main">
-              <a:ext uri="{FF2B5EF4-FFF2-40B4-BE49-F238E27FC236}">
-                <a16:creationId xmlns:a16="http://schemas.microsoft.com/office/drawing/2014/main" id="{14E3070E-0163-4405-BD44-B4A337106A68}"/>
+          <p:cNvPr id="17" name="summary-rule-2">
+            <a:extLst xmlns:a="http://schemas.openxmlformats.org/drawingml/2006/main">
+              <a:ext uri="{FF2B5EF4-FFF2-40B4-BE49-F238E27FC236}">
+                <a16:creationId xmlns:a16="http://schemas.microsoft.com/office/drawing/2014/main" id="{A78A4F94-D6EB-427A-914C-E8175D42AA3F}"/>
               </a:ext>
             </a:extLst>
           </p:cNvPr>
@@ -8319,22 +9343,22 @@
       </p:sp>
       <p:sp>
         <p:nvSpPr>
-          <p:cNvPr id="16" name="summary-label-3">
-            <a:extLst xmlns:a="http://schemas.openxmlformats.org/drawingml/2006/main">
-              <a:ext uri="{FF2B5EF4-FFF2-40B4-BE49-F238E27FC236}">
-                <a16:creationId xmlns:a16="http://schemas.microsoft.com/office/drawing/2014/main" id="{D9481D51-30C5-42CD-BD74-00A16FC9E7A9}"/>
-              </a:ext>
-            </a:extLst>
-          </p:cNvPr>
-          <p:cNvSpPr>
-            <a:spLocks xmlns:a="http://schemas.openxmlformats.org/drawingml/2006/main" noGrp="1"/>
-          </p:cNvSpPr>
-          <p:nvPr/>
-        </p:nvSpPr>
-        <p:spPr>
-          <a:xfrm xmlns:a="http://schemas.openxmlformats.org/drawingml/2006/main">
-            <a:off x="457200" y="3457575"/>
-            <a:ext cx="2664619" cy="590550"/>
+          <p:cNvPr id="18" name="summary-label-3">
+            <a:extLst xmlns:a="http://schemas.openxmlformats.org/drawingml/2006/main">
+              <a:ext uri="{FF2B5EF4-FFF2-40B4-BE49-F238E27FC236}">
+                <a16:creationId xmlns:a16="http://schemas.microsoft.com/office/drawing/2014/main" id="{64D37FE4-7EF2-46E3-9B69-5C4144A2E38D}"/>
+              </a:ext>
+            </a:extLst>
+          </p:cNvPr>
+          <p:cNvSpPr>
+            <a:spLocks xmlns:a="http://schemas.openxmlformats.org/drawingml/2006/main" noGrp="1"/>
+          </p:cNvSpPr>
+          <p:nvPr/>
+        </p:nvSpPr>
+        <p:spPr>
+          <a:xfrm xmlns:a="http://schemas.openxmlformats.org/drawingml/2006/main">
+            <a:off x="457200" y="3448050"/>
+            <a:ext cx="2664619" cy="552450"/>
           </a:xfrm>
           <a:prstGeom xmlns:a="http://schemas.openxmlformats.org/drawingml/2006/main" prst="rect">
             <a:avLst/>
@@ -8354,7 +9378,7 @@
             <a:pPr algn="l">
               <a:defRPr sz="1800" b="1">
                 <a:solidFill>
-                  <a:srgbClr val="17202A"/>
+                  <a:srgbClr val="38761D"/>
                 </a:solidFill>
                 <a:latin typeface="Noto Sans JP"/>
                 <a:ea typeface="Noto Sans JP"/>
@@ -8364,7 +9388,7 @@
             <a:r>
               <a:rPr sz="1800" b="1">
                 <a:solidFill>
-                  <a:srgbClr val="17202A"/>
+                  <a:srgbClr val="38761D"/>
                 </a:solidFill>
                 <a:latin typeface="Noto Sans JP"/>
                 <a:ea typeface="Noto Sans JP"/>
@@ -8377,22 +9401,22 @@
       </p:sp>
       <p:sp>
         <p:nvSpPr>
-          <p:cNvPr id="17" name="summary-body-3">
-            <a:extLst xmlns:a="http://schemas.openxmlformats.org/drawingml/2006/main">
-              <a:ext uri="{FF2B5EF4-FFF2-40B4-BE49-F238E27FC236}">
-                <a16:creationId xmlns:a16="http://schemas.microsoft.com/office/drawing/2014/main" id="{13584FB1-2B82-47CF-AE9D-8C8E2FA200C4}"/>
-              </a:ext>
-            </a:extLst>
-          </p:cNvPr>
-          <p:cNvSpPr>
-            <a:spLocks xmlns:a="http://schemas.openxmlformats.org/drawingml/2006/main" noGrp="1"/>
-          </p:cNvSpPr>
-          <p:nvPr/>
-        </p:nvSpPr>
-        <p:spPr>
-          <a:xfrm xmlns:a="http://schemas.openxmlformats.org/drawingml/2006/main">
-            <a:off x="3293269" y="3457575"/>
-            <a:ext cx="5393531" cy="590550"/>
+          <p:cNvPr id="19" name="summary-body-3">
+            <a:extLst xmlns:a="http://schemas.openxmlformats.org/drawingml/2006/main">
+              <a:ext uri="{FF2B5EF4-FFF2-40B4-BE49-F238E27FC236}">
+                <a16:creationId xmlns:a16="http://schemas.microsoft.com/office/drawing/2014/main" id="{F9DF062A-ABF3-4065-9C14-3B2801F69E66}"/>
+              </a:ext>
+            </a:extLst>
+          </p:cNvPr>
+          <p:cNvSpPr>
+            <a:spLocks xmlns:a="http://schemas.openxmlformats.org/drawingml/2006/main" noGrp="1"/>
+          </p:cNvSpPr>
+          <p:nvPr/>
+        </p:nvSpPr>
+        <p:spPr>
+          <a:xfrm xmlns:a="http://schemas.openxmlformats.org/drawingml/2006/main">
+            <a:off x="3293269" y="3448050"/>
+            <a:ext cx="5393531" cy="552450"/>
           </a:xfrm>
           <a:prstGeom xmlns:a="http://schemas.openxmlformats.org/drawingml/2006/main" prst="rect">
             <a:avLst/>
@@ -8433,10 +9457,811 @@
           </a:p>
         </p:txBody>
       </p:sp>
+      <p:sp>
+        <p:nvSpPr>
+          <p:cNvPr id="20" name="page-reference">
+            <a:extLst xmlns:a="http://schemas.openxmlformats.org/drawingml/2006/main">
+              <a:ext uri="{FF2B5EF4-FFF2-40B4-BE49-F238E27FC236}">
+                <a16:creationId xmlns:a16="http://schemas.microsoft.com/office/drawing/2014/main" id="{B389EFFE-AC0C-4C71-8344-F41C3763CFA1}"/>
+              </a:ext>
+            </a:extLst>
+          </p:cNvPr>
+          <p:cNvSpPr>
+            <a:spLocks xmlns:a="http://schemas.openxmlformats.org/drawingml/2006/main" noGrp="1"/>
+          </p:cNvSpPr>
+          <p:nvPr/>
+        </p:nvSpPr>
+        <p:spPr>
+          <a:xfrm xmlns:a="http://schemas.openxmlformats.org/drawingml/2006/main">
+            <a:off x="457200" y="4224528"/>
+            <a:ext cx="8229600" cy="329184"/>
+          </a:xfrm>
+          <a:prstGeom xmlns:a="http://schemas.openxmlformats.org/drawingml/2006/main" prst="rect">
+            <a:avLst/>
+          </a:prstGeom>
+          <a:noFill xmlns:a="http://schemas.openxmlformats.org/drawingml/2006/main"/>
+          <a:ln xmlns:a="http://schemas.openxmlformats.org/drawingml/2006/main" w="0">
+            <a:noFill/>
+            <a:prstDash val="solid"/>
+          </a:ln>
+        </p:spPr>
+        <p:txBody>
+          <a:bodyPr xmlns:a="http://schemas.openxmlformats.org/drawingml/2006/main" lIns="0" tIns="0" rIns="0" bIns="0" anchor="ctr">
+            <a:noAutofit/>
+          </a:bodyPr>
+          <a:lstStyle xmlns:a="http://schemas.openxmlformats.org/drawingml/2006/main"/>
+          <a:p xmlns:a="http://schemas.openxmlformats.org/drawingml/2006/main">
+            <a:pPr algn="l">
+              <a:defRPr sz="900" b="0">
+                <a:solidFill>
+                  <a:srgbClr val="59636E"/>
+                </a:solidFill>
+                <a:latin typeface="Noto Sans JP"/>
+                <a:ea typeface="Noto Sans JP"/>
+                <a:cs typeface="Noto Sans JP"/>
+              </a:defRPr>
+            </a:pPr>
+            <a:r>
+              <a:rPr sz="900" b="0">
+                <a:solidFill>
+                  <a:srgbClr val="59636E"/>
+                </a:solidFill>
+                <a:latin typeface="Noto Sans JP"/>
+                <a:ea typeface="Noto Sans JP"/>
+                <a:cs typeface="Noto Sans JP"/>
+              </a:rPr>
+              <a:t>[1] 室内環境ログ研究の入力資料（同梱教材・合成データ）, 2026.</a:t>
+            </a:r>
+          </a:p>
+        </p:txBody>
+      </p:sp>
     </p:spTree>
     <p:extLst>
       <p:ext uri="{BB962C8B-B14F-4D97-AF65-F5344CB8AC3E}">
-        <p14:creationId xmlns:p14="http://schemas.microsoft.com/office/powerpoint/2010/main" val="782993509"/>
+        <p14:creationId xmlns:p14="http://schemas.microsoft.com/office/powerpoint/2010/main" val="1031412903"/>
+      </p:ext>
+    </p:extLst>
+  </p:cSld>
+</p:sld>
+</file>
+
+<file path=ppt/slides/slide9.xml><?xml version="1.0" encoding="utf-8"?>
+<p:sld xmlns:p="http://schemas.openxmlformats.org/presentationml/2006/main">
+  <p:cSld>
+    <p:bg>
+      <p:bgPr>
+        <a:solidFill xmlns:a="http://schemas.openxmlformats.org/drawingml/2006/main">
+          <a:srgbClr val="FFFFFF"/>
+        </a:solidFill>
+      </p:bgPr>
+    </p:bg>
+    <p:spTree>
+      <p:nvGrpSpPr>
+        <p:cNvPr id="1" name=""/>
+        <p:cNvGrpSpPr/>
+        <p:nvPr/>
+      </p:nvGrpSpPr>
+      <p:grpSpPr>
+        <a:xfrm xmlns:a="http://schemas.openxmlformats.org/drawingml/2006/main"/>
+      </p:grpSpPr>
+      <p:sp>
+        <p:nvSpPr>
+          <p:cNvPr id="14" name="footer-line">
+            <a:extLst xmlns:a="http://schemas.openxmlformats.org/drawingml/2006/main">
+              <a:ext uri="{FF2B5EF4-FFF2-40B4-BE49-F238E27FC236}">
+                <a16:creationId xmlns:a16="http://schemas.microsoft.com/office/drawing/2014/main" id="{3CE894FC-3721-4586-9789-801E845BDB7D}"/>
+              </a:ext>
+            </a:extLst>
+          </p:cNvPr>
+          <p:cNvSpPr>
+            <a:spLocks xmlns:a="http://schemas.openxmlformats.org/drawingml/2006/main" noGrp="1"/>
+          </p:cNvSpPr>
+          <p:nvPr/>
+        </p:nvSpPr>
+        <p:spPr>
+          <a:xfrm xmlns:a="http://schemas.openxmlformats.org/drawingml/2006/main">
+            <a:off x="0" y="4613148"/>
+            <a:ext cx="9144000" cy="53950"/>
+          </a:xfrm>
+          <a:prstGeom xmlns:a="http://schemas.openxmlformats.org/drawingml/2006/main" prst="rect">
+            <a:avLst/>
+          </a:prstGeom>
+          <a:solidFill xmlns:a="http://schemas.openxmlformats.org/drawingml/2006/main">
+            <a:srgbClr val="9BBB59"/>
+          </a:solidFill>
+          <a:ln xmlns:a="http://schemas.openxmlformats.org/drawingml/2006/main" w="0">
+            <a:noFill/>
+            <a:prstDash val="solid"/>
+          </a:ln>
+        </p:spPr>
+      </p:sp>
+      <p:pic>
+        <p:nvPicPr>
+          <p:cNvPr id="15" name=""/>
+          <p:cNvPicPr>
+            <a:picLocks xmlns:a="http://schemas.openxmlformats.org/drawingml/2006/main" noChangeAspect="1"/>
+          </p:cNvPicPr>
+          <p:nvPr/>
+        </p:nvPicPr>
+        <p:blipFill>
+          <a:blip xmlns:r="http://schemas.openxmlformats.org/officeDocument/2006/relationships" xmlns:a="http://schemas.openxmlformats.org/drawingml/2006/main" r:embed="Rea3aa75ae117487f"/>
+          <a:stretch xmlns:a="http://schemas.openxmlformats.org/drawingml/2006/main"/>
+        </p:blipFill>
+        <p:spPr>
+          <a:xfrm xmlns:a="http://schemas.openxmlformats.org/drawingml/2006/main">
+            <a:off x="293522" y="4803343"/>
+            <a:ext cx="818388" cy="229821"/>
+          </a:xfrm>
+          <a:prstGeom xmlns:a="http://schemas.openxmlformats.org/drawingml/2006/main" prst="rect">
+            <a:avLst/>
+          </a:prstGeom>
+        </p:spPr>
+      </p:pic>
+      <p:sp>
+        <p:nvSpPr>
+          <p:cNvPr id="3" name="page">
+            <a:extLst xmlns:a="http://schemas.openxmlformats.org/drawingml/2006/main">
+              <a:ext uri="{FF2B5EF4-FFF2-40B4-BE49-F238E27FC236}">
+                <a16:creationId xmlns:a16="http://schemas.microsoft.com/office/drawing/2014/main" id="{1E80F92A-EDAC-4D63-AE05-4850D87B1FF6}"/>
+              </a:ext>
+            </a:extLst>
+          </p:cNvPr>
+          <p:cNvSpPr>
+            <a:spLocks xmlns:a="http://schemas.openxmlformats.org/drawingml/2006/main" noGrp="1"/>
+          </p:cNvSpPr>
+          <p:nvPr/>
+        </p:nvSpPr>
+        <p:spPr>
+          <a:xfrm xmlns:a="http://schemas.openxmlformats.org/drawingml/2006/main">
+            <a:off x="6801307" y="4767682"/>
+            <a:ext cx="2133295" cy="274320"/>
+          </a:xfrm>
+          <a:prstGeom xmlns:a="http://schemas.openxmlformats.org/drawingml/2006/main" prst="rect">
+            <a:avLst/>
+          </a:prstGeom>
+          <a:noFill xmlns:a="http://schemas.openxmlformats.org/drawingml/2006/main"/>
+          <a:ln xmlns:a="http://schemas.openxmlformats.org/drawingml/2006/main" w="0">
+            <a:noFill/>
+            <a:prstDash val="solid"/>
+          </a:ln>
+        </p:spPr>
+        <p:txBody>
+          <a:bodyPr xmlns:a="http://schemas.openxmlformats.org/drawingml/2006/main" lIns="0" tIns="0" rIns="0" bIns="0" anchor="ctr">
+            <a:noAutofit/>
+          </a:bodyPr>
+          <a:lstStyle xmlns:a="http://schemas.openxmlformats.org/drawingml/2006/main"/>
+          <a:p xmlns:a="http://schemas.openxmlformats.org/drawingml/2006/main">
+            <a:pPr algn="r">
+              <a:defRPr sz="1400" b="0">
+                <a:solidFill>
+                  <a:srgbClr val="17202A"/>
+                </a:solidFill>
+                <a:latin typeface="Arial"/>
+                <a:ea typeface="Arial"/>
+                <a:cs typeface="Arial"/>
+              </a:defRPr>
+            </a:pPr>
+            <a:r>
+              <a:rPr sz="1400" b="0">
+                <a:solidFill>
+                  <a:srgbClr val="17202A"/>
+                </a:solidFill>
+                <a:latin typeface="Arial"/>
+                <a:ea typeface="Arial"/>
+                <a:cs typeface="Arial"/>
+              </a:rPr>
+              <a:t>9</a:t>
+            </a:r>
+          </a:p>
+        </p:txBody>
+      </p:sp>
+      <p:sp>
+        <p:nvSpPr>
+          <p:cNvPr id="4" name="fictional-disclosure">
+            <a:extLst xmlns:a="http://schemas.openxmlformats.org/drawingml/2006/main">
+              <a:ext uri="{FF2B5EF4-FFF2-40B4-BE49-F238E27FC236}">
+                <a16:creationId xmlns:a16="http://schemas.microsoft.com/office/drawing/2014/main" id="{10C95FF9-D45F-4944-86D7-D52BAB30ED37}"/>
+              </a:ext>
+            </a:extLst>
+          </p:cNvPr>
+          <p:cNvSpPr>
+            <a:spLocks xmlns:a="http://schemas.openxmlformats.org/drawingml/2006/main" noGrp="1"/>
+          </p:cNvSpPr>
+          <p:nvPr/>
+        </p:nvSpPr>
+        <p:spPr>
+          <a:xfrm xmlns:a="http://schemas.openxmlformats.org/drawingml/2006/main">
+            <a:off x="1428750" y="4772025"/>
+            <a:ext cx="4762500" cy="266700"/>
+          </a:xfrm>
+          <a:prstGeom xmlns:a="http://schemas.openxmlformats.org/drawingml/2006/main" prst="rect">
+            <a:avLst/>
+          </a:prstGeom>
+          <a:noFill xmlns:a="http://schemas.openxmlformats.org/drawingml/2006/main"/>
+          <a:ln xmlns:a="http://schemas.openxmlformats.org/drawingml/2006/main" w="0">
+            <a:noFill/>
+            <a:prstDash val="solid"/>
+          </a:ln>
+        </p:spPr>
+        <p:txBody>
+          <a:bodyPr xmlns:a="http://schemas.openxmlformats.org/drawingml/2006/main" lIns="0" tIns="0" rIns="0" bIns="0" anchor="ctr">
+            <a:noAutofit/>
+          </a:bodyPr>
+          <a:lstStyle xmlns:a="http://schemas.openxmlformats.org/drawingml/2006/main"/>
+          <a:p xmlns:a="http://schemas.openxmlformats.org/drawingml/2006/main">
+            <a:pPr algn="l">
+              <a:defRPr sz="1050" b="0">
+                <a:solidFill>
+                  <a:srgbClr val="59636E"/>
+                </a:solidFill>
+                <a:latin typeface="Noto Sans JP"/>
+                <a:ea typeface="Noto Sans JP"/>
+                <a:cs typeface="Noto Sans JP"/>
+              </a:defRPr>
+            </a:pPr>
+            <a:r>
+              <a:rPr sz="1050" b="0">
+                <a:solidFill>
+                  <a:srgbClr val="59636E"/>
+                </a:solidFill>
+                <a:latin typeface="Noto Sans JP"/>
+                <a:ea typeface="Noto Sans JP"/>
+                <a:cs typeface="Noto Sans JP"/>
+              </a:rPr>
+              <a:t>架空作例・合成データ</a:t>
+            </a:r>
+          </a:p>
+        </p:txBody>
+      </p:sp>
+      <p:sp>
+        <p:nvSpPr>
+          <p:cNvPr id="5" name="running-chapter-9">
+            <a:extLst xmlns:a="http://schemas.openxmlformats.org/drawingml/2006/main">
+              <a:ext uri="{FF2B5EF4-FFF2-40B4-BE49-F238E27FC236}">
+                <a16:creationId xmlns:a16="http://schemas.microsoft.com/office/drawing/2014/main" id="{D360E0F9-080C-4200-BE3B-589116DF85C3}"/>
+              </a:ext>
+            </a:extLst>
+          </p:cNvPr>
+          <p:cNvSpPr>
+            <a:spLocks xmlns:a="http://schemas.openxmlformats.org/drawingml/2006/main" noGrp="1"/>
+          </p:cNvSpPr>
+          <p:nvPr/>
+        </p:nvSpPr>
+        <p:spPr>
+          <a:xfrm xmlns:a="http://schemas.openxmlformats.org/drawingml/2006/main">
+            <a:off x="457200" y="109728"/>
+            <a:ext cx="2560320" cy="304800"/>
+          </a:xfrm>
+          <a:prstGeom xmlns:a="http://schemas.openxmlformats.org/drawingml/2006/main" prst="rect">
+            <a:avLst/>
+          </a:prstGeom>
+          <a:noFill xmlns:a="http://schemas.openxmlformats.org/drawingml/2006/main"/>
+          <a:ln xmlns:a="http://schemas.openxmlformats.org/drawingml/2006/main" w="0">
+            <a:noFill/>
+            <a:prstDash val="solid"/>
+          </a:ln>
+        </p:spPr>
+        <p:txBody>
+          <a:bodyPr xmlns:a="http://schemas.openxmlformats.org/drawingml/2006/main" lIns="0" tIns="0" rIns="0" bIns="0" anchor="ctr">
+            <a:noAutofit/>
+          </a:bodyPr>
+          <a:lstStyle xmlns:a="http://schemas.openxmlformats.org/drawingml/2006/main"/>
+          <a:p xmlns:a="http://schemas.openxmlformats.org/drawingml/2006/main">
+            <a:pPr algn="l">
+              <a:defRPr sz="1200" b="0">
+                <a:solidFill>
+                  <a:srgbClr val="38761D"/>
+                </a:solidFill>
+                <a:latin typeface="Noto Sans JP"/>
+                <a:ea typeface="Noto Sans JP"/>
+                <a:cs typeface="Noto Sans JP"/>
+              </a:defRPr>
+            </a:pPr>
+            <a:r>
+              <a:rPr sz="1200" b="0">
+                <a:solidFill>
+                  <a:srgbClr val="38761D"/>
+                </a:solidFill>
+                <a:latin typeface="Noto Sans JP"/>
+                <a:ea typeface="Noto Sans JP"/>
+                <a:cs typeface="Noto Sans JP"/>
+              </a:rPr>
+              <a:t>サマリ</a:t>
+            </a:r>
+          </a:p>
+        </p:txBody>
+      </p:sp>
+      <p:sp>
+        <p:nvSpPr>
+          <p:cNvPr id="6" name="running-title-9">
+            <a:extLst xmlns:a="http://schemas.openxmlformats.org/drawingml/2006/main">
+              <a:ext uri="{FF2B5EF4-FFF2-40B4-BE49-F238E27FC236}">
+                <a16:creationId xmlns:a16="http://schemas.microsoft.com/office/drawing/2014/main" id="{4F7D9D26-1D24-453E-8301-C83F3F2ADDCB}"/>
+              </a:ext>
+            </a:extLst>
+          </p:cNvPr>
+          <p:cNvSpPr>
+            <a:spLocks xmlns:a="http://schemas.openxmlformats.org/drawingml/2006/main" noGrp="1"/>
+          </p:cNvSpPr>
+          <p:nvPr/>
+        </p:nvSpPr>
+        <p:spPr>
+          <a:xfrm xmlns:a="http://schemas.openxmlformats.org/drawingml/2006/main">
+            <a:off x="3200400" y="109728"/>
+            <a:ext cx="5486400" cy="304800"/>
+          </a:xfrm>
+          <a:prstGeom xmlns:a="http://schemas.openxmlformats.org/drawingml/2006/main" prst="rect">
+            <a:avLst/>
+          </a:prstGeom>
+          <a:noFill xmlns:a="http://schemas.openxmlformats.org/drawingml/2006/main"/>
+          <a:ln xmlns:a="http://schemas.openxmlformats.org/drawingml/2006/main" w="0">
+            <a:noFill/>
+            <a:prstDash val="solid"/>
+          </a:ln>
+        </p:spPr>
+        <p:txBody>
+          <a:bodyPr xmlns:a="http://schemas.openxmlformats.org/drawingml/2006/main" lIns="0" tIns="0" rIns="0" bIns="0" anchor="ctr">
+            <a:noAutofit/>
+          </a:bodyPr>
+          <a:lstStyle xmlns:a="http://schemas.openxmlformats.org/drawingml/2006/main"/>
+          <a:p xmlns:a="http://schemas.openxmlformats.org/drawingml/2006/main">
+            <a:pPr algn="r">
+              <a:defRPr sz="1200" b="0">
+                <a:solidFill>
+                  <a:srgbClr val="38761D"/>
+                </a:solidFill>
+                <a:latin typeface="Noto Sans JP"/>
+                <a:ea typeface="Noto Sans JP"/>
+                <a:cs typeface="Noto Sans JP"/>
+              </a:defRPr>
+            </a:pPr>
+            <a:r>
+              <a:rPr sz="1200" b="0">
+                <a:solidFill>
+                  <a:srgbClr val="38761D"/>
+                </a:solidFill>
+                <a:latin typeface="Noto Sans JP"/>
+                <a:ea typeface="Noto Sans JP"/>
+                <a:cs typeface="Noto Sans JP"/>
+              </a:rPr>
+              <a:t>室内環境ログの記録間隔</a:t>
+            </a:r>
+          </a:p>
+        </p:txBody>
+      </p:sp>
+      <p:sp>
+        <p:nvSpPr>
+          <p:cNvPr id="7" name="final-title">
+            <a:extLst xmlns:a="http://schemas.openxmlformats.org/drawingml/2006/main">
+              <a:ext uri="{FF2B5EF4-FFF2-40B4-BE49-F238E27FC236}">
+                <a16:creationId xmlns:a16="http://schemas.microsoft.com/office/drawing/2014/main" id="{A7746361-7631-4A4C-9252-B8AC4F4EAB70}"/>
+              </a:ext>
+            </a:extLst>
+          </p:cNvPr>
+          <p:cNvSpPr>
+            <a:spLocks xmlns:a="http://schemas.openxmlformats.org/drawingml/2006/main" noGrp="1"/>
+          </p:cNvSpPr>
+          <p:nvPr/>
+        </p:nvSpPr>
+        <p:spPr>
+          <a:xfrm xmlns:a="http://schemas.openxmlformats.org/drawingml/2006/main">
+            <a:off x="457200" y="609600"/>
+            <a:ext cx="8229600" cy="895350"/>
+          </a:xfrm>
+          <a:prstGeom xmlns:a="http://schemas.openxmlformats.org/drawingml/2006/main" prst="rect">
+            <a:avLst/>
+          </a:prstGeom>
+          <a:noFill xmlns:a="http://schemas.openxmlformats.org/drawingml/2006/main"/>
+          <a:ln xmlns:a="http://schemas.openxmlformats.org/drawingml/2006/main" w="0">
+            <a:noFill/>
+            <a:prstDash val="solid"/>
+          </a:ln>
+        </p:spPr>
+        <p:txBody>
+          <a:bodyPr xmlns:a="http://schemas.openxmlformats.org/drawingml/2006/main" lIns="0" tIns="0" rIns="0" bIns="0" anchor="ctr">
+            <a:noAutofit/>
+          </a:bodyPr>
+          <a:lstStyle xmlns:a="http://schemas.openxmlformats.org/drawingml/2006/main"/>
+          <a:p xmlns:a="http://schemas.openxmlformats.org/drawingml/2006/main">
+            <a:pPr algn="l">
+              <a:defRPr sz="2600" b="1">
+                <a:solidFill>
+                  <a:srgbClr val="17202A"/>
+                </a:solidFill>
+                <a:latin typeface="Noto Sans JP"/>
+                <a:ea typeface="Noto Sans JP"/>
+                <a:cs typeface="Noto Sans JP"/>
+              </a:defRPr>
+            </a:pPr>
+            <a:r>
+              <a:rPr sz="2600" b="1">
+                <a:solidFill>
+                  <a:srgbClr val="17202A"/>
+                </a:solidFill>
+                <a:latin typeface="Noto Sans JP"/>
+                <a:ea typeface="Noto Sans JP"/>
+                <a:cs typeface="Noto Sans JP"/>
+              </a:rPr>
+              <a:t>室内環境ログの記録間隔</a:t>
+            </a:r>
+          </a:p>
+          <a:p xmlns:a="http://schemas.openxmlformats.org/drawingml/2006/main">
+            <a:pPr algn="l">
+              <a:defRPr sz="2600" b="1">
+                <a:solidFill>
+                  <a:srgbClr val="17202A"/>
+                </a:solidFill>
+                <a:latin typeface="Noto Sans JP"/>
+                <a:ea typeface="Noto Sans JP"/>
+                <a:cs typeface="Noto Sans JP"/>
+              </a:defRPr>
+            </a:pPr>
+            <a:r>
+              <a:rPr sz="2600" b="1">
+                <a:solidFill>
+                  <a:srgbClr val="17202A"/>
+                </a:solidFill>
+                <a:latin typeface="Noto Sans JP"/>
+                <a:ea typeface="Noto Sans JP"/>
+                <a:cs typeface="Noto Sans JP"/>
+              </a:rPr>
+              <a:t>合成データを用いた予備検討</a:t>
+            </a:r>
+          </a:p>
+        </p:txBody>
+      </p:sp>
+      <p:sp>
+        <p:nvSpPr>
+          <p:cNvPr id="8" name="final-author">
+            <a:extLst xmlns:a="http://schemas.openxmlformats.org/drawingml/2006/main">
+              <a:ext uri="{FF2B5EF4-FFF2-40B4-BE49-F238E27FC236}">
+                <a16:creationId xmlns:a16="http://schemas.microsoft.com/office/drawing/2014/main" id="{12FF9CAC-4DE0-4633-A0C9-D369D9D4BC10}"/>
+              </a:ext>
+            </a:extLst>
+          </p:cNvPr>
+          <p:cNvSpPr>
+            <a:spLocks xmlns:a="http://schemas.openxmlformats.org/drawingml/2006/main" noGrp="1"/>
+          </p:cNvSpPr>
+          <p:nvPr/>
+        </p:nvSpPr>
+        <p:spPr>
+          <a:xfrm xmlns:a="http://schemas.openxmlformats.org/drawingml/2006/main">
+            <a:off x="457200" y="1619250"/>
+            <a:ext cx="8229600" cy="323850"/>
+          </a:xfrm>
+          <a:prstGeom xmlns:a="http://schemas.openxmlformats.org/drawingml/2006/main" prst="rect">
+            <a:avLst/>
+          </a:prstGeom>
+          <a:noFill xmlns:a="http://schemas.openxmlformats.org/drawingml/2006/main"/>
+          <a:ln xmlns:a="http://schemas.openxmlformats.org/drawingml/2006/main" w="0">
+            <a:noFill/>
+            <a:prstDash val="solid"/>
+          </a:ln>
+        </p:spPr>
+        <p:txBody>
+          <a:bodyPr xmlns:a="http://schemas.openxmlformats.org/drawingml/2006/main" lIns="0" tIns="0" rIns="0" bIns="0" anchor="ctr">
+            <a:noAutofit/>
+          </a:bodyPr>
+          <a:lstStyle xmlns:a="http://schemas.openxmlformats.org/drawingml/2006/main"/>
+          <a:p xmlns:a="http://schemas.openxmlformats.org/drawingml/2006/main">
+            <a:pPr algn="l">
+              <a:defRPr sz="1800" b="0">
+                <a:solidFill>
+                  <a:srgbClr val="17202A"/>
+                </a:solidFill>
+                <a:latin typeface="Noto Sans JP"/>
+                <a:ea typeface="Noto Sans JP"/>
+                <a:cs typeface="Noto Sans JP"/>
+              </a:defRPr>
+            </a:pPr>
+            <a:r>
+              <a:rPr sz="1800" b="0">
+                <a:solidFill>
+                  <a:srgbClr val="17202A"/>
+                </a:solidFill>
+                <a:latin typeface="Noto Sans JP"/>
+                <a:ea typeface="Noto Sans JP"/>
+                <a:cs typeface="Noto Sans JP"/>
+              </a:rPr>
+              <a:t>架空の発表者 ／ CPS LAB スタイル見本</a:t>
+            </a:r>
+          </a:p>
+        </p:txBody>
+      </p:sp>
+      <p:sp>
+        <p:nvSpPr>
+          <p:cNvPr id="9" name="takeaway-0">
+            <a:extLst xmlns:a="http://schemas.openxmlformats.org/drawingml/2006/main">
+              <a:ext uri="{FF2B5EF4-FFF2-40B4-BE49-F238E27FC236}">
+                <a16:creationId xmlns:a16="http://schemas.microsoft.com/office/drawing/2014/main" id="{E98059D4-00AC-4852-B8D8-2C7937C52C2E}"/>
+              </a:ext>
+            </a:extLst>
+          </p:cNvPr>
+          <p:cNvSpPr>
+            <a:spLocks xmlns:a="http://schemas.openxmlformats.org/drawingml/2006/main" noGrp="1"/>
+          </p:cNvSpPr>
+          <p:nvPr/>
+        </p:nvSpPr>
+        <p:spPr>
+          <a:xfrm xmlns:a="http://schemas.openxmlformats.org/drawingml/2006/main">
+            <a:off x="457200" y="2143125"/>
+            <a:ext cx="8229600" cy="457200"/>
+          </a:xfrm>
+          <a:prstGeom xmlns:a="http://schemas.openxmlformats.org/drawingml/2006/main" prst="rect">
+            <a:avLst/>
+          </a:prstGeom>
+          <a:noFill xmlns:a="http://schemas.openxmlformats.org/drawingml/2006/main"/>
+          <a:ln xmlns:a="http://schemas.openxmlformats.org/drawingml/2006/main" w="0">
+            <a:noFill/>
+            <a:prstDash val="solid"/>
+          </a:ln>
+        </p:spPr>
+        <p:txBody>
+          <a:bodyPr xmlns:a="http://schemas.openxmlformats.org/drawingml/2006/main" lIns="0" tIns="0" rIns="0" bIns="0" anchor="ctr">
+            <a:noAutofit/>
+          </a:bodyPr>
+          <a:lstStyle xmlns:a="http://schemas.openxmlformats.org/drawingml/2006/main"/>
+          <a:p xmlns:a="http://schemas.openxmlformats.org/drawingml/2006/main">
+            <a:pPr algn="l">
+              <a:defRPr sz="1800" b="0">
+                <a:solidFill>
+                  <a:srgbClr val="17202A"/>
+                </a:solidFill>
+                <a:latin typeface="Noto Sans JP"/>
+                <a:ea typeface="Noto Sans JP"/>
+                <a:cs typeface="Noto Sans JP"/>
+              </a:defRPr>
+            </a:pPr>
+            <a:r>
+              <a:rPr sz="1800" b="0">
+                <a:solidFill>
+                  <a:srgbClr val="17202A"/>
+                </a:solidFill>
+                <a:latin typeface="Noto Sans JP"/>
+                <a:ea typeface="Noto Sans JP"/>
+                <a:cs typeface="Noto Sans JP"/>
+              </a:rPr>
+              <a:t>問い：記録点を減らすとき、短い変化が残るか</a:t>
+            </a:r>
+          </a:p>
+        </p:txBody>
+      </p:sp>
+      <p:sp>
+        <p:nvSpPr>
+          <p:cNvPr id="10" name="takeaway-1">
+            <a:extLst xmlns:a="http://schemas.openxmlformats.org/drawingml/2006/main">
+              <a:ext uri="{FF2B5EF4-FFF2-40B4-BE49-F238E27FC236}">
+                <a16:creationId xmlns:a16="http://schemas.microsoft.com/office/drawing/2014/main" id="{D840E0BB-571F-4AD2-9428-3866B71D5464}"/>
+              </a:ext>
+            </a:extLst>
+          </p:cNvPr>
+          <p:cNvSpPr>
+            <a:spLocks xmlns:a="http://schemas.openxmlformats.org/drawingml/2006/main" noGrp="1"/>
+          </p:cNvSpPr>
+          <p:nvPr/>
+        </p:nvSpPr>
+        <p:spPr>
+          <a:xfrm xmlns:a="http://schemas.openxmlformats.org/drawingml/2006/main">
+            <a:off x="457200" y="2667000"/>
+            <a:ext cx="8229600" cy="457200"/>
+          </a:xfrm>
+          <a:prstGeom xmlns:a="http://schemas.openxmlformats.org/drawingml/2006/main" prst="rect">
+            <a:avLst/>
+          </a:prstGeom>
+          <a:noFill xmlns:a="http://schemas.openxmlformats.org/drawingml/2006/main"/>
+          <a:ln xmlns:a="http://schemas.openxmlformats.org/drawingml/2006/main" w="0">
+            <a:noFill/>
+            <a:prstDash val="solid"/>
+          </a:ln>
+        </p:spPr>
+        <p:txBody>
+          <a:bodyPr xmlns:a="http://schemas.openxmlformats.org/drawingml/2006/main" lIns="0" tIns="0" rIns="0" bIns="0" anchor="ctr">
+            <a:noAutofit/>
+          </a:bodyPr>
+          <a:lstStyle xmlns:a="http://schemas.openxmlformats.org/drawingml/2006/main"/>
+          <a:p xmlns:a="http://schemas.openxmlformats.org/drawingml/2006/main">
+            <a:pPr algn="l">
+              <a:defRPr sz="1800" b="0">
+                <a:solidFill>
+                  <a:srgbClr val="17202A"/>
+                </a:solidFill>
+                <a:latin typeface="Noto Sans JP"/>
+                <a:ea typeface="Noto Sans JP"/>
+                <a:cs typeface="Noto Sans JP"/>
+              </a:defRPr>
+            </a:pPr>
+            <a:r>
+              <a:rPr sz="1800" b="0">
+                <a:solidFill>
+                  <a:srgbClr val="17202A"/>
+                </a:solidFill>
+                <a:latin typeface="Noto Sans JP"/>
+                <a:ea typeface="Noto Sans JP"/>
+                <a:cs typeface="Noto Sans JP"/>
+              </a:rPr>
+              <a:t>確認：この合成例では、保持3点に1000 ppm超の値が残らない [1]</a:t>
+            </a:r>
+          </a:p>
+        </p:txBody>
+      </p:sp>
+      <p:sp>
+        <p:nvSpPr>
+          <p:cNvPr id="11" name="takeaway-2">
+            <a:extLst xmlns:a="http://schemas.openxmlformats.org/drawingml/2006/main">
+              <a:ext uri="{FF2B5EF4-FFF2-40B4-BE49-F238E27FC236}">
+                <a16:creationId xmlns:a16="http://schemas.microsoft.com/office/drawing/2014/main" id="{0CCEA9B9-D25F-4758-8A67-B737243E73FB}"/>
+              </a:ext>
+            </a:extLst>
+          </p:cNvPr>
+          <p:cNvSpPr>
+            <a:spLocks xmlns:a="http://schemas.openxmlformats.org/drawingml/2006/main" noGrp="1"/>
+          </p:cNvSpPr>
+          <p:nvPr/>
+        </p:nvSpPr>
+        <p:spPr>
+          <a:xfrm xmlns:a="http://schemas.openxmlformats.org/drawingml/2006/main">
+            <a:off x="457200" y="3190875"/>
+            <a:ext cx="8229600" cy="457200"/>
+          </a:xfrm>
+          <a:prstGeom xmlns:a="http://schemas.openxmlformats.org/drawingml/2006/main" prst="rect">
+            <a:avLst/>
+          </a:prstGeom>
+          <a:noFill xmlns:a="http://schemas.openxmlformats.org/drawingml/2006/main"/>
+          <a:ln xmlns:a="http://schemas.openxmlformats.org/drawingml/2006/main" w="0">
+            <a:noFill/>
+            <a:prstDash val="solid"/>
+          </a:ln>
+        </p:spPr>
+        <p:txBody>
+          <a:bodyPr xmlns:a="http://schemas.openxmlformats.org/drawingml/2006/main" lIns="0" tIns="0" rIns="0" bIns="0" anchor="ctr">
+            <a:noAutofit/>
+          </a:bodyPr>
+          <a:lstStyle xmlns:a="http://schemas.openxmlformats.org/drawingml/2006/main"/>
+          <a:p xmlns:a="http://schemas.openxmlformats.org/drawingml/2006/main">
+            <a:pPr algn="l">
+              <a:defRPr sz="1800" b="0">
+                <a:solidFill>
+                  <a:srgbClr val="17202A"/>
+                </a:solidFill>
+                <a:latin typeface="Noto Sans JP"/>
+                <a:ea typeface="Noto Sans JP"/>
+                <a:cs typeface="Noto Sans JP"/>
+              </a:defRPr>
+            </a:pPr>
+            <a:r>
+              <a:rPr sz="1800" b="0">
+                <a:solidFill>
+                  <a:srgbClr val="17202A"/>
+                </a:solidFill>
+                <a:latin typeface="Noto Sans JP"/>
+                <a:ea typeface="Noto Sans JP"/>
+                <a:cs typeface="Noto Sans JP"/>
+              </a:rPr>
+              <a:t>次の計画：波形・開始時刻と実機条件を変えて確かめる</a:t>
+            </a:r>
+          </a:p>
+        </p:txBody>
+      </p:sp>
+      <p:sp>
+        <p:nvSpPr>
+          <p:cNvPr id="12" name="contact">
+            <a:extLst xmlns:a="http://schemas.openxmlformats.org/drawingml/2006/main">
+              <a:ext uri="{FF2B5EF4-FFF2-40B4-BE49-F238E27FC236}">
+                <a16:creationId xmlns:a16="http://schemas.microsoft.com/office/drawing/2014/main" id="{5ABB64D1-8E32-4EE3-95E5-A584A17B6A3A}"/>
+              </a:ext>
+            </a:extLst>
+          </p:cNvPr>
+          <p:cNvSpPr>
+            <a:spLocks xmlns:a="http://schemas.openxmlformats.org/drawingml/2006/main" noGrp="1"/>
+          </p:cNvSpPr>
+          <p:nvPr/>
+        </p:nvSpPr>
+        <p:spPr>
+          <a:xfrm xmlns:a="http://schemas.openxmlformats.org/drawingml/2006/main">
+            <a:off x="457200" y="3876675"/>
+            <a:ext cx="8229600" cy="285750"/>
+          </a:xfrm>
+          <a:prstGeom xmlns:a="http://schemas.openxmlformats.org/drawingml/2006/main" prst="rect">
+            <a:avLst/>
+          </a:prstGeom>
+          <a:noFill xmlns:a="http://schemas.openxmlformats.org/drawingml/2006/main"/>
+          <a:ln xmlns:a="http://schemas.openxmlformats.org/drawingml/2006/main" w="0">
+            <a:noFill/>
+            <a:prstDash val="solid"/>
+          </a:ln>
+        </p:spPr>
+        <p:txBody>
+          <a:bodyPr xmlns:a="http://schemas.openxmlformats.org/drawingml/2006/main" lIns="0" tIns="0" rIns="0" bIns="0" anchor="ctr">
+            <a:noAutofit/>
+          </a:bodyPr>
+          <a:lstStyle xmlns:a="http://schemas.openxmlformats.org/drawingml/2006/main"/>
+          <a:p xmlns:a="http://schemas.openxmlformats.org/drawingml/2006/main">
+            <a:pPr algn="l">
+              <a:defRPr sz="1800" b="1">
+                <a:solidFill>
+                  <a:srgbClr val="38761D"/>
+                </a:solidFill>
+                <a:latin typeface="Noto Sans JP"/>
+                <a:ea typeface="Noto Sans JP"/>
+                <a:cs typeface="Noto Sans JP"/>
+              </a:defRPr>
+            </a:pPr>
+            <a:r>
+              <a:rPr sz="1800" b="1">
+                <a:solidFill>
+                  <a:srgbClr val="38761D"/>
+                </a:solidFill>
+                <a:latin typeface="Noto Sans JP"/>
+                <a:ea typeface="Noto Sans JP"/>
+                <a:cs typeface="Noto Sans JP"/>
+              </a:rPr>
+              <a:t>連絡先（架空教材の例）：presenter@example.org</a:t>
+            </a:r>
+          </a:p>
+        </p:txBody>
+      </p:sp>
+      <p:sp>
+        <p:nvSpPr>
+          <p:cNvPr id="13" name="page-reference">
+            <a:extLst xmlns:a="http://schemas.openxmlformats.org/drawingml/2006/main">
+              <a:ext uri="{FF2B5EF4-FFF2-40B4-BE49-F238E27FC236}">
+                <a16:creationId xmlns:a16="http://schemas.microsoft.com/office/drawing/2014/main" id="{8D1B4663-FB1B-4270-974F-E96984F6C599}"/>
+              </a:ext>
+            </a:extLst>
+          </p:cNvPr>
+          <p:cNvSpPr>
+            <a:spLocks xmlns:a="http://schemas.openxmlformats.org/drawingml/2006/main" noGrp="1"/>
+          </p:cNvSpPr>
+          <p:nvPr/>
+        </p:nvSpPr>
+        <p:spPr>
+          <a:xfrm xmlns:a="http://schemas.openxmlformats.org/drawingml/2006/main">
+            <a:off x="457200" y="4224528"/>
+            <a:ext cx="8229600" cy="329184"/>
+          </a:xfrm>
+          <a:prstGeom xmlns:a="http://schemas.openxmlformats.org/drawingml/2006/main" prst="rect">
+            <a:avLst/>
+          </a:prstGeom>
+          <a:noFill xmlns:a="http://schemas.openxmlformats.org/drawingml/2006/main"/>
+          <a:ln xmlns:a="http://schemas.openxmlformats.org/drawingml/2006/main" w="0">
+            <a:noFill/>
+            <a:prstDash val="solid"/>
+          </a:ln>
+        </p:spPr>
+        <p:txBody>
+          <a:bodyPr xmlns:a="http://schemas.openxmlformats.org/drawingml/2006/main" lIns="0" tIns="0" rIns="0" bIns="0" anchor="ctr">
+            <a:noAutofit/>
+          </a:bodyPr>
+          <a:lstStyle xmlns:a="http://schemas.openxmlformats.org/drawingml/2006/main"/>
+          <a:p xmlns:a="http://schemas.openxmlformats.org/drawingml/2006/main">
+            <a:pPr algn="l">
+              <a:defRPr sz="900" b="0">
+                <a:solidFill>
+                  <a:srgbClr val="59636E"/>
+                </a:solidFill>
+                <a:latin typeface="Noto Sans JP"/>
+                <a:ea typeface="Noto Sans JP"/>
+                <a:cs typeface="Noto Sans JP"/>
+              </a:defRPr>
+            </a:pPr>
+            <a:r>
+              <a:rPr sz="900" b="0">
+                <a:solidFill>
+                  <a:srgbClr val="59636E"/>
+                </a:solidFill>
+                <a:latin typeface="Noto Sans JP"/>
+                <a:ea typeface="Noto Sans JP"/>
+                <a:cs typeface="Noto Sans JP"/>
+              </a:rPr>
+              <a:t>[1] 室内環境ログ研究の入力資料（同梱教材・合成データ）, 2026.</a:t>
+            </a:r>
+          </a:p>
+        </p:txBody>
+      </p:sp>
+    </p:spTree>
+    <p:extLst>
+      <p:ext uri="{BB962C8B-B14F-4D97-AF65-F5344CB8AC3E}">
+        <p14:creationId xmlns:p14="http://schemas.microsoft.com/office/powerpoint/2010/main" val="1350184314"/>
       </p:ext>
     </p:extLst>
   </p:cSld>

--- a/assets/visual-reference/cps-layout-reference.pptx
+++ b/assets/visual-reference/cps-layout-reference.pptx
@@ -2,21 +2,21 @@
 <file path=ppt/presentation.xml><?xml version="1.0" encoding="utf-8"?>
 <p:presentation xmlns:p="http://schemas.openxmlformats.org/presentationml/2006/main">
   <p:sldMasterIdLst>
-    <p:sldMasterId xmlns:r="http://schemas.openxmlformats.org/officeDocument/2006/relationships" id="2147483648" r:id="R6afb9b5c3b58425d"/>
+    <p:sldMasterId xmlns:r="http://schemas.openxmlformats.org/officeDocument/2006/relationships" id="2147483648" r:id="Re6bf419e38d844bd"/>
   </p:sldMasterIdLst>
   <p:notesMasterIdLst>
-    <p:notesMasterId xmlns:r="http://schemas.openxmlformats.org/officeDocument/2006/relationships" r:id="Rfc4ec5d54dd94939"/>
+    <p:notesMasterId xmlns:r="http://schemas.openxmlformats.org/officeDocument/2006/relationships" r:id="R1340836cdac34e99"/>
   </p:notesMasterIdLst>
   <p:sldIdLst>
-    <p:sldId xmlns:r="http://schemas.openxmlformats.org/officeDocument/2006/relationships" id="256" r:id="R04917e5f2fcf4e1b"/>
-    <p:sldId xmlns:r="http://schemas.openxmlformats.org/officeDocument/2006/relationships" id="257" r:id="Rf4282a9494fd4468"/>
-    <p:sldId xmlns:r="http://schemas.openxmlformats.org/officeDocument/2006/relationships" id="258" r:id="R130310c841bc4d1a"/>
-    <p:sldId xmlns:r="http://schemas.openxmlformats.org/officeDocument/2006/relationships" id="259" r:id="R643b5968f54f4242"/>
-    <p:sldId xmlns:r="http://schemas.openxmlformats.org/officeDocument/2006/relationships" id="260" r:id="R45b75f5ec5b04994"/>
-    <p:sldId xmlns:r="http://schemas.openxmlformats.org/officeDocument/2006/relationships" id="261" r:id="Rdbd1a9ca7a084513"/>
-    <p:sldId xmlns:r="http://schemas.openxmlformats.org/officeDocument/2006/relationships" id="262" r:id="Rb530451ed46c4dd8"/>
-    <p:sldId xmlns:r="http://schemas.openxmlformats.org/officeDocument/2006/relationships" id="263" r:id="R92e6d0580f4d4b71"/>
-    <p:sldId xmlns:r="http://schemas.openxmlformats.org/officeDocument/2006/relationships" id="264" r:id="R74cedbfa1c294bc1"/>
+    <p:sldId xmlns:r="http://schemas.openxmlformats.org/officeDocument/2006/relationships" id="256" r:id="Rb8f1a4295bbd4f26"/>
+    <p:sldId xmlns:r="http://schemas.openxmlformats.org/officeDocument/2006/relationships" id="257" r:id="R93d130fb76644fc2"/>
+    <p:sldId xmlns:r="http://schemas.openxmlformats.org/officeDocument/2006/relationships" id="258" r:id="R202a4c79e709472c"/>
+    <p:sldId xmlns:r="http://schemas.openxmlformats.org/officeDocument/2006/relationships" id="259" r:id="R9cd8346605ab442a"/>
+    <p:sldId xmlns:r="http://schemas.openxmlformats.org/officeDocument/2006/relationships" id="260" r:id="R6eef603a94634338"/>
+    <p:sldId xmlns:r="http://schemas.openxmlformats.org/officeDocument/2006/relationships" id="261" r:id="Rd178682eff924f69"/>
+    <p:sldId xmlns:r="http://schemas.openxmlformats.org/officeDocument/2006/relationships" id="262" r:id="R7cd4e65357c049bd"/>
+    <p:sldId xmlns:r="http://schemas.openxmlformats.org/officeDocument/2006/relationships" id="263" r:id="R44609e23a46b4da6"/>
+    <p:sldId xmlns:r="http://schemas.openxmlformats.org/officeDocument/2006/relationships" id="264" r:id="R5012543461934058"/>
   </p:sldIdLst>
   <p:sldSz cx="9144000" cy="5143500"/>
   <p:notesSz cx="6858000" cy="9144000"/>
@@ -520,7 +520,7 @@
           <a:lstStyle xmlns:a="http://schemas.openxmlformats.org/drawingml/2006/main"/>
           <a:p xmlns:a="http://schemas.openxmlformats.org/drawingml/2006/main">
             <a:r>
-              <a:t>中間発表型表紙の静止レイアウト見本。背景は素材枠で、動画も静止ポスターも未提供・未同梱。利用者の動画を指定された加工・無音・自動再生・ループ・次ページでの停止条件で埋め込む。対象アプリでの再生検証は別工程。本文のデザインはFIT型表紙を選んでも同じ。</a:t>
+              <a:t>表紙タイプBの静止レイアウト見本。背景は素材枠で、動画も静止ポスターも未提供・未同梱。利用者の動画を指定された加工・無音・自動再生・ループ・次ページでの停止条件で埋め込む。対象アプリでの再生検証は別工程。本文のデザインは表紙タイプAを選んでも同じ。</a:t>
             </a:r>
           </a:p>
         </p:txBody>
@@ -1103,7 +1103,7 @@
   </p:cSld>
   <p:clrMap bg1="lt1" tx1="dk1" bg2="lt2" tx2="dk2" accent1="accent1" accent2="accent2" accent3="accent3" accent4="accent4" accent5="accent5" accent6="accent6" hlink="hlink" folHlink="folHlink"/>
   <p:sldLayoutIdLst>
-    <p:sldLayoutId xmlns:r="http://schemas.openxmlformats.org/officeDocument/2006/relationships" id="2147483649" r:id="R0a5eeb090a844a8f"/>
+    <p:sldLayoutId xmlns:r="http://schemas.openxmlformats.org/officeDocument/2006/relationships" id="2147483649" r:id="Ra82ed56288874f43"/>
   </p:sldLayoutIdLst>
   <p:txStyles>
     <p:titleStyle>
@@ -2106,7 +2106,7 @@
           <p:cNvPr id="11" name="footer-line">
             <a:extLst xmlns:a="http://schemas.openxmlformats.org/drawingml/2006/main">
               <a:ext uri="{FF2B5EF4-FFF2-40B4-BE49-F238E27FC236}">
-                <a16:creationId xmlns:a16="http://schemas.microsoft.com/office/drawing/2014/main" id="{447434D0-0A16-4AE6-A306-9318B1D8D5A9}"/>
+                <a16:creationId xmlns:a16="http://schemas.microsoft.com/office/drawing/2014/main" id="{2C4FF54D-94B1-4F54-9B73-C0B220707A18}"/>
               </a:ext>
             </a:extLst>
           </p:cNvPr>
@@ -2141,7 +2141,7 @@
           <p:nvPr/>
         </p:nvPicPr>
         <p:blipFill>
-          <a:blip xmlns:r="http://schemas.openxmlformats.org/officeDocument/2006/relationships" xmlns:a="http://schemas.openxmlformats.org/drawingml/2006/main" r:embed="R3934e8ef289f42c0"/>
+          <a:blip xmlns:r="http://schemas.openxmlformats.org/officeDocument/2006/relationships" xmlns:a="http://schemas.openxmlformats.org/drawingml/2006/main" r:embed="R7b52766541214025"/>
           <a:stretch xmlns:a="http://schemas.openxmlformats.org/drawingml/2006/main"/>
         </p:blipFill>
         <p:spPr>
@@ -2159,7 +2159,7 @@
           <p:cNvPr id="3" name="page">
             <a:extLst xmlns:a="http://schemas.openxmlformats.org/drawingml/2006/main">
               <a:ext uri="{FF2B5EF4-FFF2-40B4-BE49-F238E27FC236}">
-                <a16:creationId xmlns:a16="http://schemas.microsoft.com/office/drawing/2014/main" id="{2E8E3E4B-7AE4-4134-9F95-8CEA951F83CA}"/>
+                <a16:creationId xmlns:a16="http://schemas.microsoft.com/office/drawing/2014/main" id="{F1B593C2-79C1-4B0F-A8CD-4C8898DACC46}"/>
               </a:ext>
             </a:extLst>
           </p:cNvPr>
@@ -2217,7 +2217,7 @@
           <p:cNvPr id="4" name="fictional-disclosure">
             <a:extLst xmlns:a="http://schemas.openxmlformats.org/drawingml/2006/main">
               <a:ext uri="{FF2B5EF4-FFF2-40B4-BE49-F238E27FC236}">
-                <a16:creationId xmlns:a16="http://schemas.microsoft.com/office/drawing/2014/main" id="{5ACED371-0E27-4FB4-8B98-295AAFD8FBC1}"/>
+                <a16:creationId xmlns:a16="http://schemas.microsoft.com/office/drawing/2014/main" id="{8BF51813-066F-466F-94D1-86E50B3B22B5}"/>
               </a:ext>
             </a:extLst>
           </p:cNvPr>
@@ -2275,7 +2275,7 @@
           <p:cNvPr id="5" name="venue">
             <a:extLst xmlns:a="http://schemas.openxmlformats.org/drawingml/2006/main">
               <a:ext uri="{FF2B5EF4-FFF2-40B4-BE49-F238E27FC236}">
-                <a16:creationId xmlns:a16="http://schemas.microsoft.com/office/drawing/2014/main" id="{5503702E-2B66-4979-A8C2-331BBB2A4247}"/>
+                <a16:creationId xmlns:a16="http://schemas.microsoft.com/office/drawing/2014/main" id="{5817D363-8278-4271-8565-F19F013C7C31}"/>
               </a:ext>
             </a:extLst>
           </p:cNvPr>
@@ -2333,7 +2333,7 @@
           <p:cNvPr id="6" name="topic">
             <a:extLst xmlns:a="http://schemas.openxmlformats.org/drawingml/2006/main">
               <a:ext uri="{FF2B5EF4-FFF2-40B4-BE49-F238E27FC236}">
-                <a16:creationId xmlns:a16="http://schemas.microsoft.com/office/drawing/2014/main" id="{C773E99D-9C03-4553-BA3D-4CA7A42226F4}"/>
+                <a16:creationId xmlns:a16="http://schemas.microsoft.com/office/drawing/2014/main" id="{82806F90-78A4-4BCE-A964-07C9569909FB}"/>
               </a:ext>
             </a:extLst>
           </p:cNvPr>
@@ -2416,7 +2416,7 @@
           <p:cNvPr id="7" name="affiliation">
             <a:extLst xmlns:a="http://schemas.openxmlformats.org/drawingml/2006/main">
               <a:ext uri="{FF2B5EF4-FFF2-40B4-BE49-F238E27FC236}">
-                <a16:creationId xmlns:a16="http://schemas.microsoft.com/office/drawing/2014/main" id="{23FA7F74-CCA0-4150-96B8-EE20A375FD5C}"/>
+                <a16:creationId xmlns:a16="http://schemas.microsoft.com/office/drawing/2014/main" id="{62A47AF2-A2CD-4C2E-8BCD-F41C52874567}"/>
               </a:ext>
             </a:extLst>
           </p:cNvPr>
@@ -2476,7 +2476,7 @@
           <p:cNvPr id="8" name="author">
             <a:extLst xmlns:a="http://schemas.openxmlformats.org/drawingml/2006/main">
               <a:ext uri="{FF2B5EF4-FFF2-40B4-BE49-F238E27FC236}">
-                <a16:creationId xmlns:a16="http://schemas.microsoft.com/office/drawing/2014/main" id="{6EA0A61A-A57F-421E-A342-C45BE5955F68}"/>
+                <a16:creationId xmlns:a16="http://schemas.microsoft.com/office/drawing/2014/main" id="{B067A746-2DC7-4AEA-AB1F-D9FD1D5B3318}"/>
               </a:ext>
             </a:extLst>
           </p:cNvPr>
@@ -2536,7 +2536,7 @@
           <p:cNvPr id="9" name="research-photo-slot">
             <a:extLst xmlns:a="http://schemas.openxmlformats.org/drawingml/2006/main">
               <a:ext uri="{FF2B5EF4-FFF2-40B4-BE49-F238E27FC236}">
-                <a16:creationId xmlns:a16="http://schemas.microsoft.com/office/drawing/2014/main" id="{666C34DE-26AC-4522-B99E-6072FB806CB0}"/>
+                <a16:creationId xmlns:a16="http://schemas.microsoft.com/office/drawing/2014/main" id="{8F48CFB9-D28B-48BB-B4A1-2647B063D08E}"/>
               </a:ext>
             </a:extLst>
           </p:cNvPr>
@@ -2569,7 +2569,7 @@
           <p:cNvPr id="10" name="photo-slot-label">
             <a:extLst xmlns:a="http://schemas.openxmlformats.org/drawingml/2006/main">
               <a:ext uri="{FF2B5EF4-FFF2-40B4-BE49-F238E27FC236}">
-                <a16:creationId xmlns:a16="http://schemas.microsoft.com/office/drawing/2014/main" id="{888B936E-6798-420F-97D5-0BC422F5E839}"/>
+                <a16:creationId xmlns:a16="http://schemas.microsoft.com/office/drawing/2014/main" id="{59F961B4-23A4-485B-8DE2-0F7436B2C03A}"/>
               </a:ext>
             </a:extLst>
           </p:cNvPr>
@@ -2648,7 +2648,7 @@
     </p:spTree>
     <p:extLst>
       <p:ext uri="{BB962C8B-B14F-4D97-AF65-F5344CB8AC3E}">
-        <p14:creationId xmlns:p14="http://schemas.microsoft.com/office/powerpoint/2010/main" val="1550800608"/>
+        <p14:creationId xmlns:p14="http://schemas.microsoft.com/office/powerpoint/2010/main" val="1970042511"/>
       </p:ext>
     </p:extLst>
   </p:cSld>
@@ -2679,7 +2679,7 @@
           <p:cNvPr id="8" name="venue">
             <a:extLst xmlns:a="http://schemas.openxmlformats.org/drawingml/2006/main">
               <a:ext uri="{FF2B5EF4-FFF2-40B4-BE49-F238E27FC236}">
-                <a16:creationId xmlns:a16="http://schemas.microsoft.com/office/drawing/2014/main" id="{4C6719A6-1271-4569-B6C6-EE9DC3B7AB54}"/>
+                <a16:creationId xmlns:a16="http://schemas.microsoft.com/office/drawing/2014/main" id="{6F61255B-13AE-4E1F-8C64-05EBD216D657}"/>
               </a:ext>
             </a:extLst>
           </p:cNvPr>
@@ -2737,7 +2737,7 @@
           <p:cNvPr id="2" name="topic">
             <a:extLst xmlns:a="http://schemas.openxmlformats.org/drawingml/2006/main">
               <a:ext uri="{FF2B5EF4-FFF2-40B4-BE49-F238E27FC236}">
-                <a16:creationId xmlns:a16="http://schemas.microsoft.com/office/drawing/2014/main" id="{DFC5A7EC-187B-4BDC-97FD-BC06B4E22777}"/>
+                <a16:creationId xmlns:a16="http://schemas.microsoft.com/office/drawing/2014/main" id="{D250210E-28C2-4841-BA6A-609F90244A82}"/>
               </a:ext>
             </a:extLst>
           </p:cNvPr>
@@ -2818,7 +2818,7 @@
           <p:cNvPr id="3" name="affiliation">
             <a:extLst xmlns:a="http://schemas.openxmlformats.org/drawingml/2006/main">
               <a:ext uri="{FF2B5EF4-FFF2-40B4-BE49-F238E27FC236}">
-                <a16:creationId xmlns:a16="http://schemas.microsoft.com/office/drawing/2014/main" id="{E384D41C-E821-43E4-88B0-264E6F9FD803}"/>
+                <a16:creationId xmlns:a16="http://schemas.microsoft.com/office/drawing/2014/main" id="{13DF0CF5-68B8-49C7-8DB1-B913D2497370}"/>
               </a:ext>
             </a:extLst>
           </p:cNvPr>
@@ -2876,7 +2876,7 @@
           <p:cNvPr id="4" name="author">
             <a:extLst xmlns:a="http://schemas.openxmlformats.org/drawingml/2006/main">
               <a:ext uri="{FF2B5EF4-FFF2-40B4-BE49-F238E27FC236}">
-                <a16:creationId xmlns:a16="http://schemas.microsoft.com/office/drawing/2014/main" id="{A2F63464-6598-48DD-8352-6925B0D8121E}"/>
+                <a16:creationId xmlns:a16="http://schemas.microsoft.com/office/drawing/2014/main" id="{F2838BA7-158E-490D-8E44-88DCAB22C970}"/>
               </a:ext>
             </a:extLst>
           </p:cNvPr>
@@ -2934,7 +2934,7 @@
           <p:cNvPr id="5" name="media-placeholder">
             <a:extLst xmlns:a="http://schemas.openxmlformats.org/drawingml/2006/main">
               <a:ext uri="{FF2B5EF4-FFF2-40B4-BE49-F238E27FC236}">
-                <a16:creationId xmlns:a16="http://schemas.microsoft.com/office/drawing/2014/main" id="{EDE6825C-DA90-4467-8D3C-0FCB0CE10A92}"/>
+                <a16:creationId xmlns:a16="http://schemas.microsoft.com/office/drawing/2014/main" id="{A4DDFF30-297E-432A-9162-80937404D99A}"/>
               </a:ext>
             </a:extLst>
           </p:cNvPr>
@@ -2992,7 +2992,7 @@
           <p:cNvPr id="6" name="fictional-disclosure">
             <a:extLst xmlns:a="http://schemas.openxmlformats.org/drawingml/2006/main">
               <a:ext uri="{FF2B5EF4-FFF2-40B4-BE49-F238E27FC236}">
-                <a16:creationId xmlns:a16="http://schemas.microsoft.com/office/drawing/2014/main" id="{16DAFF6A-A321-4223-A673-1D158C9D84FF}"/>
+                <a16:creationId xmlns:a16="http://schemas.microsoft.com/office/drawing/2014/main" id="{36F3B395-A868-43AF-A4F9-636A332A115D}"/>
               </a:ext>
             </a:extLst>
           </p:cNvPr>
@@ -3050,7 +3050,7 @@
           <p:cNvPr id="7" name="page">
             <a:extLst xmlns:a="http://schemas.openxmlformats.org/drawingml/2006/main">
               <a:ext uri="{FF2B5EF4-FFF2-40B4-BE49-F238E27FC236}">
-                <a16:creationId xmlns:a16="http://schemas.microsoft.com/office/drawing/2014/main" id="{1FF7DC57-CEF9-430C-BA46-72BEF788F16C}"/>
+                <a16:creationId xmlns:a16="http://schemas.microsoft.com/office/drawing/2014/main" id="{F441D28E-6C96-4291-9211-38729D122575}"/>
               </a:ext>
             </a:extLst>
           </p:cNvPr>
@@ -3106,7 +3106,7 @@
     </p:spTree>
     <p:extLst>
       <p:ext uri="{BB962C8B-B14F-4D97-AF65-F5344CB8AC3E}">
-        <p14:creationId xmlns:p14="http://schemas.microsoft.com/office/powerpoint/2010/main" val="1453211732"/>
+        <p14:creationId xmlns:p14="http://schemas.microsoft.com/office/powerpoint/2010/main" val="803959514"/>
       </p:ext>
     </p:extLst>
   </p:cSld>
@@ -3137,7 +3137,7 @@
           <p:cNvPr id="24" name="footer-line">
             <a:extLst xmlns:a="http://schemas.openxmlformats.org/drawingml/2006/main">
               <a:ext uri="{FF2B5EF4-FFF2-40B4-BE49-F238E27FC236}">
-                <a16:creationId xmlns:a16="http://schemas.microsoft.com/office/drawing/2014/main" id="{CD8DCBF0-DCB5-442F-92BB-E721B18E57D5}"/>
+                <a16:creationId xmlns:a16="http://schemas.microsoft.com/office/drawing/2014/main" id="{0CF76A38-79BF-42D0-A8FF-9B56CD7947A6}"/>
               </a:ext>
             </a:extLst>
           </p:cNvPr>
@@ -3172,7 +3172,7 @@
           <p:nvPr/>
         </p:nvPicPr>
         <p:blipFill>
-          <a:blip xmlns:r="http://schemas.openxmlformats.org/officeDocument/2006/relationships" xmlns:a="http://schemas.openxmlformats.org/drawingml/2006/main" r:embed="Rfc32e06682b64dba"/>
+          <a:blip xmlns:r="http://schemas.openxmlformats.org/officeDocument/2006/relationships" xmlns:a="http://schemas.openxmlformats.org/drawingml/2006/main" r:embed="R77ae94c99d21455d"/>
           <a:stretch xmlns:a="http://schemas.openxmlformats.org/drawingml/2006/main"/>
         </p:blipFill>
         <p:spPr>
@@ -3190,7 +3190,7 @@
           <p:cNvPr id="3" name="page">
             <a:extLst xmlns:a="http://schemas.openxmlformats.org/drawingml/2006/main">
               <a:ext uri="{FF2B5EF4-FFF2-40B4-BE49-F238E27FC236}">
-                <a16:creationId xmlns:a16="http://schemas.microsoft.com/office/drawing/2014/main" id="{925ECE44-CA86-4CB9-813A-A4814E8443F3}"/>
+                <a16:creationId xmlns:a16="http://schemas.microsoft.com/office/drawing/2014/main" id="{1747D922-61D4-437F-81F7-DD753A466ECF}"/>
               </a:ext>
             </a:extLst>
           </p:cNvPr>
@@ -3248,7 +3248,7 @@
           <p:cNvPr id="4" name="fictional-disclosure">
             <a:extLst xmlns:a="http://schemas.openxmlformats.org/drawingml/2006/main">
               <a:ext uri="{FF2B5EF4-FFF2-40B4-BE49-F238E27FC236}">
-                <a16:creationId xmlns:a16="http://schemas.microsoft.com/office/drawing/2014/main" id="{5A169156-55AC-404A-B66C-8ECCA487A897}"/>
+                <a16:creationId xmlns:a16="http://schemas.microsoft.com/office/drawing/2014/main" id="{23A6E96B-F1EA-4D48-9039-C5CCA2A23DF1}"/>
               </a:ext>
             </a:extLst>
           </p:cNvPr>
@@ -3306,7 +3306,7 @@
           <p:cNvPr id="5" name="running-chapter-3">
             <a:extLst xmlns:a="http://schemas.openxmlformats.org/drawingml/2006/main">
               <a:ext uri="{FF2B5EF4-FFF2-40B4-BE49-F238E27FC236}">
-                <a16:creationId xmlns:a16="http://schemas.microsoft.com/office/drawing/2014/main" id="{B6797448-1DEE-4EB3-B191-90C49EDA03D0}"/>
+                <a16:creationId xmlns:a16="http://schemas.microsoft.com/office/drawing/2014/main" id="{E875A1FD-B107-428B-8A0A-DFDD46978CBD}"/>
               </a:ext>
             </a:extLst>
           </p:cNvPr>
@@ -3364,7 +3364,7 @@
           <p:cNvPr id="6" name="running-title-3">
             <a:extLst xmlns:a="http://schemas.openxmlformats.org/drawingml/2006/main">
               <a:ext uri="{FF2B5EF4-FFF2-40B4-BE49-F238E27FC236}">
-                <a16:creationId xmlns:a16="http://schemas.microsoft.com/office/drawing/2014/main" id="{28BC48D8-73E4-4DAA-8580-D8BC5635A18A}"/>
+                <a16:creationId xmlns:a16="http://schemas.microsoft.com/office/drawing/2014/main" id="{6D8C23E4-D6B4-4E05-835C-A8FF3374C09E}"/>
               </a:ext>
             </a:extLst>
           </p:cNvPr>
@@ -3422,7 +3422,7 @@
           <p:cNvPr id="7" name="title">
             <a:extLst xmlns:a="http://schemas.openxmlformats.org/drawingml/2006/main">
               <a:ext uri="{FF2B5EF4-FFF2-40B4-BE49-F238E27FC236}">
-                <a16:creationId xmlns:a16="http://schemas.microsoft.com/office/drawing/2014/main" id="{322D3E7A-2D8D-499C-B592-E76DA4BC98B4}"/>
+                <a16:creationId xmlns:a16="http://schemas.microsoft.com/office/drawing/2014/main" id="{EBFE022A-F771-4D2C-89DB-2C0EA8638568}"/>
               </a:ext>
             </a:extLst>
           </p:cNvPr>
@@ -3480,7 +3480,7 @@
           <p:cNvPr id="8" name="message">
             <a:extLst xmlns:a="http://schemas.openxmlformats.org/drawingml/2006/main">
               <a:ext uri="{FF2B5EF4-FFF2-40B4-BE49-F238E27FC236}">
-                <a16:creationId xmlns:a16="http://schemas.microsoft.com/office/drawing/2014/main" id="{179B518C-D659-42FD-BC5B-F132218A76E0}"/>
+                <a16:creationId xmlns:a16="http://schemas.microsoft.com/office/drawing/2014/main" id="{00C5FBAB-EB6E-4EB4-838E-5F9546842467}"/>
               </a:ext>
             </a:extLst>
           </p:cNvPr>
@@ -3538,7 +3538,7 @@
           <p:cNvPr id="9" name="toc-label-0">
             <a:extLst xmlns:a="http://schemas.openxmlformats.org/drawingml/2006/main">
               <a:ext uri="{FF2B5EF4-FFF2-40B4-BE49-F238E27FC236}">
-                <a16:creationId xmlns:a16="http://schemas.microsoft.com/office/drawing/2014/main" id="{5EF5D9AA-C55C-420D-BB27-F9AF15E060C7}"/>
+                <a16:creationId xmlns:a16="http://schemas.microsoft.com/office/drawing/2014/main" id="{07C12E99-4276-4B0D-A172-0DE29F3B5BD6}"/>
               </a:ext>
             </a:extLst>
           </p:cNvPr>
@@ -3596,7 +3596,7 @@
           <p:cNvPr id="10" name="toc-image-slot-0">
             <a:extLst xmlns:a="http://schemas.openxmlformats.org/drawingml/2006/main">
               <a:ext uri="{FF2B5EF4-FFF2-40B4-BE49-F238E27FC236}">
-                <a16:creationId xmlns:a16="http://schemas.microsoft.com/office/drawing/2014/main" id="{87200B74-5F71-4235-B376-3D0561B75393}"/>
+                <a16:creationId xmlns:a16="http://schemas.microsoft.com/office/drawing/2014/main" id="{A781293C-0CB9-4C62-984B-C88132DEAA84}"/>
               </a:ext>
             </a:extLst>
           </p:cNvPr>
@@ -3629,7 +3629,7 @@
           <p:cNvPr id="11" name="toc-image-label-0">
             <a:extLst xmlns:a="http://schemas.openxmlformats.org/drawingml/2006/main">
               <a:ext uri="{FF2B5EF4-FFF2-40B4-BE49-F238E27FC236}">
-                <a16:creationId xmlns:a16="http://schemas.microsoft.com/office/drawing/2014/main" id="{7D8FFD9C-32A8-4E50-B7E6-9CC7D46E4406}"/>
+                <a16:creationId xmlns:a16="http://schemas.microsoft.com/office/drawing/2014/main" id="{93CCD2E4-2966-447A-B575-5F8742A651BC}"/>
               </a:ext>
             </a:extLst>
           </p:cNvPr>
@@ -3687,7 +3687,7 @@
           <p:cNvPr id="12" name="toc-label-1">
             <a:extLst xmlns:a="http://schemas.openxmlformats.org/drawingml/2006/main">
               <a:ext uri="{FF2B5EF4-FFF2-40B4-BE49-F238E27FC236}">
-                <a16:creationId xmlns:a16="http://schemas.microsoft.com/office/drawing/2014/main" id="{E424823D-E41D-4A0C-9FE4-54C306FE16B7}"/>
+                <a16:creationId xmlns:a16="http://schemas.microsoft.com/office/drawing/2014/main" id="{C3A4044B-41D4-4E00-89A0-326448FC89F1}"/>
               </a:ext>
             </a:extLst>
           </p:cNvPr>
@@ -3745,7 +3745,7 @@
           <p:cNvPr id="13" name="toc-image-slot-1">
             <a:extLst xmlns:a="http://schemas.openxmlformats.org/drawingml/2006/main">
               <a:ext uri="{FF2B5EF4-FFF2-40B4-BE49-F238E27FC236}">
-                <a16:creationId xmlns:a16="http://schemas.microsoft.com/office/drawing/2014/main" id="{98A2516F-21A8-4C40-9753-C89041410F75}"/>
+                <a16:creationId xmlns:a16="http://schemas.microsoft.com/office/drawing/2014/main" id="{7F320DBB-7BA5-4BA3-8B0D-9321E1913A20}"/>
               </a:ext>
             </a:extLst>
           </p:cNvPr>
@@ -3778,7 +3778,7 @@
           <p:cNvPr id="14" name="toc-image-label-1">
             <a:extLst xmlns:a="http://schemas.openxmlformats.org/drawingml/2006/main">
               <a:ext uri="{FF2B5EF4-FFF2-40B4-BE49-F238E27FC236}">
-                <a16:creationId xmlns:a16="http://schemas.microsoft.com/office/drawing/2014/main" id="{B2466703-1AD5-4EE8-A9A1-690CCBD01FDB}"/>
+                <a16:creationId xmlns:a16="http://schemas.microsoft.com/office/drawing/2014/main" id="{4E0FDF55-C2F4-40DF-B831-564A7B2896E7}"/>
               </a:ext>
             </a:extLst>
           </p:cNvPr>
@@ -3836,7 +3836,7 @@
           <p:cNvPr id="15" name="toc-label-2">
             <a:extLst xmlns:a="http://schemas.openxmlformats.org/drawingml/2006/main">
               <a:ext uri="{FF2B5EF4-FFF2-40B4-BE49-F238E27FC236}">
-                <a16:creationId xmlns:a16="http://schemas.microsoft.com/office/drawing/2014/main" id="{80F3C4C3-B764-4F4B-8BCC-80CD9C0E8DDF}"/>
+                <a16:creationId xmlns:a16="http://schemas.microsoft.com/office/drawing/2014/main" id="{206A3567-3112-4E29-A18F-CE092BFF4E83}"/>
               </a:ext>
             </a:extLst>
           </p:cNvPr>
@@ -3894,7 +3894,7 @@
           <p:cNvPr id="16" name="toc-image-slot-2">
             <a:extLst xmlns:a="http://schemas.openxmlformats.org/drawingml/2006/main">
               <a:ext uri="{FF2B5EF4-FFF2-40B4-BE49-F238E27FC236}">
-                <a16:creationId xmlns:a16="http://schemas.microsoft.com/office/drawing/2014/main" id="{96F88C99-BC84-44D7-B690-CD45FDCA766E}"/>
+                <a16:creationId xmlns:a16="http://schemas.microsoft.com/office/drawing/2014/main" id="{84857111-E1BE-4800-A260-969C77139D3F}"/>
               </a:ext>
             </a:extLst>
           </p:cNvPr>
@@ -3927,7 +3927,7 @@
           <p:cNvPr id="17" name="toc-image-label-2">
             <a:extLst xmlns:a="http://schemas.openxmlformats.org/drawingml/2006/main">
               <a:ext uri="{FF2B5EF4-FFF2-40B4-BE49-F238E27FC236}">
-                <a16:creationId xmlns:a16="http://schemas.microsoft.com/office/drawing/2014/main" id="{2EF0AC1C-3CF4-4DE7-99F9-98724891552B}"/>
+                <a16:creationId xmlns:a16="http://schemas.microsoft.com/office/drawing/2014/main" id="{2EACE051-71A4-4F03-8751-B84DDE1F26BD}"/>
               </a:ext>
             </a:extLst>
           </p:cNvPr>
@@ -3985,7 +3985,7 @@
           <p:cNvPr id="18" name="toc-label-3">
             <a:extLst xmlns:a="http://schemas.openxmlformats.org/drawingml/2006/main">
               <a:ext uri="{FF2B5EF4-FFF2-40B4-BE49-F238E27FC236}">
-                <a16:creationId xmlns:a16="http://schemas.microsoft.com/office/drawing/2014/main" id="{17ED5554-B8A1-4B3D-BBC1-44D595AB06D6}"/>
+                <a16:creationId xmlns:a16="http://schemas.microsoft.com/office/drawing/2014/main" id="{9FC8B1C0-0CFE-40D0-A531-7E92E51DF413}"/>
               </a:ext>
             </a:extLst>
           </p:cNvPr>
@@ -4043,7 +4043,7 @@
           <p:cNvPr id="19" name="toc-image-slot-3">
             <a:extLst xmlns:a="http://schemas.openxmlformats.org/drawingml/2006/main">
               <a:ext uri="{FF2B5EF4-FFF2-40B4-BE49-F238E27FC236}">
-                <a16:creationId xmlns:a16="http://schemas.microsoft.com/office/drawing/2014/main" id="{24590022-86B2-4396-BCD4-26C06C718AE4}"/>
+                <a16:creationId xmlns:a16="http://schemas.microsoft.com/office/drawing/2014/main" id="{C69BBE06-3181-43CE-9805-EC7D141C6AA3}"/>
               </a:ext>
             </a:extLst>
           </p:cNvPr>
@@ -4076,7 +4076,7 @@
           <p:cNvPr id="20" name="toc-image-label-3">
             <a:extLst xmlns:a="http://schemas.openxmlformats.org/drawingml/2006/main">
               <a:ext uri="{FF2B5EF4-FFF2-40B4-BE49-F238E27FC236}">
-                <a16:creationId xmlns:a16="http://schemas.microsoft.com/office/drawing/2014/main" id="{23CF8BFE-41AC-4A92-9195-37A0E72F1092}"/>
+                <a16:creationId xmlns:a16="http://schemas.microsoft.com/office/drawing/2014/main" id="{461E0A1D-E70F-43F7-AA4E-84184254AED9}"/>
               </a:ext>
             </a:extLst>
           </p:cNvPr>
@@ -4134,7 +4134,7 @@
           <p:cNvPr id="21" name="toc-rule-vertical">
             <a:extLst xmlns:a="http://schemas.openxmlformats.org/drawingml/2006/main">
               <a:ext uri="{FF2B5EF4-FFF2-40B4-BE49-F238E27FC236}">
-                <a16:creationId xmlns:a16="http://schemas.microsoft.com/office/drawing/2014/main" id="{02B31645-70A8-49FD-80CF-CF76822B2C0F}"/>
+                <a16:creationId xmlns:a16="http://schemas.microsoft.com/office/drawing/2014/main" id="{73F8CB40-1A3C-4E04-9738-1F7702AE1238}"/>
               </a:ext>
             </a:extLst>
           </p:cNvPr>
@@ -4165,7 +4165,7 @@
           <p:cNvPr id="22" name="toc-rule-horizontal">
             <a:extLst xmlns:a="http://schemas.openxmlformats.org/drawingml/2006/main">
               <a:ext uri="{FF2B5EF4-FFF2-40B4-BE49-F238E27FC236}">
-                <a16:creationId xmlns:a16="http://schemas.microsoft.com/office/drawing/2014/main" id="{0791F0E3-5EDE-4A04-A874-2BF7E1CE24DE}"/>
+                <a16:creationId xmlns:a16="http://schemas.microsoft.com/office/drawing/2014/main" id="{F140F0E7-4BDD-4F0C-BD0A-6F3B7003CC52}"/>
               </a:ext>
             </a:extLst>
           </p:cNvPr>
@@ -4196,7 +4196,7 @@
           <p:cNvPr id="23" name="slot-disclosure">
             <a:extLst xmlns:a="http://schemas.openxmlformats.org/drawingml/2006/main">
               <a:ext uri="{FF2B5EF4-FFF2-40B4-BE49-F238E27FC236}">
-                <a16:creationId xmlns:a16="http://schemas.microsoft.com/office/drawing/2014/main" id="{4CAA2F64-3CE9-420F-9A52-9119C52D7BD4}"/>
+                <a16:creationId xmlns:a16="http://schemas.microsoft.com/office/drawing/2014/main" id="{838F11B6-FAFF-4DB6-ADF7-5B597CADA958}"/>
               </a:ext>
             </a:extLst>
           </p:cNvPr>
@@ -4252,7 +4252,7 @@
     </p:spTree>
     <p:extLst>
       <p:ext uri="{BB962C8B-B14F-4D97-AF65-F5344CB8AC3E}">
-        <p14:creationId xmlns:p14="http://schemas.microsoft.com/office/powerpoint/2010/main" val="1538059938"/>
+        <p14:creationId xmlns:p14="http://schemas.microsoft.com/office/powerpoint/2010/main" val="1982297688"/>
       </p:ext>
     </p:extLst>
   </p:cSld>
@@ -4287,7 +4287,7 @@
           <p:nvPr/>
         </p:nvPicPr>
         <p:blipFill>
-          <a:blip xmlns:r="http://schemas.openxmlformats.org/officeDocument/2006/relationships" xmlns:a="http://schemas.openxmlformats.org/drawingml/2006/main" r:embed="R7ae9e244246a427a"/>
+          <a:blip xmlns:r="http://schemas.openxmlformats.org/officeDocument/2006/relationships" xmlns:a="http://schemas.openxmlformats.org/drawingml/2006/main" r:embed="R959b4a5f4ca7411d"/>
           <a:stretch xmlns:a="http://schemas.openxmlformats.org/drawingml/2006/main"/>
         </p:blipFill>
         <p:spPr>
@@ -4305,7 +4305,7 @@
           <p:cNvPr id="2" name="page">
             <a:extLst xmlns:a="http://schemas.openxmlformats.org/drawingml/2006/main">
               <a:ext uri="{FF2B5EF4-FFF2-40B4-BE49-F238E27FC236}">
-                <a16:creationId xmlns:a16="http://schemas.microsoft.com/office/drawing/2014/main" id="{CE9FED70-B401-4D6B-9AB7-37E3D8636649}"/>
+                <a16:creationId xmlns:a16="http://schemas.microsoft.com/office/drawing/2014/main" id="{8507D0D6-F18E-4374-AFFA-9079DBAE6F39}"/>
               </a:ext>
             </a:extLst>
           </p:cNvPr>
@@ -4363,7 +4363,7 @@
           <p:cNvPr id="3" name="fictional-disclosure">
             <a:extLst xmlns:a="http://schemas.openxmlformats.org/drawingml/2006/main">
               <a:ext uri="{FF2B5EF4-FFF2-40B4-BE49-F238E27FC236}">
-                <a16:creationId xmlns:a16="http://schemas.microsoft.com/office/drawing/2014/main" id="{518AA6D0-C7D9-478A-81EC-982C71A0B346}"/>
+                <a16:creationId xmlns:a16="http://schemas.microsoft.com/office/drawing/2014/main" id="{6FEE40ED-525E-48EC-9188-31A9B3595DE2}"/>
               </a:ext>
             </a:extLst>
           </p:cNvPr>
@@ -4421,7 +4421,7 @@
           <p:cNvPr id="4" name="running-chapter-4">
             <a:extLst xmlns:a="http://schemas.openxmlformats.org/drawingml/2006/main">
               <a:ext uri="{FF2B5EF4-FFF2-40B4-BE49-F238E27FC236}">
-                <a16:creationId xmlns:a16="http://schemas.microsoft.com/office/drawing/2014/main" id="{F084B203-9F1E-4DBC-88F9-781FE5238555}"/>
+                <a16:creationId xmlns:a16="http://schemas.microsoft.com/office/drawing/2014/main" id="{8F85C86D-9CA4-4D2B-945F-CC802B623590}"/>
               </a:ext>
             </a:extLst>
           </p:cNvPr>
@@ -4479,7 +4479,7 @@
           <p:cNvPr id="5" name="running-title-4">
             <a:extLst xmlns:a="http://schemas.openxmlformats.org/drawingml/2006/main">
               <a:ext uri="{FF2B5EF4-FFF2-40B4-BE49-F238E27FC236}">
-                <a16:creationId xmlns:a16="http://schemas.microsoft.com/office/drawing/2014/main" id="{8819AECB-9B4F-4EC4-B090-5F71B8A48724}"/>
+                <a16:creationId xmlns:a16="http://schemas.microsoft.com/office/drawing/2014/main" id="{CE125A52-7FE6-4E41-81CF-67117D6DE1A0}"/>
               </a:ext>
             </a:extLst>
           </p:cNvPr>
@@ -4537,7 +4537,7 @@
           <p:cNvPr id="6" name="upper-chapter-band">
             <a:extLst xmlns:a="http://schemas.openxmlformats.org/drawingml/2006/main">
               <a:ext uri="{FF2B5EF4-FFF2-40B4-BE49-F238E27FC236}">
-                <a16:creationId xmlns:a16="http://schemas.microsoft.com/office/drawing/2014/main" id="{5FA7E7E2-D809-423D-BC3C-764CEEAE7E0A}"/>
+                <a16:creationId xmlns:a16="http://schemas.microsoft.com/office/drawing/2014/main" id="{BBA8F454-D7EF-424B-95B2-CFCAF362A780}"/>
               </a:ext>
             </a:extLst>
           </p:cNvPr>
@@ -4568,7 +4568,7 @@
           <p:cNvPr id="7" name="chapter">
             <a:extLst xmlns:a="http://schemas.openxmlformats.org/drawingml/2006/main">
               <a:ext uri="{FF2B5EF4-FFF2-40B4-BE49-F238E27FC236}">
-                <a16:creationId xmlns:a16="http://schemas.microsoft.com/office/drawing/2014/main" id="{B85FD012-92C3-45E8-B96C-6526D0281647}"/>
+                <a16:creationId xmlns:a16="http://schemas.microsoft.com/office/drawing/2014/main" id="{205A372C-4581-47AE-9056-3B079D547BC0}"/>
               </a:ext>
             </a:extLst>
           </p:cNvPr>
@@ -4626,7 +4626,7 @@
           <p:cNvPr id="8" name="chapter-guide">
             <a:extLst xmlns:a="http://schemas.openxmlformats.org/drawingml/2006/main">
               <a:ext uri="{FF2B5EF4-FFF2-40B4-BE49-F238E27FC236}">
-                <a16:creationId xmlns:a16="http://schemas.microsoft.com/office/drawing/2014/main" id="{84DA4705-7167-44C0-A820-1FF8C86ECCB2}"/>
+                <a16:creationId xmlns:a16="http://schemas.microsoft.com/office/drawing/2014/main" id="{86386018-D14C-4C43-B274-7AE1314E49BC}"/>
               </a:ext>
             </a:extLst>
           </p:cNvPr>
@@ -4682,7 +4682,7 @@
     </p:spTree>
     <p:extLst>
       <p:ext uri="{BB962C8B-B14F-4D97-AF65-F5344CB8AC3E}">
-        <p14:creationId xmlns:p14="http://schemas.microsoft.com/office/powerpoint/2010/main" val="1206065301"/>
+        <p14:creationId xmlns:p14="http://schemas.microsoft.com/office/powerpoint/2010/main" val="1148291130"/>
       </p:ext>
     </p:extLst>
   </p:cSld>
@@ -4713,7 +4713,7 @@
           <p:cNvPr id="47" name="footer-line">
             <a:extLst xmlns:a="http://schemas.openxmlformats.org/drawingml/2006/main">
               <a:ext uri="{FF2B5EF4-FFF2-40B4-BE49-F238E27FC236}">
-                <a16:creationId xmlns:a16="http://schemas.microsoft.com/office/drawing/2014/main" id="{6CEF54DC-135E-438F-AB25-3E073DB2ED6F}"/>
+                <a16:creationId xmlns:a16="http://schemas.microsoft.com/office/drawing/2014/main" id="{DE5389E3-A5E3-48B2-967C-A4BA90D221EC}"/>
               </a:ext>
             </a:extLst>
           </p:cNvPr>
@@ -4748,7 +4748,7 @@
           <p:nvPr/>
         </p:nvPicPr>
         <p:blipFill>
-          <a:blip xmlns:r="http://schemas.openxmlformats.org/officeDocument/2006/relationships" xmlns:a="http://schemas.openxmlformats.org/drawingml/2006/main" r:embed="R5ecfe005e6c14474"/>
+          <a:blip xmlns:r="http://schemas.openxmlformats.org/officeDocument/2006/relationships" xmlns:a="http://schemas.openxmlformats.org/drawingml/2006/main" r:embed="R4444e54e782e475f"/>
           <a:stretch xmlns:a="http://schemas.openxmlformats.org/drawingml/2006/main"/>
         </p:blipFill>
         <p:spPr>
@@ -4766,7 +4766,7 @@
           <p:cNvPr id="3" name="page">
             <a:extLst xmlns:a="http://schemas.openxmlformats.org/drawingml/2006/main">
               <a:ext uri="{FF2B5EF4-FFF2-40B4-BE49-F238E27FC236}">
-                <a16:creationId xmlns:a16="http://schemas.microsoft.com/office/drawing/2014/main" id="{3AE0E050-A8B5-4625-B3C0-EF1C1252C437}"/>
+                <a16:creationId xmlns:a16="http://schemas.microsoft.com/office/drawing/2014/main" id="{58A3F549-6375-473E-9D05-124F0235699D}"/>
               </a:ext>
             </a:extLst>
           </p:cNvPr>
@@ -4824,7 +4824,7 @@
           <p:cNvPr id="4" name="fictional-disclosure">
             <a:extLst xmlns:a="http://schemas.openxmlformats.org/drawingml/2006/main">
               <a:ext uri="{FF2B5EF4-FFF2-40B4-BE49-F238E27FC236}">
-                <a16:creationId xmlns:a16="http://schemas.microsoft.com/office/drawing/2014/main" id="{6CFDA008-220E-4298-B430-2C60C4780525}"/>
+                <a16:creationId xmlns:a16="http://schemas.microsoft.com/office/drawing/2014/main" id="{A674BBEB-C71D-4D37-ADD9-914AF46D6686}"/>
               </a:ext>
             </a:extLst>
           </p:cNvPr>
@@ -4882,7 +4882,7 @@
           <p:cNvPr id="5" name="running-chapter-5">
             <a:extLst xmlns:a="http://schemas.openxmlformats.org/drawingml/2006/main">
               <a:ext uri="{FF2B5EF4-FFF2-40B4-BE49-F238E27FC236}">
-                <a16:creationId xmlns:a16="http://schemas.microsoft.com/office/drawing/2014/main" id="{FF8D5020-E6CE-4A6B-9BD5-E54B927086D4}"/>
+                <a16:creationId xmlns:a16="http://schemas.microsoft.com/office/drawing/2014/main" id="{81F07456-29FC-45A4-B152-8E92C1FE8CC5}"/>
               </a:ext>
             </a:extLst>
           </p:cNvPr>
@@ -4940,7 +4940,7 @@
           <p:cNvPr id="6" name="running-title-5">
             <a:extLst xmlns:a="http://schemas.openxmlformats.org/drawingml/2006/main">
               <a:ext uri="{FF2B5EF4-FFF2-40B4-BE49-F238E27FC236}">
-                <a16:creationId xmlns:a16="http://schemas.microsoft.com/office/drawing/2014/main" id="{2DFEF992-208B-462D-BB89-8875C51ED107}"/>
+                <a16:creationId xmlns:a16="http://schemas.microsoft.com/office/drawing/2014/main" id="{D39DE680-6021-45D8-9EC2-47F181C1A509}"/>
               </a:ext>
             </a:extLst>
           </p:cNvPr>
@@ -4998,7 +4998,7 @@
           <p:cNvPr id="7" name="title">
             <a:extLst xmlns:a="http://schemas.openxmlformats.org/drawingml/2006/main">
               <a:ext uri="{FF2B5EF4-FFF2-40B4-BE49-F238E27FC236}">
-                <a16:creationId xmlns:a16="http://schemas.microsoft.com/office/drawing/2014/main" id="{339D3992-F4C8-4F54-BBF4-F60019BBEBBF}"/>
+                <a16:creationId xmlns:a16="http://schemas.microsoft.com/office/drawing/2014/main" id="{63EF6B62-6513-4123-A403-A93FAFA6B9AB}"/>
               </a:ext>
             </a:extLst>
           </p:cNvPr>
@@ -5056,7 +5056,7 @@
           <p:cNvPr id="8" name="message">
             <a:extLst xmlns:a="http://schemas.openxmlformats.org/drawingml/2006/main">
               <a:ext uri="{FF2B5EF4-FFF2-40B4-BE49-F238E27FC236}">
-                <a16:creationId xmlns:a16="http://schemas.microsoft.com/office/drawing/2014/main" id="{9EE4A592-CE09-4C6C-9DF2-4C2043B0689C}"/>
+                <a16:creationId xmlns:a16="http://schemas.microsoft.com/office/drawing/2014/main" id="{BB681FC4-63C4-4E06-AEE0-C1C56968D8BB}"/>
               </a:ext>
             </a:extLst>
           </p:cNvPr>
@@ -5114,7 +5114,7 @@
           <p:cNvPr id="9" name="all-label">
             <a:extLst xmlns:a="http://schemas.openxmlformats.org/drawingml/2006/main">
               <a:ext uri="{FF2B5EF4-FFF2-40B4-BE49-F238E27FC236}">
-                <a16:creationId xmlns:a16="http://schemas.microsoft.com/office/drawing/2014/main" id="{38E0CFF2-33A0-45F4-89BD-6B7CEC6CE245}"/>
+                <a16:creationId xmlns:a16="http://schemas.microsoft.com/office/drawing/2014/main" id="{50BB9568-BD1E-4FAB-96AC-4AA02585BEC4}"/>
               </a:ext>
             </a:extLst>
           </p:cNvPr>
@@ -5172,7 +5172,7 @@
           <p:cNvPr id="10" name="kept-label">
             <a:extLst xmlns:a="http://schemas.openxmlformats.org/drawingml/2006/main">
               <a:ext uri="{FF2B5EF4-FFF2-40B4-BE49-F238E27FC236}">
-                <a16:creationId xmlns:a16="http://schemas.microsoft.com/office/drawing/2014/main" id="{CDDF9E05-EDCF-4A65-BD97-33342E78BCC0}"/>
+                <a16:creationId xmlns:a16="http://schemas.microsoft.com/office/drawing/2014/main" id="{5F85A43C-7C26-4DEA-B009-AEFADD487751}"/>
               </a:ext>
             </a:extLst>
           </p:cNvPr>
@@ -5230,7 +5230,7 @@
           <p:cNvPr id="11" name="input-0">
             <a:extLst xmlns:a="http://schemas.openxmlformats.org/drawingml/2006/main">
               <a:ext uri="{FF2B5EF4-FFF2-40B4-BE49-F238E27FC236}">
-                <a16:creationId xmlns:a16="http://schemas.microsoft.com/office/drawing/2014/main" id="{A79EC208-DF17-4D98-BA12-151E8982A28C}"/>
+                <a16:creationId xmlns:a16="http://schemas.microsoft.com/office/drawing/2014/main" id="{3CC4475B-33B9-48BF-A545-83B2C3596EC7}"/>
               </a:ext>
             </a:extLst>
           </p:cNvPr>
@@ -5261,7 +5261,7 @@
           <p:cNvPr id="12" name="minute-0">
             <a:extLst xmlns:a="http://schemas.openxmlformats.org/drawingml/2006/main">
               <a:ext uri="{FF2B5EF4-FFF2-40B4-BE49-F238E27FC236}">
-                <a16:creationId xmlns:a16="http://schemas.microsoft.com/office/drawing/2014/main" id="{E9C5622D-0F67-4FD2-A14B-2F108C575DFE}"/>
+                <a16:creationId xmlns:a16="http://schemas.microsoft.com/office/drawing/2014/main" id="{72F0F5F3-3BBB-4671-A53C-424D154A95A3}"/>
               </a:ext>
             </a:extLst>
           </p:cNvPr>
@@ -5319,7 +5319,7 @@
           <p:cNvPr id="13" name="retained-0">
             <a:extLst xmlns:a="http://schemas.openxmlformats.org/drawingml/2006/main">
               <a:ext uri="{FF2B5EF4-FFF2-40B4-BE49-F238E27FC236}">
-                <a16:creationId xmlns:a16="http://schemas.microsoft.com/office/drawing/2014/main" id="{B02AD77E-955B-4D6D-929B-91EE45B4EFF8}"/>
+                <a16:creationId xmlns:a16="http://schemas.microsoft.com/office/drawing/2014/main" id="{DF579E7A-3F01-492E-A17D-EA01482057CA}"/>
               </a:ext>
             </a:extLst>
           </p:cNvPr>
@@ -5377,7 +5377,7 @@
           <p:cNvPr id="15" name="input-1">
             <a:extLst xmlns:a="http://schemas.openxmlformats.org/drawingml/2006/main">
               <a:ext uri="{FF2B5EF4-FFF2-40B4-BE49-F238E27FC236}">
-                <a16:creationId xmlns:a16="http://schemas.microsoft.com/office/drawing/2014/main" id="{09C27231-DEE0-459F-A0DE-AF78F1535E57}"/>
+                <a16:creationId xmlns:a16="http://schemas.microsoft.com/office/drawing/2014/main" id="{94088EF0-6E24-46CB-9FBE-75C590699504}"/>
               </a:ext>
             </a:extLst>
           </p:cNvPr>
@@ -5408,7 +5408,7 @@
           <p:cNvPr id="16" name="minute-1">
             <a:extLst xmlns:a="http://schemas.openxmlformats.org/drawingml/2006/main">
               <a:ext uri="{FF2B5EF4-FFF2-40B4-BE49-F238E27FC236}">
-                <a16:creationId xmlns:a16="http://schemas.microsoft.com/office/drawing/2014/main" id="{29544B49-B300-42D4-A07D-308A05BF64C3}"/>
+                <a16:creationId xmlns:a16="http://schemas.microsoft.com/office/drawing/2014/main" id="{93C0B26D-19CB-4A08-8D1F-51E655375231}"/>
               </a:ext>
             </a:extLst>
           </p:cNvPr>
@@ -5466,7 +5466,7 @@
           <p:cNvPr id="17" name="input-2">
             <a:extLst xmlns:a="http://schemas.openxmlformats.org/drawingml/2006/main">
               <a:ext uri="{FF2B5EF4-FFF2-40B4-BE49-F238E27FC236}">
-                <a16:creationId xmlns:a16="http://schemas.microsoft.com/office/drawing/2014/main" id="{DF855C2B-8853-4420-A3D8-7124CA49D70A}"/>
+                <a16:creationId xmlns:a16="http://schemas.microsoft.com/office/drawing/2014/main" id="{4FCD3F64-0558-4F0C-BBEF-0C702ACB362F}"/>
               </a:ext>
             </a:extLst>
           </p:cNvPr>
@@ -5497,7 +5497,7 @@
           <p:cNvPr id="18" name="minute-2">
             <a:extLst xmlns:a="http://schemas.openxmlformats.org/drawingml/2006/main">
               <a:ext uri="{FF2B5EF4-FFF2-40B4-BE49-F238E27FC236}">
-                <a16:creationId xmlns:a16="http://schemas.microsoft.com/office/drawing/2014/main" id="{F9A50981-4F80-4752-836D-4C9C22FE1094}"/>
+                <a16:creationId xmlns:a16="http://schemas.microsoft.com/office/drawing/2014/main" id="{37FEDC9E-D5C3-4A79-897C-6C2BA5718514}"/>
               </a:ext>
             </a:extLst>
           </p:cNvPr>
@@ -5555,7 +5555,7 @@
           <p:cNvPr id="19" name="input-3">
             <a:extLst xmlns:a="http://schemas.openxmlformats.org/drawingml/2006/main">
               <a:ext uri="{FF2B5EF4-FFF2-40B4-BE49-F238E27FC236}">
-                <a16:creationId xmlns:a16="http://schemas.microsoft.com/office/drawing/2014/main" id="{65C106FB-7811-4808-9A3B-A8581A93A4B0}"/>
+                <a16:creationId xmlns:a16="http://schemas.microsoft.com/office/drawing/2014/main" id="{9BAA00E3-4F96-4D44-866B-9B36FD784D91}"/>
               </a:ext>
             </a:extLst>
           </p:cNvPr>
@@ -5586,7 +5586,7 @@
           <p:cNvPr id="20" name="minute-3">
             <a:extLst xmlns:a="http://schemas.openxmlformats.org/drawingml/2006/main">
               <a:ext uri="{FF2B5EF4-FFF2-40B4-BE49-F238E27FC236}">
-                <a16:creationId xmlns:a16="http://schemas.microsoft.com/office/drawing/2014/main" id="{953DFDF5-A3CF-4C0A-8330-287218079E7B}"/>
+                <a16:creationId xmlns:a16="http://schemas.microsoft.com/office/drawing/2014/main" id="{FE1DDCEA-E1C7-4C55-BC6A-435E92E416C8}"/>
               </a:ext>
             </a:extLst>
           </p:cNvPr>
@@ -5644,7 +5644,7 @@
           <p:cNvPr id="21" name="input-4">
             <a:extLst xmlns:a="http://schemas.openxmlformats.org/drawingml/2006/main">
               <a:ext uri="{FF2B5EF4-FFF2-40B4-BE49-F238E27FC236}">
-                <a16:creationId xmlns:a16="http://schemas.microsoft.com/office/drawing/2014/main" id="{583BF31E-F914-4B2A-B526-F4E0CCF03224}"/>
+                <a16:creationId xmlns:a16="http://schemas.microsoft.com/office/drawing/2014/main" id="{71103603-BA66-4869-9769-8296A935C28C}"/>
               </a:ext>
             </a:extLst>
           </p:cNvPr>
@@ -5675,7 +5675,7 @@
           <p:cNvPr id="22" name="minute-4">
             <a:extLst xmlns:a="http://schemas.openxmlformats.org/drawingml/2006/main">
               <a:ext uri="{FF2B5EF4-FFF2-40B4-BE49-F238E27FC236}">
-                <a16:creationId xmlns:a16="http://schemas.microsoft.com/office/drawing/2014/main" id="{EF9E85FB-03A1-4AB3-94C7-D9F6A4407964}"/>
+                <a16:creationId xmlns:a16="http://schemas.microsoft.com/office/drawing/2014/main" id="{E90CCD6D-053E-4108-AFE0-D15AE65FE897}"/>
               </a:ext>
             </a:extLst>
           </p:cNvPr>
@@ -5733,7 +5733,7 @@
           <p:cNvPr id="23" name="input-5">
             <a:extLst xmlns:a="http://schemas.openxmlformats.org/drawingml/2006/main">
               <a:ext uri="{FF2B5EF4-FFF2-40B4-BE49-F238E27FC236}">
-                <a16:creationId xmlns:a16="http://schemas.microsoft.com/office/drawing/2014/main" id="{16B3B8F5-C612-4398-BBCF-CB8603BE80FA}"/>
+                <a16:creationId xmlns:a16="http://schemas.microsoft.com/office/drawing/2014/main" id="{A61447DB-95F1-4E7E-BF6F-7731149975D0}"/>
               </a:ext>
             </a:extLst>
           </p:cNvPr>
@@ -5764,7 +5764,7 @@
           <p:cNvPr id="24" name="minute-5">
             <a:extLst xmlns:a="http://schemas.openxmlformats.org/drawingml/2006/main">
               <a:ext uri="{FF2B5EF4-FFF2-40B4-BE49-F238E27FC236}">
-                <a16:creationId xmlns:a16="http://schemas.microsoft.com/office/drawing/2014/main" id="{89F14E31-BEA9-43DC-BADB-09177DE9180E}"/>
+                <a16:creationId xmlns:a16="http://schemas.microsoft.com/office/drawing/2014/main" id="{3A1710EB-ED52-4545-8794-91082E0F32E2}"/>
               </a:ext>
             </a:extLst>
           </p:cNvPr>
@@ -5822,7 +5822,7 @@
           <p:cNvPr id="25" name="retained-5">
             <a:extLst xmlns:a="http://schemas.openxmlformats.org/drawingml/2006/main">
               <a:ext uri="{FF2B5EF4-FFF2-40B4-BE49-F238E27FC236}">
-                <a16:creationId xmlns:a16="http://schemas.microsoft.com/office/drawing/2014/main" id="{CA9A171D-CF29-44C6-9592-D976CDDB8571}"/>
+                <a16:creationId xmlns:a16="http://schemas.microsoft.com/office/drawing/2014/main" id="{014D3880-17C7-4054-A1C1-4D1E59A37701}"/>
               </a:ext>
             </a:extLst>
           </p:cNvPr>
@@ -5880,7 +5880,7 @@
           <p:cNvPr id="27" name="input-6">
             <a:extLst xmlns:a="http://schemas.openxmlformats.org/drawingml/2006/main">
               <a:ext uri="{FF2B5EF4-FFF2-40B4-BE49-F238E27FC236}">
-                <a16:creationId xmlns:a16="http://schemas.microsoft.com/office/drawing/2014/main" id="{7980C339-F2BE-4E41-B247-60F8D84706F5}"/>
+                <a16:creationId xmlns:a16="http://schemas.microsoft.com/office/drawing/2014/main" id="{6208B83C-8FE2-4515-A2B3-7469D7721A41}"/>
               </a:ext>
             </a:extLst>
           </p:cNvPr>
@@ -5911,7 +5911,7 @@
           <p:cNvPr id="28" name="minute-6">
             <a:extLst xmlns:a="http://schemas.openxmlformats.org/drawingml/2006/main">
               <a:ext uri="{FF2B5EF4-FFF2-40B4-BE49-F238E27FC236}">
-                <a16:creationId xmlns:a16="http://schemas.microsoft.com/office/drawing/2014/main" id="{0DDB937B-825C-481D-9E16-3EF2ABDA8380}"/>
+                <a16:creationId xmlns:a16="http://schemas.microsoft.com/office/drawing/2014/main" id="{9B023A74-F71B-462F-BFAC-DD11759F6531}"/>
               </a:ext>
             </a:extLst>
           </p:cNvPr>
@@ -5969,7 +5969,7 @@
           <p:cNvPr id="29" name="input-7">
             <a:extLst xmlns:a="http://schemas.openxmlformats.org/drawingml/2006/main">
               <a:ext uri="{FF2B5EF4-FFF2-40B4-BE49-F238E27FC236}">
-                <a16:creationId xmlns:a16="http://schemas.microsoft.com/office/drawing/2014/main" id="{B382E472-DC79-4FCA-9FA5-584833BE2475}"/>
+                <a16:creationId xmlns:a16="http://schemas.microsoft.com/office/drawing/2014/main" id="{34C5F5AF-372E-4646-9568-5C95F2BAB3EE}"/>
               </a:ext>
             </a:extLst>
           </p:cNvPr>
@@ -6000,7 +6000,7 @@
           <p:cNvPr id="30" name="minute-7">
             <a:extLst xmlns:a="http://schemas.openxmlformats.org/drawingml/2006/main">
               <a:ext uri="{FF2B5EF4-FFF2-40B4-BE49-F238E27FC236}">
-                <a16:creationId xmlns:a16="http://schemas.microsoft.com/office/drawing/2014/main" id="{2D5C0F4B-5707-4BBD-ABB0-FB6D8451171E}"/>
+                <a16:creationId xmlns:a16="http://schemas.microsoft.com/office/drawing/2014/main" id="{C5E26298-6AB4-4305-A242-282D4AFDDD99}"/>
               </a:ext>
             </a:extLst>
           </p:cNvPr>
@@ -6058,7 +6058,7 @@
           <p:cNvPr id="31" name="input-8">
             <a:extLst xmlns:a="http://schemas.openxmlformats.org/drawingml/2006/main">
               <a:ext uri="{FF2B5EF4-FFF2-40B4-BE49-F238E27FC236}">
-                <a16:creationId xmlns:a16="http://schemas.microsoft.com/office/drawing/2014/main" id="{E61B9A16-1209-4744-B395-89A61F43435A}"/>
+                <a16:creationId xmlns:a16="http://schemas.microsoft.com/office/drawing/2014/main" id="{2ABB75BC-B65A-438A-BB00-238F7C7C77C8}"/>
               </a:ext>
             </a:extLst>
           </p:cNvPr>
@@ -6089,7 +6089,7 @@
           <p:cNvPr id="32" name="minute-8">
             <a:extLst xmlns:a="http://schemas.openxmlformats.org/drawingml/2006/main">
               <a:ext uri="{FF2B5EF4-FFF2-40B4-BE49-F238E27FC236}">
-                <a16:creationId xmlns:a16="http://schemas.microsoft.com/office/drawing/2014/main" id="{208ECD8C-28FB-4DB9-A689-2232AB5A1CDA}"/>
+                <a16:creationId xmlns:a16="http://schemas.microsoft.com/office/drawing/2014/main" id="{030A158D-63FB-44A7-B928-5D0C42B3F05F}"/>
               </a:ext>
             </a:extLst>
           </p:cNvPr>
@@ -6147,7 +6147,7 @@
           <p:cNvPr id="33" name="input-9">
             <a:extLst xmlns:a="http://schemas.openxmlformats.org/drawingml/2006/main">
               <a:ext uri="{FF2B5EF4-FFF2-40B4-BE49-F238E27FC236}">
-                <a16:creationId xmlns:a16="http://schemas.microsoft.com/office/drawing/2014/main" id="{EE7A1647-BDA5-4FE3-80E4-8D0BA21F8708}"/>
+                <a16:creationId xmlns:a16="http://schemas.microsoft.com/office/drawing/2014/main" id="{45BE156C-2315-41B3-AD4A-0D4EA669BB0C}"/>
               </a:ext>
             </a:extLst>
           </p:cNvPr>
@@ -6178,7 +6178,7 @@
           <p:cNvPr id="34" name="minute-9">
             <a:extLst xmlns:a="http://schemas.openxmlformats.org/drawingml/2006/main">
               <a:ext uri="{FF2B5EF4-FFF2-40B4-BE49-F238E27FC236}">
-                <a16:creationId xmlns:a16="http://schemas.microsoft.com/office/drawing/2014/main" id="{3F3A3364-FEDD-4E40-8729-6BDCD6E84E98}"/>
+                <a16:creationId xmlns:a16="http://schemas.microsoft.com/office/drawing/2014/main" id="{3E3C21C0-B8D7-4E94-8384-2F20255120F8}"/>
               </a:ext>
             </a:extLst>
           </p:cNvPr>
@@ -6236,7 +6236,7 @@
           <p:cNvPr id="35" name="input-10">
             <a:extLst xmlns:a="http://schemas.openxmlformats.org/drawingml/2006/main">
               <a:ext uri="{FF2B5EF4-FFF2-40B4-BE49-F238E27FC236}">
-                <a16:creationId xmlns:a16="http://schemas.microsoft.com/office/drawing/2014/main" id="{878493E5-DC2E-4767-BDAB-0A8715D14DCC}"/>
+                <a16:creationId xmlns:a16="http://schemas.microsoft.com/office/drawing/2014/main" id="{B5743F84-66BD-4229-851C-854CFC4A6272}"/>
               </a:ext>
             </a:extLst>
           </p:cNvPr>
@@ -6267,7 +6267,7 @@
           <p:cNvPr id="36" name="minute-10">
             <a:extLst xmlns:a="http://schemas.openxmlformats.org/drawingml/2006/main">
               <a:ext uri="{FF2B5EF4-FFF2-40B4-BE49-F238E27FC236}">
-                <a16:creationId xmlns:a16="http://schemas.microsoft.com/office/drawing/2014/main" id="{16AA224B-6F33-4F81-8D86-9D25E19F963C}"/>
+                <a16:creationId xmlns:a16="http://schemas.microsoft.com/office/drawing/2014/main" id="{97C82175-EB85-46EF-B89E-2FC4DD599212}"/>
               </a:ext>
             </a:extLst>
           </p:cNvPr>
@@ -6325,7 +6325,7 @@
           <p:cNvPr id="37" name="retained-10">
             <a:extLst xmlns:a="http://schemas.openxmlformats.org/drawingml/2006/main">
               <a:ext uri="{FF2B5EF4-FFF2-40B4-BE49-F238E27FC236}">
-                <a16:creationId xmlns:a16="http://schemas.microsoft.com/office/drawing/2014/main" id="{DCAD5104-2C6C-4EDC-B88B-D19305FB5385}"/>
+                <a16:creationId xmlns:a16="http://schemas.microsoft.com/office/drawing/2014/main" id="{7447CB29-BEE7-40CF-98E1-BE85AC49712E}"/>
               </a:ext>
             </a:extLst>
           </p:cNvPr>
@@ -6383,7 +6383,7 @@
           <p:cNvPr id="39" name="input-11">
             <a:extLst xmlns:a="http://schemas.openxmlformats.org/drawingml/2006/main">
               <a:ext uri="{FF2B5EF4-FFF2-40B4-BE49-F238E27FC236}">
-                <a16:creationId xmlns:a16="http://schemas.microsoft.com/office/drawing/2014/main" id="{0844FA5A-C7A1-4916-9E9E-60EFFE449182}"/>
+                <a16:creationId xmlns:a16="http://schemas.microsoft.com/office/drawing/2014/main" id="{57CD2F03-5A37-41B4-9FCB-BB6A58698EDB}"/>
               </a:ext>
             </a:extLst>
           </p:cNvPr>
@@ -6414,7 +6414,7 @@
           <p:cNvPr id="40" name="minute-11">
             <a:extLst xmlns:a="http://schemas.openxmlformats.org/drawingml/2006/main">
               <a:ext uri="{FF2B5EF4-FFF2-40B4-BE49-F238E27FC236}">
-                <a16:creationId xmlns:a16="http://schemas.microsoft.com/office/drawing/2014/main" id="{CC76DB99-C936-43BF-82CB-FF1B1466F9B9}"/>
+                <a16:creationId xmlns:a16="http://schemas.microsoft.com/office/drawing/2014/main" id="{777B0460-442C-47F4-99D2-A5A19C3986A8}"/>
               </a:ext>
             </a:extLst>
           </p:cNvPr>
@@ -6472,7 +6472,7 @@
           <p:cNvPr id="41" name="input-12">
             <a:extLst xmlns:a="http://schemas.openxmlformats.org/drawingml/2006/main">
               <a:ext uri="{FF2B5EF4-FFF2-40B4-BE49-F238E27FC236}">
-                <a16:creationId xmlns:a16="http://schemas.microsoft.com/office/drawing/2014/main" id="{81704F39-36C7-4F5D-BD81-7D23EDE02DC3}"/>
+                <a16:creationId xmlns:a16="http://schemas.microsoft.com/office/drawing/2014/main" id="{9C48AAF3-CE1A-4E00-98D6-23345C580F2F}"/>
               </a:ext>
             </a:extLst>
           </p:cNvPr>
@@ -6503,7 +6503,7 @@
           <p:cNvPr id="42" name="minute-12">
             <a:extLst xmlns:a="http://schemas.openxmlformats.org/drawingml/2006/main">
               <a:ext uri="{FF2B5EF4-FFF2-40B4-BE49-F238E27FC236}">
-                <a16:creationId xmlns:a16="http://schemas.microsoft.com/office/drawing/2014/main" id="{6C7F1E4F-085F-4EB6-8817-96D6CE6BE161}"/>
+                <a16:creationId xmlns:a16="http://schemas.microsoft.com/office/drawing/2014/main" id="{88CAD8D8-15C8-4E8B-B4CC-EECDE61B747A}"/>
               </a:ext>
             </a:extLst>
           </p:cNvPr>
@@ -6561,7 +6561,7 @@
           <p:cNvPr id="43" name="axis-unit">
             <a:extLst xmlns:a="http://schemas.openxmlformats.org/drawingml/2006/main">
               <a:ext uri="{FF2B5EF4-FFF2-40B4-BE49-F238E27FC236}">
-                <a16:creationId xmlns:a16="http://schemas.microsoft.com/office/drawing/2014/main" id="{6E1919AF-2436-418E-A3A1-9968D174272B}"/>
+                <a16:creationId xmlns:a16="http://schemas.microsoft.com/office/drawing/2014/main" id="{26E5015F-6A62-47B7-820E-CD73BD9F3A2B}"/>
               </a:ext>
             </a:extLst>
           </p:cNvPr>
@@ -6619,7 +6619,7 @@
           <p:cNvPr id="44" name="arrow-meaning">
             <a:extLst xmlns:a="http://schemas.openxmlformats.org/drawingml/2006/main">
               <a:ext uri="{FF2B5EF4-FFF2-40B4-BE49-F238E27FC236}">
-                <a16:creationId xmlns:a16="http://schemas.microsoft.com/office/drawing/2014/main" id="{543CFC32-CC90-4D76-99F0-B1538B8C7397}"/>
+                <a16:creationId xmlns:a16="http://schemas.microsoft.com/office/drawing/2014/main" id="{ECCF2DD9-021D-4A54-A8E9-06B11021898F}"/>
               </a:ext>
             </a:extLst>
           </p:cNvPr>
@@ -6677,7 +6677,7 @@
           <p:cNvPr id="45" name="source-note">
             <a:extLst xmlns:a="http://schemas.openxmlformats.org/drawingml/2006/main">
               <a:ext uri="{FF2B5EF4-FFF2-40B4-BE49-F238E27FC236}">
-                <a16:creationId xmlns:a16="http://schemas.microsoft.com/office/drawing/2014/main" id="{AB706DFE-0FB0-48CC-A83F-96880211C335}"/>
+                <a16:creationId xmlns:a16="http://schemas.microsoft.com/office/drawing/2014/main" id="{9CFCADFE-DFF5-4003-8A48-A6931758B3D3}"/>
               </a:ext>
             </a:extLst>
           </p:cNvPr>
@@ -6735,7 +6735,7 @@
           <p:cNvPr id="46" name="page-reference">
             <a:extLst xmlns:a="http://schemas.openxmlformats.org/drawingml/2006/main">
               <a:ext uri="{FF2B5EF4-FFF2-40B4-BE49-F238E27FC236}">
-                <a16:creationId xmlns:a16="http://schemas.microsoft.com/office/drawing/2014/main" id="{8520B2F2-E973-4CE1-8D74-170000086AB4}"/>
+                <a16:creationId xmlns:a16="http://schemas.microsoft.com/office/drawing/2014/main" id="{3BC9D3AE-2010-4D86-B98B-7E0CE721E6D1}"/>
               </a:ext>
             </a:extLst>
           </p:cNvPr>
@@ -6791,7 +6791,7 @@
     </p:spTree>
     <p:extLst>
       <p:ext uri="{BB962C8B-B14F-4D97-AF65-F5344CB8AC3E}">
-        <p14:creationId xmlns:p14="http://schemas.microsoft.com/office/powerpoint/2010/main" val="2100156097"/>
+        <p14:creationId xmlns:p14="http://schemas.microsoft.com/office/powerpoint/2010/main" val="458776401"/>
       </p:ext>
     </p:extLst>
   </p:cSld>
@@ -6822,7 +6822,7 @@
           <p:cNvPr id="15" name="footer-line">
             <a:extLst xmlns:a="http://schemas.openxmlformats.org/drawingml/2006/main">
               <a:ext uri="{FF2B5EF4-FFF2-40B4-BE49-F238E27FC236}">
-                <a16:creationId xmlns:a16="http://schemas.microsoft.com/office/drawing/2014/main" id="{E1C12BEF-8A63-4221-9669-2D2986D8B6BC}"/>
+                <a16:creationId xmlns:a16="http://schemas.microsoft.com/office/drawing/2014/main" id="{3BD7633A-928D-45DB-A2EB-AD01BAF92796}"/>
               </a:ext>
             </a:extLst>
           </p:cNvPr>
@@ -6857,7 +6857,7 @@
           <p:nvPr/>
         </p:nvPicPr>
         <p:blipFill>
-          <a:blip xmlns:r="http://schemas.openxmlformats.org/officeDocument/2006/relationships" xmlns:a="http://schemas.openxmlformats.org/drawingml/2006/main" r:embed="Rff5a6015d2034b2e"/>
+          <a:blip xmlns:r="http://schemas.openxmlformats.org/officeDocument/2006/relationships" xmlns:a="http://schemas.openxmlformats.org/drawingml/2006/main" r:embed="Rc8aea665ea9b4bd6"/>
           <a:stretch xmlns:a="http://schemas.openxmlformats.org/drawingml/2006/main"/>
         </p:blipFill>
         <p:spPr>
@@ -6875,7 +6875,7 @@
           <p:cNvPr id="3" name="page">
             <a:extLst xmlns:a="http://schemas.openxmlformats.org/drawingml/2006/main">
               <a:ext uri="{FF2B5EF4-FFF2-40B4-BE49-F238E27FC236}">
-                <a16:creationId xmlns:a16="http://schemas.microsoft.com/office/drawing/2014/main" id="{CD8BDB91-D142-40FC-84F8-726FA449E2E1}"/>
+                <a16:creationId xmlns:a16="http://schemas.microsoft.com/office/drawing/2014/main" id="{5D9EAB48-0891-4328-B278-7F5F44F9784F}"/>
               </a:ext>
             </a:extLst>
           </p:cNvPr>
@@ -6933,7 +6933,7 @@
           <p:cNvPr id="4" name="fictional-disclosure">
             <a:extLst xmlns:a="http://schemas.openxmlformats.org/drawingml/2006/main">
               <a:ext uri="{FF2B5EF4-FFF2-40B4-BE49-F238E27FC236}">
-                <a16:creationId xmlns:a16="http://schemas.microsoft.com/office/drawing/2014/main" id="{EEF31DD0-9C4F-4A16-865F-39130CD2C2A1}"/>
+                <a16:creationId xmlns:a16="http://schemas.microsoft.com/office/drawing/2014/main" id="{14CD8C17-925F-4EF7-9116-B52BD703A638}"/>
               </a:ext>
             </a:extLst>
           </p:cNvPr>
@@ -6991,7 +6991,7 @@
           <p:cNvPr id="5" name="running-chapter-6">
             <a:extLst xmlns:a="http://schemas.openxmlformats.org/drawingml/2006/main">
               <a:ext uri="{FF2B5EF4-FFF2-40B4-BE49-F238E27FC236}">
-                <a16:creationId xmlns:a16="http://schemas.microsoft.com/office/drawing/2014/main" id="{FEC1C188-F101-4023-A0CF-937F1280629B}"/>
+                <a16:creationId xmlns:a16="http://schemas.microsoft.com/office/drawing/2014/main" id="{C9A418BD-F310-43D7-94A9-132CEBDD092C}"/>
               </a:ext>
             </a:extLst>
           </p:cNvPr>
@@ -7049,7 +7049,7 @@
           <p:cNvPr id="6" name="running-title-6">
             <a:extLst xmlns:a="http://schemas.openxmlformats.org/drawingml/2006/main">
               <a:ext uri="{FF2B5EF4-FFF2-40B4-BE49-F238E27FC236}">
-                <a16:creationId xmlns:a16="http://schemas.microsoft.com/office/drawing/2014/main" id="{57527F54-78DD-4349-8B38-D54CDA4E689C}"/>
+                <a16:creationId xmlns:a16="http://schemas.microsoft.com/office/drawing/2014/main" id="{A8E13E9D-40B6-4C0B-8FD0-A425DC214316}"/>
               </a:ext>
             </a:extLst>
           </p:cNvPr>
@@ -7107,7 +7107,7 @@
           <p:cNvPr id="7" name="title">
             <a:extLst xmlns:a="http://schemas.openxmlformats.org/drawingml/2006/main">
               <a:ext uri="{FF2B5EF4-FFF2-40B4-BE49-F238E27FC236}">
-                <a16:creationId xmlns:a16="http://schemas.microsoft.com/office/drawing/2014/main" id="{30FD4D1D-E703-4B8C-A10F-7C51628EAD70}"/>
+                <a16:creationId xmlns:a16="http://schemas.microsoft.com/office/drawing/2014/main" id="{A42752C1-8141-4B84-A82F-620406966C90}"/>
               </a:ext>
             </a:extLst>
           </p:cNvPr>
@@ -7165,7 +7165,7 @@
           <p:cNvPr id="8" name="message">
             <a:extLst xmlns:a="http://schemas.openxmlformats.org/drawingml/2006/main">
               <a:ext uri="{FF2B5EF4-FFF2-40B4-BE49-F238E27FC236}">
-                <a16:creationId xmlns:a16="http://schemas.microsoft.com/office/drawing/2014/main" id="{430A116E-0C0C-4EF3-9F9C-F2B52C0E06E4}"/>
+                <a16:creationId xmlns:a16="http://schemas.microsoft.com/office/drawing/2014/main" id="{1C7710A1-DA06-4584-B24D-64427DBE046E}"/>
               </a:ext>
             </a:extLst>
           </p:cNvPr>
@@ -7230,7 +7230,7 @@
         </p:xfrm>
         <a:graphic xmlns:a="http://schemas.openxmlformats.org/drawingml/2006/main">
           <a:graphicData uri="http://schemas.openxmlformats.org/drawingml/2006/chart">
-            <c:chart xmlns:r="http://schemas.openxmlformats.org/officeDocument/2006/relationships" xmlns:c="http://schemas.openxmlformats.org/drawingml/2006/chart" r:id="Rf543687b78ea4063"/>
+            <c:chart xmlns:r="http://schemas.openxmlformats.org/officeDocument/2006/relationships" xmlns:c="http://schemas.openxmlformats.org/drawingml/2006/chart" r:id="R326fbe63a74c4c34"/>
           </a:graphicData>
         </a:graphic>
       </p:graphicFrame>
@@ -7239,7 +7239,7 @@
           <p:cNvPr id="10" name="maximum-label">
             <a:extLst xmlns:a="http://schemas.openxmlformats.org/drawingml/2006/main">
               <a:ext uri="{FF2B5EF4-FFF2-40B4-BE49-F238E27FC236}">
-                <a16:creationId xmlns:a16="http://schemas.microsoft.com/office/drawing/2014/main" id="{E3D40DB3-98CE-4CBF-A9B8-F0C9EFCB0C1F}"/>
+                <a16:creationId xmlns:a16="http://schemas.microsoft.com/office/drawing/2014/main" id="{60492021-5ECB-4769-8202-CAF39105AA7C}"/>
               </a:ext>
             </a:extLst>
           </p:cNvPr>
@@ -7297,7 +7297,7 @@
           <p:cNvPr id="11" name="all-max">
             <a:extLst xmlns:a="http://schemas.openxmlformats.org/drawingml/2006/main">
               <a:ext uri="{FF2B5EF4-FFF2-40B4-BE49-F238E27FC236}">
-                <a16:creationId xmlns:a16="http://schemas.microsoft.com/office/drawing/2014/main" id="{AF0B4DD4-DFA6-485E-A736-2158875006EA}"/>
+                <a16:creationId xmlns:a16="http://schemas.microsoft.com/office/drawing/2014/main" id="{16B77EF2-E10F-4F6D-B98A-57FD18195D77}"/>
               </a:ext>
             </a:extLst>
           </p:cNvPr>
@@ -7378,7 +7378,7 @@
           <p:cNvPr id="12" name="kept-max">
             <a:extLst xmlns:a="http://schemas.openxmlformats.org/drawingml/2006/main">
               <a:ext uri="{FF2B5EF4-FFF2-40B4-BE49-F238E27FC236}">
-                <a16:creationId xmlns:a16="http://schemas.microsoft.com/office/drawing/2014/main" id="{E49E125F-A346-46A6-B343-83A74B0E204E}"/>
+                <a16:creationId xmlns:a16="http://schemas.microsoft.com/office/drawing/2014/main" id="{BE3705AD-FEF5-41F0-8D22-EC6FE1377DCB}"/>
               </a:ext>
             </a:extLst>
           </p:cNvPr>
@@ -7459,7 +7459,7 @@
           <p:cNvPr id="13" name="condition">
             <a:extLst xmlns:a="http://schemas.openxmlformats.org/drawingml/2006/main">
               <a:ext uri="{FF2B5EF4-FFF2-40B4-BE49-F238E27FC236}">
-                <a16:creationId xmlns:a16="http://schemas.microsoft.com/office/drawing/2014/main" id="{BF0B51A0-39A5-4C63-9ACE-ACB966323C12}"/>
+                <a16:creationId xmlns:a16="http://schemas.microsoft.com/office/drawing/2014/main" id="{714756F9-AA1E-45E3-92F6-E01C4E420DEE}"/>
               </a:ext>
             </a:extLst>
           </p:cNvPr>
@@ -7517,7 +7517,7 @@
           <p:cNvPr id="14" name="page-reference">
             <a:extLst xmlns:a="http://schemas.openxmlformats.org/drawingml/2006/main">
               <a:ext uri="{FF2B5EF4-FFF2-40B4-BE49-F238E27FC236}">
-                <a16:creationId xmlns:a16="http://schemas.microsoft.com/office/drawing/2014/main" id="{B2325127-C7E8-44C9-8B6E-E2903C3792DE}"/>
+                <a16:creationId xmlns:a16="http://schemas.microsoft.com/office/drawing/2014/main" id="{1E2D8D7A-4995-4024-9515-E31392D6A967}"/>
               </a:ext>
             </a:extLst>
           </p:cNvPr>
@@ -7573,7 +7573,7 @@
     </p:spTree>
     <p:extLst>
       <p:ext uri="{BB962C8B-B14F-4D97-AF65-F5344CB8AC3E}">
-        <p14:creationId xmlns:p14="http://schemas.microsoft.com/office/powerpoint/2010/main" val="1042603017"/>
+        <p14:creationId xmlns:p14="http://schemas.microsoft.com/office/powerpoint/2010/main" val="451810699"/>
       </p:ext>
     </p:extLst>
   </p:cSld>
@@ -7604,7 +7604,7 @@
           <p:cNvPr id="12" name="footer-line">
             <a:extLst xmlns:a="http://schemas.openxmlformats.org/drawingml/2006/main">
               <a:ext uri="{FF2B5EF4-FFF2-40B4-BE49-F238E27FC236}">
-                <a16:creationId xmlns:a16="http://schemas.microsoft.com/office/drawing/2014/main" id="{E73201DD-DFCB-4ABD-A04E-94DAF4C477FE}"/>
+                <a16:creationId xmlns:a16="http://schemas.microsoft.com/office/drawing/2014/main" id="{3DE56213-2E5D-4836-A834-D67CBD4561E8}"/>
               </a:ext>
             </a:extLst>
           </p:cNvPr>
@@ -7639,7 +7639,7 @@
           <p:nvPr/>
         </p:nvPicPr>
         <p:blipFill>
-          <a:blip xmlns:r="http://schemas.openxmlformats.org/officeDocument/2006/relationships" xmlns:a="http://schemas.openxmlformats.org/drawingml/2006/main" r:embed="R9f41ed48425141e7"/>
+          <a:blip xmlns:r="http://schemas.openxmlformats.org/officeDocument/2006/relationships" xmlns:a="http://schemas.openxmlformats.org/drawingml/2006/main" r:embed="R5bb134d10283475c"/>
           <a:stretch xmlns:a="http://schemas.openxmlformats.org/drawingml/2006/main"/>
         </p:blipFill>
         <p:spPr>
@@ -7657,7 +7657,7 @@
           <p:cNvPr id="3" name="page">
             <a:extLst xmlns:a="http://schemas.openxmlformats.org/drawingml/2006/main">
               <a:ext uri="{FF2B5EF4-FFF2-40B4-BE49-F238E27FC236}">
-                <a16:creationId xmlns:a16="http://schemas.microsoft.com/office/drawing/2014/main" id="{6BE37E84-827C-4643-A611-F02FF40BBDF6}"/>
+                <a16:creationId xmlns:a16="http://schemas.microsoft.com/office/drawing/2014/main" id="{FBA2F4A0-CDDB-4050-929B-F63F3D98D802}"/>
               </a:ext>
             </a:extLst>
           </p:cNvPr>
@@ -7715,7 +7715,7 @@
           <p:cNvPr id="4" name="fictional-disclosure">
             <a:extLst xmlns:a="http://schemas.openxmlformats.org/drawingml/2006/main">
               <a:ext uri="{FF2B5EF4-FFF2-40B4-BE49-F238E27FC236}">
-                <a16:creationId xmlns:a16="http://schemas.microsoft.com/office/drawing/2014/main" id="{BD0AB5BD-9D7B-4A18-A1DB-229A0905B456}"/>
+                <a16:creationId xmlns:a16="http://schemas.microsoft.com/office/drawing/2014/main" id="{2F85D408-7271-45DE-8BB9-B3201F960030}"/>
               </a:ext>
             </a:extLst>
           </p:cNvPr>
@@ -7773,7 +7773,7 @@
           <p:cNvPr id="5" name="running-chapter-7">
             <a:extLst xmlns:a="http://schemas.openxmlformats.org/drawingml/2006/main">
               <a:ext uri="{FF2B5EF4-FFF2-40B4-BE49-F238E27FC236}">
-                <a16:creationId xmlns:a16="http://schemas.microsoft.com/office/drawing/2014/main" id="{BE1C479F-2725-4B37-B065-D6791332D8CA}"/>
+                <a16:creationId xmlns:a16="http://schemas.microsoft.com/office/drawing/2014/main" id="{1B6348E1-A2AC-40D4-AC06-0302385EC49C}"/>
               </a:ext>
             </a:extLst>
           </p:cNvPr>
@@ -7831,7 +7831,7 @@
           <p:cNvPr id="6" name="running-title-7">
             <a:extLst xmlns:a="http://schemas.openxmlformats.org/drawingml/2006/main">
               <a:ext uri="{FF2B5EF4-FFF2-40B4-BE49-F238E27FC236}">
-                <a16:creationId xmlns:a16="http://schemas.microsoft.com/office/drawing/2014/main" id="{8BB7C9A6-83DA-4BF9-AE4E-61AE3418E256}"/>
+                <a16:creationId xmlns:a16="http://schemas.microsoft.com/office/drawing/2014/main" id="{73DE0CE4-F36A-4C10-8A06-4792C6607044}"/>
               </a:ext>
             </a:extLst>
           </p:cNvPr>
@@ -7889,7 +7889,7 @@
           <p:cNvPr id="7" name="title">
             <a:extLst xmlns:a="http://schemas.openxmlformats.org/drawingml/2006/main">
               <a:ext uri="{FF2B5EF4-FFF2-40B4-BE49-F238E27FC236}">
-                <a16:creationId xmlns:a16="http://schemas.microsoft.com/office/drawing/2014/main" id="{AD927420-FE13-4C0E-9801-1959F952876C}"/>
+                <a16:creationId xmlns:a16="http://schemas.microsoft.com/office/drawing/2014/main" id="{7D8276D5-F619-4EE0-A6BE-F07D8477495C}"/>
               </a:ext>
             </a:extLst>
           </p:cNvPr>
@@ -7947,7 +7947,7 @@
           <p:cNvPr id="8" name="message">
             <a:extLst xmlns:a="http://schemas.openxmlformats.org/drawingml/2006/main">
               <a:ext uri="{FF2B5EF4-FFF2-40B4-BE49-F238E27FC236}">
-                <a16:creationId xmlns:a16="http://schemas.microsoft.com/office/drawing/2014/main" id="{349EA91B-E58A-420E-9B70-CD6D8B66F221}"/>
+                <a16:creationId xmlns:a16="http://schemas.microsoft.com/office/drawing/2014/main" id="{575549A4-1993-42B2-A6DD-28B39F7B2E2E}"/>
               </a:ext>
             </a:extLst>
           </p:cNvPr>
@@ -8336,7 +8336,7 @@
           <p:cNvPr id="10" name="scope">
             <a:extLst xmlns:a="http://schemas.openxmlformats.org/drawingml/2006/main">
               <a:ext uri="{FF2B5EF4-FFF2-40B4-BE49-F238E27FC236}">
-                <a16:creationId xmlns:a16="http://schemas.microsoft.com/office/drawing/2014/main" id="{C981BC55-1633-479C-A25D-36F708011BBC}"/>
+                <a16:creationId xmlns:a16="http://schemas.microsoft.com/office/drawing/2014/main" id="{A556260A-DC57-4398-8608-599E673ACB0D}"/>
               </a:ext>
             </a:extLst>
           </p:cNvPr>
@@ -8394,7 +8394,7 @@
           <p:cNvPr id="11" name="page-reference">
             <a:extLst xmlns:a="http://schemas.openxmlformats.org/drawingml/2006/main">
               <a:ext uri="{FF2B5EF4-FFF2-40B4-BE49-F238E27FC236}">
-                <a16:creationId xmlns:a16="http://schemas.microsoft.com/office/drawing/2014/main" id="{5042B5B5-0225-4655-8BB9-8D3718749478}"/>
+                <a16:creationId xmlns:a16="http://schemas.microsoft.com/office/drawing/2014/main" id="{3D460294-F3B6-4B21-9D8C-784DD0A93864}"/>
               </a:ext>
             </a:extLst>
           </p:cNvPr>
@@ -8450,7 +8450,7 @@
     </p:spTree>
     <p:extLst>
       <p:ext uri="{BB962C8B-B14F-4D97-AF65-F5344CB8AC3E}">
-        <p14:creationId xmlns:p14="http://schemas.microsoft.com/office/powerpoint/2010/main" val="1353474342"/>
+        <p14:creationId xmlns:p14="http://schemas.microsoft.com/office/powerpoint/2010/main" val="1741192396"/>
       </p:ext>
     </p:extLst>
   </p:cSld>
@@ -8481,7 +8481,7 @@
           <p:cNvPr id="21" name="footer-line">
             <a:extLst xmlns:a="http://schemas.openxmlformats.org/drawingml/2006/main">
               <a:ext uri="{FF2B5EF4-FFF2-40B4-BE49-F238E27FC236}">
-                <a16:creationId xmlns:a16="http://schemas.microsoft.com/office/drawing/2014/main" id="{3030BB74-F665-4286-8D83-C3365959132A}"/>
+                <a16:creationId xmlns:a16="http://schemas.microsoft.com/office/drawing/2014/main" id="{3C720CF8-6C7E-4529-B286-1DD6BCB9D043}"/>
               </a:ext>
             </a:extLst>
           </p:cNvPr>
@@ -8516,7 +8516,7 @@
           <p:nvPr/>
         </p:nvPicPr>
         <p:blipFill>
-          <a:blip xmlns:r="http://schemas.openxmlformats.org/officeDocument/2006/relationships" xmlns:a="http://schemas.openxmlformats.org/drawingml/2006/main" r:embed="Re5dc75871b2e454c"/>
+          <a:blip xmlns:r="http://schemas.openxmlformats.org/officeDocument/2006/relationships" xmlns:a="http://schemas.openxmlformats.org/drawingml/2006/main" r:embed="Rb4b30af7d9b74290"/>
           <a:stretch xmlns:a="http://schemas.openxmlformats.org/drawingml/2006/main"/>
         </p:blipFill>
         <p:spPr>
@@ -8534,7 +8534,7 @@
           <p:cNvPr id="3" name="page">
             <a:extLst xmlns:a="http://schemas.openxmlformats.org/drawingml/2006/main">
               <a:ext uri="{FF2B5EF4-FFF2-40B4-BE49-F238E27FC236}">
-                <a16:creationId xmlns:a16="http://schemas.microsoft.com/office/drawing/2014/main" id="{9F6DDA29-E2AC-4A1B-AF01-DE0D49A45899}"/>
+                <a16:creationId xmlns:a16="http://schemas.microsoft.com/office/drawing/2014/main" id="{F33A6DD1-89D9-4C48-9A89-60ECB483336D}"/>
               </a:ext>
             </a:extLst>
           </p:cNvPr>
@@ -8592,7 +8592,7 @@
           <p:cNvPr id="4" name="fictional-disclosure">
             <a:extLst xmlns:a="http://schemas.openxmlformats.org/drawingml/2006/main">
               <a:ext uri="{FF2B5EF4-FFF2-40B4-BE49-F238E27FC236}">
-                <a16:creationId xmlns:a16="http://schemas.microsoft.com/office/drawing/2014/main" id="{2D9EE0FE-8B1B-4146-8CCE-F9135C505137}"/>
+                <a16:creationId xmlns:a16="http://schemas.microsoft.com/office/drawing/2014/main" id="{BAF07CE1-6DC9-46DC-A872-267F61C4AD79}"/>
               </a:ext>
             </a:extLst>
           </p:cNvPr>
@@ -8650,7 +8650,7 @@
           <p:cNvPr id="5" name="running-chapter-8">
             <a:extLst xmlns:a="http://schemas.openxmlformats.org/drawingml/2006/main">
               <a:ext uri="{FF2B5EF4-FFF2-40B4-BE49-F238E27FC236}">
-                <a16:creationId xmlns:a16="http://schemas.microsoft.com/office/drawing/2014/main" id="{AACAB00F-28CB-4784-816E-50AD94916A8E}"/>
+                <a16:creationId xmlns:a16="http://schemas.microsoft.com/office/drawing/2014/main" id="{B0524B17-9E93-4272-B27F-C20FCC348785}"/>
               </a:ext>
             </a:extLst>
           </p:cNvPr>
@@ -8708,7 +8708,7 @@
           <p:cNvPr id="6" name="running-title-8">
             <a:extLst xmlns:a="http://schemas.openxmlformats.org/drawingml/2006/main">
               <a:ext uri="{FF2B5EF4-FFF2-40B4-BE49-F238E27FC236}">
-                <a16:creationId xmlns:a16="http://schemas.microsoft.com/office/drawing/2014/main" id="{F6F9BDF7-020B-4CE0-AD9F-9CD5347C818D}"/>
+                <a16:creationId xmlns:a16="http://schemas.microsoft.com/office/drawing/2014/main" id="{33D6B34A-1DD5-450E-BC47-CC0D225E58F7}"/>
               </a:ext>
             </a:extLst>
           </p:cNvPr>
@@ -8766,7 +8766,7 @@
           <p:cNvPr id="7" name="title">
             <a:extLst xmlns:a="http://schemas.openxmlformats.org/drawingml/2006/main">
               <a:ext uri="{FF2B5EF4-FFF2-40B4-BE49-F238E27FC236}">
-                <a16:creationId xmlns:a16="http://schemas.microsoft.com/office/drawing/2014/main" id="{D8DEC442-7408-4E60-A2F4-B8E79F3FADE1}"/>
+                <a16:creationId xmlns:a16="http://schemas.microsoft.com/office/drawing/2014/main" id="{096BEA23-0C1D-40DF-83EF-536F47F9DA9F}"/>
               </a:ext>
             </a:extLst>
           </p:cNvPr>
@@ -8824,7 +8824,7 @@
           <p:cNvPr id="8" name="message">
             <a:extLst xmlns:a="http://schemas.openxmlformats.org/drawingml/2006/main">
               <a:ext uri="{FF2B5EF4-FFF2-40B4-BE49-F238E27FC236}">
-                <a16:creationId xmlns:a16="http://schemas.microsoft.com/office/drawing/2014/main" id="{A9BED28E-10D4-4276-946E-D373CA40683A}"/>
+                <a16:creationId xmlns:a16="http://schemas.microsoft.com/office/drawing/2014/main" id="{DAF9EDCF-DF1A-4517-BDC9-45E80485DCD9}"/>
               </a:ext>
             </a:extLst>
           </p:cNvPr>
@@ -8882,7 +8882,7 @@
           <p:cNvPr id="9" name="summary-label-0">
             <a:extLst xmlns:a="http://schemas.openxmlformats.org/drawingml/2006/main">
               <a:ext uri="{FF2B5EF4-FFF2-40B4-BE49-F238E27FC236}">
-                <a16:creationId xmlns:a16="http://schemas.microsoft.com/office/drawing/2014/main" id="{7E98C2AB-1815-4608-B389-442566C2C096}"/>
+                <a16:creationId xmlns:a16="http://schemas.microsoft.com/office/drawing/2014/main" id="{3A783194-87A0-4FC0-A82F-82AD6BE591BE}"/>
               </a:ext>
             </a:extLst>
           </p:cNvPr>
@@ -8940,7 +8940,7 @@
           <p:cNvPr id="10" name="summary-body-0">
             <a:extLst xmlns:a="http://schemas.openxmlformats.org/drawingml/2006/main">
               <a:ext uri="{FF2B5EF4-FFF2-40B4-BE49-F238E27FC236}">
-                <a16:creationId xmlns:a16="http://schemas.microsoft.com/office/drawing/2014/main" id="{4295BE24-24EF-4CC0-B6A5-188D78470C69}"/>
+                <a16:creationId xmlns:a16="http://schemas.microsoft.com/office/drawing/2014/main" id="{D082D373-8D65-4ADA-A908-7707102AA784}"/>
               </a:ext>
             </a:extLst>
           </p:cNvPr>
@@ -8998,7 +8998,7 @@
           <p:cNvPr id="11" name="summary-rule-0">
             <a:extLst xmlns:a="http://schemas.openxmlformats.org/drawingml/2006/main">
               <a:ext uri="{FF2B5EF4-FFF2-40B4-BE49-F238E27FC236}">
-                <a16:creationId xmlns:a16="http://schemas.microsoft.com/office/drawing/2014/main" id="{1E058072-7A7B-4112-8D6E-492C5C857EB1}"/>
+                <a16:creationId xmlns:a16="http://schemas.microsoft.com/office/drawing/2014/main" id="{6BE74239-CB43-4247-902C-9C431DA96CDA}"/>
               </a:ext>
             </a:extLst>
           </p:cNvPr>
@@ -9029,7 +9029,7 @@
           <p:cNvPr id="12" name="summary-label-1">
             <a:extLst xmlns:a="http://schemas.openxmlformats.org/drawingml/2006/main">
               <a:ext uri="{FF2B5EF4-FFF2-40B4-BE49-F238E27FC236}">
-                <a16:creationId xmlns:a16="http://schemas.microsoft.com/office/drawing/2014/main" id="{58EC75D8-F37E-4BAB-8D4B-8343A2593FDB}"/>
+                <a16:creationId xmlns:a16="http://schemas.microsoft.com/office/drawing/2014/main" id="{54CBECBF-F31A-4FAE-926B-C9BB96C62518}"/>
               </a:ext>
             </a:extLst>
           </p:cNvPr>
@@ -9087,7 +9087,7 @@
           <p:cNvPr id="13" name="summary-body-1">
             <a:extLst xmlns:a="http://schemas.openxmlformats.org/drawingml/2006/main">
               <a:ext uri="{FF2B5EF4-FFF2-40B4-BE49-F238E27FC236}">
-                <a16:creationId xmlns:a16="http://schemas.microsoft.com/office/drawing/2014/main" id="{A89FD6C2-CE10-4D5C-ADD7-44BF43E90B12}"/>
+                <a16:creationId xmlns:a16="http://schemas.microsoft.com/office/drawing/2014/main" id="{CC1DDDC9-A17A-4665-AC31-E8CF28393BF7}"/>
               </a:ext>
             </a:extLst>
           </p:cNvPr>
@@ -9145,7 +9145,7 @@
           <p:cNvPr id="14" name="summary-rule-1">
             <a:extLst xmlns:a="http://schemas.openxmlformats.org/drawingml/2006/main">
               <a:ext uri="{FF2B5EF4-FFF2-40B4-BE49-F238E27FC236}">
-                <a16:creationId xmlns:a16="http://schemas.microsoft.com/office/drawing/2014/main" id="{2588E751-1078-4859-8D66-74719659E291}"/>
+                <a16:creationId xmlns:a16="http://schemas.microsoft.com/office/drawing/2014/main" id="{9481BB39-1D3C-449E-B443-2ABFE9508CDC}"/>
               </a:ext>
             </a:extLst>
           </p:cNvPr>
@@ -9176,7 +9176,7 @@
           <p:cNvPr id="15" name="summary-label-2">
             <a:extLst xmlns:a="http://schemas.openxmlformats.org/drawingml/2006/main">
               <a:ext uri="{FF2B5EF4-FFF2-40B4-BE49-F238E27FC236}">
-                <a16:creationId xmlns:a16="http://schemas.microsoft.com/office/drawing/2014/main" id="{CE5716D7-3970-4E38-B8F0-4622AD0F5E0E}"/>
+                <a16:creationId xmlns:a16="http://schemas.microsoft.com/office/drawing/2014/main" id="{BB836B7C-AE0C-4891-B2A9-72FFB4D89629}"/>
               </a:ext>
             </a:extLst>
           </p:cNvPr>
@@ -9234,7 +9234,7 @@
           <p:cNvPr id="16" name="summary-body-2">
             <a:extLst xmlns:a="http://schemas.openxmlformats.org/drawingml/2006/main">
               <a:ext uri="{FF2B5EF4-FFF2-40B4-BE49-F238E27FC236}">
-                <a16:creationId xmlns:a16="http://schemas.microsoft.com/office/drawing/2014/main" id="{9A115E20-B80F-4766-8D44-88835B840FFD}"/>
+                <a16:creationId xmlns:a16="http://schemas.microsoft.com/office/drawing/2014/main" id="{E74643D9-08F2-4A67-B3BE-1813AF32B3A0}"/>
               </a:ext>
             </a:extLst>
           </p:cNvPr>
@@ -9315,7 +9315,7 @@
           <p:cNvPr id="17" name="summary-rule-2">
             <a:extLst xmlns:a="http://schemas.openxmlformats.org/drawingml/2006/main">
               <a:ext uri="{FF2B5EF4-FFF2-40B4-BE49-F238E27FC236}">
-                <a16:creationId xmlns:a16="http://schemas.microsoft.com/office/drawing/2014/main" id="{A78A4F94-D6EB-427A-914C-E8175D42AA3F}"/>
+                <a16:creationId xmlns:a16="http://schemas.microsoft.com/office/drawing/2014/main" id="{1202E8F5-5E94-4D3E-B973-833F484FEE3A}"/>
               </a:ext>
             </a:extLst>
           </p:cNvPr>
@@ -9346,7 +9346,7 @@
           <p:cNvPr id="18" name="summary-label-3">
             <a:extLst xmlns:a="http://schemas.openxmlformats.org/drawingml/2006/main">
               <a:ext uri="{FF2B5EF4-FFF2-40B4-BE49-F238E27FC236}">
-                <a16:creationId xmlns:a16="http://schemas.microsoft.com/office/drawing/2014/main" id="{64D37FE4-7EF2-46E3-9B69-5C4144A2E38D}"/>
+                <a16:creationId xmlns:a16="http://schemas.microsoft.com/office/drawing/2014/main" id="{0099D4F0-58E4-4ADF-BC80-ABCD2D4E2DF5}"/>
               </a:ext>
             </a:extLst>
           </p:cNvPr>
@@ -9404,7 +9404,7 @@
           <p:cNvPr id="19" name="summary-body-3">
             <a:extLst xmlns:a="http://schemas.openxmlformats.org/drawingml/2006/main">
               <a:ext uri="{FF2B5EF4-FFF2-40B4-BE49-F238E27FC236}">
-                <a16:creationId xmlns:a16="http://schemas.microsoft.com/office/drawing/2014/main" id="{F9DF062A-ABF3-4065-9C14-3B2801F69E66}"/>
+                <a16:creationId xmlns:a16="http://schemas.microsoft.com/office/drawing/2014/main" id="{E9EFB5F9-7A58-4A6A-A28F-390C3BE19584}"/>
               </a:ext>
             </a:extLst>
           </p:cNvPr>
@@ -9462,7 +9462,7 @@
           <p:cNvPr id="20" name="page-reference">
             <a:extLst xmlns:a="http://schemas.openxmlformats.org/drawingml/2006/main">
               <a:ext uri="{FF2B5EF4-FFF2-40B4-BE49-F238E27FC236}">
-                <a16:creationId xmlns:a16="http://schemas.microsoft.com/office/drawing/2014/main" id="{B389EFFE-AC0C-4C71-8344-F41C3763CFA1}"/>
+                <a16:creationId xmlns:a16="http://schemas.microsoft.com/office/drawing/2014/main" id="{644439A9-F5F2-46F6-BEE2-90666D4B8BD7}"/>
               </a:ext>
             </a:extLst>
           </p:cNvPr>
@@ -9518,7 +9518,7 @@
     </p:spTree>
     <p:extLst>
       <p:ext uri="{BB962C8B-B14F-4D97-AF65-F5344CB8AC3E}">
-        <p14:creationId xmlns:p14="http://schemas.microsoft.com/office/powerpoint/2010/main" val="1031412903"/>
+        <p14:creationId xmlns:p14="http://schemas.microsoft.com/office/powerpoint/2010/main" val="1047302278"/>
       </p:ext>
     </p:extLst>
   </p:cSld>
@@ -9549,7 +9549,7 @@
           <p:cNvPr id="14" name="footer-line">
             <a:extLst xmlns:a="http://schemas.openxmlformats.org/drawingml/2006/main">
               <a:ext uri="{FF2B5EF4-FFF2-40B4-BE49-F238E27FC236}">
-                <a16:creationId xmlns:a16="http://schemas.microsoft.com/office/drawing/2014/main" id="{3CE894FC-3721-4586-9789-801E845BDB7D}"/>
+                <a16:creationId xmlns:a16="http://schemas.microsoft.com/office/drawing/2014/main" id="{446C2032-655E-4B81-8E32-16311C705F15}"/>
               </a:ext>
             </a:extLst>
           </p:cNvPr>
@@ -9584,7 +9584,7 @@
           <p:nvPr/>
         </p:nvPicPr>
         <p:blipFill>
-          <a:blip xmlns:r="http://schemas.openxmlformats.org/officeDocument/2006/relationships" xmlns:a="http://schemas.openxmlformats.org/drawingml/2006/main" r:embed="Rea3aa75ae117487f"/>
+          <a:blip xmlns:r="http://schemas.openxmlformats.org/officeDocument/2006/relationships" xmlns:a="http://schemas.openxmlformats.org/drawingml/2006/main" r:embed="Rd2f1a43922a24b9f"/>
           <a:stretch xmlns:a="http://schemas.openxmlformats.org/drawingml/2006/main"/>
         </p:blipFill>
         <p:spPr>
@@ -9602,7 +9602,7 @@
           <p:cNvPr id="3" name="page">
             <a:extLst xmlns:a="http://schemas.openxmlformats.org/drawingml/2006/main">
               <a:ext uri="{FF2B5EF4-FFF2-40B4-BE49-F238E27FC236}">
-                <a16:creationId xmlns:a16="http://schemas.microsoft.com/office/drawing/2014/main" id="{1E80F92A-EDAC-4D63-AE05-4850D87B1FF6}"/>
+                <a16:creationId xmlns:a16="http://schemas.microsoft.com/office/drawing/2014/main" id="{69C9E50D-0943-42A2-9B0E-4D4E65936D9E}"/>
               </a:ext>
             </a:extLst>
           </p:cNvPr>
@@ -9660,7 +9660,7 @@
           <p:cNvPr id="4" name="fictional-disclosure">
             <a:extLst xmlns:a="http://schemas.openxmlformats.org/drawingml/2006/main">
               <a:ext uri="{FF2B5EF4-FFF2-40B4-BE49-F238E27FC236}">
-                <a16:creationId xmlns:a16="http://schemas.microsoft.com/office/drawing/2014/main" id="{10C95FF9-D45F-4944-86D7-D52BAB30ED37}"/>
+                <a16:creationId xmlns:a16="http://schemas.microsoft.com/office/drawing/2014/main" id="{1211F79A-2AC0-493E-A200-9C24B855D393}"/>
               </a:ext>
             </a:extLst>
           </p:cNvPr>
@@ -9718,7 +9718,7 @@
           <p:cNvPr id="5" name="running-chapter-9">
             <a:extLst xmlns:a="http://schemas.openxmlformats.org/drawingml/2006/main">
               <a:ext uri="{FF2B5EF4-FFF2-40B4-BE49-F238E27FC236}">
-                <a16:creationId xmlns:a16="http://schemas.microsoft.com/office/drawing/2014/main" id="{D360E0F9-080C-4200-BE3B-589116DF85C3}"/>
+                <a16:creationId xmlns:a16="http://schemas.microsoft.com/office/drawing/2014/main" id="{D72064A2-18B3-42DD-8470-66A55F779381}"/>
               </a:ext>
             </a:extLst>
           </p:cNvPr>
@@ -9776,7 +9776,7 @@
           <p:cNvPr id="6" name="running-title-9">
             <a:extLst xmlns:a="http://schemas.openxmlformats.org/drawingml/2006/main">
               <a:ext uri="{FF2B5EF4-FFF2-40B4-BE49-F238E27FC236}">
-                <a16:creationId xmlns:a16="http://schemas.microsoft.com/office/drawing/2014/main" id="{4F7D9D26-1D24-453E-8301-C83F3F2ADDCB}"/>
+                <a16:creationId xmlns:a16="http://schemas.microsoft.com/office/drawing/2014/main" id="{4427A6EA-2D8F-4D31-90F3-286B22A79562}"/>
               </a:ext>
             </a:extLst>
           </p:cNvPr>
@@ -9834,7 +9834,7 @@
           <p:cNvPr id="7" name="final-title">
             <a:extLst xmlns:a="http://schemas.openxmlformats.org/drawingml/2006/main">
               <a:ext uri="{FF2B5EF4-FFF2-40B4-BE49-F238E27FC236}">
-                <a16:creationId xmlns:a16="http://schemas.microsoft.com/office/drawing/2014/main" id="{A7746361-7631-4A4C-9252-B8AC4F4EAB70}"/>
+                <a16:creationId xmlns:a16="http://schemas.microsoft.com/office/drawing/2014/main" id="{0C177179-68C8-4EAA-A5F1-2340E3693D51}"/>
               </a:ext>
             </a:extLst>
           </p:cNvPr>
@@ -9915,7 +9915,7 @@
           <p:cNvPr id="8" name="final-author">
             <a:extLst xmlns:a="http://schemas.openxmlformats.org/drawingml/2006/main">
               <a:ext uri="{FF2B5EF4-FFF2-40B4-BE49-F238E27FC236}">
-                <a16:creationId xmlns:a16="http://schemas.microsoft.com/office/drawing/2014/main" id="{12FF9CAC-4DE0-4633-A0C9-D369D9D4BC10}"/>
+                <a16:creationId xmlns:a16="http://schemas.microsoft.com/office/drawing/2014/main" id="{B89FE76A-4F87-4F93-A8EF-9086F8D5E95A}"/>
               </a:ext>
             </a:extLst>
           </p:cNvPr>
@@ -9973,7 +9973,7 @@
           <p:cNvPr id="9" name="takeaway-0">
             <a:extLst xmlns:a="http://schemas.openxmlformats.org/drawingml/2006/main">
               <a:ext uri="{FF2B5EF4-FFF2-40B4-BE49-F238E27FC236}">
-                <a16:creationId xmlns:a16="http://schemas.microsoft.com/office/drawing/2014/main" id="{E98059D4-00AC-4852-B8D8-2C7937C52C2E}"/>
+                <a16:creationId xmlns:a16="http://schemas.microsoft.com/office/drawing/2014/main" id="{DFAB226A-0318-4F76-8707-CF5DEDF1C23C}"/>
               </a:ext>
             </a:extLst>
           </p:cNvPr>
@@ -10031,7 +10031,7 @@
           <p:cNvPr id="10" name="takeaway-1">
             <a:extLst xmlns:a="http://schemas.openxmlformats.org/drawingml/2006/main">
               <a:ext uri="{FF2B5EF4-FFF2-40B4-BE49-F238E27FC236}">
-                <a16:creationId xmlns:a16="http://schemas.microsoft.com/office/drawing/2014/main" id="{D840E0BB-571F-4AD2-9428-3866B71D5464}"/>
+                <a16:creationId xmlns:a16="http://schemas.microsoft.com/office/drawing/2014/main" id="{694536AA-047D-4A00-A483-EAE08592C6DE}"/>
               </a:ext>
             </a:extLst>
           </p:cNvPr>
@@ -10089,7 +10089,7 @@
           <p:cNvPr id="11" name="takeaway-2">
             <a:extLst xmlns:a="http://schemas.openxmlformats.org/drawingml/2006/main">
               <a:ext uri="{FF2B5EF4-FFF2-40B4-BE49-F238E27FC236}">
-                <a16:creationId xmlns:a16="http://schemas.microsoft.com/office/drawing/2014/main" id="{0CCEA9B9-D25F-4758-8A67-B737243E73FB}"/>
+                <a16:creationId xmlns:a16="http://schemas.microsoft.com/office/drawing/2014/main" id="{147BB775-D783-478C-8E1C-8840A0271B44}"/>
               </a:ext>
             </a:extLst>
           </p:cNvPr>
@@ -10147,7 +10147,7 @@
           <p:cNvPr id="12" name="contact">
             <a:extLst xmlns:a="http://schemas.openxmlformats.org/drawingml/2006/main">
               <a:ext uri="{FF2B5EF4-FFF2-40B4-BE49-F238E27FC236}">
-                <a16:creationId xmlns:a16="http://schemas.microsoft.com/office/drawing/2014/main" id="{5ABB64D1-8E32-4EE3-95E5-A584A17B6A3A}"/>
+                <a16:creationId xmlns:a16="http://schemas.microsoft.com/office/drawing/2014/main" id="{4962575A-14F8-4113-9861-08887EEC412F}"/>
               </a:ext>
             </a:extLst>
           </p:cNvPr>
@@ -10205,7 +10205,7 @@
           <p:cNvPr id="13" name="page-reference">
             <a:extLst xmlns:a="http://schemas.openxmlformats.org/drawingml/2006/main">
               <a:ext uri="{FF2B5EF4-FFF2-40B4-BE49-F238E27FC236}">
-                <a16:creationId xmlns:a16="http://schemas.microsoft.com/office/drawing/2014/main" id="{8D1B4663-FB1B-4270-974F-E96984F6C599}"/>
+                <a16:creationId xmlns:a16="http://schemas.microsoft.com/office/drawing/2014/main" id="{2EF928FA-4F5D-4DF9-B446-5C31FD639A7F}"/>
               </a:ext>
             </a:extLst>
           </p:cNvPr>
@@ -10261,7 +10261,7 @@
     </p:spTree>
     <p:extLst>
       <p:ext uri="{BB962C8B-B14F-4D97-AF65-F5344CB8AC3E}">
-        <p14:creationId xmlns:p14="http://schemas.microsoft.com/office/powerpoint/2010/main" val="1350184314"/>
+        <p14:creationId xmlns:p14="http://schemas.microsoft.com/office/powerpoint/2010/main" val="699565791"/>
       </p:ext>
     </p:extLst>
   </p:cSld>

--- a/assets/visual-reference/cps-layout-reference.pptx
+++ b/assets/visual-reference/cps-layout-reference.pptx
@@ -2,21 +2,21 @@
 <file path=ppt/presentation.xml><?xml version="1.0" encoding="utf-8"?>
 <p:presentation xmlns:p="http://schemas.openxmlformats.org/presentationml/2006/main">
   <p:sldMasterIdLst>
-    <p:sldMasterId xmlns:r="http://schemas.openxmlformats.org/officeDocument/2006/relationships" id="2147483648" r:id="Re6bf419e38d844bd"/>
+    <p:sldMasterId xmlns:r="http://schemas.openxmlformats.org/officeDocument/2006/relationships" id="2147483648" r:id="R1cb855a26ae640dd"/>
   </p:sldMasterIdLst>
   <p:notesMasterIdLst>
-    <p:notesMasterId xmlns:r="http://schemas.openxmlformats.org/officeDocument/2006/relationships" r:id="R1340836cdac34e99"/>
+    <p:notesMasterId xmlns:r="http://schemas.openxmlformats.org/officeDocument/2006/relationships" r:id="R27edcf50700140cb"/>
   </p:notesMasterIdLst>
   <p:sldIdLst>
-    <p:sldId xmlns:r="http://schemas.openxmlformats.org/officeDocument/2006/relationships" id="256" r:id="Rb8f1a4295bbd4f26"/>
-    <p:sldId xmlns:r="http://schemas.openxmlformats.org/officeDocument/2006/relationships" id="257" r:id="R93d130fb76644fc2"/>
-    <p:sldId xmlns:r="http://schemas.openxmlformats.org/officeDocument/2006/relationships" id="258" r:id="R202a4c79e709472c"/>
-    <p:sldId xmlns:r="http://schemas.openxmlformats.org/officeDocument/2006/relationships" id="259" r:id="R9cd8346605ab442a"/>
-    <p:sldId xmlns:r="http://schemas.openxmlformats.org/officeDocument/2006/relationships" id="260" r:id="R6eef603a94634338"/>
-    <p:sldId xmlns:r="http://schemas.openxmlformats.org/officeDocument/2006/relationships" id="261" r:id="Rd178682eff924f69"/>
-    <p:sldId xmlns:r="http://schemas.openxmlformats.org/officeDocument/2006/relationships" id="262" r:id="R7cd4e65357c049bd"/>
-    <p:sldId xmlns:r="http://schemas.openxmlformats.org/officeDocument/2006/relationships" id="263" r:id="R44609e23a46b4da6"/>
-    <p:sldId xmlns:r="http://schemas.openxmlformats.org/officeDocument/2006/relationships" id="264" r:id="R5012543461934058"/>
+    <p:sldId xmlns:r="http://schemas.openxmlformats.org/officeDocument/2006/relationships" id="256" r:id="R2c6bdc85cc8f462c"/>
+    <p:sldId xmlns:r="http://schemas.openxmlformats.org/officeDocument/2006/relationships" id="257" r:id="Rd63364fc0d754c62"/>
+    <p:sldId xmlns:r="http://schemas.openxmlformats.org/officeDocument/2006/relationships" id="258" r:id="R7646583d6eed40dd"/>
+    <p:sldId xmlns:r="http://schemas.openxmlformats.org/officeDocument/2006/relationships" id="259" r:id="Re2a07b6b7c304ae7"/>
+    <p:sldId xmlns:r="http://schemas.openxmlformats.org/officeDocument/2006/relationships" id="260" r:id="Rd1926fc043894c38"/>
+    <p:sldId xmlns:r="http://schemas.openxmlformats.org/officeDocument/2006/relationships" id="261" r:id="R609f32ae4a334ec0"/>
+    <p:sldId xmlns:r="http://schemas.openxmlformats.org/officeDocument/2006/relationships" id="262" r:id="R70f016d1fa4b441c"/>
+    <p:sldId xmlns:r="http://schemas.openxmlformats.org/officeDocument/2006/relationships" id="263" r:id="R4b33f3500ec54468"/>
+    <p:sldId xmlns:r="http://schemas.openxmlformats.org/officeDocument/2006/relationships" id="264" r:id="Redc9ac77ab644295"/>
   </p:sldIdLst>
   <p:sldSz cx="9144000" cy="5143500"/>
   <p:notesSz cx="6858000" cy="9144000"/>
@@ -206,16 +206,16 @@
         <a:srgbClr val="96607D"/>
       </a:folHlink>
     </a:clrScheme>
-    <a:fontScheme name="Office">
+    <a:fontScheme name="">
       <a:majorFont>
-        <a:latin typeface="Calibri Light"/>
-        <a:ea typeface="Calibri Light"/>
-        <a:cs typeface="Calibri Light"/>
+        <a:latin typeface="Aptos"/>
+        <a:ea typeface=""/>
+        <a:cs typeface=""/>
       </a:majorFont>
       <a:minorFont>
-        <a:latin typeface="Calibri"/>
-        <a:ea typeface="Calibri"/>
-        <a:cs typeface="Calibri"/>
+        <a:latin typeface="Aptos"/>
+        <a:ea typeface=""/>
+        <a:cs typeface=""/>
       </a:minorFont>
     </a:fontScheme>
     <a:fmtScheme name="ChatGPT">
@@ -1077,6 +1077,1661 @@
       <p:grpSpPr>
         <a:xfrm xmlns:a="http://schemas.openxmlformats.org/drawingml/2006/main"/>
       </p:grpSpPr>
+      <p:sp>
+        <p:nvSpPr>
+          <p:cNvPr id="3" name="Title">
+            <a:extLst xmlns:a="http://schemas.openxmlformats.org/drawingml/2006/main">
+              <a:ext uri="{FF2B5EF4-FFF2-40B4-BE49-F238E27FC236}">
+                <a16:creationId xmlns:a16="http://schemas.microsoft.com/office/drawing/2014/main" id="{AB67A900-BFF9-43F2-9EDF-0E24AA3062A7}"/>
+              </a:ext>
+            </a:extLst>
+          </p:cNvPr>
+          <p:cNvSpPr>
+            <a:spLocks xmlns:a="http://schemas.openxmlformats.org/drawingml/2006/main" noGrp="1"/>
+          </p:cNvSpPr>
+          <p:nvPr>
+            <p:ph type="title" idx="0"/>
+          </p:nvPr>
+        </p:nvSpPr>
+        <p:spPr>
+          <a:xfrm xmlns:a="http://schemas.openxmlformats.org/drawingml/2006/main">
+            <a:off x="914400" y="1943100"/>
+            <a:ext cx="7315200" cy="742950"/>
+          </a:xfrm>
+          <a:prstGeom xmlns:a="http://schemas.openxmlformats.org/drawingml/2006/main" prst="rect">
+            <a:avLst/>
+          </a:prstGeom>
+          <a:noFill xmlns:a="http://schemas.openxmlformats.org/drawingml/2006/main"/>
+          <a:ln xmlns:a="http://schemas.openxmlformats.org/drawingml/2006/main">
+            <a:noFill/>
+            <a:prstDash val="solid"/>
+          </a:ln>
+        </p:spPr>
+        <p:txBody>
+          <a:bodyPr xmlns:a="http://schemas.openxmlformats.org/drawingml/2006/main" wrap="square" lIns="0" tIns="0" rIns="0" bIns="0" anchor="ctr">
+            <a:normAutofit/>
+          </a:bodyPr>
+          <a:lstStyle xmlns:a="http://schemas.openxmlformats.org/drawingml/2006/main">
+            <a:defPPr algn="ctr">
+              <a:defRPr sz="3600" b="1">
+                <a:solidFill>
+                  <a:schemeClr val="tx1"/>
+                </a:solidFill>
+                <a:latin typeface="+mj-lt"/>
+                <a:ea typeface="+mj-lt"/>
+                <a:cs typeface="+mj-lt"/>
+              </a:defRPr>
+            </a:defPPr>
+            <a:lvl1pPr marL="0" indent="0">
+              <a:lnSpc>
+                <a:spcPct val="110000"/>
+              </a:lnSpc>
+              <a:spcBef>
+                <a:spcPts val="0"/>
+              </a:spcBef>
+              <a:spcAft>
+                <a:spcPts val="0"/>
+              </a:spcAft>
+              <a:buNone/>
+            </a:lvl1pPr>
+            <a:lvl2pPr marL="0" indent="0">
+              <a:lnSpc>
+                <a:spcPct val="110000"/>
+              </a:lnSpc>
+              <a:spcBef>
+                <a:spcPts val="0"/>
+              </a:spcBef>
+              <a:spcAft>
+                <a:spcPts val="0"/>
+              </a:spcAft>
+              <a:buNone/>
+            </a:lvl2pPr>
+            <a:lvl3pPr marL="0" indent="0">
+              <a:lnSpc>
+                <a:spcPct val="110000"/>
+              </a:lnSpc>
+              <a:spcBef>
+                <a:spcPts val="0"/>
+              </a:spcBef>
+              <a:spcAft>
+                <a:spcPts val="0"/>
+              </a:spcAft>
+              <a:buNone/>
+            </a:lvl3pPr>
+            <a:lvl4pPr marL="0" indent="0">
+              <a:lnSpc>
+                <a:spcPct val="110000"/>
+              </a:lnSpc>
+              <a:spcBef>
+                <a:spcPts val="0"/>
+              </a:spcBef>
+              <a:spcAft>
+                <a:spcPts val="0"/>
+              </a:spcAft>
+              <a:buNone/>
+            </a:lvl4pPr>
+            <a:lvl5pPr marL="0" indent="0">
+              <a:lnSpc>
+                <a:spcPct val="110000"/>
+              </a:lnSpc>
+              <a:spcBef>
+                <a:spcPts val="0"/>
+              </a:spcBef>
+              <a:spcAft>
+                <a:spcPts val="0"/>
+              </a:spcAft>
+              <a:buNone/>
+            </a:lvl5pPr>
+            <a:lvl6pPr marL="0" indent="0">
+              <a:lnSpc>
+                <a:spcPct val="110000"/>
+              </a:lnSpc>
+              <a:spcBef>
+                <a:spcPts val="0"/>
+              </a:spcBef>
+              <a:spcAft>
+                <a:spcPts val="0"/>
+              </a:spcAft>
+              <a:buNone/>
+            </a:lvl6pPr>
+            <a:lvl7pPr marL="0" indent="0">
+              <a:lnSpc>
+                <a:spcPct val="110000"/>
+              </a:lnSpc>
+              <a:spcBef>
+                <a:spcPts val="0"/>
+              </a:spcBef>
+              <a:spcAft>
+                <a:spcPts val="0"/>
+              </a:spcAft>
+              <a:buNone/>
+            </a:lvl7pPr>
+            <a:lvl8pPr marL="0" indent="0">
+              <a:lnSpc>
+                <a:spcPct val="110000"/>
+              </a:lnSpc>
+              <a:spcBef>
+                <a:spcPts val="0"/>
+              </a:spcBef>
+              <a:spcAft>
+                <a:spcPts val="0"/>
+              </a:spcAft>
+              <a:buNone/>
+            </a:lvl8pPr>
+            <a:lvl9pPr marL="0" indent="0">
+              <a:lnSpc>
+                <a:spcPct val="110000"/>
+              </a:lnSpc>
+              <a:spcBef>
+                <a:spcPts val="0"/>
+              </a:spcBef>
+              <a:spcAft>
+                <a:spcPts val="0"/>
+              </a:spcAft>
+              <a:buNone/>
+            </a:lvl9pPr>
+          </a:lstStyle>
+          <a:p xmlns:a="http://schemas.openxmlformats.org/drawingml/2006/main"/>
+        </p:txBody>
+      </p:sp>
+      <p:sp>
+        <p:nvSpPr>
+          <p:cNvPr id="2" name="Subtitle">
+            <a:extLst xmlns:a="http://schemas.openxmlformats.org/drawingml/2006/main">
+              <a:ext uri="{FF2B5EF4-FFF2-40B4-BE49-F238E27FC236}">
+                <a16:creationId xmlns:a16="http://schemas.microsoft.com/office/drawing/2014/main" id="{0F2098CF-2B22-470A-9395-E9132C359542}"/>
+              </a:ext>
+            </a:extLst>
+          </p:cNvPr>
+          <p:cNvSpPr>
+            <a:spLocks xmlns:a="http://schemas.openxmlformats.org/drawingml/2006/main" noGrp="1"/>
+          </p:cNvSpPr>
+          <p:nvPr>
+            <p:ph type="subTitle" idx="1"/>
+          </p:nvPr>
+        </p:nvSpPr>
+        <p:spPr>
+          <a:xfrm xmlns:a="http://schemas.openxmlformats.org/drawingml/2006/main">
+            <a:off x="1371600" y="2828925"/>
+            <a:ext cx="6400800" cy="571500"/>
+          </a:xfrm>
+          <a:prstGeom xmlns:a="http://schemas.openxmlformats.org/drawingml/2006/main" prst="rect">
+            <a:avLst/>
+          </a:prstGeom>
+          <a:noFill xmlns:a="http://schemas.openxmlformats.org/drawingml/2006/main"/>
+          <a:ln xmlns:a="http://schemas.openxmlformats.org/drawingml/2006/main">
+            <a:noFill/>
+            <a:prstDash val="solid"/>
+          </a:ln>
+        </p:spPr>
+        <p:txBody>
+          <a:bodyPr xmlns:a="http://schemas.openxmlformats.org/drawingml/2006/main" wrap="square" lIns="0" tIns="0" rIns="0" bIns="0" anchor="ctr">
+            <a:normAutofit/>
+          </a:bodyPr>
+          <a:lstStyle xmlns:a="http://schemas.openxmlformats.org/drawingml/2006/main">
+            <a:defPPr algn="ctr">
+              <a:defRPr sz="1575" b="0">
+                <a:solidFill>
+                  <a:schemeClr val="tx1"/>
+                </a:solidFill>
+                <a:latin typeface="+mn-lt"/>
+                <a:ea typeface="+mn-lt"/>
+                <a:cs typeface="+mn-lt"/>
+              </a:defRPr>
+            </a:defPPr>
+            <a:lvl1pPr marL="0" indent="0">
+              <a:lnSpc>
+                <a:spcPct val="110000"/>
+              </a:lnSpc>
+              <a:spcBef>
+                <a:spcPts val="0"/>
+              </a:spcBef>
+              <a:spcAft>
+                <a:spcPts val="0"/>
+              </a:spcAft>
+              <a:buNone/>
+            </a:lvl1pPr>
+            <a:lvl2pPr marL="0" indent="0">
+              <a:lnSpc>
+                <a:spcPct val="110000"/>
+              </a:lnSpc>
+              <a:spcBef>
+                <a:spcPts val="0"/>
+              </a:spcBef>
+              <a:spcAft>
+                <a:spcPts val="0"/>
+              </a:spcAft>
+              <a:buNone/>
+            </a:lvl2pPr>
+            <a:lvl3pPr marL="0" indent="0">
+              <a:lnSpc>
+                <a:spcPct val="110000"/>
+              </a:lnSpc>
+              <a:spcBef>
+                <a:spcPts val="0"/>
+              </a:spcBef>
+              <a:spcAft>
+                <a:spcPts val="0"/>
+              </a:spcAft>
+              <a:buNone/>
+            </a:lvl3pPr>
+            <a:lvl4pPr marL="0" indent="0">
+              <a:lnSpc>
+                <a:spcPct val="110000"/>
+              </a:lnSpc>
+              <a:spcBef>
+                <a:spcPts val="0"/>
+              </a:spcBef>
+              <a:spcAft>
+                <a:spcPts val="0"/>
+              </a:spcAft>
+              <a:buNone/>
+            </a:lvl4pPr>
+            <a:lvl5pPr marL="0" indent="0">
+              <a:lnSpc>
+                <a:spcPct val="110000"/>
+              </a:lnSpc>
+              <a:spcBef>
+                <a:spcPts val="0"/>
+              </a:spcBef>
+              <a:spcAft>
+                <a:spcPts val="0"/>
+              </a:spcAft>
+              <a:buNone/>
+            </a:lvl5pPr>
+            <a:lvl6pPr marL="0" indent="0">
+              <a:lnSpc>
+                <a:spcPct val="110000"/>
+              </a:lnSpc>
+              <a:spcBef>
+                <a:spcPts val="0"/>
+              </a:spcBef>
+              <a:spcAft>
+                <a:spcPts val="0"/>
+              </a:spcAft>
+              <a:buNone/>
+            </a:lvl6pPr>
+            <a:lvl7pPr marL="0" indent="0">
+              <a:lnSpc>
+                <a:spcPct val="110000"/>
+              </a:lnSpc>
+              <a:spcBef>
+                <a:spcPts val="0"/>
+              </a:spcBef>
+              <a:spcAft>
+                <a:spcPts val="0"/>
+              </a:spcAft>
+              <a:buNone/>
+            </a:lvl7pPr>
+            <a:lvl8pPr marL="0" indent="0">
+              <a:lnSpc>
+                <a:spcPct val="110000"/>
+              </a:lnSpc>
+              <a:spcBef>
+                <a:spcPts val="0"/>
+              </a:spcBef>
+              <a:spcAft>
+                <a:spcPts val="0"/>
+              </a:spcAft>
+              <a:buNone/>
+            </a:lvl8pPr>
+            <a:lvl9pPr marL="0" indent="0">
+              <a:lnSpc>
+                <a:spcPct val="110000"/>
+              </a:lnSpc>
+              <a:spcBef>
+                <a:spcPts val="0"/>
+              </a:spcBef>
+              <a:spcAft>
+                <a:spcPts val="0"/>
+              </a:spcAft>
+              <a:buNone/>
+            </a:lvl9pPr>
+          </a:lstStyle>
+          <a:p xmlns:a="http://schemas.openxmlformats.org/drawingml/2006/main"/>
+        </p:txBody>
+      </p:sp>
+    </p:spTree>
+  </p:cSld>
+</p:sldLayout>
+</file>
+
+<file path=ppt/slideLayouts/slideLayout2.xml><?xml version="1.0" encoding="utf-8"?>
+<p:sldLayout xmlns:p="http://schemas.openxmlformats.org/presentationml/2006/main">
+  <p:cSld name="Section Header">
+    <p:spTree>
+      <p:nvGrpSpPr>
+        <p:cNvPr id="1" name=""/>
+        <p:cNvGrpSpPr/>
+        <p:nvPr/>
+      </p:nvGrpSpPr>
+      <p:grpSpPr>
+        <a:xfrm xmlns:a="http://schemas.openxmlformats.org/drawingml/2006/main"/>
+      </p:grpSpPr>
+      <p:sp>
+        <p:nvSpPr>
+          <p:cNvPr id="2" name="Section title">
+            <a:extLst xmlns:a="http://schemas.openxmlformats.org/drawingml/2006/main">
+              <a:ext uri="{FF2B5EF4-FFF2-40B4-BE49-F238E27FC236}">
+                <a16:creationId xmlns:a16="http://schemas.microsoft.com/office/drawing/2014/main" id="{04654835-1FE2-4C37-98FC-89F8AB2AE05C}"/>
+              </a:ext>
+            </a:extLst>
+          </p:cNvPr>
+          <p:cNvSpPr>
+            <a:spLocks xmlns:a="http://schemas.openxmlformats.org/drawingml/2006/main" noGrp="1"/>
+          </p:cNvSpPr>
+          <p:nvPr>
+            <p:ph type="title" idx="0"/>
+          </p:nvPr>
+        </p:nvSpPr>
+        <p:spPr>
+          <a:xfrm xmlns:a="http://schemas.openxmlformats.org/drawingml/2006/main">
+            <a:off x="914400" y="2143125"/>
+            <a:ext cx="7315200" cy="857250"/>
+          </a:xfrm>
+          <a:prstGeom xmlns:a="http://schemas.openxmlformats.org/drawingml/2006/main" prst="rect">
+            <a:avLst/>
+          </a:prstGeom>
+          <a:noFill xmlns:a="http://schemas.openxmlformats.org/drawingml/2006/main"/>
+          <a:ln xmlns:a="http://schemas.openxmlformats.org/drawingml/2006/main">
+            <a:noFill/>
+            <a:prstDash val="solid"/>
+          </a:ln>
+        </p:spPr>
+        <p:txBody>
+          <a:bodyPr xmlns:a="http://schemas.openxmlformats.org/drawingml/2006/main" wrap="square" lIns="0" tIns="0" rIns="0" bIns="0" anchor="ctr">
+            <a:normAutofit/>
+          </a:bodyPr>
+          <a:lstStyle xmlns:a="http://schemas.openxmlformats.org/drawingml/2006/main">
+            <a:defPPr algn="ctr">
+              <a:defRPr sz="3150" b="1">
+                <a:solidFill>
+                  <a:schemeClr val="tx1"/>
+                </a:solidFill>
+                <a:latin typeface="+mj-lt"/>
+                <a:ea typeface="+mj-lt"/>
+                <a:cs typeface="+mj-lt"/>
+              </a:defRPr>
+            </a:defPPr>
+            <a:lvl1pPr marL="0" indent="0">
+              <a:lnSpc>
+                <a:spcPct val="110000"/>
+              </a:lnSpc>
+              <a:spcBef>
+                <a:spcPts val="0"/>
+              </a:spcBef>
+              <a:spcAft>
+                <a:spcPts val="0"/>
+              </a:spcAft>
+              <a:buNone/>
+            </a:lvl1pPr>
+            <a:lvl2pPr marL="0" indent="0">
+              <a:lnSpc>
+                <a:spcPct val="110000"/>
+              </a:lnSpc>
+              <a:spcBef>
+                <a:spcPts val="0"/>
+              </a:spcBef>
+              <a:spcAft>
+                <a:spcPts val="0"/>
+              </a:spcAft>
+              <a:buNone/>
+            </a:lvl2pPr>
+            <a:lvl3pPr marL="0" indent="0">
+              <a:lnSpc>
+                <a:spcPct val="110000"/>
+              </a:lnSpc>
+              <a:spcBef>
+                <a:spcPts val="0"/>
+              </a:spcBef>
+              <a:spcAft>
+                <a:spcPts val="0"/>
+              </a:spcAft>
+              <a:buNone/>
+            </a:lvl3pPr>
+            <a:lvl4pPr marL="0" indent="0">
+              <a:lnSpc>
+                <a:spcPct val="110000"/>
+              </a:lnSpc>
+              <a:spcBef>
+                <a:spcPts val="0"/>
+              </a:spcBef>
+              <a:spcAft>
+                <a:spcPts val="0"/>
+              </a:spcAft>
+              <a:buNone/>
+            </a:lvl4pPr>
+            <a:lvl5pPr marL="0" indent="0">
+              <a:lnSpc>
+                <a:spcPct val="110000"/>
+              </a:lnSpc>
+              <a:spcBef>
+                <a:spcPts val="0"/>
+              </a:spcBef>
+              <a:spcAft>
+                <a:spcPts val="0"/>
+              </a:spcAft>
+              <a:buNone/>
+            </a:lvl5pPr>
+            <a:lvl6pPr marL="0" indent="0">
+              <a:lnSpc>
+                <a:spcPct val="110000"/>
+              </a:lnSpc>
+              <a:spcBef>
+                <a:spcPts val="0"/>
+              </a:spcBef>
+              <a:spcAft>
+                <a:spcPts val="0"/>
+              </a:spcAft>
+              <a:buNone/>
+            </a:lvl6pPr>
+            <a:lvl7pPr marL="0" indent="0">
+              <a:lnSpc>
+                <a:spcPct val="110000"/>
+              </a:lnSpc>
+              <a:spcBef>
+                <a:spcPts val="0"/>
+              </a:spcBef>
+              <a:spcAft>
+                <a:spcPts val="0"/>
+              </a:spcAft>
+              <a:buNone/>
+            </a:lvl7pPr>
+            <a:lvl8pPr marL="0" indent="0">
+              <a:lnSpc>
+                <a:spcPct val="110000"/>
+              </a:lnSpc>
+              <a:spcBef>
+                <a:spcPts val="0"/>
+              </a:spcBef>
+              <a:spcAft>
+                <a:spcPts val="0"/>
+              </a:spcAft>
+              <a:buNone/>
+            </a:lvl8pPr>
+            <a:lvl9pPr marL="0" indent="0">
+              <a:lnSpc>
+                <a:spcPct val="110000"/>
+              </a:lnSpc>
+              <a:spcBef>
+                <a:spcPts val="0"/>
+              </a:spcBef>
+              <a:spcAft>
+                <a:spcPts val="0"/>
+              </a:spcAft>
+              <a:buNone/>
+            </a:lvl9pPr>
+          </a:lstStyle>
+          <a:p xmlns:a="http://schemas.openxmlformats.org/drawingml/2006/main"/>
+        </p:txBody>
+      </p:sp>
+    </p:spTree>
+  </p:cSld>
+</p:sldLayout>
+</file>
+
+<file path=ppt/slideLayouts/slideLayout3.xml><?xml version="1.0" encoding="utf-8"?>
+<p:sldLayout xmlns:p="http://schemas.openxmlformats.org/presentationml/2006/main">
+  <p:cSld name="Title and Body">
+    <p:spTree>
+      <p:nvGrpSpPr>
+        <p:cNvPr id="1" name=""/>
+        <p:cNvGrpSpPr/>
+        <p:nvPr/>
+      </p:nvGrpSpPr>
+      <p:grpSpPr>
+        <a:xfrm xmlns:a="http://schemas.openxmlformats.org/drawingml/2006/main"/>
+      </p:grpSpPr>
+      <p:sp>
+        <p:nvSpPr>
+          <p:cNvPr id="3" name="Title">
+            <a:extLst xmlns:a="http://schemas.openxmlformats.org/drawingml/2006/main">
+              <a:ext uri="{FF2B5EF4-FFF2-40B4-BE49-F238E27FC236}">
+                <a16:creationId xmlns:a16="http://schemas.microsoft.com/office/drawing/2014/main" id="{ECDF84FB-132C-4921-A1D4-DB02792B22E2}"/>
+              </a:ext>
+            </a:extLst>
+          </p:cNvPr>
+          <p:cNvSpPr>
+            <a:spLocks xmlns:a="http://schemas.openxmlformats.org/drawingml/2006/main" noGrp="1"/>
+          </p:cNvSpPr>
+          <p:nvPr>
+            <p:ph type="title" idx="0"/>
+          </p:nvPr>
+        </p:nvSpPr>
+        <p:spPr>
+          <a:xfrm xmlns:a="http://schemas.openxmlformats.org/drawingml/2006/main">
+            <a:off x="514350" y="400050"/>
+            <a:ext cx="8115300" cy="628650"/>
+          </a:xfrm>
+          <a:prstGeom xmlns:a="http://schemas.openxmlformats.org/drawingml/2006/main" prst="rect">
+            <a:avLst/>
+          </a:prstGeom>
+          <a:noFill xmlns:a="http://schemas.openxmlformats.org/drawingml/2006/main"/>
+          <a:ln xmlns:a="http://schemas.openxmlformats.org/drawingml/2006/main">
+            <a:noFill/>
+            <a:prstDash val="solid"/>
+          </a:ln>
+        </p:spPr>
+        <p:txBody>
+          <a:bodyPr xmlns:a="http://schemas.openxmlformats.org/drawingml/2006/main" wrap="square" lIns="0" tIns="0" rIns="0" bIns="0" anchor="t">
+            <a:normAutofit/>
+          </a:bodyPr>
+          <a:lstStyle xmlns:a="http://schemas.openxmlformats.org/drawingml/2006/main">
+            <a:defPPr algn="l">
+              <a:defRPr sz="2475" b="1">
+                <a:solidFill>
+                  <a:schemeClr val="tx1"/>
+                </a:solidFill>
+                <a:latin typeface="+mj-lt"/>
+                <a:ea typeface="+mj-lt"/>
+                <a:cs typeface="+mj-lt"/>
+              </a:defRPr>
+            </a:defPPr>
+            <a:lvl1pPr marL="0" indent="0">
+              <a:lnSpc>
+                <a:spcPct val="110000"/>
+              </a:lnSpc>
+              <a:spcBef>
+                <a:spcPts val="0"/>
+              </a:spcBef>
+              <a:spcAft>
+                <a:spcPts val="0"/>
+              </a:spcAft>
+              <a:buNone/>
+            </a:lvl1pPr>
+            <a:lvl2pPr marL="0" indent="0">
+              <a:lnSpc>
+                <a:spcPct val="110000"/>
+              </a:lnSpc>
+              <a:spcBef>
+                <a:spcPts val="0"/>
+              </a:spcBef>
+              <a:spcAft>
+                <a:spcPts val="0"/>
+              </a:spcAft>
+              <a:buNone/>
+            </a:lvl2pPr>
+            <a:lvl3pPr marL="0" indent="0">
+              <a:lnSpc>
+                <a:spcPct val="110000"/>
+              </a:lnSpc>
+              <a:spcBef>
+                <a:spcPts val="0"/>
+              </a:spcBef>
+              <a:spcAft>
+                <a:spcPts val="0"/>
+              </a:spcAft>
+              <a:buNone/>
+            </a:lvl3pPr>
+            <a:lvl4pPr marL="0" indent="0">
+              <a:lnSpc>
+                <a:spcPct val="110000"/>
+              </a:lnSpc>
+              <a:spcBef>
+                <a:spcPts val="0"/>
+              </a:spcBef>
+              <a:spcAft>
+                <a:spcPts val="0"/>
+              </a:spcAft>
+              <a:buNone/>
+            </a:lvl4pPr>
+            <a:lvl5pPr marL="0" indent="0">
+              <a:lnSpc>
+                <a:spcPct val="110000"/>
+              </a:lnSpc>
+              <a:spcBef>
+                <a:spcPts val="0"/>
+              </a:spcBef>
+              <a:spcAft>
+                <a:spcPts val="0"/>
+              </a:spcAft>
+              <a:buNone/>
+            </a:lvl5pPr>
+            <a:lvl6pPr marL="0" indent="0">
+              <a:lnSpc>
+                <a:spcPct val="110000"/>
+              </a:lnSpc>
+              <a:spcBef>
+                <a:spcPts val="0"/>
+              </a:spcBef>
+              <a:spcAft>
+                <a:spcPts val="0"/>
+              </a:spcAft>
+              <a:buNone/>
+            </a:lvl6pPr>
+            <a:lvl7pPr marL="0" indent="0">
+              <a:lnSpc>
+                <a:spcPct val="110000"/>
+              </a:lnSpc>
+              <a:spcBef>
+                <a:spcPts val="0"/>
+              </a:spcBef>
+              <a:spcAft>
+                <a:spcPts val="0"/>
+              </a:spcAft>
+              <a:buNone/>
+            </a:lvl7pPr>
+            <a:lvl8pPr marL="0" indent="0">
+              <a:lnSpc>
+                <a:spcPct val="110000"/>
+              </a:lnSpc>
+              <a:spcBef>
+                <a:spcPts val="0"/>
+              </a:spcBef>
+              <a:spcAft>
+                <a:spcPts val="0"/>
+              </a:spcAft>
+              <a:buNone/>
+            </a:lvl8pPr>
+            <a:lvl9pPr marL="0" indent="0">
+              <a:lnSpc>
+                <a:spcPct val="110000"/>
+              </a:lnSpc>
+              <a:spcBef>
+                <a:spcPts val="0"/>
+              </a:spcBef>
+              <a:spcAft>
+                <a:spcPts val="0"/>
+              </a:spcAft>
+              <a:buNone/>
+            </a:lvl9pPr>
+          </a:lstStyle>
+          <a:p xmlns:a="http://schemas.openxmlformats.org/drawingml/2006/main"/>
+        </p:txBody>
+      </p:sp>
+      <p:sp>
+        <p:nvSpPr>
+          <p:cNvPr id="2" name="Body">
+            <a:extLst xmlns:a="http://schemas.openxmlformats.org/drawingml/2006/main">
+              <a:ext uri="{FF2B5EF4-FFF2-40B4-BE49-F238E27FC236}">
+                <a16:creationId xmlns:a16="http://schemas.microsoft.com/office/drawing/2014/main" id="{12AFD38E-7765-4892-AEAE-0CDE06A7D77A}"/>
+              </a:ext>
+            </a:extLst>
+          </p:cNvPr>
+          <p:cNvSpPr>
+            <a:spLocks xmlns:a="http://schemas.openxmlformats.org/drawingml/2006/main" noGrp="1"/>
+          </p:cNvSpPr>
+          <p:nvPr>
+            <p:ph type="body" idx="1"/>
+          </p:nvPr>
+        </p:nvSpPr>
+        <p:spPr>
+          <a:xfrm xmlns:a="http://schemas.openxmlformats.org/drawingml/2006/main">
+            <a:off x="514350" y="1428750"/>
+            <a:ext cx="8115300" cy="3200400"/>
+          </a:xfrm>
+          <a:prstGeom xmlns:a="http://schemas.openxmlformats.org/drawingml/2006/main" prst="rect">
+            <a:avLst/>
+          </a:prstGeom>
+          <a:noFill xmlns:a="http://schemas.openxmlformats.org/drawingml/2006/main"/>
+          <a:ln xmlns:a="http://schemas.openxmlformats.org/drawingml/2006/main">
+            <a:noFill/>
+            <a:prstDash val="solid"/>
+          </a:ln>
+        </p:spPr>
+        <p:txBody>
+          <a:bodyPr xmlns:a="http://schemas.openxmlformats.org/drawingml/2006/main" wrap="square" lIns="0" tIns="0" rIns="0" bIns="0" anchor="t">
+            <a:normAutofit/>
+          </a:bodyPr>
+          <a:lstStyle xmlns:a="http://schemas.openxmlformats.org/drawingml/2006/main">
+            <a:defPPr algn="l">
+              <a:defRPr sz="1688" b="0">
+                <a:solidFill>
+                  <a:schemeClr val="tx1"/>
+                </a:solidFill>
+                <a:latin typeface="+mn-lt"/>
+                <a:ea typeface="+mn-lt"/>
+                <a:cs typeface="+mn-lt"/>
+              </a:defRPr>
+            </a:defPPr>
+            <a:lvl1pPr marL="171450" indent="-171450">
+              <a:lnSpc>
+                <a:spcPct val="110000"/>
+              </a:lnSpc>
+              <a:spcBef>
+                <a:spcPts val="0"/>
+              </a:spcBef>
+              <a:spcAft>
+                <a:spcPts val="900"/>
+              </a:spcAft>
+              <a:buChar char="•"/>
+            </a:lvl1pPr>
+            <a:lvl2pPr marL="400050" indent="-171450">
+              <a:lnSpc>
+                <a:spcPct val="110000"/>
+              </a:lnSpc>
+              <a:spcBef>
+                <a:spcPts val="0"/>
+              </a:spcBef>
+              <a:spcAft>
+                <a:spcPts val="900"/>
+              </a:spcAft>
+              <a:buChar char="•"/>
+            </a:lvl2pPr>
+            <a:lvl3pPr marL="628650" indent="-171450">
+              <a:lnSpc>
+                <a:spcPct val="110000"/>
+              </a:lnSpc>
+              <a:spcBef>
+                <a:spcPts val="0"/>
+              </a:spcBef>
+              <a:spcAft>
+                <a:spcPts val="900"/>
+              </a:spcAft>
+              <a:buChar char="•"/>
+            </a:lvl3pPr>
+            <a:lvl4pPr marL="857250" indent="-171450">
+              <a:lnSpc>
+                <a:spcPct val="110000"/>
+              </a:lnSpc>
+              <a:spcBef>
+                <a:spcPts val="0"/>
+              </a:spcBef>
+              <a:spcAft>
+                <a:spcPts val="900"/>
+              </a:spcAft>
+              <a:buChar char="•"/>
+            </a:lvl4pPr>
+            <a:lvl5pPr marL="1085850" indent="-171450">
+              <a:lnSpc>
+                <a:spcPct val="110000"/>
+              </a:lnSpc>
+              <a:spcBef>
+                <a:spcPts val="0"/>
+              </a:spcBef>
+              <a:spcAft>
+                <a:spcPts val="900"/>
+              </a:spcAft>
+              <a:buChar char="•"/>
+            </a:lvl5pPr>
+            <a:lvl6pPr marL="1314450" indent="-171450">
+              <a:lnSpc>
+                <a:spcPct val="110000"/>
+              </a:lnSpc>
+              <a:spcBef>
+                <a:spcPts val="0"/>
+              </a:spcBef>
+              <a:spcAft>
+                <a:spcPts val="900"/>
+              </a:spcAft>
+              <a:buChar char="•"/>
+            </a:lvl6pPr>
+            <a:lvl7pPr marL="1543050" indent="-171450">
+              <a:lnSpc>
+                <a:spcPct val="110000"/>
+              </a:lnSpc>
+              <a:spcBef>
+                <a:spcPts val="0"/>
+              </a:spcBef>
+              <a:spcAft>
+                <a:spcPts val="900"/>
+              </a:spcAft>
+              <a:buChar char="•"/>
+            </a:lvl7pPr>
+            <a:lvl8pPr marL="1771650" indent="-171450">
+              <a:lnSpc>
+                <a:spcPct val="110000"/>
+              </a:lnSpc>
+              <a:spcBef>
+                <a:spcPts val="0"/>
+              </a:spcBef>
+              <a:spcAft>
+                <a:spcPts val="900"/>
+              </a:spcAft>
+              <a:buChar char="•"/>
+            </a:lvl8pPr>
+            <a:lvl9pPr marL="2000250" indent="-171450">
+              <a:lnSpc>
+                <a:spcPct val="110000"/>
+              </a:lnSpc>
+              <a:spcBef>
+                <a:spcPts val="0"/>
+              </a:spcBef>
+              <a:spcAft>
+                <a:spcPts val="900"/>
+              </a:spcAft>
+              <a:buChar char="•"/>
+            </a:lvl9pPr>
+          </a:lstStyle>
+          <a:p xmlns:a="http://schemas.openxmlformats.org/drawingml/2006/main"/>
+        </p:txBody>
+      </p:sp>
+    </p:spTree>
+  </p:cSld>
+</p:sldLayout>
+</file>
+
+<file path=ppt/slideLayouts/slideLayout4.xml><?xml version="1.0" encoding="utf-8"?>
+<p:sldLayout xmlns:p="http://schemas.openxmlformats.org/presentationml/2006/main">
+  <p:cSld name="Title and Two Column">
+    <p:spTree>
+      <p:nvGrpSpPr>
+        <p:cNvPr id="1" name=""/>
+        <p:cNvGrpSpPr/>
+        <p:nvPr/>
+      </p:nvGrpSpPr>
+      <p:grpSpPr>
+        <a:xfrm xmlns:a="http://schemas.openxmlformats.org/drawingml/2006/main"/>
+      </p:grpSpPr>
+      <p:sp>
+        <p:nvSpPr>
+          <p:cNvPr id="4" name="Title">
+            <a:extLst xmlns:a="http://schemas.openxmlformats.org/drawingml/2006/main">
+              <a:ext uri="{FF2B5EF4-FFF2-40B4-BE49-F238E27FC236}">
+                <a16:creationId xmlns:a16="http://schemas.microsoft.com/office/drawing/2014/main" id="{E001C5A0-E90A-44B6-BA2B-DBA916D6DEB0}"/>
+              </a:ext>
+            </a:extLst>
+          </p:cNvPr>
+          <p:cNvSpPr>
+            <a:spLocks xmlns:a="http://schemas.openxmlformats.org/drawingml/2006/main" noGrp="1"/>
+          </p:cNvSpPr>
+          <p:nvPr>
+            <p:ph type="title" idx="0"/>
+          </p:nvPr>
+        </p:nvSpPr>
+        <p:spPr>
+          <a:xfrm xmlns:a="http://schemas.openxmlformats.org/drawingml/2006/main">
+            <a:off x="514350" y="400050"/>
+            <a:ext cx="8115300" cy="628650"/>
+          </a:xfrm>
+          <a:prstGeom xmlns:a="http://schemas.openxmlformats.org/drawingml/2006/main" prst="rect">
+            <a:avLst/>
+          </a:prstGeom>
+          <a:noFill xmlns:a="http://schemas.openxmlformats.org/drawingml/2006/main"/>
+          <a:ln xmlns:a="http://schemas.openxmlformats.org/drawingml/2006/main">
+            <a:noFill/>
+            <a:prstDash val="solid"/>
+          </a:ln>
+        </p:spPr>
+        <p:txBody>
+          <a:bodyPr xmlns:a="http://schemas.openxmlformats.org/drawingml/2006/main" wrap="square" lIns="0" tIns="0" rIns="0" bIns="0" anchor="t">
+            <a:normAutofit/>
+          </a:bodyPr>
+          <a:lstStyle xmlns:a="http://schemas.openxmlformats.org/drawingml/2006/main">
+            <a:defPPr algn="l">
+              <a:defRPr sz="2475" b="1">
+                <a:solidFill>
+                  <a:schemeClr val="tx1"/>
+                </a:solidFill>
+                <a:latin typeface="+mj-lt"/>
+                <a:ea typeface="+mj-lt"/>
+                <a:cs typeface="+mj-lt"/>
+              </a:defRPr>
+            </a:defPPr>
+            <a:lvl1pPr marL="0" indent="0">
+              <a:lnSpc>
+                <a:spcPct val="110000"/>
+              </a:lnSpc>
+              <a:spcBef>
+                <a:spcPts val="0"/>
+              </a:spcBef>
+              <a:spcAft>
+                <a:spcPts val="0"/>
+              </a:spcAft>
+              <a:buNone/>
+            </a:lvl1pPr>
+            <a:lvl2pPr marL="0" indent="0">
+              <a:lnSpc>
+                <a:spcPct val="110000"/>
+              </a:lnSpc>
+              <a:spcBef>
+                <a:spcPts val="0"/>
+              </a:spcBef>
+              <a:spcAft>
+                <a:spcPts val="0"/>
+              </a:spcAft>
+              <a:buNone/>
+            </a:lvl2pPr>
+            <a:lvl3pPr marL="0" indent="0">
+              <a:lnSpc>
+                <a:spcPct val="110000"/>
+              </a:lnSpc>
+              <a:spcBef>
+                <a:spcPts val="0"/>
+              </a:spcBef>
+              <a:spcAft>
+                <a:spcPts val="0"/>
+              </a:spcAft>
+              <a:buNone/>
+            </a:lvl3pPr>
+            <a:lvl4pPr marL="0" indent="0">
+              <a:lnSpc>
+                <a:spcPct val="110000"/>
+              </a:lnSpc>
+              <a:spcBef>
+                <a:spcPts val="0"/>
+              </a:spcBef>
+              <a:spcAft>
+                <a:spcPts val="0"/>
+              </a:spcAft>
+              <a:buNone/>
+            </a:lvl4pPr>
+            <a:lvl5pPr marL="0" indent="0">
+              <a:lnSpc>
+                <a:spcPct val="110000"/>
+              </a:lnSpc>
+              <a:spcBef>
+                <a:spcPts val="0"/>
+              </a:spcBef>
+              <a:spcAft>
+                <a:spcPts val="0"/>
+              </a:spcAft>
+              <a:buNone/>
+            </a:lvl5pPr>
+            <a:lvl6pPr marL="0" indent="0">
+              <a:lnSpc>
+                <a:spcPct val="110000"/>
+              </a:lnSpc>
+              <a:spcBef>
+                <a:spcPts val="0"/>
+              </a:spcBef>
+              <a:spcAft>
+                <a:spcPts val="0"/>
+              </a:spcAft>
+              <a:buNone/>
+            </a:lvl6pPr>
+            <a:lvl7pPr marL="0" indent="0">
+              <a:lnSpc>
+                <a:spcPct val="110000"/>
+              </a:lnSpc>
+              <a:spcBef>
+                <a:spcPts val="0"/>
+              </a:spcBef>
+              <a:spcAft>
+                <a:spcPts val="0"/>
+              </a:spcAft>
+              <a:buNone/>
+            </a:lvl7pPr>
+            <a:lvl8pPr marL="0" indent="0">
+              <a:lnSpc>
+                <a:spcPct val="110000"/>
+              </a:lnSpc>
+              <a:spcBef>
+                <a:spcPts val="0"/>
+              </a:spcBef>
+              <a:spcAft>
+                <a:spcPts val="0"/>
+              </a:spcAft>
+              <a:buNone/>
+            </a:lvl8pPr>
+            <a:lvl9pPr marL="0" indent="0">
+              <a:lnSpc>
+                <a:spcPct val="110000"/>
+              </a:lnSpc>
+              <a:spcBef>
+                <a:spcPts val="0"/>
+              </a:spcBef>
+              <a:spcAft>
+                <a:spcPts val="0"/>
+              </a:spcAft>
+              <a:buNone/>
+            </a:lvl9pPr>
+          </a:lstStyle>
+          <a:p xmlns:a="http://schemas.openxmlformats.org/drawingml/2006/main"/>
+        </p:txBody>
+      </p:sp>
+      <p:sp>
+        <p:nvSpPr>
+          <p:cNvPr id="2" name="Left column">
+            <a:extLst xmlns:a="http://schemas.openxmlformats.org/drawingml/2006/main">
+              <a:ext uri="{FF2B5EF4-FFF2-40B4-BE49-F238E27FC236}">
+                <a16:creationId xmlns:a16="http://schemas.microsoft.com/office/drawing/2014/main" id="{55C6F787-AD21-46B5-A84A-0C83A6907712}"/>
+              </a:ext>
+            </a:extLst>
+          </p:cNvPr>
+          <p:cNvSpPr>
+            <a:spLocks xmlns:a="http://schemas.openxmlformats.org/drawingml/2006/main" noGrp="1"/>
+          </p:cNvSpPr>
+          <p:nvPr>
+            <p:ph type="body" idx="1"/>
+          </p:nvPr>
+        </p:nvSpPr>
+        <p:spPr>
+          <a:xfrm xmlns:a="http://schemas.openxmlformats.org/drawingml/2006/main">
+            <a:off x="514350" y="1428750"/>
+            <a:ext cx="3771900" cy="3200400"/>
+          </a:xfrm>
+          <a:prstGeom xmlns:a="http://schemas.openxmlformats.org/drawingml/2006/main" prst="rect">
+            <a:avLst/>
+          </a:prstGeom>
+          <a:noFill xmlns:a="http://schemas.openxmlformats.org/drawingml/2006/main"/>
+          <a:ln xmlns:a="http://schemas.openxmlformats.org/drawingml/2006/main">
+            <a:noFill/>
+            <a:prstDash val="solid"/>
+          </a:ln>
+        </p:spPr>
+        <p:txBody>
+          <a:bodyPr xmlns:a="http://schemas.openxmlformats.org/drawingml/2006/main" wrap="square" lIns="0" tIns="0" rIns="0" bIns="0" anchor="t">
+            <a:normAutofit/>
+          </a:bodyPr>
+          <a:lstStyle xmlns:a="http://schemas.openxmlformats.org/drawingml/2006/main">
+            <a:defPPr algn="l">
+              <a:defRPr sz="1575" b="0">
+                <a:solidFill>
+                  <a:schemeClr val="tx1"/>
+                </a:solidFill>
+                <a:latin typeface="+mn-lt"/>
+                <a:ea typeface="+mn-lt"/>
+                <a:cs typeface="+mn-lt"/>
+              </a:defRPr>
+            </a:defPPr>
+            <a:lvl1pPr marL="171450" indent="-171450">
+              <a:lnSpc>
+                <a:spcPct val="110000"/>
+              </a:lnSpc>
+              <a:spcBef>
+                <a:spcPts val="0"/>
+              </a:spcBef>
+              <a:spcAft>
+                <a:spcPts val="900"/>
+              </a:spcAft>
+              <a:buChar char="•"/>
+            </a:lvl1pPr>
+            <a:lvl2pPr marL="400050" indent="-171450">
+              <a:lnSpc>
+                <a:spcPct val="110000"/>
+              </a:lnSpc>
+              <a:spcBef>
+                <a:spcPts val="0"/>
+              </a:spcBef>
+              <a:spcAft>
+                <a:spcPts val="900"/>
+              </a:spcAft>
+              <a:buChar char="•"/>
+            </a:lvl2pPr>
+            <a:lvl3pPr marL="628650" indent="-171450">
+              <a:lnSpc>
+                <a:spcPct val="110000"/>
+              </a:lnSpc>
+              <a:spcBef>
+                <a:spcPts val="0"/>
+              </a:spcBef>
+              <a:spcAft>
+                <a:spcPts val="900"/>
+              </a:spcAft>
+              <a:buChar char="•"/>
+            </a:lvl3pPr>
+            <a:lvl4pPr marL="857250" indent="-171450">
+              <a:lnSpc>
+                <a:spcPct val="110000"/>
+              </a:lnSpc>
+              <a:spcBef>
+                <a:spcPts val="0"/>
+              </a:spcBef>
+              <a:spcAft>
+                <a:spcPts val="900"/>
+              </a:spcAft>
+              <a:buChar char="•"/>
+            </a:lvl4pPr>
+            <a:lvl5pPr marL="1085850" indent="-171450">
+              <a:lnSpc>
+                <a:spcPct val="110000"/>
+              </a:lnSpc>
+              <a:spcBef>
+                <a:spcPts val="0"/>
+              </a:spcBef>
+              <a:spcAft>
+                <a:spcPts val="900"/>
+              </a:spcAft>
+              <a:buChar char="•"/>
+            </a:lvl5pPr>
+            <a:lvl6pPr marL="1314450" indent="-171450">
+              <a:lnSpc>
+                <a:spcPct val="110000"/>
+              </a:lnSpc>
+              <a:spcBef>
+                <a:spcPts val="0"/>
+              </a:spcBef>
+              <a:spcAft>
+                <a:spcPts val="900"/>
+              </a:spcAft>
+              <a:buChar char="•"/>
+            </a:lvl6pPr>
+            <a:lvl7pPr marL="1543050" indent="-171450">
+              <a:lnSpc>
+                <a:spcPct val="110000"/>
+              </a:lnSpc>
+              <a:spcBef>
+                <a:spcPts val="0"/>
+              </a:spcBef>
+              <a:spcAft>
+                <a:spcPts val="900"/>
+              </a:spcAft>
+              <a:buChar char="•"/>
+            </a:lvl7pPr>
+            <a:lvl8pPr marL="1771650" indent="-171450">
+              <a:lnSpc>
+                <a:spcPct val="110000"/>
+              </a:lnSpc>
+              <a:spcBef>
+                <a:spcPts val="0"/>
+              </a:spcBef>
+              <a:spcAft>
+                <a:spcPts val="900"/>
+              </a:spcAft>
+              <a:buChar char="•"/>
+            </a:lvl8pPr>
+            <a:lvl9pPr marL="2000250" indent="-171450">
+              <a:lnSpc>
+                <a:spcPct val="110000"/>
+              </a:lnSpc>
+              <a:spcBef>
+                <a:spcPts val="0"/>
+              </a:spcBef>
+              <a:spcAft>
+                <a:spcPts val="900"/>
+              </a:spcAft>
+              <a:buChar char="•"/>
+            </a:lvl9pPr>
+          </a:lstStyle>
+          <a:p xmlns:a="http://schemas.openxmlformats.org/drawingml/2006/main"/>
+        </p:txBody>
+      </p:sp>
+      <p:sp>
+        <p:nvSpPr>
+          <p:cNvPr id="3" name="Right column">
+            <a:extLst xmlns:a="http://schemas.openxmlformats.org/drawingml/2006/main">
+              <a:ext uri="{FF2B5EF4-FFF2-40B4-BE49-F238E27FC236}">
+                <a16:creationId xmlns:a16="http://schemas.microsoft.com/office/drawing/2014/main" id="{50D7ACC0-C24A-4868-8495-7575AB81CDA3}"/>
+              </a:ext>
+            </a:extLst>
+          </p:cNvPr>
+          <p:cNvSpPr>
+            <a:spLocks xmlns:a="http://schemas.openxmlformats.org/drawingml/2006/main" noGrp="1"/>
+          </p:cNvSpPr>
+          <p:nvPr>
+            <p:ph type="body" idx="2"/>
+          </p:nvPr>
+        </p:nvSpPr>
+        <p:spPr>
+          <a:xfrm xmlns:a="http://schemas.openxmlformats.org/drawingml/2006/main">
+            <a:off x="4857750" y="1428750"/>
+            <a:ext cx="3771900" cy="3200400"/>
+          </a:xfrm>
+          <a:prstGeom xmlns:a="http://schemas.openxmlformats.org/drawingml/2006/main" prst="rect">
+            <a:avLst/>
+          </a:prstGeom>
+          <a:noFill xmlns:a="http://schemas.openxmlformats.org/drawingml/2006/main"/>
+          <a:ln xmlns:a="http://schemas.openxmlformats.org/drawingml/2006/main">
+            <a:noFill/>
+            <a:prstDash val="solid"/>
+          </a:ln>
+        </p:spPr>
+        <p:txBody>
+          <a:bodyPr xmlns:a="http://schemas.openxmlformats.org/drawingml/2006/main" wrap="square" lIns="0" tIns="0" rIns="0" bIns="0" anchor="t">
+            <a:normAutofit/>
+          </a:bodyPr>
+          <a:lstStyle xmlns:a="http://schemas.openxmlformats.org/drawingml/2006/main">
+            <a:defPPr algn="l">
+              <a:defRPr sz="1575" b="0">
+                <a:solidFill>
+                  <a:schemeClr val="tx1"/>
+                </a:solidFill>
+                <a:latin typeface="+mn-lt"/>
+                <a:ea typeface="+mn-lt"/>
+                <a:cs typeface="+mn-lt"/>
+              </a:defRPr>
+            </a:defPPr>
+            <a:lvl1pPr marL="171450" indent="-171450">
+              <a:lnSpc>
+                <a:spcPct val="110000"/>
+              </a:lnSpc>
+              <a:spcBef>
+                <a:spcPts val="0"/>
+              </a:spcBef>
+              <a:spcAft>
+                <a:spcPts val="900"/>
+              </a:spcAft>
+              <a:buChar char="•"/>
+            </a:lvl1pPr>
+            <a:lvl2pPr marL="400050" indent="-171450">
+              <a:lnSpc>
+                <a:spcPct val="110000"/>
+              </a:lnSpc>
+              <a:spcBef>
+                <a:spcPts val="0"/>
+              </a:spcBef>
+              <a:spcAft>
+                <a:spcPts val="900"/>
+              </a:spcAft>
+              <a:buChar char="•"/>
+            </a:lvl2pPr>
+            <a:lvl3pPr marL="628650" indent="-171450">
+              <a:lnSpc>
+                <a:spcPct val="110000"/>
+              </a:lnSpc>
+              <a:spcBef>
+                <a:spcPts val="0"/>
+              </a:spcBef>
+              <a:spcAft>
+                <a:spcPts val="900"/>
+              </a:spcAft>
+              <a:buChar char="•"/>
+            </a:lvl3pPr>
+            <a:lvl4pPr marL="857250" indent="-171450">
+              <a:lnSpc>
+                <a:spcPct val="110000"/>
+              </a:lnSpc>
+              <a:spcBef>
+                <a:spcPts val="0"/>
+              </a:spcBef>
+              <a:spcAft>
+                <a:spcPts val="900"/>
+              </a:spcAft>
+              <a:buChar char="•"/>
+            </a:lvl4pPr>
+            <a:lvl5pPr marL="1085850" indent="-171450">
+              <a:lnSpc>
+                <a:spcPct val="110000"/>
+              </a:lnSpc>
+              <a:spcBef>
+                <a:spcPts val="0"/>
+              </a:spcBef>
+              <a:spcAft>
+                <a:spcPts val="900"/>
+              </a:spcAft>
+              <a:buChar char="•"/>
+            </a:lvl5pPr>
+            <a:lvl6pPr marL="1314450" indent="-171450">
+              <a:lnSpc>
+                <a:spcPct val="110000"/>
+              </a:lnSpc>
+              <a:spcBef>
+                <a:spcPts val="0"/>
+              </a:spcBef>
+              <a:spcAft>
+                <a:spcPts val="900"/>
+              </a:spcAft>
+              <a:buChar char="•"/>
+            </a:lvl6pPr>
+            <a:lvl7pPr marL="1543050" indent="-171450">
+              <a:lnSpc>
+                <a:spcPct val="110000"/>
+              </a:lnSpc>
+              <a:spcBef>
+                <a:spcPts val="0"/>
+              </a:spcBef>
+              <a:spcAft>
+                <a:spcPts val="900"/>
+              </a:spcAft>
+              <a:buChar char="•"/>
+            </a:lvl7pPr>
+            <a:lvl8pPr marL="1771650" indent="-171450">
+              <a:lnSpc>
+                <a:spcPct val="110000"/>
+              </a:lnSpc>
+              <a:spcBef>
+                <a:spcPts val="0"/>
+              </a:spcBef>
+              <a:spcAft>
+                <a:spcPts val="900"/>
+              </a:spcAft>
+              <a:buChar char="•"/>
+            </a:lvl8pPr>
+            <a:lvl9pPr marL="2000250" indent="-171450">
+              <a:lnSpc>
+                <a:spcPct val="110000"/>
+              </a:lnSpc>
+              <a:spcBef>
+                <a:spcPts val="0"/>
+              </a:spcBef>
+              <a:spcAft>
+                <a:spcPts val="900"/>
+              </a:spcAft>
+              <a:buChar char="•"/>
+            </a:lvl9pPr>
+          </a:lstStyle>
+          <a:p xmlns:a="http://schemas.openxmlformats.org/drawingml/2006/main"/>
+        </p:txBody>
+      </p:sp>
+    </p:spTree>
+  </p:cSld>
+</p:sldLayout>
+</file>
+
+<file path=ppt/slideLayouts/slideLayout5.xml><?xml version="1.0" encoding="utf-8"?>
+<p:sldLayout xmlns:p="http://schemas.openxmlformats.org/presentationml/2006/main">
+  <p:cSld name="Title and One Column">
+    <p:spTree>
+      <p:nvGrpSpPr>
+        <p:cNvPr id="1" name=""/>
+        <p:cNvGrpSpPr/>
+        <p:nvPr/>
+      </p:nvGrpSpPr>
+      <p:grpSpPr>
+        <a:xfrm xmlns:a="http://schemas.openxmlformats.org/drawingml/2006/main"/>
+      </p:grpSpPr>
+      <p:sp>
+        <p:nvSpPr>
+          <p:cNvPr id="3" name="Title">
+            <a:extLst xmlns:a="http://schemas.openxmlformats.org/drawingml/2006/main">
+              <a:ext uri="{FF2B5EF4-FFF2-40B4-BE49-F238E27FC236}">
+                <a16:creationId xmlns:a16="http://schemas.microsoft.com/office/drawing/2014/main" id="{9240E782-AD82-4E29-BB77-2F48881CEDDF}"/>
+              </a:ext>
+            </a:extLst>
+          </p:cNvPr>
+          <p:cNvSpPr>
+            <a:spLocks xmlns:a="http://schemas.openxmlformats.org/drawingml/2006/main" noGrp="1"/>
+          </p:cNvSpPr>
+          <p:nvPr>
+            <p:ph type="title" idx="0"/>
+          </p:nvPr>
+        </p:nvSpPr>
+        <p:spPr>
+          <a:xfrm xmlns:a="http://schemas.openxmlformats.org/drawingml/2006/main">
+            <a:off x="514350" y="400050"/>
+            <a:ext cx="8115300" cy="628650"/>
+          </a:xfrm>
+          <a:prstGeom xmlns:a="http://schemas.openxmlformats.org/drawingml/2006/main" prst="rect">
+            <a:avLst/>
+          </a:prstGeom>
+          <a:noFill xmlns:a="http://schemas.openxmlformats.org/drawingml/2006/main"/>
+          <a:ln xmlns:a="http://schemas.openxmlformats.org/drawingml/2006/main">
+            <a:noFill/>
+            <a:prstDash val="solid"/>
+          </a:ln>
+        </p:spPr>
+        <p:txBody>
+          <a:bodyPr xmlns:a="http://schemas.openxmlformats.org/drawingml/2006/main" wrap="square" lIns="0" tIns="0" rIns="0" bIns="0" anchor="t">
+            <a:normAutofit/>
+          </a:bodyPr>
+          <a:lstStyle xmlns:a="http://schemas.openxmlformats.org/drawingml/2006/main">
+            <a:defPPr algn="l">
+              <a:defRPr sz="2475" b="1">
+                <a:solidFill>
+                  <a:schemeClr val="tx1"/>
+                </a:solidFill>
+                <a:latin typeface="+mj-lt"/>
+                <a:ea typeface="+mj-lt"/>
+                <a:cs typeface="+mj-lt"/>
+              </a:defRPr>
+            </a:defPPr>
+            <a:lvl1pPr marL="0" indent="0">
+              <a:lnSpc>
+                <a:spcPct val="110000"/>
+              </a:lnSpc>
+              <a:spcBef>
+                <a:spcPts val="0"/>
+              </a:spcBef>
+              <a:spcAft>
+                <a:spcPts val="0"/>
+              </a:spcAft>
+              <a:buNone/>
+            </a:lvl1pPr>
+            <a:lvl2pPr marL="0" indent="0">
+              <a:lnSpc>
+                <a:spcPct val="110000"/>
+              </a:lnSpc>
+              <a:spcBef>
+                <a:spcPts val="0"/>
+              </a:spcBef>
+              <a:spcAft>
+                <a:spcPts val="0"/>
+              </a:spcAft>
+              <a:buNone/>
+            </a:lvl2pPr>
+            <a:lvl3pPr marL="0" indent="0">
+              <a:lnSpc>
+                <a:spcPct val="110000"/>
+              </a:lnSpc>
+              <a:spcBef>
+                <a:spcPts val="0"/>
+              </a:spcBef>
+              <a:spcAft>
+                <a:spcPts val="0"/>
+              </a:spcAft>
+              <a:buNone/>
+            </a:lvl3pPr>
+            <a:lvl4pPr marL="0" indent="0">
+              <a:lnSpc>
+                <a:spcPct val="110000"/>
+              </a:lnSpc>
+              <a:spcBef>
+                <a:spcPts val="0"/>
+              </a:spcBef>
+              <a:spcAft>
+                <a:spcPts val="0"/>
+              </a:spcAft>
+              <a:buNone/>
+            </a:lvl4pPr>
+            <a:lvl5pPr marL="0" indent="0">
+              <a:lnSpc>
+                <a:spcPct val="110000"/>
+              </a:lnSpc>
+              <a:spcBef>
+                <a:spcPts val="0"/>
+              </a:spcBef>
+              <a:spcAft>
+                <a:spcPts val="0"/>
+              </a:spcAft>
+              <a:buNone/>
+            </a:lvl5pPr>
+            <a:lvl6pPr marL="0" indent="0">
+              <a:lnSpc>
+                <a:spcPct val="110000"/>
+              </a:lnSpc>
+              <a:spcBef>
+                <a:spcPts val="0"/>
+              </a:spcBef>
+              <a:spcAft>
+                <a:spcPts val="0"/>
+              </a:spcAft>
+              <a:buNone/>
+            </a:lvl6pPr>
+            <a:lvl7pPr marL="0" indent="0">
+              <a:lnSpc>
+                <a:spcPct val="110000"/>
+              </a:lnSpc>
+              <a:spcBef>
+                <a:spcPts val="0"/>
+              </a:spcBef>
+              <a:spcAft>
+                <a:spcPts val="0"/>
+              </a:spcAft>
+              <a:buNone/>
+            </a:lvl7pPr>
+            <a:lvl8pPr marL="0" indent="0">
+              <a:lnSpc>
+                <a:spcPct val="110000"/>
+              </a:lnSpc>
+              <a:spcBef>
+                <a:spcPts val="0"/>
+              </a:spcBef>
+              <a:spcAft>
+                <a:spcPts val="0"/>
+              </a:spcAft>
+              <a:buNone/>
+            </a:lvl8pPr>
+            <a:lvl9pPr marL="0" indent="0">
+              <a:lnSpc>
+                <a:spcPct val="110000"/>
+              </a:lnSpc>
+              <a:spcBef>
+                <a:spcPts val="0"/>
+              </a:spcBef>
+              <a:spcAft>
+                <a:spcPts val="0"/>
+              </a:spcAft>
+              <a:buNone/>
+            </a:lvl9pPr>
+          </a:lstStyle>
+          <a:p xmlns:a="http://schemas.openxmlformats.org/drawingml/2006/main"/>
+        </p:txBody>
+      </p:sp>
+      <p:sp>
+        <p:nvSpPr>
+          <p:cNvPr id="2" name="Left column">
+            <a:extLst xmlns:a="http://schemas.openxmlformats.org/drawingml/2006/main">
+              <a:ext uri="{FF2B5EF4-FFF2-40B4-BE49-F238E27FC236}">
+                <a16:creationId xmlns:a16="http://schemas.microsoft.com/office/drawing/2014/main" id="{3E8AC225-B311-484F-9C5E-99B90863D109}"/>
+              </a:ext>
+            </a:extLst>
+          </p:cNvPr>
+          <p:cNvSpPr>
+            <a:spLocks xmlns:a="http://schemas.openxmlformats.org/drawingml/2006/main" noGrp="1"/>
+          </p:cNvSpPr>
+          <p:nvPr>
+            <p:ph type="body" idx="1"/>
+          </p:nvPr>
+        </p:nvSpPr>
+        <p:spPr>
+          <a:xfrm xmlns:a="http://schemas.openxmlformats.org/drawingml/2006/main">
+            <a:off x="514350" y="1428750"/>
+            <a:ext cx="3771900" cy="3200400"/>
+          </a:xfrm>
+          <a:prstGeom xmlns:a="http://schemas.openxmlformats.org/drawingml/2006/main" prst="rect">
+            <a:avLst/>
+          </a:prstGeom>
+          <a:noFill xmlns:a="http://schemas.openxmlformats.org/drawingml/2006/main"/>
+          <a:ln xmlns:a="http://schemas.openxmlformats.org/drawingml/2006/main">
+            <a:noFill/>
+            <a:prstDash val="solid"/>
+          </a:ln>
+        </p:spPr>
+        <p:txBody>
+          <a:bodyPr xmlns:a="http://schemas.openxmlformats.org/drawingml/2006/main" wrap="square" lIns="0" tIns="0" rIns="0" bIns="0" anchor="t">
+            <a:normAutofit/>
+          </a:bodyPr>
+          <a:lstStyle xmlns:a="http://schemas.openxmlformats.org/drawingml/2006/main">
+            <a:defPPr algn="l">
+              <a:defRPr sz="1688" b="0">
+                <a:solidFill>
+                  <a:schemeClr val="tx1"/>
+                </a:solidFill>
+                <a:latin typeface="+mn-lt"/>
+                <a:ea typeface="+mn-lt"/>
+                <a:cs typeface="+mn-lt"/>
+              </a:defRPr>
+            </a:defPPr>
+            <a:lvl1pPr marL="171450" indent="-171450">
+              <a:lnSpc>
+                <a:spcPct val="110000"/>
+              </a:lnSpc>
+              <a:spcBef>
+                <a:spcPts val="0"/>
+              </a:spcBef>
+              <a:spcAft>
+                <a:spcPts val="900"/>
+              </a:spcAft>
+              <a:buChar char="•"/>
+            </a:lvl1pPr>
+            <a:lvl2pPr marL="400050" indent="-171450">
+              <a:lnSpc>
+                <a:spcPct val="110000"/>
+              </a:lnSpc>
+              <a:spcBef>
+                <a:spcPts val="0"/>
+              </a:spcBef>
+              <a:spcAft>
+                <a:spcPts val="900"/>
+              </a:spcAft>
+              <a:buChar char="•"/>
+            </a:lvl2pPr>
+            <a:lvl3pPr marL="628650" indent="-171450">
+              <a:lnSpc>
+                <a:spcPct val="110000"/>
+              </a:lnSpc>
+              <a:spcBef>
+                <a:spcPts val="0"/>
+              </a:spcBef>
+              <a:spcAft>
+                <a:spcPts val="900"/>
+              </a:spcAft>
+              <a:buChar char="•"/>
+            </a:lvl3pPr>
+            <a:lvl4pPr marL="857250" indent="-171450">
+              <a:lnSpc>
+                <a:spcPct val="110000"/>
+              </a:lnSpc>
+              <a:spcBef>
+                <a:spcPts val="0"/>
+              </a:spcBef>
+              <a:spcAft>
+                <a:spcPts val="900"/>
+              </a:spcAft>
+              <a:buChar char="•"/>
+            </a:lvl4pPr>
+            <a:lvl5pPr marL="1085850" indent="-171450">
+              <a:lnSpc>
+                <a:spcPct val="110000"/>
+              </a:lnSpc>
+              <a:spcBef>
+                <a:spcPts val="0"/>
+              </a:spcBef>
+              <a:spcAft>
+                <a:spcPts val="900"/>
+              </a:spcAft>
+              <a:buChar char="•"/>
+            </a:lvl5pPr>
+            <a:lvl6pPr marL="1314450" indent="-171450">
+              <a:lnSpc>
+                <a:spcPct val="110000"/>
+              </a:lnSpc>
+              <a:spcBef>
+                <a:spcPts val="0"/>
+              </a:spcBef>
+              <a:spcAft>
+                <a:spcPts val="900"/>
+              </a:spcAft>
+              <a:buChar char="•"/>
+            </a:lvl6pPr>
+            <a:lvl7pPr marL="1543050" indent="-171450">
+              <a:lnSpc>
+                <a:spcPct val="110000"/>
+              </a:lnSpc>
+              <a:spcBef>
+                <a:spcPts val="0"/>
+              </a:spcBef>
+              <a:spcAft>
+                <a:spcPts val="900"/>
+              </a:spcAft>
+              <a:buChar char="•"/>
+            </a:lvl7pPr>
+            <a:lvl8pPr marL="1771650" indent="-171450">
+              <a:lnSpc>
+                <a:spcPct val="110000"/>
+              </a:lnSpc>
+              <a:spcBef>
+                <a:spcPts val="0"/>
+              </a:spcBef>
+              <a:spcAft>
+                <a:spcPts val="900"/>
+              </a:spcAft>
+              <a:buChar char="•"/>
+            </a:lvl8pPr>
+            <a:lvl9pPr marL="2000250" indent="-171450">
+              <a:lnSpc>
+                <a:spcPct val="110000"/>
+              </a:lnSpc>
+              <a:spcBef>
+                <a:spcPts val="0"/>
+              </a:spcBef>
+              <a:spcAft>
+                <a:spcPts val="900"/>
+              </a:spcAft>
+              <a:buChar char="•"/>
+            </a:lvl9pPr>
+          </a:lstStyle>
+          <a:p xmlns:a="http://schemas.openxmlformats.org/drawingml/2006/main"/>
+        </p:txBody>
+      </p:sp>
+    </p:spTree>
+  </p:cSld>
+</p:sldLayout>
+</file>
+
+<file path=ppt/slideLayouts/slideLayout6.xml><?xml version="1.0" encoding="utf-8"?>
+<p:sldLayout xmlns:p="http://schemas.openxmlformats.org/presentationml/2006/main" type="blank">
+  <p:cSld name="Blank">
+    <p:spTree>
+      <p:nvGrpSpPr>
+        <p:cNvPr id="1" name=""/>
+        <p:cNvGrpSpPr/>
+        <p:nvPr/>
+      </p:nvGrpSpPr>
+      <p:grpSpPr>
+        <a:xfrm xmlns:a="http://schemas.openxmlformats.org/drawingml/2006/main"/>
+      </p:grpSpPr>
     </p:spTree>
   </p:cSld>
 </p:sldLayout>
@@ -1103,7 +2758,12 @@
   </p:cSld>
   <p:clrMap bg1="lt1" tx1="dk1" bg2="lt2" tx2="dk2" accent1="accent1" accent2="accent2" accent3="accent3" accent4="accent4" accent5="accent5" accent6="accent6" hlink="hlink" folHlink="folHlink"/>
   <p:sldLayoutIdLst>
-    <p:sldLayoutId xmlns:r="http://schemas.openxmlformats.org/officeDocument/2006/relationships" id="2147483649" r:id="Ra82ed56288874f43"/>
+    <p:sldLayoutId xmlns:r="http://schemas.openxmlformats.org/officeDocument/2006/relationships" id="2147483649" r:id="Rf603f6875d204e1a"/>
+    <p:sldLayoutId xmlns:r="http://schemas.openxmlformats.org/officeDocument/2006/relationships" id="2147483650" r:id="Rfec7c9fdc2b14a9e"/>
+    <p:sldLayoutId xmlns:r="http://schemas.openxmlformats.org/officeDocument/2006/relationships" id="2147483651" r:id="R93b182b556534bef"/>
+    <p:sldLayoutId xmlns:r="http://schemas.openxmlformats.org/officeDocument/2006/relationships" id="2147483652" r:id="R476a6fb186994f49"/>
+    <p:sldLayoutId xmlns:r="http://schemas.openxmlformats.org/officeDocument/2006/relationships" id="2147483653" r:id="Rb303e63979064808"/>
+    <p:sldLayoutId xmlns:r="http://schemas.openxmlformats.org/officeDocument/2006/relationships" id="2147483654" r:id="R9123be4b635b43a8"/>
   </p:sldLayoutIdLst>
   <p:txStyles>
     <p:titleStyle>
@@ -1426,16 +3086,16 @@
         <a:srgbClr val="96607D"/>
       </a:folHlink>
     </a:clrScheme>
-    <a:fontScheme name="Office">
+    <a:fontScheme name="">
       <a:majorFont>
-        <a:latin typeface="Calibri Light"/>
-        <a:ea typeface="Calibri Light"/>
-        <a:cs typeface="Calibri Light"/>
+        <a:latin typeface="Aptos"/>
+        <a:ea typeface=""/>
+        <a:cs typeface=""/>
       </a:majorFont>
       <a:minorFont>
-        <a:latin typeface="Calibri"/>
-        <a:ea typeface="Calibri"/>
-        <a:cs typeface="Calibri"/>
+        <a:latin typeface="Aptos"/>
+        <a:ea typeface=""/>
+        <a:cs typeface=""/>
       </a:minorFont>
     </a:fontScheme>
     <a:fmtScheme name="ChatGPT">
@@ -1637,6 +3297,7 @@
     <c:plotArea>
       <c:scatterChart>
         <c:scatterStyle val="lineMarker"/>
+        <c:varyColors val="0"/>
         <c:ser>
           <c:idx val="0"/>
           <c:order val="0"/>
@@ -1654,9 +3315,6 @@
           <c:marker>
             <c:symbol val="circle"/>
             <c:size val="7"/>
-            <c:spPr>
-              <a:noFill xmlns:a="http://schemas.openxmlformats.org/drawingml/2006/main"/>
-            </c:spPr>
           </c:marker>
           <c:xVal>
             <c:numRef>
@@ -1772,9 +3430,6 @@
           <c:marker>
             <c:symbol val="square"/>
             <c:size val="12"/>
-            <c:spPr>
-              <a:noFill xmlns:a="http://schemas.openxmlformats.org/drawingml/2006/main"/>
-            </c:spPr>
           </c:marker>
           <c:xVal>
             <c:numRef>
@@ -1817,7 +3472,7 @@
           <c:idx val="2"/>
           <c:order val="2"/>
           <c:tx>
-            <c:v>説明用の任意閾値</c:v>
+            <c:v>1000 ppm</c:v>
           </c:tx>
           <c:spPr>
             <a:ln xmlns:a="http://schemas.openxmlformats.org/drawingml/2006/main" w="13335">
@@ -2103,10 +3758,10 @@
       </p:grpSpPr>
       <p:sp>
         <p:nvSpPr>
-          <p:cNvPr id="11" name="footer-line">
-            <a:extLst xmlns:a="http://schemas.openxmlformats.org/drawingml/2006/main">
-              <a:ext uri="{FF2B5EF4-FFF2-40B4-BE49-F238E27FC236}">
-                <a16:creationId xmlns:a16="http://schemas.microsoft.com/office/drawing/2014/main" id="{2C4FF54D-94B1-4F54-9B73-C0B220707A18}"/>
+          <p:cNvPr id="10" name="footer-line">
+            <a:extLst xmlns:a="http://schemas.openxmlformats.org/drawingml/2006/main">
+              <a:ext uri="{FF2B5EF4-FFF2-40B4-BE49-F238E27FC236}">
+                <a16:creationId xmlns:a16="http://schemas.microsoft.com/office/drawing/2014/main" id="{5FF9CA9F-BECF-49A4-BBC8-5F6ECB623801}"/>
               </a:ext>
             </a:extLst>
           </p:cNvPr>
@@ -2134,14 +3789,20 @@
       </p:sp>
       <p:pic>
         <p:nvPicPr>
-          <p:cNvPr id="12" name=""/>
+          <p:cNvPr id="2" name="">
+            <a:extLst xmlns:a="http://schemas.openxmlformats.org/drawingml/2006/main">
+              <a:ext uri="{FF2B5EF4-FFF2-40B4-BE49-F238E27FC236}">
+                <a16:creationId xmlns:a16="http://schemas.microsoft.com/office/drawing/2014/main" id="{D9E2982A-AC57-4668-8ACE-0F3133EDB2A2}"/>
+              </a:ext>
+            </a:extLst>
+          </p:cNvPr>
           <p:cNvPicPr>
             <a:picLocks xmlns:a="http://schemas.openxmlformats.org/drawingml/2006/main" noChangeAspect="1"/>
           </p:cNvPicPr>
           <p:nvPr/>
         </p:nvPicPr>
         <p:blipFill>
-          <a:blip xmlns:r="http://schemas.openxmlformats.org/officeDocument/2006/relationships" xmlns:a="http://schemas.openxmlformats.org/drawingml/2006/main" r:embed="R7b52766541214025"/>
+          <a:blip xmlns:r="http://schemas.openxmlformats.org/officeDocument/2006/relationships" xmlns:a="http://schemas.openxmlformats.org/drawingml/2006/main" r:embed="R3e2e1dc1c4c24225"/>
           <a:stretch xmlns:a="http://schemas.openxmlformats.org/drawingml/2006/main"/>
         </p:blipFill>
         <p:spPr>
@@ -2159,7 +3820,7 @@
           <p:cNvPr id="3" name="page">
             <a:extLst xmlns:a="http://schemas.openxmlformats.org/drawingml/2006/main">
               <a:ext uri="{FF2B5EF4-FFF2-40B4-BE49-F238E27FC236}">
-                <a16:creationId xmlns:a16="http://schemas.microsoft.com/office/drawing/2014/main" id="{F1B593C2-79C1-4B0F-A8CD-4C8898DACC46}"/>
+                <a16:creationId xmlns:a16="http://schemas.microsoft.com/office/drawing/2014/main" id="{251A9953-4161-47DD-9DAA-2C935D154F32}"/>
               </a:ext>
             </a:extLst>
           </p:cNvPr>
@@ -2186,7 +3847,18 @@
           <a:bodyPr xmlns:a="http://schemas.openxmlformats.org/drawingml/2006/main" lIns="0" tIns="0" rIns="0" bIns="0" anchor="ctr">
             <a:noAutofit/>
           </a:bodyPr>
-          <a:lstStyle xmlns:a="http://schemas.openxmlformats.org/drawingml/2006/main"/>
+          <a:lstStyle xmlns:a="http://schemas.openxmlformats.org/drawingml/2006/main">
+            <a:defPPr algn="r">
+              <a:defRPr sz="1400" b="0">
+                <a:solidFill>
+                  <a:srgbClr val="17202A"/>
+                </a:solidFill>
+                <a:latin typeface="Arial"/>
+                <a:ea typeface="Arial"/>
+                <a:cs typeface="Arial"/>
+              </a:defRPr>
+            </a:defPPr>
+          </a:lstStyle>
           <a:p xmlns:a="http://schemas.openxmlformats.org/drawingml/2006/main">
             <a:pPr algn="r">
               <a:defRPr sz="1400" b="0">
@@ -2214,22 +3886,22 @@
       </p:sp>
       <p:sp>
         <p:nvSpPr>
-          <p:cNvPr id="4" name="fictional-disclosure">
-            <a:extLst xmlns:a="http://schemas.openxmlformats.org/drawingml/2006/main">
-              <a:ext uri="{FF2B5EF4-FFF2-40B4-BE49-F238E27FC236}">
-                <a16:creationId xmlns:a16="http://schemas.microsoft.com/office/drawing/2014/main" id="{8BF51813-066F-466F-94D1-86E50B3B22B5}"/>
-              </a:ext>
-            </a:extLst>
-          </p:cNvPr>
-          <p:cNvSpPr>
-            <a:spLocks xmlns:a="http://schemas.openxmlformats.org/drawingml/2006/main" noGrp="1"/>
-          </p:cNvSpPr>
-          <p:nvPr/>
-        </p:nvSpPr>
-        <p:spPr>
-          <a:xfrm xmlns:a="http://schemas.openxmlformats.org/drawingml/2006/main">
-            <a:off x="1428750" y="4772025"/>
-            <a:ext cx="4762500" cy="266700"/>
+          <p:cNvPr id="4" name="venue">
+            <a:extLst xmlns:a="http://schemas.openxmlformats.org/drawingml/2006/main">
+              <a:ext uri="{FF2B5EF4-FFF2-40B4-BE49-F238E27FC236}">
+                <a16:creationId xmlns:a16="http://schemas.microsoft.com/office/drawing/2014/main" id="{4E7BCFF8-B0CD-4862-8CD4-DC4E4DDF74CD}"/>
+              </a:ext>
+            </a:extLst>
+          </p:cNvPr>
+          <p:cNvSpPr>
+            <a:spLocks xmlns:a="http://schemas.openxmlformats.org/drawingml/2006/main" noGrp="1"/>
+          </p:cNvSpPr>
+          <p:nvPr/>
+        </p:nvSpPr>
+        <p:spPr>
+          <a:xfrm xmlns:a="http://schemas.openxmlformats.org/drawingml/2006/main">
+            <a:off x="457200" y="304800"/>
+            <a:ext cx="8096250" cy="381000"/>
           </a:xfrm>
           <a:prstGeom xmlns:a="http://schemas.openxmlformats.org/drawingml/2006/main" prst="rect">
             <a:avLst/>
@@ -2244,65 +3916,18 @@
           <a:bodyPr xmlns:a="http://schemas.openxmlformats.org/drawingml/2006/main" lIns="0" tIns="0" rIns="0" bIns="0" anchor="ctr">
             <a:noAutofit/>
           </a:bodyPr>
-          <a:lstStyle xmlns:a="http://schemas.openxmlformats.org/drawingml/2006/main"/>
-          <a:p xmlns:a="http://schemas.openxmlformats.org/drawingml/2006/main">
-            <a:pPr algn="l">
-              <a:defRPr sz="1050" b="0">
-                <a:solidFill>
-                  <a:srgbClr val="59636E"/>
-                </a:solidFill>
-                <a:latin typeface="Noto Sans JP"/>
-                <a:ea typeface="Noto Sans JP"/>
-                <a:cs typeface="Noto Sans JP"/>
-              </a:defRPr>
-            </a:pPr>
-            <a:r>
-              <a:rPr sz="1050" b="0">
-                <a:solidFill>
-                  <a:srgbClr val="59636E"/>
-                </a:solidFill>
-                <a:latin typeface="Noto Sans JP"/>
-                <a:ea typeface="Noto Sans JP"/>
-                <a:cs typeface="Noto Sans JP"/>
-              </a:rPr>
-              <a:t>架空作例・合成データ</a:t>
-            </a:r>
-          </a:p>
-        </p:txBody>
-      </p:sp>
-      <p:sp>
-        <p:nvSpPr>
-          <p:cNvPr id="5" name="venue">
-            <a:extLst xmlns:a="http://schemas.openxmlformats.org/drawingml/2006/main">
-              <a:ext uri="{FF2B5EF4-FFF2-40B4-BE49-F238E27FC236}">
-                <a16:creationId xmlns:a16="http://schemas.microsoft.com/office/drawing/2014/main" id="{5817D363-8278-4271-8565-F19F013C7C31}"/>
-              </a:ext>
-            </a:extLst>
-          </p:cNvPr>
-          <p:cNvSpPr>
-            <a:spLocks xmlns:a="http://schemas.openxmlformats.org/drawingml/2006/main" noGrp="1"/>
-          </p:cNvSpPr>
-          <p:nvPr/>
-        </p:nvSpPr>
-        <p:spPr>
-          <a:xfrm xmlns:a="http://schemas.openxmlformats.org/drawingml/2006/main">
-            <a:off x="457200" y="304800"/>
-            <a:ext cx="8096250" cy="381000"/>
-          </a:xfrm>
-          <a:prstGeom xmlns:a="http://schemas.openxmlformats.org/drawingml/2006/main" prst="rect">
-            <a:avLst/>
-          </a:prstGeom>
-          <a:noFill xmlns:a="http://schemas.openxmlformats.org/drawingml/2006/main"/>
-          <a:ln xmlns:a="http://schemas.openxmlformats.org/drawingml/2006/main" w="0">
-            <a:noFill/>
-            <a:prstDash val="solid"/>
-          </a:ln>
-        </p:spPr>
-        <p:txBody>
-          <a:bodyPr xmlns:a="http://schemas.openxmlformats.org/drawingml/2006/main" lIns="0" tIns="0" rIns="0" bIns="0" anchor="ctr">
-            <a:noAutofit/>
-          </a:bodyPr>
-          <a:lstStyle xmlns:a="http://schemas.openxmlformats.org/drawingml/2006/main"/>
+          <a:lstStyle xmlns:a="http://schemas.openxmlformats.org/drawingml/2006/main">
+            <a:defPPr algn="l">
+              <a:defRPr sz="1800" b="0">
+                <a:solidFill>
+                  <a:srgbClr val="17202A"/>
+                </a:solidFill>
+                <a:latin typeface="Noto Sans JP"/>
+                <a:ea typeface="Noto Sans JP"/>
+                <a:cs typeface="Noto Sans JP"/>
+              </a:defRPr>
+            </a:defPPr>
+          </a:lstStyle>
           <a:p xmlns:a="http://schemas.openxmlformats.org/drawingml/2006/main">
             <a:pPr algn="l">
               <a:defRPr sz="1800" b="0">
@@ -2330,10 +3955,10 @@
       </p:sp>
       <p:sp>
         <p:nvSpPr>
-          <p:cNvPr id="6" name="topic">
-            <a:extLst xmlns:a="http://schemas.openxmlformats.org/drawingml/2006/main">
-              <a:ext uri="{FF2B5EF4-FFF2-40B4-BE49-F238E27FC236}">
-                <a16:creationId xmlns:a16="http://schemas.microsoft.com/office/drawing/2014/main" id="{82806F90-78A4-4BCE-A964-07C9569909FB}"/>
+          <p:cNvPr id="5" name="topic">
+            <a:extLst xmlns:a="http://schemas.openxmlformats.org/drawingml/2006/main">
+              <a:ext uri="{FF2B5EF4-FFF2-40B4-BE49-F238E27FC236}">
+                <a16:creationId xmlns:a16="http://schemas.microsoft.com/office/drawing/2014/main" id="{575EA22F-7D1A-4A53-B1B2-11560AF8572F}"/>
               </a:ext>
             </a:extLst>
           </p:cNvPr>
@@ -2362,7 +3987,18 @@
           <a:bodyPr xmlns:a="http://schemas.openxmlformats.org/drawingml/2006/main" lIns="0" tIns="0" rIns="0" bIns="0" anchor="ctr">
             <a:noAutofit/>
           </a:bodyPr>
-          <a:lstStyle xmlns:a="http://schemas.openxmlformats.org/drawingml/2006/main"/>
+          <a:lstStyle xmlns:a="http://schemas.openxmlformats.org/drawingml/2006/main">
+            <a:defPPr algn="ctr">
+              <a:defRPr sz="2900" b="1">
+                <a:solidFill>
+                  <a:srgbClr val="17202A"/>
+                </a:solidFill>
+                <a:latin typeface="Noto Sans JP"/>
+                <a:ea typeface="Noto Sans JP"/>
+                <a:cs typeface="Noto Sans JP"/>
+              </a:defRPr>
+            </a:defPPr>
+          </a:lstStyle>
           <a:p xmlns:a="http://schemas.openxmlformats.org/drawingml/2006/main">
             <a:pPr algn="ctr">
               <a:defRPr sz="2900" b="1">
@@ -2413,10 +4049,10 @@
       </p:sp>
       <p:sp>
         <p:nvSpPr>
-          <p:cNvPr id="7" name="affiliation">
-            <a:extLst xmlns:a="http://schemas.openxmlformats.org/drawingml/2006/main">
-              <a:ext uri="{FF2B5EF4-FFF2-40B4-BE49-F238E27FC236}">
-                <a16:creationId xmlns:a16="http://schemas.microsoft.com/office/drawing/2014/main" id="{62A47AF2-A2CD-4C2E-8BCD-F41C52874567}"/>
+          <p:cNvPr id="6" name="affiliation">
+            <a:extLst xmlns:a="http://schemas.openxmlformats.org/drawingml/2006/main">
+              <a:ext uri="{FF2B5EF4-FFF2-40B4-BE49-F238E27FC236}">
+                <a16:creationId xmlns:a16="http://schemas.microsoft.com/office/drawing/2014/main" id="{D29478C4-9143-4BF0-9DB8-FBA04EA5EB58}"/>
               </a:ext>
             </a:extLst>
           </p:cNvPr>
@@ -2445,7 +4081,18 @@
           <a:bodyPr xmlns:a="http://schemas.openxmlformats.org/drawingml/2006/main" lIns="0" tIns="0" rIns="0" bIns="0" anchor="ctr">
             <a:noAutofit/>
           </a:bodyPr>
-          <a:lstStyle xmlns:a="http://schemas.openxmlformats.org/drawingml/2006/main"/>
+          <a:lstStyle xmlns:a="http://schemas.openxmlformats.org/drawingml/2006/main">
+            <a:defPPr algn="ctr">
+              <a:defRPr sz="1800" b="0">
+                <a:solidFill>
+                  <a:srgbClr val="17202A"/>
+                </a:solidFill>
+                <a:latin typeface="Noto Sans JP"/>
+                <a:ea typeface="Noto Sans JP"/>
+                <a:cs typeface="Noto Sans JP"/>
+              </a:defRPr>
+            </a:defPPr>
+          </a:lstStyle>
           <a:p xmlns:a="http://schemas.openxmlformats.org/drawingml/2006/main">
             <a:pPr algn="ctr">
               <a:defRPr sz="1800" b="0">
@@ -2473,10 +4120,10 @@
       </p:sp>
       <p:sp>
         <p:nvSpPr>
-          <p:cNvPr id="8" name="author">
-            <a:extLst xmlns:a="http://schemas.openxmlformats.org/drawingml/2006/main">
-              <a:ext uri="{FF2B5EF4-FFF2-40B4-BE49-F238E27FC236}">
-                <a16:creationId xmlns:a16="http://schemas.microsoft.com/office/drawing/2014/main" id="{B067A746-2DC7-4AEA-AB1F-D9FD1D5B3318}"/>
+          <p:cNvPr id="7" name="author">
+            <a:extLst xmlns:a="http://schemas.openxmlformats.org/drawingml/2006/main">
+              <a:ext uri="{FF2B5EF4-FFF2-40B4-BE49-F238E27FC236}">
+                <a16:creationId xmlns:a16="http://schemas.microsoft.com/office/drawing/2014/main" id="{C364CF8C-AD96-4322-9BCC-19EF73C03F09}"/>
               </a:ext>
             </a:extLst>
           </p:cNvPr>
@@ -2505,7 +4152,18 @@
           <a:bodyPr xmlns:a="http://schemas.openxmlformats.org/drawingml/2006/main" lIns="0" tIns="0" rIns="0" bIns="0" anchor="ctr">
             <a:noAutofit/>
           </a:bodyPr>
-          <a:lstStyle xmlns:a="http://schemas.openxmlformats.org/drawingml/2006/main"/>
+          <a:lstStyle xmlns:a="http://schemas.openxmlformats.org/drawingml/2006/main">
+            <a:defPPr algn="ctr">
+              <a:defRPr sz="1800" b="0">
+                <a:solidFill>
+                  <a:srgbClr val="17202A"/>
+                </a:solidFill>
+                <a:latin typeface="Noto Sans JP"/>
+                <a:ea typeface="Noto Sans JP"/>
+                <a:cs typeface="Noto Sans JP"/>
+              </a:defRPr>
+            </a:defPPr>
+          </a:lstStyle>
           <a:p xmlns:a="http://schemas.openxmlformats.org/drawingml/2006/main">
             <a:pPr algn="ctr">
               <a:defRPr sz="1800" b="0">
@@ -2533,10 +4191,10 @@
       </p:sp>
       <p:sp>
         <p:nvSpPr>
-          <p:cNvPr id="9" name="research-photo-slot">
-            <a:extLst xmlns:a="http://schemas.openxmlformats.org/drawingml/2006/main">
-              <a:ext uri="{FF2B5EF4-FFF2-40B4-BE49-F238E27FC236}">
-                <a16:creationId xmlns:a16="http://schemas.microsoft.com/office/drawing/2014/main" id="{8F48CFB9-D28B-48BB-B4A1-2647B063D08E}"/>
+          <p:cNvPr id="8" name="research-photo-slot">
+            <a:extLst xmlns:a="http://schemas.openxmlformats.org/drawingml/2006/main">
+              <a:ext uri="{FF2B5EF4-FFF2-40B4-BE49-F238E27FC236}">
+                <a16:creationId xmlns:a16="http://schemas.microsoft.com/office/drawing/2014/main" id="{790BEC8C-6953-48E8-AD16-FA8FCC6DF00F}"/>
               </a:ext>
             </a:extLst>
           </p:cNvPr>
@@ -2566,10 +4224,10 @@
       </p:sp>
       <p:sp>
         <p:nvSpPr>
-          <p:cNvPr id="10" name="photo-slot-label">
-            <a:extLst xmlns:a="http://schemas.openxmlformats.org/drawingml/2006/main">
-              <a:ext uri="{FF2B5EF4-FFF2-40B4-BE49-F238E27FC236}">
-                <a16:creationId xmlns:a16="http://schemas.microsoft.com/office/drawing/2014/main" id="{59F961B4-23A4-485B-8DE2-0F7436B2C03A}"/>
+          <p:cNvPr id="9" name="photo-slot-label">
+            <a:extLst xmlns:a="http://schemas.openxmlformats.org/drawingml/2006/main">
+              <a:ext uri="{FF2B5EF4-FFF2-40B4-BE49-F238E27FC236}">
+                <a16:creationId xmlns:a16="http://schemas.microsoft.com/office/drawing/2014/main" id="{360F4D45-EFDF-4A98-B645-195A7FFDACB5}"/>
               </a:ext>
             </a:extLst>
           </p:cNvPr>
@@ -2596,7 +4254,18 @@
           <a:bodyPr xmlns:a="http://schemas.openxmlformats.org/drawingml/2006/main" lIns="0" tIns="0" rIns="0" bIns="0" anchor="ctr">
             <a:noAutofit/>
           </a:bodyPr>
-          <a:lstStyle xmlns:a="http://schemas.openxmlformats.org/drawingml/2006/main"/>
+          <a:lstStyle xmlns:a="http://schemas.openxmlformats.org/drawingml/2006/main">
+            <a:defPPr algn="ctr">
+              <a:defRPr sz="1800" b="0">
+                <a:solidFill>
+                  <a:srgbClr val="59636E"/>
+                </a:solidFill>
+                <a:latin typeface="Noto Sans JP"/>
+                <a:ea typeface="Noto Sans JP"/>
+                <a:cs typeface="Noto Sans JP"/>
+              </a:defRPr>
+            </a:defPPr>
+          </a:lstStyle>
           <a:p xmlns:a="http://schemas.openxmlformats.org/drawingml/2006/main">
             <a:pPr algn="ctr">
               <a:defRPr sz="1800" b="0">
@@ -2648,7 +4317,7 @@
     </p:spTree>
     <p:extLst>
       <p:ext uri="{BB962C8B-B14F-4D97-AF65-F5344CB8AC3E}">
-        <p14:creationId xmlns:p14="http://schemas.microsoft.com/office/powerpoint/2010/main" val="1970042511"/>
+        <p14:creationId xmlns:p14="http://schemas.microsoft.com/office/powerpoint/2010/main" val="679295220"/>
       </p:ext>
     </p:extLst>
   </p:cSld>
@@ -2676,10 +4345,10 @@
       </p:grpSpPr>
       <p:sp>
         <p:nvSpPr>
-          <p:cNvPr id="8" name="venue">
-            <a:extLst xmlns:a="http://schemas.openxmlformats.org/drawingml/2006/main">
-              <a:ext uri="{FF2B5EF4-FFF2-40B4-BE49-F238E27FC236}">
-                <a16:creationId xmlns:a16="http://schemas.microsoft.com/office/drawing/2014/main" id="{6F61255B-13AE-4E1F-8C64-05EBD216D657}"/>
+          <p:cNvPr id="7" name="venue">
+            <a:extLst xmlns:a="http://schemas.openxmlformats.org/drawingml/2006/main">
+              <a:ext uri="{FF2B5EF4-FFF2-40B4-BE49-F238E27FC236}">
+                <a16:creationId xmlns:a16="http://schemas.microsoft.com/office/drawing/2014/main" id="{8D1C7A22-E12B-4FB8-8A71-18A6FEDCA35F}"/>
               </a:ext>
             </a:extLst>
           </p:cNvPr>
@@ -2706,7 +4375,18 @@
           <a:bodyPr xmlns:a="http://schemas.openxmlformats.org/drawingml/2006/main" lIns="0" tIns="0" rIns="0" bIns="0" anchor="ctr">
             <a:noAutofit/>
           </a:bodyPr>
-          <a:lstStyle xmlns:a="http://schemas.openxmlformats.org/drawingml/2006/main"/>
+          <a:lstStyle xmlns:a="http://schemas.openxmlformats.org/drawingml/2006/main">
+            <a:defPPr algn="ctr">
+              <a:defRPr sz="1800" b="0">
+                <a:solidFill>
+                  <a:srgbClr val="FFFFFF"/>
+                </a:solidFill>
+                <a:latin typeface="Noto Sans JP"/>
+                <a:ea typeface="Noto Sans JP"/>
+                <a:cs typeface="Noto Sans JP"/>
+              </a:defRPr>
+            </a:defPPr>
+          </a:lstStyle>
           <a:p xmlns:a="http://schemas.openxmlformats.org/drawingml/2006/main">
             <a:pPr algn="ctr">
               <a:defRPr sz="1800" b="0">
@@ -2737,7 +4417,7 @@
           <p:cNvPr id="2" name="topic">
             <a:extLst xmlns:a="http://schemas.openxmlformats.org/drawingml/2006/main">
               <a:ext uri="{FF2B5EF4-FFF2-40B4-BE49-F238E27FC236}">
-                <a16:creationId xmlns:a16="http://schemas.microsoft.com/office/drawing/2014/main" id="{D250210E-28C2-4841-BA6A-609F90244A82}"/>
+                <a16:creationId xmlns:a16="http://schemas.microsoft.com/office/drawing/2014/main" id="{E3DCF446-71E9-4DEC-B537-76FD2056A140}"/>
               </a:ext>
             </a:extLst>
           </p:cNvPr>
@@ -2764,7 +4444,18 @@
           <a:bodyPr xmlns:a="http://schemas.openxmlformats.org/drawingml/2006/main" lIns="0" tIns="0" rIns="0" bIns="0" anchor="ctr">
             <a:noAutofit/>
           </a:bodyPr>
-          <a:lstStyle xmlns:a="http://schemas.openxmlformats.org/drawingml/2006/main"/>
+          <a:lstStyle xmlns:a="http://schemas.openxmlformats.org/drawingml/2006/main">
+            <a:defPPr algn="ctr">
+              <a:defRPr sz="3000" b="1">
+                <a:solidFill>
+                  <a:srgbClr val="FFFFFF"/>
+                </a:solidFill>
+                <a:latin typeface="Noto Sans JP"/>
+                <a:ea typeface="Noto Sans JP"/>
+                <a:cs typeface="Noto Sans JP"/>
+              </a:defRPr>
+            </a:defPPr>
+          </a:lstStyle>
           <a:p xmlns:a="http://schemas.openxmlformats.org/drawingml/2006/main">
             <a:pPr algn="ctr">
               <a:defRPr sz="3000" b="1">
@@ -2818,7 +4509,7 @@
           <p:cNvPr id="3" name="affiliation">
             <a:extLst xmlns:a="http://schemas.openxmlformats.org/drawingml/2006/main">
               <a:ext uri="{FF2B5EF4-FFF2-40B4-BE49-F238E27FC236}">
-                <a16:creationId xmlns:a16="http://schemas.microsoft.com/office/drawing/2014/main" id="{13DF0CF5-68B8-49C7-8DB1-B913D2497370}"/>
+                <a16:creationId xmlns:a16="http://schemas.microsoft.com/office/drawing/2014/main" id="{BB4B51F1-C581-485A-BDB4-500F048047AB}"/>
               </a:ext>
             </a:extLst>
           </p:cNvPr>
@@ -2845,7 +4536,18 @@
           <a:bodyPr xmlns:a="http://schemas.openxmlformats.org/drawingml/2006/main" lIns="0" tIns="0" rIns="0" bIns="0" anchor="ctr">
             <a:noAutofit/>
           </a:bodyPr>
-          <a:lstStyle xmlns:a="http://schemas.openxmlformats.org/drawingml/2006/main"/>
+          <a:lstStyle xmlns:a="http://schemas.openxmlformats.org/drawingml/2006/main">
+            <a:defPPr algn="ctr">
+              <a:defRPr sz="1800" b="0">
+                <a:solidFill>
+                  <a:srgbClr val="FFFFFF"/>
+                </a:solidFill>
+                <a:latin typeface="Noto Sans JP"/>
+                <a:ea typeface="Noto Sans JP"/>
+                <a:cs typeface="Noto Sans JP"/>
+              </a:defRPr>
+            </a:defPPr>
+          </a:lstStyle>
           <a:p xmlns:a="http://schemas.openxmlformats.org/drawingml/2006/main">
             <a:pPr algn="ctr">
               <a:defRPr sz="1800" b="0">
@@ -2876,7 +4578,7 @@
           <p:cNvPr id="4" name="author">
             <a:extLst xmlns:a="http://schemas.openxmlformats.org/drawingml/2006/main">
               <a:ext uri="{FF2B5EF4-FFF2-40B4-BE49-F238E27FC236}">
-                <a16:creationId xmlns:a16="http://schemas.microsoft.com/office/drawing/2014/main" id="{F2838BA7-158E-490D-8E44-88DCAB22C970}"/>
+                <a16:creationId xmlns:a16="http://schemas.microsoft.com/office/drawing/2014/main" id="{807FEFF5-D3EA-461A-A3DA-AB0E62AD55C5}"/>
               </a:ext>
             </a:extLst>
           </p:cNvPr>
@@ -2903,7 +4605,18 @@
           <a:bodyPr xmlns:a="http://schemas.openxmlformats.org/drawingml/2006/main" lIns="0" tIns="0" rIns="0" bIns="0" anchor="ctr">
             <a:noAutofit/>
           </a:bodyPr>
-          <a:lstStyle xmlns:a="http://schemas.openxmlformats.org/drawingml/2006/main"/>
+          <a:lstStyle xmlns:a="http://schemas.openxmlformats.org/drawingml/2006/main">
+            <a:defPPr algn="ctr">
+              <a:defRPr sz="1800" b="0">
+                <a:solidFill>
+                  <a:srgbClr val="FFFFFF"/>
+                </a:solidFill>
+                <a:latin typeface="Noto Sans JP"/>
+                <a:ea typeface="Noto Sans JP"/>
+                <a:cs typeface="Noto Sans JP"/>
+              </a:defRPr>
+            </a:defPPr>
+          </a:lstStyle>
           <a:p xmlns:a="http://schemas.openxmlformats.org/drawingml/2006/main">
             <a:pPr algn="ctr">
               <a:defRPr sz="1800" b="0">
@@ -2934,7 +4647,7 @@
           <p:cNvPr id="5" name="media-placeholder">
             <a:extLst xmlns:a="http://schemas.openxmlformats.org/drawingml/2006/main">
               <a:ext uri="{FF2B5EF4-FFF2-40B4-BE49-F238E27FC236}">
-                <a16:creationId xmlns:a16="http://schemas.microsoft.com/office/drawing/2014/main" id="{A4DDFF30-297E-432A-9162-80937404D99A}"/>
+                <a16:creationId xmlns:a16="http://schemas.microsoft.com/office/drawing/2014/main" id="{FD340E0B-31A4-4D09-A8F0-5C0A6EB09FEE}"/>
               </a:ext>
             </a:extLst>
           </p:cNvPr>
@@ -2961,7 +4674,18 @@
           <a:bodyPr xmlns:a="http://schemas.openxmlformats.org/drawingml/2006/main" lIns="0" tIns="0" rIns="0" bIns="0" anchor="ctr">
             <a:noAutofit/>
           </a:bodyPr>
-          <a:lstStyle xmlns:a="http://schemas.openxmlformats.org/drawingml/2006/main"/>
+          <a:lstStyle xmlns:a="http://schemas.openxmlformats.org/drawingml/2006/main">
+            <a:defPPr algn="ctr">
+              <a:defRPr sz="1800" b="0">
+                <a:solidFill>
+                  <a:srgbClr val="FFFFFF"/>
+                </a:solidFill>
+                <a:latin typeface="Noto Sans JP"/>
+                <a:ea typeface="Noto Sans JP"/>
+                <a:cs typeface="Noto Sans JP"/>
+              </a:defRPr>
+            </a:defPPr>
+          </a:lstStyle>
           <a:p xmlns:a="http://schemas.openxmlformats.org/drawingml/2006/main">
             <a:pPr algn="ctr">
               <a:defRPr sz="1800" b="0">
@@ -2989,22 +4713,22 @@
       </p:sp>
       <p:sp>
         <p:nvSpPr>
-          <p:cNvPr id="6" name="fictional-disclosure">
-            <a:extLst xmlns:a="http://schemas.openxmlformats.org/drawingml/2006/main">
-              <a:ext uri="{FF2B5EF4-FFF2-40B4-BE49-F238E27FC236}">
-                <a16:creationId xmlns:a16="http://schemas.microsoft.com/office/drawing/2014/main" id="{36F3B395-A868-43AF-A4F9-636A332A115D}"/>
-              </a:ext>
-            </a:extLst>
-          </p:cNvPr>
-          <p:cNvSpPr>
-            <a:spLocks xmlns:a="http://schemas.openxmlformats.org/drawingml/2006/main" noGrp="1"/>
-          </p:cNvSpPr>
-          <p:nvPr/>
-        </p:nvSpPr>
-        <p:spPr>
-          <a:xfrm xmlns:a="http://schemas.openxmlformats.org/drawingml/2006/main">
-            <a:off x="1428750" y="4714875"/>
-            <a:ext cx="4762500" cy="247650"/>
+          <p:cNvPr id="6" name="page">
+            <a:extLst xmlns:a="http://schemas.openxmlformats.org/drawingml/2006/main">
+              <a:ext uri="{FF2B5EF4-FFF2-40B4-BE49-F238E27FC236}">
+                <a16:creationId xmlns:a16="http://schemas.microsoft.com/office/drawing/2014/main" id="{5D7A3B1B-021D-4C73-9C6F-B6F7FE32856C}"/>
+              </a:ext>
+            </a:extLst>
+          </p:cNvPr>
+          <p:cNvSpPr>
+            <a:spLocks xmlns:a="http://schemas.openxmlformats.org/drawingml/2006/main" noGrp="1"/>
+          </p:cNvSpPr>
+          <p:nvPr/>
+        </p:nvSpPr>
+        <p:spPr>
+          <a:xfrm xmlns:a="http://schemas.openxmlformats.org/drawingml/2006/main">
+            <a:off x="6801307" y="4767682"/>
+            <a:ext cx="2133295" cy="274320"/>
           </a:xfrm>
           <a:prstGeom xmlns:a="http://schemas.openxmlformats.org/drawingml/2006/main" prst="rect">
             <a:avLst/>
@@ -3019,65 +4743,18 @@
           <a:bodyPr xmlns:a="http://schemas.openxmlformats.org/drawingml/2006/main" lIns="0" tIns="0" rIns="0" bIns="0" anchor="ctr">
             <a:noAutofit/>
           </a:bodyPr>
-          <a:lstStyle xmlns:a="http://schemas.openxmlformats.org/drawingml/2006/main"/>
-          <a:p xmlns:a="http://schemas.openxmlformats.org/drawingml/2006/main">
-            <a:pPr algn="ctr">
-              <a:defRPr sz="1200" b="0">
-                <a:solidFill>
-                  <a:srgbClr val="DDE2E5"/>
-                </a:solidFill>
-                <a:latin typeface="Noto Sans JP"/>
-                <a:ea typeface="Noto Sans JP"/>
-                <a:cs typeface="Noto Sans JP"/>
-              </a:defRPr>
-            </a:pPr>
-            <a:r>
-              <a:rPr sz="1200" b="0">
-                <a:solidFill>
-                  <a:srgbClr val="DDE2E5"/>
-                </a:solidFill>
-                <a:latin typeface="Noto Sans JP"/>
-                <a:ea typeface="Noto Sans JP"/>
-                <a:cs typeface="Noto Sans JP"/>
-              </a:rPr>
-              <a:t>架空作例／静止レイアウト／実動画は未同梱</a:t>
-            </a:r>
-          </a:p>
-        </p:txBody>
-      </p:sp>
-      <p:sp>
-        <p:nvSpPr>
-          <p:cNvPr id="7" name="page">
-            <a:extLst xmlns:a="http://schemas.openxmlformats.org/drawingml/2006/main">
-              <a:ext uri="{FF2B5EF4-FFF2-40B4-BE49-F238E27FC236}">
-                <a16:creationId xmlns:a16="http://schemas.microsoft.com/office/drawing/2014/main" id="{F441D28E-6C96-4291-9211-38729D122575}"/>
-              </a:ext>
-            </a:extLst>
-          </p:cNvPr>
-          <p:cNvSpPr>
-            <a:spLocks xmlns:a="http://schemas.openxmlformats.org/drawingml/2006/main" noGrp="1"/>
-          </p:cNvSpPr>
-          <p:nvPr/>
-        </p:nvSpPr>
-        <p:spPr>
-          <a:xfrm xmlns:a="http://schemas.openxmlformats.org/drawingml/2006/main">
-            <a:off x="6801307" y="4767682"/>
-            <a:ext cx="2133295" cy="274320"/>
-          </a:xfrm>
-          <a:prstGeom xmlns:a="http://schemas.openxmlformats.org/drawingml/2006/main" prst="rect">
-            <a:avLst/>
-          </a:prstGeom>
-          <a:noFill xmlns:a="http://schemas.openxmlformats.org/drawingml/2006/main"/>
-          <a:ln xmlns:a="http://schemas.openxmlformats.org/drawingml/2006/main" w="0">
-            <a:noFill/>
-            <a:prstDash val="solid"/>
-          </a:ln>
-        </p:spPr>
-        <p:txBody>
-          <a:bodyPr xmlns:a="http://schemas.openxmlformats.org/drawingml/2006/main" lIns="0" tIns="0" rIns="0" bIns="0" anchor="ctr">
-            <a:noAutofit/>
-          </a:bodyPr>
-          <a:lstStyle xmlns:a="http://schemas.openxmlformats.org/drawingml/2006/main"/>
+          <a:lstStyle xmlns:a="http://schemas.openxmlformats.org/drawingml/2006/main">
+            <a:defPPr algn="r">
+              <a:defRPr sz="1400" b="0">
+                <a:solidFill>
+                  <a:srgbClr val="FFFFFF"/>
+                </a:solidFill>
+                <a:latin typeface="Arial"/>
+                <a:ea typeface="Arial"/>
+                <a:cs typeface="Arial"/>
+              </a:defRPr>
+            </a:defPPr>
+          </a:lstStyle>
           <a:p xmlns:a="http://schemas.openxmlformats.org/drawingml/2006/main">
             <a:pPr algn="r">
               <a:defRPr sz="1400" b="0">
@@ -3106,7 +4783,7 @@
     </p:spTree>
     <p:extLst>
       <p:ext uri="{BB962C8B-B14F-4D97-AF65-F5344CB8AC3E}">
-        <p14:creationId xmlns:p14="http://schemas.microsoft.com/office/powerpoint/2010/main" val="803959514"/>
+        <p14:creationId xmlns:p14="http://schemas.microsoft.com/office/powerpoint/2010/main" val="1261535688"/>
       </p:ext>
     </p:extLst>
   </p:cSld>
@@ -3134,10 +4811,10 @@
       </p:grpSpPr>
       <p:sp>
         <p:nvSpPr>
-          <p:cNvPr id="24" name="footer-line">
-            <a:extLst xmlns:a="http://schemas.openxmlformats.org/drawingml/2006/main">
-              <a:ext uri="{FF2B5EF4-FFF2-40B4-BE49-F238E27FC236}">
-                <a16:creationId xmlns:a16="http://schemas.microsoft.com/office/drawing/2014/main" id="{0CF76A38-79BF-42D0-A8FF-9B56CD7947A6}"/>
+          <p:cNvPr id="22" name="footer-line">
+            <a:extLst xmlns:a="http://schemas.openxmlformats.org/drawingml/2006/main">
+              <a:ext uri="{FF2B5EF4-FFF2-40B4-BE49-F238E27FC236}">
+                <a16:creationId xmlns:a16="http://schemas.microsoft.com/office/drawing/2014/main" id="{B35B23FC-6452-44FB-BB40-AC977F59BC29}"/>
               </a:ext>
             </a:extLst>
           </p:cNvPr>
@@ -3165,14 +4842,20 @@
       </p:sp>
       <p:pic>
         <p:nvPicPr>
-          <p:cNvPr id="25" name=""/>
+          <p:cNvPr id="2" name="">
+            <a:extLst xmlns:a="http://schemas.openxmlformats.org/drawingml/2006/main">
+              <a:ext uri="{FF2B5EF4-FFF2-40B4-BE49-F238E27FC236}">
+                <a16:creationId xmlns:a16="http://schemas.microsoft.com/office/drawing/2014/main" id="{5D3E4159-C1A4-4B61-B8A6-BC6F81B61CBD}"/>
+              </a:ext>
+            </a:extLst>
+          </p:cNvPr>
           <p:cNvPicPr>
             <a:picLocks xmlns:a="http://schemas.openxmlformats.org/drawingml/2006/main" noChangeAspect="1"/>
           </p:cNvPicPr>
           <p:nvPr/>
         </p:nvPicPr>
         <p:blipFill>
-          <a:blip xmlns:r="http://schemas.openxmlformats.org/officeDocument/2006/relationships" xmlns:a="http://schemas.openxmlformats.org/drawingml/2006/main" r:embed="R77ae94c99d21455d"/>
+          <a:blip xmlns:r="http://schemas.openxmlformats.org/officeDocument/2006/relationships" xmlns:a="http://schemas.openxmlformats.org/drawingml/2006/main" r:embed="R24f60bdaba65476f"/>
           <a:stretch xmlns:a="http://schemas.openxmlformats.org/drawingml/2006/main"/>
         </p:blipFill>
         <p:spPr>
@@ -3190,7 +4873,7 @@
           <p:cNvPr id="3" name="page">
             <a:extLst xmlns:a="http://schemas.openxmlformats.org/drawingml/2006/main">
               <a:ext uri="{FF2B5EF4-FFF2-40B4-BE49-F238E27FC236}">
-                <a16:creationId xmlns:a16="http://schemas.microsoft.com/office/drawing/2014/main" id="{1747D922-61D4-437F-81F7-DD753A466ECF}"/>
+                <a16:creationId xmlns:a16="http://schemas.microsoft.com/office/drawing/2014/main" id="{DD3EE526-1B81-40D3-9B7D-05D5DB69127A}"/>
               </a:ext>
             </a:extLst>
           </p:cNvPr>
@@ -3217,7 +4900,18 @@
           <a:bodyPr xmlns:a="http://schemas.openxmlformats.org/drawingml/2006/main" lIns="0" tIns="0" rIns="0" bIns="0" anchor="ctr">
             <a:noAutofit/>
           </a:bodyPr>
-          <a:lstStyle xmlns:a="http://schemas.openxmlformats.org/drawingml/2006/main"/>
+          <a:lstStyle xmlns:a="http://schemas.openxmlformats.org/drawingml/2006/main">
+            <a:defPPr algn="r">
+              <a:defRPr sz="1400" b="0">
+                <a:solidFill>
+                  <a:srgbClr val="17202A"/>
+                </a:solidFill>
+                <a:latin typeface="Arial"/>
+                <a:ea typeface="Arial"/>
+                <a:cs typeface="Arial"/>
+              </a:defRPr>
+            </a:defPPr>
+          </a:lstStyle>
           <a:p xmlns:a="http://schemas.openxmlformats.org/drawingml/2006/main">
             <a:pPr algn="r">
               <a:defRPr sz="1400" b="0">
@@ -3245,22 +4939,22 @@
       </p:sp>
       <p:sp>
         <p:nvSpPr>
-          <p:cNvPr id="4" name="fictional-disclosure">
-            <a:extLst xmlns:a="http://schemas.openxmlformats.org/drawingml/2006/main">
-              <a:ext uri="{FF2B5EF4-FFF2-40B4-BE49-F238E27FC236}">
-                <a16:creationId xmlns:a16="http://schemas.microsoft.com/office/drawing/2014/main" id="{23A6E96B-F1EA-4D48-9039-C5CCA2A23DF1}"/>
-              </a:ext>
-            </a:extLst>
-          </p:cNvPr>
-          <p:cNvSpPr>
-            <a:spLocks xmlns:a="http://schemas.openxmlformats.org/drawingml/2006/main" noGrp="1"/>
-          </p:cNvSpPr>
-          <p:nvPr/>
-        </p:nvSpPr>
-        <p:spPr>
-          <a:xfrm xmlns:a="http://schemas.openxmlformats.org/drawingml/2006/main">
-            <a:off x="1428750" y="4772025"/>
-            <a:ext cx="4762500" cy="266700"/>
+          <p:cNvPr id="4" name="running-chapter-3">
+            <a:extLst xmlns:a="http://schemas.openxmlformats.org/drawingml/2006/main">
+              <a:ext uri="{FF2B5EF4-FFF2-40B4-BE49-F238E27FC236}">
+                <a16:creationId xmlns:a16="http://schemas.microsoft.com/office/drawing/2014/main" id="{EA37CE58-439B-4F92-8CD9-DE51BDAAC2A5}"/>
+              </a:ext>
+            </a:extLst>
+          </p:cNvPr>
+          <p:cNvSpPr>
+            <a:spLocks xmlns:a="http://schemas.openxmlformats.org/drawingml/2006/main" noGrp="1"/>
+          </p:cNvSpPr>
+          <p:nvPr/>
+        </p:nvSpPr>
+        <p:spPr>
+          <a:xfrm xmlns:a="http://schemas.openxmlformats.org/drawingml/2006/main">
+            <a:off x="457200" y="109728"/>
+            <a:ext cx="2560320" cy="304800"/>
           </a:xfrm>
           <a:prstGeom xmlns:a="http://schemas.openxmlformats.org/drawingml/2006/main" prst="rect">
             <a:avLst/>
@@ -3275,65 +4969,18 @@
           <a:bodyPr xmlns:a="http://schemas.openxmlformats.org/drawingml/2006/main" lIns="0" tIns="0" rIns="0" bIns="0" anchor="ctr">
             <a:noAutofit/>
           </a:bodyPr>
-          <a:lstStyle xmlns:a="http://schemas.openxmlformats.org/drawingml/2006/main"/>
-          <a:p xmlns:a="http://schemas.openxmlformats.org/drawingml/2006/main">
-            <a:pPr algn="l">
-              <a:defRPr sz="1050" b="0">
-                <a:solidFill>
-                  <a:srgbClr val="59636E"/>
-                </a:solidFill>
-                <a:latin typeface="Noto Sans JP"/>
-                <a:ea typeface="Noto Sans JP"/>
-                <a:cs typeface="Noto Sans JP"/>
-              </a:defRPr>
-            </a:pPr>
-            <a:r>
-              <a:rPr sz="1050" b="0">
-                <a:solidFill>
-                  <a:srgbClr val="59636E"/>
-                </a:solidFill>
-                <a:latin typeface="Noto Sans JP"/>
-                <a:ea typeface="Noto Sans JP"/>
-                <a:cs typeface="Noto Sans JP"/>
-              </a:rPr>
-              <a:t>架空作例・合成データ</a:t>
-            </a:r>
-          </a:p>
-        </p:txBody>
-      </p:sp>
-      <p:sp>
-        <p:nvSpPr>
-          <p:cNvPr id="5" name="running-chapter-3">
-            <a:extLst xmlns:a="http://schemas.openxmlformats.org/drawingml/2006/main">
-              <a:ext uri="{FF2B5EF4-FFF2-40B4-BE49-F238E27FC236}">
-                <a16:creationId xmlns:a16="http://schemas.microsoft.com/office/drawing/2014/main" id="{E875A1FD-B107-428B-8A0A-DFDD46978CBD}"/>
-              </a:ext>
-            </a:extLst>
-          </p:cNvPr>
-          <p:cNvSpPr>
-            <a:spLocks xmlns:a="http://schemas.openxmlformats.org/drawingml/2006/main" noGrp="1"/>
-          </p:cNvSpPr>
-          <p:nvPr/>
-        </p:nvSpPr>
-        <p:spPr>
-          <a:xfrm xmlns:a="http://schemas.openxmlformats.org/drawingml/2006/main">
-            <a:off x="457200" y="109728"/>
-            <a:ext cx="2560320" cy="304800"/>
-          </a:xfrm>
-          <a:prstGeom xmlns:a="http://schemas.openxmlformats.org/drawingml/2006/main" prst="rect">
-            <a:avLst/>
-          </a:prstGeom>
-          <a:noFill xmlns:a="http://schemas.openxmlformats.org/drawingml/2006/main"/>
-          <a:ln xmlns:a="http://schemas.openxmlformats.org/drawingml/2006/main" w="0">
-            <a:noFill/>
-            <a:prstDash val="solid"/>
-          </a:ln>
-        </p:spPr>
-        <p:txBody>
-          <a:bodyPr xmlns:a="http://schemas.openxmlformats.org/drawingml/2006/main" lIns="0" tIns="0" rIns="0" bIns="0" anchor="ctr">
-            <a:noAutofit/>
-          </a:bodyPr>
-          <a:lstStyle xmlns:a="http://schemas.openxmlformats.org/drawingml/2006/main"/>
+          <a:lstStyle xmlns:a="http://schemas.openxmlformats.org/drawingml/2006/main">
+            <a:defPPr algn="l">
+              <a:defRPr sz="1200" b="0">
+                <a:solidFill>
+                  <a:srgbClr val="38761D"/>
+                </a:solidFill>
+                <a:latin typeface="Noto Sans JP"/>
+                <a:ea typeface="Noto Sans JP"/>
+                <a:cs typeface="Noto Sans JP"/>
+              </a:defRPr>
+            </a:defPPr>
+          </a:lstStyle>
           <a:p xmlns:a="http://schemas.openxmlformats.org/drawingml/2006/main">
             <a:pPr algn="l">
               <a:defRPr sz="1200" b="0">
@@ -3361,10 +5008,10 @@
       </p:sp>
       <p:sp>
         <p:nvSpPr>
-          <p:cNvPr id="6" name="running-title-3">
-            <a:extLst xmlns:a="http://schemas.openxmlformats.org/drawingml/2006/main">
-              <a:ext uri="{FF2B5EF4-FFF2-40B4-BE49-F238E27FC236}">
-                <a16:creationId xmlns:a16="http://schemas.microsoft.com/office/drawing/2014/main" id="{6D8C23E4-D6B4-4E05-835C-A8FF3374C09E}"/>
+          <p:cNvPr id="5" name="running-title-3">
+            <a:extLst xmlns:a="http://schemas.openxmlformats.org/drawingml/2006/main">
+              <a:ext uri="{FF2B5EF4-FFF2-40B4-BE49-F238E27FC236}">
+                <a16:creationId xmlns:a16="http://schemas.microsoft.com/office/drawing/2014/main" id="{F8C52184-3D71-45A7-97FB-7799DE4F8A67}"/>
               </a:ext>
             </a:extLst>
           </p:cNvPr>
@@ -3391,7 +5038,18 @@
           <a:bodyPr xmlns:a="http://schemas.openxmlformats.org/drawingml/2006/main" lIns="0" tIns="0" rIns="0" bIns="0" anchor="ctr">
             <a:noAutofit/>
           </a:bodyPr>
-          <a:lstStyle xmlns:a="http://schemas.openxmlformats.org/drawingml/2006/main"/>
+          <a:lstStyle xmlns:a="http://schemas.openxmlformats.org/drawingml/2006/main">
+            <a:defPPr algn="r">
+              <a:defRPr sz="1200" b="0">
+                <a:solidFill>
+                  <a:srgbClr val="38761D"/>
+                </a:solidFill>
+                <a:latin typeface="Noto Sans JP"/>
+                <a:ea typeface="Noto Sans JP"/>
+                <a:cs typeface="Noto Sans JP"/>
+              </a:defRPr>
+            </a:defPPr>
+          </a:lstStyle>
           <a:p xmlns:a="http://schemas.openxmlformats.org/drawingml/2006/main">
             <a:pPr algn="r">
               <a:defRPr sz="1200" b="0">
@@ -3419,10 +5077,10 @@
       </p:sp>
       <p:sp>
         <p:nvSpPr>
-          <p:cNvPr id="7" name="title">
-            <a:extLst xmlns:a="http://schemas.openxmlformats.org/drawingml/2006/main">
-              <a:ext uri="{FF2B5EF4-FFF2-40B4-BE49-F238E27FC236}">
-                <a16:creationId xmlns:a16="http://schemas.microsoft.com/office/drawing/2014/main" id="{EBFE022A-F771-4D2C-89DB-2C0EA8638568}"/>
+          <p:cNvPr id="6" name="title">
+            <a:extLst xmlns:a="http://schemas.openxmlformats.org/drawingml/2006/main">
+              <a:ext uri="{FF2B5EF4-FFF2-40B4-BE49-F238E27FC236}">
+                <a16:creationId xmlns:a16="http://schemas.microsoft.com/office/drawing/2014/main" id="{72EF4B07-4EE5-4175-9317-DCE51295136D}"/>
               </a:ext>
             </a:extLst>
           </p:cNvPr>
@@ -3449,7 +5107,18 @@
           <a:bodyPr xmlns:a="http://schemas.openxmlformats.org/drawingml/2006/main" lIns="0" tIns="0" rIns="0" bIns="0" anchor="ctr">
             <a:noAutofit/>
           </a:bodyPr>
-          <a:lstStyle xmlns:a="http://schemas.openxmlformats.org/drawingml/2006/main"/>
+          <a:lstStyle xmlns:a="http://schemas.openxmlformats.org/drawingml/2006/main">
+            <a:defPPr algn="l">
+              <a:defRPr sz="2700" b="1">
+                <a:solidFill>
+                  <a:srgbClr val="17202A"/>
+                </a:solidFill>
+                <a:latin typeface="Noto Sans JP"/>
+                <a:ea typeface="Noto Sans JP"/>
+                <a:cs typeface="Noto Sans JP"/>
+              </a:defRPr>
+            </a:defPPr>
+          </a:lstStyle>
           <a:p xmlns:a="http://schemas.openxmlformats.org/drawingml/2006/main">
             <a:pPr algn="l">
               <a:defRPr sz="2700" b="1">
@@ -3477,10 +5146,10 @@
       </p:sp>
       <p:sp>
         <p:nvSpPr>
-          <p:cNvPr id="8" name="message">
-            <a:extLst xmlns:a="http://schemas.openxmlformats.org/drawingml/2006/main">
-              <a:ext uri="{FF2B5EF4-FFF2-40B4-BE49-F238E27FC236}">
-                <a16:creationId xmlns:a16="http://schemas.microsoft.com/office/drawing/2014/main" id="{00C5FBAB-EB6E-4EB4-838E-5F9546842467}"/>
+          <p:cNvPr id="7" name="message">
+            <a:extLst xmlns:a="http://schemas.openxmlformats.org/drawingml/2006/main">
+              <a:ext uri="{FF2B5EF4-FFF2-40B4-BE49-F238E27FC236}">
+                <a16:creationId xmlns:a16="http://schemas.microsoft.com/office/drawing/2014/main" id="{0122A050-816F-4262-9C20-09ACB2D62D1D}"/>
               </a:ext>
             </a:extLst>
           </p:cNvPr>
@@ -3507,7 +5176,18 @@
           <a:bodyPr xmlns:a="http://schemas.openxmlformats.org/drawingml/2006/main" lIns="0" tIns="0" rIns="0" bIns="0" anchor="ctr">
             <a:noAutofit/>
           </a:bodyPr>
-          <a:lstStyle xmlns:a="http://schemas.openxmlformats.org/drawingml/2006/main"/>
+          <a:lstStyle xmlns:a="http://schemas.openxmlformats.org/drawingml/2006/main">
+            <a:defPPr algn="l">
+              <a:defRPr sz="2300" b="1">
+                <a:solidFill>
+                  <a:srgbClr val="17202A"/>
+                </a:solidFill>
+                <a:latin typeface="Noto Sans JP"/>
+                <a:ea typeface="Noto Sans JP"/>
+                <a:cs typeface="Noto Sans JP"/>
+              </a:defRPr>
+            </a:defPPr>
+          </a:lstStyle>
           <a:p xmlns:a="http://schemas.openxmlformats.org/drawingml/2006/main">
             <a:pPr algn="l">
               <a:defRPr sz="2300" b="1">
@@ -3535,10 +5215,10 @@
       </p:sp>
       <p:sp>
         <p:nvSpPr>
-          <p:cNvPr id="9" name="toc-label-0">
-            <a:extLst xmlns:a="http://schemas.openxmlformats.org/drawingml/2006/main">
-              <a:ext uri="{FF2B5EF4-FFF2-40B4-BE49-F238E27FC236}">
-                <a16:creationId xmlns:a16="http://schemas.microsoft.com/office/drawing/2014/main" id="{07C12E99-4276-4B0D-A172-0DE29F3B5BD6}"/>
+          <p:cNvPr id="8" name="toc-label-0">
+            <a:extLst xmlns:a="http://schemas.openxmlformats.org/drawingml/2006/main">
+              <a:ext uri="{FF2B5EF4-FFF2-40B4-BE49-F238E27FC236}">
+                <a16:creationId xmlns:a16="http://schemas.microsoft.com/office/drawing/2014/main" id="{4521D25D-8728-4FD7-8720-09521E6AEB66}"/>
               </a:ext>
             </a:extLst>
           </p:cNvPr>
@@ -3565,7 +5245,18 @@
           <a:bodyPr xmlns:a="http://schemas.openxmlformats.org/drawingml/2006/main" lIns="0" tIns="0" rIns="0" bIns="0" anchor="ctr">
             <a:noAutofit/>
           </a:bodyPr>
-          <a:lstStyle xmlns:a="http://schemas.openxmlformats.org/drawingml/2006/main"/>
+          <a:lstStyle xmlns:a="http://schemas.openxmlformats.org/drawingml/2006/main">
+            <a:defPPr algn="l">
+              <a:defRPr sz="1800" b="1">
+                <a:solidFill>
+                  <a:srgbClr val="17202A"/>
+                </a:solidFill>
+                <a:latin typeface="Noto Sans JP"/>
+                <a:ea typeface="Noto Sans JP"/>
+                <a:cs typeface="Noto Sans JP"/>
+              </a:defRPr>
+            </a:defPPr>
+          </a:lstStyle>
           <a:p xmlns:a="http://schemas.openxmlformats.org/drawingml/2006/main">
             <a:pPr algn="l">
               <a:defRPr sz="1800" b="1">
@@ -3593,10 +5284,10 @@
       </p:sp>
       <p:sp>
         <p:nvSpPr>
-          <p:cNvPr id="10" name="toc-image-slot-0">
-            <a:extLst xmlns:a="http://schemas.openxmlformats.org/drawingml/2006/main">
-              <a:ext uri="{FF2B5EF4-FFF2-40B4-BE49-F238E27FC236}">
-                <a16:creationId xmlns:a16="http://schemas.microsoft.com/office/drawing/2014/main" id="{A781293C-0CB9-4C62-984B-C88132DEAA84}"/>
+          <p:cNvPr id="9" name="toc-image-slot-0">
+            <a:extLst xmlns:a="http://schemas.openxmlformats.org/drawingml/2006/main">
+              <a:ext uri="{FF2B5EF4-FFF2-40B4-BE49-F238E27FC236}">
+                <a16:creationId xmlns:a16="http://schemas.microsoft.com/office/drawing/2014/main" id="{488C366C-5322-487B-AC5B-268A45D01632}"/>
               </a:ext>
             </a:extLst>
           </p:cNvPr>
@@ -3626,10 +5317,10 @@
       </p:sp>
       <p:sp>
         <p:nvSpPr>
-          <p:cNvPr id="11" name="toc-image-label-0">
-            <a:extLst xmlns:a="http://schemas.openxmlformats.org/drawingml/2006/main">
-              <a:ext uri="{FF2B5EF4-FFF2-40B4-BE49-F238E27FC236}">
-                <a16:creationId xmlns:a16="http://schemas.microsoft.com/office/drawing/2014/main" id="{93CCD2E4-2966-447A-B575-5F8742A651BC}"/>
+          <p:cNvPr id="10" name="toc-image-label-0">
+            <a:extLst xmlns:a="http://schemas.openxmlformats.org/drawingml/2006/main">
+              <a:ext uri="{FF2B5EF4-FFF2-40B4-BE49-F238E27FC236}">
+                <a16:creationId xmlns:a16="http://schemas.microsoft.com/office/drawing/2014/main" id="{880BE056-A81F-4C44-911A-6135F0DD934B}"/>
               </a:ext>
             </a:extLst>
           </p:cNvPr>
@@ -3656,7 +5347,18 @@
           <a:bodyPr xmlns:a="http://schemas.openxmlformats.org/drawingml/2006/main" lIns="0" tIns="0" rIns="0" bIns="0" anchor="ctr">
             <a:noAutofit/>
           </a:bodyPr>
-          <a:lstStyle xmlns:a="http://schemas.openxmlformats.org/drawingml/2006/main"/>
+          <a:lstStyle xmlns:a="http://schemas.openxmlformats.org/drawingml/2006/main">
+            <a:defPPr algn="ctr">
+              <a:defRPr sz="1800" b="0">
+                <a:solidFill>
+                  <a:srgbClr val="59636E"/>
+                </a:solidFill>
+                <a:latin typeface="Noto Sans JP"/>
+                <a:ea typeface="Noto Sans JP"/>
+                <a:cs typeface="Noto Sans JP"/>
+              </a:defRPr>
+            </a:defPPr>
+          </a:lstStyle>
           <a:p xmlns:a="http://schemas.openxmlformats.org/drawingml/2006/main">
             <a:pPr algn="ctr">
               <a:defRPr sz="1800" b="0">
@@ -3684,10 +5386,10 @@
       </p:sp>
       <p:sp>
         <p:nvSpPr>
-          <p:cNvPr id="12" name="toc-label-1">
-            <a:extLst xmlns:a="http://schemas.openxmlformats.org/drawingml/2006/main">
-              <a:ext uri="{FF2B5EF4-FFF2-40B4-BE49-F238E27FC236}">
-                <a16:creationId xmlns:a16="http://schemas.microsoft.com/office/drawing/2014/main" id="{C3A4044B-41D4-4E00-89A0-326448FC89F1}"/>
+          <p:cNvPr id="11" name="toc-label-1">
+            <a:extLst xmlns:a="http://schemas.openxmlformats.org/drawingml/2006/main">
+              <a:ext uri="{FF2B5EF4-FFF2-40B4-BE49-F238E27FC236}">
+                <a16:creationId xmlns:a16="http://schemas.microsoft.com/office/drawing/2014/main" id="{EAA6DCBF-9D91-4049-B57F-2EBC40C65FA8}"/>
               </a:ext>
             </a:extLst>
           </p:cNvPr>
@@ -3714,7 +5416,18 @@
           <a:bodyPr xmlns:a="http://schemas.openxmlformats.org/drawingml/2006/main" lIns="0" tIns="0" rIns="0" bIns="0" anchor="ctr">
             <a:noAutofit/>
           </a:bodyPr>
-          <a:lstStyle xmlns:a="http://schemas.openxmlformats.org/drawingml/2006/main"/>
+          <a:lstStyle xmlns:a="http://schemas.openxmlformats.org/drawingml/2006/main">
+            <a:defPPr algn="l">
+              <a:defRPr sz="1800" b="1">
+                <a:solidFill>
+                  <a:srgbClr val="17202A"/>
+                </a:solidFill>
+                <a:latin typeface="Noto Sans JP"/>
+                <a:ea typeface="Noto Sans JP"/>
+                <a:cs typeface="Noto Sans JP"/>
+              </a:defRPr>
+            </a:defPPr>
+          </a:lstStyle>
           <a:p xmlns:a="http://schemas.openxmlformats.org/drawingml/2006/main">
             <a:pPr algn="l">
               <a:defRPr sz="1800" b="1">
@@ -3742,10 +5455,10 @@
       </p:sp>
       <p:sp>
         <p:nvSpPr>
-          <p:cNvPr id="13" name="toc-image-slot-1">
-            <a:extLst xmlns:a="http://schemas.openxmlformats.org/drawingml/2006/main">
-              <a:ext uri="{FF2B5EF4-FFF2-40B4-BE49-F238E27FC236}">
-                <a16:creationId xmlns:a16="http://schemas.microsoft.com/office/drawing/2014/main" id="{7F320DBB-7BA5-4BA3-8B0D-9321E1913A20}"/>
+          <p:cNvPr id="12" name="toc-image-slot-1">
+            <a:extLst xmlns:a="http://schemas.openxmlformats.org/drawingml/2006/main">
+              <a:ext uri="{FF2B5EF4-FFF2-40B4-BE49-F238E27FC236}">
+                <a16:creationId xmlns:a16="http://schemas.microsoft.com/office/drawing/2014/main" id="{4E38C217-BC75-441C-8A81-493BC2C562AA}"/>
               </a:ext>
             </a:extLst>
           </p:cNvPr>
@@ -3775,10 +5488,10 @@
       </p:sp>
       <p:sp>
         <p:nvSpPr>
-          <p:cNvPr id="14" name="toc-image-label-1">
-            <a:extLst xmlns:a="http://schemas.openxmlformats.org/drawingml/2006/main">
-              <a:ext uri="{FF2B5EF4-FFF2-40B4-BE49-F238E27FC236}">
-                <a16:creationId xmlns:a16="http://schemas.microsoft.com/office/drawing/2014/main" id="{4E0FDF55-C2F4-40DF-B831-564A7B2896E7}"/>
+          <p:cNvPr id="13" name="toc-image-label-1">
+            <a:extLst xmlns:a="http://schemas.openxmlformats.org/drawingml/2006/main">
+              <a:ext uri="{FF2B5EF4-FFF2-40B4-BE49-F238E27FC236}">
+                <a16:creationId xmlns:a16="http://schemas.microsoft.com/office/drawing/2014/main" id="{7E9CEF57-401B-437B-918A-1E0775BDBB17}"/>
               </a:ext>
             </a:extLst>
           </p:cNvPr>
@@ -3805,7 +5518,18 @@
           <a:bodyPr xmlns:a="http://schemas.openxmlformats.org/drawingml/2006/main" lIns="0" tIns="0" rIns="0" bIns="0" anchor="ctr">
             <a:noAutofit/>
           </a:bodyPr>
-          <a:lstStyle xmlns:a="http://schemas.openxmlformats.org/drawingml/2006/main"/>
+          <a:lstStyle xmlns:a="http://schemas.openxmlformats.org/drawingml/2006/main">
+            <a:defPPr algn="ctr">
+              <a:defRPr sz="1800" b="0">
+                <a:solidFill>
+                  <a:srgbClr val="59636E"/>
+                </a:solidFill>
+                <a:latin typeface="Noto Sans JP"/>
+                <a:ea typeface="Noto Sans JP"/>
+                <a:cs typeface="Noto Sans JP"/>
+              </a:defRPr>
+            </a:defPPr>
+          </a:lstStyle>
           <a:p xmlns:a="http://schemas.openxmlformats.org/drawingml/2006/main">
             <a:pPr algn="ctr">
               <a:defRPr sz="1800" b="0">
@@ -3833,10 +5557,10 @@
       </p:sp>
       <p:sp>
         <p:nvSpPr>
-          <p:cNvPr id="15" name="toc-label-2">
-            <a:extLst xmlns:a="http://schemas.openxmlformats.org/drawingml/2006/main">
-              <a:ext uri="{FF2B5EF4-FFF2-40B4-BE49-F238E27FC236}">
-                <a16:creationId xmlns:a16="http://schemas.microsoft.com/office/drawing/2014/main" id="{206A3567-3112-4E29-A18F-CE092BFF4E83}"/>
+          <p:cNvPr id="14" name="toc-label-2">
+            <a:extLst xmlns:a="http://schemas.openxmlformats.org/drawingml/2006/main">
+              <a:ext uri="{FF2B5EF4-FFF2-40B4-BE49-F238E27FC236}">
+                <a16:creationId xmlns:a16="http://schemas.microsoft.com/office/drawing/2014/main" id="{AFDA9838-1747-464D-9C39-895D15542934}"/>
               </a:ext>
             </a:extLst>
           </p:cNvPr>
@@ -3863,7 +5587,18 @@
           <a:bodyPr xmlns:a="http://schemas.openxmlformats.org/drawingml/2006/main" lIns="0" tIns="0" rIns="0" bIns="0" anchor="ctr">
             <a:noAutofit/>
           </a:bodyPr>
-          <a:lstStyle xmlns:a="http://schemas.openxmlformats.org/drawingml/2006/main"/>
+          <a:lstStyle xmlns:a="http://schemas.openxmlformats.org/drawingml/2006/main">
+            <a:defPPr algn="l">
+              <a:defRPr sz="1800" b="1">
+                <a:solidFill>
+                  <a:srgbClr val="17202A"/>
+                </a:solidFill>
+                <a:latin typeface="Noto Sans JP"/>
+                <a:ea typeface="Noto Sans JP"/>
+                <a:cs typeface="Noto Sans JP"/>
+              </a:defRPr>
+            </a:defPPr>
+          </a:lstStyle>
           <a:p xmlns:a="http://schemas.openxmlformats.org/drawingml/2006/main">
             <a:pPr algn="l">
               <a:defRPr sz="1800" b="1">
@@ -3891,10 +5626,10 @@
       </p:sp>
       <p:sp>
         <p:nvSpPr>
-          <p:cNvPr id="16" name="toc-image-slot-2">
-            <a:extLst xmlns:a="http://schemas.openxmlformats.org/drawingml/2006/main">
-              <a:ext uri="{FF2B5EF4-FFF2-40B4-BE49-F238E27FC236}">
-                <a16:creationId xmlns:a16="http://schemas.microsoft.com/office/drawing/2014/main" id="{84857111-E1BE-4800-A260-969C77139D3F}"/>
+          <p:cNvPr id="15" name="toc-image-slot-2">
+            <a:extLst xmlns:a="http://schemas.openxmlformats.org/drawingml/2006/main">
+              <a:ext uri="{FF2B5EF4-FFF2-40B4-BE49-F238E27FC236}">
+                <a16:creationId xmlns:a16="http://schemas.microsoft.com/office/drawing/2014/main" id="{6CA29BD5-CC4E-4C0E-BD91-B2986525CC60}"/>
               </a:ext>
             </a:extLst>
           </p:cNvPr>
@@ -3924,10 +5659,10 @@
       </p:sp>
       <p:sp>
         <p:nvSpPr>
-          <p:cNvPr id="17" name="toc-image-label-2">
-            <a:extLst xmlns:a="http://schemas.openxmlformats.org/drawingml/2006/main">
-              <a:ext uri="{FF2B5EF4-FFF2-40B4-BE49-F238E27FC236}">
-                <a16:creationId xmlns:a16="http://schemas.microsoft.com/office/drawing/2014/main" id="{2EACE051-71A4-4F03-8751-B84DDE1F26BD}"/>
+          <p:cNvPr id="16" name="toc-image-label-2">
+            <a:extLst xmlns:a="http://schemas.openxmlformats.org/drawingml/2006/main">
+              <a:ext uri="{FF2B5EF4-FFF2-40B4-BE49-F238E27FC236}">
+                <a16:creationId xmlns:a16="http://schemas.microsoft.com/office/drawing/2014/main" id="{FB92301A-6D84-4897-B066-18B1DCE818A6}"/>
               </a:ext>
             </a:extLst>
           </p:cNvPr>
@@ -3954,7 +5689,18 @@
           <a:bodyPr xmlns:a="http://schemas.openxmlformats.org/drawingml/2006/main" lIns="0" tIns="0" rIns="0" bIns="0" anchor="ctr">
             <a:noAutofit/>
           </a:bodyPr>
-          <a:lstStyle xmlns:a="http://schemas.openxmlformats.org/drawingml/2006/main"/>
+          <a:lstStyle xmlns:a="http://schemas.openxmlformats.org/drawingml/2006/main">
+            <a:defPPr algn="ctr">
+              <a:defRPr sz="1800" b="0">
+                <a:solidFill>
+                  <a:srgbClr val="59636E"/>
+                </a:solidFill>
+                <a:latin typeface="Noto Sans JP"/>
+                <a:ea typeface="Noto Sans JP"/>
+                <a:cs typeface="Noto Sans JP"/>
+              </a:defRPr>
+            </a:defPPr>
+          </a:lstStyle>
           <a:p xmlns:a="http://schemas.openxmlformats.org/drawingml/2006/main">
             <a:pPr algn="ctr">
               <a:defRPr sz="1800" b="0">
@@ -3982,10 +5728,10 @@
       </p:sp>
       <p:sp>
         <p:nvSpPr>
-          <p:cNvPr id="18" name="toc-label-3">
-            <a:extLst xmlns:a="http://schemas.openxmlformats.org/drawingml/2006/main">
-              <a:ext uri="{FF2B5EF4-FFF2-40B4-BE49-F238E27FC236}">
-                <a16:creationId xmlns:a16="http://schemas.microsoft.com/office/drawing/2014/main" id="{9FC8B1C0-0CFE-40D0-A531-7E92E51DF413}"/>
+          <p:cNvPr id="17" name="toc-label-3">
+            <a:extLst xmlns:a="http://schemas.openxmlformats.org/drawingml/2006/main">
+              <a:ext uri="{FF2B5EF4-FFF2-40B4-BE49-F238E27FC236}">
+                <a16:creationId xmlns:a16="http://schemas.microsoft.com/office/drawing/2014/main" id="{56397B2D-199E-43FE-B44B-39F18AD64E67}"/>
               </a:ext>
             </a:extLst>
           </p:cNvPr>
@@ -4012,7 +5758,18 @@
           <a:bodyPr xmlns:a="http://schemas.openxmlformats.org/drawingml/2006/main" lIns="0" tIns="0" rIns="0" bIns="0" anchor="ctr">
             <a:noAutofit/>
           </a:bodyPr>
-          <a:lstStyle xmlns:a="http://schemas.openxmlformats.org/drawingml/2006/main"/>
+          <a:lstStyle xmlns:a="http://schemas.openxmlformats.org/drawingml/2006/main">
+            <a:defPPr algn="l">
+              <a:defRPr sz="1800" b="1">
+                <a:solidFill>
+                  <a:srgbClr val="17202A"/>
+                </a:solidFill>
+                <a:latin typeface="Noto Sans JP"/>
+                <a:ea typeface="Noto Sans JP"/>
+                <a:cs typeface="Noto Sans JP"/>
+              </a:defRPr>
+            </a:defPPr>
+          </a:lstStyle>
           <a:p xmlns:a="http://schemas.openxmlformats.org/drawingml/2006/main">
             <a:pPr algn="l">
               <a:defRPr sz="1800" b="1">
@@ -4040,10 +5797,10 @@
       </p:sp>
       <p:sp>
         <p:nvSpPr>
-          <p:cNvPr id="19" name="toc-image-slot-3">
-            <a:extLst xmlns:a="http://schemas.openxmlformats.org/drawingml/2006/main">
-              <a:ext uri="{FF2B5EF4-FFF2-40B4-BE49-F238E27FC236}">
-                <a16:creationId xmlns:a16="http://schemas.microsoft.com/office/drawing/2014/main" id="{C69BBE06-3181-43CE-9805-EC7D141C6AA3}"/>
+          <p:cNvPr id="18" name="toc-image-slot-3">
+            <a:extLst xmlns:a="http://schemas.openxmlformats.org/drawingml/2006/main">
+              <a:ext uri="{FF2B5EF4-FFF2-40B4-BE49-F238E27FC236}">
+                <a16:creationId xmlns:a16="http://schemas.microsoft.com/office/drawing/2014/main" id="{3F35BECF-08A7-441A-8256-D35A9AA38519}"/>
               </a:ext>
             </a:extLst>
           </p:cNvPr>
@@ -4073,10 +5830,10 @@
       </p:sp>
       <p:sp>
         <p:nvSpPr>
-          <p:cNvPr id="20" name="toc-image-label-3">
-            <a:extLst xmlns:a="http://schemas.openxmlformats.org/drawingml/2006/main">
-              <a:ext uri="{FF2B5EF4-FFF2-40B4-BE49-F238E27FC236}">
-                <a16:creationId xmlns:a16="http://schemas.microsoft.com/office/drawing/2014/main" id="{461E0A1D-E70F-43F7-AA4E-84184254AED9}"/>
+          <p:cNvPr id="19" name="toc-image-label-3">
+            <a:extLst xmlns:a="http://schemas.openxmlformats.org/drawingml/2006/main">
+              <a:ext uri="{FF2B5EF4-FFF2-40B4-BE49-F238E27FC236}">
+                <a16:creationId xmlns:a16="http://schemas.microsoft.com/office/drawing/2014/main" id="{C4CC00A5-D860-47DF-A7A2-C1EFDEAFA058}"/>
               </a:ext>
             </a:extLst>
           </p:cNvPr>
@@ -4103,7 +5860,18 @@
           <a:bodyPr xmlns:a="http://schemas.openxmlformats.org/drawingml/2006/main" lIns="0" tIns="0" rIns="0" bIns="0" anchor="ctr">
             <a:noAutofit/>
           </a:bodyPr>
-          <a:lstStyle xmlns:a="http://schemas.openxmlformats.org/drawingml/2006/main"/>
+          <a:lstStyle xmlns:a="http://schemas.openxmlformats.org/drawingml/2006/main">
+            <a:defPPr algn="ctr">
+              <a:defRPr sz="1800" b="0">
+                <a:solidFill>
+                  <a:srgbClr val="59636E"/>
+                </a:solidFill>
+                <a:latin typeface="Noto Sans JP"/>
+                <a:ea typeface="Noto Sans JP"/>
+                <a:cs typeface="Noto Sans JP"/>
+              </a:defRPr>
+            </a:defPPr>
+          </a:lstStyle>
           <a:p xmlns:a="http://schemas.openxmlformats.org/drawingml/2006/main">
             <a:pPr algn="ctr">
               <a:defRPr sz="1800" b="0">
@@ -4131,10 +5899,10 @@
       </p:sp>
       <p:sp>
         <p:nvSpPr>
-          <p:cNvPr id="21" name="toc-rule-vertical">
-            <a:extLst xmlns:a="http://schemas.openxmlformats.org/drawingml/2006/main">
-              <a:ext uri="{FF2B5EF4-FFF2-40B4-BE49-F238E27FC236}">
-                <a16:creationId xmlns:a16="http://schemas.microsoft.com/office/drawing/2014/main" id="{73F8CB40-1A3C-4E04-9738-1F7702AE1238}"/>
+          <p:cNvPr id="20" name="toc-rule-vertical">
+            <a:extLst xmlns:a="http://schemas.openxmlformats.org/drawingml/2006/main">
+              <a:ext uri="{FF2B5EF4-FFF2-40B4-BE49-F238E27FC236}">
+                <a16:creationId xmlns:a16="http://schemas.microsoft.com/office/drawing/2014/main" id="{53DDF546-C0F2-46AE-AC7C-6398DB65DC5F}"/>
               </a:ext>
             </a:extLst>
           </p:cNvPr>
@@ -4162,10 +5930,10 @@
       </p:sp>
       <p:sp>
         <p:nvSpPr>
-          <p:cNvPr id="22" name="toc-rule-horizontal">
-            <a:extLst xmlns:a="http://schemas.openxmlformats.org/drawingml/2006/main">
-              <a:ext uri="{FF2B5EF4-FFF2-40B4-BE49-F238E27FC236}">
-                <a16:creationId xmlns:a16="http://schemas.microsoft.com/office/drawing/2014/main" id="{F140F0E7-4BDD-4F0C-BD0A-6F3B7003CC52}"/>
+          <p:cNvPr id="21" name="toc-rule-horizontal">
+            <a:extLst xmlns:a="http://schemas.openxmlformats.org/drawingml/2006/main">
+              <a:ext uri="{FF2B5EF4-FFF2-40B4-BE49-F238E27FC236}">
+                <a16:creationId xmlns:a16="http://schemas.microsoft.com/office/drawing/2014/main" id="{46749FCA-ABCF-45FD-B07A-92EAC19B7E7B}"/>
               </a:ext>
             </a:extLst>
           </p:cNvPr>
@@ -4191,68 +5959,10 @@
           </a:ln>
         </p:spPr>
       </p:sp>
-      <p:sp>
-        <p:nvSpPr>
-          <p:cNvPr id="23" name="slot-disclosure">
-            <a:extLst xmlns:a="http://schemas.openxmlformats.org/drawingml/2006/main">
-              <a:ext uri="{FF2B5EF4-FFF2-40B4-BE49-F238E27FC236}">
-                <a16:creationId xmlns:a16="http://schemas.microsoft.com/office/drawing/2014/main" id="{838F11B6-FAFF-4DB6-ADF7-5B597CADA958}"/>
-              </a:ext>
-            </a:extLst>
-          </p:cNvPr>
-          <p:cNvSpPr>
-            <a:spLocks xmlns:a="http://schemas.openxmlformats.org/drawingml/2006/main" noGrp="1"/>
-          </p:cNvSpPr>
-          <p:nvPr/>
-        </p:nvSpPr>
-        <p:spPr>
-          <a:xfrm xmlns:a="http://schemas.openxmlformats.org/drawingml/2006/main">
-            <a:off x="457200" y="4210050"/>
-            <a:ext cx="8229600" cy="266700"/>
-          </a:xfrm>
-          <a:prstGeom xmlns:a="http://schemas.openxmlformats.org/drawingml/2006/main" prst="rect">
-            <a:avLst/>
-          </a:prstGeom>
-          <a:noFill xmlns:a="http://schemas.openxmlformats.org/drawingml/2006/main"/>
-          <a:ln xmlns:a="http://schemas.openxmlformats.org/drawingml/2006/main" w="0">
-            <a:noFill/>
-            <a:prstDash val="solid"/>
-          </a:ln>
-        </p:spPr>
-        <p:txBody>
-          <a:bodyPr xmlns:a="http://schemas.openxmlformats.org/drawingml/2006/main" lIns="0" tIns="0" rIns="0" bIns="0" anchor="ctr">
-            <a:noAutofit/>
-          </a:bodyPr>
-          <a:lstStyle xmlns:a="http://schemas.openxmlformats.org/drawingml/2006/main"/>
-          <a:p xmlns:a="http://schemas.openxmlformats.org/drawingml/2006/main">
-            <a:pPr algn="l">
-              <a:defRPr sz="1500" b="0">
-                <a:solidFill>
-                  <a:srgbClr val="59636E"/>
-                </a:solidFill>
-                <a:latin typeface="Noto Sans JP"/>
-                <a:ea typeface="Noto Sans JP"/>
-                <a:cs typeface="Noto Sans JP"/>
-              </a:defRPr>
-            </a:pPr>
-            <a:r>
-              <a:rPr sz="1500" b="0">
-                <a:solidFill>
-                  <a:srgbClr val="59636E"/>
-                </a:solidFill>
-                <a:latin typeface="Noto Sans JP"/>
-                <a:ea typeface="Noto Sans JP"/>
-                <a:cs typeface="Noto Sans JP"/>
-              </a:rPr>
-              <a:t>画像は各章の資料から選ぶ。ここでは配置枠のみを示す</a:t>
-            </a:r>
-          </a:p>
-        </p:txBody>
-      </p:sp>
     </p:spTree>
     <p:extLst>
       <p:ext uri="{BB962C8B-B14F-4D97-AF65-F5344CB8AC3E}">
-        <p14:creationId xmlns:p14="http://schemas.microsoft.com/office/powerpoint/2010/main" val="1982297688"/>
+        <p14:creationId xmlns:p14="http://schemas.microsoft.com/office/powerpoint/2010/main" val="1257744722"/>
       </p:ext>
     </p:extLst>
   </p:cSld>
@@ -4280,14 +5990,20 @@
       </p:grpSpPr>
       <p:pic>
         <p:nvPicPr>
-          <p:cNvPr id="9" name=""/>
+          <p:cNvPr id="8" name="">
+            <a:extLst xmlns:a="http://schemas.openxmlformats.org/drawingml/2006/main">
+              <a:ext uri="{FF2B5EF4-FFF2-40B4-BE49-F238E27FC236}">
+                <a16:creationId xmlns:a16="http://schemas.microsoft.com/office/drawing/2014/main" id="{95683321-94B6-4981-91DC-7E4BE7FD0F56}"/>
+              </a:ext>
+            </a:extLst>
+          </p:cNvPr>
           <p:cNvPicPr>
             <a:picLocks xmlns:a="http://schemas.openxmlformats.org/drawingml/2006/main" noChangeAspect="1"/>
           </p:cNvPicPr>
           <p:nvPr/>
         </p:nvPicPr>
         <p:blipFill>
-          <a:blip xmlns:r="http://schemas.openxmlformats.org/officeDocument/2006/relationships" xmlns:a="http://schemas.openxmlformats.org/drawingml/2006/main" r:embed="R959b4a5f4ca7411d"/>
+          <a:blip xmlns:r="http://schemas.openxmlformats.org/officeDocument/2006/relationships" xmlns:a="http://schemas.openxmlformats.org/drawingml/2006/main" r:embed="R7dc9f94e2a8e4ca9"/>
           <a:stretch xmlns:a="http://schemas.openxmlformats.org/drawingml/2006/main"/>
         </p:blipFill>
         <p:spPr>
@@ -4305,7 +6021,7 @@
           <p:cNvPr id="2" name="page">
             <a:extLst xmlns:a="http://schemas.openxmlformats.org/drawingml/2006/main">
               <a:ext uri="{FF2B5EF4-FFF2-40B4-BE49-F238E27FC236}">
-                <a16:creationId xmlns:a16="http://schemas.microsoft.com/office/drawing/2014/main" id="{8507D0D6-F18E-4374-AFFA-9079DBAE6F39}"/>
+                <a16:creationId xmlns:a16="http://schemas.microsoft.com/office/drawing/2014/main" id="{3784026A-2A8B-4B93-AB6A-6F4E0ABCEC80}"/>
               </a:ext>
             </a:extLst>
           </p:cNvPr>
@@ -4332,7 +6048,18 @@
           <a:bodyPr xmlns:a="http://schemas.openxmlformats.org/drawingml/2006/main" lIns="0" tIns="0" rIns="0" bIns="0" anchor="ctr">
             <a:noAutofit/>
           </a:bodyPr>
-          <a:lstStyle xmlns:a="http://schemas.openxmlformats.org/drawingml/2006/main"/>
+          <a:lstStyle xmlns:a="http://schemas.openxmlformats.org/drawingml/2006/main">
+            <a:defPPr algn="r">
+              <a:defRPr sz="1400" b="0">
+                <a:solidFill>
+                  <a:srgbClr val="17202A"/>
+                </a:solidFill>
+                <a:latin typeface="Arial"/>
+                <a:ea typeface="Arial"/>
+                <a:cs typeface="Arial"/>
+              </a:defRPr>
+            </a:defPPr>
+          </a:lstStyle>
           <a:p xmlns:a="http://schemas.openxmlformats.org/drawingml/2006/main">
             <a:pPr algn="r">
               <a:defRPr sz="1400" b="0">
@@ -4360,22 +6087,22 @@
       </p:sp>
       <p:sp>
         <p:nvSpPr>
-          <p:cNvPr id="3" name="fictional-disclosure">
-            <a:extLst xmlns:a="http://schemas.openxmlformats.org/drawingml/2006/main">
-              <a:ext uri="{FF2B5EF4-FFF2-40B4-BE49-F238E27FC236}">
-                <a16:creationId xmlns:a16="http://schemas.microsoft.com/office/drawing/2014/main" id="{6FEE40ED-525E-48EC-9188-31A9B3595DE2}"/>
-              </a:ext>
-            </a:extLst>
-          </p:cNvPr>
-          <p:cNvSpPr>
-            <a:spLocks xmlns:a="http://schemas.openxmlformats.org/drawingml/2006/main" noGrp="1"/>
-          </p:cNvSpPr>
-          <p:nvPr/>
-        </p:nvSpPr>
-        <p:spPr>
-          <a:xfrm xmlns:a="http://schemas.openxmlformats.org/drawingml/2006/main">
-            <a:off x="1428750" y="4772025"/>
-            <a:ext cx="4762500" cy="266700"/>
+          <p:cNvPr id="3" name="running-chapter-4">
+            <a:extLst xmlns:a="http://schemas.openxmlformats.org/drawingml/2006/main">
+              <a:ext uri="{FF2B5EF4-FFF2-40B4-BE49-F238E27FC236}">
+                <a16:creationId xmlns:a16="http://schemas.microsoft.com/office/drawing/2014/main" id="{DCBAD4A9-D70D-4C26-A749-193848A90047}"/>
+              </a:ext>
+            </a:extLst>
+          </p:cNvPr>
+          <p:cNvSpPr>
+            <a:spLocks xmlns:a="http://schemas.openxmlformats.org/drawingml/2006/main" noGrp="1"/>
+          </p:cNvSpPr>
+          <p:nvPr/>
+        </p:nvSpPr>
+        <p:spPr>
+          <a:xfrm xmlns:a="http://schemas.openxmlformats.org/drawingml/2006/main">
+            <a:off x="457200" y="109728"/>
+            <a:ext cx="2560320" cy="304800"/>
           </a:xfrm>
           <a:prstGeom xmlns:a="http://schemas.openxmlformats.org/drawingml/2006/main" prst="rect">
             <a:avLst/>
@@ -4390,65 +6117,18 @@
           <a:bodyPr xmlns:a="http://schemas.openxmlformats.org/drawingml/2006/main" lIns="0" tIns="0" rIns="0" bIns="0" anchor="ctr">
             <a:noAutofit/>
           </a:bodyPr>
-          <a:lstStyle xmlns:a="http://schemas.openxmlformats.org/drawingml/2006/main"/>
-          <a:p xmlns:a="http://schemas.openxmlformats.org/drawingml/2006/main">
-            <a:pPr algn="l">
-              <a:defRPr sz="1050" b="0">
-                <a:solidFill>
-                  <a:srgbClr val="59636E"/>
-                </a:solidFill>
-                <a:latin typeface="Noto Sans JP"/>
-                <a:ea typeface="Noto Sans JP"/>
-                <a:cs typeface="Noto Sans JP"/>
-              </a:defRPr>
-            </a:pPr>
-            <a:r>
-              <a:rPr sz="1050" b="0">
-                <a:solidFill>
-                  <a:srgbClr val="59636E"/>
-                </a:solidFill>
-                <a:latin typeface="Noto Sans JP"/>
-                <a:ea typeface="Noto Sans JP"/>
-                <a:cs typeface="Noto Sans JP"/>
-              </a:rPr>
-              <a:t>架空作例・合成データ</a:t>
-            </a:r>
-          </a:p>
-        </p:txBody>
-      </p:sp>
-      <p:sp>
-        <p:nvSpPr>
-          <p:cNvPr id="4" name="running-chapter-4">
-            <a:extLst xmlns:a="http://schemas.openxmlformats.org/drawingml/2006/main">
-              <a:ext uri="{FF2B5EF4-FFF2-40B4-BE49-F238E27FC236}">
-                <a16:creationId xmlns:a16="http://schemas.microsoft.com/office/drawing/2014/main" id="{8F85C86D-9CA4-4D2B-945F-CC802B623590}"/>
-              </a:ext>
-            </a:extLst>
-          </p:cNvPr>
-          <p:cNvSpPr>
-            <a:spLocks xmlns:a="http://schemas.openxmlformats.org/drawingml/2006/main" noGrp="1"/>
-          </p:cNvSpPr>
-          <p:nvPr/>
-        </p:nvSpPr>
-        <p:spPr>
-          <a:xfrm xmlns:a="http://schemas.openxmlformats.org/drawingml/2006/main">
-            <a:off x="457200" y="109728"/>
-            <a:ext cx="2560320" cy="304800"/>
-          </a:xfrm>
-          <a:prstGeom xmlns:a="http://schemas.openxmlformats.org/drawingml/2006/main" prst="rect">
-            <a:avLst/>
-          </a:prstGeom>
-          <a:noFill xmlns:a="http://schemas.openxmlformats.org/drawingml/2006/main"/>
-          <a:ln xmlns:a="http://schemas.openxmlformats.org/drawingml/2006/main" w="0">
-            <a:noFill/>
-            <a:prstDash val="solid"/>
-          </a:ln>
-        </p:spPr>
-        <p:txBody>
-          <a:bodyPr xmlns:a="http://schemas.openxmlformats.org/drawingml/2006/main" lIns="0" tIns="0" rIns="0" bIns="0" anchor="ctr">
-            <a:noAutofit/>
-          </a:bodyPr>
-          <a:lstStyle xmlns:a="http://schemas.openxmlformats.org/drawingml/2006/main"/>
+          <a:lstStyle xmlns:a="http://schemas.openxmlformats.org/drawingml/2006/main">
+            <a:defPPr algn="l">
+              <a:defRPr sz="1200" b="0">
+                <a:solidFill>
+                  <a:srgbClr val="38761D"/>
+                </a:solidFill>
+                <a:latin typeface="Noto Sans JP"/>
+                <a:ea typeface="Noto Sans JP"/>
+                <a:cs typeface="Noto Sans JP"/>
+              </a:defRPr>
+            </a:defPPr>
+          </a:lstStyle>
           <a:p xmlns:a="http://schemas.openxmlformats.org/drawingml/2006/main">
             <a:pPr algn="l">
               <a:defRPr sz="1200" b="0">
@@ -4476,10 +6156,10 @@
       </p:sp>
       <p:sp>
         <p:nvSpPr>
-          <p:cNvPr id="5" name="running-title-4">
-            <a:extLst xmlns:a="http://schemas.openxmlformats.org/drawingml/2006/main">
-              <a:ext uri="{FF2B5EF4-FFF2-40B4-BE49-F238E27FC236}">
-                <a16:creationId xmlns:a16="http://schemas.microsoft.com/office/drawing/2014/main" id="{CE125A52-7FE6-4E41-81CF-67117D6DE1A0}"/>
+          <p:cNvPr id="4" name="running-title-4">
+            <a:extLst xmlns:a="http://schemas.openxmlformats.org/drawingml/2006/main">
+              <a:ext uri="{FF2B5EF4-FFF2-40B4-BE49-F238E27FC236}">
+                <a16:creationId xmlns:a16="http://schemas.microsoft.com/office/drawing/2014/main" id="{3C50C0B0-BD2C-4587-AE2D-AFBD2E5B3D48}"/>
               </a:ext>
             </a:extLst>
           </p:cNvPr>
@@ -4506,7 +6186,18 @@
           <a:bodyPr xmlns:a="http://schemas.openxmlformats.org/drawingml/2006/main" lIns="0" tIns="0" rIns="0" bIns="0" anchor="ctr">
             <a:noAutofit/>
           </a:bodyPr>
-          <a:lstStyle xmlns:a="http://schemas.openxmlformats.org/drawingml/2006/main"/>
+          <a:lstStyle xmlns:a="http://schemas.openxmlformats.org/drawingml/2006/main">
+            <a:defPPr algn="r">
+              <a:defRPr sz="1200" b="0">
+                <a:solidFill>
+                  <a:srgbClr val="38761D"/>
+                </a:solidFill>
+                <a:latin typeface="Noto Sans JP"/>
+                <a:ea typeface="Noto Sans JP"/>
+                <a:cs typeface="Noto Sans JP"/>
+              </a:defRPr>
+            </a:defPPr>
+          </a:lstStyle>
           <a:p xmlns:a="http://schemas.openxmlformats.org/drawingml/2006/main">
             <a:pPr algn="r">
               <a:defRPr sz="1200" b="0">
@@ -4534,10 +6225,10 @@
       </p:sp>
       <p:sp>
         <p:nvSpPr>
-          <p:cNvPr id="6" name="upper-chapter-band">
-            <a:extLst xmlns:a="http://schemas.openxmlformats.org/drawingml/2006/main">
-              <a:ext uri="{FF2B5EF4-FFF2-40B4-BE49-F238E27FC236}">
-                <a16:creationId xmlns:a16="http://schemas.microsoft.com/office/drawing/2014/main" id="{BBA8F454-D7EF-424B-95B2-CFCAF362A780}"/>
+          <p:cNvPr id="5" name="upper-chapter-band">
+            <a:extLst xmlns:a="http://schemas.openxmlformats.org/drawingml/2006/main">
+              <a:ext uri="{FF2B5EF4-FFF2-40B4-BE49-F238E27FC236}">
+                <a16:creationId xmlns:a16="http://schemas.microsoft.com/office/drawing/2014/main" id="{6B1A9C45-119F-499C-B19A-F2C06705B61E}"/>
               </a:ext>
             </a:extLst>
           </p:cNvPr>
@@ -4565,10 +6256,10 @@
       </p:sp>
       <p:sp>
         <p:nvSpPr>
-          <p:cNvPr id="7" name="chapter">
-            <a:extLst xmlns:a="http://schemas.openxmlformats.org/drawingml/2006/main">
-              <a:ext uri="{FF2B5EF4-FFF2-40B4-BE49-F238E27FC236}">
-                <a16:creationId xmlns:a16="http://schemas.microsoft.com/office/drawing/2014/main" id="{205A372C-4581-47AE-9056-3B079D547BC0}"/>
+          <p:cNvPr id="6" name="chapter">
+            <a:extLst xmlns:a="http://schemas.openxmlformats.org/drawingml/2006/main">
+              <a:ext uri="{FF2B5EF4-FFF2-40B4-BE49-F238E27FC236}">
+                <a16:creationId xmlns:a16="http://schemas.microsoft.com/office/drawing/2014/main" id="{C597A6E7-4B76-44F2-985A-5B64E2175B40}"/>
               </a:ext>
             </a:extLst>
           </p:cNvPr>
@@ -4595,7 +6286,18 @@
           <a:bodyPr xmlns:a="http://schemas.openxmlformats.org/drawingml/2006/main" lIns="0" tIns="0" rIns="0" bIns="0" anchor="ctr">
             <a:noAutofit/>
           </a:bodyPr>
-          <a:lstStyle xmlns:a="http://schemas.openxmlformats.org/drawingml/2006/main"/>
+          <a:lstStyle xmlns:a="http://schemas.openxmlformats.org/drawingml/2006/main">
+            <a:defPPr algn="l">
+              <a:defRPr sz="3769" b="1">
+                <a:solidFill>
+                  <a:srgbClr val="17202A"/>
+                </a:solidFill>
+                <a:latin typeface="Noto Sans JP"/>
+                <a:ea typeface="Noto Sans JP"/>
+                <a:cs typeface="Noto Sans JP"/>
+              </a:defRPr>
+            </a:defPPr>
+          </a:lstStyle>
           <a:p xmlns:a="http://schemas.openxmlformats.org/drawingml/2006/main">
             <a:pPr algn="l">
               <a:defRPr sz="3769" b="1">
@@ -4623,10 +6325,10 @@
       </p:sp>
       <p:sp>
         <p:nvSpPr>
-          <p:cNvPr id="8" name="chapter-guide">
-            <a:extLst xmlns:a="http://schemas.openxmlformats.org/drawingml/2006/main">
-              <a:ext uri="{FF2B5EF4-FFF2-40B4-BE49-F238E27FC236}">
-                <a16:creationId xmlns:a16="http://schemas.microsoft.com/office/drawing/2014/main" id="{86386018-D14C-4C43-B274-7AE1314E49BC}"/>
+          <p:cNvPr id="7" name="chapter-guide">
+            <a:extLst xmlns:a="http://schemas.openxmlformats.org/drawingml/2006/main">
+              <a:ext uri="{FF2B5EF4-FFF2-40B4-BE49-F238E27FC236}">
+                <a16:creationId xmlns:a16="http://schemas.microsoft.com/office/drawing/2014/main" id="{433E5873-4D8C-4A84-9B07-BC2EBEFC2BC1}"/>
               </a:ext>
             </a:extLst>
           </p:cNvPr>
@@ -4653,7 +6355,18 @@
           <a:bodyPr xmlns:a="http://schemas.openxmlformats.org/drawingml/2006/main" lIns="0" tIns="0" rIns="0" bIns="0" anchor="ctr">
             <a:noAutofit/>
           </a:bodyPr>
-          <a:lstStyle xmlns:a="http://schemas.openxmlformats.org/drawingml/2006/main"/>
+          <a:lstStyle xmlns:a="http://schemas.openxmlformats.org/drawingml/2006/main">
+            <a:defPPr algn="l">
+              <a:defRPr sz="2200" b="0">
+                <a:solidFill>
+                  <a:srgbClr val="17202A"/>
+                </a:solidFill>
+                <a:latin typeface="Noto Sans JP"/>
+                <a:ea typeface="Noto Sans JP"/>
+                <a:cs typeface="Noto Sans JP"/>
+              </a:defRPr>
+            </a:defPPr>
+          </a:lstStyle>
           <a:p xmlns:a="http://schemas.openxmlformats.org/drawingml/2006/main">
             <a:pPr algn="l">
               <a:defRPr sz="2200" b="0">
@@ -4682,7 +6395,7 @@
     </p:spTree>
     <p:extLst>
       <p:ext uri="{BB962C8B-B14F-4D97-AF65-F5344CB8AC3E}">
-        <p14:creationId xmlns:p14="http://schemas.microsoft.com/office/powerpoint/2010/main" val="1148291130"/>
+        <p14:creationId xmlns:p14="http://schemas.microsoft.com/office/powerpoint/2010/main" val="1176792719"/>
       </p:ext>
     </p:extLst>
   </p:cSld>
@@ -4708,12 +6421,105 @@
       <p:grpSpPr>
         <a:xfrm xmlns:a="http://schemas.openxmlformats.org/drawingml/2006/main"/>
       </p:grpSpPr>
-      <p:sp>
-        <p:nvSpPr>
-          <p:cNvPr id="47" name="footer-line">
-            <a:extLst xmlns:a="http://schemas.openxmlformats.org/drawingml/2006/main">
-              <a:ext uri="{FF2B5EF4-FFF2-40B4-BE49-F238E27FC236}">
-                <a16:creationId xmlns:a16="http://schemas.microsoft.com/office/drawing/2014/main" id="{DE5389E3-A5E3-48B2-967C-A4BA90D221EC}"/>
+      <p:cxnSp>
+        <p:nvCxnSpPr>
+          <p:cNvPr id="37" name="">
+            <a:extLst xmlns:a="http://schemas.openxmlformats.org/drawingml/2006/main">
+              <a:ext uri="{FF2B5EF4-FFF2-40B4-BE49-F238E27FC236}">
+                <a16:creationId xmlns:a16="http://schemas.microsoft.com/office/drawing/2014/main" id="{E8DDE465-3310-4D34-8B42-834772C45730}"/>
+              </a:ext>
+            </a:extLst>
+          </p:cNvPr>
+          <p:cNvCxnSpPr>
+            <a:stCxn xmlns:a="http://schemas.openxmlformats.org/drawingml/2006/main" id="34" idx="4"/>
+            <a:endCxn xmlns:a="http://schemas.openxmlformats.org/drawingml/2006/main" id="36" idx="0"/>
+          </p:cNvCxnSpPr>
+          <p:nvPr/>
+        </p:nvCxnSpPr>
+        <p:spPr>
+          <a:xfrm xmlns:a="http://schemas.openxmlformats.org/drawingml/2006/main">
+            <a:off x="7324725" y="2057400"/>
+            <a:ext cx="0" cy="1200150"/>
+          </a:xfrm>
+          <a:prstGeom xmlns:a="http://schemas.openxmlformats.org/drawingml/2006/main" prst="straightConnector1">
+            <a:avLst/>
+          </a:prstGeom>
+          <a:ln xmlns:a="http://schemas.openxmlformats.org/drawingml/2006/main" w="11430">
+            <a:solidFill>
+              <a:srgbClr val="59636E"/>
+            </a:solidFill>
+            <a:tailEnd type="triangle" w="sm" len="sm"/>
+          </a:ln>
+        </p:spPr>
+      </p:cxnSp>
+      <p:cxnSp>
+        <p:nvCxnSpPr>
+          <p:cNvPr id="25" name="">
+            <a:extLst xmlns:a="http://schemas.openxmlformats.org/drawingml/2006/main">
+              <a:ext uri="{FF2B5EF4-FFF2-40B4-BE49-F238E27FC236}">
+                <a16:creationId xmlns:a16="http://schemas.microsoft.com/office/drawing/2014/main" id="{EAAA1877-15E7-42C8-8276-53C00EACBDD4}"/>
+              </a:ext>
+            </a:extLst>
+          </p:cNvPr>
+          <p:cNvCxnSpPr>
+            <a:stCxn xmlns:a="http://schemas.openxmlformats.org/drawingml/2006/main" id="22" idx="4"/>
+            <a:endCxn xmlns:a="http://schemas.openxmlformats.org/drawingml/2006/main" id="24" idx="0"/>
+          </p:cNvCxnSpPr>
+          <p:nvPr/>
+        </p:nvCxnSpPr>
+        <p:spPr>
+          <a:xfrm xmlns:a="http://schemas.openxmlformats.org/drawingml/2006/main">
+            <a:off x="5324475" y="2057400"/>
+            <a:ext cx="0" cy="1200150"/>
+          </a:xfrm>
+          <a:prstGeom xmlns:a="http://schemas.openxmlformats.org/drawingml/2006/main" prst="straightConnector1">
+            <a:avLst/>
+          </a:prstGeom>
+          <a:ln xmlns:a="http://schemas.openxmlformats.org/drawingml/2006/main" w="11430">
+            <a:solidFill>
+              <a:srgbClr val="59636E"/>
+            </a:solidFill>
+            <a:tailEnd type="triangle" w="sm" len="sm"/>
+          </a:ln>
+        </p:spPr>
+      </p:cxnSp>
+      <p:cxnSp>
+        <p:nvCxnSpPr>
+          <p:cNvPr id="13" name="">
+            <a:extLst xmlns:a="http://schemas.openxmlformats.org/drawingml/2006/main">
+              <a:ext uri="{FF2B5EF4-FFF2-40B4-BE49-F238E27FC236}">
+                <a16:creationId xmlns:a16="http://schemas.microsoft.com/office/drawing/2014/main" id="{C7357020-12DC-4EDD-AF51-C3C48F75813B}"/>
+              </a:ext>
+            </a:extLst>
+          </p:cNvPr>
+          <p:cNvCxnSpPr>
+            <a:stCxn xmlns:a="http://schemas.openxmlformats.org/drawingml/2006/main" id="10" idx="4"/>
+            <a:endCxn xmlns:a="http://schemas.openxmlformats.org/drawingml/2006/main" id="12" idx="0"/>
+          </p:cNvCxnSpPr>
+          <p:nvPr/>
+        </p:nvCxnSpPr>
+        <p:spPr>
+          <a:xfrm xmlns:a="http://schemas.openxmlformats.org/drawingml/2006/main">
+            <a:off x="3324225" y="2057400"/>
+            <a:ext cx="0" cy="1200150"/>
+          </a:xfrm>
+          <a:prstGeom xmlns:a="http://schemas.openxmlformats.org/drawingml/2006/main" prst="straightConnector1">
+            <a:avLst/>
+          </a:prstGeom>
+          <a:ln xmlns:a="http://schemas.openxmlformats.org/drawingml/2006/main" w="11430">
+            <a:solidFill>
+              <a:srgbClr val="59636E"/>
+            </a:solidFill>
+            <a:tailEnd type="triangle" w="sm" len="sm"/>
+          </a:ln>
+        </p:spPr>
+      </p:cxnSp>
+      <p:sp>
+        <p:nvSpPr>
+          <p:cNvPr id="45" name="footer-line">
+            <a:extLst xmlns:a="http://schemas.openxmlformats.org/drawingml/2006/main">
+              <a:ext uri="{FF2B5EF4-FFF2-40B4-BE49-F238E27FC236}">
+                <a16:creationId xmlns:a16="http://schemas.microsoft.com/office/drawing/2014/main" id="{CC6649C8-C272-49EC-A37C-35BE048B1303}"/>
               </a:ext>
             </a:extLst>
           </p:cNvPr>
@@ -4741,14 +6547,20 @@
       </p:sp>
       <p:pic>
         <p:nvPicPr>
-          <p:cNvPr id="48" name=""/>
+          <p:cNvPr id="2" name="">
+            <a:extLst xmlns:a="http://schemas.openxmlformats.org/drawingml/2006/main">
+              <a:ext uri="{FF2B5EF4-FFF2-40B4-BE49-F238E27FC236}">
+                <a16:creationId xmlns:a16="http://schemas.microsoft.com/office/drawing/2014/main" id="{64DF7633-8F95-468D-AF66-08C2BD35DE48}"/>
+              </a:ext>
+            </a:extLst>
+          </p:cNvPr>
           <p:cNvPicPr>
             <a:picLocks xmlns:a="http://schemas.openxmlformats.org/drawingml/2006/main" noChangeAspect="1"/>
           </p:cNvPicPr>
           <p:nvPr/>
         </p:nvPicPr>
         <p:blipFill>
-          <a:blip xmlns:r="http://schemas.openxmlformats.org/officeDocument/2006/relationships" xmlns:a="http://schemas.openxmlformats.org/drawingml/2006/main" r:embed="R4444e54e782e475f"/>
+          <a:blip xmlns:r="http://schemas.openxmlformats.org/officeDocument/2006/relationships" xmlns:a="http://schemas.openxmlformats.org/drawingml/2006/main" r:embed="Rf3a9bc3d7ed84cf5"/>
           <a:stretch xmlns:a="http://schemas.openxmlformats.org/drawingml/2006/main"/>
         </p:blipFill>
         <p:spPr>
@@ -4766,7 +6578,7 @@
           <p:cNvPr id="3" name="page">
             <a:extLst xmlns:a="http://schemas.openxmlformats.org/drawingml/2006/main">
               <a:ext uri="{FF2B5EF4-FFF2-40B4-BE49-F238E27FC236}">
-                <a16:creationId xmlns:a16="http://schemas.microsoft.com/office/drawing/2014/main" id="{58A3F549-6375-473E-9D05-124F0235699D}"/>
+                <a16:creationId xmlns:a16="http://schemas.microsoft.com/office/drawing/2014/main" id="{36B1EFBF-1F5B-4DAD-83DC-1733F21A688C}"/>
               </a:ext>
             </a:extLst>
           </p:cNvPr>
@@ -4793,7 +6605,18 @@
           <a:bodyPr xmlns:a="http://schemas.openxmlformats.org/drawingml/2006/main" lIns="0" tIns="0" rIns="0" bIns="0" anchor="ctr">
             <a:noAutofit/>
           </a:bodyPr>
-          <a:lstStyle xmlns:a="http://schemas.openxmlformats.org/drawingml/2006/main"/>
+          <a:lstStyle xmlns:a="http://schemas.openxmlformats.org/drawingml/2006/main">
+            <a:defPPr algn="r">
+              <a:defRPr sz="1400" b="0">
+                <a:solidFill>
+                  <a:srgbClr val="17202A"/>
+                </a:solidFill>
+                <a:latin typeface="Arial"/>
+                <a:ea typeface="Arial"/>
+                <a:cs typeface="Arial"/>
+              </a:defRPr>
+            </a:defPPr>
+          </a:lstStyle>
           <a:p xmlns:a="http://schemas.openxmlformats.org/drawingml/2006/main">
             <a:pPr algn="r">
               <a:defRPr sz="1400" b="0">
@@ -4821,22 +6644,22 @@
       </p:sp>
       <p:sp>
         <p:nvSpPr>
-          <p:cNvPr id="4" name="fictional-disclosure">
-            <a:extLst xmlns:a="http://schemas.openxmlformats.org/drawingml/2006/main">
-              <a:ext uri="{FF2B5EF4-FFF2-40B4-BE49-F238E27FC236}">
-                <a16:creationId xmlns:a16="http://schemas.microsoft.com/office/drawing/2014/main" id="{A674BBEB-C71D-4D37-ADD9-914AF46D6686}"/>
-              </a:ext>
-            </a:extLst>
-          </p:cNvPr>
-          <p:cNvSpPr>
-            <a:spLocks xmlns:a="http://schemas.openxmlformats.org/drawingml/2006/main" noGrp="1"/>
-          </p:cNvSpPr>
-          <p:nvPr/>
-        </p:nvSpPr>
-        <p:spPr>
-          <a:xfrm xmlns:a="http://schemas.openxmlformats.org/drawingml/2006/main">
-            <a:off x="1428750" y="4772025"/>
-            <a:ext cx="4762500" cy="266700"/>
+          <p:cNvPr id="4" name="running-chapter-5">
+            <a:extLst xmlns:a="http://schemas.openxmlformats.org/drawingml/2006/main">
+              <a:ext uri="{FF2B5EF4-FFF2-40B4-BE49-F238E27FC236}">
+                <a16:creationId xmlns:a16="http://schemas.microsoft.com/office/drawing/2014/main" id="{4CA681B5-0A75-4EAD-9106-81ADF3EB12BC}"/>
+              </a:ext>
+            </a:extLst>
+          </p:cNvPr>
+          <p:cNvSpPr>
+            <a:spLocks xmlns:a="http://schemas.openxmlformats.org/drawingml/2006/main" noGrp="1"/>
+          </p:cNvSpPr>
+          <p:nvPr/>
+        </p:nvSpPr>
+        <p:spPr>
+          <a:xfrm xmlns:a="http://schemas.openxmlformats.org/drawingml/2006/main">
+            <a:off x="457200" y="109728"/>
+            <a:ext cx="2560320" cy="304800"/>
           </a:xfrm>
           <a:prstGeom xmlns:a="http://schemas.openxmlformats.org/drawingml/2006/main" prst="rect">
             <a:avLst/>
@@ -4851,65 +6674,18 @@
           <a:bodyPr xmlns:a="http://schemas.openxmlformats.org/drawingml/2006/main" lIns="0" tIns="0" rIns="0" bIns="0" anchor="ctr">
             <a:noAutofit/>
           </a:bodyPr>
-          <a:lstStyle xmlns:a="http://schemas.openxmlformats.org/drawingml/2006/main"/>
-          <a:p xmlns:a="http://schemas.openxmlformats.org/drawingml/2006/main">
-            <a:pPr algn="l">
-              <a:defRPr sz="1050" b="0">
-                <a:solidFill>
-                  <a:srgbClr val="59636E"/>
-                </a:solidFill>
-                <a:latin typeface="Noto Sans JP"/>
-                <a:ea typeface="Noto Sans JP"/>
-                <a:cs typeface="Noto Sans JP"/>
-              </a:defRPr>
-            </a:pPr>
-            <a:r>
-              <a:rPr sz="1050" b="0">
-                <a:solidFill>
-                  <a:srgbClr val="59636E"/>
-                </a:solidFill>
-                <a:latin typeface="Noto Sans JP"/>
-                <a:ea typeface="Noto Sans JP"/>
-                <a:cs typeface="Noto Sans JP"/>
-              </a:rPr>
-              <a:t>架空作例・合成データ</a:t>
-            </a:r>
-          </a:p>
-        </p:txBody>
-      </p:sp>
-      <p:sp>
-        <p:nvSpPr>
-          <p:cNvPr id="5" name="running-chapter-5">
-            <a:extLst xmlns:a="http://schemas.openxmlformats.org/drawingml/2006/main">
-              <a:ext uri="{FF2B5EF4-FFF2-40B4-BE49-F238E27FC236}">
-                <a16:creationId xmlns:a16="http://schemas.microsoft.com/office/drawing/2014/main" id="{81F07456-29FC-45A4-B152-8E92C1FE8CC5}"/>
-              </a:ext>
-            </a:extLst>
-          </p:cNvPr>
-          <p:cNvSpPr>
-            <a:spLocks xmlns:a="http://schemas.openxmlformats.org/drawingml/2006/main" noGrp="1"/>
-          </p:cNvSpPr>
-          <p:nvPr/>
-        </p:nvSpPr>
-        <p:spPr>
-          <a:xfrm xmlns:a="http://schemas.openxmlformats.org/drawingml/2006/main">
-            <a:off x="457200" y="109728"/>
-            <a:ext cx="2560320" cy="304800"/>
-          </a:xfrm>
-          <a:prstGeom xmlns:a="http://schemas.openxmlformats.org/drawingml/2006/main" prst="rect">
-            <a:avLst/>
-          </a:prstGeom>
-          <a:noFill xmlns:a="http://schemas.openxmlformats.org/drawingml/2006/main"/>
-          <a:ln xmlns:a="http://schemas.openxmlformats.org/drawingml/2006/main" w="0">
-            <a:noFill/>
-            <a:prstDash val="solid"/>
-          </a:ln>
-        </p:spPr>
-        <p:txBody>
-          <a:bodyPr xmlns:a="http://schemas.openxmlformats.org/drawingml/2006/main" lIns="0" tIns="0" rIns="0" bIns="0" anchor="ctr">
-            <a:noAutofit/>
-          </a:bodyPr>
-          <a:lstStyle xmlns:a="http://schemas.openxmlformats.org/drawingml/2006/main"/>
+          <a:lstStyle xmlns:a="http://schemas.openxmlformats.org/drawingml/2006/main">
+            <a:defPPr algn="l">
+              <a:defRPr sz="1200" b="0">
+                <a:solidFill>
+                  <a:srgbClr val="38761D"/>
+                </a:solidFill>
+                <a:latin typeface="Noto Sans JP"/>
+                <a:ea typeface="Noto Sans JP"/>
+                <a:cs typeface="Noto Sans JP"/>
+              </a:defRPr>
+            </a:defPPr>
+          </a:lstStyle>
           <a:p xmlns:a="http://schemas.openxmlformats.org/drawingml/2006/main">
             <a:pPr algn="l">
               <a:defRPr sz="1200" b="0">
@@ -4937,10 +6713,10 @@
       </p:sp>
       <p:sp>
         <p:nvSpPr>
-          <p:cNvPr id="6" name="running-title-5">
-            <a:extLst xmlns:a="http://schemas.openxmlformats.org/drawingml/2006/main">
-              <a:ext uri="{FF2B5EF4-FFF2-40B4-BE49-F238E27FC236}">
-                <a16:creationId xmlns:a16="http://schemas.microsoft.com/office/drawing/2014/main" id="{D39DE680-6021-45D8-9EC2-47F181C1A509}"/>
+          <p:cNvPr id="5" name="running-title-5">
+            <a:extLst xmlns:a="http://schemas.openxmlformats.org/drawingml/2006/main">
+              <a:ext uri="{FF2B5EF4-FFF2-40B4-BE49-F238E27FC236}">
+                <a16:creationId xmlns:a16="http://schemas.microsoft.com/office/drawing/2014/main" id="{0A6A6E95-9D88-465D-A895-7103D4B0A9F5}"/>
               </a:ext>
             </a:extLst>
           </p:cNvPr>
@@ -4967,7 +6743,18 @@
           <a:bodyPr xmlns:a="http://schemas.openxmlformats.org/drawingml/2006/main" lIns="0" tIns="0" rIns="0" bIns="0" anchor="ctr">
             <a:noAutofit/>
           </a:bodyPr>
-          <a:lstStyle xmlns:a="http://schemas.openxmlformats.org/drawingml/2006/main"/>
+          <a:lstStyle xmlns:a="http://schemas.openxmlformats.org/drawingml/2006/main">
+            <a:defPPr algn="r">
+              <a:defRPr sz="1200" b="0">
+                <a:solidFill>
+                  <a:srgbClr val="38761D"/>
+                </a:solidFill>
+                <a:latin typeface="Noto Sans JP"/>
+                <a:ea typeface="Noto Sans JP"/>
+                <a:cs typeface="Noto Sans JP"/>
+              </a:defRPr>
+            </a:defPPr>
+          </a:lstStyle>
           <a:p xmlns:a="http://schemas.openxmlformats.org/drawingml/2006/main">
             <a:pPr algn="r">
               <a:defRPr sz="1200" b="0">
@@ -4995,10 +6782,10 @@
       </p:sp>
       <p:sp>
         <p:nvSpPr>
-          <p:cNvPr id="7" name="title">
-            <a:extLst xmlns:a="http://schemas.openxmlformats.org/drawingml/2006/main">
-              <a:ext uri="{FF2B5EF4-FFF2-40B4-BE49-F238E27FC236}">
-                <a16:creationId xmlns:a16="http://schemas.microsoft.com/office/drawing/2014/main" id="{63EF6B62-6513-4123-A403-A93FAFA6B9AB}"/>
+          <p:cNvPr id="6" name="title">
+            <a:extLst xmlns:a="http://schemas.openxmlformats.org/drawingml/2006/main">
+              <a:ext uri="{FF2B5EF4-FFF2-40B4-BE49-F238E27FC236}">
+                <a16:creationId xmlns:a16="http://schemas.microsoft.com/office/drawing/2014/main" id="{74E19DF5-E8EB-4F5D-BD38-0C85B7EBBE52}"/>
               </a:ext>
             </a:extLst>
           </p:cNvPr>
@@ -5025,7 +6812,18 @@
           <a:bodyPr xmlns:a="http://schemas.openxmlformats.org/drawingml/2006/main" lIns="0" tIns="0" rIns="0" bIns="0" anchor="ctr">
             <a:noAutofit/>
           </a:bodyPr>
-          <a:lstStyle xmlns:a="http://schemas.openxmlformats.org/drawingml/2006/main"/>
+          <a:lstStyle xmlns:a="http://schemas.openxmlformats.org/drawingml/2006/main">
+            <a:defPPr algn="l">
+              <a:defRPr sz="2700" b="1">
+                <a:solidFill>
+                  <a:srgbClr val="17202A"/>
+                </a:solidFill>
+                <a:latin typeface="Noto Sans JP"/>
+                <a:ea typeface="Noto Sans JP"/>
+                <a:cs typeface="Noto Sans JP"/>
+              </a:defRPr>
+            </a:defPPr>
+          </a:lstStyle>
           <a:p xmlns:a="http://schemas.openxmlformats.org/drawingml/2006/main">
             <a:pPr algn="l">
               <a:defRPr sz="2700" b="1">
@@ -5053,10 +6851,10 @@
       </p:sp>
       <p:sp>
         <p:nvSpPr>
-          <p:cNvPr id="8" name="message">
-            <a:extLst xmlns:a="http://schemas.openxmlformats.org/drawingml/2006/main">
-              <a:ext uri="{FF2B5EF4-FFF2-40B4-BE49-F238E27FC236}">
-                <a16:creationId xmlns:a16="http://schemas.microsoft.com/office/drawing/2014/main" id="{BB681FC4-63C4-4E06-AEE0-C1C56968D8BB}"/>
+          <p:cNvPr id="7" name="message">
+            <a:extLst xmlns:a="http://schemas.openxmlformats.org/drawingml/2006/main">
+              <a:ext uri="{FF2B5EF4-FFF2-40B4-BE49-F238E27FC236}">
+                <a16:creationId xmlns:a16="http://schemas.microsoft.com/office/drawing/2014/main" id="{E56A2985-5568-4567-950B-647A3DD595B2}"/>
               </a:ext>
             </a:extLst>
           </p:cNvPr>
@@ -5083,7 +6881,18 @@
           <a:bodyPr xmlns:a="http://schemas.openxmlformats.org/drawingml/2006/main" lIns="0" tIns="0" rIns="0" bIns="0" anchor="ctr">
             <a:noAutofit/>
           </a:bodyPr>
-          <a:lstStyle xmlns:a="http://schemas.openxmlformats.org/drawingml/2006/main"/>
+          <a:lstStyle xmlns:a="http://schemas.openxmlformats.org/drawingml/2006/main">
+            <a:defPPr algn="l">
+              <a:defRPr sz="2300" b="1">
+                <a:solidFill>
+                  <a:srgbClr val="17202A"/>
+                </a:solidFill>
+                <a:latin typeface="Noto Sans JP"/>
+                <a:ea typeface="Noto Sans JP"/>
+                <a:cs typeface="Noto Sans JP"/>
+              </a:defRPr>
+            </a:defPPr>
+          </a:lstStyle>
           <a:p xmlns:a="http://schemas.openxmlformats.org/drawingml/2006/main">
             <a:pPr algn="l">
               <a:defRPr sz="2300" b="1">
@@ -5104,17 +6913,17 @@
                 <a:ea typeface="Noto Sans JP"/>
                 <a:cs typeface="Noto Sans JP"/>
               </a:rPr>
-              <a:t>全13点から、0・5・10分の3点だけを保持する [1]</a:t>
+              <a:t>合成13点から、0・5・10分の3点を保持する [1]</a:t>
             </a:r>
           </a:p>
         </p:txBody>
       </p:sp>
       <p:sp>
         <p:nvSpPr>
-          <p:cNvPr id="9" name="all-label">
-            <a:extLst xmlns:a="http://schemas.openxmlformats.org/drawingml/2006/main">
-              <a:ext uri="{FF2B5EF4-FFF2-40B4-BE49-F238E27FC236}">
-                <a16:creationId xmlns:a16="http://schemas.microsoft.com/office/drawing/2014/main" id="{50BB9568-BD1E-4FAB-96AC-4AA02585BEC4}"/>
+          <p:cNvPr id="8" name="all-label">
+            <a:extLst xmlns:a="http://schemas.openxmlformats.org/drawingml/2006/main">
+              <a:ext uri="{FF2B5EF4-FFF2-40B4-BE49-F238E27FC236}">
+                <a16:creationId xmlns:a16="http://schemas.microsoft.com/office/drawing/2014/main" id="{DC0D0206-946C-44E7-B3B2-0A88095DAEDB}"/>
               </a:ext>
             </a:extLst>
           </p:cNvPr>
@@ -5141,7 +6950,18 @@
           <a:bodyPr xmlns:a="http://schemas.openxmlformats.org/drawingml/2006/main" lIns="0" tIns="0" rIns="0" bIns="0" anchor="ctr">
             <a:noAutofit/>
           </a:bodyPr>
-          <a:lstStyle xmlns:a="http://schemas.openxmlformats.org/drawingml/2006/main"/>
+          <a:lstStyle xmlns:a="http://schemas.openxmlformats.org/drawingml/2006/main">
+            <a:defPPr algn="l">
+              <a:defRPr sz="1800" b="1">
+                <a:solidFill>
+                  <a:srgbClr val="17202A"/>
+                </a:solidFill>
+                <a:latin typeface="Noto Sans JP"/>
+                <a:ea typeface="Noto Sans JP"/>
+                <a:cs typeface="Noto Sans JP"/>
+              </a:defRPr>
+            </a:defPPr>
+          </a:lstStyle>
           <a:p xmlns:a="http://schemas.openxmlformats.org/drawingml/2006/main">
             <a:pPr algn="l">
               <a:defRPr sz="1800" b="1">
@@ -5169,10 +6989,10 @@
       </p:sp>
       <p:sp>
         <p:nvSpPr>
-          <p:cNvPr id="10" name="kept-label">
-            <a:extLst xmlns:a="http://schemas.openxmlformats.org/drawingml/2006/main">
-              <a:ext uri="{FF2B5EF4-FFF2-40B4-BE49-F238E27FC236}">
-                <a16:creationId xmlns:a16="http://schemas.microsoft.com/office/drawing/2014/main" id="{5F85A43C-7C26-4DEA-B009-AEFADD487751}"/>
+          <p:cNvPr id="9" name="kept-label">
+            <a:extLst xmlns:a="http://schemas.openxmlformats.org/drawingml/2006/main">
+              <a:ext uri="{FF2B5EF4-FFF2-40B4-BE49-F238E27FC236}">
+                <a16:creationId xmlns:a16="http://schemas.microsoft.com/office/drawing/2014/main" id="{DE0DEFE4-2977-48AE-89BC-0D4E98473C1C}"/>
               </a:ext>
             </a:extLst>
           </p:cNvPr>
@@ -5199,7 +7019,18 @@
           <a:bodyPr xmlns:a="http://schemas.openxmlformats.org/drawingml/2006/main" lIns="0" tIns="0" rIns="0" bIns="0" anchor="ctr">
             <a:noAutofit/>
           </a:bodyPr>
-          <a:lstStyle xmlns:a="http://schemas.openxmlformats.org/drawingml/2006/main"/>
+          <a:lstStyle xmlns:a="http://schemas.openxmlformats.org/drawingml/2006/main">
+            <a:defPPr algn="l">
+              <a:defRPr sz="1800" b="1">
+                <a:solidFill>
+                  <a:srgbClr val="17202A"/>
+                </a:solidFill>
+                <a:latin typeface="Noto Sans JP"/>
+                <a:ea typeface="Noto Sans JP"/>
+                <a:cs typeface="Noto Sans JP"/>
+              </a:defRPr>
+            </a:defPPr>
+          </a:lstStyle>
           <a:p xmlns:a="http://schemas.openxmlformats.org/drawingml/2006/main">
             <a:pPr algn="l">
               <a:defRPr sz="1800" b="1">
@@ -5227,10 +7058,10 @@
       </p:sp>
       <p:sp>
         <p:nvSpPr>
-          <p:cNvPr id="11" name="input-0">
-            <a:extLst xmlns:a="http://schemas.openxmlformats.org/drawingml/2006/main">
-              <a:ext uri="{FF2B5EF4-FFF2-40B4-BE49-F238E27FC236}">
-                <a16:creationId xmlns:a16="http://schemas.microsoft.com/office/drawing/2014/main" id="{3CC4475B-33B9-48BF-A545-83B2C3596EC7}"/>
+          <p:cNvPr id="10" name="input-0">
+            <a:extLst xmlns:a="http://schemas.openxmlformats.org/drawingml/2006/main">
+              <a:ext uri="{FF2B5EF4-FFF2-40B4-BE49-F238E27FC236}">
+                <a16:creationId xmlns:a16="http://schemas.microsoft.com/office/drawing/2014/main" id="{34B14027-003B-4206-A0FA-BAFE9F044817}"/>
               </a:ext>
             </a:extLst>
           </p:cNvPr>
@@ -5258,10 +7089,10 @@
       </p:sp>
       <p:sp>
         <p:nvSpPr>
-          <p:cNvPr id="12" name="minute-0">
-            <a:extLst xmlns:a="http://schemas.openxmlformats.org/drawingml/2006/main">
-              <a:ext uri="{FF2B5EF4-FFF2-40B4-BE49-F238E27FC236}">
-                <a16:creationId xmlns:a16="http://schemas.microsoft.com/office/drawing/2014/main" id="{72F0F5F3-3BBB-4671-A53C-424D154A95A3}"/>
+          <p:cNvPr id="11" name="minute-0">
+            <a:extLst xmlns:a="http://schemas.openxmlformats.org/drawingml/2006/main">
+              <a:ext uri="{FF2B5EF4-FFF2-40B4-BE49-F238E27FC236}">
+                <a16:creationId xmlns:a16="http://schemas.microsoft.com/office/drawing/2014/main" id="{F4EB53C3-FF9E-4C84-9987-EE08C1FC53D7}"/>
               </a:ext>
             </a:extLst>
           </p:cNvPr>
@@ -5288,7 +7119,18 @@
           <a:bodyPr xmlns:a="http://schemas.openxmlformats.org/drawingml/2006/main" lIns="0" tIns="0" rIns="0" bIns="0" anchor="ctr">
             <a:noAutofit/>
           </a:bodyPr>
-          <a:lstStyle xmlns:a="http://schemas.openxmlformats.org/drawingml/2006/main"/>
+          <a:lstStyle xmlns:a="http://schemas.openxmlformats.org/drawingml/2006/main">
+            <a:defPPr algn="ctr">
+              <a:defRPr sz="1400" b="0">
+                <a:solidFill>
+                  <a:srgbClr val="59636E"/>
+                </a:solidFill>
+                <a:latin typeface="Noto Sans JP"/>
+                <a:ea typeface="Noto Sans JP"/>
+                <a:cs typeface="Noto Sans JP"/>
+              </a:defRPr>
+            </a:defPPr>
+          </a:lstStyle>
           <a:p xmlns:a="http://schemas.openxmlformats.org/drawingml/2006/main">
             <a:pPr algn="ctr">
               <a:defRPr sz="1400" b="0">
@@ -5316,10 +7158,10 @@
       </p:sp>
       <p:sp>
         <p:nvSpPr>
-          <p:cNvPr id="13" name="retained-0">
-            <a:extLst xmlns:a="http://schemas.openxmlformats.org/drawingml/2006/main">
-              <a:ext uri="{FF2B5EF4-FFF2-40B4-BE49-F238E27FC236}">
-                <a16:creationId xmlns:a16="http://schemas.microsoft.com/office/drawing/2014/main" id="{DF579E7A-3F01-492E-A17D-EA01482057CA}"/>
+          <p:cNvPr id="12" name="retained-0">
+            <a:extLst xmlns:a="http://schemas.openxmlformats.org/drawingml/2006/main">
+              <a:ext uri="{FF2B5EF4-FFF2-40B4-BE49-F238E27FC236}">
+                <a16:creationId xmlns:a16="http://schemas.microsoft.com/office/drawing/2014/main" id="{D470E764-169A-4D60-AEC9-5D56EC1B8FCC}"/>
               </a:ext>
             </a:extLst>
           </p:cNvPr>
@@ -5347,37 +7189,12 @@
           </a:ln>
         </p:spPr>
       </p:sp>
-      <p:cxnSp>
-        <p:nvCxnSpPr>
-          <p:cNvPr id="60" name=""/>
-          <p:cNvCxnSpPr>
-            <a:stCxn xmlns:a="http://schemas.openxmlformats.org/drawingml/2006/main" id="11" idx="4"/>
-            <a:endCxn xmlns:a="http://schemas.openxmlformats.org/drawingml/2006/main" id="13" idx="0"/>
-          </p:cNvCxnSpPr>
-          <p:nvPr/>
-        </p:nvCxnSpPr>
-        <p:spPr>
-          <a:xfrm xmlns:a="http://schemas.openxmlformats.org/drawingml/2006/main">
-            <a:off x="3324225" y="2057400"/>
-            <a:ext cx="0" cy="1200150"/>
-          </a:xfrm>
-          <a:prstGeom xmlns:a="http://schemas.openxmlformats.org/drawingml/2006/main" prst="straightConnector1">
-            <a:avLst/>
-          </a:prstGeom>
-          <a:ln xmlns:a="http://schemas.openxmlformats.org/drawingml/2006/main" w="11430">
-            <a:solidFill>
-              <a:srgbClr val="59636E"/>
-            </a:solidFill>
-            <a:tailEnd type="triangle" w="sm" len="sm"/>
-          </a:ln>
-        </p:spPr>
-      </p:cxnSp>
-      <p:sp>
-        <p:nvSpPr>
-          <p:cNvPr id="15" name="input-1">
-            <a:extLst xmlns:a="http://schemas.openxmlformats.org/drawingml/2006/main">
-              <a:ext uri="{FF2B5EF4-FFF2-40B4-BE49-F238E27FC236}">
-                <a16:creationId xmlns:a16="http://schemas.microsoft.com/office/drawing/2014/main" id="{94088EF0-6E24-46CB-9FBE-75C590699504}"/>
+      <p:sp>
+        <p:nvSpPr>
+          <p:cNvPr id="14" name="input-1">
+            <a:extLst xmlns:a="http://schemas.openxmlformats.org/drawingml/2006/main">
+              <a:ext uri="{FF2B5EF4-FFF2-40B4-BE49-F238E27FC236}">
+                <a16:creationId xmlns:a16="http://schemas.microsoft.com/office/drawing/2014/main" id="{9A490D7B-90F3-4600-8305-6AAA442591D3}"/>
               </a:ext>
             </a:extLst>
           </p:cNvPr>
@@ -5405,10 +7222,10 @@
       </p:sp>
       <p:sp>
         <p:nvSpPr>
-          <p:cNvPr id="16" name="minute-1">
-            <a:extLst xmlns:a="http://schemas.openxmlformats.org/drawingml/2006/main">
-              <a:ext uri="{FF2B5EF4-FFF2-40B4-BE49-F238E27FC236}">
-                <a16:creationId xmlns:a16="http://schemas.microsoft.com/office/drawing/2014/main" id="{93C0B26D-19CB-4A08-8D1F-51E655375231}"/>
+          <p:cNvPr id="15" name="minute-1">
+            <a:extLst xmlns:a="http://schemas.openxmlformats.org/drawingml/2006/main">
+              <a:ext uri="{FF2B5EF4-FFF2-40B4-BE49-F238E27FC236}">
+                <a16:creationId xmlns:a16="http://schemas.microsoft.com/office/drawing/2014/main" id="{8ED71789-06A7-4888-951C-35BE63016295}"/>
               </a:ext>
             </a:extLst>
           </p:cNvPr>
@@ -5435,7 +7252,18 @@
           <a:bodyPr xmlns:a="http://schemas.openxmlformats.org/drawingml/2006/main" lIns="0" tIns="0" rIns="0" bIns="0" anchor="ctr">
             <a:noAutofit/>
           </a:bodyPr>
-          <a:lstStyle xmlns:a="http://schemas.openxmlformats.org/drawingml/2006/main"/>
+          <a:lstStyle xmlns:a="http://schemas.openxmlformats.org/drawingml/2006/main">
+            <a:defPPr algn="ctr">
+              <a:defRPr sz="1400" b="0">
+                <a:solidFill>
+                  <a:srgbClr val="59636E"/>
+                </a:solidFill>
+                <a:latin typeface="Noto Sans JP"/>
+                <a:ea typeface="Noto Sans JP"/>
+                <a:cs typeface="Noto Sans JP"/>
+              </a:defRPr>
+            </a:defPPr>
+          </a:lstStyle>
           <a:p xmlns:a="http://schemas.openxmlformats.org/drawingml/2006/main">
             <a:pPr algn="ctr">
               <a:defRPr sz="1400" b="0">
@@ -5463,10 +7291,10 @@
       </p:sp>
       <p:sp>
         <p:nvSpPr>
-          <p:cNvPr id="17" name="input-2">
-            <a:extLst xmlns:a="http://schemas.openxmlformats.org/drawingml/2006/main">
-              <a:ext uri="{FF2B5EF4-FFF2-40B4-BE49-F238E27FC236}">
-                <a16:creationId xmlns:a16="http://schemas.microsoft.com/office/drawing/2014/main" id="{4FCD3F64-0558-4F0C-BBEF-0C702ACB362F}"/>
+          <p:cNvPr id="16" name="input-2">
+            <a:extLst xmlns:a="http://schemas.openxmlformats.org/drawingml/2006/main">
+              <a:ext uri="{FF2B5EF4-FFF2-40B4-BE49-F238E27FC236}">
+                <a16:creationId xmlns:a16="http://schemas.microsoft.com/office/drawing/2014/main" id="{3B2EC199-AB52-4CB1-92E0-1C1D258AB469}"/>
               </a:ext>
             </a:extLst>
           </p:cNvPr>
@@ -5494,10 +7322,10 @@
       </p:sp>
       <p:sp>
         <p:nvSpPr>
-          <p:cNvPr id="18" name="minute-2">
-            <a:extLst xmlns:a="http://schemas.openxmlformats.org/drawingml/2006/main">
-              <a:ext uri="{FF2B5EF4-FFF2-40B4-BE49-F238E27FC236}">
-                <a16:creationId xmlns:a16="http://schemas.microsoft.com/office/drawing/2014/main" id="{37FEDC9E-D5C3-4A79-897C-6C2BA5718514}"/>
+          <p:cNvPr id="17" name="minute-2">
+            <a:extLst xmlns:a="http://schemas.openxmlformats.org/drawingml/2006/main">
+              <a:ext uri="{FF2B5EF4-FFF2-40B4-BE49-F238E27FC236}">
+                <a16:creationId xmlns:a16="http://schemas.microsoft.com/office/drawing/2014/main" id="{326EF216-644A-423A-AA9C-DE8C115CA314}"/>
               </a:ext>
             </a:extLst>
           </p:cNvPr>
@@ -5524,7 +7352,18 @@
           <a:bodyPr xmlns:a="http://schemas.openxmlformats.org/drawingml/2006/main" lIns="0" tIns="0" rIns="0" bIns="0" anchor="ctr">
             <a:noAutofit/>
           </a:bodyPr>
-          <a:lstStyle xmlns:a="http://schemas.openxmlformats.org/drawingml/2006/main"/>
+          <a:lstStyle xmlns:a="http://schemas.openxmlformats.org/drawingml/2006/main">
+            <a:defPPr algn="ctr">
+              <a:defRPr sz="1400" b="0">
+                <a:solidFill>
+                  <a:srgbClr val="59636E"/>
+                </a:solidFill>
+                <a:latin typeface="Noto Sans JP"/>
+                <a:ea typeface="Noto Sans JP"/>
+                <a:cs typeface="Noto Sans JP"/>
+              </a:defRPr>
+            </a:defPPr>
+          </a:lstStyle>
           <a:p xmlns:a="http://schemas.openxmlformats.org/drawingml/2006/main">
             <a:pPr algn="ctr">
               <a:defRPr sz="1400" b="0">
@@ -5552,10 +7391,10 @@
       </p:sp>
       <p:sp>
         <p:nvSpPr>
-          <p:cNvPr id="19" name="input-3">
-            <a:extLst xmlns:a="http://schemas.openxmlformats.org/drawingml/2006/main">
-              <a:ext uri="{FF2B5EF4-FFF2-40B4-BE49-F238E27FC236}">
-                <a16:creationId xmlns:a16="http://schemas.microsoft.com/office/drawing/2014/main" id="{9BAA00E3-4F96-4D44-866B-9B36FD784D91}"/>
+          <p:cNvPr id="18" name="input-3">
+            <a:extLst xmlns:a="http://schemas.openxmlformats.org/drawingml/2006/main">
+              <a:ext uri="{FF2B5EF4-FFF2-40B4-BE49-F238E27FC236}">
+                <a16:creationId xmlns:a16="http://schemas.microsoft.com/office/drawing/2014/main" id="{4FFCB692-958A-40C1-9FBC-527662EF9231}"/>
               </a:ext>
             </a:extLst>
           </p:cNvPr>
@@ -5583,10 +7422,10 @@
       </p:sp>
       <p:sp>
         <p:nvSpPr>
-          <p:cNvPr id="20" name="minute-3">
-            <a:extLst xmlns:a="http://schemas.openxmlformats.org/drawingml/2006/main">
-              <a:ext uri="{FF2B5EF4-FFF2-40B4-BE49-F238E27FC236}">
-                <a16:creationId xmlns:a16="http://schemas.microsoft.com/office/drawing/2014/main" id="{FE1DDCEA-E1C7-4C55-BC6A-435E92E416C8}"/>
+          <p:cNvPr id="19" name="minute-3">
+            <a:extLst xmlns:a="http://schemas.openxmlformats.org/drawingml/2006/main">
+              <a:ext uri="{FF2B5EF4-FFF2-40B4-BE49-F238E27FC236}">
+                <a16:creationId xmlns:a16="http://schemas.microsoft.com/office/drawing/2014/main" id="{E2F4FB27-4A9D-41F3-BEE8-2C98B64B0986}"/>
               </a:ext>
             </a:extLst>
           </p:cNvPr>
@@ -5613,7 +7452,18 @@
           <a:bodyPr xmlns:a="http://schemas.openxmlformats.org/drawingml/2006/main" lIns="0" tIns="0" rIns="0" bIns="0" anchor="ctr">
             <a:noAutofit/>
           </a:bodyPr>
-          <a:lstStyle xmlns:a="http://schemas.openxmlformats.org/drawingml/2006/main"/>
+          <a:lstStyle xmlns:a="http://schemas.openxmlformats.org/drawingml/2006/main">
+            <a:defPPr algn="ctr">
+              <a:defRPr sz="1400" b="0">
+                <a:solidFill>
+                  <a:srgbClr val="59636E"/>
+                </a:solidFill>
+                <a:latin typeface="Noto Sans JP"/>
+                <a:ea typeface="Noto Sans JP"/>
+                <a:cs typeface="Noto Sans JP"/>
+              </a:defRPr>
+            </a:defPPr>
+          </a:lstStyle>
           <a:p xmlns:a="http://schemas.openxmlformats.org/drawingml/2006/main">
             <a:pPr algn="ctr">
               <a:defRPr sz="1400" b="0">
@@ -5641,10 +7491,10 @@
       </p:sp>
       <p:sp>
         <p:nvSpPr>
-          <p:cNvPr id="21" name="input-4">
-            <a:extLst xmlns:a="http://schemas.openxmlformats.org/drawingml/2006/main">
-              <a:ext uri="{FF2B5EF4-FFF2-40B4-BE49-F238E27FC236}">
-                <a16:creationId xmlns:a16="http://schemas.microsoft.com/office/drawing/2014/main" id="{71103603-BA66-4869-9769-8296A935C28C}"/>
+          <p:cNvPr id="20" name="input-4">
+            <a:extLst xmlns:a="http://schemas.openxmlformats.org/drawingml/2006/main">
+              <a:ext uri="{FF2B5EF4-FFF2-40B4-BE49-F238E27FC236}">
+                <a16:creationId xmlns:a16="http://schemas.microsoft.com/office/drawing/2014/main" id="{6D161D56-4E83-40B9-9B91-5E4CC2B0AAE3}"/>
               </a:ext>
             </a:extLst>
           </p:cNvPr>
@@ -5672,10 +7522,10 @@
       </p:sp>
       <p:sp>
         <p:nvSpPr>
-          <p:cNvPr id="22" name="minute-4">
-            <a:extLst xmlns:a="http://schemas.openxmlformats.org/drawingml/2006/main">
-              <a:ext uri="{FF2B5EF4-FFF2-40B4-BE49-F238E27FC236}">
-                <a16:creationId xmlns:a16="http://schemas.microsoft.com/office/drawing/2014/main" id="{E90CCD6D-053E-4108-AFE0-D15AE65FE897}"/>
+          <p:cNvPr id="21" name="minute-4">
+            <a:extLst xmlns:a="http://schemas.openxmlformats.org/drawingml/2006/main">
+              <a:ext uri="{FF2B5EF4-FFF2-40B4-BE49-F238E27FC236}">
+                <a16:creationId xmlns:a16="http://schemas.microsoft.com/office/drawing/2014/main" id="{E5238ACF-81B6-411E-92FB-456805C9C3B6}"/>
               </a:ext>
             </a:extLst>
           </p:cNvPr>
@@ -5702,7 +7552,18 @@
           <a:bodyPr xmlns:a="http://schemas.openxmlformats.org/drawingml/2006/main" lIns="0" tIns="0" rIns="0" bIns="0" anchor="ctr">
             <a:noAutofit/>
           </a:bodyPr>
-          <a:lstStyle xmlns:a="http://schemas.openxmlformats.org/drawingml/2006/main"/>
+          <a:lstStyle xmlns:a="http://schemas.openxmlformats.org/drawingml/2006/main">
+            <a:defPPr algn="ctr">
+              <a:defRPr sz="1400" b="0">
+                <a:solidFill>
+                  <a:srgbClr val="59636E"/>
+                </a:solidFill>
+                <a:latin typeface="Noto Sans JP"/>
+                <a:ea typeface="Noto Sans JP"/>
+                <a:cs typeface="Noto Sans JP"/>
+              </a:defRPr>
+            </a:defPPr>
+          </a:lstStyle>
           <a:p xmlns:a="http://schemas.openxmlformats.org/drawingml/2006/main">
             <a:pPr algn="ctr">
               <a:defRPr sz="1400" b="0">
@@ -5730,10 +7591,10 @@
       </p:sp>
       <p:sp>
         <p:nvSpPr>
-          <p:cNvPr id="23" name="input-5">
-            <a:extLst xmlns:a="http://schemas.openxmlformats.org/drawingml/2006/main">
-              <a:ext uri="{FF2B5EF4-FFF2-40B4-BE49-F238E27FC236}">
-                <a16:creationId xmlns:a16="http://schemas.microsoft.com/office/drawing/2014/main" id="{A61447DB-95F1-4E7E-BF6F-7731149975D0}"/>
+          <p:cNvPr id="22" name="input-5">
+            <a:extLst xmlns:a="http://schemas.openxmlformats.org/drawingml/2006/main">
+              <a:ext uri="{FF2B5EF4-FFF2-40B4-BE49-F238E27FC236}">
+                <a16:creationId xmlns:a16="http://schemas.microsoft.com/office/drawing/2014/main" id="{1BC34FE6-282F-4401-8FDE-7D8CE42C8A8C}"/>
               </a:ext>
             </a:extLst>
           </p:cNvPr>
@@ -5761,10 +7622,10 @@
       </p:sp>
       <p:sp>
         <p:nvSpPr>
-          <p:cNvPr id="24" name="minute-5">
-            <a:extLst xmlns:a="http://schemas.openxmlformats.org/drawingml/2006/main">
-              <a:ext uri="{FF2B5EF4-FFF2-40B4-BE49-F238E27FC236}">
-                <a16:creationId xmlns:a16="http://schemas.microsoft.com/office/drawing/2014/main" id="{3A1710EB-ED52-4545-8794-91082E0F32E2}"/>
+          <p:cNvPr id="23" name="minute-5">
+            <a:extLst xmlns:a="http://schemas.openxmlformats.org/drawingml/2006/main">
+              <a:ext uri="{FF2B5EF4-FFF2-40B4-BE49-F238E27FC236}">
+                <a16:creationId xmlns:a16="http://schemas.microsoft.com/office/drawing/2014/main" id="{9DFBB0C3-4139-4BC3-8B97-DC8B11717DC6}"/>
               </a:ext>
             </a:extLst>
           </p:cNvPr>
@@ -5791,7 +7652,18 @@
           <a:bodyPr xmlns:a="http://schemas.openxmlformats.org/drawingml/2006/main" lIns="0" tIns="0" rIns="0" bIns="0" anchor="ctr">
             <a:noAutofit/>
           </a:bodyPr>
-          <a:lstStyle xmlns:a="http://schemas.openxmlformats.org/drawingml/2006/main"/>
+          <a:lstStyle xmlns:a="http://schemas.openxmlformats.org/drawingml/2006/main">
+            <a:defPPr algn="ctr">
+              <a:defRPr sz="1400" b="0">
+                <a:solidFill>
+                  <a:srgbClr val="59636E"/>
+                </a:solidFill>
+                <a:latin typeface="Noto Sans JP"/>
+                <a:ea typeface="Noto Sans JP"/>
+                <a:cs typeface="Noto Sans JP"/>
+              </a:defRPr>
+            </a:defPPr>
+          </a:lstStyle>
           <a:p xmlns:a="http://schemas.openxmlformats.org/drawingml/2006/main">
             <a:pPr algn="ctr">
               <a:defRPr sz="1400" b="0">
@@ -5819,10 +7691,10 @@
       </p:sp>
       <p:sp>
         <p:nvSpPr>
-          <p:cNvPr id="25" name="retained-5">
-            <a:extLst xmlns:a="http://schemas.openxmlformats.org/drawingml/2006/main">
-              <a:ext uri="{FF2B5EF4-FFF2-40B4-BE49-F238E27FC236}">
-                <a16:creationId xmlns:a16="http://schemas.microsoft.com/office/drawing/2014/main" id="{014D3880-17C7-4054-A1C1-4D1E59A37701}"/>
+          <p:cNvPr id="24" name="retained-5">
+            <a:extLst xmlns:a="http://schemas.openxmlformats.org/drawingml/2006/main">
+              <a:ext uri="{FF2B5EF4-FFF2-40B4-BE49-F238E27FC236}">
+                <a16:creationId xmlns:a16="http://schemas.microsoft.com/office/drawing/2014/main" id="{CABCA1D4-D376-4800-8542-874C19C9EE1A}"/>
               </a:ext>
             </a:extLst>
           </p:cNvPr>
@@ -5850,37 +7722,12 @@
           </a:ln>
         </p:spPr>
       </p:sp>
-      <p:cxnSp>
-        <p:nvCxnSpPr>
-          <p:cNvPr id="72" name=""/>
-          <p:cNvCxnSpPr>
-            <a:stCxn xmlns:a="http://schemas.openxmlformats.org/drawingml/2006/main" id="23" idx="4"/>
-            <a:endCxn xmlns:a="http://schemas.openxmlformats.org/drawingml/2006/main" id="25" idx="0"/>
-          </p:cNvCxnSpPr>
-          <p:nvPr/>
-        </p:nvCxnSpPr>
-        <p:spPr>
-          <a:xfrm xmlns:a="http://schemas.openxmlformats.org/drawingml/2006/main">
-            <a:off x="5324475" y="2057400"/>
-            <a:ext cx="0" cy="1200150"/>
-          </a:xfrm>
-          <a:prstGeom xmlns:a="http://schemas.openxmlformats.org/drawingml/2006/main" prst="straightConnector1">
-            <a:avLst/>
-          </a:prstGeom>
-          <a:ln xmlns:a="http://schemas.openxmlformats.org/drawingml/2006/main" w="11430">
-            <a:solidFill>
-              <a:srgbClr val="59636E"/>
-            </a:solidFill>
-            <a:tailEnd type="triangle" w="sm" len="sm"/>
-          </a:ln>
-        </p:spPr>
-      </p:cxnSp>
-      <p:sp>
-        <p:nvSpPr>
-          <p:cNvPr id="27" name="input-6">
-            <a:extLst xmlns:a="http://schemas.openxmlformats.org/drawingml/2006/main">
-              <a:ext uri="{FF2B5EF4-FFF2-40B4-BE49-F238E27FC236}">
-                <a16:creationId xmlns:a16="http://schemas.microsoft.com/office/drawing/2014/main" id="{6208B83C-8FE2-4515-A2B3-7469D7721A41}"/>
+      <p:sp>
+        <p:nvSpPr>
+          <p:cNvPr id="26" name="input-6">
+            <a:extLst xmlns:a="http://schemas.openxmlformats.org/drawingml/2006/main">
+              <a:ext uri="{FF2B5EF4-FFF2-40B4-BE49-F238E27FC236}">
+                <a16:creationId xmlns:a16="http://schemas.microsoft.com/office/drawing/2014/main" id="{C728D16B-A87C-46A9-9A8E-0BECE89F26F3}"/>
               </a:ext>
             </a:extLst>
           </p:cNvPr>
@@ -5908,10 +7755,10 @@
       </p:sp>
       <p:sp>
         <p:nvSpPr>
-          <p:cNvPr id="28" name="minute-6">
-            <a:extLst xmlns:a="http://schemas.openxmlformats.org/drawingml/2006/main">
-              <a:ext uri="{FF2B5EF4-FFF2-40B4-BE49-F238E27FC236}">
-                <a16:creationId xmlns:a16="http://schemas.microsoft.com/office/drawing/2014/main" id="{9B023A74-F71B-462F-BFAC-DD11759F6531}"/>
+          <p:cNvPr id="27" name="minute-6">
+            <a:extLst xmlns:a="http://schemas.openxmlformats.org/drawingml/2006/main">
+              <a:ext uri="{FF2B5EF4-FFF2-40B4-BE49-F238E27FC236}">
+                <a16:creationId xmlns:a16="http://schemas.microsoft.com/office/drawing/2014/main" id="{29414E87-5089-468D-89E2-4BC7D8E6E5AF}"/>
               </a:ext>
             </a:extLst>
           </p:cNvPr>
@@ -5938,7 +7785,18 @@
           <a:bodyPr xmlns:a="http://schemas.openxmlformats.org/drawingml/2006/main" lIns="0" tIns="0" rIns="0" bIns="0" anchor="ctr">
             <a:noAutofit/>
           </a:bodyPr>
-          <a:lstStyle xmlns:a="http://schemas.openxmlformats.org/drawingml/2006/main"/>
+          <a:lstStyle xmlns:a="http://schemas.openxmlformats.org/drawingml/2006/main">
+            <a:defPPr algn="ctr">
+              <a:defRPr sz="1400" b="0">
+                <a:solidFill>
+                  <a:srgbClr val="59636E"/>
+                </a:solidFill>
+                <a:latin typeface="Noto Sans JP"/>
+                <a:ea typeface="Noto Sans JP"/>
+                <a:cs typeface="Noto Sans JP"/>
+              </a:defRPr>
+            </a:defPPr>
+          </a:lstStyle>
           <a:p xmlns:a="http://schemas.openxmlformats.org/drawingml/2006/main">
             <a:pPr algn="ctr">
               <a:defRPr sz="1400" b="0">
@@ -5966,10 +7824,10 @@
       </p:sp>
       <p:sp>
         <p:nvSpPr>
-          <p:cNvPr id="29" name="input-7">
-            <a:extLst xmlns:a="http://schemas.openxmlformats.org/drawingml/2006/main">
-              <a:ext uri="{FF2B5EF4-FFF2-40B4-BE49-F238E27FC236}">
-                <a16:creationId xmlns:a16="http://schemas.microsoft.com/office/drawing/2014/main" id="{34C5F5AF-372E-4646-9568-5C95F2BAB3EE}"/>
+          <p:cNvPr id="28" name="input-7">
+            <a:extLst xmlns:a="http://schemas.openxmlformats.org/drawingml/2006/main">
+              <a:ext uri="{FF2B5EF4-FFF2-40B4-BE49-F238E27FC236}">
+                <a16:creationId xmlns:a16="http://schemas.microsoft.com/office/drawing/2014/main" id="{152DE247-4395-42C5-9989-E1243B656F7F}"/>
               </a:ext>
             </a:extLst>
           </p:cNvPr>
@@ -5997,10 +7855,10 @@
       </p:sp>
       <p:sp>
         <p:nvSpPr>
-          <p:cNvPr id="30" name="minute-7">
-            <a:extLst xmlns:a="http://schemas.openxmlformats.org/drawingml/2006/main">
-              <a:ext uri="{FF2B5EF4-FFF2-40B4-BE49-F238E27FC236}">
-                <a16:creationId xmlns:a16="http://schemas.microsoft.com/office/drawing/2014/main" id="{C5E26298-6AB4-4305-A242-282D4AFDDD99}"/>
+          <p:cNvPr id="29" name="minute-7">
+            <a:extLst xmlns:a="http://schemas.openxmlformats.org/drawingml/2006/main">
+              <a:ext uri="{FF2B5EF4-FFF2-40B4-BE49-F238E27FC236}">
+                <a16:creationId xmlns:a16="http://schemas.microsoft.com/office/drawing/2014/main" id="{8360B217-6CC7-4806-98EC-A5DD0B70A2A7}"/>
               </a:ext>
             </a:extLst>
           </p:cNvPr>
@@ -6027,7 +7885,18 @@
           <a:bodyPr xmlns:a="http://schemas.openxmlformats.org/drawingml/2006/main" lIns="0" tIns="0" rIns="0" bIns="0" anchor="ctr">
             <a:noAutofit/>
           </a:bodyPr>
-          <a:lstStyle xmlns:a="http://schemas.openxmlformats.org/drawingml/2006/main"/>
+          <a:lstStyle xmlns:a="http://schemas.openxmlformats.org/drawingml/2006/main">
+            <a:defPPr algn="ctr">
+              <a:defRPr sz="1400" b="0">
+                <a:solidFill>
+                  <a:srgbClr val="59636E"/>
+                </a:solidFill>
+                <a:latin typeface="Noto Sans JP"/>
+                <a:ea typeface="Noto Sans JP"/>
+                <a:cs typeface="Noto Sans JP"/>
+              </a:defRPr>
+            </a:defPPr>
+          </a:lstStyle>
           <a:p xmlns:a="http://schemas.openxmlformats.org/drawingml/2006/main">
             <a:pPr algn="ctr">
               <a:defRPr sz="1400" b="0">
@@ -6055,10 +7924,10 @@
       </p:sp>
       <p:sp>
         <p:nvSpPr>
-          <p:cNvPr id="31" name="input-8">
-            <a:extLst xmlns:a="http://schemas.openxmlformats.org/drawingml/2006/main">
-              <a:ext uri="{FF2B5EF4-FFF2-40B4-BE49-F238E27FC236}">
-                <a16:creationId xmlns:a16="http://schemas.microsoft.com/office/drawing/2014/main" id="{2ABB75BC-B65A-438A-BB00-238F7C7C77C8}"/>
+          <p:cNvPr id="30" name="input-8">
+            <a:extLst xmlns:a="http://schemas.openxmlformats.org/drawingml/2006/main">
+              <a:ext uri="{FF2B5EF4-FFF2-40B4-BE49-F238E27FC236}">
+                <a16:creationId xmlns:a16="http://schemas.microsoft.com/office/drawing/2014/main" id="{A206D455-60CF-4C60-A721-E55B821AF54B}"/>
               </a:ext>
             </a:extLst>
           </p:cNvPr>
@@ -6086,10 +7955,10 @@
       </p:sp>
       <p:sp>
         <p:nvSpPr>
-          <p:cNvPr id="32" name="minute-8">
-            <a:extLst xmlns:a="http://schemas.openxmlformats.org/drawingml/2006/main">
-              <a:ext uri="{FF2B5EF4-FFF2-40B4-BE49-F238E27FC236}">
-                <a16:creationId xmlns:a16="http://schemas.microsoft.com/office/drawing/2014/main" id="{030A158D-63FB-44A7-B928-5D0C42B3F05F}"/>
+          <p:cNvPr id="31" name="minute-8">
+            <a:extLst xmlns:a="http://schemas.openxmlformats.org/drawingml/2006/main">
+              <a:ext uri="{FF2B5EF4-FFF2-40B4-BE49-F238E27FC236}">
+                <a16:creationId xmlns:a16="http://schemas.microsoft.com/office/drawing/2014/main" id="{AA1F3040-163B-438D-AF1D-38B4065280E4}"/>
               </a:ext>
             </a:extLst>
           </p:cNvPr>
@@ -6116,7 +7985,18 @@
           <a:bodyPr xmlns:a="http://schemas.openxmlformats.org/drawingml/2006/main" lIns="0" tIns="0" rIns="0" bIns="0" anchor="ctr">
             <a:noAutofit/>
           </a:bodyPr>
-          <a:lstStyle xmlns:a="http://schemas.openxmlformats.org/drawingml/2006/main"/>
+          <a:lstStyle xmlns:a="http://schemas.openxmlformats.org/drawingml/2006/main">
+            <a:defPPr algn="ctr">
+              <a:defRPr sz="1400" b="0">
+                <a:solidFill>
+                  <a:srgbClr val="59636E"/>
+                </a:solidFill>
+                <a:latin typeface="Noto Sans JP"/>
+                <a:ea typeface="Noto Sans JP"/>
+                <a:cs typeface="Noto Sans JP"/>
+              </a:defRPr>
+            </a:defPPr>
+          </a:lstStyle>
           <a:p xmlns:a="http://schemas.openxmlformats.org/drawingml/2006/main">
             <a:pPr algn="ctr">
               <a:defRPr sz="1400" b="0">
@@ -6144,10 +8024,10 @@
       </p:sp>
       <p:sp>
         <p:nvSpPr>
-          <p:cNvPr id="33" name="input-9">
-            <a:extLst xmlns:a="http://schemas.openxmlformats.org/drawingml/2006/main">
-              <a:ext uri="{FF2B5EF4-FFF2-40B4-BE49-F238E27FC236}">
-                <a16:creationId xmlns:a16="http://schemas.microsoft.com/office/drawing/2014/main" id="{45BE156C-2315-41B3-AD4A-0D4EA669BB0C}"/>
+          <p:cNvPr id="32" name="input-9">
+            <a:extLst xmlns:a="http://schemas.openxmlformats.org/drawingml/2006/main">
+              <a:ext uri="{FF2B5EF4-FFF2-40B4-BE49-F238E27FC236}">
+                <a16:creationId xmlns:a16="http://schemas.microsoft.com/office/drawing/2014/main" id="{3D85BA2F-1FFA-4EA0-A1D6-1684D7C1C392}"/>
               </a:ext>
             </a:extLst>
           </p:cNvPr>
@@ -6175,10 +8055,10 @@
       </p:sp>
       <p:sp>
         <p:nvSpPr>
-          <p:cNvPr id="34" name="minute-9">
-            <a:extLst xmlns:a="http://schemas.openxmlformats.org/drawingml/2006/main">
-              <a:ext uri="{FF2B5EF4-FFF2-40B4-BE49-F238E27FC236}">
-                <a16:creationId xmlns:a16="http://schemas.microsoft.com/office/drawing/2014/main" id="{3E3C21C0-B8D7-4E94-8384-2F20255120F8}"/>
+          <p:cNvPr id="33" name="minute-9">
+            <a:extLst xmlns:a="http://schemas.openxmlformats.org/drawingml/2006/main">
+              <a:ext uri="{FF2B5EF4-FFF2-40B4-BE49-F238E27FC236}">
+                <a16:creationId xmlns:a16="http://schemas.microsoft.com/office/drawing/2014/main" id="{FD43DA2E-BBD3-4806-B5A2-0CFDE428780D}"/>
               </a:ext>
             </a:extLst>
           </p:cNvPr>
@@ -6205,7 +8085,18 @@
           <a:bodyPr xmlns:a="http://schemas.openxmlformats.org/drawingml/2006/main" lIns="0" tIns="0" rIns="0" bIns="0" anchor="ctr">
             <a:noAutofit/>
           </a:bodyPr>
-          <a:lstStyle xmlns:a="http://schemas.openxmlformats.org/drawingml/2006/main"/>
+          <a:lstStyle xmlns:a="http://schemas.openxmlformats.org/drawingml/2006/main">
+            <a:defPPr algn="ctr">
+              <a:defRPr sz="1400" b="0">
+                <a:solidFill>
+                  <a:srgbClr val="59636E"/>
+                </a:solidFill>
+                <a:latin typeface="Noto Sans JP"/>
+                <a:ea typeface="Noto Sans JP"/>
+                <a:cs typeface="Noto Sans JP"/>
+              </a:defRPr>
+            </a:defPPr>
+          </a:lstStyle>
           <a:p xmlns:a="http://schemas.openxmlformats.org/drawingml/2006/main">
             <a:pPr algn="ctr">
               <a:defRPr sz="1400" b="0">
@@ -6233,10 +8124,10 @@
       </p:sp>
       <p:sp>
         <p:nvSpPr>
-          <p:cNvPr id="35" name="input-10">
-            <a:extLst xmlns:a="http://schemas.openxmlformats.org/drawingml/2006/main">
-              <a:ext uri="{FF2B5EF4-FFF2-40B4-BE49-F238E27FC236}">
-                <a16:creationId xmlns:a16="http://schemas.microsoft.com/office/drawing/2014/main" id="{B5743F84-66BD-4229-851C-854CFC4A6272}"/>
+          <p:cNvPr id="34" name="input-10">
+            <a:extLst xmlns:a="http://schemas.openxmlformats.org/drawingml/2006/main">
+              <a:ext uri="{FF2B5EF4-FFF2-40B4-BE49-F238E27FC236}">
+                <a16:creationId xmlns:a16="http://schemas.microsoft.com/office/drawing/2014/main" id="{95E4D739-3C58-4FCD-A31D-250B337C32DF}"/>
               </a:ext>
             </a:extLst>
           </p:cNvPr>
@@ -6264,10 +8155,10 @@
       </p:sp>
       <p:sp>
         <p:nvSpPr>
-          <p:cNvPr id="36" name="minute-10">
-            <a:extLst xmlns:a="http://schemas.openxmlformats.org/drawingml/2006/main">
-              <a:ext uri="{FF2B5EF4-FFF2-40B4-BE49-F238E27FC236}">
-                <a16:creationId xmlns:a16="http://schemas.microsoft.com/office/drawing/2014/main" id="{97C82175-EB85-46EF-B89E-2FC4DD599212}"/>
+          <p:cNvPr id="35" name="minute-10">
+            <a:extLst xmlns:a="http://schemas.openxmlformats.org/drawingml/2006/main">
+              <a:ext uri="{FF2B5EF4-FFF2-40B4-BE49-F238E27FC236}">
+                <a16:creationId xmlns:a16="http://schemas.microsoft.com/office/drawing/2014/main" id="{67EBB46A-9C6D-49AB-9E0D-141349D831BF}"/>
               </a:ext>
             </a:extLst>
           </p:cNvPr>
@@ -6294,7 +8185,18 @@
           <a:bodyPr xmlns:a="http://schemas.openxmlformats.org/drawingml/2006/main" lIns="0" tIns="0" rIns="0" bIns="0" anchor="ctr">
             <a:noAutofit/>
           </a:bodyPr>
-          <a:lstStyle xmlns:a="http://schemas.openxmlformats.org/drawingml/2006/main"/>
+          <a:lstStyle xmlns:a="http://schemas.openxmlformats.org/drawingml/2006/main">
+            <a:defPPr algn="ctr">
+              <a:defRPr sz="1400" b="0">
+                <a:solidFill>
+                  <a:srgbClr val="59636E"/>
+                </a:solidFill>
+                <a:latin typeface="Noto Sans JP"/>
+                <a:ea typeface="Noto Sans JP"/>
+                <a:cs typeface="Noto Sans JP"/>
+              </a:defRPr>
+            </a:defPPr>
+          </a:lstStyle>
           <a:p xmlns:a="http://schemas.openxmlformats.org/drawingml/2006/main">
             <a:pPr algn="ctr">
               <a:defRPr sz="1400" b="0">
@@ -6322,10 +8224,10 @@
       </p:sp>
       <p:sp>
         <p:nvSpPr>
-          <p:cNvPr id="37" name="retained-10">
-            <a:extLst xmlns:a="http://schemas.openxmlformats.org/drawingml/2006/main">
-              <a:ext uri="{FF2B5EF4-FFF2-40B4-BE49-F238E27FC236}">
-                <a16:creationId xmlns:a16="http://schemas.microsoft.com/office/drawing/2014/main" id="{7447CB29-BEE7-40CF-98E1-BE85AC49712E}"/>
+          <p:cNvPr id="36" name="retained-10">
+            <a:extLst xmlns:a="http://schemas.openxmlformats.org/drawingml/2006/main">
+              <a:ext uri="{FF2B5EF4-FFF2-40B4-BE49-F238E27FC236}">
+                <a16:creationId xmlns:a16="http://schemas.microsoft.com/office/drawing/2014/main" id="{33B637B6-DFE4-47F1-8A85-2499885AFED7}"/>
               </a:ext>
             </a:extLst>
           </p:cNvPr>
@@ -6353,37 +8255,12 @@
           </a:ln>
         </p:spPr>
       </p:sp>
-      <p:cxnSp>
-        <p:nvCxnSpPr>
-          <p:cNvPr id="84" name=""/>
-          <p:cNvCxnSpPr>
-            <a:stCxn xmlns:a="http://schemas.openxmlformats.org/drawingml/2006/main" id="35" idx="4"/>
-            <a:endCxn xmlns:a="http://schemas.openxmlformats.org/drawingml/2006/main" id="37" idx="0"/>
-          </p:cNvCxnSpPr>
-          <p:nvPr/>
-        </p:nvCxnSpPr>
-        <p:spPr>
-          <a:xfrm xmlns:a="http://schemas.openxmlformats.org/drawingml/2006/main">
-            <a:off x="7324725" y="2057400"/>
-            <a:ext cx="0" cy="1200150"/>
-          </a:xfrm>
-          <a:prstGeom xmlns:a="http://schemas.openxmlformats.org/drawingml/2006/main" prst="straightConnector1">
-            <a:avLst/>
-          </a:prstGeom>
-          <a:ln xmlns:a="http://schemas.openxmlformats.org/drawingml/2006/main" w="11430">
-            <a:solidFill>
-              <a:srgbClr val="59636E"/>
-            </a:solidFill>
-            <a:tailEnd type="triangle" w="sm" len="sm"/>
-          </a:ln>
-        </p:spPr>
-      </p:cxnSp>
-      <p:sp>
-        <p:nvSpPr>
-          <p:cNvPr id="39" name="input-11">
-            <a:extLst xmlns:a="http://schemas.openxmlformats.org/drawingml/2006/main">
-              <a:ext uri="{FF2B5EF4-FFF2-40B4-BE49-F238E27FC236}">
-                <a16:creationId xmlns:a16="http://schemas.microsoft.com/office/drawing/2014/main" id="{57CD2F03-5A37-41B4-9FCB-BB6A58698EDB}"/>
+      <p:sp>
+        <p:nvSpPr>
+          <p:cNvPr id="38" name="input-11">
+            <a:extLst xmlns:a="http://schemas.openxmlformats.org/drawingml/2006/main">
+              <a:ext uri="{FF2B5EF4-FFF2-40B4-BE49-F238E27FC236}">
+                <a16:creationId xmlns:a16="http://schemas.microsoft.com/office/drawing/2014/main" id="{E54FF52E-FD63-43F8-BD38-C159764694F3}"/>
               </a:ext>
             </a:extLst>
           </p:cNvPr>
@@ -6411,10 +8288,10 @@
       </p:sp>
       <p:sp>
         <p:nvSpPr>
-          <p:cNvPr id="40" name="minute-11">
-            <a:extLst xmlns:a="http://schemas.openxmlformats.org/drawingml/2006/main">
-              <a:ext uri="{FF2B5EF4-FFF2-40B4-BE49-F238E27FC236}">
-                <a16:creationId xmlns:a16="http://schemas.microsoft.com/office/drawing/2014/main" id="{777B0460-442C-47F4-99D2-A5A19C3986A8}"/>
+          <p:cNvPr id="39" name="minute-11">
+            <a:extLst xmlns:a="http://schemas.openxmlformats.org/drawingml/2006/main">
+              <a:ext uri="{FF2B5EF4-FFF2-40B4-BE49-F238E27FC236}">
+                <a16:creationId xmlns:a16="http://schemas.microsoft.com/office/drawing/2014/main" id="{FEF97139-30C8-4900-8784-281F57292B74}"/>
               </a:ext>
             </a:extLst>
           </p:cNvPr>
@@ -6441,7 +8318,18 @@
           <a:bodyPr xmlns:a="http://schemas.openxmlformats.org/drawingml/2006/main" lIns="0" tIns="0" rIns="0" bIns="0" anchor="ctr">
             <a:noAutofit/>
           </a:bodyPr>
-          <a:lstStyle xmlns:a="http://schemas.openxmlformats.org/drawingml/2006/main"/>
+          <a:lstStyle xmlns:a="http://schemas.openxmlformats.org/drawingml/2006/main">
+            <a:defPPr algn="ctr">
+              <a:defRPr sz="1400" b="0">
+                <a:solidFill>
+                  <a:srgbClr val="59636E"/>
+                </a:solidFill>
+                <a:latin typeface="Noto Sans JP"/>
+                <a:ea typeface="Noto Sans JP"/>
+                <a:cs typeface="Noto Sans JP"/>
+              </a:defRPr>
+            </a:defPPr>
+          </a:lstStyle>
           <a:p xmlns:a="http://schemas.openxmlformats.org/drawingml/2006/main">
             <a:pPr algn="ctr">
               <a:defRPr sz="1400" b="0">
@@ -6469,10 +8357,10 @@
       </p:sp>
       <p:sp>
         <p:nvSpPr>
-          <p:cNvPr id="41" name="input-12">
-            <a:extLst xmlns:a="http://schemas.openxmlformats.org/drawingml/2006/main">
-              <a:ext uri="{FF2B5EF4-FFF2-40B4-BE49-F238E27FC236}">
-                <a16:creationId xmlns:a16="http://schemas.microsoft.com/office/drawing/2014/main" id="{9C48AAF3-CE1A-4E00-98D6-23345C580F2F}"/>
+          <p:cNvPr id="40" name="input-12">
+            <a:extLst xmlns:a="http://schemas.openxmlformats.org/drawingml/2006/main">
+              <a:ext uri="{FF2B5EF4-FFF2-40B4-BE49-F238E27FC236}">
+                <a16:creationId xmlns:a16="http://schemas.microsoft.com/office/drawing/2014/main" id="{4FB19AA4-75A3-4095-AAD2-3ACC14563350}"/>
               </a:ext>
             </a:extLst>
           </p:cNvPr>
@@ -6500,10 +8388,10 @@
       </p:sp>
       <p:sp>
         <p:nvSpPr>
-          <p:cNvPr id="42" name="minute-12">
-            <a:extLst xmlns:a="http://schemas.openxmlformats.org/drawingml/2006/main">
-              <a:ext uri="{FF2B5EF4-FFF2-40B4-BE49-F238E27FC236}">
-                <a16:creationId xmlns:a16="http://schemas.microsoft.com/office/drawing/2014/main" id="{88CAD8D8-15C8-4E8B-B4CC-EECDE61B747A}"/>
+          <p:cNvPr id="41" name="minute-12">
+            <a:extLst xmlns:a="http://schemas.openxmlformats.org/drawingml/2006/main">
+              <a:ext uri="{FF2B5EF4-FFF2-40B4-BE49-F238E27FC236}">
+                <a16:creationId xmlns:a16="http://schemas.microsoft.com/office/drawing/2014/main" id="{8A5631C0-DF83-4D0F-B2D9-00E2EE2B02F8}"/>
               </a:ext>
             </a:extLst>
           </p:cNvPr>
@@ -6530,7 +8418,18 @@
           <a:bodyPr xmlns:a="http://schemas.openxmlformats.org/drawingml/2006/main" lIns="0" tIns="0" rIns="0" bIns="0" anchor="ctr">
             <a:noAutofit/>
           </a:bodyPr>
-          <a:lstStyle xmlns:a="http://schemas.openxmlformats.org/drawingml/2006/main"/>
+          <a:lstStyle xmlns:a="http://schemas.openxmlformats.org/drawingml/2006/main">
+            <a:defPPr algn="ctr">
+              <a:defRPr sz="1400" b="0">
+                <a:solidFill>
+                  <a:srgbClr val="59636E"/>
+                </a:solidFill>
+                <a:latin typeface="Noto Sans JP"/>
+                <a:ea typeface="Noto Sans JP"/>
+                <a:cs typeface="Noto Sans JP"/>
+              </a:defRPr>
+            </a:defPPr>
+          </a:lstStyle>
           <a:p xmlns:a="http://schemas.openxmlformats.org/drawingml/2006/main">
             <a:pPr algn="ctr">
               <a:defRPr sz="1400" b="0">
@@ -6558,10 +8457,10 @@
       </p:sp>
       <p:sp>
         <p:nvSpPr>
-          <p:cNvPr id="43" name="axis-unit">
-            <a:extLst xmlns:a="http://schemas.openxmlformats.org/drawingml/2006/main">
-              <a:ext uri="{FF2B5EF4-FFF2-40B4-BE49-F238E27FC236}">
-                <a16:creationId xmlns:a16="http://schemas.microsoft.com/office/drawing/2014/main" id="{26E5015F-6A62-47B7-820E-CD73BD9F3A2B}"/>
+          <p:cNvPr id="42" name="axis-unit">
+            <a:extLst xmlns:a="http://schemas.openxmlformats.org/drawingml/2006/main">
+              <a:ext uri="{FF2B5EF4-FFF2-40B4-BE49-F238E27FC236}">
+                <a16:creationId xmlns:a16="http://schemas.microsoft.com/office/drawing/2014/main" id="{AD05A263-82C3-4065-A2BE-303B94DB7300}"/>
               </a:ext>
             </a:extLst>
           </p:cNvPr>
@@ -6588,7 +8487,18 @@
           <a:bodyPr xmlns:a="http://schemas.openxmlformats.org/drawingml/2006/main" lIns="0" tIns="0" rIns="0" bIns="0" anchor="ctr">
             <a:noAutofit/>
           </a:bodyPr>
-          <a:lstStyle xmlns:a="http://schemas.openxmlformats.org/drawingml/2006/main"/>
+          <a:lstStyle xmlns:a="http://schemas.openxmlformats.org/drawingml/2006/main">
+            <a:defPPr algn="r">
+              <a:defRPr sz="1400" b="0">
+                <a:solidFill>
+                  <a:srgbClr val="59636E"/>
+                </a:solidFill>
+                <a:latin typeface="Noto Sans JP"/>
+                <a:ea typeface="Noto Sans JP"/>
+                <a:cs typeface="Noto Sans JP"/>
+              </a:defRPr>
+            </a:defPPr>
+          </a:lstStyle>
           <a:p xmlns:a="http://schemas.openxmlformats.org/drawingml/2006/main">
             <a:pPr algn="r">
               <a:defRPr sz="1400" b="0">
@@ -6616,10 +8526,10 @@
       </p:sp>
       <p:sp>
         <p:nvSpPr>
-          <p:cNvPr id="44" name="arrow-meaning">
-            <a:extLst xmlns:a="http://schemas.openxmlformats.org/drawingml/2006/main">
-              <a:ext uri="{FF2B5EF4-FFF2-40B4-BE49-F238E27FC236}">
-                <a16:creationId xmlns:a16="http://schemas.microsoft.com/office/drawing/2014/main" id="{ECCF2DD9-021D-4A54-A8E9-06B11021898F}"/>
+          <p:cNvPr id="43" name="arrow-meaning">
+            <a:extLst xmlns:a="http://schemas.openxmlformats.org/drawingml/2006/main">
+              <a:ext uri="{FF2B5EF4-FFF2-40B4-BE49-F238E27FC236}">
+                <a16:creationId xmlns:a16="http://schemas.microsoft.com/office/drawing/2014/main" id="{582983B9-EAA6-4656-802F-32F7CB591AAA}"/>
               </a:ext>
             </a:extLst>
           </p:cNvPr>
@@ -6646,7 +8556,18 @@
           <a:bodyPr xmlns:a="http://schemas.openxmlformats.org/drawingml/2006/main" lIns="0" tIns="0" rIns="0" bIns="0" anchor="ctr">
             <a:noAutofit/>
           </a:bodyPr>
-          <a:lstStyle xmlns:a="http://schemas.openxmlformats.org/drawingml/2006/main"/>
+          <a:lstStyle xmlns:a="http://schemas.openxmlformats.org/drawingml/2006/main">
+            <a:defPPr algn="l">
+              <a:defRPr sz="1400" b="0">
+                <a:solidFill>
+                  <a:srgbClr val="59636E"/>
+                </a:solidFill>
+                <a:latin typeface="Noto Sans JP"/>
+                <a:ea typeface="Noto Sans JP"/>
+                <a:cs typeface="Noto Sans JP"/>
+              </a:defRPr>
+            </a:defPPr>
+          </a:lstStyle>
           <a:p xmlns:a="http://schemas.openxmlformats.org/drawingml/2006/main">
             <a:pPr algn="l">
               <a:defRPr sz="1400" b="0">
@@ -6674,22 +8595,22 @@
       </p:sp>
       <p:sp>
         <p:nvSpPr>
-          <p:cNvPr id="45" name="source-note">
-            <a:extLst xmlns:a="http://schemas.openxmlformats.org/drawingml/2006/main">
-              <a:ext uri="{FF2B5EF4-FFF2-40B4-BE49-F238E27FC236}">
-                <a16:creationId xmlns:a16="http://schemas.microsoft.com/office/drawing/2014/main" id="{9CFCADFE-DFF5-4003-8A48-A6931758B3D3}"/>
-              </a:ext>
-            </a:extLst>
-          </p:cNvPr>
-          <p:cNvSpPr>
-            <a:spLocks xmlns:a="http://schemas.openxmlformats.org/drawingml/2006/main" noGrp="1"/>
-          </p:cNvSpPr>
-          <p:nvPr/>
-        </p:nvSpPr>
-        <p:spPr>
-          <a:xfrm xmlns:a="http://schemas.openxmlformats.org/drawingml/2006/main">
-            <a:off x="457200" y="3905250"/>
-            <a:ext cx="8229600" cy="266700"/>
+          <p:cNvPr id="44" name="page-reference">
+            <a:extLst xmlns:a="http://schemas.openxmlformats.org/drawingml/2006/main">
+              <a:ext uri="{FF2B5EF4-FFF2-40B4-BE49-F238E27FC236}">
+                <a16:creationId xmlns:a16="http://schemas.microsoft.com/office/drawing/2014/main" id="{F76632C4-CEDB-44ED-8D5D-5A1E2AAEA23D}"/>
+              </a:ext>
+            </a:extLst>
+          </p:cNvPr>
+          <p:cNvSpPr>
+            <a:spLocks xmlns:a="http://schemas.openxmlformats.org/drawingml/2006/main" noGrp="1"/>
+          </p:cNvSpPr>
+          <p:nvPr/>
+        </p:nvSpPr>
+        <p:spPr>
+          <a:xfrm xmlns:a="http://schemas.openxmlformats.org/drawingml/2006/main">
+            <a:off x="457200" y="4224528"/>
+            <a:ext cx="8229600" cy="329184"/>
           </a:xfrm>
           <a:prstGeom xmlns:a="http://schemas.openxmlformats.org/drawingml/2006/main" prst="rect">
             <a:avLst/>
@@ -6704,10 +8625,9 @@
           <a:bodyPr xmlns:a="http://schemas.openxmlformats.org/drawingml/2006/main" lIns="0" tIns="0" rIns="0" bIns="0" anchor="ctr">
             <a:noAutofit/>
           </a:bodyPr>
-          <a:lstStyle xmlns:a="http://schemas.openxmlformats.org/drawingml/2006/main"/>
-          <a:p xmlns:a="http://schemas.openxmlformats.org/drawingml/2006/main">
-            <a:pPr algn="l">
-              <a:defRPr sz="1500" b="0">
+          <a:lstStyle xmlns:a="http://schemas.openxmlformats.org/drawingml/2006/main">
+            <a:defPPr algn="l">
+              <a:defRPr sz="900" b="0">
                 <a:solidFill>
                   <a:srgbClr val="59636E"/>
                 </a:solidFill>
@@ -6715,54 +8635,8 @@
                 <a:ea typeface="Noto Sans JP"/>
                 <a:cs typeface="Noto Sans JP"/>
               </a:defRPr>
-            </a:pPr>
-            <a:r>
-              <a:rPr sz="1500" b="0">
-                <a:solidFill>
-                  <a:srgbClr val="59636E"/>
-                </a:solidFill>
-                <a:latin typeface="Noto Sans JP"/>
-                <a:ea typeface="Noto Sans JP"/>
-                <a:cs typeface="Noto Sans JP"/>
-              </a:rPr>
-              <a:t>合成系列1例／開始時刻0分／間引き処理だけを確認</a:t>
-            </a:r>
-          </a:p>
-        </p:txBody>
-      </p:sp>
-      <p:sp>
-        <p:nvSpPr>
-          <p:cNvPr id="46" name="page-reference">
-            <a:extLst xmlns:a="http://schemas.openxmlformats.org/drawingml/2006/main">
-              <a:ext uri="{FF2B5EF4-FFF2-40B4-BE49-F238E27FC236}">
-                <a16:creationId xmlns:a16="http://schemas.microsoft.com/office/drawing/2014/main" id="{3BC9D3AE-2010-4D86-B98B-7E0CE721E6D1}"/>
-              </a:ext>
-            </a:extLst>
-          </p:cNvPr>
-          <p:cNvSpPr>
-            <a:spLocks xmlns:a="http://schemas.openxmlformats.org/drawingml/2006/main" noGrp="1"/>
-          </p:cNvSpPr>
-          <p:nvPr/>
-        </p:nvSpPr>
-        <p:spPr>
-          <a:xfrm xmlns:a="http://schemas.openxmlformats.org/drawingml/2006/main">
-            <a:off x="457200" y="4224528"/>
-            <a:ext cx="8229600" cy="329184"/>
-          </a:xfrm>
-          <a:prstGeom xmlns:a="http://schemas.openxmlformats.org/drawingml/2006/main" prst="rect">
-            <a:avLst/>
-          </a:prstGeom>
-          <a:noFill xmlns:a="http://schemas.openxmlformats.org/drawingml/2006/main"/>
-          <a:ln xmlns:a="http://schemas.openxmlformats.org/drawingml/2006/main" w="0">
-            <a:noFill/>
-            <a:prstDash val="solid"/>
-          </a:ln>
-        </p:spPr>
-        <p:txBody>
-          <a:bodyPr xmlns:a="http://schemas.openxmlformats.org/drawingml/2006/main" lIns="0" tIns="0" rIns="0" bIns="0" anchor="ctr">
-            <a:noAutofit/>
-          </a:bodyPr>
-          <a:lstStyle xmlns:a="http://schemas.openxmlformats.org/drawingml/2006/main"/>
+            </a:defPPr>
+          </a:lstStyle>
           <a:p xmlns:a="http://schemas.openxmlformats.org/drawingml/2006/main">
             <a:pPr algn="l">
               <a:defRPr sz="900" b="0">
@@ -6791,7 +8665,7 @@
     </p:spTree>
     <p:extLst>
       <p:ext uri="{BB962C8B-B14F-4D97-AF65-F5344CB8AC3E}">
-        <p14:creationId xmlns:p14="http://schemas.microsoft.com/office/powerpoint/2010/main" val="458776401"/>
+        <p14:creationId xmlns:p14="http://schemas.microsoft.com/office/powerpoint/2010/main" val="842113661"/>
       </p:ext>
     </p:extLst>
   </p:cSld>
@@ -6819,10 +8693,10 @@
       </p:grpSpPr>
       <p:sp>
         <p:nvSpPr>
-          <p:cNvPr id="15" name="footer-line">
-            <a:extLst xmlns:a="http://schemas.openxmlformats.org/drawingml/2006/main">
-              <a:ext uri="{FF2B5EF4-FFF2-40B4-BE49-F238E27FC236}">
-                <a16:creationId xmlns:a16="http://schemas.microsoft.com/office/drawing/2014/main" id="{3BD7633A-928D-45DB-A2EB-AD01BAF92796}"/>
+          <p:cNvPr id="13" name="footer-line">
+            <a:extLst xmlns:a="http://schemas.openxmlformats.org/drawingml/2006/main">
+              <a:ext uri="{FF2B5EF4-FFF2-40B4-BE49-F238E27FC236}">
+                <a16:creationId xmlns:a16="http://schemas.microsoft.com/office/drawing/2014/main" id="{C7A539E8-B36E-43AB-BCF5-345D7F115B1B}"/>
               </a:ext>
             </a:extLst>
           </p:cNvPr>
@@ -6850,14 +8724,20 @@
       </p:sp>
       <p:pic>
         <p:nvPicPr>
-          <p:cNvPr id="16" name=""/>
+          <p:cNvPr id="2" name="">
+            <a:extLst xmlns:a="http://schemas.openxmlformats.org/drawingml/2006/main">
+              <a:ext uri="{FF2B5EF4-FFF2-40B4-BE49-F238E27FC236}">
+                <a16:creationId xmlns:a16="http://schemas.microsoft.com/office/drawing/2014/main" id="{52B239FE-0807-483C-9631-AFD57241C536}"/>
+              </a:ext>
+            </a:extLst>
+          </p:cNvPr>
           <p:cNvPicPr>
             <a:picLocks xmlns:a="http://schemas.openxmlformats.org/drawingml/2006/main" noChangeAspect="1"/>
           </p:cNvPicPr>
           <p:nvPr/>
         </p:nvPicPr>
         <p:blipFill>
-          <a:blip xmlns:r="http://schemas.openxmlformats.org/officeDocument/2006/relationships" xmlns:a="http://schemas.openxmlformats.org/drawingml/2006/main" r:embed="Rc8aea665ea9b4bd6"/>
+          <a:blip xmlns:r="http://schemas.openxmlformats.org/officeDocument/2006/relationships" xmlns:a="http://schemas.openxmlformats.org/drawingml/2006/main" r:embed="R3911e1079649422c"/>
           <a:stretch xmlns:a="http://schemas.openxmlformats.org/drawingml/2006/main"/>
         </p:blipFill>
         <p:spPr>
@@ -6875,7 +8755,7 @@
           <p:cNvPr id="3" name="page">
             <a:extLst xmlns:a="http://schemas.openxmlformats.org/drawingml/2006/main">
               <a:ext uri="{FF2B5EF4-FFF2-40B4-BE49-F238E27FC236}">
-                <a16:creationId xmlns:a16="http://schemas.microsoft.com/office/drawing/2014/main" id="{5D9EAB48-0891-4328-B278-7F5F44F9784F}"/>
+                <a16:creationId xmlns:a16="http://schemas.microsoft.com/office/drawing/2014/main" id="{9316AEF2-AB5A-4942-8E39-90C35403D965}"/>
               </a:ext>
             </a:extLst>
           </p:cNvPr>
@@ -6902,7 +8782,18 @@
           <a:bodyPr xmlns:a="http://schemas.openxmlformats.org/drawingml/2006/main" lIns="0" tIns="0" rIns="0" bIns="0" anchor="ctr">
             <a:noAutofit/>
           </a:bodyPr>
-          <a:lstStyle xmlns:a="http://schemas.openxmlformats.org/drawingml/2006/main"/>
+          <a:lstStyle xmlns:a="http://schemas.openxmlformats.org/drawingml/2006/main">
+            <a:defPPr algn="r">
+              <a:defRPr sz="1400" b="0">
+                <a:solidFill>
+                  <a:srgbClr val="17202A"/>
+                </a:solidFill>
+                <a:latin typeface="Arial"/>
+                <a:ea typeface="Arial"/>
+                <a:cs typeface="Arial"/>
+              </a:defRPr>
+            </a:defPPr>
+          </a:lstStyle>
           <a:p xmlns:a="http://schemas.openxmlformats.org/drawingml/2006/main">
             <a:pPr algn="r">
               <a:defRPr sz="1400" b="0">
@@ -6930,22 +8821,22 @@
       </p:sp>
       <p:sp>
         <p:nvSpPr>
-          <p:cNvPr id="4" name="fictional-disclosure">
-            <a:extLst xmlns:a="http://schemas.openxmlformats.org/drawingml/2006/main">
-              <a:ext uri="{FF2B5EF4-FFF2-40B4-BE49-F238E27FC236}">
-                <a16:creationId xmlns:a16="http://schemas.microsoft.com/office/drawing/2014/main" id="{14CD8C17-925F-4EF7-9116-B52BD703A638}"/>
-              </a:ext>
-            </a:extLst>
-          </p:cNvPr>
-          <p:cNvSpPr>
-            <a:spLocks xmlns:a="http://schemas.openxmlformats.org/drawingml/2006/main" noGrp="1"/>
-          </p:cNvSpPr>
-          <p:nvPr/>
-        </p:nvSpPr>
-        <p:spPr>
-          <a:xfrm xmlns:a="http://schemas.openxmlformats.org/drawingml/2006/main">
-            <a:off x="1428750" y="4772025"/>
-            <a:ext cx="4762500" cy="266700"/>
+          <p:cNvPr id="4" name="running-chapter-6">
+            <a:extLst xmlns:a="http://schemas.openxmlformats.org/drawingml/2006/main">
+              <a:ext uri="{FF2B5EF4-FFF2-40B4-BE49-F238E27FC236}">
+                <a16:creationId xmlns:a16="http://schemas.microsoft.com/office/drawing/2014/main" id="{71D0E786-2E6E-401C-9A81-4E450A072FDF}"/>
+              </a:ext>
+            </a:extLst>
+          </p:cNvPr>
+          <p:cNvSpPr>
+            <a:spLocks xmlns:a="http://schemas.openxmlformats.org/drawingml/2006/main" noGrp="1"/>
+          </p:cNvSpPr>
+          <p:nvPr/>
+        </p:nvSpPr>
+        <p:spPr>
+          <a:xfrm xmlns:a="http://schemas.openxmlformats.org/drawingml/2006/main">
+            <a:off x="457200" y="109728"/>
+            <a:ext cx="2560320" cy="304800"/>
           </a:xfrm>
           <a:prstGeom xmlns:a="http://schemas.openxmlformats.org/drawingml/2006/main" prst="rect">
             <a:avLst/>
@@ -6960,65 +8851,18 @@
           <a:bodyPr xmlns:a="http://schemas.openxmlformats.org/drawingml/2006/main" lIns="0" tIns="0" rIns="0" bIns="0" anchor="ctr">
             <a:noAutofit/>
           </a:bodyPr>
-          <a:lstStyle xmlns:a="http://schemas.openxmlformats.org/drawingml/2006/main"/>
-          <a:p xmlns:a="http://schemas.openxmlformats.org/drawingml/2006/main">
-            <a:pPr algn="l">
-              <a:defRPr sz="1050" b="0">
-                <a:solidFill>
-                  <a:srgbClr val="59636E"/>
-                </a:solidFill>
-                <a:latin typeface="Noto Sans JP"/>
-                <a:ea typeface="Noto Sans JP"/>
-                <a:cs typeface="Noto Sans JP"/>
-              </a:defRPr>
-            </a:pPr>
-            <a:r>
-              <a:rPr sz="1050" b="0">
-                <a:solidFill>
-                  <a:srgbClr val="59636E"/>
-                </a:solidFill>
-                <a:latin typeface="Noto Sans JP"/>
-                <a:ea typeface="Noto Sans JP"/>
-                <a:cs typeface="Noto Sans JP"/>
-              </a:rPr>
-              <a:t>架空作例・合成データ</a:t>
-            </a:r>
-          </a:p>
-        </p:txBody>
-      </p:sp>
-      <p:sp>
-        <p:nvSpPr>
-          <p:cNvPr id="5" name="running-chapter-6">
-            <a:extLst xmlns:a="http://schemas.openxmlformats.org/drawingml/2006/main">
-              <a:ext uri="{FF2B5EF4-FFF2-40B4-BE49-F238E27FC236}">
-                <a16:creationId xmlns:a16="http://schemas.microsoft.com/office/drawing/2014/main" id="{C9A418BD-F310-43D7-94A9-132CEBDD092C}"/>
-              </a:ext>
-            </a:extLst>
-          </p:cNvPr>
-          <p:cNvSpPr>
-            <a:spLocks xmlns:a="http://schemas.openxmlformats.org/drawingml/2006/main" noGrp="1"/>
-          </p:cNvSpPr>
-          <p:nvPr/>
-        </p:nvSpPr>
-        <p:spPr>
-          <a:xfrm xmlns:a="http://schemas.openxmlformats.org/drawingml/2006/main">
-            <a:off x="457200" y="109728"/>
-            <a:ext cx="2560320" cy="304800"/>
-          </a:xfrm>
-          <a:prstGeom xmlns:a="http://schemas.openxmlformats.org/drawingml/2006/main" prst="rect">
-            <a:avLst/>
-          </a:prstGeom>
-          <a:noFill xmlns:a="http://schemas.openxmlformats.org/drawingml/2006/main"/>
-          <a:ln xmlns:a="http://schemas.openxmlformats.org/drawingml/2006/main" w="0">
-            <a:noFill/>
-            <a:prstDash val="solid"/>
-          </a:ln>
-        </p:spPr>
-        <p:txBody>
-          <a:bodyPr xmlns:a="http://schemas.openxmlformats.org/drawingml/2006/main" lIns="0" tIns="0" rIns="0" bIns="0" anchor="ctr">
-            <a:noAutofit/>
-          </a:bodyPr>
-          <a:lstStyle xmlns:a="http://schemas.openxmlformats.org/drawingml/2006/main"/>
+          <a:lstStyle xmlns:a="http://schemas.openxmlformats.org/drawingml/2006/main">
+            <a:defPPr algn="l">
+              <a:defRPr sz="1200" b="0">
+                <a:solidFill>
+                  <a:srgbClr val="38761D"/>
+                </a:solidFill>
+                <a:latin typeface="Noto Sans JP"/>
+                <a:ea typeface="Noto Sans JP"/>
+                <a:cs typeface="Noto Sans JP"/>
+              </a:defRPr>
+            </a:defPPr>
+          </a:lstStyle>
           <a:p xmlns:a="http://schemas.openxmlformats.org/drawingml/2006/main">
             <a:pPr algn="l">
               <a:defRPr sz="1200" b="0">
@@ -7046,10 +8890,10 @@
       </p:sp>
       <p:sp>
         <p:nvSpPr>
-          <p:cNvPr id="6" name="running-title-6">
-            <a:extLst xmlns:a="http://schemas.openxmlformats.org/drawingml/2006/main">
-              <a:ext uri="{FF2B5EF4-FFF2-40B4-BE49-F238E27FC236}">
-                <a16:creationId xmlns:a16="http://schemas.microsoft.com/office/drawing/2014/main" id="{A8E13E9D-40B6-4C0B-8FD0-A425DC214316}"/>
+          <p:cNvPr id="5" name="running-title-6">
+            <a:extLst xmlns:a="http://schemas.openxmlformats.org/drawingml/2006/main">
+              <a:ext uri="{FF2B5EF4-FFF2-40B4-BE49-F238E27FC236}">
+                <a16:creationId xmlns:a16="http://schemas.microsoft.com/office/drawing/2014/main" id="{1ED509BD-6C69-43EF-82FA-B183551ACA2F}"/>
               </a:ext>
             </a:extLst>
           </p:cNvPr>
@@ -7076,7 +8920,18 @@
           <a:bodyPr xmlns:a="http://schemas.openxmlformats.org/drawingml/2006/main" lIns="0" tIns="0" rIns="0" bIns="0" anchor="ctr">
             <a:noAutofit/>
           </a:bodyPr>
-          <a:lstStyle xmlns:a="http://schemas.openxmlformats.org/drawingml/2006/main"/>
+          <a:lstStyle xmlns:a="http://schemas.openxmlformats.org/drawingml/2006/main">
+            <a:defPPr algn="r">
+              <a:defRPr sz="1200" b="0">
+                <a:solidFill>
+                  <a:srgbClr val="38761D"/>
+                </a:solidFill>
+                <a:latin typeface="Noto Sans JP"/>
+                <a:ea typeface="Noto Sans JP"/>
+                <a:cs typeface="Noto Sans JP"/>
+              </a:defRPr>
+            </a:defPPr>
+          </a:lstStyle>
           <a:p xmlns:a="http://schemas.openxmlformats.org/drawingml/2006/main">
             <a:pPr algn="r">
               <a:defRPr sz="1200" b="0">
@@ -7104,10 +8959,10 @@
       </p:sp>
       <p:sp>
         <p:nvSpPr>
-          <p:cNvPr id="7" name="title">
-            <a:extLst xmlns:a="http://schemas.openxmlformats.org/drawingml/2006/main">
-              <a:ext uri="{FF2B5EF4-FFF2-40B4-BE49-F238E27FC236}">
-                <a16:creationId xmlns:a16="http://schemas.microsoft.com/office/drawing/2014/main" id="{A42752C1-8141-4B84-A82F-620406966C90}"/>
+          <p:cNvPr id="6" name="title">
+            <a:extLst xmlns:a="http://schemas.openxmlformats.org/drawingml/2006/main">
+              <a:ext uri="{FF2B5EF4-FFF2-40B4-BE49-F238E27FC236}">
+                <a16:creationId xmlns:a16="http://schemas.microsoft.com/office/drawing/2014/main" id="{5E32F031-EB75-4242-A98F-7BBC3CEE0DF9}"/>
               </a:ext>
             </a:extLst>
           </p:cNvPr>
@@ -7134,7 +8989,18 @@
           <a:bodyPr xmlns:a="http://schemas.openxmlformats.org/drawingml/2006/main" lIns="0" tIns="0" rIns="0" bIns="0" anchor="ctr">
             <a:noAutofit/>
           </a:bodyPr>
-          <a:lstStyle xmlns:a="http://schemas.openxmlformats.org/drawingml/2006/main"/>
+          <a:lstStyle xmlns:a="http://schemas.openxmlformats.org/drawingml/2006/main">
+            <a:defPPr algn="l">
+              <a:defRPr sz="2700" b="1">
+                <a:solidFill>
+                  <a:srgbClr val="17202A"/>
+                </a:solidFill>
+                <a:latin typeface="Noto Sans JP"/>
+                <a:ea typeface="Noto Sans JP"/>
+                <a:cs typeface="Noto Sans JP"/>
+              </a:defRPr>
+            </a:defPPr>
+          </a:lstStyle>
           <a:p xmlns:a="http://schemas.openxmlformats.org/drawingml/2006/main">
             <a:pPr algn="l">
               <a:defRPr sz="2700" b="1">
@@ -7155,17 +9021,17 @@
                 <a:ea typeface="Noto Sans JP"/>
                 <a:cs typeface="Noto Sans JP"/>
               </a:rPr>
-              <a:t>この例では高い値が記録に残らない</a:t>
+              <a:t>この合成例では高い値が記録に残らない</a:t>
             </a:r>
           </a:p>
         </p:txBody>
       </p:sp>
       <p:sp>
         <p:nvSpPr>
-          <p:cNvPr id="8" name="message">
-            <a:extLst xmlns:a="http://schemas.openxmlformats.org/drawingml/2006/main">
-              <a:ext uri="{FF2B5EF4-FFF2-40B4-BE49-F238E27FC236}">
-                <a16:creationId xmlns:a16="http://schemas.microsoft.com/office/drawing/2014/main" id="{1C7710A1-DA06-4584-B24D-64427DBE046E}"/>
+          <p:cNvPr id="7" name="message">
+            <a:extLst xmlns:a="http://schemas.openxmlformats.org/drawingml/2006/main">
+              <a:ext uri="{FF2B5EF4-FFF2-40B4-BE49-F238E27FC236}">
+                <a16:creationId xmlns:a16="http://schemas.microsoft.com/office/drawing/2014/main" id="{3AD554D4-36EA-43FC-9E75-722DD3EF3537}"/>
               </a:ext>
             </a:extLst>
           </p:cNvPr>
@@ -7192,7 +9058,18 @@
           <a:bodyPr xmlns:a="http://schemas.openxmlformats.org/drawingml/2006/main" lIns="0" tIns="0" rIns="0" bIns="0" anchor="ctr">
             <a:noAutofit/>
           </a:bodyPr>
-          <a:lstStyle xmlns:a="http://schemas.openxmlformats.org/drawingml/2006/main"/>
+          <a:lstStyle xmlns:a="http://schemas.openxmlformats.org/drawingml/2006/main">
+            <a:defPPr algn="l">
+              <a:defRPr sz="2300" b="1">
+                <a:solidFill>
+                  <a:srgbClr val="17202A"/>
+                </a:solidFill>
+                <a:latin typeface="Noto Sans JP"/>
+                <a:ea typeface="Noto Sans JP"/>
+                <a:cs typeface="Noto Sans JP"/>
+              </a:defRPr>
+            </a:defPPr>
+          </a:lstStyle>
           <a:p xmlns:a="http://schemas.openxmlformats.org/drawingml/2006/main">
             <a:pPr algn="l">
               <a:defRPr sz="2300" b="1">
@@ -7220,7 +9097,13 @@
       </p:sp>
       <p:graphicFrame>
         <p:nvGraphicFramePr>
-          <p:cNvPr id="23" name="Chart"/>
+          <p:cNvPr id="8" name="Chart">
+            <a:extLst xmlns:a="http://schemas.openxmlformats.org/drawingml/2006/main">
+              <a:ext uri="{FF2B5EF4-FFF2-40B4-BE49-F238E27FC236}">
+                <a16:creationId xmlns:a16="http://schemas.microsoft.com/office/drawing/2014/main" id="{878E9529-BBE6-4E8F-AC98-669C09C0320B}"/>
+              </a:ext>
+            </a:extLst>
+          </p:cNvPr>
           <p:cNvGraphicFramePr/>
           <p:nvPr/>
         </p:nvGraphicFramePr>
@@ -7230,16 +9113,16 @@
         </p:xfrm>
         <a:graphic xmlns:a="http://schemas.openxmlformats.org/drawingml/2006/main">
           <a:graphicData uri="http://schemas.openxmlformats.org/drawingml/2006/chart">
-            <c:chart xmlns:r="http://schemas.openxmlformats.org/officeDocument/2006/relationships" xmlns:c="http://schemas.openxmlformats.org/drawingml/2006/chart" r:id="R326fbe63a74c4c34"/>
+            <c:chart xmlns:r="http://schemas.openxmlformats.org/officeDocument/2006/relationships" xmlns:c="http://schemas.openxmlformats.org/drawingml/2006/chart" r:id="Rc728dbbad8c24f42"/>
           </a:graphicData>
         </a:graphic>
       </p:graphicFrame>
       <p:sp>
         <p:nvSpPr>
-          <p:cNvPr id="10" name="maximum-label">
-            <a:extLst xmlns:a="http://schemas.openxmlformats.org/drawingml/2006/main">
-              <a:ext uri="{FF2B5EF4-FFF2-40B4-BE49-F238E27FC236}">
-                <a16:creationId xmlns:a16="http://schemas.microsoft.com/office/drawing/2014/main" id="{60492021-5ECB-4769-8202-CAF39105AA7C}"/>
+          <p:cNvPr id="9" name="maximum-label">
+            <a:extLst xmlns:a="http://schemas.openxmlformats.org/drawingml/2006/main">
+              <a:ext uri="{FF2B5EF4-FFF2-40B4-BE49-F238E27FC236}">
+                <a16:creationId xmlns:a16="http://schemas.microsoft.com/office/drawing/2014/main" id="{2DCF9E54-13F0-4ADB-BC9F-4AA9AECD2CD5}"/>
               </a:ext>
             </a:extLst>
           </p:cNvPr>
@@ -7266,7 +9149,18 @@
           <a:bodyPr xmlns:a="http://schemas.openxmlformats.org/drawingml/2006/main" lIns="0" tIns="0" rIns="0" bIns="0" anchor="ctr">
             <a:noAutofit/>
           </a:bodyPr>
-          <a:lstStyle xmlns:a="http://schemas.openxmlformats.org/drawingml/2006/main"/>
+          <a:lstStyle xmlns:a="http://schemas.openxmlformats.org/drawingml/2006/main">
+            <a:defPPr algn="l">
+              <a:defRPr sz="1800" b="1">
+                <a:solidFill>
+                  <a:srgbClr val="17202A"/>
+                </a:solidFill>
+                <a:latin typeface="Noto Sans JP"/>
+                <a:ea typeface="Noto Sans JP"/>
+                <a:cs typeface="Noto Sans JP"/>
+              </a:defRPr>
+            </a:defPPr>
+          </a:lstStyle>
           <a:p xmlns:a="http://schemas.openxmlformats.org/drawingml/2006/main">
             <a:pPr algn="l">
               <a:defRPr sz="1800" b="1">
@@ -7294,10 +9188,10 @@
       </p:sp>
       <p:sp>
         <p:nvSpPr>
-          <p:cNvPr id="11" name="all-max">
-            <a:extLst xmlns:a="http://schemas.openxmlformats.org/drawingml/2006/main">
-              <a:ext uri="{FF2B5EF4-FFF2-40B4-BE49-F238E27FC236}">
-                <a16:creationId xmlns:a16="http://schemas.microsoft.com/office/drawing/2014/main" id="{16B77EF2-E10F-4F6D-B98A-57FD18195D77}"/>
+          <p:cNvPr id="10" name="all-max">
+            <a:extLst xmlns:a="http://schemas.openxmlformats.org/drawingml/2006/main">
+              <a:ext uri="{FF2B5EF4-FFF2-40B4-BE49-F238E27FC236}">
+                <a16:creationId xmlns:a16="http://schemas.microsoft.com/office/drawing/2014/main" id="{F736248F-1301-463E-9D1B-54BDA56FDCC0}"/>
               </a:ext>
             </a:extLst>
           </p:cNvPr>
@@ -7324,7 +9218,18 @@
           <a:bodyPr xmlns:a="http://schemas.openxmlformats.org/drawingml/2006/main" lIns="0" tIns="0" rIns="0" bIns="0" anchor="ctr">
             <a:noAutofit/>
           </a:bodyPr>
-          <a:lstStyle xmlns:a="http://schemas.openxmlformats.org/drawingml/2006/main"/>
+          <a:lstStyle xmlns:a="http://schemas.openxmlformats.org/drawingml/2006/main">
+            <a:defPPr algn="l">
+              <a:defRPr sz="1900" b="0">
+                <a:solidFill>
+                  <a:srgbClr val="17202A"/>
+                </a:solidFill>
+                <a:latin typeface="Noto Sans JP"/>
+                <a:ea typeface="Noto Sans JP"/>
+                <a:cs typeface="Noto Sans JP"/>
+              </a:defRPr>
+            </a:defPPr>
+          </a:lstStyle>
           <a:p xmlns:a="http://schemas.openxmlformats.org/drawingml/2006/main">
             <a:pPr algn="l">
               <a:defRPr sz="1900" b="0">
@@ -7375,10 +9280,10 @@
       </p:sp>
       <p:sp>
         <p:nvSpPr>
-          <p:cNvPr id="12" name="kept-max">
-            <a:extLst xmlns:a="http://schemas.openxmlformats.org/drawingml/2006/main">
-              <a:ext uri="{FF2B5EF4-FFF2-40B4-BE49-F238E27FC236}">
-                <a16:creationId xmlns:a16="http://schemas.microsoft.com/office/drawing/2014/main" id="{BE3705AD-FEF5-41F0-8D22-EC6FE1377DCB}"/>
+          <p:cNvPr id="11" name="kept-max">
+            <a:extLst xmlns:a="http://schemas.openxmlformats.org/drawingml/2006/main">
+              <a:ext uri="{FF2B5EF4-FFF2-40B4-BE49-F238E27FC236}">
+                <a16:creationId xmlns:a16="http://schemas.microsoft.com/office/drawing/2014/main" id="{CDB0088B-2F5B-4A65-8004-66C1AC500A27}"/>
               </a:ext>
             </a:extLst>
           </p:cNvPr>
@@ -7405,7 +9310,18 @@
           <a:bodyPr xmlns:a="http://schemas.openxmlformats.org/drawingml/2006/main" lIns="0" tIns="0" rIns="0" bIns="0" anchor="ctr">
             <a:noAutofit/>
           </a:bodyPr>
-          <a:lstStyle xmlns:a="http://schemas.openxmlformats.org/drawingml/2006/main"/>
+          <a:lstStyle xmlns:a="http://schemas.openxmlformats.org/drawingml/2006/main">
+            <a:defPPr algn="l">
+              <a:defRPr sz="1900" b="1">
+                <a:solidFill>
+                  <a:srgbClr val="38761D"/>
+                </a:solidFill>
+                <a:latin typeface="Noto Sans JP"/>
+                <a:ea typeface="Noto Sans JP"/>
+                <a:cs typeface="Noto Sans JP"/>
+              </a:defRPr>
+            </a:defPPr>
+          </a:lstStyle>
           <a:p xmlns:a="http://schemas.openxmlformats.org/drawingml/2006/main">
             <a:pPr algn="l">
               <a:defRPr sz="1900" b="1">
@@ -7456,22 +9372,22 @@
       </p:sp>
       <p:sp>
         <p:nvSpPr>
-          <p:cNvPr id="13" name="condition">
-            <a:extLst xmlns:a="http://schemas.openxmlformats.org/drawingml/2006/main">
-              <a:ext uri="{FF2B5EF4-FFF2-40B4-BE49-F238E27FC236}">
-                <a16:creationId xmlns:a16="http://schemas.microsoft.com/office/drawing/2014/main" id="{714756F9-AA1E-45E3-92F6-E01C4E420DEE}"/>
-              </a:ext>
-            </a:extLst>
-          </p:cNvPr>
-          <p:cNvSpPr>
-            <a:spLocks xmlns:a="http://schemas.openxmlformats.org/drawingml/2006/main" noGrp="1"/>
-          </p:cNvSpPr>
-          <p:nvPr/>
-        </p:nvSpPr>
-        <p:spPr>
-          <a:xfrm xmlns:a="http://schemas.openxmlformats.org/drawingml/2006/main">
-            <a:off x="457200" y="3905250"/>
-            <a:ext cx="8229600" cy="266700"/>
+          <p:cNvPr id="12" name="page-reference">
+            <a:extLst xmlns:a="http://schemas.openxmlformats.org/drawingml/2006/main">
+              <a:ext uri="{FF2B5EF4-FFF2-40B4-BE49-F238E27FC236}">
+                <a16:creationId xmlns:a16="http://schemas.microsoft.com/office/drawing/2014/main" id="{F8A9F143-CDB1-40B1-AD13-97B28C39AC2B}"/>
+              </a:ext>
+            </a:extLst>
+          </p:cNvPr>
+          <p:cNvSpPr>
+            <a:spLocks xmlns:a="http://schemas.openxmlformats.org/drawingml/2006/main" noGrp="1"/>
+          </p:cNvSpPr>
+          <p:nvPr/>
+        </p:nvSpPr>
+        <p:spPr>
+          <a:xfrm xmlns:a="http://schemas.openxmlformats.org/drawingml/2006/main">
+            <a:off x="457200" y="4224528"/>
+            <a:ext cx="8229600" cy="329184"/>
           </a:xfrm>
           <a:prstGeom xmlns:a="http://schemas.openxmlformats.org/drawingml/2006/main" prst="rect">
             <a:avLst/>
@@ -7486,10 +9402,9 @@
           <a:bodyPr xmlns:a="http://schemas.openxmlformats.org/drawingml/2006/main" lIns="0" tIns="0" rIns="0" bIns="0" anchor="ctr">
             <a:noAutofit/>
           </a:bodyPr>
-          <a:lstStyle xmlns:a="http://schemas.openxmlformats.org/drawingml/2006/main"/>
-          <a:p xmlns:a="http://schemas.openxmlformats.org/drawingml/2006/main">
-            <a:pPr algn="l">
-              <a:defRPr sz="1500" b="0">
+          <a:lstStyle xmlns:a="http://schemas.openxmlformats.org/drawingml/2006/main">
+            <a:defPPr algn="l">
+              <a:defRPr sz="900" b="0">
                 <a:solidFill>
                   <a:srgbClr val="59636E"/>
                 </a:solidFill>
@@ -7497,54 +9412,8 @@
                 <a:ea typeface="Noto Sans JP"/>
                 <a:cs typeface="Noto Sans JP"/>
               </a:defRPr>
-            </a:pPr>
-            <a:r>
-              <a:rPr sz="1500" b="0">
-                <a:solidFill>
-                  <a:srgbClr val="59636E"/>
-                </a:solidFill>
-                <a:latin typeface="Noto Sans JP"/>
-                <a:ea typeface="Noto Sans JP"/>
-                <a:cs typeface="Noto Sans JP"/>
-              </a:rPr>
-              <a:t>合成系列1例／開始時刻0分／閾値は安全基準を表さない</a:t>
-            </a:r>
-          </a:p>
-        </p:txBody>
-      </p:sp>
-      <p:sp>
-        <p:nvSpPr>
-          <p:cNvPr id="14" name="page-reference">
-            <a:extLst xmlns:a="http://schemas.openxmlformats.org/drawingml/2006/main">
-              <a:ext uri="{FF2B5EF4-FFF2-40B4-BE49-F238E27FC236}">
-                <a16:creationId xmlns:a16="http://schemas.microsoft.com/office/drawing/2014/main" id="{1E2D8D7A-4995-4024-9515-E31392D6A967}"/>
-              </a:ext>
-            </a:extLst>
-          </p:cNvPr>
-          <p:cNvSpPr>
-            <a:spLocks xmlns:a="http://schemas.openxmlformats.org/drawingml/2006/main" noGrp="1"/>
-          </p:cNvSpPr>
-          <p:nvPr/>
-        </p:nvSpPr>
-        <p:spPr>
-          <a:xfrm xmlns:a="http://schemas.openxmlformats.org/drawingml/2006/main">
-            <a:off x="457200" y="4224528"/>
-            <a:ext cx="8229600" cy="329184"/>
-          </a:xfrm>
-          <a:prstGeom xmlns:a="http://schemas.openxmlformats.org/drawingml/2006/main" prst="rect">
-            <a:avLst/>
-          </a:prstGeom>
-          <a:noFill xmlns:a="http://schemas.openxmlformats.org/drawingml/2006/main"/>
-          <a:ln xmlns:a="http://schemas.openxmlformats.org/drawingml/2006/main" w="0">
-            <a:noFill/>
-            <a:prstDash val="solid"/>
-          </a:ln>
-        </p:spPr>
-        <p:txBody>
-          <a:bodyPr xmlns:a="http://schemas.openxmlformats.org/drawingml/2006/main" lIns="0" tIns="0" rIns="0" bIns="0" anchor="ctr">
-            <a:noAutofit/>
-          </a:bodyPr>
-          <a:lstStyle xmlns:a="http://schemas.openxmlformats.org/drawingml/2006/main"/>
+            </a:defPPr>
+          </a:lstStyle>
           <a:p xmlns:a="http://schemas.openxmlformats.org/drawingml/2006/main">
             <a:pPr algn="l">
               <a:defRPr sz="900" b="0">
@@ -7573,7 +9442,7 @@
     </p:spTree>
     <p:extLst>
       <p:ext uri="{BB962C8B-B14F-4D97-AF65-F5344CB8AC3E}">
-        <p14:creationId xmlns:p14="http://schemas.microsoft.com/office/powerpoint/2010/main" val="451810699"/>
+        <p14:creationId xmlns:p14="http://schemas.microsoft.com/office/powerpoint/2010/main" val="965614234"/>
       </p:ext>
     </p:extLst>
   </p:cSld>
@@ -7601,10 +9470,10 @@
       </p:grpSpPr>
       <p:sp>
         <p:nvSpPr>
-          <p:cNvPr id="12" name="footer-line">
-            <a:extLst xmlns:a="http://schemas.openxmlformats.org/drawingml/2006/main">
-              <a:ext uri="{FF2B5EF4-FFF2-40B4-BE49-F238E27FC236}">
-                <a16:creationId xmlns:a16="http://schemas.microsoft.com/office/drawing/2014/main" id="{3DE56213-2E5D-4836-A834-D67CBD4561E8}"/>
+          <p:cNvPr id="10" name="footer-line">
+            <a:extLst xmlns:a="http://schemas.openxmlformats.org/drawingml/2006/main">
+              <a:ext uri="{FF2B5EF4-FFF2-40B4-BE49-F238E27FC236}">
+                <a16:creationId xmlns:a16="http://schemas.microsoft.com/office/drawing/2014/main" id="{739AD0FB-0C36-4FD4-85A0-82ADD53E4145}"/>
               </a:ext>
             </a:extLst>
           </p:cNvPr>
@@ -7632,14 +9501,20 @@
       </p:sp>
       <p:pic>
         <p:nvPicPr>
-          <p:cNvPr id="13" name=""/>
+          <p:cNvPr id="2" name="">
+            <a:extLst xmlns:a="http://schemas.openxmlformats.org/drawingml/2006/main">
+              <a:ext uri="{FF2B5EF4-FFF2-40B4-BE49-F238E27FC236}">
+                <a16:creationId xmlns:a16="http://schemas.microsoft.com/office/drawing/2014/main" id="{BCEEE4F6-E51B-466D-8E87-5C6DCEC08AF7}"/>
+              </a:ext>
+            </a:extLst>
+          </p:cNvPr>
           <p:cNvPicPr>
             <a:picLocks xmlns:a="http://schemas.openxmlformats.org/drawingml/2006/main" noChangeAspect="1"/>
           </p:cNvPicPr>
           <p:nvPr/>
         </p:nvPicPr>
         <p:blipFill>
-          <a:blip xmlns:r="http://schemas.openxmlformats.org/officeDocument/2006/relationships" xmlns:a="http://schemas.openxmlformats.org/drawingml/2006/main" r:embed="R5bb134d10283475c"/>
+          <a:blip xmlns:r="http://schemas.openxmlformats.org/officeDocument/2006/relationships" xmlns:a="http://schemas.openxmlformats.org/drawingml/2006/main" r:embed="Rde9624ed2c0e4924"/>
           <a:stretch xmlns:a="http://schemas.openxmlformats.org/drawingml/2006/main"/>
         </p:blipFill>
         <p:spPr>
@@ -7657,7 +9532,7 @@
           <p:cNvPr id="3" name="page">
             <a:extLst xmlns:a="http://schemas.openxmlformats.org/drawingml/2006/main">
               <a:ext uri="{FF2B5EF4-FFF2-40B4-BE49-F238E27FC236}">
-                <a16:creationId xmlns:a16="http://schemas.microsoft.com/office/drawing/2014/main" id="{FBA2F4A0-CDDB-4050-929B-F63F3D98D802}"/>
+                <a16:creationId xmlns:a16="http://schemas.microsoft.com/office/drawing/2014/main" id="{DCD5A50A-5D9B-4D41-8E31-248B25F19763}"/>
               </a:ext>
             </a:extLst>
           </p:cNvPr>
@@ -7684,7 +9559,18 @@
           <a:bodyPr xmlns:a="http://schemas.openxmlformats.org/drawingml/2006/main" lIns="0" tIns="0" rIns="0" bIns="0" anchor="ctr">
             <a:noAutofit/>
           </a:bodyPr>
-          <a:lstStyle xmlns:a="http://schemas.openxmlformats.org/drawingml/2006/main"/>
+          <a:lstStyle xmlns:a="http://schemas.openxmlformats.org/drawingml/2006/main">
+            <a:defPPr algn="r">
+              <a:defRPr sz="1400" b="0">
+                <a:solidFill>
+                  <a:srgbClr val="17202A"/>
+                </a:solidFill>
+                <a:latin typeface="Arial"/>
+                <a:ea typeface="Arial"/>
+                <a:cs typeface="Arial"/>
+              </a:defRPr>
+            </a:defPPr>
+          </a:lstStyle>
           <a:p xmlns:a="http://schemas.openxmlformats.org/drawingml/2006/main">
             <a:pPr algn="r">
               <a:defRPr sz="1400" b="0">
@@ -7712,22 +9598,22 @@
       </p:sp>
       <p:sp>
         <p:nvSpPr>
-          <p:cNvPr id="4" name="fictional-disclosure">
-            <a:extLst xmlns:a="http://schemas.openxmlformats.org/drawingml/2006/main">
-              <a:ext uri="{FF2B5EF4-FFF2-40B4-BE49-F238E27FC236}">
-                <a16:creationId xmlns:a16="http://schemas.microsoft.com/office/drawing/2014/main" id="{2F85D408-7271-45DE-8BB9-B3201F960030}"/>
-              </a:ext>
-            </a:extLst>
-          </p:cNvPr>
-          <p:cNvSpPr>
-            <a:spLocks xmlns:a="http://schemas.openxmlformats.org/drawingml/2006/main" noGrp="1"/>
-          </p:cNvSpPr>
-          <p:nvPr/>
-        </p:nvSpPr>
-        <p:spPr>
-          <a:xfrm xmlns:a="http://schemas.openxmlformats.org/drawingml/2006/main">
-            <a:off x="1428750" y="4772025"/>
-            <a:ext cx="4762500" cy="266700"/>
+          <p:cNvPr id="4" name="running-chapter-7">
+            <a:extLst xmlns:a="http://schemas.openxmlformats.org/drawingml/2006/main">
+              <a:ext uri="{FF2B5EF4-FFF2-40B4-BE49-F238E27FC236}">
+                <a16:creationId xmlns:a16="http://schemas.microsoft.com/office/drawing/2014/main" id="{18263C4C-9D29-4266-B1FF-521EE66B6B92}"/>
+              </a:ext>
+            </a:extLst>
+          </p:cNvPr>
+          <p:cNvSpPr>
+            <a:spLocks xmlns:a="http://schemas.openxmlformats.org/drawingml/2006/main" noGrp="1"/>
+          </p:cNvSpPr>
+          <p:nvPr/>
+        </p:nvSpPr>
+        <p:spPr>
+          <a:xfrm xmlns:a="http://schemas.openxmlformats.org/drawingml/2006/main">
+            <a:off x="457200" y="109728"/>
+            <a:ext cx="2560320" cy="304800"/>
           </a:xfrm>
           <a:prstGeom xmlns:a="http://schemas.openxmlformats.org/drawingml/2006/main" prst="rect">
             <a:avLst/>
@@ -7742,65 +9628,18 @@
           <a:bodyPr xmlns:a="http://schemas.openxmlformats.org/drawingml/2006/main" lIns="0" tIns="0" rIns="0" bIns="0" anchor="ctr">
             <a:noAutofit/>
           </a:bodyPr>
-          <a:lstStyle xmlns:a="http://schemas.openxmlformats.org/drawingml/2006/main"/>
-          <a:p xmlns:a="http://schemas.openxmlformats.org/drawingml/2006/main">
-            <a:pPr algn="l">
-              <a:defRPr sz="1050" b="0">
-                <a:solidFill>
-                  <a:srgbClr val="59636E"/>
-                </a:solidFill>
-                <a:latin typeface="Noto Sans JP"/>
-                <a:ea typeface="Noto Sans JP"/>
-                <a:cs typeface="Noto Sans JP"/>
-              </a:defRPr>
-            </a:pPr>
-            <a:r>
-              <a:rPr sz="1050" b="0">
-                <a:solidFill>
-                  <a:srgbClr val="59636E"/>
-                </a:solidFill>
-                <a:latin typeface="Noto Sans JP"/>
-                <a:ea typeface="Noto Sans JP"/>
-                <a:cs typeface="Noto Sans JP"/>
-              </a:rPr>
-              <a:t>架空作例・合成データ</a:t>
-            </a:r>
-          </a:p>
-        </p:txBody>
-      </p:sp>
-      <p:sp>
-        <p:nvSpPr>
-          <p:cNvPr id="5" name="running-chapter-7">
-            <a:extLst xmlns:a="http://schemas.openxmlformats.org/drawingml/2006/main">
-              <a:ext uri="{FF2B5EF4-FFF2-40B4-BE49-F238E27FC236}">
-                <a16:creationId xmlns:a16="http://schemas.microsoft.com/office/drawing/2014/main" id="{1B6348E1-A2AC-40D4-AC06-0302385EC49C}"/>
-              </a:ext>
-            </a:extLst>
-          </p:cNvPr>
-          <p:cNvSpPr>
-            <a:spLocks xmlns:a="http://schemas.openxmlformats.org/drawingml/2006/main" noGrp="1"/>
-          </p:cNvSpPr>
-          <p:nvPr/>
-        </p:nvSpPr>
-        <p:spPr>
-          <a:xfrm xmlns:a="http://schemas.openxmlformats.org/drawingml/2006/main">
-            <a:off x="457200" y="109728"/>
-            <a:ext cx="2560320" cy="304800"/>
-          </a:xfrm>
-          <a:prstGeom xmlns:a="http://schemas.openxmlformats.org/drawingml/2006/main" prst="rect">
-            <a:avLst/>
-          </a:prstGeom>
-          <a:noFill xmlns:a="http://schemas.openxmlformats.org/drawingml/2006/main"/>
-          <a:ln xmlns:a="http://schemas.openxmlformats.org/drawingml/2006/main" w="0">
-            <a:noFill/>
-            <a:prstDash val="solid"/>
-          </a:ln>
-        </p:spPr>
-        <p:txBody>
-          <a:bodyPr xmlns:a="http://schemas.openxmlformats.org/drawingml/2006/main" lIns="0" tIns="0" rIns="0" bIns="0" anchor="ctr">
-            <a:noAutofit/>
-          </a:bodyPr>
-          <a:lstStyle xmlns:a="http://schemas.openxmlformats.org/drawingml/2006/main"/>
+          <a:lstStyle xmlns:a="http://schemas.openxmlformats.org/drawingml/2006/main">
+            <a:defPPr algn="l">
+              <a:defRPr sz="1200" b="0">
+                <a:solidFill>
+                  <a:srgbClr val="38761D"/>
+                </a:solidFill>
+                <a:latin typeface="Noto Sans JP"/>
+                <a:ea typeface="Noto Sans JP"/>
+                <a:cs typeface="Noto Sans JP"/>
+              </a:defRPr>
+            </a:defPPr>
+          </a:lstStyle>
           <a:p xmlns:a="http://schemas.openxmlformats.org/drawingml/2006/main">
             <a:pPr algn="l">
               <a:defRPr sz="1200" b="0">
@@ -7828,10 +9667,10 @@
       </p:sp>
       <p:sp>
         <p:nvSpPr>
-          <p:cNvPr id="6" name="running-title-7">
-            <a:extLst xmlns:a="http://schemas.openxmlformats.org/drawingml/2006/main">
-              <a:ext uri="{FF2B5EF4-FFF2-40B4-BE49-F238E27FC236}">
-                <a16:creationId xmlns:a16="http://schemas.microsoft.com/office/drawing/2014/main" id="{73DE0CE4-F36A-4C10-8A06-4792C6607044}"/>
+          <p:cNvPr id="5" name="running-title-7">
+            <a:extLst xmlns:a="http://schemas.openxmlformats.org/drawingml/2006/main">
+              <a:ext uri="{FF2B5EF4-FFF2-40B4-BE49-F238E27FC236}">
+                <a16:creationId xmlns:a16="http://schemas.microsoft.com/office/drawing/2014/main" id="{F0F80C61-4B3F-44A7-860C-C90A1492B38B}"/>
               </a:ext>
             </a:extLst>
           </p:cNvPr>
@@ -7858,7 +9697,18 @@
           <a:bodyPr xmlns:a="http://schemas.openxmlformats.org/drawingml/2006/main" lIns="0" tIns="0" rIns="0" bIns="0" anchor="ctr">
             <a:noAutofit/>
           </a:bodyPr>
-          <a:lstStyle xmlns:a="http://schemas.openxmlformats.org/drawingml/2006/main"/>
+          <a:lstStyle xmlns:a="http://schemas.openxmlformats.org/drawingml/2006/main">
+            <a:defPPr algn="r">
+              <a:defRPr sz="1200" b="0">
+                <a:solidFill>
+                  <a:srgbClr val="38761D"/>
+                </a:solidFill>
+                <a:latin typeface="Noto Sans JP"/>
+                <a:ea typeface="Noto Sans JP"/>
+                <a:cs typeface="Noto Sans JP"/>
+              </a:defRPr>
+            </a:defPPr>
+          </a:lstStyle>
           <a:p xmlns:a="http://schemas.openxmlformats.org/drawingml/2006/main">
             <a:pPr algn="r">
               <a:defRPr sz="1200" b="0">
@@ -7886,10 +9736,10 @@
       </p:sp>
       <p:sp>
         <p:nvSpPr>
-          <p:cNvPr id="7" name="title">
-            <a:extLst xmlns:a="http://schemas.openxmlformats.org/drawingml/2006/main">
-              <a:ext uri="{FF2B5EF4-FFF2-40B4-BE49-F238E27FC236}">
-                <a16:creationId xmlns:a16="http://schemas.microsoft.com/office/drawing/2014/main" id="{7D8276D5-F619-4EE0-A6BE-F07D8477495C}"/>
+          <p:cNvPr id="6" name="title">
+            <a:extLst xmlns:a="http://schemas.openxmlformats.org/drawingml/2006/main">
+              <a:ext uri="{FF2B5EF4-FFF2-40B4-BE49-F238E27FC236}">
+                <a16:creationId xmlns:a16="http://schemas.microsoft.com/office/drawing/2014/main" id="{E205232E-77AF-4B8D-8E81-FE14430EB1AF}"/>
               </a:ext>
             </a:extLst>
           </p:cNvPr>
@@ -7916,7 +9766,18 @@
           <a:bodyPr xmlns:a="http://schemas.openxmlformats.org/drawingml/2006/main" lIns="0" tIns="0" rIns="0" bIns="0" anchor="ctr">
             <a:noAutofit/>
           </a:bodyPr>
-          <a:lstStyle xmlns:a="http://schemas.openxmlformats.org/drawingml/2006/main"/>
+          <a:lstStyle xmlns:a="http://schemas.openxmlformats.org/drawingml/2006/main">
+            <a:defPPr algn="l">
+              <a:defRPr sz="2700" b="1">
+                <a:solidFill>
+                  <a:srgbClr val="17202A"/>
+                </a:solidFill>
+                <a:latin typeface="Noto Sans JP"/>
+                <a:ea typeface="Noto Sans JP"/>
+                <a:cs typeface="Noto Sans JP"/>
+              </a:defRPr>
+            </a:defPPr>
+          </a:lstStyle>
           <a:p xmlns:a="http://schemas.openxmlformats.org/drawingml/2006/main">
             <a:pPr algn="l">
               <a:defRPr sz="2700" b="1">
@@ -7944,10 +9805,10 @@
       </p:sp>
       <p:sp>
         <p:nvSpPr>
-          <p:cNvPr id="8" name="message">
-            <a:extLst xmlns:a="http://schemas.openxmlformats.org/drawingml/2006/main">
-              <a:ext uri="{FF2B5EF4-FFF2-40B4-BE49-F238E27FC236}">
-                <a16:creationId xmlns:a16="http://schemas.microsoft.com/office/drawing/2014/main" id="{575549A4-1993-42B2-A6DD-28B39F7B2E2E}"/>
+          <p:cNvPr id="7" name="message">
+            <a:extLst xmlns:a="http://schemas.openxmlformats.org/drawingml/2006/main">
+              <a:ext uri="{FF2B5EF4-FFF2-40B4-BE49-F238E27FC236}">
+                <a16:creationId xmlns:a16="http://schemas.microsoft.com/office/drawing/2014/main" id="{16E9B118-7FB8-49B5-9A83-38799971DAF6}"/>
               </a:ext>
             </a:extLst>
           </p:cNvPr>
@@ -7974,7 +9835,18 @@
           <a:bodyPr xmlns:a="http://schemas.openxmlformats.org/drawingml/2006/main" lIns="0" tIns="0" rIns="0" bIns="0" anchor="ctr">
             <a:noAutofit/>
           </a:bodyPr>
-          <a:lstStyle xmlns:a="http://schemas.openxmlformats.org/drawingml/2006/main"/>
+          <a:lstStyle xmlns:a="http://schemas.openxmlformats.org/drawingml/2006/main">
+            <a:defPPr algn="l">
+              <a:defRPr sz="2300" b="1">
+                <a:solidFill>
+                  <a:srgbClr val="17202A"/>
+                </a:solidFill>
+                <a:latin typeface="Noto Sans JP"/>
+                <a:ea typeface="Noto Sans JP"/>
+                <a:cs typeface="Noto Sans JP"/>
+              </a:defRPr>
+            </a:defPPr>
+          </a:lstStyle>
           <a:p xmlns:a="http://schemas.openxmlformats.org/drawingml/2006/main">
             <a:pPr algn="l">
               <a:defRPr sz="2300" b="1">
@@ -7995,14 +9867,20 @@
                 <a:ea typeface="Noto Sans JP"/>
                 <a:cs typeface="Noto Sans JP"/>
               </a:rPr>
-              <a:t>点数の減少と、残った値を分けて見る [1]</a:t>
+              <a:t>保持点は13点から3点に減る [1]</a:t>
             </a:r>
           </a:p>
         </p:txBody>
       </p:sp>
       <p:graphicFrame>
         <p:nvGraphicFramePr>
-          <p:cNvPr id="20" name=""/>
+          <p:cNvPr id="8" name="">
+            <a:extLst xmlns:a="http://schemas.openxmlformats.org/drawingml/2006/main">
+              <a:ext uri="{FF2B5EF4-FFF2-40B4-BE49-F238E27FC236}">
+                <a16:creationId xmlns:a16="http://schemas.microsoft.com/office/drawing/2014/main" id="{B5FFAE6B-9EB8-46D9-8033-08614BBF9F2F}"/>
+              </a:ext>
+            </a:extLst>
+          </p:cNvPr>
           <p:cNvGraphicFramePr/>
           <p:nvPr/>
         </p:nvGraphicFramePr>
@@ -8333,22 +10211,22 @@
       </p:graphicFrame>
       <p:sp>
         <p:nvSpPr>
-          <p:cNvPr id="10" name="scope">
-            <a:extLst xmlns:a="http://schemas.openxmlformats.org/drawingml/2006/main">
-              <a:ext uri="{FF2B5EF4-FFF2-40B4-BE49-F238E27FC236}">
-                <a16:creationId xmlns:a16="http://schemas.microsoft.com/office/drawing/2014/main" id="{A556260A-DC57-4398-8608-599E673ACB0D}"/>
-              </a:ext>
-            </a:extLst>
-          </p:cNvPr>
-          <p:cNvSpPr>
-            <a:spLocks xmlns:a="http://schemas.openxmlformats.org/drawingml/2006/main" noGrp="1"/>
-          </p:cNvSpPr>
-          <p:nvPr/>
-        </p:nvSpPr>
-        <p:spPr>
-          <a:xfrm xmlns:a="http://schemas.openxmlformats.org/drawingml/2006/main">
-            <a:off x="457200" y="3905250"/>
-            <a:ext cx="8229600" cy="266700"/>
+          <p:cNvPr id="9" name="page-reference">
+            <a:extLst xmlns:a="http://schemas.openxmlformats.org/drawingml/2006/main">
+              <a:ext uri="{FF2B5EF4-FFF2-40B4-BE49-F238E27FC236}">
+                <a16:creationId xmlns:a16="http://schemas.microsoft.com/office/drawing/2014/main" id="{54A9E945-A179-4A3E-BB96-B8E074550A66}"/>
+              </a:ext>
+            </a:extLst>
+          </p:cNvPr>
+          <p:cNvSpPr>
+            <a:spLocks xmlns:a="http://schemas.openxmlformats.org/drawingml/2006/main" noGrp="1"/>
+          </p:cNvSpPr>
+          <p:nvPr/>
+        </p:nvSpPr>
+        <p:spPr>
+          <a:xfrm xmlns:a="http://schemas.openxmlformats.org/drawingml/2006/main">
+            <a:off x="457200" y="4224528"/>
+            <a:ext cx="8229600" cy="329184"/>
           </a:xfrm>
           <a:prstGeom xmlns:a="http://schemas.openxmlformats.org/drawingml/2006/main" prst="rect">
             <a:avLst/>
@@ -8363,10 +10241,9 @@
           <a:bodyPr xmlns:a="http://schemas.openxmlformats.org/drawingml/2006/main" lIns="0" tIns="0" rIns="0" bIns="0" anchor="ctr">
             <a:noAutofit/>
           </a:bodyPr>
-          <a:lstStyle xmlns:a="http://schemas.openxmlformats.org/drawingml/2006/main"/>
-          <a:p xmlns:a="http://schemas.openxmlformats.org/drawingml/2006/main">
-            <a:pPr algn="l">
-              <a:defRPr sz="1500" b="0">
+          <a:lstStyle xmlns:a="http://schemas.openxmlformats.org/drawingml/2006/main">
+            <a:defPPr algn="l">
+              <a:defRPr sz="900" b="0">
                 <a:solidFill>
                   <a:srgbClr val="59636E"/>
                 </a:solidFill>
@@ -8374,54 +10251,8 @@
                 <a:ea typeface="Noto Sans JP"/>
                 <a:cs typeface="Noto Sans JP"/>
               </a:defRPr>
-            </a:pPr>
-            <a:r>
-              <a:rPr sz="1500" b="0">
-                <a:solidFill>
-                  <a:srgbClr val="59636E"/>
-                </a:solidFill>
-                <a:latin typeface="Noto Sans JP"/>
-                <a:ea typeface="Noto Sans JP"/>
-                <a:cs typeface="Noto Sans JP"/>
-              </a:rPr>
-              <a:t>合成データからの計算。電力・健康リスクは未評価</a:t>
-            </a:r>
-          </a:p>
-        </p:txBody>
-      </p:sp>
-      <p:sp>
-        <p:nvSpPr>
-          <p:cNvPr id="11" name="page-reference">
-            <a:extLst xmlns:a="http://schemas.openxmlformats.org/drawingml/2006/main">
-              <a:ext uri="{FF2B5EF4-FFF2-40B4-BE49-F238E27FC236}">
-                <a16:creationId xmlns:a16="http://schemas.microsoft.com/office/drawing/2014/main" id="{3D460294-F3B6-4B21-9D8C-784DD0A93864}"/>
-              </a:ext>
-            </a:extLst>
-          </p:cNvPr>
-          <p:cNvSpPr>
-            <a:spLocks xmlns:a="http://schemas.openxmlformats.org/drawingml/2006/main" noGrp="1"/>
-          </p:cNvSpPr>
-          <p:nvPr/>
-        </p:nvSpPr>
-        <p:spPr>
-          <a:xfrm xmlns:a="http://schemas.openxmlformats.org/drawingml/2006/main">
-            <a:off x="457200" y="4224528"/>
-            <a:ext cx="8229600" cy="329184"/>
-          </a:xfrm>
-          <a:prstGeom xmlns:a="http://schemas.openxmlformats.org/drawingml/2006/main" prst="rect">
-            <a:avLst/>
-          </a:prstGeom>
-          <a:noFill xmlns:a="http://schemas.openxmlformats.org/drawingml/2006/main"/>
-          <a:ln xmlns:a="http://schemas.openxmlformats.org/drawingml/2006/main" w="0">
-            <a:noFill/>
-            <a:prstDash val="solid"/>
-          </a:ln>
-        </p:spPr>
-        <p:txBody>
-          <a:bodyPr xmlns:a="http://schemas.openxmlformats.org/drawingml/2006/main" lIns="0" tIns="0" rIns="0" bIns="0" anchor="ctr">
-            <a:noAutofit/>
-          </a:bodyPr>
-          <a:lstStyle xmlns:a="http://schemas.openxmlformats.org/drawingml/2006/main"/>
+            </a:defPPr>
+          </a:lstStyle>
           <a:p xmlns:a="http://schemas.openxmlformats.org/drawingml/2006/main">
             <a:pPr algn="l">
               <a:defRPr sz="900" b="0">
@@ -8450,7 +10281,7 @@
     </p:spTree>
     <p:extLst>
       <p:ext uri="{BB962C8B-B14F-4D97-AF65-F5344CB8AC3E}">
-        <p14:creationId xmlns:p14="http://schemas.microsoft.com/office/powerpoint/2010/main" val="1741192396"/>
+        <p14:creationId xmlns:p14="http://schemas.microsoft.com/office/powerpoint/2010/main" val="189021185"/>
       </p:ext>
     </p:extLst>
   </p:cSld>
@@ -8478,10 +10309,10 @@
       </p:grpSpPr>
       <p:sp>
         <p:nvSpPr>
-          <p:cNvPr id="21" name="footer-line">
-            <a:extLst xmlns:a="http://schemas.openxmlformats.org/drawingml/2006/main">
-              <a:ext uri="{FF2B5EF4-FFF2-40B4-BE49-F238E27FC236}">
-                <a16:creationId xmlns:a16="http://schemas.microsoft.com/office/drawing/2014/main" id="{3C720CF8-6C7E-4529-B286-1DD6BCB9D043}"/>
+          <p:cNvPr id="20" name="footer-line">
+            <a:extLst xmlns:a="http://schemas.openxmlformats.org/drawingml/2006/main">
+              <a:ext uri="{FF2B5EF4-FFF2-40B4-BE49-F238E27FC236}">
+                <a16:creationId xmlns:a16="http://schemas.microsoft.com/office/drawing/2014/main" id="{154E63B4-8D9D-47EB-B3BC-A3F1903DA008}"/>
               </a:ext>
             </a:extLst>
           </p:cNvPr>
@@ -8509,14 +10340,20 @@
       </p:sp>
       <p:pic>
         <p:nvPicPr>
-          <p:cNvPr id="22" name=""/>
+          <p:cNvPr id="2" name="">
+            <a:extLst xmlns:a="http://schemas.openxmlformats.org/drawingml/2006/main">
+              <a:ext uri="{FF2B5EF4-FFF2-40B4-BE49-F238E27FC236}">
+                <a16:creationId xmlns:a16="http://schemas.microsoft.com/office/drawing/2014/main" id="{BD5BAF1B-9DD3-4701-B1C1-32C00C2C97CE}"/>
+              </a:ext>
+            </a:extLst>
+          </p:cNvPr>
           <p:cNvPicPr>
             <a:picLocks xmlns:a="http://schemas.openxmlformats.org/drawingml/2006/main" noChangeAspect="1"/>
           </p:cNvPicPr>
           <p:nvPr/>
         </p:nvPicPr>
         <p:blipFill>
-          <a:blip xmlns:r="http://schemas.openxmlformats.org/officeDocument/2006/relationships" xmlns:a="http://schemas.openxmlformats.org/drawingml/2006/main" r:embed="Rb4b30af7d9b74290"/>
+          <a:blip xmlns:r="http://schemas.openxmlformats.org/officeDocument/2006/relationships" xmlns:a="http://schemas.openxmlformats.org/drawingml/2006/main" r:embed="Red376a6280614bc4"/>
           <a:stretch xmlns:a="http://schemas.openxmlformats.org/drawingml/2006/main"/>
         </p:blipFill>
         <p:spPr>
@@ -8534,7 +10371,7 @@
           <p:cNvPr id="3" name="page">
             <a:extLst xmlns:a="http://schemas.openxmlformats.org/drawingml/2006/main">
               <a:ext uri="{FF2B5EF4-FFF2-40B4-BE49-F238E27FC236}">
-                <a16:creationId xmlns:a16="http://schemas.microsoft.com/office/drawing/2014/main" id="{F33A6DD1-89D9-4C48-9A89-60ECB483336D}"/>
+                <a16:creationId xmlns:a16="http://schemas.microsoft.com/office/drawing/2014/main" id="{11914828-357E-44DE-9DF3-4D9997A6E6A0}"/>
               </a:ext>
             </a:extLst>
           </p:cNvPr>
@@ -8561,7 +10398,18 @@
           <a:bodyPr xmlns:a="http://schemas.openxmlformats.org/drawingml/2006/main" lIns="0" tIns="0" rIns="0" bIns="0" anchor="ctr">
             <a:noAutofit/>
           </a:bodyPr>
-          <a:lstStyle xmlns:a="http://schemas.openxmlformats.org/drawingml/2006/main"/>
+          <a:lstStyle xmlns:a="http://schemas.openxmlformats.org/drawingml/2006/main">
+            <a:defPPr algn="r">
+              <a:defRPr sz="1400" b="0">
+                <a:solidFill>
+                  <a:srgbClr val="17202A"/>
+                </a:solidFill>
+                <a:latin typeface="Arial"/>
+                <a:ea typeface="Arial"/>
+                <a:cs typeface="Arial"/>
+              </a:defRPr>
+            </a:defPPr>
+          </a:lstStyle>
           <a:p xmlns:a="http://schemas.openxmlformats.org/drawingml/2006/main">
             <a:pPr algn="r">
               <a:defRPr sz="1400" b="0">
@@ -8589,22 +10437,22 @@
       </p:sp>
       <p:sp>
         <p:nvSpPr>
-          <p:cNvPr id="4" name="fictional-disclosure">
-            <a:extLst xmlns:a="http://schemas.openxmlformats.org/drawingml/2006/main">
-              <a:ext uri="{FF2B5EF4-FFF2-40B4-BE49-F238E27FC236}">
-                <a16:creationId xmlns:a16="http://schemas.microsoft.com/office/drawing/2014/main" id="{BAF07CE1-6DC9-46DC-A872-267F61C4AD79}"/>
-              </a:ext>
-            </a:extLst>
-          </p:cNvPr>
-          <p:cNvSpPr>
-            <a:spLocks xmlns:a="http://schemas.openxmlformats.org/drawingml/2006/main" noGrp="1"/>
-          </p:cNvSpPr>
-          <p:nvPr/>
-        </p:nvSpPr>
-        <p:spPr>
-          <a:xfrm xmlns:a="http://schemas.openxmlformats.org/drawingml/2006/main">
-            <a:off x="1428750" y="4772025"/>
-            <a:ext cx="4762500" cy="266700"/>
+          <p:cNvPr id="4" name="running-chapter-8">
+            <a:extLst xmlns:a="http://schemas.openxmlformats.org/drawingml/2006/main">
+              <a:ext uri="{FF2B5EF4-FFF2-40B4-BE49-F238E27FC236}">
+                <a16:creationId xmlns:a16="http://schemas.microsoft.com/office/drawing/2014/main" id="{88B56043-E599-4AC3-82A3-9147F230B1DE}"/>
+              </a:ext>
+            </a:extLst>
+          </p:cNvPr>
+          <p:cNvSpPr>
+            <a:spLocks xmlns:a="http://schemas.openxmlformats.org/drawingml/2006/main" noGrp="1"/>
+          </p:cNvSpPr>
+          <p:nvPr/>
+        </p:nvSpPr>
+        <p:spPr>
+          <a:xfrm xmlns:a="http://schemas.openxmlformats.org/drawingml/2006/main">
+            <a:off x="457200" y="109728"/>
+            <a:ext cx="2560320" cy="304800"/>
           </a:xfrm>
           <a:prstGeom xmlns:a="http://schemas.openxmlformats.org/drawingml/2006/main" prst="rect">
             <a:avLst/>
@@ -8619,65 +10467,18 @@
           <a:bodyPr xmlns:a="http://schemas.openxmlformats.org/drawingml/2006/main" lIns="0" tIns="0" rIns="0" bIns="0" anchor="ctr">
             <a:noAutofit/>
           </a:bodyPr>
-          <a:lstStyle xmlns:a="http://schemas.openxmlformats.org/drawingml/2006/main"/>
-          <a:p xmlns:a="http://schemas.openxmlformats.org/drawingml/2006/main">
-            <a:pPr algn="l">
-              <a:defRPr sz="1050" b="0">
-                <a:solidFill>
-                  <a:srgbClr val="59636E"/>
-                </a:solidFill>
-                <a:latin typeface="Noto Sans JP"/>
-                <a:ea typeface="Noto Sans JP"/>
-                <a:cs typeface="Noto Sans JP"/>
-              </a:defRPr>
-            </a:pPr>
-            <a:r>
-              <a:rPr sz="1050" b="0">
-                <a:solidFill>
-                  <a:srgbClr val="59636E"/>
-                </a:solidFill>
-                <a:latin typeface="Noto Sans JP"/>
-                <a:ea typeface="Noto Sans JP"/>
-                <a:cs typeface="Noto Sans JP"/>
-              </a:rPr>
-              <a:t>架空作例・合成データ</a:t>
-            </a:r>
-          </a:p>
-        </p:txBody>
-      </p:sp>
-      <p:sp>
-        <p:nvSpPr>
-          <p:cNvPr id="5" name="running-chapter-8">
-            <a:extLst xmlns:a="http://schemas.openxmlformats.org/drawingml/2006/main">
-              <a:ext uri="{FF2B5EF4-FFF2-40B4-BE49-F238E27FC236}">
-                <a16:creationId xmlns:a16="http://schemas.microsoft.com/office/drawing/2014/main" id="{B0524B17-9E93-4272-B27F-C20FCC348785}"/>
-              </a:ext>
-            </a:extLst>
-          </p:cNvPr>
-          <p:cNvSpPr>
-            <a:spLocks xmlns:a="http://schemas.openxmlformats.org/drawingml/2006/main" noGrp="1"/>
-          </p:cNvSpPr>
-          <p:nvPr/>
-        </p:nvSpPr>
-        <p:spPr>
-          <a:xfrm xmlns:a="http://schemas.openxmlformats.org/drawingml/2006/main">
-            <a:off x="457200" y="109728"/>
-            <a:ext cx="2560320" cy="304800"/>
-          </a:xfrm>
-          <a:prstGeom xmlns:a="http://schemas.openxmlformats.org/drawingml/2006/main" prst="rect">
-            <a:avLst/>
-          </a:prstGeom>
-          <a:noFill xmlns:a="http://schemas.openxmlformats.org/drawingml/2006/main"/>
-          <a:ln xmlns:a="http://schemas.openxmlformats.org/drawingml/2006/main" w="0">
-            <a:noFill/>
-            <a:prstDash val="solid"/>
-          </a:ln>
-        </p:spPr>
-        <p:txBody>
-          <a:bodyPr xmlns:a="http://schemas.openxmlformats.org/drawingml/2006/main" lIns="0" tIns="0" rIns="0" bIns="0" anchor="ctr">
-            <a:noAutofit/>
-          </a:bodyPr>
-          <a:lstStyle xmlns:a="http://schemas.openxmlformats.org/drawingml/2006/main"/>
+          <a:lstStyle xmlns:a="http://schemas.openxmlformats.org/drawingml/2006/main">
+            <a:defPPr algn="l">
+              <a:defRPr sz="1200" b="0">
+                <a:solidFill>
+                  <a:srgbClr val="38761D"/>
+                </a:solidFill>
+                <a:latin typeface="Noto Sans JP"/>
+                <a:ea typeface="Noto Sans JP"/>
+                <a:cs typeface="Noto Sans JP"/>
+              </a:defRPr>
+            </a:defPPr>
+          </a:lstStyle>
           <a:p xmlns:a="http://schemas.openxmlformats.org/drawingml/2006/main">
             <a:pPr algn="l">
               <a:defRPr sz="1200" b="0">
@@ -8705,10 +10506,10 @@
       </p:sp>
       <p:sp>
         <p:nvSpPr>
-          <p:cNvPr id="6" name="running-title-8">
-            <a:extLst xmlns:a="http://schemas.openxmlformats.org/drawingml/2006/main">
-              <a:ext uri="{FF2B5EF4-FFF2-40B4-BE49-F238E27FC236}">
-                <a16:creationId xmlns:a16="http://schemas.microsoft.com/office/drawing/2014/main" id="{33D6B34A-1DD5-450E-BC47-CC0D225E58F7}"/>
+          <p:cNvPr id="5" name="running-title-8">
+            <a:extLst xmlns:a="http://schemas.openxmlformats.org/drawingml/2006/main">
+              <a:ext uri="{FF2B5EF4-FFF2-40B4-BE49-F238E27FC236}">
+                <a16:creationId xmlns:a16="http://schemas.microsoft.com/office/drawing/2014/main" id="{60BC558A-8F9F-4545-BE87-41837F47F0FC}"/>
               </a:ext>
             </a:extLst>
           </p:cNvPr>
@@ -8735,7 +10536,18 @@
           <a:bodyPr xmlns:a="http://schemas.openxmlformats.org/drawingml/2006/main" lIns="0" tIns="0" rIns="0" bIns="0" anchor="ctr">
             <a:noAutofit/>
           </a:bodyPr>
-          <a:lstStyle xmlns:a="http://schemas.openxmlformats.org/drawingml/2006/main"/>
+          <a:lstStyle xmlns:a="http://schemas.openxmlformats.org/drawingml/2006/main">
+            <a:defPPr algn="r">
+              <a:defRPr sz="1200" b="0">
+                <a:solidFill>
+                  <a:srgbClr val="38761D"/>
+                </a:solidFill>
+                <a:latin typeface="Noto Sans JP"/>
+                <a:ea typeface="Noto Sans JP"/>
+                <a:cs typeface="Noto Sans JP"/>
+              </a:defRPr>
+            </a:defPPr>
+          </a:lstStyle>
           <a:p xmlns:a="http://schemas.openxmlformats.org/drawingml/2006/main">
             <a:pPr algn="r">
               <a:defRPr sz="1200" b="0">
@@ -8763,10 +10575,10 @@
       </p:sp>
       <p:sp>
         <p:nvSpPr>
-          <p:cNvPr id="7" name="title">
-            <a:extLst xmlns:a="http://schemas.openxmlformats.org/drawingml/2006/main">
-              <a:ext uri="{FF2B5EF4-FFF2-40B4-BE49-F238E27FC236}">
-                <a16:creationId xmlns:a16="http://schemas.microsoft.com/office/drawing/2014/main" id="{096BEA23-0C1D-40DF-83EF-536F47F9DA9F}"/>
+          <p:cNvPr id="6" name="title">
+            <a:extLst xmlns:a="http://schemas.openxmlformats.org/drawingml/2006/main">
+              <a:ext uri="{FF2B5EF4-FFF2-40B4-BE49-F238E27FC236}">
+                <a16:creationId xmlns:a16="http://schemas.microsoft.com/office/drawing/2014/main" id="{F2591EAF-80FF-495F-B6BD-CBB5FAAAC111}"/>
               </a:ext>
             </a:extLst>
           </p:cNvPr>
@@ -8793,7 +10605,18 @@
           <a:bodyPr xmlns:a="http://schemas.openxmlformats.org/drawingml/2006/main" lIns="0" tIns="0" rIns="0" bIns="0" anchor="ctr">
             <a:noAutofit/>
           </a:bodyPr>
-          <a:lstStyle xmlns:a="http://schemas.openxmlformats.org/drawingml/2006/main"/>
+          <a:lstStyle xmlns:a="http://schemas.openxmlformats.org/drawingml/2006/main">
+            <a:defPPr algn="l">
+              <a:defRPr sz="2700" b="1">
+                <a:solidFill>
+                  <a:srgbClr val="17202A"/>
+                </a:solidFill>
+                <a:latin typeface="Noto Sans JP"/>
+                <a:ea typeface="Noto Sans JP"/>
+                <a:cs typeface="Noto Sans JP"/>
+              </a:defRPr>
+            </a:defPPr>
+          </a:lstStyle>
           <a:p xmlns:a="http://schemas.openxmlformats.org/drawingml/2006/main">
             <a:pPr algn="l">
               <a:defRPr sz="2700" b="1">
@@ -8821,10 +10644,10 @@
       </p:sp>
       <p:sp>
         <p:nvSpPr>
-          <p:cNvPr id="8" name="message">
-            <a:extLst xmlns:a="http://schemas.openxmlformats.org/drawingml/2006/main">
-              <a:ext uri="{FF2B5EF4-FFF2-40B4-BE49-F238E27FC236}">
-                <a16:creationId xmlns:a16="http://schemas.microsoft.com/office/drawing/2014/main" id="{DAF9EDCF-DF1A-4517-BDC9-45E80485DCD9}"/>
+          <p:cNvPr id="7" name="message">
+            <a:extLst xmlns:a="http://schemas.openxmlformats.org/drawingml/2006/main">
+              <a:ext uri="{FF2B5EF4-FFF2-40B4-BE49-F238E27FC236}">
+                <a16:creationId xmlns:a16="http://schemas.microsoft.com/office/drawing/2014/main" id="{156E49BE-F516-4FC8-99F5-0BD9487EE800}"/>
               </a:ext>
             </a:extLst>
           </p:cNvPr>
@@ -8851,7 +10674,18 @@
           <a:bodyPr xmlns:a="http://schemas.openxmlformats.org/drawingml/2006/main" lIns="0" tIns="0" rIns="0" bIns="0" anchor="ctr">
             <a:noAutofit/>
           </a:bodyPr>
-          <a:lstStyle xmlns:a="http://schemas.openxmlformats.org/drawingml/2006/main"/>
+          <a:lstStyle xmlns:a="http://schemas.openxmlformats.org/drawingml/2006/main">
+            <a:defPPr algn="l">
+              <a:defRPr sz="2300" b="1">
+                <a:solidFill>
+                  <a:srgbClr val="17202A"/>
+                </a:solidFill>
+                <a:latin typeface="Noto Sans JP"/>
+                <a:ea typeface="Noto Sans JP"/>
+                <a:cs typeface="Noto Sans JP"/>
+              </a:defRPr>
+            </a:defPPr>
+          </a:lstStyle>
           <a:p xmlns:a="http://schemas.openxmlformats.org/drawingml/2006/main">
             <a:pPr algn="l">
               <a:defRPr sz="2300" b="1">
@@ -8879,10 +10713,10 @@
       </p:sp>
       <p:sp>
         <p:nvSpPr>
-          <p:cNvPr id="9" name="summary-label-0">
-            <a:extLst xmlns:a="http://schemas.openxmlformats.org/drawingml/2006/main">
-              <a:ext uri="{FF2B5EF4-FFF2-40B4-BE49-F238E27FC236}">
-                <a16:creationId xmlns:a16="http://schemas.microsoft.com/office/drawing/2014/main" id="{3A783194-87A0-4FC0-A82F-82AD6BE591BE}"/>
+          <p:cNvPr id="8" name="summary-label-0">
+            <a:extLst xmlns:a="http://schemas.openxmlformats.org/drawingml/2006/main">
+              <a:ext uri="{FF2B5EF4-FFF2-40B4-BE49-F238E27FC236}">
+                <a16:creationId xmlns:a16="http://schemas.microsoft.com/office/drawing/2014/main" id="{D7E10258-1150-4642-9C4A-340D04BC4AAE}"/>
               </a:ext>
             </a:extLst>
           </p:cNvPr>
@@ -8909,7 +10743,18 @@
           <a:bodyPr xmlns:a="http://schemas.openxmlformats.org/drawingml/2006/main" lIns="0" tIns="0" rIns="0" bIns="0" anchor="ctr">
             <a:noAutofit/>
           </a:bodyPr>
-          <a:lstStyle xmlns:a="http://schemas.openxmlformats.org/drawingml/2006/main"/>
+          <a:lstStyle xmlns:a="http://schemas.openxmlformats.org/drawingml/2006/main">
+            <a:defPPr algn="l">
+              <a:defRPr sz="1800" b="1">
+                <a:solidFill>
+                  <a:srgbClr val="38761D"/>
+                </a:solidFill>
+                <a:latin typeface="Noto Sans JP"/>
+                <a:ea typeface="Noto Sans JP"/>
+                <a:cs typeface="Noto Sans JP"/>
+              </a:defRPr>
+            </a:defPPr>
+          </a:lstStyle>
           <a:p xmlns:a="http://schemas.openxmlformats.org/drawingml/2006/main">
             <a:pPr algn="l">
               <a:defRPr sz="1800" b="1">
@@ -8937,10 +10782,10 @@
       </p:sp>
       <p:sp>
         <p:nvSpPr>
-          <p:cNvPr id="10" name="summary-body-0">
-            <a:extLst xmlns:a="http://schemas.openxmlformats.org/drawingml/2006/main">
-              <a:ext uri="{FF2B5EF4-FFF2-40B4-BE49-F238E27FC236}">
-                <a16:creationId xmlns:a16="http://schemas.microsoft.com/office/drawing/2014/main" id="{D082D373-8D65-4ADA-A908-7707102AA784}"/>
+          <p:cNvPr id="9" name="summary-body-0">
+            <a:extLst xmlns:a="http://schemas.openxmlformats.org/drawingml/2006/main">
+              <a:ext uri="{FF2B5EF4-FFF2-40B4-BE49-F238E27FC236}">
+                <a16:creationId xmlns:a16="http://schemas.microsoft.com/office/drawing/2014/main" id="{1EC0BEDD-929F-4318-9548-FCB0EFDD5AF5}"/>
               </a:ext>
             </a:extLst>
           </p:cNvPr>
@@ -8967,7 +10812,18 @@
           <a:bodyPr xmlns:a="http://schemas.openxmlformats.org/drawingml/2006/main" lIns="0" tIns="0" rIns="0" bIns="0" anchor="ctr">
             <a:noAutofit/>
           </a:bodyPr>
-          <a:lstStyle xmlns:a="http://schemas.openxmlformats.org/drawingml/2006/main"/>
+          <a:lstStyle xmlns:a="http://schemas.openxmlformats.org/drawingml/2006/main">
+            <a:defPPr algn="l">
+              <a:defRPr sz="1800" b="0">
+                <a:solidFill>
+                  <a:srgbClr val="17202A"/>
+                </a:solidFill>
+                <a:latin typeface="Noto Sans JP"/>
+                <a:ea typeface="Noto Sans JP"/>
+                <a:cs typeface="Noto Sans JP"/>
+              </a:defRPr>
+            </a:defPPr>
+          </a:lstStyle>
           <a:p xmlns:a="http://schemas.openxmlformats.org/drawingml/2006/main">
             <a:pPr algn="l">
               <a:defRPr sz="1800" b="0">
@@ -8995,10 +10851,10 @@
       </p:sp>
       <p:sp>
         <p:nvSpPr>
-          <p:cNvPr id="11" name="summary-rule-0">
-            <a:extLst xmlns:a="http://schemas.openxmlformats.org/drawingml/2006/main">
-              <a:ext uri="{FF2B5EF4-FFF2-40B4-BE49-F238E27FC236}">
-                <a16:creationId xmlns:a16="http://schemas.microsoft.com/office/drawing/2014/main" id="{6BE74239-CB43-4247-902C-9C431DA96CDA}"/>
+          <p:cNvPr id="10" name="summary-rule-0">
+            <a:extLst xmlns:a="http://schemas.openxmlformats.org/drawingml/2006/main">
+              <a:ext uri="{FF2B5EF4-FFF2-40B4-BE49-F238E27FC236}">
+                <a16:creationId xmlns:a16="http://schemas.microsoft.com/office/drawing/2014/main" id="{B0831934-FBAD-4A70-A003-9D9713F078EF}"/>
               </a:ext>
             </a:extLst>
           </p:cNvPr>
@@ -9026,10 +10882,10 @@
       </p:sp>
       <p:sp>
         <p:nvSpPr>
-          <p:cNvPr id="12" name="summary-label-1">
-            <a:extLst xmlns:a="http://schemas.openxmlformats.org/drawingml/2006/main">
-              <a:ext uri="{FF2B5EF4-FFF2-40B4-BE49-F238E27FC236}">
-                <a16:creationId xmlns:a16="http://schemas.microsoft.com/office/drawing/2014/main" id="{54CBECBF-F31A-4FAE-926B-C9BB96C62518}"/>
+          <p:cNvPr id="11" name="summary-label-1">
+            <a:extLst xmlns:a="http://schemas.openxmlformats.org/drawingml/2006/main">
+              <a:ext uri="{FF2B5EF4-FFF2-40B4-BE49-F238E27FC236}">
+                <a16:creationId xmlns:a16="http://schemas.microsoft.com/office/drawing/2014/main" id="{2C955D26-BFE4-4152-B4A5-B40B75D942B5}"/>
               </a:ext>
             </a:extLst>
           </p:cNvPr>
@@ -9056,7 +10912,18 @@
           <a:bodyPr xmlns:a="http://schemas.openxmlformats.org/drawingml/2006/main" lIns="0" tIns="0" rIns="0" bIns="0" anchor="ctr">
             <a:noAutofit/>
           </a:bodyPr>
-          <a:lstStyle xmlns:a="http://schemas.openxmlformats.org/drawingml/2006/main"/>
+          <a:lstStyle xmlns:a="http://schemas.openxmlformats.org/drawingml/2006/main">
+            <a:defPPr algn="l">
+              <a:defRPr sz="1800" b="1">
+                <a:solidFill>
+                  <a:srgbClr val="38761D"/>
+                </a:solidFill>
+                <a:latin typeface="Noto Sans JP"/>
+                <a:ea typeface="Noto Sans JP"/>
+                <a:cs typeface="Noto Sans JP"/>
+              </a:defRPr>
+            </a:defPPr>
+          </a:lstStyle>
           <a:p xmlns:a="http://schemas.openxmlformats.org/drawingml/2006/main">
             <a:pPr algn="l">
               <a:defRPr sz="1800" b="1">
@@ -9084,10 +10951,10 @@
       </p:sp>
       <p:sp>
         <p:nvSpPr>
-          <p:cNvPr id="13" name="summary-body-1">
-            <a:extLst xmlns:a="http://schemas.openxmlformats.org/drawingml/2006/main">
-              <a:ext uri="{FF2B5EF4-FFF2-40B4-BE49-F238E27FC236}">
-                <a16:creationId xmlns:a16="http://schemas.microsoft.com/office/drawing/2014/main" id="{CC1DDDC9-A17A-4665-AC31-E8CF28393BF7}"/>
+          <p:cNvPr id="12" name="summary-body-1">
+            <a:extLst xmlns:a="http://schemas.openxmlformats.org/drawingml/2006/main">
+              <a:ext uri="{FF2B5EF4-FFF2-40B4-BE49-F238E27FC236}">
+                <a16:creationId xmlns:a16="http://schemas.microsoft.com/office/drawing/2014/main" id="{B1809FB8-4489-4645-A7DA-0F7099B84233}"/>
               </a:ext>
             </a:extLst>
           </p:cNvPr>
@@ -9114,7 +10981,18 @@
           <a:bodyPr xmlns:a="http://schemas.openxmlformats.org/drawingml/2006/main" lIns="0" tIns="0" rIns="0" bIns="0" anchor="ctr">
             <a:noAutofit/>
           </a:bodyPr>
-          <a:lstStyle xmlns:a="http://schemas.openxmlformats.org/drawingml/2006/main"/>
+          <a:lstStyle xmlns:a="http://schemas.openxmlformats.org/drawingml/2006/main">
+            <a:defPPr algn="l">
+              <a:defRPr sz="1800" b="0">
+                <a:solidFill>
+                  <a:srgbClr val="17202A"/>
+                </a:solidFill>
+                <a:latin typeface="Noto Sans JP"/>
+                <a:ea typeface="Noto Sans JP"/>
+                <a:cs typeface="Noto Sans JP"/>
+              </a:defRPr>
+            </a:defPPr>
+          </a:lstStyle>
           <a:p xmlns:a="http://schemas.openxmlformats.org/drawingml/2006/main">
             <a:pPr algn="l">
               <a:defRPr sz="1800" b="0">
@@ -9142,10 +11020,10 @@
       </p:sp>
       <p:sp>
         <p:nvSpPr>
-          <p:cNvPr id="14" name="summary-rule-1">
-            <a:extLst xmlns:a="http://schemas.openxmlformats.org/drawingml/2006/main">
-              <a:ext uri="{FF2B5EF4-FFF2-40B4-BE49-F238E27FC236}">
-                <a16:creationId xmlns:a16="http://schemas.microsoft.com/office/drawing/2014/main" id="{9481BB39-1D3C-449E-B443-2ABFE9508CDC}"/>
+          <p:cNvPr id="13" name="summary-rule-1">
+            <a:extLst xmlns:a="http://schemas.openxmlformats.org/drawingml/2006/main">
+              <a:ext uri="{FF2B5EF4-FFF2-40B4-BE49-F238E27FC236}">
+                <a16:creationId xmlns:a16="http://schemas.microsoft.com/office/drawing/2014/main" id="{DE7923E0-134D-4288-A2E7-19814D0534CE}"/>
               </a:ext>
             </a:extLst>
           </p:cNvPr>
@@ -9173,10 +11051,10 @@
       </p:sp>
       <p:sp>
         <p:nvSpPr>
-          <p:cNvPr id="15" name="summary-label-2">
-            <a:extLst xmlns:a="http://schemas.openxmlformats.org/drawingml/2006/main">
-              <a:ext uri="{FF2B5EF4-FFF2-40B4-BE49-F238E27FC236}">
-                <a16:creationId xmlns:a16="http://schemas.microsoft.com/office/drawing/2014/main" id="{BB836B7C-AE0C-4891-B2A9-72FFB4D89629}"/>
+          <p:cNvPr id="14" name="summary-label-2">
+            <a:extLst xmlns:a="http://schemas.openxmlformats.org/drawingml/2006/main">
+              <a:ext uri="{FF2B5EF4-FFF2-40B4-BE49-F238E27FC236}">
+                <a16:creationId xmlns:a16="http://schemas.microsoft.com/office/drawing/2014/main" id="{4958BFAB-94F4-4271-8198-6A8A9E73E0D8}"/>
               </a:ext>
             </a:extLst>
           </p:cNvPr>
@@ -9203,7 +11081,18 @@
           <a:bodyPr xmlns:a="http://schemas.openxmlformats.org/drawingml/2006/main" lIns="0" tIns="0" rIns="0" bIns="0" anchor="ctr">
             <a:noAutofit/>
           </a:bodyPr>
-          <a:lstStyle xmlns:a="http://schemas.openxmlformats.org/drawingml/2006/main"/>
+          <a:lstStyle xmlns:a="http://schemas.openxmlformats.org/drawingml/2006/main">
+            <a:defPPr algn="l">
+              <a:defRPr sz="1800" b="1">
+                <a:solidFill>
+                  <a:srgbClr val="38761D"/>
+                </a:solidFill>
+                <a:latin typeface="Noto Sans JP"/>
+                <a:ea typeface="Noto Sans JP"/>
+                <a:cs typeface="Noto Sans JP"/>
+              </a:defRPr>
+            </a:defPPr>
+          </a:lstStyle>
           <a:p xmlns:a="http://schemas.openxmlformats.org/drawingml/2006/main">
             <a:pPr algn="l">
               <a:defRPr sz="1800" b="1">
@@ -9231,10 +11120,10 @@
       </p:sp>
       <p:sp>
         <p:nvSpPr>
-          <p:cNvPr id="16" name="summary-body-2">
-            <a:extLst xmlns:a="http://schemas.openxmlformats.org/drawingml/2006/main">
-              <a:ext uri="{FF2B5EF4-FFF2-40B4-BE49-F238E27FC236}">
-                <a16:creationId xmlns:a16="http://schemas.microsoft.com/office/drawing/2014/main" id="{E74643D9-08F2-4A67-B3BE-1813AF32B3A0}"/>
+          <p:cNvPr id="15" name="summary-body-2">
+            <a:extLst xmlns:a="http://schemas.openxmlformats.org/drawingml/2006/main">
+              <a:ext uri="{FF2B5EF4-FFF2-40B4-BE49-F238E27FC236}">
+                <a16:creationId xmlns:a16="http://schemas.microsoft.com/office/drawing/2014/main" id="{F1FE9677-1E93-410A-B7D2-23338E323570}"/>
               </a:ext>
             </a:extLst>
           </p:cNvPr>
@@ -9261,7 +11150,18 @@
           <a:bodyPr xmlns:a="http://schemas.openxmlformats.org/drawingml/2006/main" lIns="0" tIns="0" rIns="0" bIns="0" anchor="ctr">
             <a:noAutofit/>
           </a:bodyPr>
-          <a:lstStyle xmlns:a="http://schemas.openxmlformats.org/drawingml/2006/main"/>
+          <a:lstStyle xmlns:a="http://schemas.openxmlformats.org/drawingml/2006/main">
+            <a:defPPr algn="l">
+              <a:defRPr sz="1800" b="0">
+                <a:solidFill>
+                  <a:srgbClr val="17202A"/>
+                </a:solidFill>
+                <a:latin typeface="Noto Sans JP"/>
+                <a:ea typeface="Noto Sans JP"/>
+                <a:cs typeface="Noto Sans JP"/>
+              </a:defRPr>
+            </a:defPPr>
+          </a:lstStyle>
           <a:p xmlns:a="http://schemas.openxmlformats.org/drawingml/2006/main">
             <a:pPr algn="l">
               <a:defRPr sz="1800" b="0">
@@ -9312,10 +11212,10 @@
       </p:sp>
       <p:sp>
         <p:nvSpPr>
-          <p:cNvPr id="17" name="summary-rule-2">
-            <a:extLst xmlns:a="http://schemas.openxmlformats.org/drawingml/2006/main">
-              <a:ext uri="{FF2B5EF4-FFF2-40B4-BE49-F238E27FC236}">
-                <a16:creationId xmlns:a16="http://schemas.microsoft.com/office/drawing/2014/main" id="{1202E8F5-5E94-4D3E-B973-833F484FEE3A}"/>
+          <p:cNvPr id="16" name="summary-rule-2">
+            <a:extLst xmlns:a="http://schemas.openxmlformats.org/drawingml/2006/main">
+              <a:ext uri="{FF2B5EF4-FFF2-40B4-BE49-F238E27FC236}">
+                <a16:creationId xmlns:a16="http://schemas.microsoft.com/office/drawing/2014/main" id="{EA20F1F2-1584-4D76-AF85-BF683D303148}"/>
               </a:ext>
             </a:extLst>
           </p:cNvPr>
@@ -9343,10 +11243,10 @@
       </p:sp>
       <p:sp>
         <p:nvSpPr>
-          <p:cNvPr id="18" name="summary-label-3">
-            <a:extLst xmlns:a="http://schemas.openxmlformats.org/drawingml/2006/main">
-              <a:ext uri="{FF2B5EF4-FFF2-40B4-BE49-F238E27FC236}">
-                <a16:creationId xmlns:a16="http://schemas.microsoft.com/office/drawing/2014/main" id="{0099D4F0-58E4-4ADF-BC80-ABCD2D4E2DF5}"/>
+          <p:cNvPr id="17" name="summary-label-3">
+            <a:extLst xmlns:a="http://schemas.openxmlformats.org/drawingml/2006/main">
+              <a:ext uri="{FF2B5EF4-FFF2-40B4-BE49-F238E27FC236}">
+                <a16:creationId xmlns:a16="http://schemas.microsoft.com/office/drawing/2014/main" id="{1A4D1E30-7782-4E0B-9549-7B0490C1B5B8}"/>
               </a:ext>
             </a:extLst>
           </p:cNvPr>
@@ -9373,7 +11273,18 @@
           <a:bodyPr xmlns:a="http://schemas.openxmlformats.org/drawingml/2006/main" lIns="0" tIns="0" rIns="0" bIns="0" anchor="ctr">
             <a:noAutofit/>
           </a:bodyPr>
-          <a:lstStyle xmlns:a="http://schemas.openxmlformats.org/drawingml/2006/main"/>
+          <a:lstStyle xmlns:a="http://schemas.openxmlformats.org/drawingml/2006/main">
+            <a:defPPr algn="l">
+              <a:defRPr sz="1800" b="1">
+                <a:solidFill>
+                  <a:srgbClr val="38761D"/>
+                </a:solidFill>
+                <a:latin typeface="Noto Sans JP"/>
+                <a:ea typeface="Noto Sans JP"/>
+                <a:cs typeface="Noto Sans JP"/>
+              </a:defRPr>
+            </a:defPPr>
+          </a:lstStyle>
           <a:p xmlns:a="http://schemas.openxmlformats.org/drawingml/2006/main">
             <a:pPr algn="l">
               <a:defRPr sz="1800" b="1">
@@ -9401,10 +11312,10 @@
       </p:sp>
       <p:sp>
         <p:nvSpPr>
-          <p:cNvPr id="19" name="summary-body-3">
-            <a:extLst xmlns:a="http://schemas.openxmlformats.org/drawingml/2006/main">
-              <a:ext uri="{FF2B5EF4-FFF2-40B4-BE49-F238E27FC236}">
-                <a16:creationId xmlns:a16="http://schemas.microsoft.com/office/drawing/2014/main" id="{E9EFB5F9-7A58-4A6A-A28F-390C3BE19584}"/>
+          <p:cNvPr id="18" name="summary-body-3">
+            <a:extLst xmlns:a="http://schemas.openxmlformats.org/drawingml/2006/main">
+              <a:ext uri="{FF2B5EF4-FFF2-40B4-BE49-F238E27FC236}">
+                <a16:creationId xmlns:a16="http://schemas.microsoft.com/office/drawing/2014/main" id="{90B4DBA3-03B9-48BE-9FEF-63AE96D71596}"/>
               </a:ext>
             </a:extLst>
           </p:cNvPr>
@@ -9431,7 +11342,18 @@
           <a:bodyPr xmlns:a="http://schemas.openxmlformats.org/drawingml/2006/main" lIns="0" tIns="0" rIns="0" bIns="0" anchor="ctr">
             <a:noAutofit/>
           </a:bodyPr>
-          <a:lstStyle xmlns:a="http://schemas.openxmlformats.org/drawingml/2006/main"/>
+          <a:lstStyle xmlns:a="http://schemas.openxmlformats.org/drawingml/2006/main">
+            <a:defPPr algn="l">
+              <a:defRPr sz="1800" b="0">
+                <a:solidFill>
+                  <a:srgbClr val="17202A"/>
+                </a:solidFill>
+                <a:latin typeface="Noto Sans JP"/>
+                <a:ea typeface="Noto Sans JP"/>
+                <a:cs typeface="Noto Sans JP"/>
+              </a:defRPr>
+            </a:defPPr>
+          </a:lstStyle>
           <a:p xmlns:a="http://schemas.openxmlformats.org/drawingml/2006/main">
             <a:pPr algn="l">
               <a:defRPr sz="1800" b="0">
@@ -9459,10 +11381,10 @@
       </p:sp>
       <p:sp>
         <p:nvSpPr>
-          <p:cNvPr id="20" name="page-reference">
-            <a:extLst xmlns:a="http://schemas.openxmlformats.org/drawingml/2006/main">
-              <a:ext uri="{FF2B5EF4-FFF2-40B4-BE49-F238E27FC236}">
-                <a16:creationId xmlns:a16="http://schemas.microsoft.com/office/drawing/2014/main" id="{644439A9-F5F2-46F6-BEE2-90666D4B8BD7}"/>
+          <p:cNvPr id="19" name="page-reference">
+            <a:extLst xmlns:a="http://schemas.openxmlformats.org/drawingml/2006/main">
+              <a:ext uri="{FF2B5EF4-FFF2-40B4-BE49-F238E27FC236}">
+                <a16:creationId xmlns:a16="http://schemas.microsoft.com/office/drawing/2014/main" id="{53ED6260-46E8-4127-BECF-147334381B04}"/>
               </a:ext>
             </a:extLst>
           </p:cNvPr>
@@ -9489,7 +11411,18 @@
           <a:bodyPr xmlns:a="http://schemas.openxmlformats.org/drawingml/2006/main" lIns="0" tIns="0" rIns="0" bIns="0" anchor="ctr">
             <a:noAutofit/>
           </a:bodyPr>
-          <a:lstStyle xmlns:a="http://schemas.openxmlformats.org/drawingml/2006/main"/>
+          <a:lstStyle xmlns:a="http://schemas.openxmlformats.org/drawingml/2006/main">
+            <a:defPPr algn="l">
+              <a:defRPr sz="900" b="0">
+                <a:solidFill>
+                  <a:srgbClr val="59636E"/>
+                </a:solidFill>
+                <a:latin typeface="Noto Sans JP"/>
+                <a:ea typeface="Noto Sans JP"/>
+                <a:cs typeface="Noto Sans JP"/>
+              </a:defRPr>
+            </a:defPPr>
+          </a:lstStyle>
           <a:p xmlns:a="http://schemas.openxmlformats.org/drawingml/2006/main">
             <a:pPr algn="l">
               <a:defRPr sz="900" b="0">
@@ -9518,7 +11451,7 @@
     </p:spTree>
     <p:extLst>
       <p:ext uri="{BB962C8B-B14F-4D97-AF65-F5344CB8AC3E}">
-        <p14:creationId xmlns:p14="http://schemas.microsoft.com/office/powerpoint/2010/main" val="1047302278"/>
+        <p14:creationId xmlns:p14="http://schemas.microsoft.com/office/powerpoint/2010/main" val="23849575"/>
       </p:ext>
     </p:extLst>
   </p:cSld>
@@ -9546,10 +11479,10 @@
       </p:grpSpPr>
       <p:sp>
         <p:nvSpPr>
-          <p:cNvPr id="14" name="footer-line">
-            <a:extLst xmlns:a="http://schemas.openxmlformats.org/drawingml/2006/main">
-              <a:ext uri="{FF2B5EF4-FFF2-40B4-BE49-F238E27FC236}">
-                <a16:creationId xmlns:a16="http://schemas.microsoft.com/office/drawing/2014/main" id="{446C2032-655E-4B81-8E32-16311C705F15}"/>
+          <p:cNvPr id="13" name="footer-line">
+            <a:extLst xmlns:a="http://schemas.openxmlformats.org/drawingml/2006/main">
+              <a:ext uri="{FF2B5EF4-FFF2-40B4-BE49-F238E27FC236}">
+                <a16:creationId xmlns:a16="http://schemas.microsoft.com/office/drawing/2014/main" id="{741EAA21-232A-4028-8B8A-171EFB45127B}"/>
               </a:ext>
             </a:extLst>
           </p:cNvPr>
@@ -9577,14 +11510,20 @@
       </p:sp>
       <p:pic>
         <p:nvPicPr>
-          <p:cNvPr id="15" name=""/>
+          <p:cNvPr id="2" name="">
+            <a:extLst xmlns:a="http://schemas.openxmlformats.org/drawingml/2006/main">
+              <a:ext uri="{FF2B5EF4-FFF2-40B4-BE49-F238E27FC236}">
+                <a16:creationId xmlns:a16="http://schemas.microsoft.com/office/drawing/2014/main" id="{6D80A850-88EB-4393-B2D9-B698DD74F6CD}"/>
+              </a:ext>
+            </a:extLst>
+          </p:cNvPr>
           <p:cNvPicPr>
             <a:picLocks xmlns:a="http://schemas.openxmlformats.org/drawingml/2006/main" noChangeAspect="1"/>
           </p:cNvPicPr>
           <p:nvPr/>
         </p:nvPicPr>
         <p:blipFill>
-          <a:blip xmlns:r="http://schemas.openxmlformats.org/officeDocument/2006/relationships" xmlns:a="http://schemas.openxmlformats.org/drawingml/2006/main" r:embed="Rd2f1a43922a24b9f"/>
+          <a:blip xmlns:r="http://schemas.openxmlformats.org/officeDocument/2006/relationships" xmlns:a="http://schemas.openxmlformats.org/drawingml/2006/main" r:embed="R0ce0398cfde94b1a"/>
           <a:stretch xmlns:a="http://schemas.openxmlformats.org/drawingml/2006/main"/>
         </p:blipFill>
         <p:spPr>
@@ -9602,7 +11541,7 @@
           <p:cNvPr id="3" name="page">
             <a:extLst xmlns:a="http://schemas.openxmlformats.org/drawingml/2006/main">
               <a:ext uri="{FF2B5EF4-FFF2-40B4-BE49-F238E27FC236}">
-                <a16:creationId xmlns:a16="http://schemas.microsoft.com/office/drawing/2014/main" id="{69C9E50D-0943-42A2-9B0E-4D4E65936D9E}"/>
+                <a16:creationId xmlns:a16="http://schemas.microsoft.com/office/drawing/2014/main" id="{BE01F001-F542-4974-B653-8891893A4056}"/>
               </a:ext>
             </a:extLst>
           </p:cNvPr>
@@ -9629,7 +11568,18 @@
           <a:bodyPr xmlns:a="http://schemas.openxmlformats.org/drawingml/2006/main" lIns="0" tIns="0" rIns="0" bIns="0" anchor="ctr">
             <a:noAutofit/>
           </a:bodyPr>
-          <a:lstStyle xmlns:a="http://schemas.openxmlformats.org/drawingml/2006/main"/>
+          <a:lstStyle xmlns:a="http://schemas.openxmlformats.org/drawingml/2006/main">
+            <a:defPPr algn="r">
+              <a:defRPr sz="1400" b="0">
+                <a:solidFill>
+                  <a:srgbClr val="17202A"/>
+                </a:solidFill>
+                <a:latin typeface="Arial"/>
+                <a:ea typeface="Arial"/>
+                <a:cs typeface="Arial"/>
+              </a:defRPr>
+            </a:defPPr>
+          </a:lstStyle>
           <a:p xmlns:a="http://schemas.openxmlformats.org/drawingml/2006/main">
             <a:pPr algn="r">
               <a:defRPr sz="1400" b="0">
@@ -9657,22 +11607,22 @@
       </p:sp>
       <p:sp>
         <p:nvSpPr>
-          <p:cNvPr id="4" name="fictional-disclosure">
-            <a:extLst xmlns:a="http://schemas.openxmlformats.org/drawingml/2006/main">
-              <a:ext uri="{FF2B5EF4-FFF2-40B4-BE49-F238E27FC236}">
-                <a16:creationId xmlns:a16="http://schemas.microsoft.com/office/drawing/2014/main" id="{1211F79A-2AC0-493E-A200-9C24B855D393}"/>
-              </a:ext>
-            </a:extLst>
-          </p:cNvPr>
-          <p:cNvSpPr>
-            <a:spLocks xmlns:a="http://schemas.openxmlformats.org/drawingml/2006/main" noGrp="1"/>
-          </p:cNvSpPr>
-          <p:nvPr/>
-        </p:nvSpPr>
-        <p:spPr>
-          <a:xfrm xmlns:a="http://schemas.openxmlformats.org/drawingml/2006/main">
-            <a:off x="1428750" y="4772025"/>
-            <a:ext cx="4762500" cy="266700"/>
+          <p:cNvPr id="4" name="running-chapter-9">
+            <a:extLst xmlns:a="http://schemas.openxmlformats.org/drawingml/2006/main">
+              <a:ext uri="{FF2B5EF4-FFF2-40B4-BE49-F238E27FC236}">
+                <a16:creationId xmlns:a16="http://schemas.microsoft.com/office/drawing/2014/main" id="{BC6A7AA1-5A10-4C92-A627-C3917DA0124D}"/>
+              </a:ext>
+            </a:extLst>
+          </p:cNvPr>
+          <p:cNvSpPr>
+            <a:spLocks xmlns:a="http://schemas.openxmlformats.org/drawingml/2006/main" noGrp="1"/>
+          </p:cNvSpPr>
+          <p:nvPr/>
+        </p:nvSpPr>
+        <p:spPr>
+          <a:xfrm xmlns:a="http://schemas.openxmlformats.org/drawingml/2006/main">
+            <a:off x="457200" y="109728"/>
+            <a:ext cx="2560320" cy="304800"/>
           </a:xfrm>
           <a:prstGeom xmlns:a="http://schemas.openxmlformats.org/drawingml/2006/main" prst="rect">
             <a:avLst/>
@@ -9687,65 +11637,18 @@
           <a:bodyPr xmlns:a="http://schemas.openxmlformats.org/drawingml/2006/main" lIns="0" tIns="0" rIns="0" bIns="0" anchor="ctr">
             <a:noAutofit/>
           </a:bodyPr>
-          <a:lstStyle xmlns:a="http://schemas.openxmlformats.org/drawingml/2006/main"/>
-          <a:p xmlns:a="http://schemas.openxmlformats.org/drawingml/2006/main">
-            <a:pPr algn="l">
-              <a:defRPr sz="1050" b="0">
-                <a:solidFill>
-                  <a:srgbClr val="59636E"/>
-                </a:solidFill>
-                <a:latin typeface="Noto Sans JP"/>
-                <a:ea typeface="Noto Sans JP"/>
-                <a:cs typeface="Noto Sans JP"/>
-              </a:defRPr>
-            </a:pPr>
-            <a:r>
-              <a:rPr sz="1050" b="0">
-                <a:solidFill>
-                  <a:srgbClr val="59636E"/>
-                </a:solidFill>
-                <a:latin typeface="Noto Sans JP"/>
-                <a:ea typeface="Noto Sans JP"/>
-                <a:cs typeface="Noto Sans JP"/>
-              </a:rPr>
-              <a:t>架空作例・合成データ</a:t>
-            </a:r>
-          </a:p>
-        </p:txBody>
-      </p:sp>
-      <p:sp>
-        <p:nvSpPr>
-          <p:cNvPr id="5" name="running-chapter-9">
-            <a:extLst xmlns:a="http://schemas.openxmlformats.org/drawingml/2006/main">
-              <a:ext uri="{FF2B5EF4-FFF2-40B4-BE49-F238E27FC236}">
-                <a16:creationId xmlns:a16="http://schemas.microsoft.com/office/drawing/2014/main" id="{D72064A2-18B3-42DD-8470-66A55F779381}"/>
-              </a:ext>
-            </a:extLst>
-          </p:cNvPr>
-          <p:cNvSpPr>
-            <a:spLocks xmlns:a="http://schemas.openxmlformats.org/drawingml/2006/main" noGrp="1"/>
-          </p:cNvSpPr>
-          <p:nvPr/>
-        </p:nvSpPr>
-        <p:spPr>
-          <a:xfrm xmlns:a="http://schemas.openxmlformats.org/drawingml/2006/main">
-            <a:off x="457200" y="109728"/>
-            <a:ext cx="2560320" cy="304800"/>
-          </a:xfrm>
-          <a:prstGeom xmlns:a="http://schemas.openxmlformats.org/drawingml/2006/main" prst="rect">
-            <a:avLst/>
-          </a:prstGeom>
-          <a:noFill xmlns:a="http://schemas.openxmlformats.org/drawingml/2006/main"/>
-          <a:ln xmlns:a="http://schemas.openxmlformats.org/drawingml/2006/main" w="0">
-            <a:noFill/>
-            <a:prstDash val="solid"/>
-          </a:ln>
-        </p:spPr>
-        <p:txBody>
-          <a:bodyPr xmlns:a="http://schemas.openxmlformats.org/drawingml/2006/main" lIns="0" tIns="0" rIns="0" bIns="0" anchor="ctr">
-            <a:noAutofit/>
-          </a:bodyPr>
-          <a:lstStyle xmlns:a="http://schemas.openxmlformats.org/drawingml/2006/main"/>
+          <a:lstStyle xmlns:a="http://schemas.openxmlformats.org/drawingml/2006/main">
+            <a:defPPr algn="l">
+              <a:defRPr sz="1200" b="0">
+                <a:solidFill>
+                  <a:srgbClr val="38761D"/>
+                </a:solidFill>
+                <a:latin typeface="Noto Sans JP"/>
+                <a:ea typeface="Noto Sans JP"/>
+                <a:cs typeface="Noto Sans JP"/>
+              </a:defRPr>
+            </a:defPPr>
+          </a:lstStyle>
           <a:p xmlns:a="http://schemas.openxmlformats.org/drawingml/2006/main">
             <a:pPr algn="l">
               <a:defRPr sz="1200" b="0">
@@ -9773,10 +11676,10 @@
       </p:sp>
       <p:sp>
         <p:nvSpPr>
-          <p:cNvPr id="6" name="running-title-9">
-            <a:extLst xmlns:a="http://schemas.openxmlformats.org/drawingml/2006/main">
-              <a:ext uri="{FF2B5EF4-FFF2-40B4-BE49-F238E27FC236}">
-                <a16:creationId xmlns:a16="http://schemas.microsoft.com/office/drawing/2014/main" id="{4427A6EA-2D8F-4D31-90F3-286B22A79562}"/>
+          <p:cNvPr id="5" name="running-title-9">
+            <a:extLst xmlns:a="http://schemas.openxmlformats.org/drawingml/2006/main">
+              <a:ext uri="{FF2B5EF4-FFF2-40B4-BE49-F238E27FC236}">
+                <a16:creationId xmlns:a16="http://schemas.microsoft.com/office/drawing/2014/main" id="{23ED6A2E-A32A-40A7-AFFD-B77123C74557}"/>
               </a:ext>
             </a:extLst>
           </p:cNvPr>
@@ -9803,7 +11706,18 @@
           <a:bodyPr xmlns:a="http://schemas.openxmlformats.org/drawingml/2006/main" lIns="0" tIns="0" rIns="0" bIns="0" anchor="ctr">
             <a:noAutofit/>
           </a:bodyPr>
-          <a:lstStyle xmlns:a="http://schemas.openxmlformats.org/drawingml/2006/main"/>
+          <a:lstStyle xmlns:a="http://schemas.openxmlformats.org/drawingml/2006/main">
+            <a:defPPr algn="r">
+              <a:defRPr sz="1200" b="0">
+                <a:solidFill>
+                  <a:srgbClr val="38761D"/>
+                </a:solidFill>
+                <a:latin typeface="Noto Sans JP"/>
+                <a:ea typeface="Noto Sans JP"/>
+                <a:cs typeface="Noto Sans JP"/>
+              </a:defRPr>
+            </a:defPPr>
+          </a:lstStyle>
           <a:p xmlns:a="http://schemas.openxmlformats.org/drawingml/2006/main">
             <a:pPr algn="r">
               <a:defRPr sz="1200" b="0">
@@ -9831,10 +11745,10 @@
       </p:sp>
       <p:sp>
         <p:nvSpPr>
-          <p:cNvPr id="7" name="final-title">
-            <a:extLst xmlns:a="http://schemas.openxmlformats.org/drawingml/2006/main">
-              <a:ext uri="{FF2B5EF4-FFF2-40B4-BE49-F238E27FC236}">
-                <a16:creationId xmlns:a16="http://schemas.microsoft.com/office/drawing/2014/main" id="{0C177179-68C8-4EAA-A5F1-2340E3693D51}"/>
+          <p:cNvPr id="6" name="final-title">
+            <a:extLst xmlns:a="http://schemas.openxmlformats.org/drawingml/2006/main">
+              <a:ext uri="{FF2B5EF4-FFF2-40B4-BE49-F238E27FC236}">
+                <a16:creationId xmlns:a16="http://schemas.microsoft.com/office/drawing/2014/main" id="{8C61E80B-6402-4257-BDF4-C080A9A499E0}"/>
               </a:ext>
             </a:extLst>
           </p:cNvPr>
@@ -9861,7 +11775,18 @@
           <a:bodyPr xmlns:a="http://schemas.openxmlformats.org/drawingml/2006/main" lIns="0" tIns="0" rIns="0" bIns="0" anchor="ctr">
             <a:noAutofit/>
           </a:bodyPr>
-          <a:lstStyle xmlns:a="http://schemas.openxmlformats.org/drawingml/2006/main"/>
+          <a:lstStyle xmlns:a="http://schemas.openxmlformats.org/drawingml/2006/main">
+            <a:defPPr algn="l">
+              <a:defRPr sz="2600" b="1">
+                <a:solidFill>
+                  <a:srgbClr val="17202A"/>
+                </a:solidFill>
+                <a:latin typeface="Noto Sans JP"/>
+                <a:ea typeface="Noto Sans JP"/>
+                <a:cs typeface="Noto Sans JP"/>
+              </a:defRPr>
+            </a:defPPr>
+          </a:lstStyle>
           <a:p xmlns:a="http://schemas.openxmlformats.org/drawingml/2006/main">
             <a:pPr algn="l">
               <a:defRPr sz="2600" b="1">
@@ -9912,10 +11837,10 @@
       </p:sp>
       <p:sp>
         <p:nvSpPr>
-          <p:cNvPr id="8" name="final-author">
-            <a:extLst xmlns:a="http://schemas.openxmlformats.org/drawingml/2006/main">
-              <a:ext uri="{FF2B5EF4-FFF2-40B4-BE49-F238E27FC236}">
-                <a16:creationId xmlns:a16="http://schemas.microsoft.com/office/drawing/2014/main" id="{B89FE76A-4F87-4F93-A8EF-9086F8D5E95A}"/>
+          <p:cNvPr id="7" name="final-author">
+            <a:extLst xmlns:a="http://schemas.openxmlformats.org/drawingml/2006/main">
+              <a:ext uri="{FF2B5EF4-FFF2-40B4-BE49-F238E27FC236}">
+                <a16:creationId xmlns:a16="http://schemas.microsoft.com/office/drawing/2014/main" id="{AF3A947E-09B1-4121-93F3-3E1D05551627}"/>
               </a:ext>
             </a:extLst>
           </p:cNvPr>
@@ -9942,7 +11867,18 @@
           <a:bodyPr xmlns:a="http://schemas.openxmlformats.org/drawingml/2006/main" lIns="0" tIns="0" rIns="0" bIns="0" anchor="ctr">
             <a:noAutofit/>
           </a:bodyPr>
-          <a:lstStyle xmlns:a="http://schemas.openxmlformats.org/drawingml/2006/main"/>
+          <a:lstStyle xmlns:a="http://schemas.openxmlformats.org/drawingml/2006/main">
+            <a:defPPr algn="l">
+              <a:defRPr sz="1800" b="0">
+                <a:solidFill>
+                  <a:srgbClr val="17202A"/>
+                </a:solidFill>
+                <a:latin typeface="Noto Sans JP"/>
+                <a:ea typeface="Noto Sans JP"/>
+                <a:cs typeface="Noto Sans JP"/>
+              </a:defRPr>
+            </a:defPPr>
+          </a:lstStyle>
           <a:p xmlns:a="http://schemas.openxmlformats.org/drawingml/2006/main">
             <a:pPr algn="l">
               <a:defRPr sz="1800" b="0">
@@ -9970,10 +11906,10 @@
       </p:sp>
       <p:sp>
         <p:nvSpPr>
-          <p:cNvPr id="9" name="takeaway-0">
-            <a:extLst xmlns:a="http://schemas.openxmlformats.org/drawingml/2006/main">
-              <a:ext uri="{FF2B5EF4-FFF2-40B4-BE49-F238E27FC236}">
-                <a16:creationId xmlns:a16="http://schemas.microsoft.com/office/drawing/2014/main" id="{DFAB226A-0318-4F76-8707-CF5DEDF1C23C}"/>
+          <p:cNvPr id="8" name="takeaway-0">
+            <a:extLst xmlns:a="http://schemas.openxmlformats.org/drawingml/2006/main">
+              <a:ext uri="{FF2B5EF4-FFF2-40B4-BE49-F238E27FC236}">
+                <a16:creationId xmlns:a16="http://schemas.microsoft.com/office/drawing/2014/main" id="{51E57B61-3B64-448E-8FD1-6F8108581BB7}"/>
               </a:ext>
             </a:extLst>
           </p:cNvPr>
@@ -10000,7 +11936,18 @@
           <a:bodyPr xmlns:a="http://schemas.openxmlformats.org/drawingml/2006/main" lIns="0" tIns="0" rIns="0" bIns="0" anchor="ctr">
             <a:noAutofit/>
           </a:bodyPr>
-          <a:lstStyle xmlns:a="http://schemas.openxmlformats.org/drawingml/2006/main"/>
+          <a:lstStyle xmlns:a="http://schemas.openxmlformats.org/drawingml/2006/main">
+            <a:defPPr algn="l">
+              <a:defRPr sz="1800" b="0">
+                <a:solidFill>
+                  <a:srgbClr val="17202A"/>
+                </a:solidFill>
+                <a:latin typeface="Noto Sans JP"/>
+                <a:ea typeface="Noto Sans JP"/>
+                <a:cs typeface="Noto Sans JP"/>
+              </a:defRPr>
+            </a:defPPr>
+          </a:lstStyle>
           <a:p xmlns:a="http://schemas.openxmlformats.org/drawingml/2006/main">
             <a:pPr algn="l">
               <a:defRPr sz="1800" b="0">
@@ -10028,10 +11975,10 @@
       </p:sp>
       <p:sp>
         <p:nvSpPr>
-          <p:cNvPr id="10" name="takeaway-1">
-            <a:extLst xmlns:a="http://schemas.openxmlformats.org/drawingml/2006/main">
-              <a:ext uri="{FF2B5EF4-FFF2-40B4-BE49-F238E27FC236}">
-                <a16:creationId xmlns:a16="http://schemas.microsoft.com/office/drawing/2014/main" id="{694536AA-047D-4A00-A483-EAE08592C6DE}"/>
+          <p:cNvPr id="9" name="takeaway-1">
+            <a:extLst xmlns:a="http://schemas.openxmlformats.org/drawingml/2006/main">
+              <a:ext uri="{FF2B5EF4-FFF2-40B4-BE49-F238E27FC236}">
+                <a16:creationId xmlns:a16="http://schemas.microsoft.com/office/drawing/2014/main" id="{14C76300-E351-456E-9389-96710A60F0D4}"/>
               </a:ext>
             </a:extLst>
           </p:cNvPr>
@@ -10058,7 +12005,18 @@
           <a:bodyPr xmlns:a="http://schemas.openxmlformats.org/drawingml/2006/main" lIns="0" tIns="0" rIns="0" bIns="0" anchor="ctr">
             <a:noAutofit/>
           </a:bodyPr>
-          <a:lstStyle xmlns:a="http://schemas.openxmlformats.org/drawingml/2006/main"/>
+          <a:lstStyle xmlns:a="http://schemas.openxmlformats.org/drawingml/2006/main">
+            <a:defPPr algn="l">
+              <a:defRPr sz="1800" b="0">
+                <a:solidFill>
+                  <a:srgbClr val="17202A"/>
+                </a:solidFill>
+                <a:latin typeface="Noto Sans JP"/>
+                <a:ea typeface="Noto Sans JP"/>
+                <a:cs typeface="Noto Sans JP"/>
+              </a:defRPr>
+            </a:defPPr>
+          </a:lstStyle>
           <a:p xmlns:a="http://schemas.openxmlformats.org/drawingml/2006/main">
             <a:pPr algn="l">
               <a:defRPr sz="1800" b="0">
@@ -10086,10 +12044,10 @@
       </p:sp>
       <p:sp>
         <p:nvSpPr>
-          <p:cNvPr id="11" name="takeaway-2">
-            <a:extLst xmlns:a="http://schemas.openxmlformats.org/drawingml/2006/main">
-              <a:ext uri="{FF2B5EF4-FFF2-40B4-BE49-F238E27FC236}">
-                <a16:creationId xmlns:a16="http://schemas.microsoft.com/office/drawing/2014/main" id="{147BB775-D783-478C-8E1C-8840A0271B44}"/>
+          <p:cNvPr id="10" name="takeaway-2">
+            <a:extLst xmlns:a="http://schemas.openxmlformats.org/drawingml/2006/main">
+              <a:ext uri="{FF2B5EF4-FFF2-40B4-BE49-F238E27FC236}">
+                <a16:creationId xmlns:a16="http://schemas.microsoft.com/office/drawing/2014/main" id="{22A928B7-04A0-4C9A-9B03-638FB619C295}"/>
               </a:ext>
             </a:extLst>
           </p:cNvPr>
@@ -10116,7 +12074,18 @@
           <a:bodyPr xmlns:a="http://schemas.openxmlformats.org/drawingml/2006/main" lIns="0" tIns="0" rIns="0" bIns="0" anchor="ctr">
             <a:noAutofit/>
           </a:bodyPr>
-          <a:lstStyle xmlns:a="http://schemas.openxmlformats.org/drawingml/2006/main"/>
+          <a:lstStyle xmlns:a="http://schemas.openxmlformats.org/drawingml/2006/main">
+            <a:defPPr algn="l">
+              <a:defRPr sz="1800" b="0">
+                <a:solidFill>
+                  <a:srgbClr val="17202A"/>
+                </a:solidFill>
+                <a:latin typeface="Noto Sans JP"/>
+                <a:ea typeface="Noto Sans JP"/>
+                <a:cs typeface="Noto Sans JP"/>
+              </a:defRPr>
+            </a:defPPr>
+          </a:lstStyle>
           <a:p xmlns:a="http://schemas.openxmlformats.org/drawingml/2006/main">
             <a:pPr algn="l">
               <a:defRPr sz="1800" b="0">
@@ -10144,10 +12113,10 @@
       </p:sp>
       <p:sp>
         <p:nvSpPr>
-          <p:cNvPr id="12" name="contact">
-            <a:extLst xmlns:a="http://schemas.openxmlformats.org/drawingml/2006/main">
-              <a:ext uri="{FF2B5EF4-FFF2-40B4-BE49-F238E27FC236}">
-                <a16:creationId xmlns:a16="http://schemas.microsoft.com/office/drawing/2014/main" id="{4962575A-14F8-4113-9861-08887EEC412F}"/>
+          <p:cNvPr id="11" name="contact">
+            <a:extLst xmlns:a="http://schemas.openxmlformats.org/drawingml/2006/main">
+              <a:ext uri="{FF2B5EF4-FFF2-40B4-BE49-F238E27FC236}">
+                <a16:creationId xmlns:a16="http://schemas.microsoft.com/office/drawing/2014/main" id="{B43CCF82-B9D0-4CFA-AC3A-E02CFFCA8135}"/>
               </a:ext>
             </a:extLst>
           </p:cNvPr>
@@ -10174,7 +12143,18 @@
           <a:bodyPr xmlns:a="http://schemas.openxmlformats.org/drawingml/2006/main" lIns="0" tIns="0" rIns="0" bIns="0" anchor="ctr">
             <a:noAutofit/>
           </a:bodyPr>
-          <a:lstStyle xmlns:a="http://schemas.openxmlformats.org/drawingml/2006/main"/>
+          <a:lstStyle xmlns:a="http://schemas.openxmlformats.org/drawingml/2006/main">
+            <a:defPPr algn="l">
+              <a:defRPr sz="1800" b="1">
+                <a:solidFill>
+                  <a:srgbClr val="38761D"/>
+                </a:solidFill>
+                <a:latin typeface="Noto Sans JP"/>
+                <a:ea typeface="Noto Sans JP"/>
+                <a:cs typeface="Noto Sans JP"/>
+              </a:defRPr>
+            </a:defPPr>
+          </a:lstStyle>
           <a:p xmlns:a="http://schemas.openxmlformats.org/drawingml/2006/main">
             <a:pPr algn="l">
               <a:defRPr sz="1800" b="1">
@@ -10202,10 +12182,10 @@
       </p:sp>
       <p:sp>
         <p:nvSpPr>
-          <p:cNvPr id="13" name="page-reference">
-            <a:extLst xmlns:a="http://schemas.openxmlformats.org/drawingml/2006/main">
-              <a:ext uri="{FF2B5EF4-FFF2-40B4-BE49-F238E27FC236}">
-                <a16:creationId xmlns:a16="http://schemas.microsoft.com/office/drawing/2014/main" id="{2EF928FA-4F5D-4DF9-B446-5C31FD639A7F}"/>
+          <p:cNvPr id="12" name="page-reference">
+            <a:extLst xmlns:a="http://schemas.openxmlformats.org/drawingml/2006/main">
+              <a:ext uri="{FF2B5EF4-FFF2-40B4-BE49-F238E27FC236}">
+                <a16:creationId xmlns:a16="http://schemas.microsoft.com/office/drawing/2014/main" id="{BBBF022B-A2E3-48D9-8559-D684B131BE95}"/>
               </a:ext>
             </a:extLst>
           </p:cNvPr>
@@ -10232,7 +12212,18 @@
           <a:bodyPr xmlns:a="http://schemas.openxmlformats.org/drawingml/2006/main" lIns="0" tIns="0" rIns="0" bIns="0" anchor="ctr">
             <a:noAutofit/>
           </a:bodyPr>
-          <a:lstStyle xmlns:a="http://schemas.openxmlformats.org/drawingml/2006/main"/>
+          <a:lstStyle xmlns:a="http://schemas.openxmlformats.org/drawingml/2006/main">
+            <a:defPPr algn="l">
+              <a:defRPr sz="900" b="0">
+                <a:solidFill>
+                  <a:srgbClr val="59636E"/>
+                </a:solidFill>
+                <a:latin typeface="Noto Sans JP"/>
+                <a:ea typeface="Noto Sans JP"/>
+                <a:cs typeface="Noto Sans JP"/>
+              </a:defRPr>
+            </a:defPPr>
+          </a:lstStyle>
           <a:p xmlns:a="http://schemas.openxmlformats.org/drawingml/2006/main">
             <a:pPr algn="l">
               <a:defRPr sz="900" b="0">
@@ -10261,7 +12252,7 @@
     </p:spTree>
     <p:extLst>
       <p:ext uri="{BB962C8B-B14F-4D97-AF65-F5344CB8AC3E}">
-        <p14:creationId xmlns:p14="http://schemas.microsoft.com/office/powerpoint/2010/main" val="699565791"/>
+        <p14:creationId xmlns:p14="http://schemas.microsoft.com/office/powerpoint/2010/main" val="1650403024"/>
       </p:ext>
     </p:extLst>
   </p:cSld>
@@ -10309,16 +12300,16 @@
         <a:srgbClr val="96607D"/>
       </a:folHlink>
     </a:clrScheme>
-    <a:fontScheme name="Office">
+    <a:fontScheme name="">
       <a:majorFont>
-        <a:latin typeface="Calibri Light"/>
-        <a:ea typeface="Calibri Light"/>
-        <a:cs typeface="Calibri Light"/>
+        <a:latin typeface="Aptos"/>
+        <a:ea typeface=""/>
+        <a:cs typeface=""/>
       </a:majorFont>
       <a:minorFont>
-        <a:latin typeface="Calibri"/>
-        <a:ea typeface="Calibri"/>
-        <a:cs typeface="Calibri"/>
+        <a:latin typeface="Aptos"/>
+        <a:ea typeface=""/>
+        <a:cs typeface=""/>
       </a:minorFont>
     </a:fontScheme>
     <a:fmtScheme name="ChatGPT">
